--- a/docs/entreprise/deck/Quantinvo-Samaritaine.pptx
+++ b/docs/entreprise/deck/Quantinvo-Samaritaine.pptx
@@ -19,9 +19,10 @@
     <p:sldId id="267" r:id="rId13"/>
     <p:sldId id="268" r:id="rId14"/>
     <p:sldId id="269" r:id="rId15"/>
+    <p:sldId id="270" r:id="rId16"/>
   </p:sldIdLst>
   <p:notesMasterIdLst>
-    <p:notesMasterId r:id="rId16"/>
+    <p:notesMasterId r:id="rId17"/>
   </p:notesMasterIdLst>
   <p:sldSz cx="12192000" cy="6858000"/>
   <p:notesSz cx="6858000" cy="12192000"/>
@@ -515,7 +516,7 @@
           <a:p>
             <a:r>
               <a:rPr lang="en-US" dirty="0"/>
-              <a:t>Ouvrir sur leur situation, pas sur le produit : le comptage n'est pas leur problème, c'est tout ce qui l'entoure. Le deck suit leur propre document de déroulement.</a:t>
+              <a:t>Ouvrir sur l'idée, pas sur le produit : l'inventaire cesse d'être une opération de l'Inventory Control pour devenir un geste des équipes de vente. Le deck suit leur propre document de déroulement.</a:t>
             </a:r>
             <a:endParaRPr lang="en-US" dirty="0"/>
           </a:p>
@@ -603,7 +604,7 @@
           <a:p>
             <a:r>
               <a:rPr lang="en-US" dirty="0"/>
-              <a:t>Leur document dit « en cours d'élaboration » : la page montre que l'outil le rend possible sans rien construire. Un aléatoire qui demande une journée de préparation n'est plus aléatoire — c'est l'argument du troisième alinéa.</a:t>
+              <a:t>C'est la page de l'Inventory Control : son travail commence ici, sur un fichier déjà croisé avec le théorique. La validation PSM / AGM garde le même circuit qu'aujourd'hui, sur un fichier mieux rangé.</a:t>
             </a:r>
             <a:endParaRPr lang="en-US" dirty="0"/>
           </a:p>
@@ -691,7 +692,7 @@
           <a:p>
             <a:r>
               <a:rPr lang="en-US" dirty="0"/>
-              <a:t>Ne jamais citer de prix Zebra — on n'en parle pas, même en réponse à une question. Rester factuel sur le déroulement : tout ce que la colonne de gauche décrit vient de leur propre document.</a:t>
+              <a:t>Leur document dit « en cours d'élaboration » : la page montre que l'outil le rend possible sans rien construire. La répartition est la même que pour le tournant : vous choisissez quoi et quand, le floor compte, vous contrôlez l'écart.</a:t>
             </a:r>
             <a:endParaRPr lang="en-US" dirty="0"/>
           </a:p>
@@ -779,7 +780,7 @@
           <a:p>
             <a:r>
               <a:rPr lang="en-US" dirty="0"/>
-              <a:t>Cette page désarme les objections. Ne pas la sauter : un prospect qui découvre une limite après coup perd confiance, un prospect averti la comprend. Un dossier technique séparé existe pour la DSI — le proposer ici.</a:t>
+              <a:t>Ne jamais citer de prix Zebra — on n'en parle pas, même en réponse à une question. L'argument décisif ici : un outil expert suppose un service expert pour le servir ; c'est incompatible avec le transfert au floor.</a:t>
             </a:r>
             <a:endParaRPr lang="en-US" dirty="0"/>
           </a:p>
@@ -867,7 +868,7 @@
           <a:p>
             <a:r>
               <a:rPr lang="en-US" dirty="0"/>
-              <a:t>Parler en budget d'inventaire annuel, jamais en prix d'application. La grille au volume est dans le deck commercial et se confirme au devis ; ici, l'argument est que le modèle encourage précisément leur stratégie : compter plus souvent.</a:t>
+              <a:t>Cette page désarme les objections. Ne pas la sauter : un prospect qui découvre une limite après coup perd confiance, un prospect averti la comprend. Un dossier technique séparé existe pour la DSI — le proposer ici.</a:t>
             </a:r>
             <a:endParaRPr lang="en-US" dirty="0"/>
           </a:p>
@@ -955,7 +956,7 @@
           <a:p>
             <a:r>
               <a:rPr lang="en-US" dirty="0"/>
-              <a:t>Clore sur l'essai concret, à leur échelle : un rayon, un mardi matin. C'est l'engagement qu'on prend et celui qu'on leur demande.</a:t>
+              <a:t>Parler en budget d'inventaire annuel, jamais en prix d'application. La grille au volume est dans le deck commercial et se confirme au devis ; ici, l'argument est que le modèle encourage précisément le transfert : plus le floor compte, plus la licence est rentabilisée.</a:t>
             </a:r>
             <a:endParaRPr lang="en-US" dirty="0"/>
           </a:p>
@@ -979,6 +980,94 @@
             <a:fld id="{F7021451-1387-4CA6-816F-3879F97B5CBC}" type="slidenum">
               <a:rPr lang="en-US"/>
               <a:t>14</a:t>
+            </a:fld>
+            <a:endParaRPr lang="en-US"/>
+          </a:p>
+        </p:txBody>
+      </p:sp>
+    </p:spTree>
+    <p:extLst>
+      <p:ext uri="{BB962C8B-B14F-4D97-AF65-F5344CB8AC3E}">
+        <p14:creationId xmlns:p14="http://schemas.microsoft.com/office/powerpoint/2010/main" val="1024086991"/>
+      </p:ext>
+    </p:extLst>
+  </p:cSld>
+  <p:clrMapOvr>
+    <a:masterClrMapping/>
+  </p:clrMapOvr>
+</p:notes>
+</file>
+
+<file path=ppt/notesSlides/notesSlide15.xml><?xml version="1.0" encoding="utf-8"?>
+<p:notes xmlns:a="http://schemas.openxmlformats.org/drawingml/2006/main" xmlns:r="http://schemas.openxmlformats.org/officeDocument/2006/relationships" xmlns:p="http://schemas.openxmlformats.org/presentationml/2006/main">
+  <p:cSld>
+    <p:spTree>
+      <p:nvGrpSpPr>
+        <p:cNvPr id="1" name=""/>
+        <p:cNvGrpSpPr/>
+        <p:nvPr/>
+      </p:nvGrpSpPr>
+      <p:grpSpPr>
+        <a:xfrm>
+          <a:off x="0" y="0"/>
+          <a:ext cx="0" cy="0"/>
+          <a:chOff x="0" y="0"/>
+          <a:chExt cx="0" cy="0"/>
+        </a:xfrm>
+      </p:grpSpPr>
+      <p:sp>
+        <p:nvSpPr>
+          <p:cNvPr id="2" name="Slide Image Placeholder 1"/>
+          <p:cNvSpPr>
+            <a:spLocks noGrp="1" noRot="1" noChangeAspect="1"/>
+          </p:cNvSpPr>
+          <p:nvPr>
+            <p:ph type="sldImg"/>
+          </p:nvPr>
+        </p:nvSpPr>
+        <p:spPr/>
+      </p:sp>
+      <p:sp>
+        <p:nvSpPr>
+          <p:cNvPr id="3" name="Notes Placeholder 2"/>
+          <p:cNvSpPr>
+            <a:spLocks noGrp="1"/>
+          </p:cNvSpPr>
+          <p:nvPr>
+            <p:ph type="body" idx="1"/>
+          </p:nvPr>
+        </p:nvSpPr>
+        <p:spPr/>
+        <p:txBody>
+          <a:bodyPr/>
+          <a:lstStyle/>
+          <a:p>
+            <a:r>
+              <a:rPr lang="en-US" dirty="0"/>
+              <a:t>Clore sur l'essai qui prouve l'idée : ce n'est pas nous qui faisons la démonstration, c'est un chef d'équipe et ses vendeurs. Si eux y arrivent un mardi matin, le transfert est démontré.</a:t>
+            </a:r>
+            <a:endParaRPr lang="en-US" dirty="0"/>
+          </a:p>
+        </p:txBody>
+      </p:sp>
+      <p:sp>
+        <p:nvSpPr>
+          <p:cNvPr id="4" name="Slide Number Placeholder 3"/>
+          <p:cNvSpPr>
+            <a:spLocks noGrp="1"/>
+          </p:cNvSpPr>
+          <p:nvPr>
+            <p:ph type="sldNum" sz="quarter" idx="10"/>
+          </p:nvPr>
+        </p:nvSpPr>
+        <p:spPr/>
+        <p:txBody>
+          <a:bodyPr/>
+          <a:lstStyle/>
+          <a:p>
+            <a:fld id="{F7021451-1387-4CA6-816F-3879F97B5CBC}" type="slidenum">
+              <a:rPr lang="en-US"/>
+              <a:t>15</a:t>
             </a:fld>
             <a:endParaRPr lang="en-US"/>
           </a:p>
@@ -1043,7 +1132,7 @@
           <a:p>
             <a:r>
               <a:rPr lang="en-US" dirty="0"/>
-              <a:t>Ne rien commenter : lire, et laisser la page faire son effet. C'est leur document, ils s'y reconnaissent. La question qui vient toute seule : qui fait tout ça ?</a:t>
+              <a:t>Ne rien commenter : lire, et laisser la page faire son effet. C'est leur document, ils s'y reconnaissent. La question qui vient toute seule : pourquoi tout cela passe-t-il par l'Inventory Control ?</a:t>
             </a:r>
             <a:endParaRPr lang="en-US" dirty="0"/>
           </a:p>
@@ -1131,7 +1220,7 @@
           <a:p>
             <a:r>
               <a:rPr lang="en-US" dirty="0"/>
-              <a:t>Le point clé est dans l'encadré : leur stratégie tournant + aléatoire multiplie les comptages, donc multiplie la charge fixe. C'est l'argument économique de tout le deck.</a:t>
+              <a:t>Le pivot du deck est dans l'encadré : on ne propose pas d'alléger la charge de l'Inventory Control, on propose de la transférer au floor. Chaque responsable maîtrise son stock — c'est l'objectif écrit dans leur propre projet d'inventaire aléatoire.</a:t>
             </a:r>
             <a:endParaRPr lang="en-US" dirty="0"/>
           </a:p>
@@ -1219,7 +1308,7 @@
           <a:p>
             <a:r>
               <a:rPr lang="en-US" dirty="0"/>
-              <a:t>Dire d'où on parle : le rayon, la réserve, la nuit d'inventaire. C'est ce qui distingue d'un éditeur généraliste — et ce qui explique que le déroulement de la page 2 nous soit familier.</a:t>
+              <a:t>Dire d'où on parle : le rayon, la réserve, la nuit d'inventaire. La simplicité n'est pas un confort, c'est la condition du transfert au floor — un outil qui demande un expert recrée l'Inventory Control.</a:t>
             </a:r>
             <a:endParaRPr lang="en-US" dirty="0"/>
           </a:p>
@@ -1307,7 +1396,7 @@
           <a:p>
             <a:r>
               <a:rPr lang="en-US" dirty="0"/>
-              <a:t>Page miroir de la page 2, même structure veille / matin / pendant / après. Insister sur « la date et le périmètre sont dans l'inventaire, pas dans l'appareil » : c'est toute la vérification 101/902 qui disparaît.</a:t>
+              <a:t>Les écrans sont de vraies captures de l'application, celles du guide de prise en main. Et l'Inventory Control ? Il n'a pas d'écran sur cette page — c'est le message. Le sien arrive plus loin : le rapport.</a:t>
             </a:r>
             <a:endParaRPr lang="en-US" dirty="0"/>
           </a:p>
@@ -1395,7 +1484,7 @@
           <a:p>
             <a:r>
               <a:rPr lang="en-US" dirty="0"/>
-              <a:t>Lire deux ou trois lignes, pas les cinq. La dernière est la promesse du deck : l'Inventory Control passe d'opérateur de chaque inventaire à lecteur de leurs résultats.</a:t>
+              <a:t>Page miroir de la page 2, même structure veille / matin / pendant / après — mais le sujet des phrases a changé : c'est le chef d'équipe qui agit. Insister sur la dernière ligne.</a:t>
             </a:r>
             <a:endParaRPr lang="en-US" dirty="0"/>
           </a:p>
@@ -1483,7 +1572,7 @@
           <a:p>
             <a:r>
               <a:rPr lang="en-US" dirty="0"/>
-              <a:t>Montrer, ne pas commenter ligne à ligne. Le suivi agrégé (personne n'est fliqué nominativement en direct) parle aux RH et au CSE d'une maison de cette taille : le dire ici évite l'objection plus tard.</a:t>
+              <a:t>Lire deux ou trois lignes, pas les cinq. Chaque ligne de gauche est portée par l'Inventory Control ; chaque ligne de droite par le floor — sauf la dernière, la seule qui vous reste.</a:t>
             </a:r>
             <a:endParaRPr lang="en-US" dirty="0"/>
           </a:p>
@@ -1571,7 +1660,7 @@
           <a:p>
             <a:r>
               <a:rPr lang="en-US" dirty="0"/>
-              <a:t>Le recomptage ne disparaît pas : il se décide à chaud, avec le compteur encore dans le rayon, au lieu d'être découvert en surveillant la plateforme.</a:t>
+              <a:t>Le poste de surveillance n'est pas supprimé, il est distribué : chaque chef d'équipe voit son inventaire, et vous voyez tout sans rien opérer. Le suivi agrégé (personne n'est suivi nominativement en direct) parle aux RH et au CSE d'une maison de cette taille.</a:t>
             </a:r>
             <a:endParaRPr lang="en-US" dirty="0"/>
           </a:p>
@@ -1659,7 +1748,7 @@
           <a:p>
             <a:r>
               <a:rPr lang="en-US" dirty="0"/>
-              <a:t>C'est la page qui rend l'après-midi de consolidation : le croisement stock théorique / compté est déjà fait, article par article. La validation PSM / AGM garde le même fichier qu'aujourd'hui, en mieux rangé.</a:t>
+              <a:t>Le recomptage ne disparaît pas : il se décide à chaud, par le chef d'équipe, au lieu d'être découvert par l'Inventory Control en surveillant la plateforme.</a:t>
             </a:r>
             <a:endParaRPr lang="en-US" dirty="0"/>
           </a:p>
@@ -2195,7 +2284,7 @@
                 <a:ea typeface="Arial" pitchFamily="34" charset="-122"/>
                 <a:cs typeface="Arial" pitchFamily="34" charset="-120"/>
               </a:rPr>
-              <a:t>L'inventaire tournant, sans la charge qui l'entoure.</a:t>
+              <a:t>L'inventaire tournant, rendu aux équipes de vente.</a:t>
             </a:r>
             <a:endParaRPr lang="en-US" sz="4000" dirty="0"/>
           </a:p>
@@ -2237,7 +2326,7 @@
                 <a:ea typeface="Arial" pitchFamily="34" charset="-122"/>
                 <a:cs typeface="Arial" pitchFamily="34" charset="-120"/>
               </a:rPr>
-              <a:t>Vos équipes comptent déjà. Quantinvo retire à l'Inventory Control la préparation, la surveillance et la consolidation qui entourent chaque comptage.</a:t>
+              <a:t>Le balisage, le comptage et la conduite de chaque inventaire passent au floor : les chefs d'équipe supervisent, les vendeurs comptent. L'Inventory Control reçoit le rapport, valide et ajuste.</a:t>
             </a:r>
             <a:endParaRPr lang="en-US" sz="1500" dirty="0"/>
           </a:p>
@@ -2410,7 +2499,7 @@
                 <a:ea typeface="Arial" pitchFamily="34" charset="-122"/>
                 <a:cs typeface="Arial" pitchFamily="34" charset="-120"/>
               </a:rPr>
-              <a:t>L'inventaire aléatoire</a:t>
+              <a:t>Après le comptage</a:t>
             </a:r>
             <a:endParaRPr lang="en-US" sz="1000" dirty="0"/>
           </a:p>
@@ -2450,7 +2539,7 @@
         <p:spPr>
           <a:xfrm>
             <a:off x="731520" y="1325880"/>
-            <a:ext cx="4206240" cy="1737360"/>
+            <a:ext cx="4206240" cy="2011680"/>
           </a:xfrm>
           <a:prstGeom prst="rect">
             <a:avLst/>
@@ -2469,7 +2558,7 @@
               <a:buNone/>
             </a:pPr>
             <a:r>
-              <a:rPr lang="en-US" sz="2600" b="1" dirty="0">
+              <a:rPr lang="en-US" sz="2400" b="1" dirty="0">
                 <a:solidFill>
                   <a:srgbClr val="4636B0"/>
                 </a:solidFill>
@@ -2477,9 +2566,9 @@
                 <a:ea typeface="Arial" pitchFamily="34" charset="-122"/>
                 <a:cs typeface="Arial" pitchFamily="34" charset="-120"/>
               </a:rPr>
-              <a:t>Votre projet d’inventaire aléatoire, prêt à fonctionner.</a:t>
-            </a:r>
-            <a:endParaRPr lang="en-US" sz="2600" dirty="0"/>
+              <a:t>Ce qui vous arrive : un rapport déjà consolidé.</a:t>
+            </a:r>
+            <a:endParaRPr lang="en-US" sz="2400" dirty="0"/>
           </a:p>
         </p:txBody>
       </p:sp>
@@ -2491,8 +2580,8 @@
         </p:nvSpPr>
         <p:spPr>
           <a:xfrm>
-            <a:off x="731520" y="3108960"/>
-            <a:ext cx="4206240" cy="1554480"/>
+            <a:off x="731520" y="3017520"/>
+            <a:ext cx="4206240" cy="1463040"/>
           </a:xfrm>
           <a:prstGeom prst="rect">
             <a:avLst/>
@@ -2511,7 +2600,139 @@
               <a:buNone/>
             </a:pPr>
             <a:r>
-              <a:rPr lang="en-US" sz="1200" i="1" dirty="0">
+              <a:rPr lang="en-US" sz="1250" dirty="0">
+                <a:solidFill>
+                  <a:srgbClr val="3D4556"/>
+                </a:solidFill>
+                <a:latin typeface="Arial" pitchFamily="34" charset="0"/>
+                <a:ea typeface="Arial" pitchFamily="34" charset="-122"/>
+                <a:cs typeface="Arial" pitchFamily="34" charset="-120"/>
+              </a:rPr>
+              <a:t>Le rapport part du stock théorique, pas seulement de ce qui a été scanné. Un article attendu et jamais trouvé y figure, avec son manque : la démarque que l'inventaire est censé révéler est déjà dans le fichier.</a:t>
+            </a:r>
+            <a:endParaRPr lang="en-US" sz="1250" dirty="0"/>
+          </a:p>
+        </p:txBody>
+      </p:sp>
+      <p:sp>
+        <p:nvSpPr>
+          <p:cNvPr id="8" name="Text 5"/>
+          <p:cNvSpPr/>
+          <p:nvPr/>
+        </p:nvSpPr>
+        <p:spPr>
+          <a:xfrm>
+            <a:off x="731520" y="4480560"/>
+            <a:ext cx="4206240" cy="914400"/>
+          </a:xfrm>
+          <a:prstGeom prst="rect">
+            <a:avLst/>
+          </a:prstGeom>
+          <a:noFill/>
+          <a:ln/>
+        </p:spPr>
+        <p:txBody>
+          <a:bodyPr wrap="square" lIns="0" tIns="0" rIns="0" bIns="0" rtlCol="0" anchor="t"/>
+          <a:lstStyle/>
+          <a:p>
+            <a:pPr algn="l" indent="0" marL="0">
+              <a:lnSpc>
+                <a:spcPct val="118000"/>
+              </a:lnSpc>
+              <a:buNone/>
+            </a:pPr>
+            <a:r>
+              <a:rPr lang="en-US" sz="1250" dirty="0">
+                <a:solidFill>
+                  <a:srgbClr val="3D4556"/>
+                </a:solidFill>
+                <a:latin typeface="Arial" pitchFamily="34" charset="0"/>
+                <a:ea typeface="Arial" pitchFamily="34" charset="-122"/>
+                <a:cs typeface="Arial" pitchFamily="34" charset="-120"/>
+              </a:rPr>
+              <a:t>Export Excel en un clic. Il ne reste que la validation et l'ajustement — les deux gestes qui doivent rester chez vous.</a:t>
+            </a:r>
+            <a:endParaRPr lang="en-US" sz="1250" dirty="0"/>
+          </a:p>
+        </p:txBody>
+      </p:sp>
+      <p:sp>
+        <p:nvSpPr>
+          <p:cNvPr id="9" name="Shape 6"/>
+          <p:cNvSpPr/>
+          <p:nvPr/>
+        </p:nvSpPr>
+        <p:spPr>
+          <a:xfrm>
+            <a:off x="5340096" y="1316736"/>
+            <a:ext cx="6172200" cy="4187624"/>
+          </a:xfrm>
+          <a:prstGeom prst="roundRect">
+            <a:avLst>
+              <a:gd name="adj" fmla="val 1747"/>
+            </a:avLst>
+          </a:prstGeom>
+          <a:solidFill>
+            <a:srgbClr val="FFFFFF"/>
+          </a:solidFill>
+          <a:ln w="12700">
+            <a:solidFill>
+              <a:srgbClr val="E3E6EE"/>
+            </a:solidFill>
+            <a:prstDash val="solid"/>
+          </a:ln>
+        </p:spPr>
+      </p:sp>
+      <p:pic>
+        <p:nvPicPr>
+          <p:cNvPr id="10" name="Image 1" descr="preencoded.png">    </p:cNvPr>
+          <p:cNvPicPr>
+            <a:picLocks noChangeAspect="1"/>
+          </p:cNvPicPr>
+          <p:nvPr/>
+        </p:nvPicPr>
+        <p:blipFill>
+          <a:blip r:embed="rId2"/>
+          <a:stretch>
+            <a:fillRect/>
+          </a:stretch>
+        </p:blipFill>
+        <p:spPr>
+          <a:xfrm>
+            <a:off x="5394960" y="1371600"/>
+            <a:ext cx="6062472" cy="4077896"/>
+          </a:xfrm>
+          <a:prstGeom prst="rect">
+            <a:avLst/>
+          </a:prstGeom>
+        </p:spPr>
+      </p:pic>
+      <p:sp>
+        <p:nvSpPr>
+          <p:cNvPr id="11" name="Text 7"/>
+          <p:cNvSpPr/>
+          <p:nvPr/>
+        </p:nvSpPr>
+        <p:spPr>
+          <a:xfrm>
+            <a:off x="5394960" y="5586656"/>
+            <a:ext cx="6062472" cy="365760"/>
+          </a:xfrm>
+          <a:prstGeom prst="rect">
+            <a:avLst/>
+          </a:prstGeom>
+          <a:noFill/>
+          <a:ln/>
+        </p:spPr>
+        <p:txBody>
+          <a:bodyPr wrap="square" lIns="0" tIns="0" rIns="0" bIns="0" rtlCol="0" anchor="t"/>
+          <a:lstStyle/>
+          <a:p>
+            <a:pPr indent="0" marL="0">
+              <a:buNone/>
+            </a:pPr>
+            <a:r>
+              <a:rPr lang="en-US" sz="1000" i="1" dirty="0">
                 <a:solidFill>
                   <a:srgbClr val="5B6475"/>
                 </a:solidFill>
@@ -2519,209 +2740,15 @@
                 <a:ea typeface="Arial" pitchFamily="34" charset="-122"/>
                 <a:cs typeface="Arial" pitchFamily="34" charset="-120"/>
               </a:rPr>
-              <a:t>Vous en avez posé les objectifs : identifier les vols, tester la rigueur des procédures, garantir que chaque responsable maîtrise son stock. L'obstacle n'est pas l'intention — c'est la logistique de chaque comptage.</a:t>
-            </a:r>
-            <a:endParaRPr lang="en-US" sz="1200" dirty="0"/>
-          </a:p>
-        </p:txBody>
-      </p:sp>
-      <p:sp>
-        <p:nvSpPr>
-          <p:cNvPr id="8" name="Text 5"/>
-          <p:cNvSpPr/>
-          <p:nvPr/>
-        </p:nvSpPr>
-        <p:spPr>
-          <a:xfrm>
-            <a:off x="5394960" y="1371600"/>
-            <a:ext cx="6062472" cy="4754880"/>
-          </a:xfrm>
-          <a:prstGeom prst="rect">
-            <a:avLst/>
-          </a:prstGeom>
-          <a:noFill/>
-          <a:ln/>
-        </p:spPr>
-        <p:txBody>
-          <a:bodyPr wrap="square" lIns="0" tIns="0" rIns="0" bIns="0" rtlCol="0" anchor="t"/>
-          <a:lstStyle/>
-          <a:p>
-            <a:pPr indent="0" marL="0">
-              <a:lnSpc>
-                <a:spcPct val="118000"/>
-              </a:lnSpc>
-              <a:spcAft>
-                <a:spcPts val="1300"/>
-              </a:spcAft>
-              <a:buNone/>
-            </a:pPr>
-            <a:r>
-              <a:rPr lang="en-US" sz="1250" b="1" dirty="0">
-                <a:solidFill>
-                  <a:srgbClr val="0B0F19"/>
-                </a:solidFill>
-                <a:latin typeface="Arial" pitchFamily="34" charset="0"/>
-                <a:ea typeface="Arial" pitchFamily="34" charset="-122"/>
-                <a:cs typeface="Arial" pitchFamily="34" charset="-120"/>
-              </a:rPr>
-              <a:t>La sélection. </a:t>
-            </a:r>
-            <a:pPr indent="0" marL="0">
-              <a:lnSpc>
-                <a:spcPct val="118000"/>
-              </a:lnSpc>
-              <a:spcAft>
-                <a:spcPts val="1300"/>
-              </a:spcAft>
-              <a:buNone/>
-            </a:pPr>
-            <a:r>
-              <a:rPr lang="en-US" sz="1250" dirty="0">
-                <a:solidFill>
-                  <a:srgbClr val="3D4556"/>
-                </a:solidFill>
-                <a:latin typeface="Arial" pitchFamily="34" charset="0"/>
-                <a:ea typeface="Arial" pitchFamily="34" charset="-122"/>
-                <a:cs typeface="Arial" pitchFamily="34" charset="-120"/>
-              </a:rPr>
-              <a:t>Vos critères restent les vôtres : variances négatives répétées, articles sensibles, slow movers. Les rapports des inventaires précédents donnent les chiffres d'où cette sélection se tire.</a:t>
-            </a:r>
-            <a:endParaRPr lang="en-US" sz="1250" dirty="0"/>
-          </a:p>
-          <a:p>
-            <a:pPr indent="0" marL="0">
-              <a:lnSpc>
-                <a:spcPct val="118000"/>
-              </a:lnSpc>
-              <a:spcAft>
-                <a:spcPts val="1300"/>
-              </a:spcAft>
-              <a:buNone/>
-            </a:pPr>
-            <a:r>
-              <a:rPr lang="en-US" sz="1250" b="1" dirty="0">
-                <a:solidFill>
-                  <a:srgbClr val="0B0F19"/>
-                </a:solidFill>
-                <a:latin typeface="Arial" pitchFamily="34" charset="0"/>
-                <a:ea typeface="Arial" pitchFamily="34" charset="-122"/>
-                <a:cs typeface="Arial" pitchFamily="34" charset="-120"/>
-              </a:rPr>
-              <a:t>Le déclenchement. </a:t>
-            </a:r>
-            <a:pPr indent="0" marL="0">
-              <a:lnSpc>
-                <a:spcPct val="118000"/>
-              </a:lnSpc>
-              <a:spcAft>
-                <a:spcPts val="1300"/>
-              </a:spcAft>
-              <a:buNone/>
-            </a:pPr>
-            <a:r>
-              <a:rPr lang="en-US" sz="1250" dirty="0">
-                <a:solidFill>
-                  <a:srgbClr val="3D4556"/>
-                </a:solidFill>
-                <a:latin typeface="Arial" pitchFamily="34" charset="0"/>
-                <a:ea typeface="Arial" pitchFamily="34" charset="-122"/>
-                <a:cs typeface="Arial" pitchFamily="34" charset="-120"/>
-              </a:rPr>
-              <a:t>Un inventaire ciblé se crée en quelques minutes — une marque, un rayon, une liste d'articles — le jour même s'il le faut. Les équipes concernées sont invitées depuis l'outil.</a:t>
-            </a:r>
-            <a:endParaRPr lang="en-US" sz="1250" dirty="0"/>
-          </a:p>
-          <a:p>
-            <a:pPr indent="0" marL="0">
-              <a:lnSpc>
-                <a:spcPct val="118000"/>
-              </a:lnSpc>
-              <a:spcAft>
-                <a:spcPts val="1300"/>
-              </a:spcAft>
-              <a:buNone/>
-            </a:pPr>
-            <a:r>
-              <a:rPr lang="en-US" sz="1250" b="1" dirty="0">
-                <a:solidFill>
-                  <a:srgbClr val="0B0F19"/>
-                </a:solidFill>
-                <a:latin typeface="Arial" pitchFamily="34" charset="0"/>
-                <a:ea typeface="Arial" pitchFamily="34" charset="-122"/>
-                <a:cs typeface="Arial" pitchFamily="34" charset="-120"/>
-              </a:rPr>
-              <a:t>Le comptage. </a:t>
-            </a:r>
-            <a:pPr indent="0" marL="0">
-              <a:lnSpc>
-                <a:spcPct val="118000"/>
-              </a:lnSpc>
-              <a:spcAft>
-                <a:spcPts val="1300"/>
-              </a:spcAft>
-              <a:buNone/>
-            </a:pPr>
-            <a:r>
-              <a:rPr lang="en-US" sz="1250" dirty="0">
-                <a:solidFill>
-                  <a:srgbClr val="3D4556"/>
-                </a:solidFill>
-                <a:latin typeface="Arial" pitchFamily="34" charset="0"/>
-                <a:ea typeface="Arial" pitchFamily="34" charset="-122"/>
-                <a:cs typeface="Arial" pitchFamily="34" charset="-120"/>
-              </a:rPr>
-              <a:t>Les équipes de vente comptent avec le téléphone qu'elles ont en poche. Pas de matériel à sortir, pas de session à monter : c'est ce qui rend l'aléatoire réellement aléatoire.</a:t>
-            </a:r>
-            <a:endParaRPr lang="en-US" sz="1250" dirty="0"/>
-          </a:p>
-          <a:p>
-            <a:pPr indent="0" marL="0">
-              <a:lnSpc>
-                <a:spcPct val="118000"/>
-              </a:lnSpc>
-              <a:spcAft>
-                <a:spcPts val="1300"/>
-              </a:spcAft>
-              <a:buNone/>
-            </a:pPr>
-            <a:r>
-              <a:rPr lang="en-US" sz="1250" b="1" dirty="0">
-                <a:solidFill>
-                  <a:srgbClr val="0B0F19"/>
-                </a:solidFill>
-                <a:latin typeface="Arial" pitchFamily="34" charset="0"/>
-                <a:ea typeface="Arial" pitchFamily="34" charset="-122"/>
-                <a:cs typeface="Arial" pitchFamily="34" charset="-120"/>
-              </a:rPr>
-              <a:t>Le contrôle. </a:t>
-            </a:r>
-            <a:pPr indent="0" marL="0">
-              <a:lnSpc>
-                <a:spcPct val="118000"/>
-              </a:lnSpc>
-              <a:spcAft>
-                <a:spcPts val="1300"/>
-              </a:spcAft>
-              <a:buNone/>
-            </a:pPr>
-            <a:r>
-              <a:rPr lang="en-US" sz="1250" dirty="0">
-                <a:solidFill>
-                  <a:srgbClr val="3D4556"/>
-                </a:solidFill>
-                <a:latin typeface="Arial" pitchFamily="34" charset="0"/>
-                <a:ea typeface="Arial" pitchFamily="34" charset="-122"/>
-                <a:cs typeface="Arial" pitchFamily="34" charset="-120"/>
-              </a:rPr>
-              <a:t>L'écart se lit en direct. S'il dépasse votre seuil, l'Inventory Control reprend la main, et le rapport nourrit l'enquête.</a:t>
-            </a:r>
-            <a:endParaRPr lang="en-US" sz="1250" dirty="0"/>
-          </a:p>
-        </p:txBody>
-      </p:sp>
-      <p:sp>
-        <p:nvSpPr>
-          <p:cNvPr id="9" name="Text 6"/>
+              <a:t>Onglet Rapport, données d'essai.</a:t>
+            </a:r>
+            <a:endParaRPr lang="en-US" sz="1000" dirty="0"/>
+          </a:p>
+        </p:txBody>
+      </p:sp>
+      <p:sp>
+        <p:nvSpPr>
+          <p:cNvPr id="12" name="Text 8"/>
           <p:cNvSpPr/>
           <p:nvPr/>
         </p:nvSpPr>
@@ -2760,7 +2787,7 @@
       </p:sp>
       <p:sp>
         <p:nvSpPr>
-          <p:cNvPr id="10" name="Text 7"/>
+          <p:cNvPr id="13" name="Text 9"/>
           <p:cNvSpPr/>
           <p:nvPr/>
         </p:nvSpPr>
@@ -2925,7 +2952,7 @@
                 <a:ea typeface="Arial" pitchFamily="34" charset="-122"/>
                 <a:cs typeface="Arial" pitchFamily="34" charset="-120"/>
               </a:rPr>
-              <a:t>Pourquoi pas Zebra</a:t>
+              <a:t>L'inventaire aléatoire</a:t>
             </a:r>
             <a:endParaRPr lang="en-US" sz="1000" dirty="0"/>
           </a:p>
@@ -2964,8 +2991,8 @@
         </p:nvSpPr>
         <p:spPr>
           <a:xfrm>
-            <a:off x="731520" y="1280160"/>
-            <a:ext cx="10725912" cy="822960"/>
+            <a:off x="731520" y="1325880"/>
+            <a:ext cx="4206240" cy="1737360"/>
           </a:xfrm>
           <a:prstGeom prst="rect">
             <a:avLst/>
@@ -2992,7 +3019,7 @@
                 <a:ea typeface="Arial" pitchFamily="34" charset="-122"/>
                 <a:cs typeface="Arial" pitchFamily="34" charset="-120"/>
               </a:rPr>
-              <a:t>Pourquoi Quantinvo, et pas Zebra ?</a:t>
+              <a:t>Votre projet d’inventaire aléatoire, prêt à fonctionner.</a:t>
             </a:r>
             <a:endParaRPr lang="en-US" sz="2600" dirty="0"/>
           </a:p>
@@ -3006,8 +3033,8 @@
         </p:nvSpPr>
         <p:spPr>
           <a:xfrm>
-            <a:off x="731520" y="2286000"/>
-            <a:ext cx="5088636" cy="2926080"/>
+            <a:off x="731520" y="3108960"/>
+            <a:ext cx="4206240" cy="1554480"/>
           </a:xfrm>
           <a:prstGeom prst="rect">
             <a:avLst/>
@@ -3019,12 +3046,54 @@
           <a:bodyPr wrap="square" lIns="0" tIns="0" rIns="0" bIns="0" rtlCol="0" anchor="t"/>
           <a:lstStyle/>
           <a:p>
-            <a:pPr indent="0" marL="0">
+            <a:pPr algn="l" indent="0" marL="0">
               <a:lnSpc>
                 <a:spcPct val="118000"/>
               </a:lnSpc>
+              <a:buNone/>
+            </a:pPr>
+            <a:r>
+              <a:rPr lang="en-US" sz="1200" i="1" dirty="0">
+                <a:solidFill>
+                  <a:srgbClr val="5B6475"/>
+                </a:solidFill>
+                <a:latin typeface="Arial" pitchFamily="34" charset="0"/>
+                <a:ea typeface="Arial" pitchFamily="34" charset="-122"/>
+                <a:cs typeface="Arial" pitchFamily="34" charset="-120"/>
+              </a:rPr>
+              <a:t>Vous en avez posé les objectifs : identifier les vols, tester la rigueur des procédures, garantir que chaque responsable maîtrise son stock. Confier le comptage au floor, c'est exactement cela.</a:t>
+            </a:r>
+            <a:endParaRPr lang="en-US" sz="1200" dirty="0"/>
+          </a:p>
+        </p:txBody>
+      </p:sp>
+      <p:sp>
+        <p:nvSpPr>
+          <p:cNvPr id="8" name="Text 5"/>
+          <p:cNvSpPr/>
+          <p:nvPr/>
+        </p:nvSpPr>
+        <p:spPr>
+          <a:xfrm>
+            <a:off x="5394960" y="1371600"/>
+            <a:ext cx="6062472" cy="4754880"/>
+          </a:xfrm>
+          <a:prstGeom prst="rect">
+            <a:avLst/>
+          </a:prstGeom>
+          <a:noFill/>
+          <a:ln/>
+        </p:spPr>
+        <p:txBody>
+          <a:bodyPr wrap="square" lIns="0" tIns="0" rIns="0" bIns="0" rtlCol="0" anchor="t"/>
+          <a:lstStyle/>
+          <a:p>
+            <a:pPr indent="0" marL="0">
+              <a:lnSpc>
+                <a:spcPct val="118000"/>
+              </a:lnSpc>
               <a:spcAft>
-                <a:spcPts val="1200"/>
+                <a:spcPts val="1300"/>
               </a:spcAft>
               <a:buNone/>
             </a:pPr>
@@ -3037,14 +3106,14 @@
                 <a:ea typeface="Arial" pitchFamily="34" charset="-122"/>
                 <a:cs typeface="Arial" pitchFamily="34" charset="-120"/>
               </a:rPr>
-              <a:t>Le matériel. </a:t>
+              <a:t>La sélection. </a:t>
             </a:r>
             <a:pPr indent="0" marL="0">
               <a:lnSpc>
                 <a:spcPct val="118000"/>
               </a:lnSpc>
               <a:spcAft>
-                <a:spcPts val="1200"/>
+                <a:spcPts val="1300"/>
               </a:spcAft>
               <a:buNone/>
             </a:pPr>
@@ -3057,7 +3126,7 @@
                 <a:ea typeface="Arial" pitchFamily="34" charset="-122"/>
                 <a:cs typeface="Arial" pitchFamily="34" charset="-120"/>
               </a:rPr>
-              <a:t>SmartCount repose sur une flotte de terminaux dédiés : à charger, configurer, vérifier avant chaque session — et leur nombre plafonne celui des compteurs. Quantinvo tourne sur les iPhone que vos équipes ont déjà, et une douchette Bluetooth s'y branche pour les gros volumes.</a:t>
+              <a:t>Elle reste chez vous : variances négatives répétées, articles sensibles, slow movers. Les rapports des inventaires précédents donnent les chiffres d'où cette sélection se tire.</a:t>
             </a:r>
             <a:endParaRPr lang="en-US" sz="1250" dirty="0"/>
           </a:p>
@@ -3067,7 +3136,7 @@
                 <a:spcPct val="118000"/>
               </a:lnSpc>
               <a:spcAft>
-                <a:spcPts val="1200"/>
+                <a:spcPts val="1300"/>
               </a:spcAft>
               <a:buNone/>
             </a:pPr>
@@ -3080,14 +3149,14 @@
                 <a:ea typeface="Arial" pitchFamily="34" charset="-122"/>
                 <a:cs typeface="Arial" pitchFamily="34" charset="-120"/>
               </a:rPr>
-              <a:t>Le coût. </a:t>
+              <a:t>Le déclenchement. </a:t>
             </a:r>
             <a:pPr indent="0" marL="0">
               <a:lnSpc>
                 <a:spcPct val="118000"/>
               </a:lnSpc>
               <a:spcAft>
-                <a:spcPts val="1200"/>
+                <a:spcPts val="1300"/>
               </a:spcAft>
               <a:buNone/>
             </a:pPr>
@@ -3100,39 +3169,17 @@
                 <a:ea typeface="Arial" pitchFamily="34" charset="-122"/>
                 <a:cs typeface="Arial" pitchFamily="34" charset="-120"/>
               </a:rPr>
-              <a:t>Une licence par magasin, à l'année, comptages et compteurs illimités. Pas de coût par terminal, pas d'abonnement par appareil. Ajouter dix compteurs un matin d'inventaire ne coûte rien.</a:t>
+              <a:t>Un inventaire ciblé se crée en quelques minutes — une marque, un rayon, une liste d'articles — le jour même s'il le faut. Les équipes concernées sont invitées depuis l'outil.</a:t>
             </a:r>
             <a:endParaRPr lang="en-US" sz="1250" dirty="0"/>
           </a:p>
-        </p:txBody>
-      </p:sp>
-      <p:sp>
-        <p:nvSpPr>
-          <p:cNvPr id="8" name="Text 5"/>
-          <p:cNvSpPr/>
-          <p:nvPr/>
-        </p:nvSpPr>
-        <p:spPr>
-          <a:xfrm>
-            <a:off x="6368796" y="2286000"/>
-            <a:ext cx="5088636" cy="2926080"/>
-          </a:xfrm>
-          <a:prstGeom prst="rect">
-            <a:avLst/>
-          </a:prstGeom>
-          <a:noFill/>
-          <a:ln/>
-        </p:spPr>
-        <p:txBody>
-          <a:bodyPr wrap="square" lIns="0" tIns="0" rIns="0" bIns="0" rtlCol="0" anchor="t"/>
-          <a:lstStyle/>
           <a:p>
             <a:pPr indent="0" marL="0">
               <a:lnSpc>
                 <a:spcPct val="118000"/>
               </a:lnSpc>
               <a:spcAft>
-                <a:spcPts val="1200"/>
+                <a:spcPts val="1300"/>
               </a:spcAft>
               <a:buNone/>
             </a:pPr>
@@ -3145,14 +3192,14 @@
                 <a:ea typeface="Arial" pitchFamily="34" charset="-122"/>
                 <a:cs typeface="Arial" pitchFamily="34" charset="-120"/>
               </a:rPr>
-              <a:t>La réconciliation. </a:t>
+              <a:t>Le comptage. </a:t>
             </a:r>
             <a:pPr indent="0" marL="0">
               <a:lnSpc>
                 <a:spcPct val="118000"/>
               </a:lnSpc>
               <a:spcAft>
-                <a:spcPts val="1200"/>
+                <a:spcPts val="1300"/>
               </a:spcAft>
               <a:buNone/>
             </a:pPr>
@@ -3165,7 +3212,7 @@
                 <a:ea typeface="Arial" pitchFamily="34" charset="-122"/>
                 <a:cs typeface="Arial" pitchFamily="34" charset="-120"/>
               </a:rPr>
-              <a:t>SmartCount rend un rapport de variance, à consolider ensuite avec le stock théorique. Quantinvo rend ce croisement déjà fait : l'attendu, le compté, le non-compté, l'écart en valeur.</a:t>
+              <a:t>Les équipes de vente comptent avec le téléphone qu'elles ont en poche. Pas de matériel à sortir, pas de session à monter : c'est ce qui rend l'aléatoire réellement aléatoire.</a:t>
             </a:r>
             <a:endParaRPr lang="en-US" sz="1250" dirty="0"/>
           </a:p>
@@ -3175,7 +3222,7 @@
                 <a:spcPct val="118000"/>
               </a:lnSpc>
               <a:spcAft>
-                <a:spcPts val="1200"/>
+                <a:spcPts val="1300"/>
               </a:spcAft>
               <a:buNone/>
             </a:pPr>
@@ -3188,14 +3235,14 @@
                 <a:ea typeface="Arial" pitchFamily="34" charset="-122"/>
                 <a:cs typeface="Arial" pitchFamily="34" charset="-120"/>
               </a:rPr>
-              <a:t>La taille de l'éditeur. </a:t>
+              <a:t>Le contrôle. </a:t>
             </a:r>
             <a:pPr indent="0" marL="0">
               <a:lnSpc>
                 <a:spcPct val="118000"/>
               </a:lnSpc>
               <a:spcAft>
-                <a:spcPts val="1200"/>
+                <a:spcPts val="1300"/>
               </a:spcAft>
               <a:buNone/>
             </a:pPr>
@@ -3208,7 +3255,7 @@
                 <a:ea typeface="Arial" pitchFamily="34" charset="-122"/>
                 <a:cs typeface="Arial" pitchFamily="34" charset="-120"/>
               </a:rPr>
-              <a:t>SmartCount est un module au catalogue d'un géant du matériel. Quantinvo ne fait qu'une chose — l'inventaire — et la personne qui l'a dessiné répond elle-même à vos questions.</a:t>
+              <a:t>L'écart se lit en direct. S'il dépasse votre seuil, l'Inventory Control reprend la main, et le rapport nourrit l'enquête.</a:t>
             </a:r>
             <a:endParaRPr lang="en-US" sz="1250" dirty="0"/>
           </a:p>
@@ -3216,115 +3263,7 @@
       </p:sp>
       <p:sp>
         <p:nvSpPr>
-          <p:cNvPr id="9" name="Shape 6"/>
-          <p:cNvSpPr/>
-          <p:nvPr/>
-        </p:nvSpPr>
-        <p:spPr>
-          <a:xfrm>
-            <a:off x="731520" y="5257800"/>
-            <a:ext cx="10725912" cy="1051560"/>
-          </a:xfrm>
-          <a:prstGeom prst="roundRect">
-            <a:avLst>
-              <a:gd name="adj" fmla="val 6957"/>
-            </a:avLst>
-          </a:prstGeom>
-          <a:solidFill>
-            <a:srgbClr val="F4F5F9"/>
-          </a:solidFill>
-          <a:ln w="12700">
-            <a:solidFill>
-              <a:srgbClr val="F4F5F9"/>
-            </a:solidFill>
-            <a:prstDash val="solid"/>
-          </a:ln>
-        </p:spPr>
-      </p:sp>
-      <p:sp>
-        <p:nvSpPr>
-          <p:cNvPr id="10" name="Text 7"/>
-          <p:cNvSpPr/>
-          <p:nvPr/>
-        </p:nvSpPr>
-        <p:spPr>
-          <a:xfrm>
-            <a:off x="1005840" y="5422392"/>
-            <a:ext cx="10177272" cy="228600"/>
-          </a:xfrm>
-          <a:prstGeom prst="rect">
-            <a:avLst/>
-          </a:prstGeom>
-          <a:noFill/>
-          <a:ln/>
-        </p:spPr>
-        <p:txBody>
-          <a:bodyPr wrap="square" lIns="0" tIns="0" rIns="0" bIns="0" rtlCol="0" anchor="t"/>
-          <a:lstStyle/>
-          <a:p>
-            <a:pPr indent="0" marL="0">
-              <a:buNone/>
-            </a:pPr>
-            <a:r>
-              <a:rPr lang="en-US" sz="950" b="1" dirty="0">
-                <a:solidFill>
-                  <a:srgbClr val="5B6475"/>
-                </a:solidFill>
-                <a:latin typeface="Arial" pitchFamily="34" charset="0"/>
-                <a:ea typeface="Arial" pitchFamily="34" charset="-122"/>
-                <a:cs typeface="Arial" pitchFamily="34" charset="-120"/>
-              </a:rPr>
-              <a:t>Pour être honnête</a:t>
-            </a:r>
-            <a:endParaRPr lang="en-US" sz="950" dirty="0"/>
-          </a:p>
-        </p:txBody>
-      </p:sp>
-      <p:sp>
-        <p:nvSpPr>
-          <p:cNvPr id="11" name="Text 8"/>
-          <p:cNvSpPr/>
-          <p:nvPr/>
-        </p:nvSpPr>
-        <p:spPr>
-          <a:xfrm>
-            <a:off x="1005840" y="5678424"/>
-            <a:ext cx="10177272" cy="502920"/>
-          </a:xfrm>
-          <a:prstGeom prst="rect">
-            <a:avLst/>
-          </a:prstGeom>
-          <a:noFill/>
-          <a:ln/>
-        </p:spPr>
-        <p:txBody>
-          <a:bodyPr wrap="square" lIns="0" tIns="0" rIns="0" bIns="0" rtlCol="0" anchor="t"/>
-          <a:lstStyle/>
-          <a:p>
-            <a:pPr indent="0" marL="0">
-              <a:lnSpc>
-                <a:spcPct val="115000"/>
-              </a:lnSpc>
-              <a:buNone/>
-            </a:pPr>
-            <a:r>
-              <a:rPr lang="en-US" sz="1150" i="1" dirty="0">
-                <a:solidFill>
-                  <a:srgbClr val="3D4556"/>
-                </a:solidFill>
-                <a:latin typeface="Arial" pitchFamily="34" charset="0"/>
-                <a:ea typeface="Arial" pitchFamily="34" charset="-122"/>
-                <a:cs typeface="Arial" pitchFamily="34" charset="-120"/>
-              </a:rPr>
-              <a:t>Un terminal durci encaisse mieux les chocs qu'un téléphone, et si votre flotte est déjà amortie, l'argument du matériel pèse moins. Les nôtres ne bougent pas : rien à reconfigurer avant chaque inventaire, aucun plafond au nombre de compteurs, et une réconciliation qui n'existe plus.</a:t>
-            </a:r>
-            <a:endParaRPr lang="en-US" sz="1150" dirty="0"/>
-          </a:p>
-        </p:txBody>
-      </p:sp>
-      <p:sp>
-        <p:nvSpPr>
-          <p:cNvPr id="12" name="Text 9"/>
+          <p:cNvPr id="9" name="Text 6"/>
           <p:cNvSpPr/>
           <p:nvPr/>
         </p:nvSpPr>
@@ -3363,7 +3302,7 @@
       </p:sp>
       <p:sp>
         <p:nvSpPr>
-          <p:cNvPr id="13" name="Text 10"/>
+          <p:cNvPr id="10" name="Text 7"/>
           <p:cNvSpPr/>
           <p:nvPr/>
         </p:nvSpPr>
@@ -3528,7 +3467,7 @@
                 <a:ea typeface="Arial" pitchFamily="34" charset="-122"/>
                 <a:cs typeface="Arial" pitchFamily="34" charset="-120"/>
               </a:rPr>
-              <a:t>Pour être clair</a:t>
+              <a:t>Pourquoi pas Zebra</a:t>
             </a:r>
             <a:endParaRPr lang="en-US" sz="1000" dirty="0"/>
           </a:p>
@@ -3567,8 +3506,8 @@
         </p:nvSpPr>
         <p:spPr>
           <a:xfrm>
-            <a:off x="731520" y="1325880"/>
-            <a:ext cx="4206240" cy="2011680"/>
+            <a:off x="731520" y="1280160"/>
+            <a:ext cx="10725912" cy="822960"/>
           </a:xfrm>
           <a:prstGeom prst="rect">
             <a:avLst/>
@@ -3595,7 +3534,7 @@
                 <a:ea typeface="Arial" pitchFamily="34" charset="-122"/>
                 <a:cs typeface="Arial" pitchFamily="34" charset="-120"/>
               </a:rPr>
-              <a:t>Ce qu'on ne vous promet pas.</a:t>
+              <a:t>Pourquoi Quantinvo, et pas Zebra ?</a:t>
             </a:r>
             <a:endParaRPr lang="en-US" sz="2600" dirty="0"/>
           </a:p>
@@ -3609,8 +3548,8 @@
         </p:nvSpPr>
         <p:spPr>
           <a:xfrm>
-            <a:off x="731520" y="3383280"/>
-            <a:ext cx="4206240" cy="548640"/>
+            <a:off x="731520" y="2286000"/>
+            <a:ext cx="5088636" cy="2926080"/>
           </a:xfrm>
           <a:prstGeom prst="rect">
             <a:avLst/>
@@ -3622,14 +3561,254 @@
           <a:bodyPr wrap="square" lIns="0" tIns="0" rIns="0" bIns="0" rtlCol="0" anchor="t"/>
           <a:lstStyle/>
           <a:p>
-            <a:pPr algn="l" indent="0" marL="0">
+            <a:pPr indent="0" marL="0">
               <a:lnSpc>
                 <a:spcPct val="118000"/>
               </a:lnSpc>
-              <a:buNone/>
-            </a:pPr>
-            <a:r>
-              <a:rPr lang="en-US" sz="1250" i="1" dirty="0">
+              <a:spcAft>
+                <a:spcPts val="1200"/>
+              </a:spcAft>
+              <a:buNone/>
+            </a:pPr>
+            <a:r>
+              <a:rPr lang="en-US" sz="1250" b="1" dirty="0">
+                <a:solidFill>
+                  <a:srgbClr val="0B0F19"/>
+                </a:solidFill>
+                <a:latin typeface="Arial" pitchFamily="34" charset="0"/>
+                <a:ea typeface="Arial" pitchFamily="34" charset="-122"/>
+                <a:cs typeface="Arial" pitchFamily="34" charset="-120"/>
+              </a:rPr>
+              <a:t>Le matériel. </a:t>
+            </a:r>
+            <a:pPr indent="0" marL="0">
+              <a:lnSpc>
+                <a:spcPct val="118000"/>
+              </a:lnSpc>
+              <a:spcAft>
+                <a:spcPts val="1200"/>
+              </a:spcAft>
+              <a:buNone/>
+            </a:pPr>
+            <a:r>
+              <a:rPr lang="en-US" sz="1250" dirty="0">
+                <a:solidFill>
+                  <a:srgbClr val="3D4556"/>
+                </a:solidFill>
+                <a:latin typeface="Arial" pitchFamily="34" charset="0"/>
+                <a:ea typeface="Arial" pitchFamily="34" charset="-122"/>
+                <a:cs typeface="Arial" pitchFamily="34" charset="-120"/>
+              </a:rPr>
+              <a:t>SmartCount repose sur une flotte de terminaux dédiés : à charger, configurer, vérifier avant chaque session — un métier en soi, celui qu'on cherche justement à ne plus faire. Quantinvo tourne sur les iPhone que vos équipes ont déjà, et une douchette Bluetooth s'y branche pour les gros volumes.</a:t>
+            </a:r>
+            <a:endParaRPr lang="en-US" sz="1250" dirty="0"/>
+          </a:p>
+          <a:p>
+            <a:pPr indent="0" marL="0">
+              <a:lnSpc>
+                <a:spcPct val="118000"/>
+              </a:lnSpc>
+              <a:spcAft>
+                <a:spcPts val="1200"/>
+              </a:spcAft>
+              <a:buNone/>
+            </a:pPr>
+            <a:r>
+              <a:rPr lang="en-US" sz="1250" b="1" dirty="0">
+                <a:solidFill>
+                  <a:srgbClr val="0B0F19"/>
+                </a:solidFill>
+                <a:latin typeface="Arial" pitchFamily="34" charset="0"/>
+                <a:ea typeface="Arial" pitchFamily="34" charset="-122"/>
+                <a:cs typeface="Arial" pitchFamily="34" charset="-120"/>
+              </a:rPr>
+              <a:t>Le coût. </a:t>
+            </a:r>
+            <a:pPr indent="0" marL="0">
+              <a:lnSpc>
+                <a:spcPct val="118000"/>
+              </a:lnSpc>
+              <a:spcAft>
+                <a:spcPts val="1200"/>
+              </a:spcAft>
+              <a:buNone/>
+            </a:pPr>
+            <a:r>
+              <a:rPr lang="en-US" sz="1250" dirty="0">
+                <a:solidFill>
+                  <a:srgbClr val="3D4556"/>
+                </a:solidFill>
+                <a:latin typeface="Arial" pitchFamily="34" charset="0"/>
+                <a:ea typeface="Arial" pitchFamily="34" charset="-122"/>
+                <a:cs typeface="Arial" pitchFamily="34" charset="-120"/>
+              </a:rPr>
+              <a:t>Une licence par magasin, à l'année, comptages et compteurs illimités. Pas de coût par terminal, pas d'abonnement par appareil. Faire compter tout un floor un matin ne coûte rien de plus.</a:t>
+            </a:r>
+            <a:endParaRPr lang="en-US" sz="1250" dirty="0"/>
+          </a:p>
+        </p:txBody>
+      </p:sp>
+      <p:sp>
+        <p:nvSpPr>
+          <p:cNvPr id="8" name="Text 5"/>
+          <p:cNvSpPr/>
+          <p:nvPr/>
+        </p:nvSpPr>
+        <p:spPr>
+          <a:xfrm>
+            <a:off x="6368796" y="2286000"/>
+            <a:ext cx="5088636" cy="2926080"/>
+          </a:xfrm>
+          <a:prstGeom prst="rect">
+            <a:avLst/>
+          </a:prstGeom>
+          <a:noFill/>
+          <a:ln/>
+        </p:spPr>
+        <p:txBody>
+          <a:bodyPr wrap="square" lIns="0" tIns="0" rIns="0" bIns="0" rtlCol="0" anchor="t"/>
+          <a:lstStyle/>
+          <a:p>
+            <a:pPr indent="0" marL="0">
+              <a:lnSpc>
+                <a:spcPct val="118000"/>
+              </a:lnSpc>
+              <a:spcAft>
+                <a:spcPts val="1200"/>
+              </a:spcAft>
+              <a:buNone/>
+            </a:pPr>
+            <a:r>
+              <a:rPr lang="en-US" sz="1250" b="1" dirty="0">
+                <a:solidFill>
+                  <a:srgbClr val="0B0F19"/>
+                </a:solidFill>
+                <a:latin typeface="Arial" pitchFamily="34" charset="0"/>
+                <a:ea typeface="Arial" pitchFamily="34" charset="-122"/>
+                <a:cs typeface="Arial" pitchFamily="34" charset="-120"/>
+              </a:rPr>
+              <a:t>La réconciliation. </a:t>
+            </a:r>
+            <a:pPr indent="0" marL="0">
+              <a:lnSpc>
+                <a:spcPct val="118000"/>
+              </a:lnSpc>
+              <a:spcAft>
+                <a:spcPts val="1200"/>
+              </a:spcAft>
+              <a:buNone/>
+            </a:pPr>
+            <a:r>
+              <a:rPr lang="en-US" sz="1250" dirty="0">
+                <a:solidFill>
+                  <a:srgbClr val="3D4556"/>
+                </a:solidFill>
+                <a:latin typeface="Arial" pitchFamily="34" charset="0"/>
+                <a:ea typeface="Arial" pitchFamily="34" charset="-122"/>
+                <a:cs typeface="Arial" pitchFamily="34" charset="-120"/>
+              </a:rPr>
+              <a:t>SmartCount rend un rapport de variance, à consolider ensuite avec le stock théorique. Quantinvo rend ce croisement déjà fait : l'attendu, le compté, le non-compté, l'écart en valeur.</a:t>
+            </a:r>
+            <a:endParaRPr lang="en-US" sz="1250" dirty="0"/>
+          </a:p>
+          <a:p>
+            <a:pPr indent="0" marL="0">
+              <a:lnSpc>
+                <a:spcPct val="118000"/>
+              </a:lnSpc>
+              <a:spcAft>
+                <a:spcPts val="1200"/>
+              </a:spcAft>
+              <a:buNone/>
+            </a:pPr>
+            <a:r>
+              <a:rPr lang="en-US" sz="1250" b="1" dirty="0">
+                <a:solidFill>
+                  <a:srgbClr val="0B0F19"/>
+                </a:solidFill>
+                <a:latin typeface="Arial" pitchFamily="34" charset="0"/>
+                <a:ea typeface="Arial" pitchFamily="34" charset="-122"/>
+                <a:cs typeface="Arial" pitchFamily="34" charset="-120"/>
+              </a:rPr>
+              <a:t>La taille de l'éditeur. </a:t>
+            </a:r>
+            <a:pPr indent="0" marL="0">
+              <a:lnSpc>
+                <a:spcPct val="118000"/>
+              </a:lnSpc>
+              <a:spcAft>
+                <a:spcPts val="1200"/>
+              </a:spcAft>
+              <a:buNone/>
+            </a:pPr>
+            <a:r>
+              <a:rPr lang="en-US" sz="1250" dirty="0">
+                <a:solidFill>
+                  <a:srgbClr val="3D4556"/>
+                </a:solidFill>
+                <a:latin typeface="Arial" pitchFamily="34" charset="0"/>
+                <a:ea typeface="Arial" pitchFamily="34" charset="-122"/>
+                <a:cs typeface="Arial" pitchFamily="34" charset="-120"/>
+              </a:rPr>
+              <a:t>SmartCount est un module au catalogue d'un géant du matériel. Quantinvo ne fait qu'une chose — l'inventaire — et la personne qui l'a dessiné répond elle-même à vos questions.</a:t>
+            </a:r>
+            <a:endParaRPr lang="en-US" sz="1250" dirty="0"/>
+          </a:p>
+        </p:txBody>
+      </p:sp>
+      <p:sp>
+        <p:nvSpPr>
+          <p:cNvPr id="9" name="Shape 6"/>
+          <p:cNvSpPr/>
+          <p:nvPr/>
+        </p:nvSpPr>
+        <p:spPr>
+          <a:xfrm>
+            <a:off x="731520" y="5212080"/>
+            <a:ext cx="10725912" cy="1097280"/>
+          </a:xfrm>
+          <a:prstGeom prst="roundRect">
+            <a:avLst>
+              <a:gd name="adj" fmla="val 6667"/>
+            </a:avLst>
+          </a:prstGeom>
+          <a:solidFill>
+            <a:srgbClr val="F4F5F9"/>
+          </a:solidFill>
+          <a:ln w="12700">
+            <a:solidFill>
+              <a:srgbClr val="F4F5F9"/>
+            </a:solidFill>
+            <a:prstDash val="solid"/>
+          </a:ln>
+        </p:spPr>
+      </p:sp>
+      <p:sp>
+        <p:nvSpPr>
+          <p:cNvPr id="10" name="Text 7"/>
+          <p:cNvSpPr/>
+          <p:nvPr/>
+        </p:nvSpPr>
+        <p:spPr>
+          <a:xfrm>
+            <a:off x="1005840" y="5376672"/>
+            <a:ext cx="10177272" cy="228600"/>
+          </a:xfrm>
+          <a:prstGeom prst="rect">
+            <a:avLst/>
+          </a:prstGeom>
+          <a:noFill/>
+          <a:ln/>
+        </p:spPr>
+        <p:txBody>
+          <a:bodyPr wrap="square" lIns="0" tIns="0" rIns="0" bIns="0" rtlCol="0" anchor="t"/>
+          <a:lstStyle/>
+          <a:p>
+            <a:pPr indent="0" marL="0">
+              <a:buNone/>
+            </a:pPr>
+            <a:r>
+              <a:rPr lang="en-US" sz="950" b="1" dirty="0">
                 <a:solidFill>
                   <a:srgbClr val="5B6475"/>
                 </a:solidFill>
@@ -3637,22 +3816,22 @@
                 <a:ea typeface="Arial" pitchFamily="34" charset="-122"/>
                 <a:cs typeface="Arial" pitchFamily="34" charset="-120"/>
               </a:rPr>
-              <a:t>Autant le dire avant la démonstration qu’après.</a:t>
-            </a:r>
-            <a:endParaRPr lang="en-US" sz="1250" dirty="0"/>
-          </a:p>
-        </p:txBody>
-      </p:sp>
-      <p:sp>
-        <p:nvSpPr>
-          <p:cNvPr id="8" name="Text 5"/>
-          <p:cNvSpPr/>
-          <p:nvPr/>
-        </p:nvSpPr>
-        <p:spPr>
-          <a:xfrm>
-            <a:off x="5394960" y="1371600"/>
-            <a:ext cx="6062472" cy="4389120"/>
+              <a:t>Pour être honnête</a:t>
+            </a:r>
+            <a:endParaRPr lang="en-US" sz="950" dirty="0"/>
+          </a:p>
+        </p:txBody>
+      </p:sp>
+      <p:sp>
+        <p:nvSpPr>
+          <p:cNvPr id="11" name="Text 8"/>
+          <p:cNvSpPr/>
+          <p:nvPr/>
+        </p:nvSpPr>
+        <p:spPr>
+          <a:xfrm>
+            <a:off x="1005840" y="5632704"/>
+            <a:ext cx="10177272" cy="548640"/>
           </a:xfrm>
           <a:prstGeom prst="rect">
             <a:avLst/>
@@ -3666,35 +3845,12 @@
           <a:p>
             <a:pPr indent="0" marL="0">
               <a:lnSpc>
-                <a:spcPct val="118000"/>
-              </a:lnSpc>
-              <a:spcAft>
-                <a:spcPts val="1400"/>
-              </a:spcAft>
-              <a:buNone/>
-            </a:pPr>
-            <a:r>
-              <a:rPr lang="en-US" sz="1400" b="1" dirty="0">
-                <a:solidFill>
-                  <a:srgbClr val="0B0F19"/>
-                </a:solidFill>
-                <a:latin typeface="Arial" pitchFamily="34" charset="0"/>
-                <a:ea typeface="Arial" pitchFamily="34" charset="-122"/>
-                <a:cs typeface="Arial" pitchFamily="34" charset="-120"/>
-              </a:rPr>
-              <a:t>L'inventaire fiscal certifié. </a:t>
-            </a:r>
-            <a:pPr indent="0" marL="0">
-              <a:lnSpc>
-                <a:spcPct val="118000"/>
-              </a:lnSpc>
-              <a:spcAft>
-                <a:spcPts val="1400"/>
-              </a:spcAft>
-              <a:buNone/>
-            </a:pPr>
-            <a:r>
-              <a:rPr lang="en-US" sz="1400" dirty="0">
+                <a:spcPct val="115000"/>
+              </a:lnSpc>
+              <a:buNone/>
+            </a:pPr>
+            <a:r>
+              <a:rPr lang="en-US" sz="1150" i="1" dirty="0">
                 <a:solidFill>
                   <a:srgbClr val="3D4556"/>
                 </a:solidFill>
@@ -3702,144 +3858,15 @@
                 <a:ea typeface="Arial" pitchFamily="34" charset="-122"/>
                 <a:cs typeface="Arial" pitchFamily="34" charset="-120"/>
               </a:rPr>
-              <a:t>Si votre commissaire aux comptes exige un comptage par un tiers, ce comptage reste. Quantinvo fait tout le reste de l'année, et il le prépare.</a:t>
-            </a:r>
-            <a:endParaRPr lang="en-US" sz="1400" dirty="0"/>
-          </a:p>
-          <a:p>
-            <a:pPr indent="0" marL="0">
-              <a:lnSpc>
-                <a:spcPct val="118000"/>
-              </a:lnSpc>
-              <a:spcAft>
-                <a:spcPts val="1400"/>
-              </a:spcAft>
-              <a:buNone/>
-            </a:pPr>
-            <a:r>
-              <a:rPr lang="en-US" sz="1400" b="1" dirty="0">
-                <a:solidFill>
-                  <a:srgbClr val="0B0F19"/>
-                </a:solidFill>
-                <a:latin typeface="Arial" pitchFamily="34" charset="0"/>
-                <a:ea typeface="Arial" pitchFamily="34" charset="-122"/>
-                <a:cs typeface="Arial" pitchFamily="34" charset="-120"/>
-              </a:rPr>
-              <a:t>Une connexion à votre ERP. </a:t>
-            </a:r>
-            <a:pPr indent="0" marL="0">
-              <a:lnSpc>
-                <a:spcPct val="118000"/>
-              </a:lnSpc>
-              <a:spcAft>
-                <a:spcPts val="1400"/>
-              </a:spcAft>
-              <a:buNone/>
-            </a:pPr>
-            <a:r>
-              <a:rPr lang="en-US" sz="1400" dirty="0">
-                <a:solidFill>
-                  <a:srgbClr val="3D4556"/>
-                </a:solidFill>
-                <a:latin typeface="Arial" pitchFamily="34" charset="0"/>
-                <a:ea typeface="Arial" pitchFamily="34" charset="-122"/>
-                <a:cs typeface="Arial" pitchFamily="34" charset="-120"/>
-              </a:rPr>
-              <a:t>Quantinvo importe vos fichiers et rend un Excel. L'ajustement du stock reste un geste dans votre système — c'est d'ailleurs le seul qui doive le rester.</a:t>
-            </a:r>
-            <a:endParaRPr lang="en-US" sz="1400" dirty="0"/>
-          </a:p>
-          <a:p>
-            <a:pPr indent="0" marL="0">
-              <a:lnSpc>
-                <a:spcPct val="118000"/>
-              </a:lnSpc>
-              <a:spcAft>
-                <a:spcPts val="1400"/>
-              </a:spcAft>
-              <a:buNone/>
-            </a:pPr>
-            <a:r>
-              <a:rPr lang="en-US" sz="1400" b="1" dirty="0">
-                <a:solidFill>
-                  <a:srgbClr val="0B0F19"/>
-                </a:solidFill>
-                <a:latin typeface="Arial" pitchFamily="34" charset="0"/>
-                <a:ea typeface="Arial" pitchFamily="34" charset="-122"/>
-                <a:cs typeface="Arial" pitchFamily="34" charset="-120"/>
-              </a:rPr>
-              <a:t>Android. </a:t>
-            </a:r>
-            <a:pPr indent="0" marL="0">
-              <a:lnSpc>
-                <a:spcPct val="118000"/>
-              </a:lnSpc>
-              <a:spcAft>
-                <a:spcPts val="1400"/>
-              </a:spcAft>
-              <a:buNone/>
-            </a:pPr>
-            <a:r>
-              <a:rPr lang="en-US" sz="1400" dirty="0">
-                <a:solidFill>
-                  <a:srgbClr val="3D4556"/>
-                </a:solidFill>
-                <a:latin typeface="Arial" pitchFamily="34" charset="0"/>
-                <a:ea typeface="Arial" pitchFamily="34" charset="-122"/>
-                <a:cs typeface="Arial" pitchFamily="34" charset="-120"/>
-              </a:rPr>
-              <a:t>L'application est sur iPhone aujourd'hui. La version Android est en cours.</a:t>
-            </a:r>
-            <a:endParaRPr lang="en-US" sz="1400" dirty="0"/>
-          </a:p>
-          <a:p>
-            <a:pPr indent="0" marL="0">
-              <a:lnSpc>
-                <a:spcPct val="118000"/>
-              </a:lnSpc>
-              <a:spcAft>
-                <a:spcPts val="1400"/>
-              </a:spcAft>
-              <a:buNone/>
-            </a:pPr>
-            <a:r>
-              <a:rPr lang="en-US" sz="1400" b="1" dirty="0">
-                <a:solidFill>
-                  <a:srgbClr val="0B0F19"/>
-                </a:solidFill>
-                <a:latin typeface="Arial" pitchFamily="34" charset="0"/>
-                <a:ea typeface="Arial" pitchFamily="34" charset="-122"/>
-                <a:cs typeface="Arial" pitchFamily="34" charset="-120"/>
-              </a:rPr>
-              <a:t>La connexion par votre annuaire. </a:t>
-            </a:r>
-            <a:pPr indent="0" marL="0">
-              <a:lnSpc>
-                <a:spcPct val="118000"/>
-              </a:lnSpc>
-              <a:spcAft>
-                <a:spcPts val="1400"/>
-              </a:spcAft>
-              <a:buNone/>
-            </a:pPr>
-            <a:r>
-              <a:rPr lang="en-US" sz="1400" dirty="0">
-                <a:solidFill>
-                  <a:srgbClr val="3D4556"/>
-                </a:solidFill>
-                <a:latin typeface="Arial" pitchFamily="34" charset="0"/>
-                <a:ea typeface="Arial" pitchFamily="34" charset="-122"/>
-                <a:cs typeface="Arial" pitchFamily="34" charset="-120"/>
-              </a:rPr>
-              <a:t>Les comptes sont nominatifs, créés par invitation. Pas de SAML ni d'Entra ID pour l'instant ; dites-nous si c'est une exigence.</a:t>
-            </a:r>
-            <a:endParaRPr lang="en-US" sz="1400" dirty="0"/>
-          </a:p>
-        </p:txBody>
-      </p:sp>
-      <p:sp>
-        <p:nvSpPr>
-          <p:cNvPr id="9" name="Text 6"/>
+              <a:t>Un terminal durci encaisse mieux les chocs qu'un téléphone, et si votre flotte est déjà amortie, l'argument du matériel pèse moins. Les nôtres ne bougent pas : un outil que le floor prend en main sans briefing, aucun plafond au nombre de compteurs, et une réconciliation qui n'existe plus.</a:t>
+            </a:r>
+            <a:endParaRPr lang="en-US" sz="1150" dirty="0"/>
+          </a:p>
+        </p:txBody>
+      </p:sp>
+      <p:sp>
+        <p:nvSpPr>
+          <p:cNvPr id="12" name="Text 9"/>
           <p:cNvSpPr/>
           <p:nvPr/>
         </p:nvSpPr>
@@ -3878,7 +3905,7 @@
       </p:sp>
       <p:sp>
         <p:nvSpPr>
-          <p:cNvPr id="10" name="Text 7"/>
+          <p:cNvPr id="13" name="Text 10"/>
           <p:cNvSpPr/>
           <p:nvPr/>
         </p:nvSpPr>
@@ -4043,7 +4070,7 @@
                 <a:ea typeface="Arial" pitchFamily="34" charset="-122"/>
                 <a:cs typeface="Arial" pitchFamily="34" charset="-120"/>
               </a:rPr>
-              <a:t>L'offre</a:t>
+              <a:t>Pour être clair</a:t>
             </a:r>
             <a:endParaRPr lang="en-US" sz="1000" dirty="0"/>
           </a:p>
@@ -4083,7 +4110,7 @@
         <p:spPr>
           <a:xfrm>
             <a:off x="731520" y="1325880"/>
-            <a:ext cx="4206240" cy="1645920"/>
+            <a:ext cx="4206240" cy="2011680"/>
           </a:xfrm>
           <a:prstGeom prst="rect">
             <a:avLst/>
@@ -4102,7 +4129,7 @@
               <a:buNone/>
             </a:pPr>
             <a:r>
-              <a:rPr lang="en-US" sz="2400" b="1" dirty="0">
+              <a:rPr lang="en-US" sz="2600" b="1" dirty="0">
                 <a:solidFill>
                   <a:srgbClr val="4636B0"/>
                 </a:solidFill>
@@ -4110,9 +4137,9 @@
                 <a:ea typeface="Arial" pitchFamily="34" charset="-122"/>
                 <a:cs typeface="Arial" pitchFamily="34" charset="-120"/>
               </a:rPr>
-              <a:t>Une licence par magasin, à l’année, comptages illimités.</a:t>
-            </a:r>
-            <a:endParaRPr lang="en-US" sz="2400" dirty="0"/>
+              <a:t>Ce qu'on ne vous promet pas.</a:t>
+            </a:r>
+            <a:endParaRPr lang="en-US" sz="2600" dirty="0"/>
           </a:p>
         </p:txBody>
       </p:sp>
@@ -4124,8 +4151,8 @@
         </p:nvSpPr>
         <p:spPr>
           <a:xfrm>
-            <a:off x="731520" y="3749040"/>
-            <a:ext cx="4206240" cy="868680"/>
+            <a:off x="731520" y="3383280"/>
+            <a:ext cx="4206240" cy="548640"/>
           </a:xfrm>
           <a:prstGeom prst="rect">
             <a:avLst/>
@@ -4137,69 +4164,30 @@
           <a:bodyPr wrap="square" lIns="0" tIns="0" rIns="0" bIns="0" rtlCol="0" anchor="t"/>
           <a:lstStyle/>
           <a:p>
-            <a:pPr indent="0" marL="0">
-              <a:buNone/>
-            </a:pPr>
-            <a:r>
-              <a:rPr lang="en-US" sz="5400" b="1" dirty="0">
-                <a:solidFill>
-                  <a:srgbClr val="4636B0"/>
-                </a:solidFill>
-                <a:latin typeface="Arial" pitchFamily="34" charset="0"/>
-                <a:ea typeface="Arial" pitchFamily="34" charset="-122"/>
-                <a:cs typeface="Arial" pitchFamily="34" charset="-120"/>
-              </a:rPr>
-              <a:t>0</a:t>
-            </a:r>
-            <a:endParaRPr lang="en-US" sz="5400" dirty="0"/>
+            <a:pPr algn="l" indent="0" marL="0">
+              <a:lnSpc>
+                <a:spcPct val="118000"/>
+              </a:lnSpc>
+              <a:buNone/>
+            </a:pPr>
+            <a:r>
+              <a:rPr lang="en-US" sz="1250" i="1" dirty="0">
+                <a:solidFill>
+                  <a:srgbClr val="5B6475"/>
+                </a:solidFill>
+                <a:latin typeface="Arial" pitchFamily="34" charset="0"/>
+                <a:ea typeface="Arial" pitchFamily="34" charset="-122"/>
+                <a:cs typeface="Arial" pitchFamily="34" charset="-120"/>
+              </a:rPr>
+              <a:t>Autant le dire avant la démonstration qu’après.</a:t>
+            </a:r>
+            <a:endParaRPr lang="en-US" sz="1250" dirty="0"/>
           </a:p>
         </p:txBody>
       </p:sp>
       <p:sp>
         <p:nvSpPr>
           <p:cNvPr id="8" name="Text 5"/>
-          <p:cNvSpPr/>
-          <p:nvPr/>
-        </p:nvSpPr>
-        <p:spPr>
-          <a:xfrm>
-            <a:off x="731520" y="4663440"/>
-            <a:ext cx="4206240" cy="731520"/>
-          </a:xfrm>
-          <a:prstGeom prst="rect">
-            <a:avLst/>
-          </a:prstGeom>
-          <a:noFill/>
-          <a:ln/>
-        </p:spPr>
-        <p:txBody>
-          <a:bodyPr wrap="square" lIns="0" tIns="0" rIns="0" bIns="0" rtlCol="0" anchor="t"/>
-          <a:lstStyle/>
-          <a:p>
-            <a:pPr indent="0" marL="0">
-              <a:lnSpc>
-                <a:spcPct val="115000"/>
-              </a:lnSpc>
-              <a:buNone/>
-            </a:pPr>
-            <a:r>
-              <a:rPr lang="en-US" sz="1200" dirty="0">
-                <a:solidFill>
-                  <a:srgbClr val="5B6475"/>
-                </a:solidFill>
-                <a:latin typeface="Arial" pitchFamily="34" charset="0"/>
-                <a:ea typeface="Arial" pitchFamily="34" charset="-122"/>
-                <a:cs typeface="Arial" pitchFamily="34" charset="-120"/>
-              </a:rPr>
-              <a:t>terminal à acheter, à louer ou à configurer.</a:t>
-            </a:r>
-            <a:endParaRPr lang="en-US" sz="1200" dirty="0"/>
-          </a:p>
-        </p:txBody>
-      </p:sp>
-      <p:sp>
-        <p:nvSpPr>
-          <p:cNvPr id="9" name="Text 6"/>
           <p:cNvSpPr/>
           <p:nvPr/>
         </p:nvSpPr>
@@ -4228,7 +4216,7 @@
               <a:buNone/>
             </a:pPr>
             <a:r>
-              <a:rPr lang="en-US" sz="1350" b="1" dirty="0">
+              <a:rPr lang="en-US" sz="1400" b="1" dirty="0">
                 <a:solidFill>
                   <a:srgbClr val="0B0F19"/>
                 </a:solidFill>
@@ -4236,7 +4224,7 @@
                 <a:ea typeface="Arial" pitchFamily="34" charset="-122"/>
                 <a:cs typeface="Arial" pitchFamily="34" charset="-120"/>
               </a:rPr>
-              <a:t>Le prix suit le stock, pas l'usage. </a:t>
+              <a:t>L'inventaire fiscal certifié. </a:t>
             </a:r>
             <a:pPr indent="0" marL="0">
               <a:lnSpc>
@@ -4248,7 +4236,7 @@
               <a:buNone/>
             </a:pPr>
             <a:r>
-              <a:rPr lang="en-US" sz="1350" dirty="0">
+              <a:rPr lang="en-US" sz="1400" dirty="0">
                 <a:solidFill>
                   <a:srgbClr val="3D4556"/>
                 </a:solidFill>
@@ -4256,9 +4244,9 @@
                 <a:ea typeface="Arial" pitchFamily="34" charset="-122"/>
                 <a:cs typeface="Arial" pitchFamily="34" charset="-120"/>
               </a:rPr>
-              <a:t>La licence se calcule sur le volume de stock du magasin, en unités. Elle ne dépend ni du nombre de compteurs, ni du nombre d'inventaires — tournants, aléatoires ou complets — dans l'année. Multiplier les comptages ne coûte rien de plus : c'est fait pour.</a:t>
-            </a:r>
-            <a:endParaRPr lang="en-US" sz="1350" dirty="0"/>
+              <a:t>Si votre commissaire aux comptes exige un comptage par un tiers, ce comptage reste. Quantinvo fait tout le reste de l'année, et il le prépare.</a:t>
+            </a:r>
+            <a:endParaRPr lang="en-US" sz="1400" dirty="0"/>
           </a:p>
           <a:p>
             <a:pPr indent="0" marL="0">
@@ -4271,7 +4259,7 @@
               <a:buNone/>
             </a:pPr>
             <a:r>
-              <a:rPr lang="en-US" sz="1350" b="1" dirty="0">
+              <a:rPr lang="en-US" sz="1400" b="1" dirty="0">
                 <a:solidFill>
                   <a:srgbClr val="0B0F19"/>
                 </a:solidFill>
@@ -4279,7 +4267,7 @@
                 <a:ea typeface="Arial" pitchFamily="34" charset="-122"/>
                 <a:cs typeface="Arial" pitchFamily="34" charset="-120"/>
               </a:rPr>
-              <a:t>Tout est compris. </a:t>
+              <a:t>Une connexion à votre ERP. </a:t>
             </a:r>
             <a:pPr indent="0" marL="0">
               <a:lnSpc>
@@ -4291,7 +4279,7 @@
               <a:buNone/>
             </a:pPr>
             <a:r>
-              <a:rPr lang="en-US" sz="1350" dirty="0">
+              <a:rPr lang="en-US" sz="1400" dirty="0">
                 <a:solidFill>
                   <a:srgbClr val="3D4556"/>
                 </a:solidFill>
@@ -4299,9 +4287,9 @@
                 <a:ea typeface="Arial" pitchFamily="34" charset="-122"/>
                 <a:cs typeface="Arial" pitchFamily="34" charset="-120"/>
               </a:rPr>
-              <a:t>L'application, le tableau de bord, les rapports, les mises à jour. Le chiffrage précis se fait au devis, sur votre volume de stock déclaré.</a:t>
-            </a:r>
-            <a:endParaRPr lang="en-US" sz="1350" dirty="0"/>
+              <a:t>Quantinvo importe vos fichiers et rend un Excel. L'ajustement du stock reste un geste dans votre système — c'est d'ailleurs le seul qui doive le rester.</a:t>
+            </a:r>
+            <a:endParaRPr lang="en-US" sz="1400" dirty="0"/>
           </a:p>
           <a:p>
             <a:pPr indent="0" marL="0">
@@ -4314,7 +4302,7 @@
               <a:buNone/>
             </a:pPr>
             <a:r>
-              <a:rPr lang="en-US" sz="1350" b="1" dirty="0">
+              <a:rPr lang="en-US" sz="1400" b="1" dirty="0">
                 <a:solidFill>
                   <a:srgbClr val="0B0F19"/>
                 </a:solidFill>
@@ -4322,7 +4310,7 @@
                 <a:ea typeface="Arial" pitchFamily="34" charset="-122"/>
                 <a:cs typeface="Arial" pitchFamily="34" charset="-120"/>
               </a:rPr>
-              <a:t>Un déploiement en jours, pas en mois. </a:t>
+              <a:t>Android. </a:t>
             </a:r>
             <a:pPr indent="0" marL="0">
               <a:lnSpc>
@@ -4334,7 +4322,7 @@
               <a:buNone/>
             </a:pPr>
             <a:r>
-              <a:rPr lang="en-US" sz="1350" dirty="0">
+              <a:rPr lang="en-US" sz="1400" dirty="0">
                 <a:solidFill>
                   <a:srgbClr val="3D4556"/>
                 </a:solidFill>
@@ -4342,15 +4330,58 @@
                 <a:ea typeface="Arial" pitchFamily="34" charset="-122"/>
                 <a:cs typeface="Arial" pitchFamily="34" charset="-120"/>
               </a:rPr>
-              <a:t>Pas de projet informatique : les comptes se créent par invitation, l'application s'installe — y compris par votre catalogue d'entreprise —, et le premier inventaire peut se faire la semaine de la signature.</a:t>
-            </a:r>
-            <a:endParaRPr lang="en-US" sz="1350" dirty="0"/>
-          </a:p>
-        </p:txBody>
-      </p:sp>
-      <p:sp>
-        <p:nvSpPr>
-          <p:cNvPr id="10" name="Text 7"/>
+              <a:t>L'application est sur iPhone aujourd'hui. La version Android est en cours.</a:t>
+            </a:r>
+            <a:endParaRPr lang="en-US" sz="1400" dirty="0"/>
+          </a:p>
+          <a:p>
+            <a:pPr indent="0" marL="0">
+              <a:lnSpc>
+                <a:spcPct val="118000"/>
+              </a:lnSpc>
+              <a:spcAft>
+                <a:spcPts val="1400"/>
+              </a:spcAft>
+              <a:buNone/>
+            </a:pPr>
+            <a:r>
+              <a:rPr lang="en-US" sz="1400" b="1" dirty="0">
+                <a:solidFill>
+                  <a:srgbClr val="0B0F19"/>
+                </a:solidFill>
+                <a:latin typeface="Arial" pitchFamily="34" charset="0"/>
+                <a:ea typeface="Arial" pitchFamily="34" charset="-122"/>
+                <a:cs typeface="Arial" pitchFamily="34" charset="-120"/>
+              </a:rPr>
+              <a:t>La connexion par votre annuaire. </a:t>
+            </a:r>
+            <a:pPr indent="0" marL="0">
+              <a:lnSpc>
+                <a:spcPct val="118000"/>
+              </a:lnSpc>
+              <a:spcAft>
+                <a:spcPts val="1400"/>
+              </a:spcAft>
+              <a:buNone/>
+            </a:pPr>
+            <a:r>
+              <a:rPr lang="en-US" sz="1400" dirty="0">
+                <a:solidFill>
+                  <a:srgbClr val="3D4556"/>
+                </a:solidFill>
+                <a:latin typeface="Arial" pitchFamily="34" charset="0"/>
+                <a:ea typeface="Arial" pitchFamily="34" charset="-122"/>
+                <a:cs typeface="Arial" pitchFamily="34" charset="-120"/>
+              </a:rPr>
+              <a:t>Les comptes sont nominatifs, créés par invitation. Pas de SAML ni d'Entra ID pour l'instant ; dites-nous si c'est une exigence.</a:t>
+            </a:r>
+            <a:endParaRPr lang="en-US" sz="1400" dirty="0"/>
+          </a:p>
+        </p:txBody>
+      </p:sp>
+      <p:sp>
+        <p:nvSpPr>
+          <p:cNvPr id="9" name="Text 6"/>
           <p:cNvSpPr/>
           <p:nvPr/>
         </p:nvSpPr>
@@ -4389,7 +4420,7 @@
       </p:sp>
       <p:sp>
         <p:nvSpPr>
-          <p:cNvPr id="11" name="Text 8"/>
+          <p:cNvPr id="10" name="Text 7"/>
           <p:cNvSpPr/>
           <p:nvPr/>
         </p:nvSpPr>
@@ -4474,8 +4505,8 @@
         </p:blipFill>
         <p:spPr>
           <a:xfrm>
-            <a:off x="731520" y="685800"/>
-            <a:ext cx="566928" cy="566928"/>
+            <a:off x="731520" y="384048"/>
+            <a:ext cx="329184" cy="329184"/>
           </a:xfrm>
           <a:prstGeom prst="rect">
             <a:avLst/>
@@ -4490,8 +4521,8 @@
         </p:nvSpPr>
         <p:spPr>
           <a:xfrm>
-            <a:off x="1444752" y="658368"/>
-            <a:ext cx="4572000" cy="621792"/>
+            <a:off x="1170432" y="347472"/>
+            <a:ext cx="2743200" cy="402336"/>
           </a:xfrm>
           <a:prstGeom prst="rect">
             <a:avLst/>
@@ -4507,7 +4538,7 @@
               <a:buNone/>
             </a:pPr>
             <a:r>
-              <a:rPr lang="en-US" sz="2400" b="1" dirty="0">
+              <a:rPr lang="en-US" sz="1600" b="1" dirty="0">
                 <a:solidFill>
                   <a:srgbClr val="0B0F19"/>
                 </a:solidFill>
@@ -4517,20 +4548,59 @@
               </a:rPr>
               <a:t>Quantinvo</a:t>
             </a:r>
-            <a:endParaRPr lang="en-US" sz="2400" dirty="0"/>
-          </a:p>
-        </p:txBody>
-      </p:sp>
-      <p:sp>
-        <p:nvSpPr>
-          <p:cNvPr id="4" name="Shape 1"/>
-          <p:cNvSpPr/>
-          <p:nvPr/>
-        </p:nvSpPr>
-        <p:spPr>
-          <a:xfrm>
-            <a:off x="731520" y="1481328"/>
-            <a:ext cx="2377440" cy="25603"/>
+            <a:endParaRPr lang="en-US" sz="1600" dirty="0"/>
+          </a:p>
+        </p:txBody>
+      </p:sp>
+      <p:sp>
+        <p:nvSpPr>
+          <p:cNvPr id="4" name="Text 1"/>
+          <p:cNvSpPr/>
+          <p:nvPr/>
+        </p:nvSpPr>
+        <p:spPr>
+          <a:xfrm>
+            <a:off x="5971032" y="347472"/>
+            <a:ext cx="5486400" cy="402336"/>
+          </a:xfrm>
+          <a:prstGeom prst="rect">
+            <a:avLst/>
+          </a:prstGeom>
+          <a:noFill/>
+          <a:ln/>
+        </p:spPr>
+        <p:txBody>
+          <a:bodyPr wrap="square" lIns="0" tIns="0" rIns="0" bIns="0" rtlCol="0" anchor="ctr"/>
+          <a:lstStyle/>
+          <a:p>
+            <a:pPr algn="r" indent="0" marL="0">
+              <a:buNone/>
+            </a:pPr>
+            <a:r>
+              <a:rPr lang="en-US" sz="1000" dirty="0">
+                <a:solidFill>
+                  <a:srgbClr val="5B6475"/>
+                </a:solidFill>
+                <a:latin typeface="Arial" pitchFamily="34" charset="0"/>
+                <a:ea typeface="Arial" pitchFamily="34" charset="-122"/>
+                <a:cs typeface="Arial" pitchFamily="34" charset="-120"/>
+              </a:rPr>
+              <a:t>L'offre</a:t>
+            </a:r>
+            <a:endParaRPr lang="en-US" sz="1000" dirty="0"/>
+          </a:p>
+        </p:txBody>
+      </p:sp>
+      <p:sp>
+        <p:nvSpPr>
+          <p:cNvPr id="5" name="Shape 2"/>
+          <p:cNvSpPr/>
+          <p:nvPr/>
+        </p:nvSpPr>
+        <p:spPr>
+          <a:xfrm>
+            <a:off x="731520" y="877824"/>
+            <a:ext cx="10725912" cy="25603"/>
           </a:xfrm>
           <a:prstGeom prst="rect">
             <a:avLst/>
@@ -4548,6 +4618,478 @@
       </p:sp>
       <p:sp>
         <p:nvSpPr>
+          <p:cNvPr id="6" name="Text 3"/>
+          <p:cNvSpPr/>
+          <p:nvPr/>
+        </p:nvSpPr>
+        <p:spPr>
+          <a:xfrm>
+            <a:off x="731520" y="1325880"/>
+            <a:ext cx="4206240" cy="1645920"/>
+          </a:xfrm>
+          <a:prstGeom prst="rect">
+            <a:avLst/>
+          </a:prstGeom>
+          <a:noFill/>
+          <a:ln/>
+        </p:spPr>
+        <p:txBody>
+          <a:bodyPr wrap="square" lIns="0" tIns="0" rIns="0" bIns="0" rtlCol="0" anchor="t"/>
+          <a:lstStyle/>
+          <a:p>
+            <a:pPr indent="0" marL="0">
+              <a:lnSpc>
+                <a:spcPct val="105000"/>
+              </a:lnSpc>
+              <a:buNone/>
+            </a:pPr>
+            <a:r>
+              <a:rPr lang="en-US" sz="2400" b="1" dirty="0">
+                <a:solidFill>
+                  <a:srgbClr val="4636B0"/>
+                </a:solidFill>
+                <a:latin typeface="Arial" pitchFamily="34" charset="0"/>
+                <a:ea typeface="Arial" pitchFamily="34" charset="-122"/>
+                <a:cs typeface="Arial" pitchFamily="34" charset="-120"/>
+              </a:rPr>
+              <a:t>Une licence par magasin, à l’année, comptages illimités.</a:t>
+            </a:r>
+            <a:endParaRPr lang="en-US" sz="2400" dirty="0"/>
+          </a:p>
+        </p:txBody>
+      </p:sp>
+      <p:sp>
+        <p:nvSpPr>
+          <p:cNvPr id="7" name="Text 4"/>
+          <p:cNvSpPr/>
+          <p:nvPr/>
+        </p:nvSpPr>
+        <p:spPr>
+          <a:xfrm>
+            <a:off x="731520" y="3749040"/>
+            <a:ext cx="4206240" cy="868680"/>
+          </a:xfrm>
+          <a:prstGeom prst="rect">
+            <a:avLst/>
+          </a:prstGeom>
+          <a:noFill/>
+          <a:ln/>
+        </p:spPr>
+        <p:txBody>
+          <a:bodyPr wrap="square" lIns="0" tIns="0" rIns="0" bIns="0" rtlCol="0" anchor="t"/>
+          <a:lstStyle/>
+          <a:p>
+            <a:pPr indent="0" marL="0">
+              <a:buNone/>
+            </a:pPr>
+            <a:r>
+              <a:rPr lang="en-US" sz="5400" b="1" dirty="0">
+                <a:solidFill>
+                  <a:srgbClr val="4636B0"/>
+                </a:solidFill>
+                <a:latin typeface="Arial" pitchFamily="34" charset="0"/>
+                <a:ea typeface="Arial" pitchFamily="34" charset="-122"/>
+                <a:cs typeface="Arial" pitchFamily="34" charset="-120"/>
+              </a:rPr>
+              <a:t>0</a:t>
+            </a:r>
+            <a:endParaRPr lang="en-US" sz="5400" dirty="0"/>
+          </a:p>
+        </p:txBody>
+      </p:sp>
+      <p:sp>
+        <p:nvSpPr>
+          <p:cNvPr id="8" name="Text 5"/>
+          <p:cNvSpPr/>
+          <p:nvPr/>
+        </p:nvSpPr>
+        <p:spPr>
+          <a:xfrm>
+            <a:off x="731520" y="4663440"/>
+            <a:ext cx="4206240" cy="731520"/>
+          </a:xfrm>
+          <a:prstGeom prst="rect">
+            <a:avLst/>
+          </a:prstGeom>
+          <a:noFill/>
+          <a:ln/>
+        </p:spPr>
+        <p:txBody>
+          <a:bodyPr wrap="square" lIns="0" tIns="0" rIns="0" bIns="0" rtlCol="0" anchor="t"/>
+          <a:lstStyle/>
+          <a:p>
+            <a:pPr indent="0" marL="0">
+              <a:lnSpc>
+                <a:spcPct val="115000"/>
+              </a:lnSpc>
+              <a:buNone/>
+            </a:pPr>
+            <a:r>
+              <a:rPr lang="en-US" sz="1200" dirty="0">
+                <a:solidFill>
+                  <a:srgbClr val="5B6475"/>
+                </a:solidFill>
+                <a:latin typeface="Arial" pitchFamily="34" charset="0"/>
+                <a:ea typeface="Arial" pitchFamily="34" charset="-122"/>
+                <a:cs typeface="Arial" pitchFamily="34" charset="-120"/>
+              </a:rPr>
+              <a:t>terminal à acheter, à louer ou à configurer.</a:t>
+            </a:r>
+            <a:endParaRPr lang="en-US" sz="1200" dirty="0"/>
+          </a:p>
+        </p:txBody>
+      </p:sp>
+      <p:sp>
+        <p:nvSpPr>
+          <p:cNvPr id="9" name="Text 6"/>
+          <p:cNvSpPr/>
+          <p:nvPr/>
+        </p:nvSpPr>
+        <p:spPr>
+          <a:xfrm>
+            <a:off x="5394960" y="1371600"/>
+            <a:ext cx="6062472" cy="4389120"/>
+          </a:xfrm>
+          <a:prstGeom prst="rect">
+            <a:avLst/>
+          </a:prstGeom>
+          <a:noFill/>
+          <a:ln/>
+        </p:spPr>
+        <p:txBody>
+          <a:bodyPr wrap="square" lIns="0" tIns="0" rIns="0" bIns="0" rtlCol="0" anchor="t"/>
+          <a:lstStyle/>
+          <a:p>
+            <a:pPr indent="0" marL="0">
+              <a:lnSpc>
+                <a:spcPct val="118000"/>
+              </a:lnSpc>
+              <a:spcAft>
+                <a:spcPts val="1400"/>
+              </a:spcAft>
+              <a:buNone/>
+            </a:pPr>
+            <a:r>
+              <a:rPr lang="en-US" sz="1350" b="1" dirty="0">
+                <a:solidFill>
+                  <a:srgbClr val="0B0F19"/>
+                </a:solidFill>
+                <a:latin typeface="Arial" pitchFamily="34" charset="0"/>
+                <a:ea typeface="Arial" pitchFamily="34" charset="-122"/>
+                <a:cs typeface="Arial" pitchFamily="34" charset="-120"/>
+              </a:rPr>
+              <a:t>Le prix suit le stock, pas l'usage. </a:t>
+            </a:r>
+            <a:pPr indent="0" marL="0">
+              <a:lnSpc>
+                <a:spcPct val="118000"/>
+              </a:lnSpc>
+              <a:spcAft>
+                <a:spcPts val="1400"/>
+              </a:spcAft>
+              <a:buNone/>
+            </a:pPr>
+            <a:r>
+              <a:rPr lang="en-US" sz="1350" dirty="0">
+                <a:solidFill>
+                  <a:srgbClr val="3D4556"/>
+                </a:solidFill>
+                <a:latin typeface="Arial" pitchFamily="34" charset="0"/>
+                <a:ea typeface="Arial" pitchFamily="34" charset="-122"/>
+                <a:cs typeface="Arial" pitchFamily="34" charset="-120"/>
+              </a:rPr>
+              <a:t>La licence se calcule sur le volume de stock du magasin, en unités. Elle ne dépend ni du nombre de compteurs, ni du nombre d'inventaires — tournants, aléatoires ou complets — dans l'année. Chaque chef d'équipe peut compter son rayon quand il le décide : ça ne coûte rien de plus.</a:t>
+            </a:r>
+            <a:endParaRPr lang="en-US" sz="1350" dirty="0"/>
+          </a:p>
+          <a:p>
+            <a:pPr indent="0" marL="0">
+              <a:lnSpc>
+                <a:spcPct val="118000"/>
+              </a:lnSpc>
+              <a:spcAft>
+                <a:spcPts val="1400"/>
+              </a:spcAft>
+              <a:buNone/>
+            </a:pPr>
+            <a:r>
+              <a:rPr lang="en-US" sz="1350" b="1" dirty="0">
+                <a:solidFill>
+                  <a:srgbClr val="0B0F19"/>
+                </a:solidFill>
+                <a:latin typeface="Arial" pitchFamily="34" charset="0"/>
+                <a:ea typeface="Arial" pitchFamily="34" charset="-122"/>
+                <a:cs typeface="Arial" pitchFamily="34" charset="-120"/>
+              </a:rPr>
+              <a:t>Tout est compris. </a:t>
+            </a:r>
+            <a:pPr indent="0" marL="0">
+              <a:lnSpc>
+                <a:spcPct val="118000"/>
+              </a:lnSpc>
+              <a:spcAft>
+                <a:spcPts val="1400"/>
+              </a:spcAft>
+              <a:buNone/>
+            </a:pPr>
+            <a:r>
+              <a:rPr lang="en-US" sz="1350" dirty="0">
+                <a:solidFill>
+                  <a:srgbClr val="3D4556"/>
+                </a:solidFill>
+                <a:latin typeface="Arial" pitchFamily="34" charset="0"/>
+                <a:ea typeface="Arial" pitchFamily="34" charset="-122"/>
+                <a:cs typeface="Arial" pitchFamily="34" charset="-120"/>
+              </a:rPr>
+              <a:t>L'application, le tableau de bord, les rapports, les mises à jour. Le chiffrage précis se fait au devis, sur votre volume de stock déclaré.</a:t>
+            </a:r>
+            <a:endParaRPr lang="en-US" sz="1350" dirty="0"/>
+          </a:p>
+          <a:p>
+            <a:pPr indent="0" marL="0">
+              <a:lnSpc>
+                <a:spcPct val="118000"/>
+              </a:lnSpc>
+              <a:spcAft>
+                <a:spcPts val="1400"/>
+              </a:spcAft>
+              <a:buNone/>
+            </a:pPr>
+            <a:r>
+              <a:rPr lang="en-US" sz="1350" b="1" dirty="0">
+                <a:solidFill>
+                  <a:srgbClr val="0B0F19"/>
+                </a:solidFill>
+                <a:latin typeface="Arial" pitchFamily="34" charset="0"/>
+                <a:ea typeface="Arial" pitchFamily="34" charset="-122"/>
+                <a:cs typeface="Arial" pitchFamily="34" charset="-120"/>
+              </a:rPr>
+              <a:t>Un déploiement en jours, pas en mois. </a:t>
+            </a:r>
+            <a:pPr indent="0" marL="0">
+              <a:lnSpc>
+                <a:spcPct val="118000"/>
+              </a:lnSpc>
+              <a:spcAft>
+                <a:spcPts val="1400"/>
+              </a:spcAft>
+              <a:buNone/>
+            </a:pPr>
+            <a:r>
+              <a:rPr lang="en-US" sz="1350" dirty="0">
+                <a:solidFill>
+                  <a:srgbClr val="3D4556"/>
+                </a:solidFill>
+                <a:latin typeface="Arial" pitchFamily="34" charset="0"/>
+                <a:ea typeface="Arial" pitchFamily="34" charset="-122"/>
+                <a:cs typeface="Arial" pitchFamily="34" charset="-120"/>
+              </a:rPr>
+              <a:t>Pas de projet informatique : les comptes se créent par invitation, l'application s'installe — y compris par votre catalogue d'entreprise —, et le premier inventaire peut se faire la semaine de la signature.</a:t>
+            </a:r>
+            <a:endParaRPr lang="en-US" sz="1350" dirty="0"/>
+          </a:p>
+        </p:txBody>
+      </p:sp>
+      <p:sp>
+        <p:nvSpPr>
+          <p:cNvPr id="10" name="Text 7"/>
+          <p:cNvSpPr/>
+          <p:nvPr/>
+        </p:nvSpPr>
+        <p:spPr>
+          <a:xfrm>
+            <a:off x="731520" y="6400800"/>
+            <a:ext cx="6400800" cy="274320"/>
+          </a:xfrm>
+          <a:prstGeom prst="rect">
+            <a:avLst/>
+          </a:prstGeom>
+          <a:noFill/>
+          <a:ln/>
+        </p:spPr>
+        <p:txBody>
+          <a:bodyPr wrap="square" lIns="0" tIns="0" rIns="0" bIns="0" rtlCol="0" anchor="t"/>
+          <a:lstStyle/>
+          <a:p>
+            <a:pPr indent="0" marL="0">
+              <a:buNone/>
+            </a:pPr>
+            <a:r>
+              <a:rPr lang="en-US" sz="900" dirty="0">
+                <a:solidFill>
+                  <a:srgbClr val="5B6475"/>
+                </a:solidFill>
+                <a:latin typeface="Arial" pitchFamily="34" charset="0"/>
+                <a:ea typeface="Arial" pitchFamily="34" charset="-122"/>
+                <a:cs typeface="Arial" pitchFamily="34" charset="-120"/>
+              </a:rPr>
+              <a:t>Quantinvo · proposition pour La Samaritaine</a:t>
+            </a:r>
+            <a:endParaRPr lang="en-US" sz="900" dirty="0"/>
+          </a:p>
+        </p:txBody>
+      </p:sp>
+      <p:sp>
+        <p:nvSpPr>
+          <p:cNvPr id="11" name="Text 8"/>
+          <p:cNvSpPr/>
+          <p:nvPr/>
+        </p:nvSpPr>
+        <p:spPr>
+          <a:xfrm>
+            <a:off x="11000232" y="6400800"/>
+            <a:ext cx="457200" cy="274320"/>
+          </a:xfrm>
+          <a:prstGeom prst="rect">
+            <a:avLst/>
+          </a:prstGeom>
+          <a:noFill/>
+          <a:ln/>
+        </p:spPr>
+        <p:txBody>
+          <a:bodyPr wrap="square" lIns="0" tIns="0" rIns="0" bIns="0" rtlCol="0" anchor="t"/>
+          <a:lstStyle/>
+          <a:p>
+            <a:pPr algn="r" indent="0" marL="0">
+              <a:buNone/>
+            </a:pPr>
+            <a:r>
+              <a:rPr lang="en-US" sz="900" dirty="0">
+                <a:solidFill>
+                  <a:srgbClr val="5B6475"/>
+                </a:solidFill>
+                <a:latin typeface="Arial" pitchFamily="34" charset="0"/>
+                <a:ea typeface="Arial" pitchFamily="34" charset="-122"/>
+                <a:cs typeface="Arial" pitchFamily="34" charset="-120"/>
+              </a:rPr>
+              <a:t>14</a:t>
+            </a:r>
+            <a:endParaRPr lang="en-US" sz="900" dirty="0"/>
+          </a:p>
+        </p:txBody>
+      </p:sp>
+    </p:spTree>
+  </p:cSld>
+  <p:clrMapOvr>
+    <a:masterClrMapping/>
+  </p:clrMapOvr>
+</p:sld>
+</file>
+
+<file path=ppt/slides/slide15.xml><?xml version="1.0" encoding="utf-8"?>
+<p:sld xmlns:a="http://schemas.openxmlformats.org/drawingml/2006/main" xmlns:r="http://schemas.openxmlformats.org/officeDocument/2006/relationships" xmlns:p="http://schemas.openxmlformats.org/presentationml/2006/main">
+  <p:cSld name="Slide 15">
+    <p:bg>
+      <p:bgPr>
+        <a:solidFill>
+          <a:srgbClr val="FFFFFF"/>
+        </a:solidFill>
+      </p:bgPr>
+    </p:bg>
+    <p:spTree>
+      <p:nvGrpSpPr>
+        <p:cNvPr id="1" name=""/>
+        <p:cNvGrpSpPr/>
+        <p:nvPr/>
+      </p:nvGrpSpPr>
+      <p:grpSpPr>
+        <a:xfrm>
+          <a:off x="0" y="0"/>
+          <a:ext cx="0" cy="0"/>
+          <a:chOff x="0" y="0"/>
+          <a:chExt cx="0" cy="0"/>
+        </a:xfrm>
+      </p:grpSpPr>
+      <p:pic>
+        <p:nvPicPr>
+          <p:cNvPr id="2" name="Image 0" descr="preencoded.png">    </p:cNvPr>
+          <p:cNvPicPr>
+            <a:picLocks noChangeAspect="1"/>
+          </p:cNvPicPr>
+          <p:nvPr/>
+        </p:nvPicPr>
+        <p:blipFill>
+          <a:blip r:embed="rId1"/>
+          <a:stretch>
+            <a:fillRect/>
+          </a:stretch>
+        </p:blipFill>
+        <p:spPr>
+          <a:xfrm>
+            <a:off x="731520" y="685800"/>
+            <a:ext cx="566928" cy="566928"/>
+          </a:xfrm>
+          <a:prstGeom prst="rect">
+            <a:avLst/>
+          </a:prstGeom>
+        </p:spPr>
+      </p:pic>
+      <p:sp>
+        <p:nvSpPr>
+          <p:cNvPr id="3" name="Text 0"/>
+          <p:cNvSpPr/>
+          <p:nvPr/>
+        </p:nvSpPr>
+        <p:spPr>
+          <a:xfrm>
+            <a:off x="1444752" y="658368"/>
+            <a:ext cx="4572000" cy="621792"/>
+          </a:xfrm>
+          <a:prstGeom prst="rect">
+            <a:avLst/>
+          </a:prstGeom>
+          <a:noFill/>
+          <a:ln/>
+        </p:spPr>
+        <p:txBody>
+          <a:bodyPr wrap="square" lIns="0" tIns="0" rIns="0" bIns="0" rtlCol="0" anchor="ctr"/>
+          <a:lstStyle/>
+          <a:p>
+            <a:pPr indent="0" marL="0">
+              <a:buNone/>
+            </a:pPr>
+            <a:r>
+              <a:rPr lang="en-US" sz="2400" b="1" dirty="0">
+                <a:solidFill>
+                  <a:srgbClr val="0B0F19"/>
+                </a:solidFill>
+                <a:latin typeface="Arial" pitchFamily="34" charset="0"/>
+                <a:ea typeface="Arial" pitchFamily="34" charset="-122"/>
+                <a:cs typeface="Arial" pitchFamily="34" charset="-120"/>
+              </a:rPr>
+              <a:t>Quantinvo</a:t>
+            </a:r>
+            <a:endParaRPr lang="en-US" sz="2400" dirty="0"/>
+          </a:p>
+        </p:txBody>
+      </p:sp>
+      <p:sp>
+        <p:nvSpPr>
+          <p:cNvPr id="4" name="Shape 1"/>
+          <p:cNvSpPr/>
+          <p:nvPr/>
+        </p:nvSpPr>
+        <p:spPr>
+          <a:xfrm>
+            <a:off x="731520" y="1481328"/>
+            <a:ext cx="2377440" cy="25603"/>
+          </a:xfrm>
+          <a:prstGeom prst="rect">
+            <a:avLst/>
+          </a:prstGeom>
+          <a:solidFill>
+            <a:srgbClr val="38C9FF"/>
+          </a:solidFill>
+          <a:ln w="12700">
+            <a:solidFill>
+              <a:srgbClr val="38C9FF"/>
+            </a:solidFill>
+            <a:prstDash val="solid"/>
+          </a:ln>
+        </p:spPr>
+      </p:sp>
+      <p:sp>
+        <p:nvSpPr>
           <p:cNvPr id="5" name="Text 2"/>
           <p:cNvSpPr/>
           <p:nvPr/>
@@ -4624,7 +5166,7 @@
                 <a:ea typeface="Arial" pitchFamily="34" charset="-122"/>
                 <a:cs typeface="Arial" pitchFamily="34" charset="-120"/>
               </a:rPr>
-              <a:t>Une démonstration sur votre propre stock théorique : vous l'importez tel quel, on balise un rayon, on compte, et vous repartez avec le rapport. Un mardi matin avant l'ouverture suffit.</a:t>
+              <a:t>Une démonstration avec un chef d'équipe et deux vendeurs, sur votre propre stock théorique : il l'importe, ils balisent leur rayon, ils comptent, et vous recevez le rapport. Un mardi matin avant l'ouverture suffit.</a:t>
             </a:r>
             <a:endParaRPr lang="en-US" sz="1450" dirty="0"/>
           </a:p>
@@ -4918,7 +5460,7 @@
         <p:spPr>
           <a:xfrm>
             <a:off x="731520" y="2926080"/>
-            <a:ext cx="4206240" cy="822960"/>
+            <a:ext cx="4206240" cy="1097280"/>
           </a:xfrm>
           <a:prstGeom prst="rect">
             <a:avLst/>
@@ -4945,7 +5487,7 @@
                 <a:ea typeface="Arial" pitchFamily="34" charset="-122"/>
                 <a:cs typeface="Arial" pitchFamily="34" charset="-120"/>
               </a:rPr>
-              <a:t>Reprise de votre déroulement d'inventaire tournant, étape par étape. Chaque ligne est tirée de votre document.</a:t>
+              <a:t>Reprise de votre déroulement d'inventaire tournant, étape par étape. Chaque ligne est tirée de votre document — et chaque ligne est portée par l'Inventory Control.</a:t>
             </a:r>
             <a:endParaRPr lang="en-US" sz="1200" dirty="0"/>
           </a:p>
@@ -5564,7 +6106,7 @@
                 <a:ea typeface="Arial" pitchFamily="34" charset="-122"/>
                 <a:cs typeface="Arial" pitchFamily="34" charset="-120"/>
               </a:rPr>
-              <a:t>Le stock du jour, la session, les terminaux, le briefing : une part de chaque inventaire qui ne compte aucun article.</a:t>
+              <a:t>Le balisage, le stock du jour, la session, les terminaux, le briefing : la moitié de chaque inventaire ne compte aucun article.</a:t>
             </a:r>
             <a:endParaRPr lang="en-US" sz="1300" dirty="0"/>
           </a:p>
@@ -5693,7 +6235,7 @@
                 <a:ea typeface="Arial" pitchFamily="34" charset="-122"/>
                 <a:cs typeface="Arial" pitchFamily="34" charset="-120"/>
               </a:rPr>
-              <a:t>L'ajustement du stock, après validation. La seule de ces quatre étapes qui doive vraiment rester entre vos mains.</a:t>
+              <a:t>L'ajustement du stock, après validation. Avec le programme des inventaires, la seule chose qui doive vraiment rester entre vos mains.</a:t>
             </a:r>
             <a:endParaRPr lang="en-US" sz="1300" dirty="0"/>
           </a:p>
@@ -5759,7 +6301,7 @@
                 <a:ea typeface="Arial" pitchFamily="34" charset="-122"/>
                 <a:cs typeface="Arial" pitchFamily="34" charset="-120"/>
               </a:rPr>
-              <a:t>Et ça se multiplie</a:t>
+              <a:t>L'idée de cette proposition</a:t>
             </a:r>
             <a:endParaRPr lang="en-US" sz="950" dirty="0"/>
           </a:p>
@@ -5801,7 +6343,7 @@
                 <a:ea typeface="Arial" pitchFamily="34" charset="-122"/>
                 <a:cs typeface="Arial" pitchFamily="34" charset="-120"/>
               </a:rPr>
-              <a:t>Un inventaire tournant, par construction, se répète. Chaque comptage rejoue la même préparation, la même surveillance, la même consolidation — c'est cette charge fixe qui limite le nombre d'inventaires.</a:t>
+              <a:t>Rendre l'inventaire aux équipes de vente, du balisage au dernier scan : le chef d'équipe supervise, ses vendeurs comptent. L'Inventory Control fixe les règles, reçoit le rapport, valide et ajuste — il ne conduit plus rien.</a:t>
             </a:r>
             <a:endParaRPr lang="en-US" sz="1150" dirty="0"/>
           </a:p>
@@ -6233,7 +6775,7 @@
                 <a:ea typeface="Arial" pitchFamily="34" charset="-122"/>
                 <a:cs typeface="Arial" pitchFamily="34" charset="-120"/>
               </a:rPr>
-              <a:t>Pensé pour l'inventaire tournant. </a:t>
+              <a:t>Assez simple pour le floor. </a:t>
             </a:r>
             <a:pPr indent="0" marL="0">
               <a:lnSpc>
@@ -6253,7 +6795,7 @@
                 <a:ea typeface="Arial" pitchFamily="34" charset="-122"/>
                 <a:cs typeface="Arial" pitchFamily="34" charset="-120"/>
               </a:rPr>
-              <a:t>Des comptages toute l'année — un rayon, une marque, une liste d'articles — plutôt qu'une nuit par an. C'est le cœur de l'outil, pas une option.</a:t>
+              <a:t>Prise en main en dix minutes, sans briefing matériel : c'est ce qui permet de confier l'inventaire aux équipes de vente plutôt qu'à un service spécialisé.</a:t>
             </a:r>
             <a:endParaRPr lang="en-US" sz="1300" dirty="0"/>
           </a:p>
@@ -6276,7 +6818,7 @@
                 <a:ea typeface="Arial" pitchFamily="34" charset="-122"/>
                 <a:cs typeface="Arial" pitchFamily="34" charset="-120"/>
               </a:rPr>
-              <a:t>Le même geste qu'aujourd'hui. </a:t>
+              <a:t>Pensé pour l'inventaire tournant. </a:t>
             </a:r>
             <a:pPr indent="0" marL="0">
               <a:lnSpc>
@@ -6296,7 +6838,7 @@
                 <a:ea typeface="Arial" pitchFamily="34" charset="-122"/>
                 <a:cs typeface="Arial" pitchFamily="34" charset="-120"/>
               </a:rPr>
-              <a:t>Scanner la balise de la zone, scanner les articles, clôturer, passer à la suivante. Vos équipes ne changent pas de procédure : elles changent d'outil.</a:t>
+              <a:t>Des comptages toute l'année — un rayon, une marque, une liste d'articles — plutôt qu'une nuit par an. C'est le cœur de l'outil, pas une option.</a:t>
             </a:r>
             <a:endParaRPr lang="en-US" sz="1300" dirty="0"/>
           </a:p>
@@ -6508,7 +7050,7 @@
                 <a:ea typeface="Arial" pitchFamily="34" charset="-122"/>
                 <a:cs typeface="Arial" pitchFamily="34" charset="-120"/>
               </a:rPr>
-              <a:t>Avec Quantinvo</a:t>
+              <a:t>Qui fait quoi</a:t>
             </a:r>
             <a:endParaRPr lang="en-US" sz="1000" dirty="0"/>
           </a:p>
@@ -6547,8 +7089,8 @@
         </p:nvSpPr>
         <p:spPr>
           <a:xfrm>
-            <a:off x="731520" y="1325880"/>
-            <a:ext cx="4206240" cy="1280160"/>
+            <a:off x="731520" y="1234440"/>
+            <a:ext cx="10725912" cy="822960"/>
           </a:xfrm>
           <a:prstGeom prst="rect">
             <a:avLst/>
@@ -6567,7 +7109,7 @@
               <a:buNone/>
             </a:pPr>
             <a:r>
-              <a:rPr lang="en-US" sz="2600" b="1" dirty="0">
+              <a:rPr lang="en-US" sz="2400" b="1" dirty="0">
                 <a:solidFill>
                   <a:srgbClr val="4636B0"/>
                 </a:solidFill>
@@ -6575,9 +7117,9 @@
                 <a:ea typeface="Arial" pitchFamily="34" charset="-122"/>
                 <a:cs typeface="Arial" pitchFamily="34" charset="-120"/>
               </a:rPr>
-              <a:t>La même journée, avec Quantinvo.</a:t>
-            </a:r>
-            <a:endParaRPr lang="en-US" sz="2600" dirty="0"/>
+              <a:t>L'inventaire appartient au floor. Voici leurs écrans.</a:t>
+            </a:r>
+            <a:endParaRPr lang="en-US" sz="2400" dirty="0"/>
           </a:p>
         </p:txBody>
       </p:sp>
@@ -6589,8 +7131,8 @@
         </p:nvSpPr>
         <p:spPr>
           <a:xfrm>
-            <a:off x="731520" y="2651760"/>
-            <a:ext cx="4206240" cy="822960"/>
+            <a:off x="731520" y="1965960"/>
+            <a:ext cx="3392424" cy="365760"/>
           </a:xfrm>
           <a:prstGeom prst="rect">
             <a:avLst/>
@@ -6602,24 +7144,24 @@
           <a:bodyPr wrap="square" lIns="0" tIns="0" rIns="0" bIns="0" rtlCol="0" anchor="t"/>
           <a:lstStyle/>
           <a:p>
-            <a:pPr algn="l" indent="0" marL="0">
-              <a:lnSpc>
-                <a:spcPct val="118000"/>
-              </a:lnSpc>
-              <a:buNone/>
-            </a:pPr>
-            <a:r>
-              <a:rPr lang="en-US" sz="1200" i="1" dirty="0">
-                <a:solidFill>
-                  <a:srgbClr val="5B6475"/>
-                </a:solidFill>
-                <a:latin typeface="Arial" pitchFamily="34" charset="0"/>
-                <a:ea typeface="Arial" pitchFamily="34" charset="-122"/>
-                <a:cs typeface="Arial" pitchFamily="34" charset="-120"/>
-              </a:rPr>
-              <a:t>Le déroulement ne change pas. Ce qui change, c'est ce qu'il reste à faire autour.</a:t>
-            </a:r>
-            <a:endParaRPr lang="en-US" sz="1200" dirty="0"/>
+            <a:pPr indent="0" marL="0">
+              <a:lnSpc>
+                <a:spcPct val="100000"/>
+              </a:lnSpc>
+              <a:buNone/>
+            </a:pPr>
+            <a:r>
+              <a:rPr lang="en-US" sz="1350" b="1" dirty="0">
+                <a:solidFill>
+                  <a:srgbClr val="4636B0"/>
+                </a:solidFill>
+                <a:latin typeface="Arial" pitchFamily="34" charset="0"/>
+                <a:ea typeface="Arial" pitchFamily="34" charset="-122"/>
+                <a:cs typeface="Arial" pitchFamily="34" charset="-120"/>
+              </a:rPr>
+              <a:t>Le chef d'équipe prépare</a:t>
+            </a:r>
+            <a:endParaRPr lang="en-US" sz="1350" dirty="0"/>
           </a:p>
         </p:txBody>
       </p:sp>
@@ -6631,8 +7173,8 @@
         </p:nvSpPr>
         <p:spPr>
           <a:xfrm>
-            <a:off x="5394960" y="1371600"/>
-            <a:ext cx="6062472" cy="4754880"/>
+            <a:off x="731520" y="2350008"/>
+            <a:ext cx="3392424" cy="585216"/>
           </a:xfrm>
           <a:prstGeom prst="rect">
             <a:avLst/>
@@ -6646,35 +7188,12 @@
           <a:p>
             <a:pPr indent="0" marL="0">
               <a:lnSpc>
-                <a:spcPct val="118000"/>
-              </a:lnSpc>
-              <a:spcAft>
-                <a:spcPts val="1300"/>
-              </a:spcAft>
-              <a:buNone/>
-            </a:pPr>
-            <a:r>
-              <a:rPr lang="en-US" sz="1250" b="1" dirty="0">
-                <a:solidFill>
-                  <a:srgbClr val="0B0F19"/>
-                </a:solidFill>
-                <a:latin typeface="Arial" pitchFamily="34" charset="0"/>
-                <a:ea typeface="Arial" pitchFamily="34" charset="-122"/>
-                <a:cs typeface="Arial" pitchFamily="34" charset="-120"/>
-              </a:rPr>
-              <a:t>La veille. </a:t>
-            </a:r>
-            <a:pPr indent="0" marL="0">
-              <a:lnSpc>
-                <a:spcPct val="118000"/>
-              </a:lnSpc>
-              <a:spcAft>
-                <a:spcPts val="1300"/>
-              </a:spcAft>
-              <a:buNone/>
-            </a:pPr>
-            <a:r>
-              <a:rPr lang="en-US" sz="1250" dirty="0">
+                <a:spcPct val="115000"/>
+              </a:lnSpc>
+              <a:buNone/>
+            </a:pPr>
+            <a:r>
+              <a:rPr lang="en-US" sz="1100" dirty="0">
                 <a:solidFill>
                   <a:srgbClr val="3D4556"/>
                 </a:solidFill>
@@ -6682,42 +7201,134 @@
                 <a:ea typeface="Arial" pitchFamily="34" charset="-122"/>
                 <a:cs typeface="Arial" pitchFamily="34" charset="-120"/>
               </a:rPr>
-              <a:t>Le balisage reste — c'est le seul geste physique. Les balises sortent de l'outil : une planche d'étiquettes numérotées, en PDF, à imprimer sur place.</a:t>
-            </a:r>
-            <a:endParaRPr lang="en-US" sz="1250" dirty="0"/>
-          </a:p>
-          <a:p>
-            <a:pPr indent="0" marL="0">
-              <a:lnSpc>
-                <a:spcPct val="118000"/>
-              </a:lnSpc>
-              <a:spcAft>
-                <a:spcPts val="1300"/>
-              </a:spcAft>
-              <a:buNone/>
-            </a:pPr>
-            <a:r>
-              <a:rPr lang="en-US" sz="1250" b="1" dirty="0">
-                <a:solidFill>
-                  <a:srgbClr val="0B0F19"/>
-                </a:solidFill>
-                <a:latin typeface="Arial" pitchFamily="34" charset="0"/>
-                <a:ea typeface="Arial" pitchFamily="34" charset="-122"/>
-                <a:cs typeface="Arial" pitchFamily="34" charset="-120"/>
-              </a:rPr>
-              <a:t>Le matin. </a:t>
-            </a:r>
-            <a:pPr indent="0" marL="0">
-              <a:lnSpc>
-                <a:spcPct val="118000"/>
-              </a:lnSpc>
-              <a:spcAft>
-                <a:spcPts val="1300"/>
-              </a:spcAft>
-              <a:buNone/>
-            </a:pPr>
-            <a:r>
-              <a:rPr lang="en-US" sz="1250" dirty="0">
+              <a:t>Il imprime ses balises depuis l'outil et les pose avec son équipe. Aucun matériel à réserver.</a:t>
+            </a:r>
+            <a:endParaRPr lang="en-US" sz="1100" dirty="0"/>
+          </a:p>
+        </p:txBody>
+      </p:sp>
+      <p:sp>
+        <p:nvSpPr>
+          <p:cNvPr id="9" name="Shape 6"/>
+          <p:cNvSpPr/>
+          <p:nvPr/>
+        </p:nvSpPr>
+        <p:spPr>
+          <a:xfrm>
+            <a:off x="731520" y="2971800"/>
+            <a:ext cx="3392424" cy="3227832"/>
+          </a:xfrm>
+          <a:prstGeom prst="roundRect">
+            <a:avLst>
+              <a:gd name="adj" fmla="val 3966"/>
+            </a:avLst>
+          </a:prstGeom>
+          <a:solidFill>
+            <a:srgbClr val="F4F5F9"/>
+          </a:solidFill>
+          <a:ln w="12700">
+            <a:solidFill>
+              <a:srgbClr val="F4F5F9"/>
+            </a:solidFill>
+            <a:prstDash val="solid"/>
+          </a:ln>
+        </p:spPr>
+      </p:sp>
+      <p:pic>
+        <p:nvPicPr>
+          <p:cNvPr id="10" name="Image 1" descr="preencoded.png">    </p:cNvPr>
+          <p:cNvPicPr>
+            <a:picLocks noChangeAspect="1"/>
+          </p:cNvPicPr>
+          <p:nvPr/>
+        </p:nvPicPr>
+        <p:blipFill>
+          <a:blip r:embed="rId2"/>
+          <a:stretch>
+            <a:fillRect/>
+          </a:stretch>
+        </p:blipFill>
+        <p:spPr>
+          <a:xfrm>
+            <a:off x="1042416" y="2972302"/>
+            <a:ext cx="2770632" cy="3227330"/>
+          </a:xfrm>
+          <a:prstGeom prst="rect">
+            <a:avLst/>
+          </a:prstGeom>
+        </p:spPr>
+      </p:pic>
+      <p:sp>
+        <p:nvSpPr>
+          <p:cNvPr id="11" name="Text 7"/>
+          <p:cNvSpPr/>
+          <p:nvPr/>
+        </p:nvSpPr>
+        <p:spPr>
+          <a:xfrm>
+            <a:off x="4398264" y="1965960"/>
+            <a:ext cx="3392424" cy="365760"/>
+          </a:xfrm>
+          <a:prstGeom prst="rect">
+            <a:avLst/>
+          </a:prstGeom>
+          <a:noFill/>
+          <a:ln/>
+        </p:spPr>
+        <p:txBody>
+          <a:bodyPr wrap="square" lIns="0" tIns="0" rIns="0" bIns="0" rtlCol="0" anchor="t"/>
+          <a:lstStyle/>
+          <a:p>
+            <a:pPr indent="0" marL="0">
+              <a:lnSpc>
+                <a:spcPct val="100000"/>
+              </a:lnSpc>
+              <a:buNone/>
+            </a:pPr>
+            <a:r>
+              <a:rPr lang="en-US" sz="1350" b="1" dirty="0">
+                <a:solidFill>
+                  <a:srgbClr val="4636B0"/>
+                </a:solidFill>
+                <a:latin typeface="Arial" pitchFamily="34" charset="0"/>
+                <a:ea typeface="Arial" pitchFamily="34" charset="-122"/>
+                <a:cs typeface="Arial" pitchFamily="34" charset="-120"/>
+              </a:rPr>
+              <a:t>Les vendeurs comptent</a:t>
+            </a:r>
+            <a:endParaRPr lang="en-US" sz="1350" dirty="0"/>
+          </a:p>
+        </p:txBody>
+      </p:sp>
+      <p:sp>
+        <p:nvSpPr>
+          <p:cNvPr id="12" name="Text 8"/>
+          <p:cNvSpPr/>
+          <p:nvPr/>
+        </p:nvSpPr>
+        <p:spPr>
+          <a:xfrm>
+            <a:off x="4398264" y="2350008"/>
+            <a:ext cx="3392424" cy="585216"/>
+          </a:xfrm>
+          <a:prstGeom prst="rect">
+            <a:avLst/>
+          </a:prstGeom>
+          <a:noFill/>
+          <a:ln/>
+        </p:spPr>
+        <p:txBody>
+          <a:bodyPr wrap="square" lIns="0" tIns="0" rIns="0" bIns="0" rtlCol="0" anchor="t"/>
+          <a:lstStyle/>
+          <a:p>
+            <a:pPr indent="0" marL="0">
+              <a:lnSpc>
+                <a:spcPct val="115000"/>
+              </a:lnSpc>
+              <a:buNone/>
+            </a:pPr>
+            <a:r>
+              <a:rPr lang="en-US" sz="1100" dirty="0">
                 <a:solidFill>
                   <a:srgbClr val="3D4556"/>
                 </a:solidFill>
@@ -6725,42 +7336,134 @@
                 <a:ea typeface="Arial" pitchFamily="34" charset="-122"/>
                 <a:cs typeface="Arial" pitchFamily="34" charset="-120"/>
               </a:rPr>
-              <a:t>Le stock théorique s'importe tel quel, colonnes reconnues. Pas de flotte à préparer : chaque compteur ouvre l'inventaire sur son téléphone. La date et le périmètre sont dans l'inventaire, pas dans l'appareil.</a:t>
-            </a:r>
-            <a:endParaRPr lang="en-US" sz="1250" dirty="0"/>
-          </a:p>
-          <a:p>
-            <a:pPr indent="0" marL="0">
-              <a:lnSpc>
-                <a:spcPct val="118000"/>
-              </a:lnSpc>
-              <a:spcAft>
-                <a:spcPts val="1300"/>
-              </a:spcAft>
-              <a:buNone/>
-            </a:pPr>
-            <a:r>
-              <a:rPr lang="en-US" sz="1250" b="1" dirty="0">
-                <a:solidFill>
-                  <a:srgbClr val="0B0F19"/>
-                </a:solidFill>
-                <a:latin typeface="Arial" pitchFamily="34" charset="0"/>
-                <a:ea typeface="Arial" pitchFamily="34" charset="-122"/>
-                <a:cs typeface="Arial" pitchFamily="34" charset="-120"/>
-              </a:rPr>
-              <a:t>Pendant. </a:t>
-            </a:r>
-            <a:pPr indent="0" marL="0">
-              <a:lnSpc>
-                <a:spcPct val="118000"/>
-              </a:lnSpc>
-              <a:spcAft>
-                <a:spcPts val="1300"/>
-              </a:spcAft>
-              <a:buNone/>
-            </a:pPr>
-            <a:r>
-              <a:rPr lang="en-US" sz="1250" dirty="0">
+              <a:t>Scanner la balise du rayon, puis les articles, avec le téléphone qu'ils ont en poche.</a:t>
+            </a:r>
+            <a:endParaRPr lang="en-US" sz="1100" dirty="0"/>
+          </a:p>
+        </p:txBody>
+      </p:sp>
+      <p:sp>
+        <p:nvSpPr>
+          <p:cNvPr id="13" name="Shape 9"/>
+          <p:cNvSpPr/>
+          <p:nvPr/>
+        </p:nvSpPr>
+        <p:spPr>
+          <a:xfrm>
+            <a:off x="4398264" y="2971800"/>
+            <a:ext cx="3392424" cy="3227832"/>
+          </a:xfrm>
+          <a:prstGeom prst="roundRect">
+            <a:avLst>
+              <a:gd name="adj" fmla="val 3966"/>
+            </a:avLst>
+          </a:prstGeom>
+          <a:solidFill>
+            <a:srgbClr val="EEEEFC"/>
+          </a:solidFill>
+          <a:ln w="12700">
+            <a:solidFill>
+              <a:srgbClr val="EEEEFC"/>
+            </a:solidFill>
+            <a:prstDash val="solid"/>
+          </a:ln>
+        </p:spPr>
+      </p:sp>
+      <p:pic>
+        <p:nvPicPr>
+          <p:cNvPr id="14" name="Image 2" descr="preencoded.png">    </p:cNvPr>
+          <p:cNvPicPr>
+            <a:picLocks noChangeAspect="1"/>
+          </p:cNvPicPr>
+          <p:nvPr/>
+        </p:nvPicPr>
+        <p:blipFill>
+          <a:blip r:embed="rId3"/>
+          <a:stretch>
+            <a:fillRect/>
+          </a:stretch>
+        </p:blipFill>
+        <p:spPr>
+          <a:xfrm>
+            <a:off x="4709160" y="2972302"/>
+            <a:ext cx="2770632" cy="3227330"/>
+          </a:xfrm>
+          <a:prstGeom prst="rect">
+            <a:avLst/>
+          </a:prstGeom>
+        </p:spPr>
+      </p:pic>
+      <p:sp>
+        <p:nvSpPr>
+          <p:cNvPr id="15" name="Text 10"/>
+          <p:cNvSpPr/>
+          <p:nvPr/>
+        </p:nvSpPr>
+        <p:spPr>
+          <a:xfrm>
+            <a:off x="8065008" y="1965960"/>
+            <a:ext cx="3392424" cy="365760"/>
+          </a:xfrm>
+          <a:prstGeom prst="rect">
+            <a:avLst/>
+          </a:prstGeom>
+          <a:noFill/>
+          <a:ln/>
+        </p:spPr>
+        <p:txBody>
+          <a:bodyPr wrap="square" lIns="0" tIns="0" rIns="0" bIns="0" rtlCol="0" anchor="t"/>
+          <a:lstStyle/>
+          <a:p>
+            <a:pPr indent="0" marL="0">
+              <a:lnSpc>
+                <a:spcPct val="100000"/>
+              </a:lnSpc>
+              <a:buNone/>
+            </a:pPr>
+            <a:r>
+              <a:rPr lang="en-US" sz="1350" b="1" dirty="0">
+                <a:solidFill>
+                  <a:srgbClr val="4636B0"/>
+                </a:solidFill>
+                <a:latin typeface="Arial" pitchFamily="34" charset="0"/>
+                <a:ea typeface="Arial" pitchFamily="34" charset="-122"/>
+                <a:cs typeface="Arial" pitchFamily="34" charset="-120"/>
+              </a:rPr>
+              <a:t>Le chef d'équipe tranche</a:t>
+            </a:r>
+            <a:endParaRPr lang="en-US" sz="1350" dirty="0"/>
+          </a:p>
+        </p:txBody>
+      </p:sp>
+      <p:sp>
+        <p:nvSpPr>
+          <p:cNvPr id="16" name="Text 11"/>
+          <p:cNvSpPr/>
+          <p:nvPr/>
+        </p:nvSpPr>
+        <p:spPr>
+          <a:xfrm>
+            <a:off x="8065008" y="2350008"/>
+            <a:ext cx="3392424" cy="585216"/>
+          </a:xfrm>
+          <a:prstGeom prst="rect">
+            <a:avLst/>
+          </a:prstGeom>
+          <a:noFill/>
+          <a:ln/>
+        </p:spPr>
+        <p:txBody>
+          <a:bodyPr wrap="square" lIns="0" tIns="0" rIns="0" bIns="0" rtlCol="0" anchor="t"/>
+          <a:lstStyle/>
+          <a:p>
+            <a:pPr indent="0" marL="0">
+              <a:lnSpc>
+                <a:spcPct val="115000"/>
+              </a:lnSpc>
+              <a:buNone/>
+            </a:pPr>
+            <a:r>
+              <a:rPr lang="en-US" sz="1100" dirty="0">
                 <a:solidFill>
                   <a:srgbClr val="3D4556"/>
                 </a:solidFill>
@@ -6768,58 +7471,66 @@
                 <a:ea typeface="Arial" pitchFamily="34" charset="-122"/>
                 <a:cs typeface="Arial" pitchFamily="34" charset="-120"/>
               </a:rPr>
-              <a:t>Le comptage se déroule comme aujourd'hui, zone par zone. L'audit est un mode de l'outil : un désaccord entre deux comptages s'affiche en direct et se tranche pendant que le compteur est encore au rayon.</a:t>
-            </a:r>
-            <a:endParaRPr lang="en-US" sz="1250" dirty="0"/>
-          </a:p>
-          <a:p>
-            <a:pPr indent="0" marL="0">
-              <a:lnSpc>
-                <a:spcPct val="118000"/>
-              </a:lnSpc>
-              <a:spcAft>
-                <a:spcPts val="1300"/>
-              </a:spcAft>
-              <a:buNone/>
-            </a:pPr>
-            <a:r>
-              <a:rPr lang="en-US" sz="1250" b="1" dirty="0">
-                <a:solidFill>
-                  <a:srgbClr val="0B0F19"/>
-                </a:solidFill>
-                <a:latin typeface="Arial" pitchFamily="34" charset="0"/>
-                <a:ea typeface="Arial" pitchFamily="34" charset="-122"/>
-                <a:cs typeface="Arial" pitchFamily="34" charset="-120"/>
-              </a:rPr>
-              <a:t>Après. </a:t>
-            </a:r>
-            <a:pPr indent="0" marL="0">
-              <a:lnSpc>
-                <a:spcPct val="118000"/>
-              </a:lnSpc>
-              <a:spcAft>
-                <a:spcPts val="1300"/>
-              </a:spcAft>
-              <a:buNone/>
-            </a:pPr>
-            <a:r>
-              <a:rPr lang="en-US" sz="1250" dirty="0">
-                <a:solidFill>
-                  <a:srgbClr val="3D4556"/>
-                </a:solidFill>
-                <a:latin typeface="Arial" pitchFamily="34" charset="0"/>
-                <a:ea typeface="Arial" pitchFamily="34" charset="-122"/>
-                <a:cs typeface="Arial" pitchFamily="34" charset="-120"/>
-              </a:rPr>
-              <a:t>Le rapport croise déjà l'attendu et le compté — y compris ce qui n'a jamais été compté. Il sort en Excel et part tel quel à la validation, puis à l'ajustement.</a:t>
-            </a:r>
-            <a:endParaRPr lang="en-US" sz="1250" dirty="0"/>
-          </a:p>
-        </p:txBody>
-      </p:sp>
-      <p:sp>
-        <p:nvSpPr>
-          <p:cNvPr id="9" name="Text 6"/>
+              <a:t>Il audite selon votre règle et règle les désaccords au rayon, pendant que ça compte.</a:t>
+            </a:r>
+            <a:endParaRPr lang="en-US" sz="1100" dirty="0"/>
+          </a:p>
+        </p:txBody>
+      </p:sp>
+      <p:sp>
+        <p:nvSpPr>
+          <p:cNvPr id="17" name="Shape 12"/>
+          <p:cNvSpPr/>
+          <p:nvPr/>
+        </p:nvSpPr>
+        <p:spPr>
+          <a:xfrm>
+            <a:off x="8065008" y="2971800"/>
+            <a:ext cx="3392424" cy="3227832"/>
+          </a:xfrm>
+          <a:prstGeom prst="roundRect">
+            <a:avLst>
+              <a:gd name="adj" fmla="val 3966"/>
+            </a:avLst>
+          </a:prstGeom>
+          <a:solidFill>
+            <a:srgbClr val="F4F5F9"/>
+          </a:solidFill>
+          <a:ln w="12700">
+            <a:solidFill>
+              <a:srgbClr val="F4F5F9"/>
+            </a:solidFill>
+            <a:prstDash val="solid"/>
+          </a:ln>
+        </p:spPr>
+      </p:sp>
+      <p:pic>
+        <p:nvPicPr>
+          <p:cNvPr id="18" name="Image 3" descr="preencoded.png">    </p:cNvPr>
+          <p:cNvPicPr>
+            <a:picLocks noChangeAspect="1"/>
+          </p:cNvPicPr>
+          <p:nvPr/>
+        </p:nvPicPr>
+        <p:blipFill>
+          <a:blip r:embed="rId4"/>
+          <a:stretch>
+            <a:fillRect/>
+          </a:stretch>
+        </p:blipFill>
+        <p:spPr>
+          <a:xfrm>
+            <a:off x="8375904" y="2972302"/>
+            <a:ext cx="2770632" cy="3227330"/>
+          </a:xfrm>
+          <a:prstGeom prst="rect">
+            <a:avLst/>
+          </a:prstGeom>
+        </p:spPr>
+      </p:pic>
+      <p:sp>
+        <p:nvSpPr>
+          <p:cNvPr id="19" name="Text 13"/>
           <p:cNvSpPr/>
           <p:nvPr/>
         </p:nvSpPr>
@@ -6858,7 +7569,7 @@
       </p:sp>
       <p:sp>
         <p:nvSpPr>
-          <p:cNvPr id="10" name="Text 7"/>
+          <p:cNvPr id="20" name="Text 14"/>
           <p:cNvSpPr/>
           <p:nvPr/>
         </p:nvSpPr>
@@ -7023,7 +7734,7 @@
                 <a:ea typeface="Arial" pitchFamily="34" charset="-122"/>
                 <a:cs typeface="Arial" pitchFamily="34" charset="-120"/>
               </a:rPr>
-              <a:t>Sans, avec</a:t>
+              <a:t>Avec Quantinvo</a:t>
             </a:r>
             <a:endParaRPr lang="en-US" sz="1000" dirty="0"/>
           </a:p>
@@ -7062,8 +7773,8 @@
         </p:nvSpPr>
         <p:spPr>
           <a:xfrm>
-            <a:off x="731520" y="1280160"/>
-            <a:ext cx="10725912" cy="822960"/>
+            <a:off x="731520" y="1325880"/>
+            <a:ext cx="4206240" cy="1280160"/>
           </a:xfrm>
           <a:prstGeom prst="rect">
             <a:avLst/>
@@ -7090,7 +7801,7 @@
                 <a:ea typeface="Arial" pitchFamily="34" charset="-122"/>
                 <a:cs typeface="Arial" pitchFamily="34" charset="-120"/>
               </a:rPr>
-              <a:t>Ce que l'Inventory Control cesse de faire</a:t>
+              <a:t>La même journée, conduite par le floor.</a:t>
             </a:r>
             <a:endParaRPr lang="en-US" sz="2600" dirty="0"/>
           </a:p>
@@ -7104,8 +7815,8 @@
         </p:nvSpPr>
         <p:spPr>
           <a:xfrm>
-            <a:off x="731520" y="2240280"/>
-            <a:ext cx="4846320" cy="274320"/>
+            <a:off x="731520" y="2651760"/>
+            <a:ext cx="4206240" cy="914400"/>
           </a:xfrm>
           <a:prstGeom prst="rect">
             <a:avLst/>
@@ -7117,11 +7828,14 @@
           <a:bodyPr wrap="square" lIns="0" tIns="0" rIns="0" bIns="0" rtlCol="0" anchor="t"/>
           <a:lstStyle/>
           <a:p>
-            <a:pPr indent="0" marL="0">
-              <a:buNone/>
-            </a:pPr>
-            <a:r>
-              <a:rPr lang="en-US" sz="1050" b="1" dirty="0">
+            <a:pPr algn="l" indent="0" marL="0">
+              <a:lnSpc>
+                <a:spcPct val="118000"/>
+              </a:lnSpc>
+              <a:buNone/>
+            </a:pPr>
+            <a:r>
+              <a:rPr lang="en-US" sz="1200" i="1" dirty="0">
                 <a:solidFill>
                   <a:srgbClr val="5B6475"/>
                 </a:solidFill>
@@ -7129,9 +7843,9 @@
                 <a:ea typeface="Arial" pitchFamily="34" charset="-122"/>
                 <a:cs typeface="Arial" pitchFamily="34" charset="-120"/>
               </a:rPr>
-              <a:t>Sans Quantinvo</a:t>
-            </a:r>
-            <a:endParaRPr lang="en-US" sz="1050" dirty="0"/>
+              <a:t>Le déroulement ne change pas. Ce qui change, c'est qui le porte : vous n'apparaissez qu'à la dernière ligne.</a:t>
+            </a:r>
+            <a:endParaRPr lang="en-US" sz="1200" dirty="0"/>
           </a:p>
         </p:txBody>
       </p:sp>
@@ -7143,8 +7857,8 @@
         </p:nvSpPr>
         <p:spPr>
           <a:xfrm>
-            <a:off x="5852160" y="2240280"/>
-            <a:ext cx="4846320" cy="274320"/>
+            <a:off x="5394960" y="1371600"/>
+            <a:ext cx="6062472" cy="4754880"/>
           </a:xfrm>
           <a:prstGeom prst="rect">
             <a:avLst/>
@@ -7157,71 +7871,32 @@
           <a:lstStyle/>
           <a:p>
             <a:pPr indent="0" marL="0">
-              <a:buNone/>
-            </a:pPr>
-            <a:r>
-              <a:rPr lang="en-US" sz="1050" b="1" dirty="0">
-                <a:solidFill>
-                  <a:srgbClr val="4636B0"/>
-                </a:solidFill>
-                <a:latin typeface="Arial" pitchFamily="34" charset="0"/>
-                <a:ea typeface="Arial" pitchFamily="34" charset="-122"/>
-                <a:cs typeface="Arial" pitchFamily="34" charset="-120"/>
-              </a:rPr>
-              <a:t>Avec Quantinvo</a:t>
-            </a:r>
-            <a:endParaRPr lang="en-US" sz="1050" dirty="0"/>
-          </a:p>
-        </p:txBody>
-      </p:sp>
-      <p:sp>
-        <p:nvSpPr>
-          <p:cNvPr id="9" name="Shape 6"/>
-          <p:cNvSpPr/>
-          <p:nvPr/>
-        </p:nvSpPr>
-        <p:spPr>
-          <a:xfrm>
-            <a:off x="731520" y="2606040"/>
-            <a:ext cx="10725912" cy="0"/>
-          </a:xfrm>
-          <a:prstGeom prst="line">
-            <a:avLst/>
-          </a:prstGeom>
-          <a:noFill/>
-          <a:ln w="9525">
-            <a:solidFill>
-              <a:srgbClr val="E3E6EE"/>
-            </a:solidFill>
-            <a:prstDash val="solid"/>
-          </a:ln>
-        </p:spPr>
-      </p:sp>
-      <p:sp>
-        <p:nvSpPr>
-          <p:cNvPr id="10" name="Text 7"/>
-          <p:cNvSpPr/>
-          <p:nvPr/>
-        </p:nvSpPr>
-        <p:spPr>
-          <a:xfrm>
-            <a:off x="731520" y="2752344"/>
-            <a:ext cx="4846320" cy="548640"/>
-          </a:xfrm>
-          <a:prstGeom prst="rect">
-            <a:avLst/>
-          </a:prstGeom>
-          <a:noFill/>
-          <a:ln/>
-        </p:spPr>
-        <p:txBody>
-          <a:bodyPr wrap="square" lIns="0" tIns="0" rIns="0" bIns="0" rtlCol="0" anchor="t"/>
-          <a:lstStyle/>
-          <a:p>
-            <a:pPr indent="0" marL="0">
-              <a:lnSpc>
-                <a:spcPct val="115000"/>
-              </a:lnSpc>
+              <a:lnSpc>
+                <a:spcPct val="118000"/>
+              </a:lnSpc>
+              <a:spcAft>
+                <a:spcPts val="1300"/>
+              </a:spcAft>
+              <a:buNone/>
+            </a:pPr>
+            <a:r>
+              <a:rPr lang="en-US" sz="1250" b="1" dirty="0">
+                <a:solidFill>
+                  <a:srgbClr val="0B0F19"/>
+                </a:solidFill>
+                <a:latin typeface="Arial" pitchFamily="34" charset="0"/>
+                <a:ea typeface="Arial" pitchFamily="34" charset="-122"/>
+                <a:cs typeface="Arial" pitchFamily="34" charset="-120"/>
+              </a:rPr>
+              <a:t>La veille. </a:t>
+            </a:r>
+            <a:pPr indent="0" marL="0">
+              <a:lnSpc>
+                <a:spcPct val="118000"/>
+              </a:lnSpc>
+              <a:spcAft>
+                <a:spcPts val="1300"/>
+              </a:spcAft>
               <a:buNone/>
             </a:pPr>
             <a:r>
@@ -7233,102 +7908,124 @@
                 <a:ea typeface="Arial" pitchFamily="34" charset="-122"/>
                 <a:cs typeface="Arial" pitchFamily="34" charset="-120"/>
               </a:rPr>
-              <a:t>Des terminaux à connecter et vérifier un par un avant chaque session.</a:t>
+              <a:t>Le chef d'équipe imprime ses balises — une planche d'étiquettes numérotées, en PDF — et les pose avec son équipe. Personne d'autre à mobiliser.</a:t>
             </a:r>
             <a:endParaRPr lang="en-US" sz="1250" dirty="0"/>
           </a:p>
-        </p:txBody>
-      </p:sp>
-      <p:sp>
-        <p:nvSpPr>
-          <p:cNvPr id="11" name="Text 8"/>
-          <p:cNvSpPr/>
-          <p:nvPr/>
-        </p:nvSpPr>
-        <p:spPr>
-          <a:xfrm>
-            <a:off x="5852160" y="2752344"/>
-            <a:ext cx="4846320" cy="548640"/>
-          </a:xfrm>
-          <a:prstGeom prst="rect">
-            <a:avLst/>
-          </a:prstGeom>
-          <a:noFill/>
-          <a:ln/>
-        </p:spPr>
-        <p:txBody>
-          <a:bodyPr wrap="square" lIns="0" tIns="0" rIns="0" bIns="0" rtlCol="0" anchor="t"/>
-          <a:lstStyle/>
-          <a:p>
-            <a:pPr indent="0" marL="0">
-              <a:lnSpc>
-                <a:spcPct val="115000"/>
-              </a:lnSpc>
+          <a:p>
+            <a:pPr indent="0" marL="0">
+              <a:lnSpc>
+                <a:spcPct val="118000"/>
+              </a:lnSpc>
+              <a:spcAft>
+                <a:spcPts val="1300"/>
+              </a:spcAft>
+              <a:buNone/>
+            </a:pPr>
+            <a:r>
+              <a:rPr lang="en-US" sz="1250" b="1" dirty="0">
+                <a:solidFill>
+                  <a:srgbClr val="0B0F19"/>
+                </a:solidFill>
+                <a:latin typeface="Arial" pitchFamily="34" charset="0"/>
+                <a:ea typeface="Arial" pitchFamily="34" charset="-122"/>
+                <a:cs typeface="Arial" pitchFamily="34" charset="-120"/>
+              </a:rPr>
+              <a:t>Le matin. </a:t>
+            </a:r>
+            <a:pPr indent="0" marL="0">
+              <a:lnSpc>
+                <a:spcPct val="118000"/>
+              </a:lnSpc>
+              <a:spcAft>
+                <a:spcPts val="1300"/>
+              </a:spcAft>
               <a:buNone/>
             </a:pPr>
             <a:r>
               <a:rPr lang="en-US" sz="1250" dirty="0">
                 <a:solidFill>
+                  <a:srgbClr val="3D4556"/>
+                </a:solidFill>
+                <a:latin typeface="Arial" pitchFamily="34" charset="0"/>
+                <a:ea typeface="Arial" pitchFamily="34" charset="-122"/>
+                <a:cs typeface="Arial" pitchFamily="34" charset="-120"/>
+              </a:rPr>
+              <a:t>Il importe le stock théorique tel quel, colonnes reconnues, et ouvre l'inventaire. Pas de flotte à préparer : chaque vendeur le rejoint depuis son téléphone.</a:t>
+            </a:r>
+            <a:endParaRPr lang="en-US" sz="1250" dirty="0"/>
+          </a:p>
+          <a:p>
+            <a:pPr indent="0" marL="0">
+              <a:lnSpc>
+                <a:spcPct val="118000"/>
+              </a:lnSpc>
+              <a:spcAft>
+                <a:spcPts val="1300"/>
+              </a:spcAft>
+              <a:buNone/>
+            </a:pPr>
+            <a:r>
+              <a:rPr lang="en-US" sz="1250" b="1" dirty="0">
+                <a:solidFill>
                   <a:srgbClr val="0B0F19"/>
                 </a:solidFill>
                 <a:latin typeface="Arial" pitchFamily="34" charset="0"/>
                 <a:ea typeface="Arial" pitchFamily="34" charset="-122"/>
                 <a:cs typeface="Arial" pitchFamily="34" charset="-120"/>
               </a:rPr>
-              <a:t>Aucune flotte à préparer. Chaque compteur rejoint l’inventaire depuis son téléphone.</a:t>
+              <a:t>Pendant. </a:t>
+            </a:r>
+            <a:pPr indent="0" marL="0">
+              <a:lnSpc>
+                <a:spcPct val="118000"/>
+              </a:lnSpc>
+              <a:spcAft>
+                <a:spcPts val="1300"/>
+              </a:spcAft>
+              <a:buNone/>
+            </a:pPr>
+            <a:r>
+              <a:rPr lang="en-US" sz="1250" dirty="0">
+                <a:solidFill>
+                  <a:srgbClr val="3D4556"/>
+                </a:solidFill>
+                <a:latin typeface="Arial" pitchFamily="34" charset="0"/>
+                <a:ea typeface="Arial" pitchFamily="34" charset="-122"/>
+                <a:cs typeface="Arial" pitchFamily="34" charset="-120"/>
+              </a:rPr>
+              <a:t>Les vendeurs comptent, zone par zone. Le chef d'équipe suit l'avancement, audite selon votre règle — 100 % W&amp;J, 30 % au moins ailleurs — et tranche les désaccords au rayon, en direct.</a:t>
             </a:r>
             <a:endParaRPr lang="en-US" sz="1250" dirty="0"/>
           </a:p>
-        </p:txBody>
-      </p:sp>
-      <p:sp>
-        <p:nvSpPr>
-          <p:cNvPr id="12" name="Shape 9"/>
-          <p:cNvSpPr/>
-          <p:nvPr/>
-        </p:nvSpPr>
-        <p:spPr>
-          <a:xfrm>
-            <a:off x="731520" y="3355848"/>
-            <a:ext cx="10725912" cy="0"/>
-          </a:xfrm>
-          <a:prstGeom prst="line">
-            <a:avLst/>
-          </a:prstGeom>
-          <a:noFill/>
-          <a:ln w="9525">
-            <a:solidFill>
-              <a:srgbClr val="E3E6EE"/>
-            </a:solidFill>
-            <a:prstDash val="solid"/>
-          </a:ln>
-        </p:spPr>
-      </p:sp>
-      <p:sp>
-        <p:nvSpPr>
-          <p:cNvPr id="13" name="Text 10"/>
-          <p:cNvSpPr/>
-          <p:nvPr/>
-        </p:nvSpPr>
-        <p:spPr>
-          <a:xfrm>
-            <a:off x="731520" y="3502152"/>
-            <a:ext cx="4846320" cy="548640"/>
-          </a:xfrm>
-          <a:prstGeom prst="rect">
-            <a:avLst/>
-          </a:prstGeom>
-          <a:noFill/>
-          <a:ln/>
-        </p:spPr>
-        <p:txBody>
-          <a:bodyPr wrap="square" lIns="0" tIns="0" rIns="0" bIns="0" rtlCol="0" anchor="t"/>
-          <a:lstStyle/>
-          <a:p>
-            <a:pPr indent="0" marL="0">
-              <a:lnSpc>
-                <a:spcPct val="115000"/>
-              </a:lnSpc>
+          <a:p>
+            <a:pPr indent="0" marL="0">
+              <a:lnSpc>
+                <a:spcPct val="118000"/>
+              </a:lnSpc>
+              <a:spcAft>
+                <a:spcPts val="1300"/>
+              </a:spcAft>
+              <a:buNone/>
+            </a:pPr>
+            <a:r>
+              <a:rPr lang="en-US" sz="1250" b="1" dirty="0">
+                <a:solidFill>
+                  <a:srgbClr val="0B0F19"/>
+                </a:solidFill>
+                <a:latin typeface="Arial" pitchFamily="34" charset="0"/>
+                <a:ea typeface="Arial" pitchFamily="34" charset="-122"/>
+                <a:cs typeface="Arial" pitchFamily="34" charset="-120"/>
+              </a:rPr>
+              <a:t>Après. </a:t>
+            </a:r>
+            <a:pPr indent="0" marL="0">
+              <a:lnSpc>
+                <a:spcPct val="118000"/>
+              </a:lnSpc>
+              <a:spcAft>
+                <a:spcPts val="1300"/>
+              </a:spcAft>
               <a:buNone/>
             </a:pPr>
             <a:r>
@@ -7340,7 +8037,7 @@
                 <a:ea typeface="Arial" pitchFamily="34" charset="-122"/>
                 <a:cs typeface="Arial" pitchFamily="34" charset="-120"/>
               </a:rPr>
-              <a:t>Un briefing sur le maniement des terminaux à chaque inventaire.</a:t>
+              <a:t>Le rapport croise déjà l'attendu et le compté. L'Inventory Control le reçoit, le fait valider selon la valeur de l'écart, et ajuste le stock. C'est sa première apparition de la journée.</a:t>
             </a:r>
             <a:endParaRPr lang="en-US" sz="1250" dirty="0"/>
           </a:p>
@@ -7348,393 +8045,7 @@
       </p:sp>
       <p:sp>
         <p:nvSpPr>
-          <p:cNvPr id="14" name="Text 11"/>
-          <p:cNvSpPr/>
-          <p:nvPr/>
-        </p:nvSpPr>
-        <p:spPr>
-          <a:xfrm>
-            <a:off x="5852160" y="3502152"/>
-            <a:ext cx="4846320" cy="548640"/>
-          </a:xfrm>
-          <a:prstGeom prst="rect">
-            <a:avLst/>
-          </a:prstGeom>
-          <a:noFill/>
-          <a:ln/>
-        </p:spPr>
-        <p:txBody>
-          <a:bodyPr wrap="square" lIns="0" tIns="0" rIns="0" bIns="0" rtlCol="0" anchor="t"/>
-          <a:lstStyle/>
-          <a:p>
-            <a:pPr indent="0" marL="0">
-              <a:lnSpc>
-                <a:spcPct val="115000"/>
-              </a:lnSpc>
-              <a:buNone/>
-            </a:pPr>
-            <a:r>
-              <a:rPr lang="en-US" sz="1250" dirty="0">
-                <a:solidFill>
-                  <a:srgbClr val="0B0F19"/>
-                </a:solidFill>
-                <a:latin typeface="Arial" pitchFamily="34" charset="0"/>
-                <a:ea typeface="Arial" pitchFamily="34" charset="-122"/>
-                <a:cs typeface="Arial" pitchFamily="34" charset="-120"/>
-              </a:rPr>
-              <a:t>Le geste qu’ils connaissent : scanner la balise, scanner les articles. Dix minutes.</a:t>
-            </a:r>
-            <a:endParaRPr lang="en-US" sz="1250" dirty="0"/>
-          </a:p>
-        </p:txBody>
-      </p:sp>
-      <p:sp>
-        <p:nvSpPr>
-          <p:cNvPr id="15" name="Shape 12"/>
-          <p:cNvSpPr/>
-          <p:nvPr/>
-        </p:nvSpPr>
-        <p:spPr>
-          <a:xfrm>
-            <a:off x="731520" y="4105656"/>
-            <a:ext cx="10725912" cy="0"/>
-          </a:xfrm>
-          <a:prstGeom prst="line">
-            <a:avLst/>
-          </a:prstGeom>
-          <a:noFill/>
-          <a:ln w="9525">
-            <a:solidFill>
-              <a:srgbClr val="E3E6EE"/>
-            </a:solidFill>
-            <a:prstDash val="solid"/>
-          </a:ln>
-        </p:spPr>
-      </p:sp>
-      <p:sp>
-        <p:nvSpPr>
-          <p:cNvPr id="16" name="Text 13"/>
-          <p:cNvSpPr/>
-          <p:nvPr/>
-        </p:nvSpPr>
-        <p:spPr>
-          <a:xfrm>
-            <a:off x="731520" y="4251960"/>
-            <a:ext cx="4846320" cy="548640"/>
-          </a:xfrm>
-          <a:prstGeom prst="rect">
-            <a:avLst/>
-          </a:prstGeom>
-          <a:noFill/>
-          <a:ln/>
-        </p:spPr>
-        <p:txBody>
-          <a:bodyPr wrap="square" lIns="0" tIns="0" rIns="0" bIns="0" rtlCol="0" anchor="t"/>
-          <a:lstStyle/>
-          <a:p>
-            <a:pPr indent="0" marL="0">
-              <a:lnSpc>
-                <a:spcPct val="115000"/>
-              </a:lnSpc>
-              <a:buNone/>
-            </a:pPr>
-            <a:r>
-              <a:rPr lang="en-US" sz="1250" dirty="0">
-                <a:solidFill>
-                  <a:srgbClr val="3D4556"/>
-                </a:solidFill>
-                <a:latin typeface="Arial" pitchFamily="34" charset="0"/>
-                <a:ea typeface="Arial" pitchFamily="34" charset="-122"/>
-                <a:cs typeface="Arial" pitchFamily="34" charset="-120"/>
-              </a:rPr>
-              <a:t>Quelqu’un posté sur la plateforme pour guetter les failed audits.</a:t>
-            </a:r>
-            <a:endParaRPr lang="en-US" sz="1250" dirty="0"/>
-          </a:p>
-        </p:txBody>
-      </p:sp>
-      <p:sp>
-        <p:nvSpPr>
-          <p:cNvPr id="17" name="Text 14"/>
-          <p:cNvSpPr/>
-          <p:nvPr/>
-        </p:nvSpPr>
-        <p:spPr>
-          <a:xfrm>
-            <a:off x="5852160" y="4251960"/>
-            <a:ext cx="4846320" cy="548640"/>
-          </a:xfrm>
-          <a:prstGeom prst="rect">
-            <a:avLst/>
-          </a:prstGeom>
-          <a:noFill/>
-          <a:ln/>
-        </p:spPr>
-        <p:txBody>
-          <a:bodyPr wrap="square" lIns="0" tIns="0" rIns="0" bIns="0" rtlCol="0" anchor="t"/>
-          <a:lstStyle/>
-          <a:p>
-            <a:pPr indent="0" marL="0">
-              <a:lnSpc>
-                <a:spcPct val="115000"/>
-              </a:lnSpc>
-              <a:buNone/>
-            </a:pPr>
-            <a:r>
-              <a:rPr lang="en-US" sz="1250" dirty="0">
-                <a:solidFill>
-                  <a:srgbClr val="0B0F19"/>
-                </a:solidFill>
-                <a:latin typeface="Arial" pitchFamily="34" charset="0"/>
-                <a:ea typeface="Arial" pitchFamily="34" charset="-122"/>
-                <a:cs typeface="Arial" pitchFamily="34" charset="-120"/>
-              </a:rPr>
-              <a:t>Le tableau de bord montre tout, du bureau. Un écart se tranche sur place.</a:t>
-            </a:r>
-            <a:endParaRPr lang="en-US" sz="1250" dirty="0"/>
-          </a:p>
-        </p:txBody>
-      </p:sp>
-      <p:sp>
-        <p:nvSpPr>
-          <p:cNvPr id="18" name="Shape 15"/>
-          <p:cNvSpPr/>
-          <p:nvPr/>
-        </p:nvSpPr>
-        <p:spPr>
-          <a:xfrm>
-            <a:off x="731520" y="4855464"/>
-            <a:ext cx="10725912" cy="0"/>
-          </a:xfrm>
-          <a:prstGeom prst="line">
-            <a:avLst/>
-          </a:prstGeom>
-          <a:noFill/>
-          <a:ln w="9525">
-            <a:solidFill>
-              <a:srgbClr val="E3E6EE"/>
-            </a:solidFill>
-            <a:prstDash val="solid"/>
-          </a:ln>
-        </p:spPr>
-      </p:sp>
-      <p:sp>
-        <p:nvSpPr>
-          <p:cNvPr id="19" name="Text 16"/>
-          <p:cNvSpPr/>
-          <p:nvPr/>
-        </p:nvSpPr>
-        <p:spPr>
-          <a:xfrm>
-            <a:off x="731520" y="5001768"/>
-            <a:ext cx="4846320" cy="548640"/>
-          </a:xfrm>
-          <a:prstGeom prst="rect">
-            <a:avLst/>
-          </a:prstGeom>
-          <a:noFill/>
-          <a:ln/>
-        </p:spPr>
-        <p:txBody>
-          <a:bodyPr wrap="square" lIns="0" tIns="0" rIns="0" bIns="0" rtlCol="0" anchor="t"/>
-          <a:lstStyle/>
-          <a:p>
-            <a:pPr indent="0" marL="0">
-              <a:lnSpc>
-                <a:spcPct val="115000"/>
-              </a:lnSpc>
-              <a:buNone/>
-            </a:pPr>
-            <a:r>
-              <a:rPr lang="en-US" sz="1250" dirty="0">
-                <a:solidFill>
-                  <a:srgbClr val="3D4556"/>
-                </a:solidFill>
-                <a:latin typeface="Arial" pitchFamily="34" charset="0"/>
-                <a:ea typeface="Arial" pitchFamily="34" charset="-122"/>
-                <a:cs typeface="Arial" pitchFamily="34" charset="-120"/>
-              </a:rPr>
-              <a:t>Le SKU Variance à consolider à la main avec le stock théorique.</a:t>
-            </a:r>
-            <a:endParaRPr lang="en-US" sz="1250" dirty="0"/>
-          </a:p>
-        </p:txBody>
-      </p:sp>
-      <p:sp>
-        <p:nvSpPr>
-          <p:cNvPr id="20" name="Text 17"/>
-          <p:cNvSpPr/>
-          <p:nvPr/>
-        </p:nvSpPr>
-        <p:spPr>
-          <a:xfrm>
-            <a:off x="5852160" y="5001768"/>
-            <a:ext cx="4846320" cy="548640"/>
-          </a:xfrm>
-          <a:prstGeom prst="rect">
-            <a:avLst/>
-          </a:prstGeom>
-          <a:noFill/>
-          <a:ln/>
-        </p:spPr>
-        <p:txBody>
-          <a:bodyPr wrap="square" lIns="0" tIns="0" rIns="0" bIns="0" rtlCol="0" anchor="t"/>
-          <a:lstStyle/>
-          <a:p>
-            <a:pPr indent="0" marL="0">
-              <a:lnSpc>
-                <a:spcPct val="115000"/>
-              </a:lnSpc>
-              <a:buNone/>
-            </a:pPr>
-            <a:r>
-              <a:rPr lang="en-US" sz="1250" dirty="0">
-                <a:solidFill>
-                  <a:srgbClr val="0B0F19"/>
-                </a:solidFill>
-                <a:latin typeface="Arial" pitchFamily="34" charset="0"/>
-                <a:ea typeface="Arial" pitchFamily="34" charset="-122"/>
-                <a:cs typeface="Arial" pitchFamily="34" charset="-120"/>
-              </a:rPr>
-              <a:t>Le rapport croise déjà l’attendu et le compté, écarts en valeur d’achat.</a:t>
-            </a:r>
-            <a:endParaRPr lang="en-US" sz="1250" dirty="0"/>
-          </a:p>
-        </p:txBody>
-      </p:sp>
-      <p:sp>
-        <p:nvSpPr>
-          <p:cNvPr id="21" name="Shape 18"/>
-          <p:cNvSpPr/>
-          <p:nvPr/>
-        </p:nvSpPr>
-        <p:spPr>
-          <a:xfrm>
-            <a:off x="731520" y="5605272"/>
-            <a:ext cx="10725912" cy="0"/>
-          </a:xfrm>
-          <a:prstGeom prst="line">
-            <a:avLst/>
-          </a:prstGeom>
-          <a:noFill/>
-          <a:ln w="9525">
-            <a:solidFill>
-              <a:srgbClr val="E3E6EE"/>
-            </a:solidFill>
-            <a:prstDash val="solid"/>
-          </a:ln>
-        </p:spPr>
-      </p:sp>
-      <p:sp>
-        <p:nvSpPr>
-          <p:cNvPr id="22" name="Text 19"/>
-          <p:cNvSpPr/>
-          <p:nvPr/>
-        </p:nvSpPr>
-        <p:spPr>
-          <a:xfrm>
-            <a:off x="731520" y="5751576"/>
-            <a:ext cx="4846320" cy="548640"/>
-          </a:xfrm>
-          <a:prstGeom prst="rect">
-            <a:avLst/>
-          </a:prstGeom>
-          <a:noFill/>
-          <a:ln/>
-        </p:spPr>
-        <p:txBody>
-          <a:bodyPr wrap="square" lIns="0" tIns="0" rIns="0" bIns="0" rtlCol="0" anchor="t"/>
-          <a:lstStyle/>
-          <a:p>
-            <a:pPr indent="0" marL="0">
-              <a:lnSpc>
-                <a:spcPct val="115000"/>
-              </a:lnSpc>
-              <a:buNone/>
-            </a:pPr>
-            <a:r>
-              <a:rPr lang="en-US" sz="1250" dirty="0">
-                <a:solidFill>
-                  <a:srgbClr val="3D4556"/>
-                </a:solidFill>
-                <a:latin typeface="Arial" pitchFamily="34" charset="0"/>
-                <a:ea typeface="Arial" pitchFamily="34" charset="-122"/>
-                <a:cs typeface="Arial" pitchFamily="34" charset="-120"/>
-              </a:rPr>
-              <a:t>L’Inventory Control présent du début à la fin de chaque comptage.</a:t>
-            </a:r>
-            <a:endParaRPr lang="en-US" sz="1250" dirty="0"/>
-          </a:p>
-        </p:txBody>
-      </p:sp>
-      <p:sp>
-        <p:nvSpPr>
-          <p:cNvPr id="23" name="Text 20"/>
-          <p:cNvSpPr/>
-          <p:nvPr/>
-        </p:nvSpPr>
-        <p:spPr>
-          <a:xfrm>
-            <a:off x="5852160" y="5751576"/>
-            <a:ext cx="4846320" cy="548640"/>
-          </a:xfrm>
-          <a:prstGeom prst="rect">
-            <a:avLst/>
-          </a:prstGeom>
-          <a:noFill/>
-          <a:ln/>
-        </p:spPr>
-        <p:txBody>
-          <a:bodyPr wrap="square" lIns="0" tIns="0" rIns="0" bIns="0" rtlCol="0" anchor="t"/>
-          <a:lstStyle/>
-          <a:p>
-            <a:pPr indent="0" marL="0">
-              <a:lnSpc>
-                <a:spcPct val="115000"/>
-              </a:lnSpc>
-              <a:buNone/>
-            </a:pPr>
-            <a:r>
-              <a:rPr lang="en-US" sz="1250" dirty="0">
-                <a:solidFill>
-                  <a:srgbClr val="0B0F19"/>
-                </a:solidFill>
-                <a:latin typeface="Arial" pitchFamily="34" charset="0"/>
-                <a:ea typeface="Arial" pitchFamily="34" charset="-122"/>
-                <a:cs typeface="Arial" pitchFamily="34" charset="-120"/>
-              </a:rPr>
-              <a:t>Le responsable de floor conduit son inventaire ; vous lisez le rapport.</a:t>
-            </a:r>
-            <a:endParaRPr lang="en-US" sz="1250" dirty="0"/>
-          </a:p>
-        </p:txBody>
-      </p:sp>
-      <p:sp>
-        <p:nvSpPr>
-          <p:cNvPr id="24" name="Shape 21"/>
-          <p:cNvSpPr/>
-          <p:nvPr/>
-        </p:nvSpPr>
-        <p:spPr>
-          <a:xfrm>
-            <a:off x="731520" y="6355080"/>
-            <a:ext cx="10725912" cy="0"/>
-          </a:xfrm>
-          <a:prstGeom prst="line">
-            <a:avLst/>
-          </a:prstGeom>
-          <a:noFill/>
-          <a:ln w="9525">
-            <a:solidFill>
-              <a:srgbClr val="E3E6EE"/>
-            </a:solidFill>
-            <a:prstDash val="solid"/>
-          </a:ln>
-        </p:spPr>
-      </p:sp>
-      <p:sp>
-        <p:nvSpPr>
-          <p:cNvPr id="25" name="Text 22"/>
+          <p:cNvPr id="9" name="Text 6"/>
           <p:cNvSpPr/>
           <p:nvPr/>
         </p:nvSpPr>
@@ -7773,7 +8084,7 @@
       </p:sp>
       <p:sp>
         <p:nvSpPr>
-          <p:cNvPr id="26" name="Text 23"/>
+          <p:cNvPr id="10" name="Text 7"/>
           <p:cNvSpPr/>
           <p:nvPr/>
         </p:nvSpPr>
@@ -7938,7 +8249,7 @@
                 <a:ea typeface="Arial" pitchFamily="34" charset="-122"/>
                 <a:cs typeface="Arial" pitchFamily="34" charset="-120"/>
               </a:rPr>
-              <a:t>Pendant le comptage</a:t>
+              <a:t>Sans, avec</a:t>
             </a:r>
             <a:endParaRPr lang="en-US" sz="1000" dirty="0"/>
           </a:p>
@@ -8005,7 +8316,7 @@
                 <a:ea typeface="Arial" pitchFamily="34" charset="-122"/>
                 <a:cs typeface="Arial" pitchFamily="34" charset="-120"/>
               </a:rPr>
-              <a:t>Surveiller sans être posté derrière l'écran.</a:t>
+              <a:t>Ce qui change de mains</a:t>
             </a:r>
             <a:endParaRPr lang="en-US" sz="2600" dirty="0"/>
           </a:p>
@@ -8019,8 +8330,8 @@
         </p:nvSpPr>
         <p:spPr>
           <a:xfrm>
-            <a:off x="731520" y="2103120"/>
-            <a:ext cx="10725912" cy="731520"/>
+            <a:off x="731520" y="2240280"/>
+            <a:ext cx="4846320" cy="274320"/>
           </a:xfrm>
           <a:prstGeom prst="rect">
             <a:avLst/>
@@ -8032,47 +8343,79 @@
           <a:bodyPr wrap="square" lIns="0" tIns="0" rIns="0" bIns="0" rtlCol="0" anchor="t"/>
           <a:lstStyle/>
           <a:p>
-            <a:pPr algn="l" indent="0" marL="0">
-              <a:lnSpc>
-                <a:spcPct val="118000"/>
-              </a:lnSpc>
-              <a:buNone/>
-            </a:pPr>
-            <a:r>
-              <a:rPr lang="en-US" sz="1250" dirty="0">
-                <a:solidFill>
-                  <a:srgbClr val="3D4556"/>
-                </a:solidFill>
-                <a:latin typeface="Arial" pitchFamily="34" charset="0"/>
-                <a:ea typeface="Arial" pitchFamily="34" charset="-122"/>
-                <a:cs typeface="Arial" pitchFamily="34" charset="-120"/>
-              </a:rPr>
-              <a:t>L'avancement zone par zone, les appareils en comptage et en audit, les derniers scans : tout se lit du bureau, en direct. Le responsable du floor voit la même chose et conduit son inventaire ; vous gardez la vue d'ensemble. Le suivi est agrégé — on pilote le travail, pas les personnes.</a:t>
-            </a:r>
-            <a:endParaRPr lang="en-US" sz="1250" dirty="0"/>
-          </a:p>
-        </p:txBody>
-      </p:sp>
-      <p:sp>
-        <p:nvSpPr>
-          <p:cNvPr id="8" name="Shape 5"/>
-          <p:cNvSpPr/>
-          <p:nvPr/>
-        </p:nvSpPr>
-        <p:spPr>
-          <a:xfrm>
-            <a:off x="1808769" y="2825496"/>
-            <a:ext cx="8571413" cy="3172968"/>
-          </a:xfrm>
-          <a:prstGeom prst="roundRect">
-            <a:avLst>
-              <a:gd name="adj" fmla="val 2305"/>
-            </a:avLst>
-          </a:prstGeom>
-          <a:solidFill>
-            <a:srgbClr val="FFFFFF"/>
-          </a:solidFill>
-          <a:ln w="12700">
+            <a:pPr indent="0" marL="0">
+              <a:buNone/>
+            </a:pPr>
+            <a:r>
+              <a:rPr lang="en-US" sz="1050" b="1" dirty="0">
+                <a:solidFill>
+                  <a:srgbClr val="5B6475"/>
+                </a:solidFill>
+                <a:latin typeface="Arial" pitchFamily="34" charset="0"/>
+                <a:ea typeface="Arial" pitchFamily="34" charset="-122"/>
+                <a:cs typeface="Arial" pitchFamily="34" charset="-120"/>
+              </a:rPr>
+              <a:t>Sans Quantinvo</a:t>
+            </a:r>
+            <a:endParaRPr lang="en-US" sz="1050" dirty="0"/>
+          </a:p>
+        </p:txBody>
+      </p:sp>
+      <p:sp>
+        <p:nvSpPr>
+          <p:cNvPr id="8" name="Text 5"/>
+          <p:cNvSpPr/>
+          <p:nvPr/>
+        </p:nvSpPr>
+        <p:spPr>
+          <a:xfrm>
+            <a:off x="5852160" y="2240280"/>
+            <a:ext cx="4846320" cy="274320"/>
+          </a:xfrm>
+          <a:prstGeom prst="rect">
+            <a:avLst/>
+          </a:prstGeom>
+          <a:noFill/>
+          <a:ln/>
+        </p:spPr>
+        <p:txBody>
+          <a:bodyPr wrap="square" lIns="0" tIns="0" rIns="0" bIns="0" rtlCol="0" anchor="t"/>
+          <a:lstStyle/>
+          <a:p>
+            <a:pPr indent="0" marL="0">
+              <a:buNone/>
+            </a:pPr>
+            <a:r>
+              <a:rPr lang="en-US" sz="1050" b="1" dirty="0">
+                <a:solidFill>
+                  <a:srgbClr val="4636B0"/>
+                </a:solidFill>
+                <a:latin typeface="Arial" pitchFamily="34" charset="0"/>
+                <a:ea typeface="Arial" pitchFamily="34" charset="-122"/>
+                <a:cs typeface="Arial" pitchFamily="34" charset="-120"/>
+              </a:rPr>
+              <a:t>Avec Quantinvo</a:t>
+            </a:r>
+            <a:endParaRPr lang="en-US" sz="1050" dirty="0"/>
+          </a:p>
+        </p:txBody>
+      </p:sp>
+      <p:sp>
+        <p:nvSpPr>
+          <p:cNvPr id="9" name="Shape 6"/>
+          <p:cNvSpPr/>
+          <p:nvPr/>
+        </p:nvSpPr>
+        <p:spPr>
+          <a:xfrm>
+            <a:off x="731520" y="2606040"/>
+            <a:ext cx="10725912" cy="0"/>
+          </a:xfrm>
+          <a:prstGeom prst="line">
+            <a:avLst/>
+          </a:prstGeom>
+          <a:noFill/>
+          <a:ln w="9525">
             <a:solidFill>
               <a:srgbClr val="E3E6EE"/>
             </a:solidFill>
@@ -8080,40 +8423,16 @@
           </a:ln>
         </p:spPr>
       </p:sp>
-      <p:pic>
-        <p:nvPicPr>
-          <p:cNvPr id="9" name="Image 1" descr="preencoded.png">    </p:cNvPr>
-          <p:cNvPicPr>
-            <a:picLocks noChangeAspect="1"/>
-          </p:cNvPicPr>
-          <p:nvPr/>
-        </p:nvPicPr>
-        <p:blipFill>
-          <a:blip r:embed="rId2"/>
-          <a:stretch>
-            <a:fillRect/>
-          </a:stretch>
-        </p:blipFill>
-        <p:spPr>
-          <a:xfrm>
-            <a:off x="1863633" y="2880360"/>
-            <a:ext cx="8461685" cy="3063240"/>
-          </a:xfrm>
-          <a:prstGeom prst="rect">
-            <a:avLst/>
-          </a:prstGeom>
-        </p:spPr>
-      </p:pic>
-      <p:sp>
-        <p:nvSpPr>
-          <p:cNvPr id="10" name="Text 6"/>
-          <p:cNvSpPr/>
-          <p:nvPr/>
-        </p:nvSpPr>
-        <p:spPr>
-          <a:xfrm>
-            <a:off x="1863633" y="6080760"/>
-            <a:ext cx="6062472" cy="365760"/>
+      <p:sp>
+        <p:nvSpPr>
+          <p:cNvPr id="10" name="Text 7"/>
+          <p:cNvSpPr/>
+          <p:nvPr/>
+        </p:nvSpPr>
+        <p:spPr>
+          <a:xfrm>
+            <a:off x="731520" y="2752344"/>
+            <a:ext cx="4846320" cy="548640"/>
           </a:xfrm>
           <a:prstGeom prst="rect">
             <a:avLst/>
@@ -8126,26 +8445,522 @@
           <a:lstStyle/>
           <a:p>
             <a:pPr indent="0" marL="0">
-              <a:buNone/>
-            </a:pPr>
-            <a:r>
-              <a:rPr lang="en-US" sz="1000" i="1" dirty="0">
-                <a:solidFill>
-                  <a:srgbClr val="5B6475"/>
-                </a:solidFill>
-                <a:latin typeface="Arial" pitchFamily="34" charset="0"/>
-                <a:ea typeface="Arial" pitchFamily="34" charset="-122"/>
-                <a:cs typeface="Arial" pitchFamily="34" charset="-120"/>
-              </a:rPr>
-              <a:t>Onglet Suivi, données d'essai.</a:t>
-            </a:r>
-            <a:endParaRPr lang="en-US" sz="1000" dirty="0"/>
-          </a:p>
-        </p:txBody>
-      </p:sp>
-      <p:sp>
-        <p:nvSpPr>
-          <p:cNvPr id="11" name="Text 7"/>
+              <a:lnSpc>
+                <a:spcPct val="115000"/>
+              </a:lnSpc>
+              <a:buNone/>
+            </a:pPr>
+            <a:r>
+              <a:rPr lang="en-US" sz="1250" dirty="0">
+                <a:solidFill>
+                  <a:srgbClr val="3D4556"/>
+                </a:solidFill>
+                <a:latin typeface="Arial" pitchFamily="34" charset="0"/>
+                <a:ea typeface="Arial" pitchFamily="34" charset="-122"/>
+                <a:cs typeface="Arial" pitchFamily="34" charset="-120"/>
+              </a:rPr>
+              <a:t>Le balisage la veille, par l’Inventory Control avec une personne du floor.</a:t>
+            </a:r>
+            <a:endParaRPr lang="en-US" sz="1250" dirty="0"/>
+          </a:p>
+        </p:txBody>
+      </p:sp>
+      <p:sp>
+        <p:nvSpPr>
+          <p:cNvPr id="11" name="Text 8"/>
+          <p:cNvSpPr/>
+          <p:nvPr/>
+        </p:nvSpPr>
+        <p:spPr>
+          <a:xfrm>
+            <a:off x="5852160" y="2752344"/>
+            <a:ext cx="4846320" cy="548640"/>
+          </a:xfrm>
+          <a:prstGeom prst="rect">
+            <a:avLst/>
+          </a:prstGeom>
+          <a:noFill/>
+          <a:ln/>
+        </p:spPr>
+        <p:txBody>
+          <a:bodyPr wrap="square" lIns="0" tIns="0" rIns="0" bIns="0" rtlCol="0" anchor="t"/>
+          <a:lstStyle/>
+          <a:p>
+            <a:pPr indent="0" marL="0">
+              <a:lnSpc>
+                <a:spcPct val="115000"/>
+              </a:lnSpc>
+              <a:buNone/>
+            </a:pPr>
+            <a:r>
+              <a:rPr lang="en-US" sz="1250" dirty="0">
+                <a:solidFill>
+                  <a:srgbClr val="0B0F19"/>
+                </a:solidFill>
+                <a:latin typeface="Arial" pitchFamily="34" charset="0"/>
+                <a:ea typeface="Arial" pitchFamily="34" charset="-122"/>
+                <a:cs typeface="Arial" pitchFamily="34" charset="-120"/>
+              </a:rPr>
+              <a:t>Le chef d’équipe imprime ses balises et les pose avec son équipe.</a:t>
+            </a:r>
+            <a:endParaRPr lang="en-US" sz="1250" dirty="0"/>
+          </a:p>
+        </p:txBody>
+      </p:sp>
+      <p:sp>
+        <p:nvSpPr>
+          <p:cNvPr id="12" name="Shape 9"/>
+          <p:cNvSpPr/>
+          <p:nvPr/>
+        </p:nvSpPr>
+        <p:spPr>
+          <a:xfrm>
+            <a:off x="731520" y="3355848"/>
+            <a:ext cx="10725912" cy="0"/>
+          </a:xfrm>
+          <a:prstGeom prst="line">
+            <a:avLst/>
+          </a:prstGeom>
+          <a:noFill/>
+          <a:ln w="9525">
+            <a:solidFill>
+              <a:srgbClr val="E3E6EE"/>
+            </a:solidFill>
+            <a:prstDash val="solid"/>
+          </a:ln>
+        </p:spPr>
+      </p:sp>
+      <p:sp>
+        <p:nvSpPr>
+          <p:cNvPr id="13" name="Text 10"/>
+          <p:cNvSpPr/>
+          <p:nvPr/>
+        </p:nvSpPr>
+        <p:spPr>
+          <a:xfrm>
+            <a:off x="731520" y="3502152"/>
+            <a:ext cx="4846320" cy="548640"/>
+          </a:xfrm>
+          <a:prstGeom prst="rect">
+            <a:avLst/>
+          </a:prstGeom>
+          <a:noFill/>
+          <a:ln/>
+        </p:spPr>
+        <p:txBody>
+          <a:bodyPr wrap="square" lIns="0" tIns="0" rIns="0" bIns="0" rtlCol="0" anchor="t"/>
+          <a:lstStyle/>
+          <a:p>
+            <a:pPr indent="0" marL="0">
+              <a:lnSpc>
+                <a:spcPct val="115000"/>
+              </a:lnSpc>
+              <a:buNone/>
+            </a:pPr>
+            <a:r>
+              <a:rPr lang="en-US" sz="1250" dirty="0">
+                <a:solidFill>
+                  <a:srgbClr val="3D4556"/>
+                </a:solidFill>
+                <a:latin typeface="Arial" pitchFamily="34" charset="0"/>
+                <a:ea typeface="Arial" pitchFamily="34" charset="-122"/>
+                <a:cs typeface="Arial" pitchFamily="34" charset="-120"/>
+              </a:rPr>
+              <a:t>Des terminaux à connecter et vérifier un par un avant chaque session.</a:t>
+            </a:r>
+            <a:endParaRPr lang="en-US" sz="1250" dirty="0"/>
+          </a:p>
+        </p:txBody>
+      </p:sp>
+      <p:sp>
+        <p:nvSpPr>
+          <p:cNvPr id="14" name="Text 11"/>
+          <p:cNvSpPr/>
+          <p:nvPr/>
+        </p:nvSpPr>
+        <p:spPr>
+          <a:xfrm>
+            <a:off x="5852160" y="3502152"/>
+            <a:ext cx="4846320" cy="548640"/>
+          </a:xfrm>
+          <a:prstGeom prst="rect">
+            <a:avLst/>
+          </a:prstGeom>
+          <a:noFill/>
+          <a:ln/>
+        </p:spPr>
+        <p:txBody>
+          <a:bodyPr wrap="square" lIns="0" tIns="0" rIns="0" bIns="0" rtlCol="0" anchor="t"/>
+          <a:lstStyle/>
+          <a:p>
+            <a:pPr indent="0" marL="0">
+              <a:lnSpc>
+                <a:spcPct val="115000"/>
+              </a:lnSpc>
+              <a:buNone/>
+            </a:pPr>
+            <a:r>
+              <a:rPr lang="en-US" sz="1250" dirty="0">
+                <a:solidFill>
+                  <a:srgbClr val="0B0F19"/>
+                </a:solidFill>
+                <a:latin typeface="Arial" pitchFamily="34" charset="0"/>
+                <a:ea typeface="Arial" pitchFamily="34" charset="-122"/>
+                <a:cs typeface="Arial" pitchFamily="34" charset="-120"/>
+              </a:rPr>
+              <a:t>Aucune flotte : chaque vendeur rejoint l’inventaire depuis son téléphone.</a:t>
+            </a:r>
+            <a:endParaRPr lang="en-US" sz="1250" dirty="0"/>
+          </a:p>
+        </p:txBody>
+      </p:sp>
+      <p:sp>
+        <p:nvSpPr>
+          <p:cNvPr id="15" name="Shape 12"/>
+          <p:cNvSpPr/>
+          <p:nvPr/>
+        </p:nvSpPr>
+        <p:spPr>
+          <a:xfrm>
+            <a:off x="731520" y="4105656"/>
+            <a:ext cx="10725912" cy="0"/>
+          </a:xfrm>
+          <a:prstGeom prst="line">
+            <a:avLst/>
+          </a:prstGeom>
+          <a:noFill/>
+          <a:ln w="9525">
+            <a:solidFill>
+              <a:srgbClr val="E3E6EE"/>
+            </a:solidFill>
+            <a:prstDash val="solid"/>
+          </a:ln>
+        </p:spPr>
+      </p:sp>
+      <p:sp>
+        <p:nvSpPr>
+          <p:cNvPr id="16" name="Text 13"/>
+          <p:cNvSpPr/>
+          <p:nvPr/>
+        </p:nvSpPr>
+        <p:spPr>
+          <a:xfrm>
+            <a:off x="731520" y="4251960"/>
+            <a:ext cx="4846320" cy="548640"/>
+          </a:xfrm>
+          <a:prstGeom prst="rect">
+            <a:avLst/>
+          </a:prstGeom>
+          <a:noFill/>
+          <a:ln/>
+        </p:spPr>
+        <p:txBody>
+          <a:bodyPr wrap="square" lIns="0" tIns="0" rIns="0" bIns="0" rtlCol="0" anchor="t"/>
+          <a:lstStyle/>
+          <a:p>
+            <a:pPr indent="0" marL="0">
+              <a:lnSpc>
+                <a:spcPct val="115000"/>
+              </a:lnSpc>
+              <a:buNone/>
+            </a:pPr>
+            <a:r>
+              <a:rPr lang="en-US" sz="1250" dirty="0">
+                <a:solidFill>
+                  <a:srgbClr val="3D4556"/>
+                </a:solidFill>
+                <a:latin typeface="Arial" pitchFamily="34" charset="0"/>
+                <a:ea typeface="Arial" pitchFamily="34" charset="-122"/>
+                <a:cs typeface="Arial" pitchFamily="34" charset="-120"/>
+              </a:rPr>
+              <a:t>Un briefing sur le maniement des terminaux à chaque inventaire.</a:t>
+            </a:r>
+            <a:endParaRPr lang="en-US" sz="1250" dirty="0"/>
+          </a:p>
+        </p:txBody>
+      </p:sp>
+      <p:sp>
+        <p:nvSpPr>
+          <p:cNvPr id="17" name="Text 14"/>
+          <p:cNvSpPr/>
+          <p:nvPr/>
+        </p:nvSpPr>
+        <p:spPr>
+          <a:xfrm>
+            <a:off x="5852160" y="4251960"/>
+            <a:ext cx="4846320" cy="548640"/>
+          </a:xfrm>
+          <a:prstGeom prst="rect">
+            <a:avLst/>
+          </a:prstGeom>
+          <a:noFill/>
+          <a:ln/>
+        </p:spPr>
+        <p:txBody>
+          <a:bodyPr wrap="square" lIns="0" tIns="0" rIns="0" bIns="0" rtlCol="0" anchor="t"/>
+          <a:lstStyle/>
+          <a:p>
+            <a:pPr indent="0" marL="0">
+              <a:lnSpc>
+                <a:spcPct val="115000"/>
+              </a:lnSpc>
+              <a:buNone/>
+            </a:pPr>
+            <a:r>
+              <a:rPr lang="en-US" sz="1250" dirty="0">
+                <a:solidFill>
+                  <a:srgbClr val="0B0F19"/>
+                </a:solidFill>
+                <a:latin typeface="Arial" pitchFamily="34" charset="0"/>
+                <a:ea typeface="Arial" pitchFamily="34" charset="-122"/>
+                <a:cs typeface="Arial" pitchFamily="34" charset="-120"/>
+              </a:rPr>
+              <a:t>Le geste qu’ils connaissent : scanner la balise, scanner les articles.</a:t>
+            </a:r>
+            <a:endParaRPr lang="en-US" sz="1250" dirty="0"/>
+          </a:p>
+        </p:txBody>
+      </p:sp>
+      <p:sp>
+        <p:nvSpPr>
+          <p:cNvPr id="18" name="Shape 15"/>
+          <p:cNvSpPr/>
+          <p:nvPr/>
+        </p:nvSpPr>
+        <p:spPr>
+          <a:xfrm>
+            <a:off x="731520" y="4855464"/>
+            <a:ext cx="10725912" cy="0"/>
+          </a:xfrm>
+          <a:prstGeom prst="line">
+            <a:avLst/>
+          </a:prstGeom>
+          <a:noFill/>
+          <a:ln w="9525">
+            <a:solidFill>
+              <a:srgbClr val="E3E6EE"/>
+            </a:solidFill>
+            <a:prstDash val="solid"/>
+          </a:ln>
+        </p:spPr>
+      </p:sp>
+      <p:sp>
+        <p:nvSpPr>
+          <p:cNvPr id="19" name="Text 16"/>
+          <p:cNvSpPr/>
+          <p:nvPr/>
+        </p:nvSpPr>
+        <p:spPr>
+          <a:xfrm>
+            <a:off x="731520" y="5001768"/>
+            <a:ext cx="4846320" cy="548640"/>
+          </a:xfrm>
+          <a:prstGeom prst="rect">
+            <a:avLst/>
+          </a:prstGeom>
+          <a:noFill/>
+          <a:ln/>
+        </p:spPr>
+        <p:txBody>
+          <a:bodyPr wrap="square" lIns="0" tIns="0" rIns="0" bIns="0" rtlCol="0" anchor="t"/>
+          <a:lstStyle/>
+          <a:p>
+            <a:pPr indent="0" marL="0">
+              <a:lnSpc>
+                <a:spcPct val="115000"/>
+              </a:lnSpc>
+              <a:buNone/>
+            </a:pPr>
+            <a:r>
+              <a:rPr lang="en-US" sz="1250" dirty="0">
+                <a:solidFill>
+                  <a:srgbClr val="3D4556"/>
+                </a:solidFill>
+                <a:latin typeface="Arial" pitchFamily="34" charset="0"/>
+                <a:ea typeface="Arial" pitchFamily="34" charset="-122"/>
+                <a:cs typeface="Arial" pitchFamily="34" charset="-120"/>
+              </a:rPr>
+              <a:t>Quelqu’un posté sur la plateforme pour guetter les failed audits.</a:t>
+            </a:r>
+            <a:endParaRPr lang="en-US" sz="1250" dirty="0"/>
+          </a:p>
+        </p:txBody>
+      </p:sp>
+      <p:sp>
+        <p:nvSpPr>
+          <p:cNvPr id="20" name="Text 17"/>
+          <p:cNvSpPr/>
+          <p:nvPr/>
+        </p:nvSpPr>
+        <p:spPr>
+          <a:xfrm>
+            <a:off x="5852160" y="5001768"/>
+            <a:ext cx="4846320" cy="548640"/>
+          </a:xfrm>
+          <a:prstGeom prst="rect">
+            <a:avLst/>
+          </a:prstGeom>
+          <a:noFill/>
+          <a:ln/>
+        </p:spPr>
+        <p:txBody>
+          <a:bodyPr wrap="square" lIns="0" tIns="0" rIns="0" bIns="0" rtlCol="0" anchor="t"/>
+          <a:lstStyle/>
+          <a:p>
+            <a:pPr indent="0" marL="0">
+              <a:lnSpc>
+                <a:spcPct val="115000"/>
+              </a:lnSpc>
+              <a:buNone/>
+            </a:pPr>
+            <a:r>
+              <a:rPr lang="en-US" sz="1250" dirty="0">
+                <a:solidFill>
+                  <a:srgbClr val="0B0F19"/>
+                </a:solidFill>
+                <a:latin typeface="Arial" pitchFamily="34" charset="0"/>
+                <a:ea typeface="Arial" pitchFamily="34" charset="-122"/>
+                <a:cs typeface="Arial" pitchFamily="34" charset="-120"/>
+              </a:rPr>
+              <a:t>Le chef d’équipe voit tout et tranche les écarts au rayon.</a:t>
+            </a:r>
+            <a:endParaRPr lang="en-US" sz="1250" dirty="0"/>
+          </a:p>
+        </p:txBody>
+      </p:sp>
+      <p:sp>
+        <p:nvSpPr>
+          <p:cNvPr id="21" name="Shape 18"/>
+          <p:cNvSpPr/>
+          <p:nvPr/>
+        </p:nvSpPr>
+        <p:spPr>
+          <a:xfrm>
+            <a:off x="731520" y="5605272"/>
+            <a:ext cx="10725912" cy="0"/>
+          </a:xfrm>
+          <a:prstGeom prst="line">
+            <a:avLst/>
+          </a:prstGeom>
+          <a:noFill/>
+          <a:ln w="9525">
+            <a:solidFill>
+              <a:srgbClr val="E3E6EE"/>
+            </a:solidFill>
+            <a:prstDash val="solid"/>
+          </a:ln>
+        </p:spPr>
+      </p:sp>
+      <p:sp>
+        <p:nvSpPr>
+          <p:cNvPr id="22" name="Text 19"/>
+          <p:cNvSpPr/>
+          <p:nvPr/>
+        </p:nvSpPr>
+        <p:spPr>
+          <a:xfrm>
+            <a:off x="731520" y="5751576"/>
+            <a:ext cx="4846320" cy="548640"/>
+          </a:xfrm>
+          <a:prstGeom prst="rect">
+            <a:avLst/>
+          </a:prstGeom>
+          <a:noFill/>
+          <a:ln/>
+        </p:spPr>
+        <p:txBody>
+          <a:bodyPr wrap="square" lIns="0" tIns="0" rIns="0" bIns="0" rtlCol="0" anchor="t"/>
+          <a:lstStyle/>
+          <a:p>
+            <a:pPr indent="0" marL="0">
+              <a:lnSpc>
+                <a:spcPct val="115000"/>
+              </a:lnSpc>
+              <a:buNone/>
+            </a:pPr>
+            <a:r>
+              <a:rPr lang="en-US" sz="1250" dirty="0">
+                <a:solidFill>
+                  <a:srgbClr val="3D4556"/>
+                </a:solidFill>
+                <a:latin typeface="Arial" pitchFamily="34" charset="0"/>
+                <a:ea typeface="Arial" pitchFamily="34" charset="-122"/>
+                <a:cs typeface="Arial" pitchFamily="34" charset="-120"/>
+              </a:rPr>
+              <a:t>Le SKU Variance à consolider, l’Inventory Control présent du début à la fin.</a:t>
+            </a:r>
+            <a:endParaRPr lang="en-US" sz="1250" dirty="0"/>
+          </a:p>
+        </p:txBody>
+      </p:sp>
+      <p:sp>
+        <p:nvSpPr>
+          <p:cNvPr id="23" name="Text 20"/>
+          <p:cNvSpPr/>
+          <p:nvPr/>
+        </p:nvSpPr>
+        <p:spPr>
+          <a:xfrm>
+            <a:off x="5852160" y="5751576"/>
+            <a:ext cx="4846320" cy="548640"/>
+          </a:xfrm>
+          <a:prstGeom prst="rect">
+            <a:avLst/>
+          </a:prstGeom>
+          <a:noFill/>
+          <a:ln/>
+        </p:spPr>
+        <p:txBody>
+          <a:bodyPr wrap="square" lIns="0" tIns="0" rIns="0" bIns="0" rtlCol="0" anchor="t"/>
+          <a:lstStyle/>
+          <a:p>
+            <a:pPr indent="0" marL="0">
+              <a:lnSpc>
+                <a:spcPct val="115000"/>
+              </a:lnSpc>
+              <a:buNone/>
+            </a:pPr>
+            <a:r>
+              <a:rPr lang="en-US" sz="1250" dirty="0">
+                <a:solidFill>
+                  <a:srgbClr val="0B0F19"/>
+                </a:solidFill>
+                <a:latin typeface="Arial" pitchFamily="34" charset="0"/>
+                <a:ea typeface="Arial" pitchFamily="34" charset="-122"/>
+                <a:cs typeface="Arial" pitchFamily="34" charset="-120"/>
+              </a:rPr>
+              <a:t>Un rapport déjà croisé avec le théorique. Vous validez, vous ajustez.</a:t>
+            </a:r>
+            <a:endParaRPr lang="en-US" sz="1250" dirty="0"/>
+          </a:p>
+        </p:txBody>
+      </p:sp>
+      <p:sp>
+        <p:nvSpPr>
+          <p:cNvPr id="24" name="Shape 21"/>
+          <p:cNvSpPr/>
+          <p:nvPr/>
+        </p:nvSpPr>
+        <p:spPr>
+          <a:xfrm>
+            <a:off x="731520" y="6355080"/>
+            <a:ext cx="10725912" cy="0"/>
+          </a:xfrm>
+          <a:prstGeom prst="line">
+            <a:avLst/>
+          </a:prstGeom>
+          <a:noFill/>
+          <a:ln w="9525">
+            <a:solidFill>
+              <a:srgbClr val="E3E6EE"/>
+            </a:solidFill>
+            <a:prstDash val="solid"/>
+          </a:ln>
+        </p:spPr>
+      </p:sp>
+      <p:sp>
+        <p:nvSpPr>
+          <p:cNvPr id="25" name="Text 22"/>
           <p:cNvSpPr/>
           <p:nvPr/>
         </p:nvSpPr>
@@ -8184,7 +8999,7 @@
       </p:sp>
       <p:sp>
         <p:nvSpPr>
-          <p:cNvPr id="12" name="Text 8"/>
+          <p:cNvPr id="26" name="Text 23"/>
           <p:cNvSpPr/>
           <p:nvPr/>
         </p:nvSpPr>
@@ -8349,7 +9164,7 @@
                 <a:ea typeface="Arial" pitchFamily="34" charset="-122"/>
                 <a:cs typeface="Arial" pitchFamily="34" charset="-120"/>
               </a:rPr>
-              <a:t>L'audit</a:t>
+              <a:t>Pendant le comptage</a:t>
             </a:r>
             <a:endParaRPr lang="en-US" sz="1000" dirty="0"/>
           </a:p>
@@ -8416,7 +9231,7 @@
                 <a:ea typeface="Arial" pitchFamily="34" charset="-122"/>
                 <a:cs typeface="Arial" pitchFamily="34" charset="-120"/>
               </a:rPr>
-              <a:t>Vos règles d’audit restent. Les désaccords se règlent sur place.</a:t>
+              <a:t>Chacun suit son inventaire. Vous gardez la vue d’ensemble.</a:t>
             </a:r>
             <a:endParaRPr lang="en-US" sz="2600" dirty="0"/>
           </a:p>
@@ -8458,7 +9273,7 @@
                 <a:ea typeface="Arial" pitchFamily="34" charset="-122"/>
                 <a:cs typeface="Arial" pitchFamily="34" charset="-120"/>
               </a:rPr>
-              <a:t>Vous choisissez les zones à auditer — 100 % de la W&amp;J, 30 % au moins ailleurs : la règle reste la vôtre. Un failed audit ne s'attend plus dans un rapport : les deux comptages s'affichent côte à côte, l'écart en pièces et en valeur d'achat, et le superviseur tranche pendant que le compteur est encore au rayon.</a:t>
+              <a:t>Le chef d'équipe suit son rayon en direct : l'avancement zone par zone, les appareils en comptage et en audit, les derniers scans. L'Inventory Control, s'il le souhaite, ouvre la même vue sur n'importe quel inventaire en cours — sans en conduire aucun. Le suivi est agrégé : on pilote le travail, pas les personnes.</a:t>
             </a:r>
             <a:endParaRPr lang="en-US" sz="1250" dirty="0"/>
           </a:p>
@@ -8472,12 +9287,12 @@
         </p:nvSpPr>
         <p:spPr>
           <a:xfrm>
-            <a:off x="2139696" y="2871216"/>
-            <a:ext cx="7909560" cy="3082758"/>
+            <a:off x="1808769" y="2825496"/>
+            <a:ext cx="8571413" cy="3172968"/>
           </a:xfrm>
           <a:prstGeom prst="roundRect">
             <a:avLst>
-              <a:gd name="adj" fmla="val 2373"/>
+              <a:gd name="adj" fmla="val 2305"/>
             </a:avLst>
           </a:prstGeom>
           <a:solidFill>
@@ -8507,8 +9322,8 @@
         </p:blipFill>
         <p:spPr>
           <a:xfrm>
-            <a:off x="2194560" y="2926080"/>
-            <a:ext cx="7799832" cy="2973030"/>
+            <a:off x="1863633" y="2880360"/>
+            <a:ext cx="8461685" cy="3063240"/>
           </a:xfrm>
           <a:prstGeom prst="rect">
             <a:avLst/>
@@ -8523,7 +9338,7 @@
         </p:nvSpPr>
         <p:spPr>
           <a:xfrm>
-            <a:off x="2194560" y="6036270"/>
+            <a:off x="1863633" y="6080760"/>
             <a:ext cx="6062472" cy="365760"/>
           </a:xfrm>
           <a:prstGeom prst="rect">
@@ -8548,7 +9363,7 @@
                 <a:ea typeface="Arial" pitchFamily="34" charset="-122"/>
                 <a:cs typeface="Arial" pitchFamily="34" charset="-120"/>
               </a:rPr>
-              <a:t>Onglet Écarts d'audit, données d'essai.</a:t>
+              <a:t>Onglet Suivi, données d'essai.</a:t>
             </a:r>
             <a:endParaRPr lang="en-US" sz="1000" dirty="0"/>
           </a:p>
@@ -8760,7 +9575,7 @@
                 <a:ea typeface="Arial" pitchFamily="34" charset="-122"/>
                 <a:cs typeface="Arial" pitchFamily="34" charset="-120"/>
               </a:rPr>
-              <a:t>Après le comptage</a:t>
+              <a:t>L'audit</a:t>
             </a:r>
             <a:endParaRPr lang="en-US" sz="1000" dirty="0"/>
           </a:p>
@@ -8799,8 +9614,8 @@
         </p:nvSpPr>
         <p:spPr>
           <a:xfrm>
-            <a:off x="731520" y="1325880"/>
-            <a:ext cx="4206240" cy="2011680"/>
+            <a:off x="731520" y="1280160"/>
+            <a:ext cx="10725912" cy="822960"/>
           </a:xfrm>
           <a:prstGeom prst="rect">
             <a:avLst/>
@@ -8819,7 +9634,7 @@
               <a:buNone/>
             </a:pPr>
             <a:r>
-              <a:rPr lang="en-US" sz="2400" b="1" dirty="0">
+              <a:rPr lang="en-US" sz="2600" b="1" dirty="0">
                 <a:solidFill>
                   <a:srgbClr val="4636B0"/>
                 </a:solidFill>
@@ -8827,9 +9642,9 @@
                 <a:ea typeface="Arial" pitchFamily="34" charset="-122"/>
                 <a:cs typeface="Arial" pitchFamily="34" charset="-120"/>
               </a:rPr>
-              <a:t>La consolidation d'après-inventaire n'existe plus.</a:t>
-            </a:r>
-            <a:endParaRPr lang="en-US" sz="2400" dirty="0"/>
+              <a:t>Vous fixez la règle d’audit. Le floor l’applique.</a:t>
+            </a:r>
+            <a:endParaRPr lang="en-US" sz="2600" dirty="0"/>
           </a:p>
         </p:txBody>
       </p:sp>
@@ -8841,8 +9656,8 @@
         </p:nvSpPr>
         <p:spPr>
           <a:xfrm>
-            <a:off x="731520" y="3017520"/>
-            <a:ext cx="4206240" cy="1463040"/>
+            <a:off x="731520" y="2103120"/>
+            <a:ext cx="10725912" cy="731520"/>
           </a:xfrm>
           <a:prstGeom prst="rect">
             <a:avLst/>
@@ -8869,7 +9684,7 @@
                 <a:ea typeface="Arial" pitchFamily="34" charset="-122"/>
                 <a:cs typeface="Arial" pitchFamily="34" charset="-120"/>
               </a:rPr>
-              <a:t>Le rapport part du stock théorique, pas seulement de ce qui a été scanné. Un article attendu et jamais trouvé y figure, avec son manque : la démarque que l'inventaire est censé révéler est déjà dans le fichier.</a:t>
+              <a:t>100 % de la W&amp;J, 30 % au moins ailleurs : la règle reste la vôtre — le chef d'équipe l'exécute. Un failed audit ne s'attend plus dans un rapport : les deux comptages s'affichent côte à côte, l'écart en pièces et en valeur d'achat, et il se tranche pendant que le compteur est encore au rayon.</a:t>
             </a:r>
             <a:endParaRPr lang="en-US" sz="1250" dirty="0"/>
           </a:p>
@@ -8877,60 +9692,18 @@
       </p:sp>
       <p:sp>
         <p:nvSpPr>
-          <p:cNvPr id="8" name="Text 5"/>
-          <p:cNvSpPr/>
-          <p:nvPr/>
-        </p:nvSpPr>
-        <p:spPr>
-          <a:xfrm>
-            <a:off x="731520" y="4480560"/>
-            <a:ext cx="4206240" cy="914400"/>
-          </a:xfrm>
-          <a:prstGeom prst="rect">
-            <a:avLst/>
-          </a:prstGeom>
-          <a:noFill/>
-          <a:ln/>
-        </p:spPr>
-        <p:txBody>
-          <a:bodyPr wrap="square" lIns="0" tIns="0" rIns="0" bIns="0" rtlCol="0" anchor="t"/>
-          <a:lstStyle/>
-          <a:p>
-            <a:pPr algn="l" indent="0" marL="0">
-              <a:lnSpc>
-                <a:spcPct val="118000"/>
-              </a:lnSpc>
-              <a:buNone/>
-            </a:pPr>
-            <a:r>
-              <a:rPr lang="en-US" sz="1250" dirty="0">
-                <a:solidFill>
-                  <a:srgbClr val="3D4556"/>
-                </a:solidFill>
-                <a:latin typeface="Arial" pitchFamily="34" charset="0"/>
-                <a:ea typeface="Arial" pitchFamily="34" charset="-122"/>
-                <a:cs typeface="Arial" pitchFamily="34" charset="-120"/>
-              </a:rPr>
-              <a:t>Export Excel en un clic. Il ne reste que la validation et l'ajustement — les deux gestes qui doivent rester chez vous.</a:t>
-            </a:r>
-            <a:endParaRPr lang="en-US" sz="1250" dirty="0"/>
-          </a:p>
-        </p:txBody>
-      </p:sp>
-      <p:sp>
-        <p:nvSpPr>
-          <p:cNvPr id="9" name="Shape 6"/>
-          <p:cNvSpPr/>
-          <p:nvPr/>
-        </p:nvSpPr>
-        <p:spPr>
-          <a:xfrm>
-            <a:off x="5340096" y="1316736"/>
-            <a:ext cx="6172200" cy="4187624"/>
+          <p:cNvPr id="8" name="Shape 5"/>
+          <p:cNvSpPr/>
+          <p:nvPr/>
+        </p:nvSpPr>
+        <p:spPr>
+          <a:xfrm>
+            <a:off x="2139696" y="2871216"/>
+            <a:ext cx="7909560" cy="3082758"/>
           </a:xfrm>
           <a:prstGeom prst="roundRect">
             <a:avLst>
-              <a:gd name="adj" fmla="val 1747"/>
+              <a:gd name="adj" fmla="val 2373"/>
             </a:avLst>
           </a:prstGeom>
           <a:solidFill>
@@ -8946,7 +9719,7 @@
       </p:sp>
       <p:pic>
         <p:nvPicPr>
-          <p:cNvPr id="10" name="Image 1" descr="preencoded.png">    </p:cNvPr>
+          <p:cNvPr id="9" name="Image 1" descr="preencoded.png">    </p:cNvPr>
           <p:cNvPicPr>
             <a:picLocks noChangeAspect="1"/>
           </p:cNvPicPr>
@@ -8960,8 +9733,8 @@
         </p:blipFill>
         <p:spPr>
           <a:xfrm>
-            <a:off x="5394960" y="1371600"/>
-            <a:ext cx="6062472" cy="4077896"/>
+            <a:off x="2194560" y="2926080"/>
+            <a:ext cx="7799832" cy="2973030"/>
           </a:xfrm>
           <a:prstGeom prst="rect">
             <a:avLst/>
@@ -8970,46 +9743,46 @@
       </p:pic>
       <p:sp>
         <p:nvSpPr>
+          <p:cNvPr id="10" name="Text 6"/>
+          <p:cNvSpPr/>
+          <p:nvPr/>
+        </p:nvSpPr>
+        <p:spPr>
+          <a:xfrm>
+            <a:off x="2194560" y="6036270"/>
+            <a:ext cx="6062472" cy="365760"/>
+          </a:xfrm>
+          <a:prstGeom prst="rect">
+            <a:avLst/>
+          </a:prstGeom>
+          <a:noFill/>
+          <a:ln/>
+        </p:spPr>
+        <p:txBody>
+          <a:bodyPr wrap="square" lIns="0" tIns="0" rIns="0" bIns="0" rtlCol="0" anchor="t"/>
+          <a:lstStyle/>
+          <a:p>
+            <a:pPr indent="0" marL="0">
+              <a:buNone/>
+            </a:pPr>
+            <a:r>
+              <a:rPr lang="en-US" sz="1000" i="1" dirty="0">
+                <a:solidFill>
+                  <a:srgbClr val="5B6475"/>
+                </a:solidFill>
+                <a:latin typeface="Arial" pitchFamily="34" charset="0"/>
+                <a:ea typeface="Arial" pitchFamily="34" charset="-122"/>
+                <a:cs typeface="Arial" pitchFamily="34" charset="-120"/>
+              </a:rPr>
+              <a:t>Onglet Écarts d'audit, données d'essai.</a:t>
+            </a:r>
+            <a:endParaRPr lang="en-US" sz="1000" dirty="0"/>
+          </a:p>
+        </p:txBody>
+      </p:sp>
+      <p:sp>
+        <p:nvSpPr>
           <p:cNvPr id="11" name="Text 7"/>
-          <p:cNvSpPr/>
-          <p:nvPr/>
-        </p:nvSpPr>
-        <p:spPr>
-          <a:xfrm>
-            <a:off x="5394960" y="5586656"/>
-            <a:ext cx="6062472" cy="365760"/>
-          </a:xfrm>
-          <a:prstGeom prst="rect">
-            <a:avLst/>
-          </a:prstGeom>
-          <a:noFill/>
-          <a:ln/>
-        </p:spPr>
-        <p:txBody>
-          <a:bodyPr wrap="square" lIns="0" tIns="0" rIns="0" bIns="0" rtlCol="0" anchor="t"/>
-          <a:lstStyle/>
-          <a:p>
-            <a:pPr indent="0" marL="0">
-              <a:buNone/>
-            </a:pPr>
-            <a:r>
-              <a:rPr lang="en-US" sz="1000" i="1" dirty="0">
-                <a:solidFill>
-                  <a:srgbClr val="5B6475"/>
-                </a:solidFill>
-                <a:latin typeface="Arial" pitchFamily="34" charset="0"/>
-                <a:ea typeface="Arial" pitchFamily="34" charset="-122"/>
-                <a:cs typeface="Arial" pitchFamily="34" charset="-120"/>
-              </a:rPr>
-              <a:t>Onglet Rapport, données d'essai.</a:t>
-            </a:r>
-            <a:endParaRPr lang="en-US" sz="1000" dirty="0"/>
-          </a:p>
-        </p:txBody>
-      </p:sp>
-      <p:sp>
-        <p:nvSpPr>
-          <p:cNvPr id="12" name="Text 8"/>
           <p:cNvSpPr/>
           <p:nvPr/>
         </p:nvSpPr>
@@ -9048,7 +9821,7 @@
       </p:sp>
       <p:sp>
         <p:nvSpPr>
-          <p:cNvPr id="13" name="Text 9"/>
+          <p:cNvPr id="12" name="Text 8"/>
           <p:cNvSpPr/>
           <p:nvPr/>
         </p:nvSpPr>

--- a/docs/entreprise/deck/Quantinvo-Samaritaine.pptx
+++ b/docs/entreprise/deck/Quantinvo-Samaritaine.pptx
@@ -956,7 +956,7 @@
           <a:p>
             <a:r>
               <a:rPr lang="en-US" dirty="0"/>
-              <a:t>Parler en budget d'inventaire annuel, jamais en prix d'application. La grille au volume est dans le deck commercial et se confirme au devis ; ici, l'argument est que le modèle encourage précisément le transfert : plus le floor compte, plus la licence est rentabilisée.</a:t>
+              <a:t>Le palier se choisit sur le nombre de personnes qui comptent EN MÊME TEMPS, pas sur l'effectif : un floor de cent vendeurs dont vingt comptent le mardi matin relève d'Advanced. Le dépassement ne bloque jamais un comptage, il se règle au renouvellement. Au-delà de cent appareils sur un même magasin, ou pour plusieurs magasins, on établit un devis.</a:t>
             </a:r>
             <a:endParaRPr lang="en-US" dirty="0"/>
           </a:p>
@@ -2665,11 +2665,11 @@
         <p:spPr>
           <a:xfrm>
             <a:off x="5340096" y="1316736"/>
-            <a:ext cx="6172200" cy="4187624"/>
+            <a:ext cx="6172200" cy="4260383"/>
           </a:xfrm>
           <a:prstGeom prst="roundRect">
             <a:avLst>
-              <a:gd name="adj" fmla="val 1747"/>
+              <a:gd name="adj" fmla="val 1717"/>
             </a:avLst>
           </a:prstGeom>
           <a:solidFill>
@@ -2700,7 +2700,7 @@
         <p:spPr>
           <a:xfrm>
             <a:off x="5394960" y="1371600"/>
-            <a:ext cx="6062472" cy="4077896"/>
+            <a:ext cx="6062472" cy="4150655"/>
           </a:xfrm>
           <a:prstGeom prst="rect">
             <a:avLst/>
@@ -2715,7 +2715,7 @@
         </p:nvSpPr>
         <p:spPr>
           <a:xfrm>
-            <a:off x="5394960" y="5586656"/>
+            <a:off x="5394960" y="5659415"/>
             <a:ext cx="6062472" cy="365760"/>
           </a:xfrm>
           <a:prstGeom prst="rect">
@@ -3642,7 +3642,7 @@
                 <a:ea typeface="Arial" pitchFamily="34" charset="-122"/>
                 <a:cs typeface="Arial" pitchFamily="34" charset="-120"/>
               </a:rPr>
-              <a:t>Une licence par magasin, à l'année, comptages et compteurs illimités. Pas de coût par terminal, pas d'abonnement par appareil. Faire compter tout un floor un matin ne coûte rien de plus.</a:t>
+              <a:t>Une licence par magasin, sans un euro de matériel : ni terminal à acheter, ni flotte à entretenir, ni remplacement à budgéter. Les inventaires sont illimités — compter chaque semaine coûte le même prix que compter une fois par an.</a:t>
             </a:r>
             <a:endParaRPr lang="en-US" sz="1250" dirty="0"/>
           </a:p>
@@ -3858,7 +3858,7 @@
                 <a:ea typeface="Arial" pitchFamily="34" charset="-122"/>
                 <a:cs typeface="Arial" pitchFamily="34" charset="-120"/>
               </a:rPr>
-              <a:t>Un terminal durci encaisse mieux les chocs qu'un téléphone, et si votre flotte est déjà amortie, l'argument du matériel pèse moins. Les nôtres ne bougent pas : un outil que le floor prend en main sans briefing, aucun plafond au nombre de compteurs, et une réconciliation qui n'existe plus.</a:t>
+              <a:t>Un terminal durci encaisse mieux les chocs qu'un téléphone, et si votre flotte est déjà amortie, l'argument du matériel pèse moins. Les nôtres ne bougent pas : un outil que le floor prend en main sans briefing, des comptages illimités toute l'année, et une réconciliation qui n'existe plus.</a:t>
             </a:r>
             <a:endParaRPr lang="en-US" sz="1150" dirty="0"/>
           </a:p>
@@ -4310,7 +4310,7 @@
                 <a:ea typeface="Arial" pitchFamily="34" charset="-122"/>
                 <a:cs typeface="Arial" pitchFamily="34" charset="-120"/>
               </a:rPr>
-              <a:t>Android. </a:t>
+              <a:t>Android sur les boutiques. </a:t>
             </a:r>
             <a:pPr indent="0" marL="0">
               <a:lnSpc>
@@ -4330,7 +4330,7 @@
                 <a:ea typeface="Arial" pitchFamily="34" charset="-122"/>
                 <a:cs typeface="Arial" pitchFamily="34" charset="-120"/>
               </a:rPr>
-              <a:t>L'application est sur iPhone aujourd'hui. La version Android est en cours.</a:t>
+              <a:t>L'application tourne sur Android, et elle est disponible sur iPhone. La mise en ligne sur Google Play est en cours ; d'ici là, l'installation passe par votre catalogue d'entreprise.</a:t>
             </a:r>
             <a:endParaRPr lang="en-US" sz="1400" dirty="0"/>
           </a:p>
@@ -4624,8 +4624,8 @@
         </p:nvSpPr>
         <p:spPr>
           <a:xfrm>
-            <a:off x="731520" y="1325880"/>
-            <a:ext cx="4206240" cy="1645920"/>
+            <a:off x="731520" y="1188720"/>
+            <a:ext cx="10725912" cy="822960"/>
           </a:xfrm>
           <a:prstGeom prst="rect">
             <a:avLst/>
@@ -4644,7 +4644,7 @@
               <a:buNone/>
             </a:pPr>
             <a:r>
-              <a:rPr lang="en-US" sz="2400" b="1" dirty="0">
+              <a:rPr lang="en-US" sz="2600" b="1" dirty="0">
                 <a:solidFill>
                   <a:srgbClr val="4636B0"/>
                 </a:solidFill>
@@ -4652,9 +4652,9 @@
                 <a:ea typeface="Arial" pitchFamily="34" charset="-122"/>
                 <a:cs typeface="Arial" pitchFamily="34" charset="-120"/>
               </a:rPr>
-              <a:t>Une licence par magasin, à l’année, comptages illimités.</a:t>
-            </a:r>
-            <a:endParaRPr lang="en-US" sz="2400" dirty="0"/>
+              <a:t>Une licence par magasin, inventaires illimités</a:t>
+            </a:r>
+            <a:endParaRPr lang="en-US" sz="2600" dirty="0"/>
           </a:p>
         </p:txBody>
       </p:sp>
@@ -4666,8 +4666,8 @@
         </p:nvSpPr>
         <p:spPr>
           <a:xfrm>
-            <a:off x="731520" y="3749040"/>
-            <a:ext cx="4206240" cy="868680"/>
+            <a:off x="731520" y="1783080"/>
+            <a:ext cx="10725912" cy="457200"/>
           </a:xfrm>
           <a:prstGeom prst="rect">
             <a:avLst/>
@@ -4679,11 +4679,200 @@
           <a:bodyPr wrap="square" lIns="0" tIns="0" rIns="0" bIns="0" rtlCol="0" anchor="t"/>
           <a:lstStyle/>
           <a:p>
-            <a:pPr indent="0" marL="0">
-              <a:buNone/>
-            </a:pPr>
-            <a:r>
-              <a:rPr lang="en-US" sz="5400" b="1" dirty="0">
+            <a:pPr algn="l" indent="0" marL="0">
+              <a:lnSpc>
+                <a:spcPct val="118000"/>
+              </a:lnSpc>
+              <a:buNone/>
+            </a:pPr>
+            <a:r>
+              <a:rPr lang="en-US" sz="1150" dirty="0">
+                <a:solidFill>
+                  <a:srgbClr val="5B6475"/>
+                </a:solidFill>
+                <a:latin typeface="Arial" pitchFamily="34" charset="0"/>
+                <a:ea typeface="Arial" pitchFamily="34" charset="-122"/>
+                <a:cs typeface="Arial" pitchFamily="34" charset="-120"/>
+              </a:rPr>
+              <a:t>Le prix suit le nombre d'appareils qui comptent en même temps dans le magasin — la seule chose que vous puissiez vérifier vous-même. Ni le volume de votre stock, ni le nombre de comptes, ni le nombre d'inventaires dans l'année.</a:t>
+            </a:r>
+            <a:endParaRPr lang="en-US" sz="1150" dirty="0"/>
+          </a:p>
+        </p:txBody>
+      </p:sp>
+      <p:sp>
+        <p:nvSpPr>
+          <p:cNvPr id="8" name="Shape 5"/>
+          <p:cNvSpPr/>
+          <p:nvPr/>
+        </p:nvSpPr>
+        <p:spPr>
+          <a:xfrm>
+            <a:off x="731520" y="2331720"/>
+            <a:ext cx="3404616" cy="2743200"/>
+          </a:xfrm>
+          <a:prstGeom prst="roundRect">
+            <a:avLst>
+              <a:gd name="adj" fmla="val 4000"/>
+            </a:avLst>
+          </a:prstGeom>
+          <a:solidFill>
+            <a:srgbClr val="FFFFFF"/>
+          </a:solidFill>
+          <a:ln w="12700">
+            <a:solidFill>
+              <a:srgbClr val="E3E6EE"/>
+            </a:solidFill>
+            <a:prstDash val="solid"/>
+          </a:ln>
+        </p:spPr>
+      </p:sp>
+      <p:sp>
+        <p:nvSpPr>
+          <p:cNvPr id="9" name="Text 6"/>
+          <p:cNvSpPr/>
+          <p:nvPr/>
+        </p:nvSpPr>
+        <p:spPr>
+          <a:xfrm>
+            <a:off x="987552" y="2825496"/>
+            <a:ext cx="2892552" cy="347472"/>
+          </a:xfrm>
+          <a:prstGeom prst="rect">
+            <a:avLst/>
+          </a:prstGeom>
+          <a:noFill/>
+          <a:ln/>
+        </p:spPr>
+        <p:txBody>
+          <a:bodyPr wrap="square" lIns="0" tIns="0" rIns="0" bIns="0" rtlCol="0" anchor="t"/>
+          <a:lstStyle/>
+          <a:p>
+            <a:pPr indent="0" marL="0">
+              <a:buNone/>
+            </a:pPr>
+            <a:r>
+              <a:rPr lang="en-US" sz="1800" b="1" dirty="0">
+                <a:solidFill>
+                  <a:srgbClr val="0B0F19"/>
+                </a:solidFill>
+                <a:latin typeface="Arial" pitchFamily="34" charset="0"/>
+                <a:ea typeface="Arial" pitchFamily="34" charset="-122"/>
+                <a:cs typeface="Arial" pitchFamily="34" charset="-120"/>
+              </a:rPr>
+              <a:t>Essential</a:t>
+            </a:r>
+            <a:endParaRPr lang="en-US" sz="1800" dirty="0"/>
+          </a:p>
+        </p:txBody>
+      </p:sp>
+      <p:sp>
+        <p:nvSpPr>
+          <p:cNvPr id="10" name="Text 7"/>
+          <p:cNvSpPr/>
+          <p:nvPr/>
+        </p:nvSpPr>
+        <p:spPr>
+          <a:xfrm>
+            <a:off x="987552" y="3227832"/>
+            <a:ext cx="2892552" cy="256032"/>
+          </a:xfrm>
+          <a:prstGeom prst="rect">
+            <a:avLst/>
+          </a:prstGeom>
+          <a:noFill/>
+          <a:ln/>
+        </p:spPr>
+        <p:txBody>
+          <a:bodyPr wrap="square" lIns="0" tIns="0" rIns="0" bIns="0" rtlCol="0" anchor="t"/>
+          <a:lstStyle/>
+          <a:p>
+            <a:pPr indent="0" marL="0">
+              <a:buNone/>
+            </a:pPr>
+            <a:r>
+              <a:rPr lang="en-US" sz="1100" b="1" dirty="0">
+                <a:solidFill>
+                  <a:srgbClr val="6366F1"/>
+                </a:solidFill>
+                <a:latin typeface="Arial" pitchFamily="34" charset="0"/>
+                <a:ea typeface="Arial" pitchFamily="34" charset="-122"/>
+                <a:cs typeface="Arial" pitchFamily="34" charset="-120"/>
+              </a:rPr>
+              <a:t>2 appareils</a:t>
+            </a:r>
+            <a:endParaRPr lang="en-US" sz="1100" dirty="0"/>
+          </a:p>
+        </p:txBody>
+      </p:sp>
+      <p:sp>
+        <p:nvSpPr>
+          <p:cNvPr id="11" name="Text 8"/>
+          <p:cNvSpPr/>
+          <p:nvPr/>
+        </p:nvSpPr>
+        <p:spPr>
+          <a:xfrm>
+            <a:off x="987552" y="3538728"/>
+            <a:ext cx="2892552" cy="457200"/>
+          </a:xfrm>
+          <a:prstGeom prst="rect">
+            <a:avLst/>
+          </a:prstGeom>
+          <a:noFill/>
+          <a:ln/>
+        </p:spPr>
+        <p:txBody>
+          <a:bodyPr wrap="square" lIns="0" tIns="0" rIns="0" bIns="0" rtlCol="0" anchor="t"/>
+          <a:lstStyle/>
+          <a:p>
+            <a:pPr indent="0" marL="0">
+              <a:lnSpc>
+                <a:spcPct val="112000"/>
+              </a:lnSpc>
+              <a:buNone/>
+            </a:pPr>
+            <a:r>
+              <a:rPr lang="en-US" sz="1000" dirty="0">
+                <a:solidFill>
+                  <a:srgbClr val="5B6475"/>
+                </a:solidFill>
+                <a:latin typeface="Arial" pitchFamily="34" charset="0"/>
+                <a:ea typeface="Arial" pitchFamily="34" charset="-122"/>
+                <a:cs typeface="Arial" pitchFamily="34" charset="-120"/>
+              </a:rPr>
+              <a:t>Vous comptez seul ou à deux, dans un magasin.</a:t>
+            </a:r>
+            <a:endParaRPr lang="en-US" sz="1000" dirty="0"/>
+          </a:p>
+        </p:txBody>
+      </p:sp>
+      <p:sp>
+        <p:nvSpPr>
+          <p:cNvPr id="12" name="Text 9"/>
+          <p:cNvSpPr/>
+          <p:nvPr/>
+        </p:nvSpPr>
+        <p:spPr>
+          <a:xfrm>
+            <a:off x="987552" y="4050792"/>
+            <a:ext cx="2892552" cy="457200"/>
+          </a:xfrm>
+          <a:prstGeom prst="rect">
+            <a:avLst/>
+          </a:prstGeom>
+          <a:noFill/>
+          <a:ln/>
+        </p:spPr>
+        <p:txBody>
+          <a:bodyPr wrap="square" lIns="0" tIns="0" rIns="0" bIns="0" rtlCol="0" anchor="b"/>
+          <a:lstStyle/>
+          <a:p>
+            <a:pPr indent="0" marL="0">
+              <a:buNone/>
+            </a:pPr>
+            <a:r>
+              <a:rPr lang="en-US" sz="2600" b="1" dirty="0">
                 <a:solidFill>
                   <a:srgbClr val="4636B0"/>
                 </a:solidFill>
@@ -4691,22 +4880,36 @@
                 <a:ea typeface="Arial" pitchFamily="34" charset="-122"/>
                 <a:cs typeface="Arial" pitchFamily="34" charset="-120"/>
               </a:rPr>
-              <a:t>0</a:t>
-            </a:r>
-            <a:endParaRPr lang="en-US" sz="5400" dirty="0"/>
-          </a:p>
-        </p:txBody>
-      </p:sp>
-      <p:sp>
-        <p:nvSpPr>
-          <p:cNvPr id="8" name="Text 5"/>
-          <p:cNvSpPr/>
-          <p:nvPr/>
-        </p:nvSpPr>
-        <p:spPr>
-          <a:xfrm>
-            <a:off x="731520" y="4663440"/>
-            <a:ext cx="4206240" cy="731520"/>
+              <a:t>65 €</a:t>
+            </a:r>
+            <a:pPr indent="0" marL="0">
+              <a:buNone/>
+            </a:pPr>
+            <a:r>
+              <a:rPr lang="en-US" sz="1050" dirty="0">
+                <a:solidFill>
+                  <a:srgbClr val="5B6475"/>
+                </a:solidFill>
+                <a:latin typeface="Arial" pitchFamily="34" charset="0"/>
+                <a:ea typeface="Arial" pitchFamily="34" charset="-122"/>
+                <a:cs typeface="Arial" pitchFamily="34" charset="-120"/>
+              </a:rPr>
+              <a:t>  HT / mois</a:t>
+            </a:r>
+            <a:endParaRPr lang="en-US" sz="2600" dirty="0"/>
+          </a:p>
+        </p:txBody>
+      </p:sp>
+      <p:sp>
+        <p:nvSpPr>
+          <p:cNvPr id="13" name="Text 10"/>
+          <p:cNvSpPr/>
+          <p:nvPr/>
+        </p:nvSpPr>
+        <p:spPr>
+          <a:xfrm>
+            <a:off x="987552" y="4507992"/>
+            <a:ext cx="2892552" cy="274320"/>
           </a:xfrm>
           <a:prstGeom prst="rect">
             <a:avLst/>
@@ -4719,13 +4922,196 @@
           <a:lstStyle/>
           <a:p>
             <a:pPr indent="0" marL="0">
+              <a:buNone/>
+            </a:pPr>
+            <a:r>
+              <a:rPr lang="en-US" sz="950" dirty="0">
+                <a:solidFill>
+                  <a:srgbClr val="1F7A5C"/>
+                </a:solidFill>
+                <a:latin typeface="Arial" pitchFamily="34" charset="0"/>
+                <a:ea typeface="Arial" pitchFamily="34" charset="-122"/>
+                <a:cs typeface="Arial" pitchFamily="34" charset="-120"/>
+              </a:rPr>
+              <a:t>ou 690 € à l’année — 90 € de moins</a:t>
+            </a:r>
+            <a:endParaRPr lang="en-US" sz="950" dirty="0"/>
+          </a:p>
+        </p:txBody>
+      </p:sp>
+      <p:sp>
+        <p:nvSpPr>
+          <p:cNvPr id="14" name="Shape 11"/>
+          <p:cNvSpPr/>
+          <p:nvPr/>
+        </p:nvSpPr>
+        <p:spPr>
+          <a:xfrm>
+            <a:off x="4392168" y="2331720"/>
+            <a:ext cx="3404616" cy="2743200"/>
+          </a:xfrm>
+          <a:prstGeom prst="roundRect">
+            <a:avLst>
+              <a:gd name="adj" fmla="val 4000"/>
+            </a:avLst>
+          </a:prstGeom>
+          <a:solidFill>
+            <a:srgbClr val="EEEEFC"/>
+          </a:solidFill>
+          <a:ln w="19050">
+            <a:solidFill>
+              <a:srgbClr val="6366F1"/>
+            </a:solidFill>
+            <a:prstDash val="solid"/>
+          </a:ln>
+        </p:spPr>
+      </p:sp>
+      <p:sp>
+        <p:nvSpPr>
+          <p:cNvPr id="15" name="Text 12"/>
+          <p:cNvSpPr/>
+          <p:nvPr/>
+        </p:nvSpPr>
+        <p:spPr>
+          <a:xfrm>
+            <a:off x="4648200" y="2532888"/>
+            <a:ext cx="2892552" cy="219456"/>
+          </a:xfrm>
+          <a:prstGeom prst="rect">
+            <a:avLst/>
+          </a:prstGeom>
+          <a:noFill/>
+          <a:ln/>
+        </p:spPr>
+        <p:txBody>
+          <a:bodyPr wrap="square" lIns="0" tIns="0" rIns="0" bIns="0" rtlCol="0" anchor="t"/>
+          <a:lstStyle/>
+          <a:p>
+            <a:pPr indent="0" marL="0">
+              <a:buNone/>
+            </a:pPr>
+            <a:r>
+              <a:rPr lang="en-US" sz="800" b="1" spc="60" kern="0" dirty="0">
+                <a:solidFill>
+                  <a:srgbClr val="6366F1"/>
+                </a:solidFill>
+                <a:latin typeface="Arial" pitchFamily="34" charset="0"/>
+                <a:ea typeface="Arial" pitchFamily="34" charset="-122"/>
+                <a:cs typeface="Arial" pitchFamily="34" charset="-120"/>
+              </a:rPr>
+              <a:t>LE PLUS COURANT</a:t>
+            </a:r>
+            <a:endParaRPr lang="en-US" sz="800" dirty="0"/>
+          </a:p>
+        </p:txBody>
+      </p:sp>
+      <p:sp>
+        <p:nvSpPr>
+          <p:cNvPr id="16" name="Text 13"/>
+          <p:cNvSpPr/>
+          <p:nvPr/>
+        </p:nvSpPr>
+        <p:spPr>
+          <a:xfrm>
+            <a:off x="4648200" y="2825496"/>
+            <a:ext cx="2892552" cy="347472"/>
+          </a:xfrm>
+          <a:prstGeom prst="rect">
+            <a:avLst/>
+          </a:prstGeom>
+          <a:noFill/>
+          <a:ln/>
+        </p:spPr>
+        <p:txBody>
+          <a:bodyPr wrap="square" lIns="0" tIns="0" rIns="0" bIns="0" rtlCol="0" anchor="t"/>
+          <a:lstStyle/>
+          <a:p>
+            <a:pPr indent="0" marL="0">
+              <a:buNone/>
+            </a:pPr>
+            <a:r>
+              <a:rPr lang="en-US" sz="1800" b="1" dirty="0">
+                <a:solidFill>
+                  <a:srgbClr val="0B0F19"/>
+                </a:solidFill>
+                <a:latin typeface="Arial" pitchFamily="34" charset="0"/>
+                <a:ea typeface="Arial" pitchFamily="34" charset="-122"/>
+                <a:cs typeface="Arial" pitchFamily="34" charset="-120"/>
+              </a:rPr>
+              <a:t>Advanced</a:t>
+            </a:r>
+            <a:endParaRPr lang="en-US" sz="1800" dirty="0"/>
+          </a:p>
+        </p:txBody>
+      </p:sp>
+      <p:sp>
+        <p:nvSpPr>
+          <p:cNvPr id="17" name="Text 14"/>
+          <p:cNvSpPr/>
+          <p:nvPr/>
+        </p:nvSpPr>
+        <p:spPr>
+          <a:xfrm>
+            <a:off x="4648200" y="3227832"/>
+            <a:ext cx="2892552" cy="256032"/>
+          </a:xfrm>
+          <a:prstGeom prst="rect">
+            <a:avLst/>
+          </a:prstGeom>
+          <a:noFill/>
+          <a:ln/>
+        </p:spPr>
+        <p:txBody>
+          <a:bodyPr wrap="square" lIns="0" tIns="0" rIns="0" bIns="0" rtlCol="0" anchor="t"/>
+          <a:lstStyle/>
+          <a:p>
+            <a:pPr indent="0" marL="0">
+              <a:buNone/>
+            </a:pPr>
+            <a:r>
+              <a:rPr lang="en-US" sz="1100" b="1" dirty="0">
+                <a:solidFill>
+                  <a:srgbClr val="6366F1"/>
+                </a:solidFill>
+                <a:latin typeface="Arial" pitchFamily="34" charset="0"/>
+                <a:ea typeface="Arial" pitchFamily="34" charset="-122"/>
+                <a:cs typeface="Arial" pitchFamily="34" charset="-120"/>
+              </a:rPr>
+              <a:t>3 à 20 appareils</a:t>
+            </a:r>
+            <a:endParaRPr lang="en-US" sz="1100" dirty="0"/>
+          </a:p>
+        </p:txBody>
+      </p:sp>
+      <p:sp>
+        <p:nvSpPr>
+          <p:cNvPr id="18" name="Text 15"/>
+          <p:cNvSpPr/>
+          <p:nvPr/>
+        </p:nvSpPr>
+        <p:spPr>
+          <a:xfrm>
+            <a:off x="4648200" y="3538728"/>
+            <a:ext cx="2892552" cy="457200"/>
+          </a:xfrm>
+          <a:prstGeom prst="rect">
+            <a:avLst/>
+          </a:prstGeom>
+          <a:noFill/>
+          <a:ln/>
+        </p:spPr>
+        <p:txBody>
+          <a:bodyPr wrap="square" lIns="0" tIns="0" rIns="0" bIns="0" rtlCol="0" anchor="t"/>
+          <a:lstStyle/>
+          <a:p>
+            <a:pPr indent="0" marL="0">
               <a:lnSpc>
-                <a:spcPct val="115000"/>
+                <a:spcPct val="112000"/>
               </a:lnSpc>
               <a:buNone/>
             </a:pPr>
             <a:r>
-              <a:rPr lang="en-US" sz="1200" dirty="0">
+              <a:rPr lang="en-US" sz="1000" dirty="0">
                 <a:solidFill>
                   <a:srgbClr val="5B6475"/>
                 </a:solidFill>
@@ -4733,22 +5119,353 @@
                 <a:ea typeface="Arial" pitchFamily="34" charset="-122"/>
                 <a:cs typeface="Arial" pitchFamily="34" charset="-120"/>
               </a:rPr>
-              <a:t>terminal à acheter, à louer ou à configurer.</a:t>
-            </a:r>
-            <a:endParaRPr lang="en-US" sz="1200" dirty="0"/>
-          </a:p>
-        </p:txBody>
-      </p:sp>
-      <p:sp>
-        <p:nvSpPr>
-          <p:cNvPr id="9" name="Text 6"/>
-          <p:cNvSpPr/>
-          <p:nvPr/>
-        </p:nvSpPr>
-        <p:spPr>
-          <a:xfrm>
-            <a:off x="5394960" y="1371600"/>
-            <a:ext cx="6062472" cy="4389120"/>
+              <a:t>Vous montez une équipe le jour de l’inventaire.</a:t>
+            </a:r>
+            <a:endParaRPr lang="en-US" sz="1000" dirty="0"/>
+          </a:p>
+        </p:txBody>
+      </p:sp>
+      <p:sp>
+        <p:nvSpPr>
+          <p:cNvPr id="19" name="Text 16"/>
+          <p:cNvSpPr/>
+          <p:nvPr/>
+        </p:nvSpPr>
+        <p:spPr>
+          <a:xfrm>
+            <a:off x="4648200" y="4050792"/>
+            <a:ext cx="2892552" cy="457200"/>
+          </a:xfrm>
+          <a:prstGeom prst="rect">
+            <a:avLst/>
+          </a:prstGeom>
+          <a:noFill/>
+          <a:ln/>
+        </p:spPr>
+        <p:txBody>
+          <a:bodyPr wrap="square" lIns="0" tIns="0" rIns="0" bIns="0" rtlCol="0" anchor="b"/>
+          <a:lstStyle/>
+          <a:p>
+            <a:pPr indent="0" marL="0">
+              <a:buNone/>
+            </a:pPr>
+            <a:r>
+              <a:rPr lang="en-US" sz="2600" b="1" dirty="0">
+                <a:solidFill>
+                  <a:srgbClr val="4636B0"/>
+                </a:solidFill>
+                <a:latin typeface="Arial" pitchFamily="34" charset="0"/>
+                <a:ea typeface="Arial" pitchFamily="34" charset="-122"/>
+                <a:cs typeface="Arial" pitchFamily="34" charset="-120"/>
+              </a:rPr>
+              <a:t>225 €</a:t>
+            </a:r>
+            <a:pPr indent="0" marL="0">
+              <a:buNone/>
+            </a:pPr>
+            <a:r>
+              <a:rPr lang="en-US" sz="1050" dirty="0">
+                <a:solidFill>
+                  <a:srgbClr val="5B6475"/>
+                </a:solidFill>
+                <a:latin typeface="Arial" pitchFamily="34" charset="0"/>
+                <a:ea typeface="Arial" pitchFamily="34" charset="-122"/>
+                <a:cs typeface="Arial" pitchFamily="34" charset="-120"/>
+              </a:rPr>
+              <a:t>  HT / mois</a:t>
+            </a:r>
+            <a:endParaRPr lang="en-US" sz="2600" dirty="0"/>
+          </a:p>
+        </p:txBody>
+      </p:sp>
+      <p:sp>
+        <p:nvSpPr>
+          <p:cNvPr id="20" name="Text 17"/>
+          <p:cNvSpPr/>
+          <p:nvPr/>
+        </p:nvSpPr>
+        <p:spPr>
+          <a:xfrm>
+            <a:off x="4648200" y="4507992"/>
+            <a:ext cx="2892552" cy="274320"/>
+          </a:xfrm>
+          <a:prstGeom prst="rect">
+            <a:avLst/>
+          </a:prstGeom>
+          <a:noFill/>
+          <a:ln/>
+        </p:spPr>
+        <p:txBody>
+          <a:bodyPr wrap="square" lIns="0" tIns="0" rIns="0" bIns="0" rtlCol="0" anchor="t"/>
+          <a:lstStyle/>
+          <a:p>
+            <a:pPr indent="0" marL="0">
+              <a:buNone/>
+            </a:pPr>
+            <a:r>
+              <a:rPr lang="en-US" sz="950" dirty="0">
+                <a:solidFill>
+                  <a:srgbClr val="1F7A5C"/>
+                </a:solidFill>
+                <a:latin typeface="Arial" pitchFamily="34" charset="0"/>
+                <a:ea typeface="Arial" pitchFamily="34" charset="-122"/>
+                <a:cs typeface="Arial" pitchFamily="34" charset="-120"/>
+              </a:rPr>
+              <a:t>ou 2 400 € à l’année — 300 € de moins</a:t>
+            </a:r>
+            <a:endParaRPr lang="en-US" sz="950" dirty="0"/>
+          </a:p>
+        </p:txBody>
+      </p:sp>
+      <p:sp>
+        <p:nvSpPr>
+          <p:cNvPr id="21" name="Shape 18"/>
+          <p:cNvSpPr/>
+          <p:nvPr/>
+        </p:nvSpPr>
+        <p:spPr>
+          <a:xfrm>
+            <a:off x="8052816" y="2331720"/>
+            <a:ext cx="3404616" cy="2743200"/>
+          </a:xfrm>
+          <a:prstGeom prst="roundRect">
+            <a:avLst>
+              <a:gd name="adj" fmla="val 4000"/>
+            </a:avLst>
+          </a:prstGeom>
+          <a:solidFill>
+            <a:srgbClr val="FFFFFF"/>
+          </a:solidFill>
+          <a:ln w="12700">
+            <a:solidFill>
+              <a:srgbClr val="E3E6EE"/>
+            </a:solidFill>
+            <a:prstDash val="solid"/>
+          </a:ln>
+        </p:spPr>
+      </p:sp>
+      <p:sp>
+        <p:nvSpPr>
+          <p:cNvPr id="22" name="Text 19"/>
+          <p:cNvSpPr/>
+          <p:nvPr/>
+        </p:nvSpPr>
+        <p:spPr>
+          <a:xfrm>
+            <a:off x="8308848" y="2825496"/>
+            <a:ext cx="2892552" cy="347472"/>
+          </a:xfrm>
+          <a:prstGeom prst="rect">
+            <a:avLst/>
+          </a:prstGeom>
+          <a:noFill/>
+          <a:ln/>
+        </p:spPr>
+        <p:txBody>
+          <a:bodyPr wrap="square" lIns="0" tIns="0" rIns="0" bIns="0" rtlCol="0" anchor="t"/>
+          <a:lstStyle/>
+          <a:p>
+            <a:pPr indent="0" marL="0">
+              <a:buNone/>
+            </a:pPr>
+            <a:r>
+              <a:rPr lang="en-US" sz="1800" b="1" dirty="0">
+                <a:solidFill>
+                  <a:srgbClr val="0B0F19"/>
+                </a:solidFill>
+                <a:latin typeface="Arial" pitchFamily="34" charset="0"/>
+                <a:ea typeface="Arial" pitchFamily="34" charset="-122"/>
+                <a:cs typeface="Arial" pitchFamily="34" charset="-120"/>
+              </a:rPr>
+              <a:t>Enterprise</a:t>
+            </a:r>
+            <a:endParaRPr lang="en-US" sz="1800" dirty="0"/>
+          </a:p>
+        </p:txBody>
+      </p:sp>
+      <p:sp>
+        <p:nvSpPr>
+          <p:cNvPr id="23" name="Text 20"/>
+          <p:cNvSpPr/>
+          <p:nvPr/>
+        </p:nvSpPr>
+        <p:spPr>
+          <a:xfrm>
+            <a:off x="8308848" y="3227832"/>
+            <a:ext cx="2892552" cy="256032"/>
+          </a:xfrm>
+          <a:prstGeom prst="rect">
+            <a:avLst/>
+          </a:prstGeom>
+          <a:noFill/>
+          <a:ln/>
+        </p:spPr>
+        <p:txBody>
+          <a:bodyPr wrap="square" lIns="0" tIns="0" rIns="0" bIns="0" rtlCol="0" anchor="t"/>
+          <a:lstStyle/>
+          <a:p>
+            <a:pPr indent="0" marL="0">
+              <a:buNone/>
+            </a:pPr>
+            <a:r>
+              <a:rPr lang="en-US" sz="1100" b="1" dirty="0">
+                <a:solidFill>
+                  <a:srgbClr val="6366F1"/>
+                </a:solidFill>
+                <a:latin typeface="Arial" pitchFamily="34" charset="0"/>
+                <a:ea typeface="Arial" pitchFamily="34" charset="-122"/>
+                <a:cs typeface="Arial" pitchFamily="34" charset="-120"/>
+              </a:rPr>
+              <a:t>21 à 100 appareils</a:t>
+            </a:r>
+            <a:endParaRPr lang="en-US" sz="1100" dirty="0"/>
+          </a:p>
+        </p:txBody>
+      </p:sp>
+      <p:sp>
+        <p:nvSpPr>
+          <p:cNvPr id="24" name="Text 21"/>
+          <p:cNvSpPr/>
+          <p:nvPr/>
+        </p:nvSpPr>
+        <p:spPr>
+          <a:xfrm>
+            <a:off x="8308848" y="3538728"/>
+            <a:ext cx="2892552" cy="457200"/>
+          </a:xfrm>
+          <a:prstGeom prst="rect">
+            <a:avLst/>
+          </a:prstGeom>
+          <a:noFill/>
+          <a:ln/>
+        </p:spPr>
+        <p:txBody>
+          <a:bodyPr wrap="square" lIns="0" tIns="0" rIns="0" bIns="0" rtlCol="0" anchor="t"/>
+          <a:lstStyle/>
+          <a:p>
+            <a:pPr indent="0" marL="0">
+              <a:lnSpc>
+                <a:spcPct val="112000"/>
+              </a:lnSpc>
+              <a:buNone/>
+            </a:pPr>
+            <a:r>
+              <a:rPr lang="en-US" sz="1000" dirty="0">
+                <a:solidFill>
+                  <a:srgbClr val="5B6475"/>
+                </a:solidFill>
+                <a:latin typeface="Arial" pitchFamily="34" charset="0"/>
+                <a:ea typeface="Arial" pitchFamily="34" charset="-122"/>
+                <a:cs typeface="Arial" pitchFamily="34" charset="-120"/>
+              </a:rPr>
+              <a:t>La grande surface, qui mobilise une équipe entière.</a:t>
+            </a:r>
+            <a:endParaRPr lang="en-US" sz="1000" dirty="0"/>
+          </a:p>
+        </p:txBody>
+      </p:sp>
+      <p:sp>
+        <p:nvSpPr>
+          <p:cNvPr id="25" name="Text 22"/>
+          <p:cNvSpPr/>
+          <p:nvPr/>
+        </p:nvSpPr>
+        <p:spPr>
+          <a:xfrm>
+            <a:off x="8308848" y="4050792"/>
+            <a:ext cx="2892552" cy="457200"/>
+          </a:xfrm>
+          <a:prstGeom prst="rect">
+            <a:avLst/>
+          </a:prstGeom>
+          <a:noFill/>
+          <a:ln/>
+        </p:spPr>
+        <p:txBody>
+          <a:bodyPr wrap="square" lIns="0" tIns="0" rIns="0" bIns="0" rtlCol="0" anchor="b"/>
+          <a:lstStyle/>
+          <a:p>
+            <a:pPr indent="0" marL="0">
+              <a:buNone/>
+            </a:pPr>
+            <a:r>
+              <a:rPr lang="en-US" sz="2600" b="1" dirty="0">
+                <a:solidFill>
+                  <a:srgbClr val="4636B0"/>
+                </a:solidFill>
+                <a:latin typeface="Arial" pitchFamily="34" charset="0"/>
+                <a:ea typeface="Arial" pitchFamily="34" charset="-122"/>
+                <a:cs typeface="Arial" pitchFamily="34" charset="-120"/>
+              </a:rPr>
+              <a:t>650 €</a:t>
+            </a:r>
+            <a:pPr indent="0" marL="0">
+              <a:buNone/>
+            </a:pPr>
+            <a:r>
+              <a:rPr lang="en-US" sz="1050" dirty="0">
+                <a:solidFill>
+                  <a:srgbClr val="5B6475"/>
+                </a:solidFill>
+                <a:latin typeface="Arial" pitchFamily="34" charset="0"/>
+                <a:ea typeface="Arial" pitchFamily="34" charset="-122"/>
+                <a:cs typeface="Arial" pitchFamily="34" charset="-120"/>
+              </a:rPr>
+              <a:t>  HT / mois</a:t>
+            </a:r>
+            <a:endParaRPr lang="en-US" sz="2600" dirty="0"/>
+          </a:p>
+        </p:txBody>
+      </p:sp>
+      <p:sp>
+        <p:nvSpPr>
+          <p:cNvPr id="26" name="Text 23"/>
+          <p:cNvSpPr/>
+          <p:nvPr/>
+        </p:nvSpPr>
+        <p:spPr>
+          <a:xfrm>
+            <a:off x="8308848" y="4507992"/>
+            <a:ext cx="2892552" cy="274320"/>
+          </a:xfrm>
+          <a:prstGeom prst="rect">
+            <a:avLst/>
+          </a:prstGeom>
+          <a:noFill/>
+          <a:ln/>
+        </p:spPr>
+        <p:txBody>
+          <a:bodyPr wrap="square" lIns="0" tIns="0" rIns="0" bIns="0" rtlCol="0" anchor="t"/>
+          <a:lstStyle/>
+          <a:p>
+            <a:pPr indent="0" marL="0">
+              <a:buNone/>
+            </a:pPr>
+            <a:r>
+              <a:rPr lang="en-US" sz="950" dirty="0">
+                <a:solidFill>
+                  <a:srgbClr val="1F7A5C"/>
+                </a:solidFill>
+                <a:latin typeface="Arial" pitchFamily="34" charset="0"/>
+                <a:ea typeface="Arial" pitchFamily="34" charset="-122"/>
+                <a:cs typeface="Arial" pitchFamily="34" charset="-120"/>
+              </a:rPr>
+              <a:t>ou 6 900 € à l’année — 900 € de moins</a:t>
+            </a:r>
+            <a:endParaRPr lang="en-US" sz="950" dirty="0"/>
+          </a:p>
+        </p:txBody>
+      </p:sp>
+      <p:sp>
+        <p:nvSpPr>
+          <p:cNvPr id="27" name="Text 24"/>
+          <p:cNvSpPr/>
+          <p:nvPr/>
+        </p:nvSpPr>
+        <p:spPr>
+          <a:xfrm>
+            <a:off x="731520" y="5212080"/>
+            <a:ext cx="10725912" cy="1005840"/>
           </a:xfrm>
           <a:prstGeom prst="rect">
             <a:avLst/>
@@ -4765,12 +5482,12 @@
                 <a:spcPct val="118000"/>
               </a:lnSpc>
               <a:spcAft>
-                <a:spcPts val="1400"/>
+                <a:spcPts val="900"/>
               </a:spcAft>
               <a:buNone/>
             </a:pPr>
             <a:r>
-              <a:rPr lang="en-US" sz="1350" b="1" dirty="0">
+              <a:rPr lang="en-US" sz="1200" b="1" dirty="0">
                 <a:solidFill>
                   <a:srgbClr val="0B0F19"/>
                 </a:solidFill>
@@ -4778,19 +5495,19 @@
                 <a:ea typeface="Arial" pitchFamily="34" charset="-122"/>
                 <a:cs typeface="Arial" pitchFamily="34" charset="-120"/>
               </a:rPr>
-              <a:t>Le prix suit le stock, pas l'usage. </a:t>
+              <a:t>Ce que ça change pour l’inventaire tournant. </a:t>
             </a:r>
             <a:pPr indent="0" marL="0">
               <a:lnSpc>
                 <a:spcPct val="118000"/>
               </a:lnSpc>
               <a:spcAft>
-                <a:spcPts val="1400"/>
+                <a:spcPts val="900"/>
               </a:spcAft>
               <a:buNone/>
             </a:pPr>
             <a:r>
-              <a:rPr lang="en-US" sz="1350" dirty="0">
+              <a:rPr lang="en-US" sz="1200" dirty="0">
                 <a:solidFill>
                   <a:srgbClr val="3D4556"/>
                 </a:solidFill>
@@ -4798,9 +5515,9 @@
                 <a:ea typeface="Arial" pitchFamily="34" charset="-122"/>
                 <a:cs typeface="Arial" pitchFamily="34" charset="-120"/>
               </a:rPr>
-              <a:t>La licence se calcule sur le volume de stock du magasin, en unités. Elle ne dépend ni du nombre de compteurs, ni du nombre d'inventaires — tournants, aléatoires ou complets — dans l'année. Chaque chef d'équipe peut compter son rayon quand il le décide : ça ne coûte rien de plus.</a:t>
-            </a:r>
-            <a:endParaRPr lang="en-US" sz="1350" dirty="0"/>
+              <a:t>À l'intérieur d'un palier, compter davantage ne coûte rien : un chef d'équipe qui décide de compter son rayon un mardi matin n'a aucun budget à demander. C'est ce qui rend le transfert au floor tenable dans la durée.</a:t>
+            </a:r>
+            <a:endParaRPr lang="en-US" sz="1200" dirty="0"/>
           </a:p>
           <a:p>
             <a:pPr indent="0" marL="0">
@@ -4808,12 +5525,12 @@
                 <a:spcPct val="118000"/>
               </a:lnSpc>
               <a:spcAft>
-                <a:spcPts val="1400"/>
+                <a:spcPts val="900"/>
               </a:spcAft>
               <a:buNone/>
             </a:pPr>
             <a:r>
-              <a:rPr lang="en-US" sz="1350" b="1" dirty="0">
+              <a:rPr lang="en-US" sz="1200" b="1" dirty="0">
                 <a:solidFill>
                   <a:srgbClr val="0B0F19"/>
                 </a:solidFill>
@@ -4821,19 +5538,19 @@
                 <a:ea typeface="Arial" pitchFamily="34" charset="-122"/>
                 <a:cs typeface="Arial" pitchFamily="34" charset="-120"/>
               </a:rPr>
-              <a:t>Tout est compris. </a:t>
+              <a:t>Zéro matériel. </a:t>
             </a:r>
             <a:pPr indent="0" marL="0">
               <a:lnSpc>
                 <a:spcPct val="118000"/>
               </a:lnSpc>
               <a:spcAft>
-                <a:spcPts val="1400"/>
+                <a:spcPts val="900"/>
               </a:spcAft>
               <a:buNone/>
             </a:pPr>
             <a:r>
-              <a:rPr lang="en-US" sz="1350" dirty="0">
+              <a:rPr lang="en-US" sz="1200" dirty="0">
                 <a:solidFill>
                   <a:srgbClr val="3D4556"/>
                 </a:solidFill>
@@ -4841,58 +5558,15 @@
                 <a:ea typeface="Arial" pitchFamily="34" charset="-122"/>
                 <a:cs typeface="Arial" pitchFamily="34" charset="-120"/>
               </a:rPr>
-              <a:t>L'application, le tableau de bord, les rapports, les mises à jour. Le chiffrage précis se fait au devis, sur votre volume de stock déclaré.</a:t>
-            </a:r>
-            <a:endParaRPr lang="en-US" sz="1350" dirty="0"/>
-          </a:p>
-          <a:p>
-            <a:pPr indent="0" marL="0">
-              <a:lnSpc>
-                <a:spcPct val="118000"/>
-              </a:lnSpc>
-              <a:spcAft>
-                <a:spcPts val="1400"/>
-              </a:spcAft>
-              <a:buNone/>
-            </a:pPr>
-            <a:r>
-              <a:rPr lang="en-US" sz="1350" b="1" dirty="0">
-                <a:solidFill>
-                  <a:srgbClr val="0B0F19"/>
-                </a:solidFill>
-                <a:latin typeface="Arial" pitchFamily="34" charset="0"/>
-                <a:ea typeface="Arial" pitchFamily="34" charset="-122"/>
-                <a:cs typeface="Arial" pitchFamily="34" charset="-120"/>
-              </a:rPr>
-              <a:t>Un déploiement en jours, pas en mois. </a:t>
-            </a:r>
-            <a:pPr indent="0" marL="0">
-              <a:lnSpc>
-                <a:spcPct val="118000"/>
-              </a:lnSpc>
-              <a:spcAft>
-                <a:spcPts val="1400"/>
-              </a:spcAft>
-              <a:buNone/>
-            </a:pPr>
-            <a:r>
-              <a:rPr lang="en-US" sz="1350" dirty="0">
-                <a:solidFill>
-                  <a:srgbClr val="3D4556"/>
-                </a:solidFill>
-                <a:latin typeface="Arial" pitchFamily="34" charset="0"/>
-                <a:ea typeface="Arial" pitchFamily="34" charset="-122"/>
-                <a:cs typeface="Arial" pitchFamily="34" charset="-120"/>
-              </a:rPr>
-              <a:t>Pas de projet informatique : les comptes se créent par invitation, l'application s'installe — y compris par votre catalogue d'entreprise —, et le premier inventaire peut se faire la semaine de la signature.</a:t>
-            </a:r>
-            <a:endParaRPr lang="en-US" sz="1350" dirty="0"/>
-          </a:p>
-        </p:txBody>
-      </p:sp>
-      <p:sp>
-        <p:nvSpPr>
-          <p:cNvPr id="10" name="Text 7"/>
+              <a:t>Aucun terminal à acheter, à louer, à configurer ou à remplacer. L'application, le tableau de bord, les rapports et les mises à jour sont compris.</a:t>
+            </a:r>
+            <a:endParaRPr lang="en-US" sz="1200" dirty="0"/>
+          </a:p>
+        </p:txBody>
+      </p:sp>
+      <p:sp>
+        <p:nvSpPr>
+          <p:cNvPr id="28" name="Text 25"/>
           <p:cNvSpPr/>
           <p:nvPr/>
         </p:nvSpPr>
@@ -4931,7 +5605,7 @@
       </p:sp>
       <p:sp>
         <p:nvSpPr>
-          <p:cNvPr id="11" name="Text 8"/>
+          <p:cNvPr id="29" name="Text 26"/>
           <p:cNvSpPr/>
           <p:nvPr/>
         </p:nvSpPr>
@@ -9287,8 +9961,8 @@
         </p:nvSpPr>
         <p:spPr>
           <a:xfrm>
-            <a:off x="1808769" y="2825496"/>
-            <a:ext cx="8571413" cy="3172968"/>
+            <a:off x="2005841" y="2825496"/>
+            <a:ext cx="8177271" cy="3172968"/>
           </a:xfrm>
           <a:prstGeom prst="roundRect">
             <a:avLst>
@@ -9322,8 +9996,8 @@
         </p:blipFill>
         <p:spPr>
           <a:xfrm>
-            <a:off x="1863633" y="2880360"/>
-            <a:ext cx="8461685" cy="3063240"/>
+            <a:off x="2060705" y="2880360"/>
+            <a:ext cx="8067543" cy="3063240"/>
           </a:xfrm>
           <a:prstGeom prst="rect">
             <a:avLst/>
@@ -9338,7 +10012,7 @@
         </p:nvSpPr>
         <p:spPr>
           <a:xfrm>
-            <a:off x="1863633" y="6080760"/>
+            <a:off x="2060705" y="6080760"/>
             <a:ext cx="6062472" cy="365760"/>
           </a:xfrm>
           <a:prstGeom prst="rect">
@@ -9699,11 +10373,11 @@
         <p:spPr>
           <a:xfrm>
             <a:off x="2139696" y="2871216"/>
-            <a:ext cx="7909560" cy="3082758"/>
+            <a:ext cx="7909560" cy="3103439"/>
           </a:xfrm>
           <a:prstGeom prst="roundRect">
             <a:avLst>
-              <a:gd name="adj" fmla="val 2373"/>
+              <a:gd name="adj" fmla="val 2357"/>
             </a:avLst>
           </a:prstGeom>
           <a:solidFill>
@@ -9734,7 +10408,7 @@
         <p:spPr>
           <a:xfrm>
             <a:off x="2194560" y="2926080"/>
-            <a:ext cx="7799832" cy="2973030"/>
+            <a:ext cx="7799832" cy="2993711"/>
           </a:xfrm>
           <a:prstGeom prst="rect">
             <a:avLst/>
@@ -9749,7 +10423,7 @@
         </p:nvSpPr>
         <p:spPr>
           <a:xfrm>
-            <a:off x="2194560" y="6036270"/>
+            <a:off x="2194560" y="6056951"/>
             <a:ext cx="6062472" cy="365760"/>
           </a:xfrm>
           <a:prstGeom prst="rect">

--- a/docs/entreprise/deck/Quantinvo-Samaritaine.pptx
+++ b/docs/entreprise/deck/Quantinvo-Samaritaine.pptx
@@ -16,13 +16,9 @@
     <p:sldId id="264" r:id="rId10"/>
     <p:sldId id="265" r:id="rId11"/>
     <p:sldId id="266" r:id="rId12"/>
-    <p:sldId id="267" r:id="rId13"/>
-    <p:sldId id="268" r:id="rId14"/>
-    <p:sldId id="269" r:id="rId15"/>
-    <p:sldId id="270" r:id="rId16"/>
   </p:sldIdLst>
   <p:notesMasterIdLst>
-    <p:notesMasterId r:id="rId17"/>
+    <p:notesMasterId r:id="rId13"/>
   </p:notesMasterIdLst>
   <p:sldSz cx="12192000" cy="6858000"/>
   <p:notesSz cx="6858000" cy="12192000"/>
@@ -516,7 +512,7 @@
           <a:p>
             <a:r>
               <a:rPr lang="en-US" dirty="0"/>
-              <a:t>Ouvrir sur l'idée, pas sur le produit : l'inventaire cesse d'être une opération de l'Inventory Control pour devenir un geste des équipes de vente. Le deck suit leur propre document de déroulement.</a:t>
+              <a:t>Poser le téléphone sur la table en même temps que la page s'affiche. Ne rien vendre encore : on montre l'objet, on dit d'où il vient, et on enchaîne.</a:t>
             </a:r>
             <a:endParaRPr lang="en-US" dirty="0"/>
           </a:p>
@@ -604,7 +600,7 @@
           <a:p>
             <a:r>
               <a:rPr lang="en-US" dirty="0"/>
-              <a:t>C'est la page de l'Inventory Control : son travail commence ici, sur un fichier déjà croisé avec le théorique. La validation PSM / AGM garde le même circuit qu'aujourd'hui, sur un fichier mieux rangé.</a:t>
+              <a:t>Le palier se choisit sur le nombre de personnes qui comptent EN MÊME TEMPS, pas sur l'effectif : un floor de cent vendeurs dont vingt comptent le mardi matin relève d'Advanced. Le dépassement ne bloque jamais un comptage, il se règle au renouvellement. Au-delà de cent appareils sur un même magasin, ou pour plusieurs magasins, on établit un devis.</a:t>
             </a:r>
             <a:endParaRPr lang="en-US" dirty="0"/>
           </a:p>
@@ -692,7 +688,7 @@
           <a:p>
             <a:r>
               <a:rPr lang="en-US" dirty="0"/>
-              <a:t>Leur document dit « en cours d'élaboration » : la page montre que l'outil le rend possible sans rien construire. La répartition est la même que pour le tournant : vous choisissez quoi et quand, le floor compte, vous contrôlez l'écart.</a:t>
+              <a:t>Clore sur l'essai qui prouve l'idée : ce n'est pas nous qui faisons la démonstration, c'est un chef d'équipe et ses vendeurs. Si eux y arrivent un mardi matin, le transfert est démontré.</a:t>
             </a:r>
             <a:endParaRPr lang="en-US" dirty="0"/>
           </a:p>
@@ -716,358 +712,6 @@
             <a:fld id="{F7021451-1387-4CA6-816F-3879F97B5CBC}" type="slidenum">
               <a:rPr lang="en-US"/>
               <a:t>11</a:t>
-            </a:fld>
-            <a:endParaRPr lang="en-US"/>
-          </a:p>
-        </p:txBody>
-      </p:sp>
-    </p:spTree>
-    <p:extLst>
-      <p:ext uri="{BB962C8B-B14F-4D97-AF65-F5344CB8AC3E}">
-        <p14:creationId xmlns:p14="http://schemas.microsoft.com/office/powerpoint/2010/main" val="1024086991"/>
-      </p:ext>
-    </p:extLst>
-  </p:cSld>
-  <p:clrMapOvr>
-    <a:masterClrMapping/>
-  </p:clrMapOvr>
-</p:notes>
-</file>
-
-<file path=ppt/notesSlides/notesSlide12.xml><?xml version="1.0" encoding="utf-8"?>
-<p:notes xmlns:a="http://schemas.openxmlformats.org/drawingml/2006/main" xmlns:r="http://schemas.openxmlformats.org/officeDocument/2006/relationships" xmlns:p="http://schemas.openxmlformats.org/presentationml/2006/main">
-  <p:cSld>
-    <p:spTree>
-      <p:nvGrpSpPr>
-        <p:cNvPr id="1" name=""/>
-        <p:cNvGrpSpPr/>
-        <p:nvPr/>
-      </p:nvGrpSpPr>
-      <p:grpSpPr>
-        <a:xfrm>
-          <a:off x="0" y="0"/>
-          <a:ext cx="0" cy="0"/>
-          <a:chOff x="0" y="0"/>
-          <a:chExt cx="0" cy="0"/>
-        </a:xfrm>
-      </p:grpSpPr>
-      <p:sp>
-        <p:nvSpPr>
-          <p:cNvPr id="2" name="Slide Image Placeholder 1"/>
-          <p:cNvSpPr>
-            <a:spLocks noGrp="1" noRot="1" noChangeAspect="1"/>
-          </p:cNvSpPr>
-          <p:nvPr>
-            <p:ph type="sldImg"/>
-          </p:nvPr>
-        </p:nvSpPr>
-        <p:spPr/>
-      </p:sp>
-      <p:sp>
-        <p:nvSpPr>
-          <p:cNvPr id="3" name="Notes Placeholder 2"/>
-          <p:cNvSpPr>
-            <a:spLocks noGrp="1"/>
-          </p:cNvSpPr>
-          <p:nvPr>
-            <p:ph type="body" idx="1"/>
-          </p:nvPr>
-        </p:nvSpPr>
-        <p:spPr/>
-        <p:txBody>
-          <a:bodyPr/>
-          <a:lstStyle/>
-          <a:p>
-            <a:r>
-              <a:rPr lang="en-US" dirty="0"/>
-              <a:t>Ne jamais citer de prix Zebra — on n'en parle pas, même en réponse à une question. L'argument décisif ici : un outil expert suppose un service expert pour le servir ; c'est incompatible avec le transfert au floor.</a:t>
-            </a:r>
-            <a:endParaRPr lang="en-US" dirty="0"/>
-          </a:p>
-        </p:txBody>
-      </p:sp>
-      <p:sp>
-        <p:nvSpPr>
-          <p:cNvPr id="4" name="Slide Number Placeholder 3"/>
-          <p:cNvSpPr>
-            <a:spLocks noGrp="1"/>
-          </p:cNvSpPr>
-          <p:nvPr>
-            <p:ph type="sldNum" sz="quarter" idx="10"/>
-          </p:nvPr>
-        </p:nvSpPr>
-        <p:spPr/>
-        <p:txBody>
-          <a:bodyPr/>
-          <a:lstStyle/>
-          <a:p>
-            <a:fld id="{F7021451-1387-4CA6-816F-3879F97B5CBC}" type="slidenum">
-              <a:rPr lang="en-US"/>
-              <a:t>12</a:t>
-            </a:fld>
-            <a:endParaRPr lang="en-US"/>
-          </a:p>
-        </p:txBody>
-      </p:sp>
-    </p:spTree>
-    <p:extLst>
-      <p:ext uri="{BB962C8B-B14F-4D97-AF65-F5344CB8AC3E}">
-        <p14:creationId xmlns:p14="http://schemas.microsoft.com/office/powerpoint/2010/main" val="1024086991"/>
-      </p:ext>
-    </p:extLst>
-  </p:cSld>
-  <p:clrMapOvr>
-    <a:masterClrMapping/>
-  </p:clrMapOvr>
-</p:notes>
-</file>
-
-<file path=ppt/notesSlides/notesSlide13.xml><?xml version="1.0" encoding="utf-8"?>
-<p:notes xmlns:a="http://schemas.openxmlformats.org/drawingml/2006/main" xmlns:r="http://schemas.openxmlformats.org/officeDocument/2006/relationships" xmlns:p="http://schemas.openxmlformats.org/presentationml/2006/main">
-  <p:cSld>
-    <p:spTree>
-      <p:nvGrpSpPr>
-        <p:cNvPr id="1" name=""/>
-        <p:cNvGrpSpPr/>
-        <p:nvPr/>
-      </p:nvGrpSpPr>
-      <p:grpSpPr>
-        <a:xfrm>
-          <a:off x="0" y="0"/>
-          <a:ext cx="0" cy="0"/>
-          <a:chOff x="0" y="0"/>
-          <a:chExt cx="0" cy="0"/>
-        </a:xfrm>
-      </p:grpSpPr>
-      <p:sp>
-        <p:nvSpPr>
-          <p:cNvPr id="2" name="Slide Image Placeholder 1"/>
-          <p:cNvSpPr>
-            <a:spLocks noGrp="1" noRot="1" noChangeAspect="1"/>
-          </p:cNvSpPr>
-          <p:nvPr>
-            <p:ph type="sldImg"/>
-          </p:nvPr>
-        </p:nvSpPr>
-        <p:spPr/>
-      </p:sp>
-      <p:sp>
-        <p:nvSpPr>
-          <p:cNvPr id="3" name="Notes Placeholder 2"/>
-          <p:cNvSpPr>
-            <a:spLocks noGrp="1"/>
-          </p:cNvSpPr>
-          <p:nvPr>
-            <p:ph type="body" idx="1"/>
-          </p:nvPr>
-        </p:nvSpPr>
-        <p:spPr/>
-        <p:txBody>
-          <a:bodyPr/>
-          <a:lstStyle/>
-          <a:p>
-            <a:r>
-              <a:rPr lang="en-US" dirty="0"/>
-              <a:t>Cette page désarme les objections. Ne pas la sauter : un prospect qui découvre une limite après coup perd confiance, un prospect averti la comprend. Un dossier technique séparé existe pour la DSI — le proposer ici.</a:t>
-            </a:r>
-            <a:endParaRPr lang="en-US" dirty="0"/>
-          </a:p>
-        </p:txBody>
-      </p:sp>
-      <p:sp>
-        <p:nvSpPr>
-          <p:cNvPr id="4" name="Slide Number Placeholder 3"/>
-          <p:cNvSpPr>
-            <a:spLocks noGrp="1"/>
-          </p:cNvSpPr>
-          <p:nvPr>
-            <p:ph type="sldNum" sz="quarter" idx="10"/>
-          </p:nvPr>
-        </p:nvSpPr>
-        <p:spPr/>
-        <p:txBody>
-          <a:bodyPr/>
-          <a:lstStyle/>
-          <a:p>
-            <a:fld id="{F7021451-1387-4CA6-816F-3879F97B5CBC}" type="slidenum">
-              <a:rPr lang="en-US"/>
-              <a:t>13</a:t>
-            </a:fld>
-            <a:endParaRPr lang="en-US"/>
-          </a:p>
-        </p:txBody>
-      </p:sp>
-    </p:spTree>
-    <p:extLst>
-      <p:ext uri="{BB962C8B-B14F-4D97-AF65-F5344CB8AC3E}">
-        <p14:creationId xmlns:p14="http://schemas.microsoft.com/office/powerpoint/2010/main" val="1024086991"/>
-      </p:ext>
-    </p:extLst>
-  </p:cSld>
-  <p:clrMapOvr>
-    <a:masterClrMapping/>
-  </p:clrMapOvr>
-</p:notes>
-</file>
-
-<file path=ppt/notesSlides/notesSlide14.xml><?xml version="1.0" encoding="utf-8"?>
-<p:notes xmlns:a="http://schemas.openxmlformats.org/drawingml/2006/main" xmlns:r="http://schemas.openxmlformats.org/officeDocument/2006/relationships" xmlns:p="http://schemas.openxmlformats.org/presentationml/2006/main">
-  <p:cSld>
-    <p:spTree>
-      <p:nvGrpSpPr>
-        <p:cNvPr id="1" name=""/>
-        <p:cNvGrpSpPr/>
-        <p:nvPr/>
-      </p:nvGrpSpPr>
-      <p:grpSpPr>
-        <a:xfrm>
-          <a:off x="0" y="0"/>
-          <a:ext cx="0" cy="0"/>
-          <a:chOff x="0" y="0"/>
-          <a:chExt cx="0" cy="0"/>
-        </a:xfrm>
-      </p:grpSpPr>
-      <p:sp>
-        <p:nvSpPr>
-          <p:cNvPr id="2" name="Slide Image Placeholder 1"/>
-          <p:cNvSpPr>
-            <a:spLocks noGrp="1" noRot="1" noChangeAspect="1"/>
-          </p:cNvSpPr>
-          <p:nvPr>
-            <p:ph type="sldImg"/>
-          </p:nvPr>
-        </p:nvSpPr>
-        <p:spPr/>
-      </p:sp>
-      <p:sp>
-        <p:nvSpPr>
-          <p:cNvPr id="3" name="Notes Placeholder 2"/>
-          <p:cNvSpPr>
-            <a:spLocks noGrp="1"/>
-          </p:cNvSpPr>
-          <p:nvPr>
-            <p:ph type="body" idx="1"/>
-          </p:nvPr>
-        </p:nvSpPr>
-        <p:spPr/>
-        <p:txBody>
-          <a:bodyPr/>
-          <a:lstStyle/>
-          <a:p>
-            <a:r>
-              <a:rPr lang="en-US" dirty="0"/>
-              <a:t>Le palier se choisit sur le nombre de personnes qui comptent EN MÊME TEMPS, pas sur l'effectif : un floor de cent vendeurs dont vingt comptent le mardi matin relève d'Advanced. Le dépassement ne bloque jamais un comptage, il se règle au renouvellement. Au-delà de cent appareils sur un même magasin, ou pour plusieurs magasins, on établit un devis.</a:t>
-            </a:r>
-            <a:endParaRPr lang="en-US" dirty="0"/>
-          </a:p>
-        </p:txBody>
-      </p:sp>
-      <p:sp>
-        <p:nvSpPr>
-          <p:cNvPr id="4" name="Slide Number Placeholder 3"/>
-          <p:cNvSpPr>
-            <a:spLocks noGrp="1"/>
-          </p:cNvSpPr>
-          <p:nvPr>
-            <p:ph type="sldNum" sz="quarter" idx="10"/>
-          </p:nvPr>
-        </p:nvSpPr>
-        <p:spPr/>
-        <p:txBody>
-          <a:bodyPr/>
-          <a:lstStyle/>
-          <a:p>
-            <a:fld id="{F7021451-1387-4CA6-816F-3879F97B5CBC}" type="slidenum">
-              <a:rPr lang="en-US"/>
-              <a:t>14</a:t>
-            </a:fld>
-            <a:endParaRPr lang="en-US"/>
-          </a:p>
-        </p:txBody>
-      </p:sp>
-    </p:spTree>
-    <p:extLst>
-      <p:ext uri="{BB962C8B-B14F-4D97-AF65-F5344CB8AC3E}">
-        <p14:creationId xmlns:p14="http://schemas.microsoft.com/office/powerpoint/2010/main" val="1024086991"/>
-      </p:ext>
-    </p:extLst>
-  </p:cSld>
-  <p:clrMapOvr>
-    <a:masterClrMapping/>
-  </p:clrMapOvr>
-</p:notes>
-</file>
-
-<file path=ppt/notesSlides/notesSlide15.xml><?xml version="1.0" encoding="utf-8"?>
-<p:notes xmlns:a="http://schemas.openxmlformats.org/drawingml/2006/main" xmlns:r="http://schemas.openxmlformats.org/officeDocument/2006/relationships" xmlns:p="http://schemas.openxmlformats.org/presentationml/2006/main">
-  <p:cSld>
-    <p:spTree>
-      <p:nvGrpSpPr>
-        <p:cNvPr id="1" name=""/>
-        <p:cNvGrpSpPr/>
-        <p:nvPr/>
-      </p:nvGrpSpPr>
-      <p:grpSpPr>
-        <a:xfrm>
-          <a:off x="0" y="0"/>
-          <a:ext cx="0" cy="0"/>
-          <a:chOff x="0" y="0"/>
-          <a:chExt cx="0" cy="0"/>
-        </a:xfrm>
-      </p:grpSpPr>
-      <p:sp>
-        <p:nvSpPr>
-          <p:cNvPr id="2" name="Slide Image Placeholder 1"/>
-          <p:cNvSpPr>
-            <a:spLocks noGrp="1" noRot="1" noChangeAspect="1"/>
-          </p:cNvSpPr>
-          <p:nvPr>
-            <p:ph type="sldImg"/>
-          </p:nvPr>
-        </p:nvSpPr>
-        <p:spPr/>
-      </p:sp>
-      <p:sp>
-        <p:nvSpPr>
-          <p:cNvPr id="3" name="Notes Placeholder 2"/>
-          <p:cNvSpPr>
-            <a:spLocks noGrp="1"/>
-          </p:cNvSpPr>
-          <p:nvPr>
-            <p:ph type="body" idx="1"/>
-          </p:nvPr>
-        </p:nvSpPr>
-        <p:spPr/>
-        <p:txBody>
-          <a:bodyPr/>
-          <a:lstStyle/>
-          <a:p>
-            <a:r>
-              <a:rPr lang="en-US" dirty="0"/>
-              <a:t>Clore sur l'essai qui prouve l'idée : ce n'est pas nous qui faisons la démonstration, c'est un chef d'équipe et ses vendeurs. Si eux y arrivent un mardi matin, le transfert est démontré.</a:t>
-            </a:r>
-            <a:endParaRPr lang="en-US" dirty="0"/>
-          </a:p>
-        </p:txBody>
-      </p:sp>
-      <p:sp>
-        <p:nvSpPr>
-          <p:cNvPr id="4" name="Slide Number Placeholder 3"/>
-          <p:cNvSpPr>
-            <a:spLocks noGrp="1"/>
-          </p:cNvSpPr>
-          <p:nvPr>
-            <p:ph type="sldNum" sz="quarter" idx="10"/>
-          </p:nvPr>
-        </p:nvSpPr>
-        <p:spPr/>
-        <p:txBody>
-          <a:bodyPr/>
-          <a:lstStyle/>
-          <a:p>
-            <a:fld id="{F7021451-1387-4CA6-816F-3879F97B5CBC}" type="slidenum">
-              <a:rPr lang="en-US"/>
-              <a:t>15</a:t>
             </a:fld>
             <a:endParaRPr lang="en-US"/>
           </a:p>
@@ -1132,7 +776,7 @@
           <a:p>
             <a:r>
               <a:rPr lang="en-US" dirty="0"/>
-              <a:t>Ne rien commenter : lire, et laisser la page faire son effet. C'est leur document, ils s'y reconnaissent. La question qui vient toute seule : pourquoi tout cela passe-t-il par l'Inventory Control ?</a:t>
+              <a:t>Ouvrir sur l'idée, pas sur le produit : l'inventaire cesse d'être une opération de l'Inventory Control pour devenir un geste des équipes de vente. Le deck suit leur propre document de déroulement.</a:t>
             </a:r>
             <a:endParaRPr lang="en-US" dirty="0"/>
           </a:p>
@@ -1220,7 +864,7 @@
           <a:p>
             <a:r>
               <a:rPr lang="en-US" dirty="0"/>
-              <a:t>Le pivot du deck est dans l'encadré : on ne propose pas d'alléger la charge de l'Inventory Control, on propose de la transférer au floor. Chaque responsable maîtrise son stock — c'est l'objectif écrit dans leur propre projet d'inventaire aléatoire.</a:t>
+              <a:t>Ne rien commenter : lire, et laisser la page faire son effet. C'est leur document, ils s'y reconnaissent. La question qui vient toute seule : pourquoi tout cela passe-t-il par l'Inventory Control ?</a:t>
             </a:r>
             <a:endParaRPr lang="en-US" dirty="0"/>
           </a:p>
@@ -1308,7 +952,7 @@
           <a:p>
             <a:r>
               <a:rPr lang="en-US" dirty="0"/>
-              <a:t>Dire d'où on parle : le rayon, la réserve, la nuit d'inventaire. La simplicité n'est pas un confort, c'est la condition du transfert au floor — un outil qui demande un expert recrée l'Inventory Control.</a:t>
+              <a:t>Ne pas lire les cinq lignes : lire « La veille », puis descendre directement sur « Au total ». Chaque ligne de gauche est portée par l'Inventory Control, chaque ligne de droite par le floor — sauf la dernière, la seule qui vous reste. C'est le pivot de toute la proposition : on ne propose pas d'alléger votre charge, on propose de la transférer.</a:t>
             </a:r>
             <a:endParaRPr lang="en-US" dirty="0"/>
           </a:p>
@@ -1396,7 +1040,7 @@
           <a:p>
             <a:r>
               <a:rPr lang="en-US" dirty="0"/>
-              <a:t>Les écrans sont de vraies captures de l'application, celles du guide de prise en main. Et l'Inventory Control ? Il n'a pas d'écran sur cette page — c'est le message. Le sien arrive plus loin : le rapport.</a:t>
+              <a:t>Les écrans sont de vraies captures de l'application, celles du guide de prise en main. Et l'Inventory Control ? Il n'a pas d'écran sur cette page — c'est le message. Le sien arrive deux pages plus loin : le rapport.</a:t>
             </a:r>
             <a:endParaRPr lang="en-US" dirty="0"/>
           </a:p>
@@ -1484,7 +1128,7 @@
           <a:p>
             <a:r>
               <a:rPr lang="en-US" dirty="0"/>
-              <a:t>Page miroir de la page 2, même structure veille / matin / pendant / après — mais le sujet des phrases a changé : c'est le chef d'équipe qui agit. Insister sur la dernière ligne.</a:t>
+              <a:t>Le poste de surveillance n'est pas supprimé, il est distribué : chaque chef d'équipe voit son rayon, et vous voyez tout sans rien opérer. Le recomptage ne disparaît pas non plus — il se décide à chaud plutôt que d'être découvert sur la plateforme. Le suivi est agrégé, personne n'est suivi nominativement en direct : cela parle aux RH et au CSE d'une maison de cette taille.</a:t>
             </a:r>
             <a:endParaRPr lang="en-US" dirty="0"/>
           </a:p>
@@ -1572,7 +1216,7 @@
           <a:p>
             <a:r>
               <a:rPr lang="en-US" dirty="0"/>
-              <a:t>Lire deux ou trois lignes, pas les cinq. Chaque ligne de gauche est portée par l'Inventory Control ; chaque ligne de droite par le floor — sauf la dernière, la seule qui vous reste.</a:t>
+              <a:t>C'est la page de l'Inventory Control : son travail commence ici, sur un fichier déjà croisé avec le théorique. Le circuit de validation ne change pas — il s'exerce sur un fichier mieux rangé, et plus tôt dans la journée.</a:t>
             </a:r>
             <a:endParaRPr lang="en-US" dirty="0"/>
           </a:p>
@@ -1660,7 +1304,7 @@
           <a:p>
             <a:r>
               <a:rPr lang="en-US" dirty="0"/>
-              <a:t>Le poste de surveillance n'est pas supprimé, il est distribué : chaque chef d'équipe voit son inventaire, et vous voyez tout sans rien opérer. Le suivi agrégé (personne n'est suivi nominativement en direct) parle aux RH et au CSE d'une maison de cette taille.</a:t>
+              <a:t>Leur document dit « en cours d'élaboration » : la page montre que l'outil le rend possible sans rien construire. La répartition est la même que pour le tournant — vous choisissez quoi et quand, le floor compte, vous contrôlez l'écart.</a:t>
             </a:r>
             <a:endParaRPr lang="en-US" dirty="0"/>
           </a:p>
@@ -1748,7 +1392,7 @@
           <a:p>
             <a:r>
               <a:rPr lang="en-US" dirty="0"/>
-              <a:t>Le recomptage ne disparaît pas : il se décide à chaud, par le chef d'équipe, au lieu d'être découvert par l'Inventory Control en surveillant la plateforme.</a:t>
+              <a:t>Deux pages en une : la comparaison et les limites. Ne pas la sauter — un prospect qui découvre une limite après coup perd confiance, un prospect averti la comprend. L'argument décisif de la colonne de gauche : un outil expert suppose un service expert pour le servir, ce qui est incompatible avec le transfert au floor. Un dossier technique séparé existe pour la DSI : le proposer ici.</a:t>
             </a:r>
             <a:endParaRPr lang="en-US" dirty="0"/>
           </a:p>
@@ -2121,9 +1765,43 @@
           <a:chExt cx="0" cy="0"/>
         </a:xfrm>
       </p:grpSpPr>
+      <p:sp>
+        <p:nvSpPr>
+          <p:cNvPr id="2" name="Shape 0"/>
+          <p:cNvSpPr/>
+          <p:nvPr/>
+        </p:nvSpPr>
+        <p:spPr>
+          <a:xfrm>
+            <a:off x="9248799" y="1097280"/>
+            <a:ext cx="2208633" cy="4663440"/>
+          </a:xfrm>
+          <a:prstGeom prst="roundRect">
+            <a:avLst>
+              <a:gd name="adj" fmla="val 12420"/>
+            </a:avLst>
+          </a:prstGeom>
+          <a:solidFill>
+            <a:srgbClr val="FFFFFF"/>
+          </a:solidFill>
+          <a:ln w="12700">
+            <a:solidFill>
+              <a:srgbClr val="FFFFFF"/>
+            </a:solidFill>
+            <a:prstDash val="solid"/>
+          </a:ln>
+          <a:effectLst>
+            <a:outerShdw sx="100000" sy="100000" kx="0" ky="0" algn="bl" rotWithShape="0" blurRad="177800" dist="38100" dir="5400000">
+              <a:srgbClr val="0B0F19">
+                <a:alpha val="18000"/>
+              </a:srgbClr>
+            </a:outerShdw>
+          </a:effectLst>
+        </p:spPr>
+      </p:sp>
       <p:pic>
         <p:nvPicPr>
-          <p:cNvPr id="2" name="Image 0" descr="preencoded.png">    </p:cNvPr>
+          <p:cNvPr id="3" name="Image 0" descr="preencoded.png">    </p:cNvPr>
           <p:cNvPicPr>
             <a:picLocks noChangeAspect="1"/>
           </p:cNvPicPr>
@@ -2137,7 +1815,31 @@
         </p:blipFill>
         <p:spPr>
           <a:xfrm>
-            <a:off x="731520" y="685800"/>
+            <a:off x="9248799" y="1097280"/>
+            <a:ext cx="2208633" cy="4663440"/>
+          </a:xfrm>
+          <a:prstGeom prst="rect">
+            <a:avLst/>
+          </a:prstGeom>
+        </p:spPr>
+      </p:pic>
+      <p:pic>
+        <p:nvPicPr>
+          <p:cNvPr id="4" name="Image 1" descr="preencoded.png">    </p:cNvPr>
+          <p:cNvPicPr>
+            <a:picLocks noChangeAspect="1"/>
+          </p:cNvPicPr>
+          <p:nvPr/>
+        </p:nvPicPr>
+        <p:blipFill>
+          <a:blip r:embed="rId2"/>
+          <a:stretch>
+            <a:fillRect/>
+          </a:stretch>
+        </p:blipFill>
+        <p:spPr>
+          <a:xfrm>
+            <a:off x="731520" y="1417320"/>
             <a:ext cx="566928" cy="566928"/>
           </a:xfrm>
           <a:prstGeom prst="rect">
@@ -2147,13 +1849,13 @@
       </p:pic>
       <p:sp>
         <p:nvSpPr>
-          <p:cNvPr id="3" name="Text 0"/>
-          <p:cNvSpPr/>
-          <p:nvPr/>
-        </p:nvSpPr>
-        <p:spPr>
-          <a:xfrm>
-            <a:off x="1444752" y="658368"/>
+          <p:cNvPr id="5" name="Text 1"/>
+          <p:cNvSpPr/>
+          <p:nvPr/>
+        </p:nvSpPr>
+        <p:spPr>
+          <a:xfrm>
+            <a:off x="1444752" y="1389888"/>
             <a:ext cx="4572000" cy="621792"/>
           </a:xfrm>
           <a:prstGeom prst="rect">
@@ -2186,13 +1888,13 @@
       </p:sp>
       <p:sp>
         <p:nvSpPr>
-          <p:cNvPr id="4" name="Shape 1"/>
-          <p:cNvSpPr/>
-          <p:nvPr/>
-        </p:nvSpPr>
-        <p:spPr>
-          <a:xfrm>
-            <a:off x="731520" y="1481328"/>
+          <p:cNvPr id="6" name="Shape 2"/>
+          <p:cNvSpPr/>
+          <p:nvPr/>
+        </p:nvSpPr>
+        <p:spPr>
+          <a:xfrm>
+            <a:off x="731520" y="2212848"/>
             <a:ext cx="2377440" cy="25603"/>
           </a:xfrm>
           <a:prstGeom prst="rect">
@@ -2211,14 +1913,14 @@
       </p:sp>
       <p:sp>
         <p:nvSpPr>
-          <p:cNvPr id="5" name="Text 2"/>
-          <p:cNvSpPr/>
-          <p:nvPr/>
-        </p:nvSpPr>
-        <p:spPr>
-          <a:xfrm>
-            <a:off x="731520" y="2331720"/>
-            <a:ext cx="8229600" cy="365760"/>
+          <p:cNvPr id="7" name="Text 3"/>
+          <p:cNvSpPr/>
+          <p:nvPr/>
+        </p:nvSpPr>
+        <p:spPr>
+          <a:xfrm>
+            <a:off x="731520" y="2788920"/>
+            <a:ext cx="6400800" cy="1828800"/>
           </a:xfrm>
           <a:prstGeom prst="rect">
             <a:avLst/>
@@ -2231,10 +1933,55 @@
           <a:lstStyle/>
           <a:p>
             <a:pPr indent="0" marL="0">
-              <a:buNone/>
-            </a:pPr>
-            <a:r>
-              <a:rPr lang="en-US" sz="1300" dirty="0">
+              <a:lnSpc>
+                <a:spcPct val="115000"/>
+              </a:lnSpc>
+              <a:buNone/>
+            </a:pPr>
+            <a:r>
+              <a:rPr lang="en-US" sz="2500" i="1" dirty="0">
+                <a:solidFill>
+                  <a:srgbClr val="4636B0"/>
+                </a:solidFill>
+                <a:latin typeface="Arial" pitchFamily="34" charset="0"/>
+                <a:ea typeface="Arial" pitchFamily="34" charset="-122"/>
+                <a:cs typeface="Arial" pitchFamily="34" charset="-120"/>
+              </a:rPr>
+              <a:t>« J'ai dessiné Quantinvo pendant des inventaires, pas dans une salle de réunion. »</a:t>
+            </a:r>
+            <a:endParaRPr lang="en-US" sz="2500" dirty="0"/>
+          </a:p>
+        </p:txBody>
+      </p:sp>
+      <p:sp>
+        <p:nvSpPr>
+          <p:cNvPr id="8" name="Text 4"/>
+          <p:cNvSpPr/>
+          <p:nvPr/>
+        </p:nvSpPr>
+        <p:spPr>
+          <a:xfrm>
+            <a:off x="731520" y="4206240"/>
+            <a:ext cx="6400800" cy="365760"/>
+          </a:xfrm>
+          <a:prstGeom prst="rect">
+            <a:avLst/>
+          </a:prstGeom>
+          <a:noFill/>
+          <a:ln/>
+        </p:spPr>
+        <p:txBody>
+          <a:bodyPr wrap="square" lIns="0" tIns="0" rIns="0" bIns="0" rtlCol="0" anchor="t"/>
+          <a:lstStyle/>
+          <a:p>
+            <a:pPr algn="l" indent="0" marL="0">
+              <a:lnSpc>
+                <a:spcPct val="118000"/>
+              </a:lnSpc>
+              <a:buNone/>
+            </a:pPr>
+            <a:r>
+              <a:rPr lang="en-US" sz="1250" dirty="0">
                 <a:solidFill>
                   <a:srgbClr val="5B6475"/>
                 </a:solidFill>
@@ -2242,22 +1989,22 @@
                 <a:ea typeface="Arial" pitchFamily="34" charset="-122"/>
                 <a:cs typeface="Arial" pitchFamily="34" charset="-120"/>
               </a:rPr>
-              <a:t>Proposition pour La Samaritaine</a:t>
-            </a:r>
-            <a:endParaRPr lang="en-US" sz="1300" dirty="0"/>
-          </a:p>
-        </p:txBody>
-      </p:sp>
-      <p:sp>
-        <p:nvSpPr>
-          <p:cNvPr id="6" name="Text 3"/>
-          <p:cNvSpPr/>
-          <p:nvPr/>
-        </p:nvSpPr>
-        <p:spPr>
-          <a:xfrm>
-            <a:off x="731520" y="2743200"/>
-            <a:ext cx="8686800" cy="1737360"/>
+              <a:t>Julien Thiong-kay, Devkaylab</a:t>
+            </a:r>
+            <a:endParaRPr lang="en-US" sz="1250" dirty="0"/>
+          </a:p>
+        </p:txBody>
+      </p:sp>
+      <p:sp>
+        <p:nvSpPr>
+          <p:cNvPr id="9" name="Text 5"/>
+          <p:cNvSpPr/>
+          <p:nvPr/>
+        </p:nvSpPr>
+        <p:spPr>
+          <a:xfrm>
+            <a:off x="731520" y="5532120"/>
+            <a:ext cx="6400800" cy="320040"/>
           </a:xfrm>
           <a:prstGeom prst="rect">
             <a:avLst/>
@@ -2269,94 +2016,13 @@
           <a:bodyPr wrap="square" lIns="0" tIns="0" rIns="0" bIns="0" rtlCol="0" anchor="t"/>
           <a:lstStyle/>
           <a:p>
-            <a:pPr indent="0" marL="0">
+            <a:pPr algn="l" indent="0" marL="0">
               <a:lnSpc>
-                <a:spcPct val="105000"/>
+                <a:spcPct val="118000"/>
               </a:lnSpc>
               <a:buNone/>
             </a:pPr>
             <a:r>
-              <a:rPr lang="en-US" sz="4000" b="1" dirty="0">
-                <a:solidFill>
-                  <a:srgbClr val="4636B0"/>
-                </a:solidFill>
-                <a:latin typeface="Arial" pitchFamily="34" charset="0"/>
-                <a:ea typeface="Arial" pitchFamily="34" charset="-122"/>
-                <a:cs typeface="Arial" pitchFamily="34" charset="-120"/>
-              </a:rPr>
-              <a:t>L'inventaire tournant, rendu aux équipes de vente.</a:t>
-            </a:r>
-            <a:endParaRPr lang="en-US" sz="4000" dirty="0"/>
-          </a:p>
-        </p:txBody>
-      </p:sp>
-      <p:sp>
-        <p:nvSpPr>
-          <p:cNvPr id="7" name="Text 4"/>
-          <p:cNvSpPr/>
-          <p:nvPr/>
-        </p:nvSpPr>
-        <p:spPr>
-          <a:xfrm>
-            <a:off x="731520" y="4572000"/>
-            <a:ext cx="7498080" cy="822960"/>
-          </a:xfrm>
-          <a:prstGeom prst="rect">
-            <a:avLst/>
-          </a:prstGeom>
-          <a:noFill/>
-          <a:ln/>
-        </p:spPr>
-        <p:txBody>
-          <a:bodyPr wrap="square" lIns="0" tIns="0" rIns="0" bIns="0" rtlCol="0" anchor="t"/>
-          <a:lstStyle/>
-          <a:p>
-            <a:pPr indent="0" marL="0">
-              <a:lnSpc>
-                <a:spcPct val="120000"/>
-              </a:lnSpc>
-              <a:buNone/>
-            </a:pPr>
-            <a:r>
-              <a:rPr lang="en-US" sz="1500" dirty="0">
-                <a:solidFill>
-                  <a:srgbClr val="3D4556"/>
-                </a:solidFill>
-                <a:latin typeface="Arial" pitchFamily="34" charset="0"/>
-                <a:ea typeface="Arial" pitchFamily="34" charset="-122"/>
-                <a:cs typeface="Arial" pitchFamily="34" charset="-120"/>
-              </a:rPr>
-              <a:t>Le balisage, le comptage et la conduite de chaque inventaire passent au floor : les chefs d'équipe supervisent, les vendeurs comptent. L'Inventory Control reçoit le rapport, valide et ajuste.</a:t>
-            </a:r>
-            <a:endParaRPr lang="en-US" sz="1500" dirty="0"/>
-          </a:p>
-        </p:txBody>
-      </p:sp>
-      <p:sp>
-        <p:nvSpPr>
-          <p:cNvPr id="8" name="Text 5"/>
-          <p:cNvSpPr/>
-          <p:nvPr/>
-        </p:nvSpPr>
-        <p:spPr>
-          <a:xfrm>
-            <a:off x="731520" y="6080760"/>
-            <a:ext cx="9144000" cy="320040"/>
-          </a:xfrm>
-          <a:prstGeom prst="rect">
-            <a:avLst/>
-          </a:prstGeom>
-          <a:noFill/>
-          <a:ln/>
-        </p:spPr>
-        <p:txBody>
-          <a:bodyPr wrap="square" lIns="0" tIns="0" rIns="0" bIns="0" rtlCol="0" anchor="t"/>
-          <a:lstStyle/>
-          <a:p>
-            <a:pPr indent="0" marL="0">
-              <a:buNone/>
-            </a:pPr>
-            <a:r>
               <a:rPr lang="en-US" sz="1050" dirty="0">
                 <a:solidFill>
                   <a:srgbClr val="5B6475"/>
@@ -2365,7 +2031,7 @@
                 <a:ea typeface="Arial" pitchFamily="34" charset="-122"/>
                 <a:cs typeface="Arial" pitchFamily="34" charset="-120"/>
               </a:rPr>
-              <a:t>Devkaylab  ·  août 2026  ·  www.quantinvo.com</a:t>
+              <a:t>L'outil d'inventaire pour le commerce.</a:t>
             </a:r>
             <a:endParaRPr lang="en-US" sz="1050" dirty="0"/>
           </a:p>
@@ -2499,7 +2165,7 @@
                 <a:ea typeface="Arial" pitchFamily="34" charset="-122"/>
                 <a:cs typeface="Arial" pitchFamily="34" charset="-120"/>
               </a:rPr>
-              <a:t>Après le comptage</a:t>
+              <a:t>L'offre</a:t>
             </a:r>
             <a:endParaRPr lang="en-US" sz="1000" dirty="0"/>
           </a:p>
@@ -2538,8 +2204,8 @@
         </p:nvSpPr>
         <p:spPr>
           <a:xfrm>
-            <a:off x="731520" y="1325880"/>
-            <a:ext cx="4206240" cy="2011680"/>
+            <a:off x="731520" y="1188720"/>
+            <a:ext cx="10725912" cy="822960"/>
           </a:xfrm>
           <a:prstGeom prst="rect">
             <a:avLst/>
@@ -2558,7 +2224,7 @@
               <a:buNone/>
             </a:pPr>
             <a:r>
-              <a:rPr lang="en-US" sz="2400" b="1" dirty="0">
+              <a:rPr lang="en-US" sz="2600" b="1" dirty="0">
                 <a:solidFill>
                   <a:srgbClr val="4636B0"/>
                 </a:solidFill>
@@ -2566,9 +2232,9 @@
                 <a:ea typeface="Arial" pitchFamily="34" charset="-122"/>
                 <a:cs typeface="Arial" pitchFamily="34" charset="-120"/>
               </a:rPr>
-              <a:t>Ce qui vous arrive : un rapport déjà consolidé.</a:t>
-            </a:r>
-            <a:endParaRPr lang="en-US" sz="2400" dirty="0"/>
+              <a:t>Une licence par magasin, inventaires illimités</a:t>
+            </a:r>
+            <a:endParaRPr lang="en-US" sz="2600" dirty="0"/>
           </a:p>
         </p:txBody>
       </p:sp>
@@ -2580,8 +2246,8 @@
         </p:nvSpPr>
         <p:spPr>
           <a:xfrm>
-            <a:off x="731520" y="3017520"/>
-            <a:ext cx="4206240" cy="1463040"/>
+            <a:off x="731520" y="1783080"/>
+            <a:ext cx="10725912" cy="457200"/>
           </a:xfrm>
           <a:prstGeom prst="rect">
             <a:avLst/>
@@ -2600,76 +2266,34 @@
               <a:buNone/>
             </a:pPr>
             <a:r>
-              <a:rPr lang="en-US" sz="1250" dirty="0">
-                <a:solidFill>
-                  <a:srgbClr val="3D4556"/>
-                </a:solidFill>
-                <a:latin typeface="Arial" pitchFamily="34" charset="0"/>
-                <a:ea typeface="Arial" pitchFamily="34" charset="-122"/>
-                <a:cs typeface="Arial" pitchFamily="34" charset="-120"/>
-              </a:rPr>
-              <a:t>Le rapport part du stock théorique, pas seulement de ce qui a été scanné. Un article attendu et jamais trouvé y figure, avec son manque : la démarque que l'inventaire est censé révéler est déjà dans le fichier.</a:t>
-            </a:r>
-            <a:endParaRPr lang="en-US" sz="1250" dirty="0"/>
-          </a:p>
-        </p:txBody>
-      </p:sp>
-      <p:sp>
-        <p:nvSpPr>
-          <p:cNvPr id="8" name="Text 5"/>
-          <p:cNvSpPr/>
-          <p:nvPr/>
-        </p:nvSpPr>
-        <p:spPr>
-          <a:xfrm>
-            <a:off x="731520" y="4480560"/>
-            <a:ext cx="4206240" cy="914400"/>
-          </a:xfrm>
-          <a:prstGeom prst="rect">
-            <a:avLst/>
-          </a:prstGeom>
-          <a:noFill/>
-          <a:ln/>
-        </p:spPr>
-        <p:txBody>
-          <a:bodyPr wrap="square" lIns="0" tIns="0" rIns="0" bIns="0" rtlCol="0" anchor="t"/>
-          <a:lstStyle/>
-          <a:p>
-            <a:pPr algn="l" indent="0" marL="0">
-              <a:lnSpc>
-                <a:spcPct val="118000"/>
-              </a:lnSpc>
-              <a:buNone/>
-            </a:pPr>
-            <a:r>
-              <a:rPr lang="en-US" sz="1250" dirty="0">
-                <a:solidFill>
-                  <a:srgbClr val="3D4556"/>
-                </a:solidFill>
-                <a:latin typeface="Arial" pitchFamily="34" charset="0"/>
-                <a:ea typeface="Arial" pitchFamily="34" charset="-122"/>
-                <a:cs typeface="Arial" pitchFamily="34" charset="-120"/>
-              </a:rPr>
-              <a:t>Export Excel en un clic. Il ne reste que la validation et l'ajustement — les deux gestes qui doivent rester chez vous.</a:t>
-            </a:r>
-            <a:endParaRPr lang="en-US" sz="1250" dirty="0"/>
-          </a:p>
-        </p:txBody>
-      </p:sp>
-      <p:sp>
-        <p:nvSpPr>
-          <p:cNvPr id="9" name="Shape 6"/>
-          <p:cNvSpPr/>
-          <p:nvPr/>
-        </p:nvSpPr>
-        <p:spPr>
-          <a:xfrm>
-            <a:off x="5340096" y="1316736"/>
-            <a:ext cx="6172200" cy="4260383"/>
+              <a:rPr lang="en-US" sz="1150" dirty="0">
+                <a:solidFill>
+                  <a:srgbClr val="5B6475"/>
+                </a:solidFill>
+                <a:latin typeface="Arial" pitchFamily="34" charset="0"/>
+                <a:ea typeface="Arial" pitchFamily="34" charset="-122"/>
+                <a:cs typeface="Arial" pitchFamily="34" charset="-120"/>
+              </a:rPr>
+              <a:t>Le prix suit le nombre d'appareils qui comptent en même temps dans le magasin — la seule chose que vous puissiez vérifier vous-même. Ni le volume de votre stock, ni le nombre de comptes, ni le nombre d'inventaires dans l'année.</a:t>
+            </a:r>
+            <a:endParaRPr lang="en-US" sz="1150" dirty="0"/>
+          </a:p>
+        </p:txBody>
+      </p:sp>
+      <p:sp>
+        <p:nvSpPr>
+          <p:cNvPr id="8" name="Shape 5"/>
+          <p:cNvSpPr/>
+          <p:nvPr/>
+        </p:nvSpPr>
+        <p:spPr>
+          <a:xfrm>
+            <a:off x="731520" y="2331720"/>
+            <a:ext cx="3404616" cy="2743200"/>
           </a:xfrm>
           <a:prstGeom prst="roundRect">
             <a:avLst>
-              <a:gd name="adj" fmla="val 1717"/>
+              <a:gd name="adj" fmla="val 4000"/>
             </a:avLst>
           </a:prstGeom>
           <a:solidFill>
@@ -2683,40 +2307,16 @@
           </a:ln>
         </p:spPr>
       </p:sp>
-      <p:pic>
-        <p:nvPicPr>
-          <p:cNvPr id="10" name="Image 1" descr="preencoded.png">    </p:cNvPr>
-          <p:cNvPicPr>
-            <a:picLocks noChangeAspect="1"/>
-          </p:cNvPicPr>
-          <p:nvPr/>
-        </p:nvPicPr>
-        <p:blipFill>
-          <a:blip r:embed="rId2"/>
-          <a:stretch>
-            <a:fillRect/>
-          </a:stretch>
-        </p:blipFill>
-        <p:spPr>
-          <a:xfrm>
-            <a:off x="5394960" y="1371600"/>
-            <a:ext cx="6062472" cy="4150655"/>
-          </a:xfrm>
-          <a:prstGeom prst="rect">
-            <a:avLst/>
-          </a:prstGeom>
-        </p:spPr>
-      </p:pic>
-      <p:sp>
-        <p:nvSpPr>
-          <p:cNvPr id="11" name="Text 7"/>
-          <p:cNvSpPr/>
-          <p:nvPr/>
-        </p:nvSpPr>
-        <p:spPr>
-          <a:xfrm>
-            <a:off x="5394960" y="5659415"/>
-            <a:ext cx="6062472" cy="365760"/>
+      <p:sp>
+        <p:nvSpPr>
+          <p:cNvPr id="9" name="Text 6"/>
+          <p:cNvSpPr/>
+          <p:nvPr/>
+        </p:nvSpPr>
+        <p:spPr>
+          <a:xfrm>
+            <a:off x="987552" y="2825496"/>
+            <a:ext cx="2892552" cy="347472"/>
           </a:xfrm>
           <a:prstGeom prst="rect">
             <a:avLst/>
@@ -2732,7 +2332,88 @@
               <a:buNone/>
             </a:pPr>
             <a:r>
-              <a:rPr lang="en-US" sz="1000" i="1" dirty="0">
+              <a:rPr lang="en-US" sz="1800" b="1" dirty="0">
+                <a:solidFill>
+                  <a:srgbClr val="0B0F19"/>
+                </a:solidFill>
+                <a:latin typeface="Arial" pitchFamily="34" charset="0"/>
+                <a:ea typeface="Arial" pitchFamily="34" charset="-122"/>
+                <a:cs typeface="Arial" pitchFamily="34" charset="-120"/>
+              </a:rPr>
+              <a:t>Essential</a:t>
+            </a:r>
+            <a:endParaRPr lang="en-US" sz="1800" dirty="0"/>
+          </a:p>
+        </p:txBody>
+      </p:sp>
+      <p:sp>
+        <p:nvSpPr>
+          <p:cNvPr id="10" name="Text 7"/>
+          <p:cNvSpPr/>
+          <p:nvPr/>
+        </p:nvSpPr>
+        <p:spPr>
+          <a:xfrm>
+            <a:off x="987552" y="3227832"/>
+            <a:ext cx="2892552" cy="256032"/>
+          </a:xfrm>
+          <a:prstGeom prst="rect">
+            <a:avLst/>
+          </a:prstGeom>
+          <a:noFill/>
+          <a:ln/>
+        </p:spPr>
+        <p:txBody>
+          <a:bodyPr wrap="square" lIns="0" tIns="0" rIns="0" bIns="0" rtlCol="0" anchor="t"/>
+          <a:lstStyle/>
+          <a:p>
+            <a:pPr indent="0" marL="0">
+              <a:buNone/>
+            </a:pPr>
+            <a:r>
+              <a:rPr lang="en-US" sz="1100" b="1" dirty="0">
+                <a:solidFill>
+                  <a:srgbClr val="6366F1"/>
+                </a:solidFill>
+                <a:latin typeface="Arial" pitchFamily="34" charset="0"/>
+                <a:ea typeface="Arial" pitchFamily="34" charset="-122"/>
+                <a:cs typeface="Arial" pitchFamily="34" charset="-120"/>
+              </a:rPr>
+              <a:t>2 appareils</a:t>
+            </a:r>
+            <a:endParaRPr lang="en-US" sz="1100" dirty="0"/>
+          </a:p>
+        </p:txBody>
+      </p:sp>
+      <p:sp>
+        <p:nvSpPr>
+          <p:cNvPr id="11" name="Text 8"/>
+          <p:cNvSpPr/>
+          <p:nvPr/>
+        </p:nvSpPr>
+        <p:spPr>
+          <a:xfrm>
+            <a:off x="987552" y="3538728"/>
+            <a:ext cx="2892552" cy="457200"/>
+          </a:xfrm>
+          <a:prstGeom prst="rect">
+            <a:avLst/>
+          </a:prstGeom>
+          <a:noFill/>
+          <a:ln/>
+        </p:spPr>
+        <p:txBody>
+          <a:bodyPr wrap="square" lIns="0" tIns="0" rIns="0" bIns="0" rtlCol="0" anchor="t"/>
+          <a:lstStyle/>
+          <a:p>
+            <a:pPr indent="0" marL="0">
+              <a:lnSpc>
+                <a:spcPct val="112000"/>
+              </a:lnSpc>
+              <a:buNone/>
+            </a:pPr>
+            <a:r>
+              <a:rPr lang="en-US" sz="1000" dirty="0">
                 <a:solidFill>
                   <a:srgbClr val="5B6475"/>
                 </a:solidFill>
@@ -2740,7 +2421,7 @@
                 <a:ea typeface="Arial" pitchFamily="34" charset="-122"/>
                 <a:cs typeface="Arial" pitchFamily="34" charset="-120"/>
               </a:rPr>
-              <a:t>Onglet Rapport, données d'essai.</a:t>
+              <a:t>Vous comptez seul ou à deux, dans un magasin.</a:t>
             </a:r>
             <a:endParaRPr lang="en-US" sz="1000" dirty="0"/>
           </a:p>
@@ -2748,7 +2429,681 @@
       </p:sp>
       <p:sp>
         <p:nvSpPr>
-          <p:cNvPr id="12" name="Text 8"/>
+          <p:cNvPr id="12" name="Text 9"/>
+          <p:cNvSpPr/>
+          <p:nvPr/>
+        </p:nvSpPr>
+        <p:spPr>
+          <a:xfrm>
+            <a:off x="987552" y="4050792"/>
+            <a:ext cx="2892552" cy="457200"/>
+          </a:xfrm>
+          <a:prstGeom prst="rect">
+            <a:avLst/>
+          </a:prstGeom>
+          <a:noFill/>
+          <a:ln/>
+        </p:spPr>
+        <p:txBody>
+          <a:bodyPr wrap="square" lIns="0" tIns="0" rIns="0" bIns="0" rtlCol="0" anchor="b"/>
+          <a:lstStyle/>
+          <a:p>
+            <a:pPr indent="0" marL="0">
+              <a:buNone/>
+            </a:pPr>
+            <a:r>
+              <a:rPr lang="en-US" sz="2600" b="1" dirty="0">
+                <a:solidFill>
+                  <a:srgbClr val="4636B0"/>
+                </a:solidFill>
+                <a:latin typeface="Arial" pitchFamily="34" charset="0"/>
+                <a:ea typeface="Arial" pitchFamily="34" charset="-122"/>
+                <a:cs typeface="Arial" pitchFamily="34" charset="-120"/>
+              </a:rPr>
+              <a:t>89 €</a:t>
+            </a:r>
+            <a:pPr indent="0" marL="0">
+              <a:buNone/>
+            </a:pPr>
+            <a:r>
+              <a:rPr lang="en-US" sz="1050" dirty="0">
+                <a:solidFill>
+                  <a:srgbClr val="5B6475"/>
+                </a:solidFill>
+                <a:latin typeface="Arial" pitchFamily="34" charset="0"/>
+                <a:ea typeface="Arial" pitchFamily="34" charset="-122"/>
+                <a:cs typeface="Arial" pitchFamily="34" charset="-120"/>
+              </a:rPr>
+              <a:t>  HT / mois</a:t>
+            </a:r>
+            <a:endParaRPr lang="en-US" sz="2600" dirty="0"/>
+          </a:p>
+        </p:txBody>
+      </p:sp>
+      <p:sp>
+        <p:nvSpPr>
+          <p:cNvPr id="13" name="Text 10"/>
+          <p:cNvSpPr/>
+          <p:nvPr/>
+        </p:nvSpPr>
+        <p:spPr>
+          <a:xfrm>
+            <a:off x="987552" y="4507992"/>
+            <a:ext cx="2892552" cy="274320"/>
+          </a:xfrm>
+          <a:prstGeom prst="rect">
+            <a:avLst/>
+          </a:prstGeom>
+          <a:noFill/>
+          <a:ln/>
+        </p:spPr>
+        <p:txBody>
+          <a:bodyPr wrap="square" lIns="0" tIns="0" rIns="0" bIns="0" rtlCol="0" anchor="t"/>
+          <a:lstStyle/>
+          <a:p>
+            <a:pPr indent="0" marL="0">
+              <a:buNone/>
+            </a:pPr>
+            <a:r>
+              <a:rPr lang="en-US" sz="950" dirty="0">
+                <a:solidFill>
+                  <a:srgbClr val="1F7A5C"/>
+                </a:solidFill>
+                <a:latin typeface="Arial" pitchFamily="34" charset="0"/>
+                <a:ea typeface="Arial" pitchFamily="34" charset="-122"/>
+                <a:cs typeface="Arial" pitchFamily="34" charset="-120"/>
+              </a:rPr>
+              <a:t>ou 950 € à l’année — 118 € de moins</a:t>
+            </a:r>
+            <a:endParaRPr lang="en-US" sz="950" dirty="0"/>
+          </a:p>
+        </p:txBody>
+      </p:sp>
+      <p:sp>
+        <p:nvSpPr>
+          <p:cNvPr id="14" name="Shape 11"/>
+          <p:cNvSpPr/>
+          <p:nvPr/>
+        </p:nvSpPr>
+        <p:spPr>
+          <a:xfrm>
+            <a:off x="4392168" y="2331720"/>
+            <a:ext cx="3404616" cy="2743200"/>
+          </a:xfrm>
+          <a:prstGeom prst="roundRect">
+            <a:avLst>
+              <a:gd name="adj" fmla="val 4000"/>
+            </a:avLst>
+          </a:prstGeom>
+          <a:solidFill>
+            <a:srgbClr val="EEEEFC"/>
+          </a:solidFill>
+          <a:ln w="19050">
+            <a:solidFill>
+              <a:srgbClr val="6366F1"/>
+            </a:solidFill>
+            <a:prstDash val="solid"/>
+          </a:ln>
+        </p:spPr>
+      </p:sp>
+      <p:sp>
+        <p:nvSpPr>
+          <p:cNvPr id="15" name="Text 12"/>
+          <p:cNvSpPr/>
+          <p:nvPr/>
+        </p:nvSpPr>
+        <p:spPr>
+          <a:xfrm>
+            <a:off x="4648200" y="2532888"/>
+            <a:ext cx="2892552" cy="219456"/>
+          </a:xfrm>
+          <a:prstGeom prst="rect">
+            <a:avLst/>
+          </a:prstGeom>
+          <a:noFill/>
+          <a:ln/>
+        </p:spPr>
+        <p:txBody>
+          <a:bodyPr wrap="square" lIns="0" tIns="0" rIns="0" bIns="0" rtlCol="0" anchor="t"/>
+          <a:lstStyle/>
+          <a:p>
+            <a:pPr indent="0" marL="0">
+              <a:buNone/>
+            </a:pPr>
+            <a:r>
+              <a:rPr lang="en-US" sz="800" b="1" spc="60" kern="0" dirty="0">
+                <a:solidFill>
+                  <a:srgbClr val="6366F1"/>
+                </a:solidFill>
+                <a:latin typeface="Arial" pitchFamily="34" charset="0"/>
+                <a:ea typeface="Arial" pitchFamily="34" charset="-122"/>
+                <a:cs typeface="Arial" pitchFamily="34" charset="-120"/>
+              </a:rPr>
+              <a:t>LE PLUS COURANT</a:t>
+            </a:r>
+            <a:endParaRPr lang="en-US" sz="800" dirty="0"/>
+          </a:p>
+        </p:txBody>
+      </p:sp>
+      <p:sp>
+        <p:nvSpPr>
+          <p:cNvPr id="16" name="Text 13"/>
+          <p:cNvSpPr/>
+          <p:nvPr/>
+        </p:nvSpPr>
+        <p:spPr>
+          <a:xfrm>
+            <a:off x="4648200" y="2825496"/>
+            <a:ext cx="2892552" cy="347472"/>
+          </a:xfrm>
+          <a:prstGeom prst="rect">
+            <a:avLst/>
+          </a:prstGeom>
+          <a:noFill/>
+          <a:ln/>
+        </p:spPr>
+        <p:txBody>
+          <a:bodyPr wrap="square" lIns="0" tIns="0" rIns="0" bIns="0" rtlCol="0" anchor="t"/>
+          <a:lstStyle/>
+          <a:p>
+            <a:pPr indent="0" marL="0">
+              <a:buNone/>
+            </a:pPr>
+            <a:r>
+              <a:rPr lang="en-US" sz="1800" b="1" dirty="0">
+                <a:solidFill>
+                  <a:srgbClr val="0B0F19"/>
+                </a:solidFill>
+                <a:latin typeface="Arial" pitchFamily="34" charset="0"/>
+                <a:ea typeface="Arial" pitchFamily="34" charset="-122"/>
+                <a:cs typeface="Arial" pitchFamily="34" charset="-120"/>
+              </a:rPr>
+              <a:t>Advanced</a:t>
+            </a:r>
+            <a:endParaRPr lang="en-US" sz="1800" dirty="0"/>
+          </a:p>
+        </p:txBody>
+      </p:sp>
+      <p:sp>
+        <p:nvSpPr>
+          <p:cNvPr id="17" name="Text 14"/>
+          <p:cNvSpPr/>
+          <p:nvPr/>
+        </p:nvSpPr>
+        <p:spPr>
+          <a:xfrm>
+            <a:off x="4648200" y="3227832"/>
+            <a:ext cx="2892552" cy="256032"/>
+          </a:xfrm>
+          <a:prstGeom prst="rect">
+            <a:avLst/>
+          </a:prstGeom>
+          <a:noFill/>
+          <a:ln/>
+        </p:spPr>
+        <p:txBody>
+          <a:bodyPr wrap="square" lIns="0" tIns="0" rIns="0" bIns="0" rtlCol="0" anchor="t"/>
+          <a:lstStyle/>
+          <a:p>
+            <a:pPr indent="0" marL="0">
+              <a:buNone/>
+            </a:pPr>
+            <a:r>
+              <a:rPr lang="en-US" sz="1100" b="1" dirty="0">
+                <a:solidFill>
+                  <a:srgbClr val="6366F1"/>
+                </a:solidFill>
+                <a:latin typeface="Arial" pitchFamily="34" charset="0"/>
+                <a:ea typeface="Arial" pitchFamily="34" charset="-122"/>
+                <a:cs typeface="Arial" pitchFamily="34" charset="-120"/>
+              </a:rPr>
+              <a:t>3 à 20 appareils</a:t>
+            </a:r>
+            <a:endParaRPr lang="en-US" sz="1100" dirty="0"/>
+          </a:p>
+        </p:txBody>
+      </p:sp>
+      <p:sp>
+        <p:nvSpPr>
+          <p:cNvPr id="18" name="Text 15"/>
+          <p:cNvSpPr/>
+          <p:nvPr/>
+        </p:nvSpPr>
+        <p:spPr>
+          <a:xfrm>
+            <a:off x="4648200" y="3538728"/>
+            <a:ext cx="2892552" cy="457200"/>
+          </a:xfrm>
+          <a:prstGeom prst="rect">
+            <a:avLst/>
+          </a:prstGeom>
+          <a:noFill/>
+          <a:ln/>
+        </p:spPr>
+        <p:txBody>
+          <a:bodyPr wrap="square" lIns="0" tIns="0" rIns="0" bIns="0" rtlCol="0" anchor="t"/>
+          <a:lstStyle/>
+          <a:p>
+            <a:pPr indent="0" marL="0">
+              <a:lnSpc>
+                <a:spcPct val="112000"/>
+              </a:lnSpc>
+              <a:buNone/>
+            </a:pPr>
+            <a:r>
+              <a:rPr lang="en-US" sz="1000" dirty="0">
+                <a:solidFill>
+                  <a:srgbClr val="5B6475"/>
+                </a:solidFill>
+                <a:latin typeface="Arial" pitchFamily="34" charset="0"/>
+                <a:ea typeface="Arial" pitchFamily="34" charset="-122"/>
+                <a:cs typeface="Arial" pitchFamily="34" charset="-120"/>
+              </a:rPr>
+              <a:t>Vous montez une équipe le jour de l’inventaire.</a:t>
+            </a:r>
+            <a:endParaRPr lang="en-US" sz="1000" dirty="0"/>
+          </a:p>
+        </p:txBody>
+      </p:sp>
+      <p:sp>
+        <p:nvSpPr>
+          <p:cNvPr id="19" name="Text 16"/>
+          <p:cNvSpPr/>
+          <p:nvPr/>
+        </p:nvSpPr>
+        <p:spPr>
+          <a:xfrm>
+            <a:off x="4648200" y="4050792"/>
+            <a:ext cx="2892552" cy="457200"/>
+          </a:xfrm>
+          <a:prstGeom prst="rect">
+            <a:avLst/>
+          </a:prstGeom>
+          <a:noFill/>
+          <a:ln/>
+        </p:spPr>
+        <p:txBody>
+          <a:bodyPr wrap="square" lIns="0" tIns="0" rIns="0" bIns="0" rtlCol="0" anchor="b"/>
+          <a:lstStyle/>
+          <a:p>
+            <a:pPr indent="0" marL="0">
+              <a:buNone/>
+            </a:pPr>
+            <a:r>
+              <a:rPr lang="en-US" sz="2600" b="1" dirty="0">
+                <a:solidFill>
+                  <a:srgbClr val="4636B0"/>
+                </a:solidFill>
+                <a:latin typeface="Arial" pitchFamily="34" charset="0"/>
+                <a:ea typeface="Arial" pitchFamily="34" charset="-122"/>
+                <a:cs typeface="Arial" pitchFamily="34" charset="-120"/>
+              </a:rPr>
+              <a:t>310 €</a:t>
+            </a:r>
+            <a:pPr indent="0" marL="0">
+              <a:buNone/>
+            </a:pPr>
+            <a:r>
+              <a:rPr lang="en-US" sz="1050" dirty="0">
+                <a:solidFill>
+                  <a:srgbClr val="5B6475"/>
+                </a:solidFill>
+                <a:latin typeface="Arial" pitchFamily="34" charset="0"/>
+                <a:ea typeface="Arial" pitchFamily="34" charset="-122"/>
+                <a:cs typeface="Arial" pitchFamily="34" charset="-120"/>
+              </a:rPr>
+              <a:t>  HT / mois</a:t>
+            </a:r>
+            <a:endParaRPr lang="en-US" sz="2600" dirty="0"/>
+          </a:p>
+        </p:txBody>
+      </p:sp>
+      <p:sp>
+        <p:nvSpPr>
+          <p:cNvPr id="20" name="Text 17"/>
+          <p:cNvSpPr/>
+          <p:nvPr/>
+        </p:nvSpPr>
+        <p:spPr>
+          <a:xfrm>
+            <a:off x="4648200" y="4507992"/>
+            <a:ext cx="2892552" cy="274320"/>
+          </a:xfrm>
+          <a:prstGeom prst="rect">
+            <a:avLst/>
+          </a:prstGeom>
+          <a:noFill/>
+          <a:ln/>
+        </p:spPr>
+        <p:txBody>
+          <a:bodyPr wrap="square" lIns="0" tIns="0" rIns="0" bIns="0" rtlCol="0" anchor="t"/>
+          <a:lstStyle/>
+          <a:p>
+            <a:pPr indent="0" marL="0">
+              <a:buNone/>
+            </a:pPr>
+            <a:r>
+              <a:rPr lang="en-US" sz="950" dirty="0">
+                <a:solidFill>
+                  <a:srgbClr val="1F7A5C"/>
+                </a:solidFill>
+                <a:latin typeface="Arial" pitchFamily="34" charset="0"/>
+                <a:ea typeface="Arial" pitchFamily="34" charset="-122"/>
+                <a:cs typeface="Arial" pitchFamily="34" charset="-120"/>
+              </a:rPr>
+              <a:t>ou 3 300 € à l’année — 420 € de moins</a:t>
+            </a:r>
+            <a:endParaRPr lang="en-US" sz="950" dirty="0"/>
+          </a:p>
+        </p:txBody>
+      </p:sp>
+      <p:sp>
+        <p:nvSpPr>
+          <p:cNvPr id="21" name="Shape 18"/>
+          <p:cNvSpPr/>
+          <p:nvPr/>
+        </p:nvSpPr>
+        <p:spPr>
+          <a:xfrm>
+            <a:off x="8052816" y="2331720"/>
+            <a:ext cx="3404616" cy="2743200"/>
+          </a:xfrm>
+          <a:prstGeom prst="roundRect">
+            <a:avLst>
+              <a:gd name="adj" fmla="val 4000"/>
+            </a:avLst>
+          </a:prstGeom>
+          <a:solidFill>
+            <a:srgbClr val="FFFFFF"/>
+          </a:solidFill>
+          <a:ln w="12700">
+            <a:solidFill>
+              <a:srgbClr val="E3E6EE"/>
+            </a:solidFill>
+            <a:prstDash val="solid"/>
+          </a:ln>
+        </p:spPr>
+      </p:sp>
+      <p:sp>
+        <p:nvSpPr>
+          <p:cNvPr id="22" name="Text 19"/>
+          <p:cNvSpPr/>
+          <p:nvPr/>
+        </p:nvSpPr>
+        <p:spPr>
+          <a:xfrm>
+            <a:off x="8308848" y="2825496"/>
+            <a:ext cx="2892552" cy="347472"/>
+          </a:xfrm>
+          <a:prstGeom prst="rect">
+            <a:avLst/>
+          </a:prstGeom>
+          <a:noFill/>
+          <a:ln/>
+        </p:spPr>
+        <p:txBody>
+          <a:bodyPr wrap="square" lIns="0" tIns="0" rIns="0" bIns="0" rtlCol="0" anchor="t"/>
+          <a:lstStyle/>
+          <a:p>
+            <a:pPr indent="0" marL="0">
+              <a:buNone/>
+            </a:pPr>
+            <a:r>
+              <a:rPr lang="en-US" sz="1800" b="1" dirty="0">
+                <a:solidFill>
+                  <a:srgbClr val="0B0F19"/>
+                </a:solidFill>
+                <a:latin typeface="Arial" pitchFamily="34" charset="0"/>
+                <a:ea typeface="Arial" pitchFamily="34" charset="-122"/>
+                <a:cs typeface="Arial" pitchFamily="34" charset="-120"/>
+              </a:rPr>
+              <a:t>Enterprise</a:t>
+            </a:r>
+            <a:endParaRPr lang="en-US" sz="1800" dirty="0"/>
+          </a:p>
+        </p:txBody>
+      </p:sp>
+      <p:sp>
+        <p:nvSpPr>
+          <p:cNvPr id="23" name="Text 20"/>
+          <p:cNvSpPr/>
+          <p:nvPr/>
+        </p:nvSpPr>
+        <p:spPr>
+          <a:xfrm>
+            <a:off x="8308848" y="3227832"/>
+            <a:ext cx="2892552" cy="256032"/>
+          </a:xfrm>
+          <a:prstGeom prst="rect">
+            <a:avLst/>
+          </a:prstGeom>
+          <a:noFill/>
+          <a:ln/>
+        </p:spPr>
+        <p:txBody>
+          <a:bodyPr wrap="square" lIns="0" tIns="0" rIns="0" bIns="0" rtlCol="0" anchor="t"/>
+          <a:lstStyle/>
+          <a:p>
+            <a:pPr indent="0" marL="0">
+              <a:buNone/>
+            </a:pPr>
+            <a:r>
+              <a:rPr lang="en-US" sz="1100" b="1" dirty="0">
+                <a:solidFill>
+                  <a:srgbClr val="6366F1"/>
+                </a:solidFill>
+                <a:latin typeface="Arial" pitchFamily="34" charset="0"/>
+                <a:ea typeface="Arial" pitchFamily="34" charset="-122"/>
+                <a:cs typeface="Arial" pitchFamily="34" charset="-120"/>
+              </a:rPr>
+              <a:t>21 à 100 appareils</a:t>
+            </a:r>
+            <a:endParaRPr lang="en-US" sz="1100" dirty="0"/>
+          </a:p>
+        </p:txBody>
+      </p:sp>
+      <p:sp>
+        <p:nvSpPr>
+          <p:cNvPr id="24" name="Text 21"/>
+          <p:cNvSpPr/>
+          <p:nvPr/>
+        </p:nvSpPr>
+        <p:spPr>
+          <a:xfrm>
+            <a:off x="8308848" y="3538728"/>
+            <a:ext cx="2892552" cy="457200"/>
+          </a:xfrm>
+          <a:prstGeom prst="rect">
+            <a:avLst/>
+          </a:prstGeom>
+          <a:noFill/>
+          <a:ln/>
+        </p:spPr>
+        <p:txBody>
+          <a:bodyPr wrap="square" lIns="0" tIns="0" rIns="0" bIns="0" rtlCol="0" anchor="t"/>
+          <a:lstStyle/>
+          <a:p>
+            <a:pPr indent="0" marL="0">
+              <a:lnSpc>
+                <a:spcPct val="112000"/>
+              </a:lnSpc>
+              <a:buNone/>
+            </a:pPr>
+            <a:r>
+              <a:rPr lang="en-US" sz="1000" dirty="0">
+                <a:solidFill>
+                  <a:srgbClr val="5B6475"/>
+                </a:solidFill>
+                <a:latin typeface="Arial" pitchFamily="34" charset="0"/>
+                <a:ea typeface="Arial" pitchFamily="34" charset="-122"/>
+                <a:cs typeface="Arial" pitchFamily="34" charset="-120"/>
+              </a:rPr>
+              <a:t>La grande surface, qui mobilise une équipe entière.</a:t>
+            </a:r>
+            <a:endParaRPr lang="en-US" sz="1000" dirty="0"/>
+          </a:p>
+        </p:txBody>
+      </p:sp>
+      <p:sp>
+        <p:nvSpPr>
+          <p:cNvPr id="25" name="Text 22"/>
+          <p:cNvSpPr/>
+          <p:nvPr/>
+        </p:nvSpPr>
+        <p:spPr>
+          <a:xfrm>
+            <a:off x="8308848" y="4050792"/>
+            <a:ext cx="2892552" cy="457200"/>
+          </a:xfrm>
+          <a:prstGeom prst="rect">
+            <a:avLst/>
+          </a:prstGeom>
+          <a:noFill/>
+          <a:ln/>
+        </p:spPr>
+        <p:txBody>
+          <a:bodyPr wrap="square" lIns="0" tIns="0" rIns="0" bIns="0" rtlCol="0" anchor="b"/>
+          <a:lstStyle/>
+          <a:p>
+            <a:pPr indent="0" marL="0">
+              <a:buNone/>
+            </a:pPr>
+            <a:r>
+              <a:rPr lang="en-US" sz="2600" b="1" dirty="0">
+                <a:solidFill>
+                  <a:srgbClr val="4636B0"/>
+                </a:solidFill>
+                <a:latin typeface="Arial" pitchFamily="34" charset="0"/>
+                <a:ea typeface="Arial" pitchFamily="34" charset="-122"/>
+                <a:cs typeface="Arial" pitchFamily="34" charset="-120"/>
+              </a:rPr>
+              <a:t>890 €</a:t>
+            </a:r>
+            <a:pPr indent="0" marL="0">
+              <a:buNone/>
+            </a:pPr>
+            <a:r>
+              <a:rPr lang="en-US" sz="1050" dirty="0">
+                <a:solidFill>
+                  <a:srgbClr val="5B6475"/>
+                </a:solidFill>
+                <a:latin typeface="Arial" pitchFamily="34" charset="0"/>
+                <a:ea typeface="Arial" pitchFamily="34" charset="-122"/>
+                <a:cs typeface="Arial" pitchFamily="34" charset="-120"/>
+              </a:rPr>
+              <a:t>  HT / mois</a:t>
+            </a:r>
+            <a:endParaRPr lang="en-US" sz="2600" dirty="0"/>
+          </a:p>
+        </p:txBody>
+      </p:sp>
+      <p:sp>
+        <p:nvSpPr>
+          <p:cNvPr id="26" name="Text 23"/>
+          <p:cNvSpPr/>
+          <p:nvPr/>
+        </p:nvSpPr>
+        <p:spPr>
+          <a:xfrm>
+            <a:off x="8308848" y="4507992"/>
+            <a:ext cx="2892552" cy="274320"/>
+          </a:xfrm>
+          <a:prstGeom prst="rect">
+            <a:avLst/>
+          </a:prstGeom>
+          <a:noFill/>
+          <a:ln/>
+        </p:spPr>
+        <p:txBody>
+          <a:bodyPr wrap="square" lIns="0" tIns="0" rIns="0" bIns="0" rtlCol="0" anchor="t"/>
+          <a:lstStyle/>
+          <a:p>
+            <a:pPr indent="0" marL="0">
+              <a:buNone/>
+            </a:pPr>
+            <a:r>
+              <a:rPr lang="en-US" sz="950" dirty="0">
+                <a:solidFill>
+                  <a:srgbClr val="1F7A5C"/>
+                </a:solidFill>
+                <a:latin typeface="Arial" pitchFamily="34" charset="0"/>
+                <a:ea typeface="Arial" pitchFamily="34" charset="-122"/>
+                <a:cs typeface="Arial" pitchFamily="34" charset="-120"/>
+              </a:rPr>
+              <a:t>ou 9 450 € à l’année — 1 230 € de moins</a:t>
+            </a:r>
+            <a:endParaRPr lang="en-US" sz="950" dirty="0"/>
+          </a:p>
+        </p:txBody>
+      </p:sp>
+      <p:sp>
+        <p:nvSpPr>
+          <p:cNvPr id="27" name="Text 24"/>
+          <p:cNvSpPr/>
+          <p:nvPr/>
+        </p:nvSpPr>
+        <p:spPr>
+          <a:xfrm>
+            <a:off x="731520" y="5257800"/>
+            <a:ext cx="10725912" cy="914400"/>
+          </a:xfrm>
+          <a:prstGeom prst="rect">
+            <a:avLst/>
+          </a:prstGeom>
+          <a:noFill/>
+          <a:ln/>
+        </p:spPr>
+        <p:txBody>
+          <a:bodyPr wrap="square" lIns="0" tIns="0" rIns="0" bIns="0" rtlCol="0" anchor="t"/>
+          <a:lstStyle/>
+          <a:p>
+            <a:pPr indent="0" marL="0">
+              <a:lnSpc>
+                <a:spcPct val="118000"/>
+              </a:lnSpc>
+              <a:spcAft>
+                <a:spcPts val="900"/>
+              </a:spcAft>
+              <a:buNone/>
+            </a:pPr>
+            <a:r>
+              <a:rPr lang="en-US" sz="1200" b="1" dirty="0">
+                <a:solidFill>
+                  <a:srgbClr val="0B0F19"/>
+                </a:solidFill>
+                <a:latin typeface="Arial" pitchFamily="34" charset="0"/>
+                <a:ea typeface="Arial" pitchFamily="34" charset="-122"/>
+                <a:cs typeface="Arial" pitchFamily="34" charset="-120"/>
+              </a:rPr>
+              <a:t>Ce que ça change pour l'inventaire tournant. </a:t>
+            </a:r>
+            <a:pPr indent="0" marL="0">
+              <a:lnSpc>
+                <a:spcPct val="118000"/>
+              </a:lnSpc>
+              <a:spcAft>
+                <a:spcPts val="900"/>
+              </a:spcAft>
+              <a:buNone/>
+            </a:pPr>
+            <a:r>
+              <a:rPr lang="en-US" sz="1200" dirty="0">
+                <a:solidFill>
+                  <a:srgbClr val="3D4556"/>
+                </a:solidFill>
+                <a:latin typeface="Arial" pitchFamily="34" charset="0"/>
+                <a:ea typeface="Arial" pitchFamily="34" charset="-122"/>
+                <a:cs typeface="Arial" pitchFamily="34" charset="-120"/>
+              </a:rPr>
+              <a:t>À l'intérieur d'un palier, compter davantage ne coûte rien : un chef d'équipe qui décide de compter son rayon un mardi matin n'a aucun budget à demander. C'est ce qui rend le transfert au floor tenable dans la durée. L'application, le tableau de bord, les rapports et les mises à jour sont compris.</a:t>
+            </a:r>
+            <a:endParaRPr lang="en-US" sz="1200" dirty="0"/>
+          </a:p>
+        </p:txBody>
+      </p:sp>
+      <p:sp>
+        <p:nvSpPr>
+          <p:cNvPr id="28" name="Text 25"/>
           <p:cNvSpPr/>
           <p:nvPr/>
         </p:nvSpPr>
@@ -2787,7 +3142,7 @@
       </p:sp>
       <p:sp>
         <p:nvSpPr>
-          <p:cNvPr id="13" name="Text 9"/>
+          <p:cNvPr id="29" name="Text 26"/>
           <p:cNvSpPr/>
           <p:nvPr/>
         </p:nvSpPr>
@@ -2872,8 +3227,8 @@
         </p:blipFill>
         <p:spPr>
           <a:xfrm>
-            <a:off x="731520" y="384048"/>
-            <a:ext cx="329184" cy="329184"/>
+            <a:off x="731520" y="685800"/>
+            <a:ext cx="566928" cy="566928"/>
           </a:xfrm>
           <a:prstGeom prst="rect">
             <a:avLst/>
@@ -2888,8 +3243,8 @@
         </p:nvSpPr>
         <p:spPr>
           <a:xfrm>
-            <a:off x="1170432" y="347472"/>
-            <a:ext cx="2743200" cy="402336"/>
+            <a:off x="1444752" y="658368"/>
+            <a:ext cx="4572000" cy="621792"/>
           </a:xfrm>
           <a:prstGeom prst="rect">
             <a:avLst/>
@@ -2905,7 +3260,7 @@
               <a:buNone/>
             </a:pPr>
             <a:r>
-              <a:rPr lang="en-US" sz="1600" b="1" dirty="0">
+              <a:rPr lang="en-US" sz="2400" b="1" dirty="0">
                 <a:solidFill>
                   <a:srgbClr val="0B0F19"/>
                 </a:solidFill>
@@ -2915,59 +3270,20 @@
               </a:rPr>
               <a:t>Quantinvo</a:t>
             </a:r>
-            <a:endParaRPr lang="en-US" sz="1600" dirty="0"/>
-          </a:p>
-        </p:txBody>
-      </p:sp>
-      <p:sp>
-        <p:nvSpPr>
-          <p:cNvPr id="4" name="Text 1"/>
-          <p:cNvSpPr/>
-          <p:nvPr/>
-        </p:nvSpPr>
-        <p:spPr>
-          <a:xfrm>
-            <a:off x="5971032" y="347472"/>
-            <a:ext cx="5486400" cy="402336"/>
-          </a:xfrm>
-          <a:prstGeom prst="rect">
-            <a:avLst/>
-          </a:prstGeom>
-          <a:noFill/>
-          <a:ln/>
-        </p:spPr>
-        <p:txBody>
-          <a:bodyPr wrap="square" lIns="0" tIns="0" rIns="0" bIns="0" rtlCol="0" anchor="ctr"/>
-          <a:lstStyle/>
-          <a:p>
-            <a:pPr algn="r" indent="0" marL="0">
-              <a:buNone/>
-            </a:pPr>
-            <a:r>
-              <a:rPr lang="en-US" sz="1000" dirty="0">
-                <a:solidFill>
-                  <a:srgbClr val="5B6475"/>
-                </a:solidFill>
-                <a:latin typeface="Arial" pitchFamily="34" charset="0"/>
-                <a:ea typeface="Arial" pitchFamily="34" charset="-122"/>
-                <a:cs typeface="Arial" pitchFamily="34" charset="-120"/>
-              </a:rPr>
-              <a:t>L'inventaire aléatoire</a:t>
-            </a:r>
-            <a:endParaRPr lang="en-US" sz="1000" dirty="0"/>
-          </a:p>
-        </p:txBody>
-      </p:sp>
-      <p:sp>
-        <p:nvSpPr>
-          <p:cNvPr id="5" name="Shape 2"/>
-          <p:cNvSpPr/>
-          <p:nvPr/>
-        </p:nvSpPr>
-        <p:spPr>
-          <a:xfrm>
-            <a:off x="731520" y="877824"/>
-            <a:ext cx="10725912" cy="25603"/>
+            <a:endParaRPr lang="en-US" sz="2400" dirty="0"/>
+          </a:p>
+        </p:txBody>
+      </p:sp>
+      <p:sp>
+        <p:nvSpPr>
+          <p:cNvPr id="4" name="Shape 1"/>
+          <p:cNvSpPr/>
+          <p:nvPr/>
+        </p:nvSpPr>
+        <p:spPr>
+          <a:xfrm>
+            <a:off x="731520" y="1481328"/>
+            <a:ext cx="2377440" cy="25603"/>
           </a:xfrm>
           <a:prstGeom prst="rect">
             <a:avLst/>
@@ -2985,14 +3301,14 @@
       </p:sp>
       <p:sp>
         <p:nvSpPr>
-          <p:cNvPr id="6" name="Text 3"/>
-          <p:cNvSpPr/>
-          <p:nvPr/>
-        </p:nvSpPr>
-        <p:spPr>
-          <a:xfrm>
-            <a:off x="731520" y="1325880"/>
-            <a:ext cx="4206240" cy="1737360"/>
+          <p:cNvPr id="5" name="Text 2"/>
+          <p:cNvSpPr/>
+          <p:nvPr/>
+        </p:nvSpPr>
+        <p:spPr>
+          <a:xfrm>
+            <a:off x="731520" y="2377440"/>
+            <a:ext cx="8686800" cy="1188720"/>
           </a:xfrm>
           <a:prstGeom prst="rect">
             <a:avLst/>
@@ -3011,2785 +3327,6 @@
               <a:buNone/>
             </a:pPr>
             <a:r>
-              <a:rPr lang="en-US" sz="2600" b="1" dirty="0">
-                <a:solidFill>
-                  <a:srgbClr val="4636B0"/>
-                </a:solidFill>
-                <a:latin typeface="Arial" pitchFamily="34" charset="0"/>
-                <a:ea typeface="Arial" pitchFamily="34" charset="-122"/>
-                <a:cs typeface="Arial" pitchFamily="34" charset="-120"/>
-              </a:rPr>
-              <a:t>Votre projet d’inventaire aléatoire, prêt à fonctionner.</a:t>
-            </a:r>
-            <a:endParaRPr lang="en-US" sz="2600" dirty="0"/>
-          </a:p>
-        </p:txBody>
-      </p:sp>
-      <p:sp>
-        <p:nvSpPr>
-          <p:cNvPr id="7" name="Text 4"/>
-          <p:cNvSpPr/>
-          <p:nvPr/>
-        </p:nvSpPr>
-        <p:spPr>
-          <a:xfrm>
-            <a:off x="731520" y="3108960"/>
-            <a:ext cx="4206240" cy="1554480"/>
-          </a:xfrm>
-          <a:prstGeom prst="rect">
-            <a:avLst/>
-          </a:prstGeom>
-          <a:noFill/>
-          <a:ln/>
-        </p:spPr>
-        <p:txBody>
-          <a:bodyPr wrap="square" lIns="0" tIns="0" rIns="0" bIns="0" rtlCol="0" anchor="t"/>
-          <a:lstStyle/>
-          <a:p>
-            <a:pPr algn="l" indent="0" marL="0">
-              <a:lnSpc>
-                <a:spcPct val="118000"/>
-              </a:lnSpc>
-              <a:buNone/>
-            </a:pPr>
-            <a:r>
-              <a:rPr lang="en-US" sz="1200" i="1" dirty="0">
-                <a:solidFill>
-                  <a:srgbClr val="5B6475"/>
-                </a:solidFill>
-                <a:latin typeface="Arial" pitchFamily="34" charset="0"/>
-                <a:ea typeface="Arial" pitchFamily="34" charset="-122"/>
-                <a:cs typeface="Arial" pitchFamily="34" charset="-120"/>
-              </a:rPr>
-              <a:t>Vous en avez posé les objectifs : identifier les vols, tester la rigueur des procédures, garantir que chaque responsable maîtrise son stock. Confier le comptage au floor, c'est exactement cela.</a:t>
-            </a:r>
-            <a:endParaRPr lang="en-US" sz="1200" dirty="0"/>
-          </a:p>
-        </p:txBody>
-      </p:sp>
-      <p:sp>
-        <p:nvSpPr>
-          <p:cNvPr id="8" name="Text 5"/>
-          <p:cNvSpPr/>
-          <p:nvPr/>
-        </p:nvSpPr>
-        <p:spPr>
-          <a:xfrm>
-            <a:off x="5394960" y="1371600"/>
-            <a:ext cx="6062472" cy="4754880"/>
-          </a:xfrm>
-          <a:prstGeom prst="rect">
-            <a:avLst/>
-          </a:prstGeom>
-          <a:noFill/>
-          <a:ln/>
-        </p:spPr>
-        <p:txBody>
-          <a:bodyPr wrap="square" lIns="0" tIns="0" rIns="0" bIns="0" rtlCol="0" anchor="t"/>
-          <a:lstStyle/>
-          <a:p>
-            <a:pPr indent="0" marL="0">
-              <a:lnSpc>
-                <a:spcPct val="118000"/>
-              </a:lnSpc>
-              <a:spcAft>
-                <a:spcPts val="1300"/>
-              </a:spcAft>
-              <a:buNone/>
-            </a:pPr>
-            <a:r>
-              <a:rPr lang="en-US" sz="1250" b="1" dirty="0">
-                <a:solidFill>
-                  <a:srgbClr val="0B0F19"/>
-                </a:solidFill>
-                <a:latin typeface="Arial" pitchFamily="34" charset="0"/>
-                <a:ea typeface="Arial" pitchFamily="34" charset="-122"/>
-                <a:cs typeface="Arial" pitchFamily="34" charset="-120"/>
-              </a:rPr>
-              <a:t>La sélection. </a:t>
-            </a:r>
-            <a:pPr indent="0" marL="0">
-              <a:lnSpc>
-                <a:spcPct val="118000"/>
-              </a:lnSpc>
-              <a:spcAft>
-                <a:spcPts val="1300"/>
-              </a:spcAft>
-              <a:buNone/>
-            </a:pPr>
-            <a:r>
-              <a:rPr lang="en-US" sz="1250" dirty="0">
-                <a:solidFill>
-                  <a:srgbClr val="3D4556"/>
-                </a:solidFill>
-                <a:latin typeface="Arial" pitchFamily="34" charset="0"/>
-                <a:ea typeface="Arial" pitchFamily="34" charset="-122"/>
-                <a:cs typeface="Arial" pitchFamily="34" charset="-120"/>
-              </a:rPr>
-              <a:t>Elle reste chez vous : variances négatives répétées, articles sensibles, slow movers. Les rapports des inventaires précédents donnent les chiffres d'où cette sélection se tire.</a:t>
-            </a:r>
-            <a:endParaRPr lang="en-US" sz="1250" dirty="0"/>
-          </a:p>
-          <a:p>
-            <a:pPr indent="0" marL="0">
-              <a:lnSpc>
-                <a:spcPct val="118000"/>
-              </a:lnSpc>
-              <a:spcAft>
-                <a:spcPts val="1300"/>
-              </a:spcAft>
-              <a:buNone/>
-            </a:pPr>
-            <a:r>
-              <a:rPr lang="en-US" sz="1250" b="1" dirty="0">
-                <a:solidFill>
-                  <a:srgbClr val="0B0F19"/>
-                </a:solidFill>
-                <a:latin typeface="Arial" pitchFamily="34" charset="0"/>
-                <a:ea typeface="Arial" pitchFamily="34" charset="-122"/>
-                <a:cs typeface="Arial" pitchFamily="34" charset="-120"/>
-              </a:rPr>
-              <a:t>Le déclenchement. </a:t>
-            </a:r>
-            <a:pPr indent="0" marL="0">
-              <a:lnSpc>
-                <a:spcPct val="118000"/>
-              </a:lnSpc>
-              <a:spcAft>
-                <a:spcPts val="1300"/>
-              </a:spcAft>
-              <a:buNone/>
-            </a:pPr>
-            <a:r>
-              <a:rPr lang="en-US" sz="1250" dirty="0">
-                <a:solidFill>
-                  <a:srgbClr val="3D4556"/>
-                </a:solidFill>
-                <a:latin typeface="Arial" pitchFamily="34" charset="0"/>
-                <a:ea typeface="Arial" pitchFamily="34" charset="-122"/>
-                <a:cs typeface="Arial" pitchFamily="34" charset="-120"/>
-              </a:rPr>
-              <a:t>Un inventaire ciblé se crée en quelques minutes — une marque, un rayon, une liste d'articles — le jour même s'il le faut. Les équipes concernées sont invitées depuis l'outil.</a:t>
-            </a:r>
-            <a:endParaRPr lang="en-US" sz="1250" dirty="0"/>
-          </a:p>
-          <a:p>
-            <a:pPr indent="0" marL="0">
-              <a:lnSpc>
-                <a:spcPct val="118000"/>
-              </a:lnSpc>
-              <a:spcAft>
-                <a:spcPts val="1300"/>
-              </a:spcAft>
-              <a:buNone/>
-            </a:pPr>
-            <a:r>
-              <a:rPr lang="en-US" sz="1250" b="1" dirty="0">
-                <a:solidFill>
-                  <a:srgbClr val="0B0F19"/>
-                </a:solidFill>
-                <a:latin typeface="Arial" pitchFamily="34" charset="0"/>
-                <a:ea typeface="Arial" pitchFamily="34" charset="-122"/>
-                <a:cs typeface="Arial" pitchFamily="34" charset="-120"/>
-              </a:rPr>
-              <a:t>Le comptage. </a:t>
-            </a:r>
-            <a:pPr indent="0" marL="0">
-              <a:lnSpc>
-                <a:spcPct val="118000"/>
-              </a:lnSpc>
-              <a:spcAft>
-                <a:spcPts val="1300"/>
-              </a:spcAft>
-              <a:buNone/>
-            </a:pPr>
-            <a:r>
-              <a:rPr lang="en-US" sz="1250" dirty="0">
-                <a:solidFill>
-                  <a:srgbClr val="3D4556"/>
-                </a:solidFill>
-                <a:latin typeface="Arial" pitchFamily="34" charset="0"/>
-                <a:ea typeface="Arial" pitchFamily="34" charset="-122"/>
-                <a:cs typeface="Arial" pitchFamily="34" charset="-120"/>
-              </a:rPr>
-              <a:t>Les équipes de vente comptent avec le téléphone qu'elles ont en poche. Pas de matériel à sortir, pas de session à monter : c'est ce qui rend l'aléatoire réellement aléatoire.</a:t>
-            </a:r>
-            <a:endParaRPr lang="en-US" sz="1250" dirty="0"/>
-          </a:p>
-          <a:p>
-            <a:pPr indent="0" marL="0">
-              <a:lnSpc>
-                <a:spcPct val="118000"/>
-              </a:lnSpc>
-              <a:spcAft>
-                <a:spcPts val="1300"/>
-              </a:spcAft>
-              <a:buNone/>
-            </a:pPr>
-            <a:r>
-              <a:rPr lang="en-US" sz="1250" b="1" dirty="0">
-                <a:solidFill>
-                  <a:srgbClr val="0B0F19"/>
-                </a:solidFill>
-                <a:latin typeface="Arial" pitchFamily="34" charset="0"/>
-                <a:ea typeface="Arial" pitchFamily="34" charset="-122"/>
-                <a:cs typeface="Arial" pitchFamily="34" charset="-120"/>
-              </a:rPr>
-              <a:t>Le contrôle. </a:t>
-            </a:r>
-            <a:pPr indent="0" marL="0">
-              <a:lnSpc>
-                <a:spcPct val="118000"/>
-              </a:lnSpc>
-              <a:spcAft>
-                <a:spcPts val="1300"/>
-              </a:spcAft>
-              <a:buNone/>
-            </a:pPr>
-            <a:r>
-              <a:rPr lang="en-US" sz="1250" dirty="0">
-                <a:solidFill>
-                  <a:srgbClr val="3D4556"/>
-                </a:solidFill>
-                <a:latin typeface="Arial" pitchFamily="34" charset="0"/>
-                <a:ea typeface="Arial" pitchFamily="34" charset="-122"/>
-                <a:cs typeface="Arial" pitchFamily="34" charset="-120"/>
-              </a:rPr>
-              <a:t>L'écart se lit en direct. S'il dépasse votre seuil, l'Inventory Control reprend la main, et le rapport nourrit l'enquête.</a:t>
-            </a:r>
-            <a:endParaRPr lang="en-US" sz="1250" dirty="0"/>
-          </a:p>
-        </p:txBody>
-      </p:sp>
-      <p:sp>
-        <p:nvSpPr>
-          <p:cNvPr id="9" name="Text 6"/>
-          <p:cNvSpPr/>
-          <p:nvPr/>
-        </p:nvSpPr>
-        <p:spPr>
-          <a:xfrm>
-            <a:off x="731520" y="6400800"/>
-            <a:ext cx="6400800" cy="274320"/>
-          </a:xfrm>
-          <a:prstGeom prst="rect">
-            <a:avLst/>
-          </a:prstGeom>
-          <a:noFill/>
-          <a:ln/>
-        </p:spPr>
-        <p:txBody>
-          <a:bodyPr wrap="square" lIns="0" tIns="0" rIns="0" bIns="0" rtlCol="0" anchor="t"/>
-          <a:lstStyle/>
-          <a:p>
-            <a:pPr indent="0" marL="0">
-              <a:buNone/>
-            </a:pPr>
-            <a:r>
-              <a:rPr lang="en-US" sz="900" dirty="0">
-                <a:solidFill>
-                  <a:srgbClr val="5B6475"/>
-                </a:solidFill>
-                <a:latin typeface="Arial" pitchFamily="34" charset="0"/>
-                <a:ea typeface="Arial" pitchFamily="34" charset="-122"/>
-                <a:cs typeface="Arial" pitchFamily="34" charset="-120"/>
-              </a:rPr>
-              <a:t>Quantinvo · proposition pour La Samaritaine</a:t>
-            </a:r>
-            <a:endParaRPr lang="en-US" sz="900" dirty="0"/>
-          </a:p>
-        </p:txBody>
-      </p:sp>
-      <p:sp>
-        <p:nvSpPr>
-          <p:cNvPr id="10" name="Text 7"/>
-          <p:cNvSpPr/>
-          <p:nvPr/>
-        </p:nvSpPr>
-        <p:spPr>
-          <a:xfrm>
-            <a:off x="11000232" y="6400800"/>
-            <a:ext cx="457200" cy="274320"/>
-          </a:xfrm>
-          <a:prstGeom prst="rect">
-            <a:avLst/>
-          </a:prstGeom>
-          <a:noFill/>
-          <a:ln/>
-        </p:spPr>
-        <p:txBody>
-          <a:bodyPr wrap="square" lIns="0" tIns="0" rIns="0" bIns="0" rtlCol="0" anchor="t"/>
-          <a:lstStyle/>
-          <a:p>
-            <a:pPr algn="r" indent="0" marL="0">
-              <a:buNone/>
-            </a:pPr>
-            <a:r>
-              <a:rPr lang="en-US" sz="900" dirty="0">
-                <a:solidFill>
-                  <a:srgbClr val="5B6475"/>
-                </a:solidFill>
-                <a:latin typeface="Arial" pitchFamily="34" charset="0"/>
-                <a:ea typeface="Arial" pitchFamily="34" charset="-122"/>
-                <a:cs typeface="Arial" pitchFamily="34" charset="-120"/>
-              </a:rPr>
-              <a:t>11</a:t>
-            </a:r>
-            <a:endParaRPr lang="en-US" sz="900" dirty="0"/>
-          </a:p>
-        </p:txBody>
-      </p:sp>
-    </p:spTree>
-  </p:cSld>
-  <p:clrMapOvr>
-    <a:masterClrMapping/>
-  </p:clrMapOvr>
-</p:sld>
-</file>
-
-<file path=ppt/slides/slide12.xml><?xml version="1.0" encoding="utf-8"?>
-<p:sld xmlns:a="http://schemas.openxmlformats.org/drawingml/2006/main" xmlns:r="http://schemas.openxmlformats.org/officeDocument/2006/relationships" xmlns:p="http://schemas.openxmlformats.org/presentationml/2006/main">
-  <p:cSld name="Slide 12">
-    <p:bg>
-      <p:bgPr>
-        <a:solidFill>
-          <a:srgbClr val="FFFFFF"/>
-        </a:solidFill>
-      </p:bgPr>
-    </p:bg>
-    <p:spTree>
-      <p:nvGrpSpPr>
-        <p:cNvPr id="1" name=""/>
-        <p:cNvGrpSpPr/>
-        <p:nvPr/>
-      </p:nvGrpSpPr>
-      <p:grpSpPr>
-        <a:xfrm>
-          <a:off x="0" y="0"/>
-          <a:ext cx="0" cy="0"/>
-          <a:chOff x="0" y="0"/>
-          <a:chExt cx="0" cy="0"/>
-        </a:xfrm>
-      </p:grpSpPr>
-      <p:pic>
-        <p:nvPicPr>
-          <p:cNvPr id="2" name="Image 0" descr="preencoded.png">    </p:cNvPr>
-          <p:cNvPicPr>
-            <a:picLocks noChangeAspect="1"/>
-          </p:cNvPicPr>
-          <p:nvPr/>
-        </p:nvPicPr>
-        <p:blipFill>
-          <a:blip r:embed="rId1"/>
-          <a:stretch>
-            <a:fillRect/>
-          </a:stretch>
-        </p:blipFill>
-        <p:spPr>
-          <a:xfrm>
-            <a:off x="731520" y="384048"/>
-            <a:ext cx="329184" cy="329184"/>
-          </a:xfrm>
-          <a:prstGeom prst="rect">
-            <a:avLst/>
-          </a:prstGeom>
-        </p:spPr>
-      </p:pic>
-      <p:sp>
-        <p:nvSpPr>
-          <p:cNvPr id="3" name="Text 0"/>
-          <p:cNvSpPr/>
-          <p:nvPr/>
-        </p:nvSpPr>
-        <p:spPr>
-          <a:xfrm>
-            <a:off x="1170432" y="347472"/>
-            <a:ext cx="2743200" cy="402336"/>
-          </a:xfrm>
-          <a:prstGeom prst="rect">
-            <a:avLst/>
-          </a:prstGeom>
-          <a:noFill/>
-          <a:ln/>
-        </p:spPr>
-        <p:txBody>
-          <a:bodyPr wrap="square" lIns="0" tIns="0" rIns="0" bIns="0" rtlCol="0" anchor="ctr"/>
-          <a:lstStyle/>
-          <a:p>
-            <a:pPr indent="0" marL="0">
-              <a:buNone/>
-            </a:pPr>
-            <a:r>
-              <a:rPr lang="en-US" sz="1600" b="1" dirty="0">
-                <a:solidFill>
-                  <a:srgbClr val="0B0F19"/>
-                </a:solidFill>
-                <a:latin typeface="Arial" pitchFamily="34" charset="0"/>
-                <a:ea typeface="Arial" pitchFamily="34" charset="-122"/>
-                <a:cs typeface="Arial" pitchFamily="34" charset="-120"/>
-              </a:rPr>
-              <a:t>Quantinvo</a:t>
-            </a:r>
-            <a:endParaRPr lang="en-US" sz="1600" dirty="0"/>
-          </a:p>
-        </p:txBody>
-      </p:sp>
-      <p:sp>
-        <p:nvSpPr>
-          <p:cNvPr id="4" name="Text 1"/>
-          <p:cNvSpPr/>
-          <p:nvPr/>
-        </p:nvSpPr>
-        <p:spPr>
-          <a:xfrm>
-            <a:off x="5971032" y="347472"/>
-            <a:ext cx="5486400" cy="402336"/>
-          </a:xfrm>
-          <a:prstGeom prst="rect">
-            <a:avLst/>
-          </a:prstGeom>
-          <a:noFill/>
-          <a:ln/>
-        </p:spPr>
-        <p:txBody>
-          <a:bodyPr wrap="square" lIns="0" tIns="0" rIns="0" bIns="0" rtlCol="0" anchor="ctr"/>
-          <a:lstStyle/>
-          <a:p>
-            <a:pPr algn="r" indent="0" marL="0">
-              <a:buNone/>
-            </a:pPr>
-            <a:r>
-              <a:rPr lang="en-US" sz="1000" dirty="0">
-                <a:solidFill>
-                  <a:srgbClr val="5B6475"/>
-                </a:solidFill>
-                <a:latin typeface="Arial" pitchFamily="34" charset="0"/>
-                <a:ea typeface="Arial" pitchFamily="34" charset="-122"/>
-                <a:cs typeface="Arial" pitchFamily="34" charset="-120"/>
-              </a:rPr>
-              <a:t>Pourquoi pas Zebra</a:t>
-            </a:r>
-            <a:endParaRPr lang="en-US" sz="1000" dirty="0"/>
-          </a:p>
-        </p:txBody>
-      </p:sp>
-      <p:sp>
-        <p:nvSpPr>
-          <p:cNvPr id="5" name="Shape 2"/>
-          <p:cNvSpPr/>
-          <p:nvPr/>
-        </p:nvSpPr>
-        <p:spPr>
-          <a:xfrm>
-            <a:off x="731520" y="877824"/>
-            <a:ext cx="10725912" cy="25603"/>
-          </a:xfrm>
-          <a:prstGeom prst="rect">
-            <a:avLst/>
-          </a:prstGeom>
-          <a:solidFill>
-            <a:srgbClr val="38C9FF"/>
-          </a:solidFill>
-          <a:ln w="12700">
-            <a:solidFill>
-              <a:srgbClr val="38C9FF"/>
-            </a:solidFill>
-            <a:prstDash val="solid"/>
-          </a:ln>
-        </p:spPr>
-      </p:sp>
-      <p:sp>
-        <p:nvSpPr>
-          <p:cNvPr id="6" name="Text 3"/>
-          <p:cNvSpPr/>
-          <p:nvPr/>
-        </p:nvSpPr>
-        <p:spPr>
-          <a:xfrm>
-            <a:off x="731520" y="1280160"/>
-            <a:ext cx="10725912" cy="822960"/>
-          </a:xfrm>
-          <a:prstGeom prst="rect">
-            <a:avLst/>
-          </a:prstGeom>
-          <a:noFill/>
-          <a:ln/>
-        </p:spPr>
-        <p:txBody>
-          <a:bodyPr wrap="square" lIns="0" tIns="0" rIns="0" bIns="0" rtlCol="0" anchor="t"/>
-          <a:lstStyle/>
-          <a:p>
-            <a:pPr indent="0" marL="0">
-              <a:lnSpc>
-                <a:spcPct val="105000"/>
-              </a:lnSpc>
-              <a:buNone/>
-            </a:pPr>
-            <a:r>
-              <a:rPr lang="en-US" sz="2600" b="1" dirty="0">
-                <a:solidFill>
-                  <a:srgbClr val="4636B0"/>
-                </a:solidFill>
-                <a:latin typeface="Arial" pitchFamily="34" charset="0"/>
-                <a:ea typeface="Arial" pitchFamily="34" charset="-122"/>
-                <a:cs typeface="Arial" pitchFamily="34" charset="-120"/>
-              </a:rPr>
-              <a:t>Pourquoi Quantinvo, et pas Zebra ?</a:t>
-            </a:r>
-            <a:endParaRPr lang="en-US" sz="2600" dirty="0"/>
-          </a:p>
-        </p:txBody>
-      </p:sp>
-      <p:sp>
-        <p:nvSpPr>
-          <p:cNvPr id="7" name="Text 4"/>
-          <p:cNvSpPr/>
-          <p:nvPr/>
-        </p:nvSpPr>
-        <p:spPr>
-          <a:xfrm>
-            <a:off x="731520" y="2286000"/>
-            <a:ext cx="5088636" cy="2926080"/>
-          </a:xfrm>
-          <a:prstGeom prst="rect">
-            <a:avLst/>
-          </a:prstGeom>
-          <a:noFill/>
-          <a:ln/>
-        </p:spPr>
-        <p:txBody>
-          <a:bodyPr wrap="square" lIns="0" tIns="0" rIns="0" bIns="0" rtlCol="0" anchor="t"/>
-          <a:lstStyle/>
-          <a:p>
-            <a:pPr indent="0" marL="0">
-              <a:lnSpc>
-                <a:spcPct val="118000"/>
-              </a:lnSpc>
-              <a:spcAft>
-                <a:spcPts val="1200"/>
-              </a:spcAft>
-              <a:buNone/>
-            </a:pPr>
-            <a:r>
-              <a:rPr lang="en-US" sz="1250" b="1" dirty="0">
-                <a:solidFill>
-                  <a:srgbClr val="0B0F19"/>
-                </a:solidFill>
-                <a:latin typeface="Arial" pitchFamily="34" charset="0"/>
-                <a:ea typeface="Arial" pitchFamily="34" charset="-122"/>
-                <a:cs typeface="Arial" pitchFamily="34" charset="-120"/>
-              </a:rPr>
-              <a:t>Le matériel. </a:t>
-            </a:r>
-            <a:pPr indent="0" marL="0">
-              <a:lnSpc>
-                <a:spcPct val="118000"/>
-              </a:lnSpc>
-              <a:spcAft>
-                <a:spcPts val="1200"/>
-              </a:spcAft>
-              <a:buNone/>
-            </a:pPr>
-            <a:r>
-              <a:rPr lang="en-US" sz="1250" dirty="0">
-                <a:solidFill>
-                  <a:srgbClr val="3D4556"/>
-                </a:solidFill>
-                <a:latin typeface="Arial" pitchFamily="34" charset="0"/>
-                <a:ea typeface="Arial" pitchFamily="34" charset="-122"/>
-                <a:cs typeface="Arial" pitchFamily="34" charset="-120"/>
-              </a:rPr>
-              <a:t>SmartCount repose sur une flotte de terminaux dédiés : à charger, configurer, vérifier avant chaque session — un métier en soi, celui qu'on cherche justement à ne plus faire. Quantinvo tourne sur les iPhone que vos équipes ont déjà, et une douchette Bluetooth s'y branche pour les gros volumes.</a:t>
-            </a:r>
-            <a:endParaRPr lang="en-US" sz="1250" dirty="0"/>
-          </a:p>
-          <a:p>
-            <a:pPr indent="0" marL="0">
-              <a:lnSpc>
-                <a:spcPct val="118000"/>
-              </a:lnSpc>
-              <a:spcAft>
-                <a:spcPts val="1200"/>
-              </a:spcAft>
-              <a:buNone/>
-            </a:pPr>
-            <a:r>
-              <a:rPr lang="en-US" sz="1250" b="1" dirty="0">
-                <a:solidFill>
-                  <a:srgbClr val="0B0F19"/>
-                </a:solidFill>
-                <a:latin typeface="Arial" pitchFamily="34" charset="0"/>
-                <a:ea typeface="Arial" pitchFamily="34" charset="-122"/>
-                <a:cs typeface="Arial" pitchFamily="34" charset="-120"/>
-              </a:rPr>
-              <a:t>Le coût. </a:t>
-            </a:r>
-            <a:pPr indent="0" marL="0">
-              <a:lnSpc>
-                <a:spcPct val="118000"/>
-              </a:lnSpc>
-              <a:spcAft>
-                <a:spcPts val="1200"/>
-              </a:spcAft>
-              <a:buNone/>
-            </a:pPr>
-            <a:r>
-              <a:rPr lang="en-US" sz="1250" dirty="0">
-                <a:solidFill>
-                  <a:srgbClr val="3D4556"/>
-                </a:solidFill>
-                <a:latin typeface="Arial" pitchFamily="34" charset="0"/>
-                <a:ea typeface="Arial" pitchFamily="34" charset="-122"/>
-                <a:cs typeface="Arial" pitchFamily="34" charset="-120"/>
-              </a:rPr>
-              <a:t>Une licence par magasin, sans un euro de matériel : ni terminal à acheter, ni flotte à entretenir, ni remplacement à budgéter. Les inventaires sont illimités — compter chaque semaine coûte le même prix que compter une fois par an.</a:t>
-            </a:r>
-            <a:endParaRPr lang="en-US" sz="1250" dirty="0"/>
-          </a:p>
-        </p:txBody>
-      </p:sp>
-      <p:sp>
-        <p:nvSpPr>
-          <p:cNvPr id="8" name="Text 5"/>
-          <p:cNvSpPr/>
-          <p:nvPr/>
-        </p:nvSpPr>
-        <p:spPr>
-          <a:xfrm>
-            <a:off x="6368796" y="2286000"/>
-            <a:ext cx="5088636" cy="2926080"/>
-          </a:xfrm>
-          <a:prstGeom prst="rect">
-            <a:avLst/>
-          </a:prstGeom>
-          <a:noFill/>
-          <a:ln/>
-        </p:spPr>
-        <p:txBody>
-          <a:bodyPr wrap="square" lIns="0" tIns="0" rIns="0" bIns="0" rtlCol="0" anchor="t"/>
-          <a:lstStyle/>
-          <a:p>
-            <a:pPr indent="0" marL="0">
-              <a:lnSpc>
-                <a:spcPct val="118000"/>
-              </a:lnSpc>
-              <a:spcAft>
-                <a:spcPts val="1200"/>
-              </a:spcAft>
-              <a:buNone/>
-            </a:pPr>
-            <a:r>
-              <a:rPr lang="en-US" sz="1250" b="1" dirty="0">
-                <a:solidFill>
-                  <a:srgbClr val="0B0F19"/>
-                </a:solidFill>
-                <a:latin typeface="Arial" pitchFamily="34" charset="0"/>
-                <a:ea typeface="Arial" pitchFamily="34" charset="-122"/>
-                <a:cs typeface="Arial" pitchFamily="34" charset="-120"/>
-              </a:rPr>
-              <a:t>La réconciliation. </a:t>
-            </a:r>
-            <a:pPr indent="0" marL="0">
-              <a:lnSpc>
-                <a:spcPct val="118000"/>
-              </a:lnSpc>
-              <a:spcAft>
-                <a:spcPts val="1200"/>
-              </a:spcAft>
-              <a:buNone/>
-            </a:pPr>
-            <a:r>
-              <a:rPr lang="en-US" sz="1250" dirty="0">
-                <a:solidFill>
-                  <a:srgbClr val="3D4556"/>
-                </a:solidFill>
-                <a:latin typeface="Arial" pitchFamily="34" charset="0"/>
-                <a:ea typeface="Arial" pitchFamily="34" charset="-122"/>
-                <a:cs typeface="Arial" pitchFamily="34" charset="-120"/>
-              </a:rPr>
-              <a:t>SmartCount rend un rapport de variance, à consolider ensuite avec le stock théorique. Quantinvo rend ce croisement déjà fait : l'attendu, le compté, le non-compté, l'écart en valeur.</a:t>
-            </a:r>
-            <a:endParaRPr lang="en-US" sz="1250" dirty="0"/>
-          </a:p>
-          <a:p>
-            <a:pPr indent="0" marL="0">
-              <a:lnSpc>
-                <a:spcPct val="118000"/>
-              </a:lnSpc>
-              <a:spcAft>
-                <a:spcPts val="1200"/>
-              </a:spcAft>
-              <a:buNone/>
-            </a:pPr>
-            <a:r>
-              <a:rPr lang="en-US" sz="1250" b="1" dirty="0">
-                <a:solidFill>
-                  <a:srgbClr val="0B0F19"/>
-                </a:solidFill>
-                <a:latin typeface="Arial" pitchFamily="34" charset="0"/>
-                <a:ea typeface="Arial" pitchFamily="34" charset="-122"/>
-                <a:cs typeface="Arial" pitchFamily="34" charset="-120"/>
-              </a:rPr>
-              <a:t>La taille de l'éditeur. </a:t>
-            </a:r>
-            <a:pPr indent="0" marL="0">
-              <a:lnSpc>
-                <a:spcPct val="118000"/>
-              </a:lnSpc>
-              <a:spcAft>
-                <a:spcPts val="1200"/>
-              </a:spcAft>
-              <a:buNone/>
-            </a:pPr>
-            <a:r>
-              <a:rPr lang="en-US" sz="1250" dirty="0">
-                <a:solidFill>
-                  <a:srgbClr val="3D4556"/>
-                </a:solidFill>
-                <a:latin typeface="Arial" pitchFamily="34" charset="0"/>
-                <a:ea typeface="Arial" pitchFamily="34" charset="-122"/>
-                <a:cs typeface="Arial" pitchFamily="34" charset="-120"/>
-              </a:rPr>
-              <a:t>SmartCount est un module au catalogue d'un géant du matériel. Quantinvo ne fait qu'une chose — l'inventaire — et la personne qui l'a dessiné répond elle-même à vos questions.</a:t>
-            </a:r>
-            <a:endParaRPr lang="en-US" sz="1250" dirty="0"/>
-          </a:p>
-        </p:txBody>
-      </p:sp>
-      <p:sp>
-        <p:nvSpPr>
-          <p:cNvPr id="9" name="Shape 6"/>
-          <p:cNvSpPr/>
-          <p:nvPr/>
-        </p:nvSpPr>
-        <p:spPr>
-          <a:xfrm>
-            <a:off x="731520" y="5212080"/>
-            <a:ext cx="10725912" cy="1097280"/>
-          </a:xfrm>
-          <a:prstGeom prst="roundRect">
-            <a:avLst>
-              <a:gd name="adj" fmla="val 6667"/>
-            </a:avLst>
-          </a:prstGeom>
-          <a:solidFill>
-            <a:srgbClr val="F4F5F9"/>
-          </a:solidFill>
-          <a:ln w="12700">
-            <a:solidFill>
-              <a:srgbClr val="F4F5F9"/>
-            </a:solidFill>
-            <a:prstDash val="solid"/>
-          </a:ln>
-        </p:spPr>
-      </p:sp>
-      <p:sp>
-        <p:nvSpPr>
-          <p:cNvPr id="10" name="Text 7"/>
-          <p:cNvSpPr/>
-          <p:nvPr/>
-        </p:nvSpPr>
-        <p:spPr>
-          <a:xfrm>
-            <a:off x="1005840" y="5376672"/>
-            <a:ext cx="10177272" cy="228600"/>
-          </a:xfrm>
-          <a:prstGeom prst="rect">
-            <a:avLst/>
-          </a:prstGeom>
-          <a:noFill/>
-          <a:ln/>
-        </p:spPr>
-        <p:txBody>
-          <a:bodyPr wrap="square" lIns="0" tIns="0" rIns="0" bIns="0" rtlCol="0" anchor="t"/>
-          <a:lstStyle/>
-          <a:p>
-            <a:pPr indent="0" marL="0">
-              <a:buNone/>
-            </a:pPr>
-            <a:r>
-              <a:rPr lang="en-US" sz="950" b="1" dirty="0">
-                <a:solidFill>
-                  <a:srgbClr val="5B6475"/>
-                </a:solidFill>
-                <a:latin typeface="Arial" pitchFamily="34" charset="0"/>
-                <a:ea typeface="Arial" pitchFamily="34" charset="-122"/>
-                <a:cs typeface="Arial" pitchFamily="34" charset="-120"/>
-              </a:rPr>
-              <a:t>Pour être honnête</a:t>
-            </a:r>
-            <a:endParaRPr lang="en-US" sz="950" dirty="0"/>
-          </a:p>
-        </p:txBody>
-      </p:sp>
-      <p:sp>
-        <p:nvSpPr>
-          <p:cNvPr id="11" name="Text 8"/>
-          <p:cNvSpPr/>
-          <p:nvPr/>
-        </p:nvSpPr>
-        <p:spPr>
-          <a:xfrm>
-            <a:off x="1005840" y="5632704"/>
-            <a:ext cx="10177272" cy="548640"/>
-          </a:xfrm>
-          <a:prstGeom prst="rect">
-            <a:avLst/>
-          </a:prstGeom>
-          <a:noFill/>
-          <a:ln/>
-        </p:spPr>
-        <p:txBody>
-          <a:bodyPr wrap="square" lIns="0" tIns="0" rIns="0" bIns="0" rtlCol="0" anchor="t"/>
-          <a:lstStyle/>
-          <a:p>
-            <a:pPr indent="0" marL="0">
-              <a:lnSpc>
-                <a:spcPct val="115000"/>
-              </a:lnSpc>
-              <a:buNone/>
-            </a:pPr>
-            <a:r>
-              <a:rPr lang="en-US" sz="1150" i="1" dirty="0">
-                <a:solidFill>
-                  <a:srgbClr val="3D4556"/>
-                </a:solidFill>
-                <a:latin typeface="Arial" pitchFamily="34" charset="0"/>
-                <a:ea typeface="Arial" pitchFamily="34" charset="-122"/>
-                <a:cs typeface="Arial" pitchFamily="34" charset="-120"/>
-              </a:rPr>
-              <a:t>Un terminal durci encaisse mieux les chocs qu'un téléphone, et si votre flotte est déjà amortie, l'argument du matériel pèse moins. Les nôtres ne bougent pas : un outil que le floor prend en main sans briefing, des comptages illimités toute l'année, et une réconciliation qui n'existe plus.</a:t>
-            </a:r>
-            <a:endParaRPr lang="en-US" sz="1150" dirty="0"/>
-          </a:p>
-        </p:txBody>
-      </p:sp>
-      <p:sp>
-        <p:nvSpPr>
-          <p:cNvPr id="12" name="Text 9"/>
-          <p:cNvSpPr/>
-          <p:nvPr/>
-        </p:nvSpPr>
-        <p:spPr>
-          <a:xfrm>
-            <a:off x="731520" y="6400800"/>
-            <a:ext cx="6400800" cy="274320"/>
-          </a:xfrm>
-          <a:prstGeom prst="rect">
-            <a:avLst/>
-          </a:prstGeom>
-          <a:noFill/>
-          <a:ln/>
-        </p:spPr>
-        <p:txBody>
-          <a:bodyPr wrap="square" lIns="0" tIns="0" rIns="0" bIns="0" rtlCol="0" anchor="t"/>
-          <a:lstStyle/>
-          <a:p>
-            <a:pPr indent="0" marL="0">
-              <a:buNone/>
-            </a:pPr>
-            <a:r>
-              <a:rPr lang="en-US" sz="900" dirty="0">
-                <a:solidFill>
-                  <a:srgbClr val="5B6475"/>
-                </a:solidFill>
-                <a:latin typeface="Arial" pitchFamily="34" charset="0"/>
-                <a:ea typeface="Arial" pitchFamily="34" charset="-122"/>
-                <a:cs typeface="Arial" pitchFamily="34" charset="-120"/>
-              </a:rPr>
-              <a:t>Quantinvo · proposition pour La Samaritaine</a:t>
-            </a:r>
-            <a:endParaRPr lang="en-US" sz="900" dirty="0"/>
-          </a:p>
-        </p:txBody>
-      </p:sp>
-      <p:sp>
-        <p:nvSpPr>
-          <p:cNvPr id="13" name="Text 10"/>
-          <p:cNvSpPr/>
-          <p:nvPr/>
-        </p:nvSpPr>
-        <p:spPr>
-          <a:xfrm>
-            <a:off x="11000232" y="6400800"/>
-            <a:ext cx="457200" cy="274320"/>
-          </a:xfrm>
-          <a:prstGeom prst="rect">
-            <a:avLst/>
-          </a:prstGeom>
-          <a:noFill/>
-          <a:ln/>
-        </p:spPr>
-        <p:txBody>
-          <a:bodyPr wrap="square" lIns="0" tIns="0" rIns="0" bIns="0" rtlCol="0" anchor="t"/>
-          <a:lstStyle/>
-          <a:p>
-            <a:pPr algn="r" indent="0" marL="0">
-              <a:buNone/>
-            </a:pPr>
-            <a:r>
-              <a:rPr lang="en-US" sz="900" dirty="0">
-                <a:solidFill>
-                  <a:srgbClr val="5B6475"/>
-                </a:solidFill>
-                <a:latin typeface="Arial" pitchFamily="34" charset="0"/>
-                <a:ea typeface="Arial" pitchFamily="34" charset="-122"/>
-                <a:cs typeface="Arial" pitchFamily="34" charset="-120"/>
-              </a:rPr>
-              <a:t>12</a:t>
-            </a:r>
-            <a:endParaRPr lang="en-US" sz="900" dirty="0"/>
-          </a:p>
-        </p:txBody>
-      </p:sp>
-    </p:spTree>
-  </p:cSld>
-  <p:clrMapOvr>
-    <a:masterClrMapping/>
-  </p:clrMapOvr>
-</p:sld>
-</file>
-
-<file path=ppt/slides/slide13.xml><?xml version="1.0" encoding="utf-8"?>
-<p:sld xmlns:a="http://schemas.openxmlformats.org/drawingml/2006/main" xmlns:r="http://schemas.openxmlformats.org/officeDocument/2006/relationships" xmlns:p="http://schemas.openxmlformats.org/presentationml/2006/main">
-  <p:cSld name="Slide 13">
-    <p:bg>
-      <p:bgPr>
-        <a:solidFill>
-          <a:srgbClr val="FFFFFF"/>
-        </a:solidFill>
-      </p:bgPr>
-    </p:bg>
-    <p:spTree>
-      <p:nvGrpSpPr>
-        <p:cNvPr id="1" name=""/>
-        <p:cNvGrpSpPr/>
-        <p:nvPr/>
-      </p:nvGrpSpPr>
-      <p:grpSpPr>
-        <a:xfrm>
-          <a:off x="0" y="0"/>
-          <a:ext cx="0" cy="0"/>
-          <a:chOff x="0" y="0"/>
-          <a:chExt cx="0" cy="0"/>
-        </a:xfrm>
-      </p:grpSpPr>
-      <p:pic>
-        <p:nvPicPr>
-          <p:cNvPr id="2" name="Image 0" descr="preencoded.png">    </p:cNvPr>
-          <p:cNvPicPr>
-            <a:picLocks noChangeAspect="1"/>
-          </p:cNvPicPr>
-          <p:nvPr/>
-        </p:nvPicPr>
-        <p:blipFill>
-          <a:blip r:embed="rId1"/>
-          <a:stretch>
-            <a:fillRect/>
-          </a:stretch>
-        </p:blipFill>
-        <p:spPr>
-          <a:xfrm>
-            <a:off x="731520" y="384048"/>
-            <a:ext cx="329184" cy="329184"/>
-          </a:xfrm>
-          <a:prstGeom prst="rect">
-            <a:avLst/>
-          </a:prstGeom>
-        </p:spPr>
-      </p:pic>
-      <p:sp>
-        <p:nvSpPr>
-          <p:cNvPr id="3" name="Text 0"/>
-          <p:cNvSpPr/>
-          <p:nvPr/>
-        </p:nvSpPr>
-        <p:spPr>
-          <a:xfrm>
-            <a:off x="1170432" y="347472"/>
-            <a:ext cx="2743200" cy="402336"/>
-          </a:xfrm>
-          <a:prstGeom prst="rect">
-            <a:avLst/>
-          </a:prstGeom>
-          <a:noFill/>
-          <a:ln/>
-        </p:spPr>
-        <p:txBody>
-          <a:bodyPr wrap="square" lIns="0" tIns="0" rIns="0" bIns="0" rtlCol="0" anchor="ctr"/>
-          <a:lstStyle/>
-          <a:p>
-            <a:pPr indent="0" marL="0">
-              <a:buNone/>
-            </a:pPr>
-            <a:r>
-              <a:rPr lang="en-US" sz="1600" b="1" dirty="0">
-                <a:solidFill>
-                  <a:srgbClr val="0B0F19"/>
-                </a:solidFill>
-                <a:latin typeface="Arial" pitchFamily="34" charset="0"/>
-                <a:ea typeface="Arial" pitchFamily="34" charset="-122"/>
-                <a:cs typeface="Arial" pitchFamily="34" charset="-120"/>
-              </a:rPr>
-              <a:t>Quantinvo</a:t>
-            </a:r>
-            <a:endParaRPr lang="en-US" sz="1600" dirty="0"/>
-          </a:p>
-        </p:txBody>
-      </p:sp>
-      <p:sp>
-        <p:nvSpPr>
-          <p:cNvPr id="4" name="Text 1"/>
-          <p:cNvSpPr/>
-          <p:nvPr/>
-        </p:nvSpPr>
-        <p:spPr>
-          <a:xfrm>
-            <a:off x="5971032" y="347472"/>
-            <a:ext cx="5486400" cy="402336"/>
-          </a:xfrm>
-          <a:prstGeom prst="rect">
-            <a:avLst/>
-          </a:prstGeom>
-          <a:noFill/>
-          <a:ln/>
-        </p:spPr>
-        <p:txBody>
-          <a:bodyPr wrap="square" lIns="0" tIns="0" rIns="0" bIns="0" rtlCol="0" anchor="ctr"/>
-          <a:lstStyle/>
-          <a:p>
-            <a:pPr algn="r" indent="0" marL="0">
-              <a:buNone/>
-            </a:pPr>
-            <a:r>
-              <a:rPr lang="en-US" sz="1000" dirty="0">
-                <a:solidFill>
-                  <a:srgbClr val="5B6475"/>
-                </a:solidFill>
-                <a:latin typeface="Arial" pitchFamily="34" charset="0"/>
-                <a:ea typeface="Arial" pitchFamily="34" charset="-122"/>
-                <a:cs typeface="Arial" pitchFamily="34" charset="-120"/>
-              </a:rPr>
-              <a:t>Pour être clair</a:t>
-            </a:r>
-            <a:endParaRPr lang="en-US" sz="1000" dirty="0"/>
-          </a:p>
-        </p:txBody>
-      </p:sp>
-      <p:sp>
-        <p:nvSpPr>
-          <p:cNvPr id="5" name="Shape 2"/>
-          <p:cNvSpPr/>
-          <p:nvPr/>
-        </p:nvSpPr>
-        <p:spPr>
-          <a:xfrm>
-            <a:off x="731520" y="877824"/>
-            <a:ext cx="10725912" cy="25603"/>
-          </a:xfrm>
-          <a:prstGeom prst="rect">
-            <a:avLst/>
-          </a:prstGeom>
-          <a:solidFill>
-            <a:srgbClr val="38C9FF"/>
-          </a:solidFill>
-          <a:ln w="12700">
-            <a:solidFill>
-              <a:srgbClr val="38C9FF"/>
-            </a:solidFill>
-            <a:prstDash val="solid"/>
-          </a:ln>
-        </p:spPr>
-      </p:sp>
-      <p:sp>
-        <p:nvSpPr>
-          <p:cNvPr id="6" name="Text 3"/>
-          <p:cNvSpPr/>
-          <p:nvPr/>
-        </p:nvSpPr>
-        <p:spPr>
-          <a:xfrm>
-            <a:off x="731520" y="1325880"/>
-            <a:ext cx="4206240" cy="2011680"/>
-          </a:xfrm>
-          <a:prstGeom prst="rect">
-            <a:avLst/>
-          </a:prstGeom>
-          <a:noFill/>
-          <a:ln/>
-        </p:spPr>
-        <p:txBody>
-          <a:bodyPr wrap="square" lIns="0" tIns="0" rIns="0" bIns="0" rtlCol="0" anchor="t"/>
-          <a:lstStyle/>
-          <a:p>
-            <a:pPr indent="0" marL="0">
-              <a:lnSpc>
-                <a:spcPct val="105000"/>
-              </a:lnSpc>
-              <a:buNone/>
-            </a:pPr>
-            <a:r>
-              <a:rPr lang="en-US" sz="2600" b="1" dirty="0">
-                <a:solidFill>
-                  <a:srgbClr val="4636B0"/>
-                </a:solidFill>
-                <a:latin typeface="Arial" pitchFamily="34" charset="0"/>
-                <a:ea typeface="Arial" pitchFamily="34" charset="-122"/>
-                <a:cs typeface="Arial" pitchFamily="34" charset="-120"/>
-              </a:rPr>
-              <a:t>Ce qu'on ne vous promet pas.</a:t>
-            </a:r>
-            <a:endParaRPr lang="en-US" sz="2600" dirty="0"/>
-          </a:p>
-        </p:txBody>
-      </p:sp>
-      <p:sp>
-        <p:nvSpPr>
-          <p:cNvPr id="7" name="Text 4"/>
-          <p:cNvSpPr/>
-          <p:nvPr/>
-        </p:nvSpPr>
-        <p:spPr>
-          <a:xfrm>
-            <a:off x="731520" y="3383280"/>
-            <a:ext cx="4206240" cy="548640"/>
-          </a:xfrm>
-          <a:prstGeom prst="rect">
-            <a:avLst/>
-          </a:prstGeom>
-          <a:noFill/>
-          <a:ln/>
-        </p:spPr>
-        <p:txBody>
-          <a:bodyPr wrap="square" lIns="0" tIns="0" rIns="0" bIns="0" rtlCol="0" anchor="t"/>
-          <a:lstStyle/>
-          <a:p>
-            <a:pPr algn="l" indent="0" marL="0">
-              <a:lnSpc>
-                <a:spcPct val="118000"/>
-              </a:lnSpc>
-              <a:buNone/>
-            </a:pPr>
-            <a:r>
-              <a:rPr lang="en-US" sz="1250" i="1" dirty="0">
-                <a:solidFill>
-                  <a:srgbClr val="5B6475"/>
-                </a:solidFill>
-                <a:latin typeface="Arial" pitchFamily="34" charset="0"/>
-                <a:ea typeface="Arial" pitchFamily="34" charset="-122"/>
-                <a:cs typeface="Arial" pitchFamily="34" charset="-120"/>
-              </a:rPr>
-              <a:t>Autant le dire avant la démonstration qu’après.</a:t>
-            </a:r>
-            <a:endParaRPr lang="en-US" sz="1250" dirty="0"/>
-          </a:p>
-        </p:txBody>
-      </p:sp>
-      <p:sp>
-        <p:nvSpPr>
-          <p:cNvPr id="8" name="Text 5"/>
-          <p:cNvSpPr/>
-          <p:nvPr/>
-        </p:nvSpPr>
-        <p:spPr>
-          <a:xfrm>
-            <a:off x="5394960" y="1371600"/>
-            <a:ext cx="6062472" cy="4389120"/>
-          </a:xfrm>
-          <a:prstGeom prst="rect">
-            <a:avLst/>
-          </a:prstGeom>
-          <a:noFill/>
-          <a:ln/>
-        </p:spPr>
-        <p:txBody>
-          <a:bodyPr wrap="square" lIns="0" tIns="0" rIns="0" bIns="0" rtlCol="0" anchor="t"/>
-          <a:lstStyle/>
-          <a:p>
-            <a:pPr indent="0" marL="0">
-              <a:lnSpc>
-                <a:spcPct val="118000"/>
-              </a:lnSpc>
-              <a:spcAft>
-                <a:spcPts val="1400"/>
-              </a:spcAft>
-              <a:buNone/>
-            </a:pPr>
-            <a:r>
-              <a:rPr lang="en-US" sz="1400" b="1" dirty="0">
-                <a:solidFill>
-                  <a:srgbClr val="0B0F19"/>
-                </a:solidFill>
-                <a:latin typeface="Arial" pitchFamily="34" charset="0"/>
-                <a:ea typeface="Arial" pitchFamily="34" charset="-122"/>
-                <a:cs typeface="Arial" pitchFamily="34" charset="-120"/>
-              </a:rPr>
-              <a:t>L'inventaire fiscal certifié. </a:t>
-            </a:r>
-            <a:pPr indent="0" marL="0">
-              <a:lnSpc>
-                <a:spcPct val="118000"/>
-              </a:lnSpc>
-              <a:spcAft>
-                <a:spcPts val="1400"/>
-              </a:spcAft>
-              <a:buNone/>
-            </a:pPr>
-            <a:r>
-              <a:rPr lang="en-US" sz="1400" dirty="0">
-                <a:solidFill>
-                  <a:srgbClr val="3D4556"/>
-                </a:solidFill>
-                <a:latin typeface="Arial" pitchFamily="34" charset="0"/>
-                <a:ea typeface="Arial" pitchFamily="34" charset="-122"/>
-                <a:cs typeface="Arial" pitchFamily="34" charset="-120"/>
-              </a:rPr>
-              <a:t>Si votre commissaire aux comptes exige un comptage par un tiers, ce comptage reste. Quantinvo fait tout le reste de l'année, et il le prépare.</a:t>
-            </a:r>
-            <a:endParaRPr lang="en-US" sz="1400" dirty="0"/>
-          </a:p>
-          <a:p>
-            <a:pPr indent="0" marL="0">
-              <a:lnSpc>
-                <a:spcPct val="118000"/>
-              </a:lnSpc>
-              <a:spcAft>
-                <a:spcPts val="1400"/>
-              </a:spcAft>
-              <a:buNone/>
-            </a:pPr>
-            <a:r>
-              <a:rPr lang="en-US" sz="1400" b="1" dirty="0">
-                <a:solidFill>
-                  <a:srgbClr val="0B0F19"/>
-                </a:solidFill>
-                <a:latin typeface="Arial" pitchFamily="34" charset="0"/>
-                <a:ea typeface="Arial" pitchFamily="34" charset="-122"/>
-                <a:cs typeface="Arial" pitchFamily="34" charset="-120"/>
-              </a:rPr>
-              <a:t>Une connexion à votre ERP. </a:t>
-            </a:r>
-            <a:pPr indent="0" marL="0">
-              <a:lnSpc>
-                <a:spcPct val="118000"/>
-              </a:lnSpc>
-              <a:spcAft>
-                <a:spcPts val="1400"/>
-              </a:spcAft>
-              <a:buNone/>
-            </a:pPr>
-            <a:r>
-              <a:rPr lang="en-US" sz="1400" dirty="0">
-                <a:solidFill>
-                  <a:srgbClr val="3D4556"/>
-                </a:solidFill>
-                <a:latin typeface="Arial" pitchFamily="34" charset="0"/>
-                <a:ea typeface="Arial" pitchFamily="34" charset="-122"/>
-                <a:cs typeface="Arial" pitchFamily="34" charset="-120"/>
-              </a:rPr>
-              <a:t>Quantinvo importe vos fichiers et rend un Excel. L'ajustement du stock reste un geste dans votre système — c'est d'ailleurs le seul qui doive le rester.</a:t>
-            </a:r>
-            <a:endParaRPr lang="en-US" sz="1400" dirty="0"/>
-          </a:p>
-          <a:p>
-            <a:pPr indent="0" marL="0">
-              <a:lnSpc>
-                <a:spcPct val="118000"/>
-              </a:lnSpc>
-              <a:spcAft>
-                <a:spcPts val="1400"/>
-              </a:spcAft>
-              <a:buNone/>
-            </a:pPr>
-            <a:r>
-              <a:rPr lang="en-US" sz="1400" b="1" dirty="0">
-                <a:solidFill>
-                  <a:srgbClr val="0B0F19"/>
-                </a:solidFill>
-                <a:latin typeface="Arial" pitchFamily="34" charset="0"/>
-                <a:ea typeface="Arial" pitchFamily="34" charset="-122"/>
-                <a:cs typeface="Arial" pitchFamily="34" charset="-120"/>
-              </a:rPr>
-              <a:t>Android sur les boutiques. </a:t>
-            </a:r>
-            <a:pPr indent="0" marL="0">
-              <a:lnSpc>
-                <a:spcPct val="118000"/>
-              </a:lnSpc>
-              <a:spcAft>
-                <a:spcPts val="1400"/>
-              </a:spcAft>
-              <a:buNone/>
-            </a:pPr>
-            <a:r>
-              <a:rPr lang="en-US" sz="1400" dirty="0">
-                <a:solidFill>
-                  <a:srgbClr val="3D4556"/>
-                </a:solidFill>
-                <a:latin typeface="Arial" pitchFamily="34" charset="0"/>
-                <a:ea typeface="Arial" pitchFamily="34" charset="-122"/>
-                <a:cs typeface="Arial" pitchFamily="34" charset="-120"/>
-              </a:rPr>
-              <a:t>L'application tourne sur Android, et elle est disponible sur iPhone. La mise en ligne sur Google Play est en cours ; d'ici là, l'installation passe par votre catalogue d'entreprise.</a:t>
-            </a:r>
-            <a:endParaRPr lang="en-US" sz="1400" dirty="0"/>
-          </a:p>
-          <a:p>
-            <a:pPr indent="0" marL="0">
-              <a:lnSpc>
-                <a:spcPct val="118000"/>
-              </a:lnSpc>
-              <a:spcAft>
-                <a:spcPts val="1400"/>
-              </a:spcAft>
-              <a:buNone/>
-            </a:pPr>
-            <a:r>
-              <a:rPr lang="en-US" sz="1400" b="1" dirty="0">
-                <a:solidFill>
-                  <a:srgbClr val="0B0F19"/>
-                </a:solidFill>
-                <a:latin typeface="Arial" pitchFamily="34" charset="0"/>
-                <a:ea typeface="Arial" pitchFamily="34" charset="-122"/>
-                <a:cs typeface="Arial" pitchFamily="34" charset="-120"/>
-              </a:rPr>
-              <a:t>La connexion par votre annuaire. </a:t>
-            </a:r>
-            <a:pPr indent="0" marL="0">
-              <a:lnSpc>
-                <a:spcPct val="118000"/>
-              </a:lnSpc>
-              <a:spcAft>
-                <a:spcPts val="1400"/>
-              </a:spcAft>
-              <a:buNone/>
-            </a:pPr>
-            <a:r>
-              <a:rPr lang="en-US" sz="1400" dirty="0">
-                <a:solidFill>
-                  <a:srgbClr val="3D4556"/>
-                </a:solidFill>
-                <a:latin typeface="Arial" pitchFamily="34" charset="0"/>
-                <a:ea typeface="Arial" pitchFamily="34" charset="-122"/>
-                <a:cs typeface="Arial" pitchFamily="34" charset="-120"/>
-              </a:rPr>
-              <a:t>Les comptes sont nominatifs, créés par invitation. Pas de SAML ni d'Entra ID pour l'instant ; dites-nous si c'est une exigence.</a:t>
-            </a:r>
-            <a:endParaRPr lang="en-US" sz="1400" dirty="0"/>
-          </a:p>
-        </p:txBody>
-      </p:sp>
-      <p:sp>
-        <p:nvSpPr>
-          <p:cNvPr id="9" name="Text 6"/>
-          <p:cNvSpPr/>
-          <p:nvPr/>
-        </p:nvSpPr>
-        <p:spPr>
-          <a:xfrm>
-            <a:off x="731520" y="6400800"/>
-            <a:ext cx="6400800" cy="274320"/>
-          </a:xfrm>
-          <a:prstGeom prst="rect">
-            <a:avLst/>
-          </a:prstGeom>
-          <a:noFill/>
-          <a:ln/>
-        </p:spPr>
-        <p:txBody>
-          <a:bodyPr wrap="square" lIns="0" tIns="0" rIns="0" bIns="0" rtlCol="0" anchor="t"/>
-          <a:lstStyle/>
-          <a:p>
-            <a:pPr indent="0" marL="0">
-              <a:buNone/>
-            </a:pPr>
-            <a:r>
-              <a:rPr lang="en-US" sz="900" dirty="0">
-                <a:solidFill>
-                  <a:srgbClr val="5B6475"/>
-                </a:solidFill>
-                <a:latin typeface="Arial" pitchFamily="34" charset="0"/>
-                <a:ea typeface="Arial" pitchFamily="34" charset="-122"/>
-                <a:cs typeface="Arial" pitchFamily="34" charset="-120"/>
-              </a:rPr>
-              <a:t>Quantinvo · proposition pour La Samaritaine</a:t>
-            </a:r>
-            <a:endParaRPr lang="en-US" sz="900" dirty="0"/>
-          </a:p>
-        </p:txBody>
-      </p:sp>
-      <p:sp>
-        <p:nvSpPr>
-          <p:cNvPr id="10" name="Text 7"/>
-          <p:cNvSpPr/>
-          <p:nvPr/>
-        </p:nvSpPr>
-        <p:spPr>
-          <a:xfrm>
-            <a:off x="11000232" y="6400800"/>
-            <a:ext cx="457200" cy="274320"/>
-          </a:xfrm>
-          <a:prstGeom prst="rect">
-            <a:avLst/>
-          </a:prstGeom>
-          <a:noFill/>
-          <a:ln/>
-        </p:spPr>
-        <p:txBody>
-          <a:bodyPr wrap="square" lIns="0" tIns="0" rIns="0" bIns="0" rtlCol="0" anchor="t"/>
-          <a:lstStyle/>
-          <a:p>
-            <a:pPr algn="r" indent="0" marL="0">
-              <a:buNone/>
-            </a:pPr>
-            <a:r>
-              <a:rPr lang="en-US" sz="900" dirty="0">
-                <a:solidFill>
-                  <a:srgbClr val="5B6475"/>
-                </a:solidFill>
-                <a:latin typeface="Arial" pitchFamily="34" charset="0"/>
-                <a:ea typeface="Arial" pitchFamily="34" charset="-122"/>
-                <a:cs typeface="Arial" pitchFamily="34" charset="-120"/>
-              </a:rPr>
-              <a:t>13</a:t>
-            </a:r>
-            <a:endParaRPr lang="en-US" sz="900" dirty="0"/>
-          </a:p>
-        </p:txBody>
-      </p:sp>
-    </p:spTree>
-  </p:cSld>
-  <p:clrMapOvr>
-    <a:masterClrMapping/>
-  </p:clrMapOvr>
-</p:sld>
-</file>
-
-<file path=ppt/slides/slide14.xml><?xml version="1.0" encoding="utf-8"?>
-<p:sld xmlns:a="http://schemas.openxmlformats.org/drawingml/2006/main" xmlns:r="http://schemas.openxmlformats.org/officeDocument/2006/relationships" xmlns:p="http://schemas.openxmlformats.org/presentationml/2006/main">
-  <p:cSld name="Slide 14">
-    <p:bg>
-      <p:bgPr>
-        <a:solidFill>
-          <a:srgbClr val="FFFFFF"/>
-        </a:solidFill>
-      </p:bgPr>
-    </p:bg>
-    <p:spTree>
-      <p:nvGrpSpPr>
-        <p:cNvPr id="1" name=""/>
-        <p:cNvGrpSpPr/>
-        <p:nvPr/>
-      </p:nvGrpSpPr>
-      <p:grpSpPr>
-        <a:xfrm>
-          <a:off x="0" y="0"/>
-          <a:ext cx="0" cy="0"/>
-          <a:chOff x="0" y="0"/>
-          <a:chExt cx="0" cy="0"/>
-        </a:xfrm>
-      </p:grpSpPr>
-      <p:pic>
-        <p:nvPicPr>
-          <p:cNvPr id="2" name="Image 0" descr="preencoded.png">    </p:cNvPr>
-          <p:cNvPicPr>
-            <a:picLocks noChangeAspect="1"/>
-          </p:cNvPicPr>
-          <p:nvPr/>
-        </p:nvPicPr>
-        <p:blipFill>
-          <a:blip r:embed="rId1"/>
-          <a:stretch>
-            <a:fillRect/>
-          </a:stretch>
-        </p:blipFill>
-        <p:spPr>
-          <a:xfrm>
-            <a:off x="731520" y="384048"/>
-            <a:ext cx="329184" cy="329184"/>
-          </a:xfrm>
-          <a:prstGeom prst="rect">
-            <a:avLst/>
-          </a:prstGeom>
-        </p:spPr>
-      </p:pic>
-      <p:sp>
-        <p:nvSpPr>
-          <p:cNvPr id="3" name="Text 0"/>
-          <p:cNvSpPr/>
-          <p:nvPr/>
-        </p:nvSpPr>
-        <p:spPr>
-          <a:xfrm>
-            <a:off x="1170432" y="347472"/>
-            <a:ext cx="2743200" cy="402336"/>
-          </a:xfrm>
-          <a:prstGeom prst="rect">
-            <a:avLst/>
-          </a:prstGeom>
-          <a:noFill/>
-          <a:ln/>
-        </p:spPr>
-        <p:txBody>
-          <a:bodyPr wrap="square" lIns="0" tIns="0" rIns="0" bIns="0" rtlCol="0" anchor="ctr"/>
-          <a:lstStyle/>
-          <a:p>
-            <a:pPr indent="0" marL="0">
-              <a:buNone/>
-            </a:pPr>
-            <a:r>
-              <a:rPr lang="en-US" sz="1600" b="1" dirty="0">
-                <a:solidFill>
-                  <a:srgbClr val="0B0F19"/>
-                </a:solidFill>
-                <a:latin typeface="Arial" pitchFamily="34" charset="0"/>
-                <a:ea typeface="Arial" pitchFamily="34" charset="-122"/>
-                <a:cs typeface="Arial" pitchFamily="34" charset="-120"/>
-              </a:rPr>
-              <a:t>Quantinvo</a:t>
-            </a:r>
-            <a:endParaRPr lang="en-US" sz="1600" dirty="0"/>
-          </a:p>
-        </p:txBody>
-      </p:sp>
-      <p:sp>
-        <p:nvSpPr>
-          <p:cNvPr id="4" name="Text 1"/>
-          <p:cNvSpPr/>
-          <p:nvPr/>
-        </p:nvSpPr>
-        <p:spPr>
-          <a:xfrm>
-            <a:off x="5971032" y="347472"/>
-            <a:ext cx="5486400" cy="402336"/>
-          </a:xfrm>
-          <a:prstGeom prst="rect">
-            <a:avLst/>
-          </a:prstGeom>
-          <a:noFill/>
-          <a:ln/>
-        </p:spPr>
-        <p:txBody>
-          <a:bodyPr wrap="square" lIns="0" tIns="0" rIns="0" bIns="0" rtlCol="0" anchor="ctr"/>
-          <a:lstStyle/>
-          <a:p>
-            <a:pPr algn="r" indent="0" marL="0">
-              <a:buNone/>
-            </a:pPr>
-            <a:r>
-              <a:rPr lang="en-US" sz="1000" dirty="0">
-                <a:solidFill>
-                  <a:srgbClr val="5B6475"/>
-                </a:solidFill>
-                <a:latin typeface="Arial" pitchFamily="34" charset="0"/>
-                <a:ea typeface="Arial" pitchFamily="34" charset="-122"/>
-                <a:cs typeface="Arial" pitchFamily="34" charset="-120"/>
-              </a:rPr>
-              <a:t>L'offre</a:t>
-            </a:r>
-            <a:endParaRPr lang="en-US" sz="1000" dirty="0"/>
-          </a:p>
-        </p:txBody>
-      </p:sp>
-      <p:sp>
-        <p:nvSpPr>
-          <p:cNvPr id="5" name="Shape 2"/>
-          <p:cNvSpPr/>
-          <p:nvPr/>
-        </p:nvSpPr>
-        <p:spPr>
-          <a:xfrm>
-            <a:off x="731520" y="877824"/>
-            <a:ext cx="10725912" cy="25603"/>
-          </a:xfrm>
-          <a:prstGeom prst="rect">
-            <a:avLst/>
-          </a:prstGeom>
-          <a:solidFill>
-            <a:srgbClr val="38C9FF"/>
-          </a:solidFill>
-          <a:ln w="12700">
-            <a:solidFill>
-              <a:srgbClr val="38C9FF"/>
-            </a:solidFill>
-            <a:prstDash val="solid"/>
-          </a:ln>
-        </p:spPr>
-      </p:sp>
-      <p:sp>
-        <p:nvSpPr>
-          <p:cNvPr id="6" name="Text 3"/>
-          <p:cNvSpPr/>
-          <p:nvPr/>
-        </p:nvSpPr>
-        <p:spPr>
-          <a:xfrm>
-            <a:off x="731520" y="1188720"/>
-            <a:ext cx="10725912" cy="822960"/>
-          </a:xfrm>
-          <a:prstGeom prst="rect">
-            <a:avLst/>
-          </a:prstGeom>
-          <a:noFill/>
-          <a:ln/>
-        </p:spPr>
-        <p:txBody>
-          <a:bodyPr wrap="square" lIns="0" tIns="0" rIns="0" bIns="0" rtlCol="0" anchor="t"/>
-          <a:lstStyle/>
-          <a:p>
-            <a:pPr indent="0" marL="0">
-              <a:lnSpc>
-                <a:spcPct val="105000"/>
-              </a:lnSpc>
-              <a:buNone/>
-            </a:pPr>
-            <a:r>
-              <a:rPr lang="en-US" sz="2600" b="1" dirty="0">
-                <a:solidFill>
-                  <a:srgbClr val="4636B0"/>
-                </a:solidFill>
-                <a:latin typeface="Arial" pitchFamily="34" charset="0"/>
-                <a:ea typeface="Arial" pitchFamily="34" charset="-122"/>
-                <a:cs typeface="Arial" pitchFamily="34" charset="-120"/>
-              </a:rPr>
-              <a:t>Une licence par magasin, inventaires illimités</a:t>
-            </a:r>
-            <a:endParaRPr lang="en-US" sz="2600" dirty="0"/>
-          </a:p>
-        </p:txBody>
-      </p:sp>
-      <p:sp>
-        <p:nvSpPr>
-          <p:cNvPr id="7" name="Text 4"/>
-          <p:cNvSpPr/>
-          <p:nvPr/>
-        </p:nvSpPr>
-        <p:spPr>
-          <a:xfrm>
-            <a:off x="731520" y="1783080"/>
-            <a:ext cx="10725912" cy="457200"/>
-          </a:xfrm>
-          <a:prstGeom prst="rect">
-            <a:avLst/>
-          </a:prstGeom>
-          <a:noFill/>
-          <a:ln/>
-        </p:spPr>
-        <p:txBody>
-          <a:bodyPr wrap="square" lIns="0" tIns="0" rIns="0" bIns="0" rtlCol="0" anchor="t"/>
-          <a:lstStyle/>
-          <a:p>
-            <a:pPr algn="l" indent="0" marL="0">
-              <a:lnSpc>
-                <a:spcPct val="118000"/>
-              </a:lnSpc>
-              <a:buNone/>
-            </a:pPr>
-            <a:r>
-              <a:rPr lang="en-US" sz="1150" dirty="0">
-                <a:solidFill>
-                  <a:srgbClr val="5B6475"/>
-                </a:solidFill>
-                <a:latin typeface="Arial" pitchFamily="34" charset="0"/>
-                <a:ea typeface="Arial" pitchFamily="34" charset="-122"/>
-                <a:cs typeface="Arial" pitchFamily="34" charset="-120"/>
-              </a:rPr>
-              <a:t>Le prix suit le nombre d'appareils qui comptent en même temps dans le magasin — la seule chose que vous puissiez vérifier vous-même. Ni le volume de votre stock, ni le nombre de comptes, ni le nombre d'inventaires dans l'année.</a:t>
-            </a:r>
-            <a:endParaRPr lang="en-US" sz="1150" dirty="0"/>
-          </a:p>
-        </p:txBody>
-      </p:sp>
-      <p:sp>
-        <p:nvSpPr>
-          <p:cNvPr id="8" name="Shape 5"/>
-          <p:cNvSpPr/>
-          <p:nvPr/>
-        </p:nvSpPr>
-        <p:spPr>
-          <a:xfrm>
-            <a:off x="731520" y="2331720"/>
-            <a:ext cx="3404616" cy="2743200"/>
-          </a:xfrm>
-          <a:prstGeom prst="roundRect">
-            <a:avLst>
-              <a:gd name="adj" fmla="val 4000"/>
-            </a:avLst>
-          </a:prstGeom>
-          <a:solidFill>
-            <a:srgbClr val="FFFFFF"/>
-          </a:solidFill>
-          <a:ln w="12700">
-            <a:solidFill>
-              <a:srgbClr val="E3E6EE"/>
-            </a:solidFill>
-            <a:prstDash val="solid"/>
-          </a:ln>
-        </p:spPr>
-      </p:sp>
-      <p:sp>
-        <p:nvSpPr>
-          <p:cNvPr id="9" name="Text 6"/>
-          <p:cNvSpPr/>
-          <p:nvPr/>
-        </p:nvSpPr>
-        <p:spPr>
-          <a:xfrm>
-            <a:off x="987552" y="2825496"/>
-            <a:ext cx="2892552" cy="347472"/>
-          </a:xfrm>
-          <a:prstGeom prst="rect">
-            <a:avLst/>
-          </a:prstGeom>
-          <a:noFill/>
-          <a:ln/>
-        </p:spPr>
-        <p:txBody>
-          <a:bodyPr wrap="square" lIns="0" tIns="0" rIns="0" bIns="0" rtlCol="0" anchor="t"/>
-          <a:lstStyle/>
-          <a:p>
-            <a:pPr indent="0" marL="0">
-              <a:buNone/>
-            </a:pPr>
-            <a:r>
-              <a:rPr lang="en-US" sz="1800" b="1" dirty="0">
-                <a:solidFill>
-                  <a:srgbClr val="0B0F19"/>
-                </a:solidFill>
-                <a:latin typeface="Arial" pitchFamily="34" charset="0"/>
-                <a:ea typeface="Arial" pitchFamily="34" charset="-122"/>
-                <a:cs typeface="Arial" pitchFamily="34" charset="-120"/>
-              </a:rPr>
-              <a:t>Essential</a:t>
-            </a:r>
-            <a:endParaRPr lang="en-US" sz="1800" dirty="0"/>
-          </a:p>
-        </p:txBody>
-      </p:sp>
-      <p:sp>
-        <p:nvSpPr>
-          <p:cNvPr id="10" name="Text 7"/>
-          <p:cNvSpPr/>
-          <p:nvPr/>
-        </p:nvSpPr>
-        <p:spPr>
-          <a:xfrm>
-            <a:off x="987552" y="3227832"/>
-            <a:ext cx="2892552" cy="256032"/>
-          </a:xfrm>
-          <a:prstGeom prst="rect">
-            <a:avLst/>
-          </a:prstGeom>
-          <a:noFill/>
-          <a:ln/>
-        </p:spPr>
-        <p:txBody>
-          <a:bodyPr wrap="square" lIns="0" tIns="0" rIns="0" bIns="0" rtlCol="0" anchor="t"/>
-          <a:lstStyle/>
-          <a:p>
-            <a:pPr indent="0" marL="0">
-              <a:buNone/>
-            </a:pPr>
-            <a:r>
-              <a:rPr lang="en-US" sz="1100" b="1" dirty="0">
-                <a:solidFill>
-                  <a:srgbClr val="6366F1"/>
-                </a:solidFill>
-                <a:latin typeface="Arial" pitchFamily="34" charset="0"/>
-                <a:ea typeface="Arial" pitchFamily="34" charset="-122"/>
-                <a:cs typeface="Arial" pitchFamily="34" charset="-120"/>
-              </a:rPr>
-              <a:t>2 appareils</a:t>
-            </a:r>
-            <a:endParaRPr lang="en-US" sz="1100" dirty="0"/>
-          </a:p>
-        </p:txBody>
-      </p:sp>
-      <p:sp>
-        <p:nvSpPr>
-          <p:cNvPr id="11" name="Text 8"/>
-          <p:cNvSpPr/>
-          <p:nvPr/>
-        </p:nvSpPr>
-        <p:spPr>
-          <a:xfrm>
-            <a:off x="987552" y="3538728"/>
-            <a:ext cx="2892552" cy="457200"/>
-          </a:xfrm>
-          <a:prstGeom prst="rect">
-            <a:avLst/>
-          </a:prstGeom>
-          <a:noFill/>
-          <a:ln/>
-        </p:spPr>
-        <p:txBody>
-          <a:bodyPr wrap="square" lIns="0" tIns="0" rIns="0" bIns="0" rtlCol="0" anchor="t"/>
-          <a:lstStyle/>
-          <a:p>
-            <a:pPr indent="0" marL="0">
-              <a:lnSpc>
-                <a:spcPct val="112000"/>
-              </a:lnSpc>
-              <a:buNone/>
-            </a:pPr>
-            <a:r>
-              <a:rPr lang="en-US" sz="1000" dirty="0">
-                <a:solidFill>
-                  <a:srgbClr val="5B6475"/>
-                </a:solidFill>
-                <a:latin typeface="Arial" pitchFamily="34" charset="0"/>
-                <a:ea typeface="Arial" pitchFamily="34" charset="-122"/>
-                <a:cs typeface="Arial" pitchFamily="34" charset="-120"/>
-              </a:rPr>
-              <a:t>Vous comptez seul ou à deux, dans un magasin.</a:t>
-            </a:r>
-            <a:endParaRPr lang="en-US" sz="1000" dirty="0"/>
-          </a:p>
-        </p:txBody>
-      </p:sp>
-      <p:sp>
-        <p:nvSpPr>
-          <p:cNvPr id="12" name="Text 9"/>
-          <p:cNvSpPr/>
-          <p:nvPr/>
-        </p:nvSpPr>
-        <p:spPr>
-          <a:xfrm>
-            <a:off x="987552" y="4050792"/>
-            <a:ext cx="2892552" cy="457200"/>
-          </a:xfrm>
-          <a:prstGeom prst="rect">
-            <a:avLst/>
-          </a:prstGeom>
-          <a:noFill/>
-          <a:ln/>
-        </p:spPr>
-        <p:txBody>
-          <a:bodyPr wrap="square" lIns="0" tIns="0" rIns="0" bIns="0" rtlCol="0" anchor="b"/>
-          <a:lstStyle/>
-          <a:p>
-            <a:pPr indent="0" marL="0">
-              <a:buNone/>
-            </a:pPr>
-            <a:r>
-              <a:rPr lang="en-US" sz="2600" b="1" dirty="0">
-                <a:solidFill>
-                  <a:srgbClr val="4636B0"/>
-                </a:solidFill>
-                <a:latin typeface="Arial" pitchFamily="34" charset="0"/>
-                <a:ea typeface="Arial" pitchFamily="34" charset="-122"/>
-                <a:cs typeface="Arial" pitchFamily="34" charset="-120"/>
-              </a:rPr>
-              <a:t>65 €</a:t>
-            </a:r>
-            <a:pPr indent="0" marL="0">
-              <a:buNone/>
-            </a:pPr>
-            <a:r>
-              <a:rPr lang="en-US" sz="1050" dirty="0">
-                <a:solidFill>
-                  <a:srgbClr val="5B6475"/>
-                </a:solidFill>
-                <a:latin typeface="Arial" pitchFamily="34" charset="0"/>
-                <a:ea typeface="Arial" pitchFamily="34" charset="-122"/>
-                <a:cs typeface="Arial" pitchFamily="34" charset="-120"/>
-              </a:rPr>
-              <a:t>  HT / mois</a:t>
-            </a:r>
-            <a:endParaRPr lang="en-US" sz="2600" dirty="0"/>
-          </a:p>
-        </p:txBody>
-      </p:sp>
-      <p:sp>
-        <p:nvSpPr>
-          <p:cNvPr id="13" name="Text 10"/>
-          <p:cNvSpPr/>
-          <p:nvPr/>
-        </p:nvSpPr>
-        <p:spPr>
-          <a:xfrm>
-            <a:off x="987552" y="4507992"/>
-            <a:ext cx="2892552" cy="274320"/>
-          </a:xfrm>
-          <a:prstGeom prst="rect">
-            <a:avLst/>
-          </a:prstGeom>
-          <a:noFill/>
-          <a:ln/>
-        </p:spPr>
-        <p:txBody>
-          <a:bodyPr wrap="square" lIns="0" tIns="0" rIns="0" bIns="0" rtlCol="0" anchor="t"/>
-          <a:lstStyle/>
-          <a:p>
-            <a:pPr indent="0" marL="0">
-              <a:buNone/>
-            </a:pPr>
-            <a:r>
-              <a:rPr lang="en-US" sz="950" dirty="0">
-                <a:solidFill>
-                  <a:srgbClr val="1F7A5C"/>
-                </a:solidFill>
-                <a:latin typeface="Arial" pitchFamily="34" charset="0"/>
-                <a:ea typeface="Arial" pitchFamily="34" charset="-122"/>
-                <a:cs typeface="Arial" pitchFamily="34" charset="-120"/>
-              </a:rPr>
-              <a:t>ou 690 € à l’année — 90 € de moins</a:t>
-            </a:r>
-            <a:endParaRPr lang="en-US" sz="950" dirty="0"/>
-          </a:p>
-        </p:txBody>
-      </p:sp>
-      <p:sp>
-        <p:nvSpPr>
-          <p:cNvPr id="14" name="Shape 11"/>
-          <p:cNvSpPr/>
-          <p:nvPr/>
-        </p:nvSpPr>
-        <p:spPr>
-          <a:xfrm>
-            <a:off x="4392168" y="2331720"/>
-            <a:ext cx="3404616" cy="2743200"/>
-          </a:xfrm>
-          <a:prstGeom prst="roundRect">
-            <a:avLst>
-              <a:gd name="adj" fmla="val 4000"/>
-            </a:avLst>
-          </a:prstGeom>
-          <a:solidFill>
-            <a:srgbClr val="EEEEFC"/>
-          </a:solidFill>
-          <a:ln w="19050">
-            <a:solidFill>
-              <a:srgbClr val="6366F1"/>
-            </a:solidFill>
-            <a:prstDash val="solid"/>
-          </a:ln>
-        </p:spPr>
-      </p:sp>
-      <p:sp>
-        <p:nvSpPr>
-          <p:cNvPr id="15" name="Text 12"/>
-          <p:cNvSpPr/>
-          <p:nvPr/>
-        </p:nvSpPr>
-        <p:spPr>
-          <a:xfrm>
-            <a:off x="4648200" y="2532888"/>
-            <a:ext cx="2892552" cy="219456"/>
-          </a:xfrm>
-          <a:prstGeom prst="rect">
-            <a:avLst/>
-          </a:prstGeom>
-          <a:noFill/>
-          <a:ln/>
-        </p:spPr>
-        <p:txBody>
-          <a:bodyPr wrap="square" lIns="0" tIns="0" rIns="0" bIns="0" rtlCol="0" anchor="t"/>
-          <a:lstStyle/>
-          <a:p>
-            <a:pPr indent="0" marL="0">
-              <a:buNone/>
-            </a:pPr>
-            <a:r>
-              <a:rPr lang="en-US" sz="800" b="1" spc="60" kern="0" dirty="0">
-                <a:solidFill>
-                  <a:srgbClr val="6366F1"/>
-                </a:solidFill>
-                <a:latin typeface="Arial" pitchFamily="34" charset="0"/>
-                <a:ea typeface="Arial" pitchFamily="34" charset="-122"/>
-                <a:cs typeface="Arial" pitchFamily="34" charset="-120"/>
-              </a:rPr>
-              <a:t>LE PLUS COURANT</a:t>
-            </a:r>
-            <a:endParaRPr lang="en-US" sz="800" dirty="0"/>
-          </a:p>
-        </p:txBody>
-      </p:sp>
-      <p:sp>
-        <p:nvSpPr>
-          <p:cNvPr id="16" name="Text 13"/>
-          <p:cNvSpPr/>
-          <p:nvPr/>
-        </p:nvSpPr>
-        <p:spPr>
-          <a:xfrm>
-            <a:off x="4648200" y="2825496"/>
-            <a:ext cx="2892552" cy="347472"/>
-          </a:xfrm>
-          <a:prstGeom prst="rect">
-            <a:avLst/>
-          </a:prstGeom>
-          <a:noFill/>
-          <a:ln/>
-        </p:spPr>
-        <p:txBody>
-          <a:bodyPr wrap="square" lIns="0" tIns="0" rIns="0" bIns="0" rtlCol="0" anchor="t"/>
-          <a:lstStyle/>
-          <a:p>
-            <a:pPr indent="0" marL="0">
-              <a:buNone/>
-            </a:pPr>
-            <a:r>
-              <a:rPr lang="en-US" sz="1800" b="1" dirty="0">
-                <a:solidFill>
-                  <a:srgbClr val="0B0F19"/>
-                </a:solidFill>
-                <a:latin typeface="Arial" pitchFamily="34" charset="0"/>
-                <a:ea typeface="Arial" pitchFamily="34" charset="-122"/>
-                <a:cs typeface="Arial" pitchFamily="34" charset="-120"/>
-              </a:rPr>
-              <a:t>Advanced</a:t>
-            </a:r>
-            <a:endParaRPr lang="en-US" sz="1800" dirty="0"/>
-          </a:p>
-        </p:txBody>
-      </p:sp>
-      <p:sp>
-        <p:nvSpPr>
-          <p:cNvPr id="17" name="Text 14"/>
-          <p:cNvSpPr/>
-          <p:nvPr/>
-        </p:nvSpPr>
-        <p:spPr>
-          <a:xfrm>
-            <a:off x="4648200" y="3227832"/>
-            <a:ext cx="2892552" cy="256032"/>
-          </a:xfrm>
-          <a:prstGeom prst="rect">
-            <a:avLst/>
-          </a:prstGeom>
-          <a:noFill/>
-          <a:ln/>
-        </p:spPr>
-        <p:txBody>
-          <a:bodyPr wrap="square" lIns="0" tIns="0" rIns="0" bIns="0" rtlCol="0" anchor="t"/>
-          <a:lstStyle/>
-          <a:p>
-            <a:pPr indent="0" marL="0">
-              <a:buNone/>
-            </a:pPr>
-            <a:r>
-              <a:rPr lang="en-US" sz="1100" b="1" dirty="0">
-                <a:solidFill>
-                  <a:srgbClr val="6366F1"/>
-                </a:solidFill>
-                <a:latin typeface="Arial" pitchFamily="34" charset="0"/>
-                <a:ea typeface="Arial" pitchFamily="34" charset="-122"/>
-                <a:cs typeface="Arial" pitchFamily="34" charset="-120"/>
-              </a:rPr>
-              <a:t>3 à 20 appareils</a:t>
-            </a:r>
-            <a:endParaRPr lang="en-US" sz="1100" dirty="0"/>
-          </a:p>
-        </p:txBody>
-      </p:sp>
-      <p:sp>
-        <p:nvSpPr>
-          <p:cNvPr id="18" name="Text 15"/>
-          <p:cNvSpPr/>
-          <p:nvPr/>
-        </p:nvSpPr>
-        <p:spPr>
-          <a:xfrm>
-            <a:off x="4648200" y="3538728"/>
-            <a:ext cx="2892552" cy="457200"/>
-          </a:xfrm>
-          <a:prstGeom prst="rect">
-            <a:avLst/>
-          </a:prstGeom>
-          <a:noFill/>
-          <a:ln/>
-        </p:spPr>
-        <p:txBody>
-          <a:bodyPr wrap="square" lIns="0" tIns="0" rIns="0" bIns="0" rtlCol="0" anchor="t"/>
-          <a:lstStyle/>
-          <a:p>
-            <a:pPr indent="0" marL="0">
-              <a:lnSpc>
-                <a:spcPct val="112000"/>
-              </a:lnSpc>
-              <a:buNone/>
-            </a:pPr>
-            <a:r>
-              <a:rPr lang="en-US" sz="1000" dirty="0">
-                <a:solidFill>
-                  <a:srgbClr val="5B6475"/>
-                </a:solidFill>
-                <a:latin typeface="Arial" pitchFamily="34" charset="0"/>
-                <a:ea typeface="Arial" pitchFamily="34" charset="-122"/>
-                <a:cs typeface="Arial" pitchFamily="34" charset="-120"/>
-              </a:rPr>
-              <a:t>Vous montez une équipe le jour de l’inventaire.</a:t>
-            </a:r>
-            <a:endParaRPr lang="en-US" sz="1000" dirty="0"/>
-          </a:p>
-        </p:txBody>
-      </p:sp>
-      <p:sp>
-        <p:nvSpPr>
-          <p:cNvPr id="19" name="Text 16"/>
-          <p:cNvSpPr/>
-          <p:nvPr/>
-        </p:nvSpPr>
-        <p:spPr>
-          <a:xfrm>
-            <a:off x="4648200" y="4050792"/>
-            <a:ext cx="2892552" cy="457200"/>
-          </a:xfrm>
-          <a:prstGeom prst="rect">
-            <a:avLst/>
-          </a:prstGeom>
-          <a:noFill/>
-          <a:ln/>
-        </p:spPr>
-        <p:txBody>
-          <a:bodyPr wrap="square" lIns="0" tIns="0" rIns="0" bIns="0" rtlCol="0" anchor="b"/>
-          <a:lstStyle/>
-          <a:p>
-            <a:pPr indent="0" marL="0">
-              <a:buNone/>
-            </a:pPr>
-            <a:r>
-              <a:rPr lang="en-US" sz="2600" b="1" dirty="0">
-                <a:solidFill>
-                  <a:srgbClr val="4636B0"/>
-                </a:solidFill>
-                <a:latin typeface="Arial" pitchFamily="34" charset="0"/>
-                <a:ea typeface="Arial" pitchFamily="34" charset="-122"/>
-                <a:cs typeface="Arial" pitchFamily="34" charset="-120"/>
-              </a:rPr>
-              <a:t>225 €</a:t>
-            </a:r>
-            <a:pPr indent="0" marL="0">
-              <a:buNone/>
-            </a:pPr>
-            <a:r>
-              <a:rPr lang="en-US" sz="1050" dirty="0">
-                <a:solidFill>
-                  <a:srgbClr val="5B6475"/>
-                </a:solidFill>
-                <a:latin typeface="Arial" pitchFamily="34" charset="0"/>
-                <a:ea typeface="Arial" pitchFamily="34" charset="-122"/>
-                <a:cs typeface="Arial" pitchFamily="34" charset="-120"/>
-              </a:rPr>
-              <a:t>  HT / mois</a:t>
-            </a:r>
-            <a:endParaRPr lang="en-US" sz="2600" dirty="0"/>
-          </a:p>
-        </p:txBody>
-      </p:sp>
-      <p:sp>
-        <p:nvSpPr>
-          <p:cNvPr id="20" name="Text 17"/>
-          <p:cNvSpPr/>
-          <p:nvPr/>
-        </p:nvSpPr>
-        <p:spPr>
-          <a:xfrm>
-            <a:off x="4648200" y="4507992"/>
-            <a:ext cx="2892552" cy="274320"/>
-          </a:xfrm>
-          <a:prstGeom prst="rect">
-            <a:avLst/>
-          </a:prstGeom>
-          <a:noFill/>
-          <a:ln/>
-        </p:spPr>
-        <p:txBody>
-          <a:bodyPr wrap="square" lIns="0" tIns="0" rIns="0" bIns="0" rtlCol="0" anchor="t"/>
-          <a:lstStyle/>
-          <a:p>
-            <a:pPr indent="0" marL="0">
-              <a:buNone/>
-            </a:pPr>
-            <a:r>
-              <a:rPr lang="en-US" sz="950" dirty="0">
-                <a:solidFill>
-                  <a:srgbClr val="1F7A5C"/>
-                </a:solidFill>
-                <a:latin typeface="Arial" pitchFamily="34" charset="0"/>
-                <a:ea typeface="Arial" pitchFamily="34" charset="-122"/>
-                <a:cs typeface="Arial" pitchFamily="34" charset="-120"/>
-              </a:rPr>
-              <a:t>ou 2 400 € à l’année — 300 € de moins</a:t>
-            </a:r>
-            <a:endParaRPr lang="en-US" sz="950" dirty="0"/>
-          </a:p>
-        </p:txBody>
-      </p:sp>
-      <p:sp>
-        <p:nvSpPr>
-          <p:cNvPr id="21" name="Shape 18"/>
-          <p:cNvSpPr/>
-          <p:nvPr/>
-        </p:nvSpPr>
-        <p:spPr>
-          <a:xfrm>
-            <a:off x="8052816" y="2331720"/>
-            <a:ext cx="3404616" cy="2743200"/>
-          </a:xfrm>
-          <a:prstGeom prst="roundRect">
-            <a:avLst>
-              <a:gd name="adj" fmla="val 4000"/>
-            </a:avLst>
-          </a:prstGeom>
-          <a:solidFill>
-            <a:srgbClr val="FFFFFF"/>
-          </a:solidFill>
-          <a:ln w="12700">
-            <a:solidFill>
-              <a:srgbClr val="E3E6EE"/>
-            </a:solidFill>
-            <a:prstDash val="solid"/>
-          </a:ln>
-        </p:spPr>
-      </p:sp>
-      <p:sp>
-        <p:nvSpPr>
-          <p:cNvPr id="22" name="Text 19"/>
-          <p:cNvSpPr/>
-          <p:nvPr/>
-        </p:nvSpPr>
-        <p:spPr>
-          <a:xfrm>
-            <a:off x="8308848" y="2825496"/>
-            <a:ext cx="2892552" cy="347472"/>
-          </a:xfrm>
-          <a:prstGeom prst="rect">
-            <a:avLst/>
-          </a:prstGeom>
-          <a:noFill/>
-          <a:ln/>
-        </p:spPr>
-        <p:txBody>
-          <a:bodyPr wrap="square" lIns="0" tIns="0" rIns="0" bIns="0" rtlCol="0" anchor="t"/>
-          <a:lstStyle/>
-          <a:p>
-            <a:pPr indent="0" marL="0">
-              <a:buNone/>
-            </a:pPr>
-            <a:r>
-              <a:rPr lang="en-US" sz="1800" b="1" dirty="0">
-                <a:solidFill>
-                  <a:srgbClr val="0B0F19"/>
-                </a:solidFill>
-                <a:latin typeface="Arial" pitchFamily="34" charset="0"/>
-                <a:ea typeface="Arial" pitchFamily="34" charset="-122"/>
-                <a:cs typeface="Arial" pitchFamily="34" charset="-120"/>
-              </a:rPr>
-              <a:t>Enterprise</a:t>
-            </a:r>
-            <a:endParaRPr lang="en-US" sz="1800" dirty="0"/>
-          </a:p>
-        </p:txBody>
-      </p:sp>
-      <p:sp>
-        <p:nvSpPr>
-          <p:cNvPr id="23" name="Text 20"/>
-          <p:cNvSpPr/>
-          <p:nvPr/>
-        </p:nvSpPr>
-        <p:spPr>
-          <a:xfrm>
-            <a:off x="8308848" y="3227832"/>
-            <a:ext cx="2892552" cy="256032"/>
-          </a:xfrm>
-          <a:prstGeom prst="rect">
-            <a:avLst/>
-          </a:prstGeom>
-          <a:noFill/>
-          <a:ln/>
-        </p:spPr>
-        <p:txBody>
-          <a:bodyPr wrap="square" lIns="0" tIns="0" rIns="0" bIns="0" rtlCol="0" anchor="t"/>
-          <a:lstStyle/>
-          <a:p>
-            <a:pPr indent="0" marL="0">
-              <a:buNone/>
-            </a:pPr>
-            <a:r>
-              <a:rPr lang="en-US" sz="1100" b="1" dirty="0">
-                <a:solidFill>
-                  <a:srgbClr val="6366F1"/>
-                </a:solidFill>
-                <a:latin typeface="Arial" pitchFamily="34" charset="0"/>
-                <a:ea typeface="Arial" pitchFamily="34" charset="-122"/>
-                <a:cs typeface="Arial" pitchFamily="34" charset="-120"/>
-              </a:rPr>
-              <a:t>21 à 100 appareils</a:t>
-            </a:r>
-            <a:endParaRPr lang="en-US" sz="1100" dirty="0"/>
-          </a:p>
-        </p:txBody>
-      </p:sp>
-      <p:sp>
-        <p:nvSpPr>
-          <p:cNvPr id="24" name="Text 21"/>
-          <p:cNvSpPr/>
-          <p:nvPr/>
-        </p:nvSpPr>
-        <p:spPr>
-          <a:xfrm>
-            <a:off x="8308848" y="3538728"/>
-            <a:ext cx="2892552" cy="457200"/>
-          </a:xfrm>
-          <a:prstGeom prst="rect">
-            <a:avLst/>
-          </a:prstGeom>
-          <a:noFill/>
-          <a:ln/>
-        </p:spPr>
-        <p:txBody>
-          <a:bodyPr wrap="square" lIns="0" tIns="0" rIns="0" bIns="0" rtlCol="0" anchor="t"/>
-          <a:lstStyle/>
-          <a:p>
-            <a:pPr indent="0" marL="0">
-              <a:lnSpc>
-                <a:spcPct val="112000"/>
-              </a:lnSpc>
-              <a:buNone/>
-            </a:pPr>
-            <a:r>
-              <a:rPr lang="en-US" sz="1000" dirty="0">
-                <a:solidFill>
-                  <a:srgbClr val="5B6475"/>
-                </a:solidFill>
-                <a:latin typeface="Arial" pitchFamily="34" charset="0"/>
-                <a:ea typeface="Arial" pitchFamily="34" charset="-122"/>
-                <a:cs typeface="Arial" pitchFamily="34" charset="-120"/>
-              </a:rPr>
-              <a:t>La grande surface, qui mobilise une équipe entière.</a:t>
-            </a:r>
-            <a:endParaRPr lang="en-US" sz="1000" dirty="0"/>
-          </a:p>
-        </p:txBody>
-      </p:sp>
-      <p:sp>
-        <p:nvSpPr>
-          <p:cNvPr id="25" name="Text 22"/>
-          <p:cNvSpPr/>
-          <p:nvPr/>
-        </p:nvSpPr>
-        <p:spPr>
-          <a:xfrm>
-            <a:off x="8308848" y="4050792"/>
-            <a:ext cx="2892552" cy="457200"/>
-          </a:xfrm>
-          <a:prstGeom prst="rect">
-            <a:avLst/>
-          </a:prstGeom>
-          <a:noFill/>
-          <a:ln/>
-        </p:spPr>
-        <p:txBody>
-          <a:bodyPr wrap="square" lIns="0" tIns="0" rIns="0" bIns="0" rtlCol="0" anchor="b"/>
-          <a:lstStyle/>
-          <a:p>
-            <a:pPr indent="0" marL="0">
-              <a:buNone/>
-            </a:pPr>
-            <a:r>
-              <a:rPr lang="en-US" sz="2600" b="1" dirty="0">
-                <a:solidFill>
-                  <a:srgbClr val="4636B0"/>
-                </a:solidFill>
-                <a:latin typeface="Arial" pitchFamily="34" charset="0"/>
-                <a:ea typeface="Arial" pitchFamily="34" charset="-122"/>
-                <a:cs typeface="Arial" pitchFamily="34" charset="-120"/>
-              </a:rPr>
-              <a:t>650 €</a:t>
-            </a:r>
-            <a:pPr indent="0" marL="0">
-              <a:buNone/>
-            </a:pPr>
-            <a:r>
-              <a:rPr lang="en-US" sz="1050" dirty="0">
-                <a:solidFill>
-                  <a:srgbClr val="5B6475"/>
-                </a:solidFill>
-                <a:latin typeface="Arial" pitchFamily="34" charset="0"/>
-                <a:ea typeface="Arial" pitchFamily="34" charset="-122"/>
-                <a:cs typeface="Arial" pitchFamily="34" charset="-120"/>
-              </a:rPr>
-              <a:t>  HT / mois</a:t>
-            </a:r>
-            <a:endParaRPr lang="en-US" sz="2600" dirty="0"/>
-          </a:p>
-        </p:txBody>
-      </p:sp>
-      <p:sp>
-        <p:nvSpPr>
-          <p:cNvPr id="26" name="Text 23"/>
-          <p:cNvSpPr/>
-          <p:nvPr/>
-        </p:nvSpPr>
-        <p:spPr>
-          <a:xfrm>
-            <a:off x="8308848" y="4507992"/>
-            <a:ext cx="2892552" cy="274320"/>
-          </a:xfrm>
-          <a:prstGeom prst="rect">
-            <a:avLst/>
-          </a:prstGeom>
-          <a:noFill/>
-          <a:ln/>
-        </p:spPr>
-        <p:txBody>
-          <a:bodyPr wrap="square" lIns="0" tIns="0" rIns="0" bIns="0" rtlCol="0" anchor="t"/>
-          <a:lstStyle/>
-          <a:p>
-            <a:pPr indent="0" marL="0">
-              <a:buNone/>
-            </a:pPr>
-            <a:r>
-              <a:rPr lang="en-US" sz="950" dirty="0">
-                <a:solidFill>
-                  <a:srgbClr val="1F7A5C"/>
-                </a:solidFill>
-                <a:latin typeface="Arial" pitchFamily="34" charset="0"/>
-                <a:ea typeface="Arial" pitchFamily="34" charset="-122"/>
-                <a:cs typeface="Arial" pitchFamily="34" charset="-120"/>
-              </a:rPr>
-              <a:t>ou 6 900 € à l’année — 900 € de moins</a:t>
-            </a:r>
-            <a:endParaRPr lang="en-US" sz="950" dirty="0"/>
-          </a:p>
-        </p:txBody>
-      </p:sp>
-      <p:sp>
-        <p:nvSpPr>
-          <p:cNvPr id="27" name="Text 24"/>
-          <p:cNvSpPr/>
-          <p:nvPr/>
-        </p:nvSpPr>
-        <p:spPr>
-          <a:xfrm>
-            <a:off x="731520" y="5212080"/>
-            <a:ext cx="10725912" cy="1005840"/>
-          </a:xfrm>
-          <a:prstGeom prst="rect">
-            <a:avLst/>
-          </a:prstGeom>
-          <a:noFill/>
-          <a:ln/>
-        </p:spPr>
-        <p:txBody>
-          <a:bodyPr wrap="square" lIns="0" tIns="0" rIns="0" bIns="0" rtlCol="0" anchor="t"/>
-          <a:lstStyle/>
-          <a:p>
-            <a:pPr indent="0" marL="0">
-              <a:lnSpc>
-                <a:spcPct val="118000"/>
-              </a:lnSpc>
-              <a:spcAft>
-                <a:spcPts val="900"/>
-              </a:spcAft>
-              <a:buNone/>
-            </a:pPr>
-            <a:r>
-              <a:rPr lang="en-US" sz="1200" b="1" dirty="0">
-                <a:solidFill>
-                  <a:srgbClr val="0B0F19"/>
-                </a:solidFill>
-                <a:latin typeface="Arial" pitchFamily="34" charset="0"/>
-                <a:ea typeface="Arial" pitchFamily="34" charset="-122"/>
-                <a:cs typeface="Arial" pitchFamily="34" charset="-120"/>
-              </a:rPr>
-              <a:t>Ce que ça change pour l’inventaire tournant. </a:t>
-            </a:r>
-            <a:pPr indent="0" marL="0">
-              <a:lnSpc>
-                <a:spcPct val="118000"/>
-              </a:lnSpc>
-              <a:spcAft>
-                <a:spcPts val="900"/>
-              </a:spcAft>
-              <a:buNone/>
-            </a:pPr>
-            <a:r>
-              <a:rPr lang="en-US" sz="1200" dirty="0">
-                <a:solidFill>
-                  <a:srgbClr val="3D4556"/>
-                </a:solidFill>
-                <a:latin typeface="Arial" pitchFamily="34" charset="0"/>
-                <a:ea typeface="Arial" pitchFamily="34" charset="-122"/>
-                <a:cs typeface="Arial" pitchFamily="34" charset="-120"/>
-              </a:rPr>
-              <a:t>À l'intérieur d'un palier, compter davantage ne coûte rien : un chef d'équipe qui décide de compter son rayon un mardi matin n'a aucun budget à demander. C'est ce qui rend le transfert au floor tenable dans la durée.</a:t>
-            </a:r>
-            <a:endParaRPr lang="en-US" sz="1200" dirty="0"/>
-          </a:p>
-          <a:p>
-            <a:pPr indent="0" marL="0">
-              <a:lnSpc>
-                <a:spcPct val="118000"/>
-              </a:lnSpc>
-              <a:spcAft>
-                <a:spcPts val="900"/>
-              </a:spcAft>
-              <a:buNone/>
-            </a:pPr>
-            <a:r>
-              <a:rPr lang="en-US" sz="1200" b="1" dirty="0">
-                <a:solidFill>
-                  <a:srgbClr val="0B0F19"/>
-                </a:solidFill>
-                <a:latin typeface="Arial" pitchFamily="34" charset="0"/>
-                <a:ea typeface="Arial" pitchFamily="34" charset="-122"/>
-                <a:cs typeface="Arial" pitchFamily="34" charset="-120"/>
-              </a:rPr>
-              <a:t>Zéro matériel. </a:t>
-            </a:r>
-            <a:pPr indent="0" marL="0">
-              <a:lnSpc>
-                <a:spcPct val="118000"/>
-              </a:lnSpc>
-              <a:spcAft>
-                <a:spcPts val="900"/>
-              </a:spcAft>
-              <a:buNone/>
-            </a:pPr>
-            <a:r>
-              <a:rPr lang="en-US" sz="1200" dirty="0">
-                <a:solidFill>
-                  <a:srgbClr val="3D4556"/>
-                </a:solidFill>
-                <a:latin typeface="Arial" pitchFamily="34" charset="0"/>
-                <a:ea typeface="Arial" pitchFamily="34" charset="-122"/>
-                <a:cs typeface="Arial" pitchFamily="34" charset="-120"/>
-              </a:rPr>
-              <a:t>Aucun terminal à acheter, à louer, à configurer ou à remplacer. L'application, le tableau de bord, les rapports et les mises à jour sont compris.</a:t>
-            </a:r>
-            <a:endParaRPr lang="en-US" sz="1200" dirty="0"/>
-          </a:p>
-        </p:txBody>
-      </p:sp>
-      <p:sp>
-        <p:nvSpPr>
-          <p:cNvPr id="28" name="Text 25"/>
-          <p:cNvSpPr/>
-          <p:nvPr/>
-        </p:nvSpPr>
-        <p:spPr>
-          <a:xfrm>
-            <a:off x="731520" y="6400800"/>
-            <a:ext cx="6400800" cy="274320"/>
-          </a:xfrm>
-          <a:prstGeom prst="rect">
-            <a:avLst/>
-          </a:prstGeom>
-          <a:noFill/>
-          <a:ln/>
-        </p:spPr>
-        <p:txBody>
-          <a:bodyPr wrap="square" lIns="0" tIns="0" rIns="0" bIns="0" rtlCol="0" anchor="t"/>
-          <a:lstStyle/>
-          <a:p>
-            <a:pPr indent="0" marL="0">
-              <a:buNone/>
-            </a:pPr>
-            <a:r>
-              <a:rPr lang="en-US" sz="900" dirty="0">
-                <a:solidFill>
-                  <a:srgbClr val="5B6475"/>
-                </a:solidFill>
-                <a:latin typeface="Arial" pitchFamily="34" charset="0"/>
-                <a:ea typeface="Arial" pitchFamily="34" charset="-122"/>
-                <a:cs typeface="Arial" pitchFamily="34" charset="-120"/>
-              </a:rPr>
-              <a:t>Quantinvo · proposition pour La Samaritaine</a:t>
-            </a:r>
-            <a:endParaRPr lang="en-US" sz="900" dirty="0"/>
-          </a:p>
-        </p:txBody>
-      </p:sp>
-      <p:sp>
-        <p:nvSpPr>
-          <p:cNvPr id="29" name="Text 26"/>
-          <p:cNvSpPr/>
-          <p:nvPr/>
-        </p:nvSpPr>
-        <p:spPr>
-          <a:xfrm>
-            <a:off x="11000232" y="6400800"/>
-            <a:ext cx="457200" cy="274320"/>
-          </a:xfrm>
-          <a:prstGeom prst="rect">
-            <a:avLst/>
-          </a:prstGeom>
-          <a:noFill/>
-          <a:ln/>
-        </p:spPr>
-        <p:txBody>
-          <a:bodyPr wrap="square" lIns="0" tIns="0" rIns="0" bIns="0" rtlCol="0" anchor="t"/>
-          <a:lstStyle/>
-          <a:p>
-            <a:pPr algn="r" indent="0" marL="0">
-              <a:buNone/>
-            </a:pPr>
-            <a:r>
-              <a:rPr lang="en-US" sz="900" dirty="0">
-                <a:solidFill>
-                  <a:srgbClr val="5B6475"/>
-                </a:solidFill>
-                <a:latin typeface="Arial" pitchFamily="34" charset="0"/>
-                <a:ea typeface="Arial" pitchFamily="34" charset="-122"/>
-                <a:cs typeface="Arial" pitchFamily="34" charset="-120"/>
-              </a:rPr>
-              <a:t>14</a:t>
-            </a:r>
-            <a:endParaRPr lang="en-US" sz="900" dirty="0"/>
-          </a:p>
-        </p:txBody>
-      </p:sp>
-    </p:spTree>
-  </p:cSld>
-  <p:clrMapOvr>
-    <a:masterClrMapping/>
-  </p:clrMapOvr>
-</p:sld>
-</file>
-
-<file path=ppt/slides/slide15.xml><?xml version="1.0" encoding="utf-8"?>
-<p:sld xmlns:a="http://schemas.openxmlformats.org/drawingml/2006/main" xmlns:r="http://schemas.openxmlformats.org/officeDocument/2006/relationships" xmlns:p="http://schemas.openxmlformats.org/presentationml/2006/main">
-  <p:cSld name="Slide 15">
-    <p:bg>
-      <p:bgPr>
-        <a:solidFill>
-          <a:srgbClr val="FFFFFF"/>
-        </a:solidFill>
-      </p:bgPr>
-    </p:bg>
-    <p:spTree>
-      <p:nvGrpSpPr>
-        <p:cNvPr id="1" name=""/>
-        <p:cNvGrpSpPr/>
-        <p:nvPr/>
-      </p:nvGrpSpPr>
-      <p:grpSpPr>
-        <a:xfrm>
-          <a:off x="0" y="0"/>
-          <a:ext cx="0" cy="0"/>
-          <a:chOff x="0" y="0"/>
-          <a:chExt cx="0" cy="0"/>
-        </a:xfrm>
-      </p:grpSpPr>
-      <p:pic>
-        <p:nvPicPr>
-          <p:cNvPr id="2" name="Image 0" descr="preencoded.png">    </p:cNvPr>
-          <p:cNvPicPr>
-            <a:picLocks noChangeAspect="1"/>
-          </p:cNvPicPr>
-          <p:nvPr/>
-        </p:nvPicPr>
-        <p:blipFill>
-          <a:blip r:embed="rId1"/>
-          <a:stretch>
-            <a:fillRect/>
-          </a:stretch>
-        </p:blipFill>
-        <p:spPr>
-          <a:xfrm>
-            <a:off x="731520" y="685800"/>
-            <a:ext cx="566928" cy="566928"/>
-          </a:xfrm>
-          <a:prstGeom prst="rect">
-            <a:avLst/>
-          </a:prstGeom>
-        </p:spPr>
-      </p:pic>
-      <p:sp>
-        <p:nvSpPr>
-          <p:cNvPr id="3" name="Text 0"/>
-          <p:cNvSpPr/>
-          <p:nvPr/>
-        </p:nvSpPr>
-        <p:spPr>
-          <a:xfrm>
-            <a:off x="1444752" y="658368"/>
-            <a:ext cx="4572000" cy="621792"/>
-          </a:xfrm>
-          <a:prstGeom prst="rect">
-            <a:avLst/>
-          </a:prstGeom>
-          <a:noFill/>
-          <a:ln/>
-        </p:spPr>
-        <p:txBody>
-          <a:bodyPr wrap="square" lIns="0" tIns="0" rIns="0" bIns="0" rtlCol="0" anchor="ctr"/>
-          <a:lstStyle/>
-          <a:p>
-            <a:pPr indent="0" marL="0">
-              <a:buNone/>
-            </a:pPr>
-            <a:r>
-              <a:rPr lang="en-US" sz="2400" b="1" dirty="0">
-                <a:solidFill>
-                  <a:srgbClr val="0B0F19"/>
-                </a:solidFill>
-                <a:latin typeface="Arial" pitchFamily="34" charset="0"/>
-                <a:ea typeface="Arial" pitchFamily="34" charset="-122"/>
-                <a:cs typeface="Arial" pitchFamily="34" charset="-120"/>
-              </a:rPr>
-              <a:t>Quantinvo</a:t>
-            </a:r>
-            <a:endParaRPr lang="en-US" sz="2400" dirty="0"/>
-          </a:p>
-        </p:txBody>
-      </p:sp>
-      <p:sp>
-        <p:nvSpPr>
-          <p:cNvPr id="4" name="Shape 1"/>
-          <p:cNvSpPr/>
-          <p:nvPr/>
-        </p:nvSpPr>
-        <p:spPr>
-          <a:xfrm>
-            <a:off x="731520" y="1481328"/>
-            <a:ext cx="2377440" cy="25603"/>
-          </a:xfrm>
-          <a:prstGeom prst="rect">
-            <a:avLst/>
-          </a:prstGeom>
-          <a:solidFill>
-            <a:srgbClr val="38C9FF"/>
-          </a:solidFill>
-          <a:ln w="12700">
-            <a:solidFill>
-              <a:srgbClr val="38C9FF"/>
-            </a:solidFill>
-            <a:prstDash val="solid"/>
-          </a:ln>
-        </p:spPr>
-      </p:sp>
-      <p:sp>
-        <p:nvSpPr>
-          <p:cNvPr id="5" name="Text 2"/>
-          <p:cNvSpPr/>
-          <p:nvPr/>
-        </p:nvSpPr>
-        <p:spPr>
-          <a:xfrm>
-            <a:off x="731520" y="2377440"/>
-            <a:ext cx="8686800" cy="1188720"/>
-          </a:xfrm>
-          <a:prstGeom prst="rect">
-            <a:avLst/>
-          </a:prstGeom>
-          <a:noFill/>
-          <a:ln/>
-        </p:spPr>
-        <p:txBody>
-          <a:bodyPr wrap="square" lIns="0" tIns="0" rIns="0" bIns="0" rtlCol="0" anchor="t"/>
-          <a:lstStyle/>
-          <a:p>
-            <a:pPr indent="0" marL="0">
-              <a:lnSpc>
-                <a:spcPct val="105000"/>
-              </a:lnSpc>
-              <a:buNone/>
-            </a:pPr>
-            <a:r>
               <a:rPr lang="en-US" sz="3600" b="1" dirty="0">
                 <a:solidFill>
                   <a:srgbClr val="4636B0"/>
@@ -5918,7 +3455,7 @@
                 <a:ea typeface="Arial" pitchFamily="34" charset="-122"/>
                 <a:cs typeface="Arial" pitchFamily="34" charset="-120"/>
               </a:rPr>
-              <a:t>Quantinvo, par Devkaylab. L’outil d’inventaire pour le commerce.</a:t>
+              <a:t>Quantinvo, par Devkaylab. L'outil d'inventaire pour le commerce.</a:t>
             </a:r>
             <a:endParaRPr lang="en-US" sz="1050" dirty="0"/>
           </a:p>
@@ -5972,8 +3509,8 @@
         </p:blipFill>
         <p:spPr>
           <a:xfrm>
-            <a:off x="731520" y="384048"/>
-            <a:ext cx="329184" cy="329184"/>
+            <a:off x="731520" y="685800"/>
+            <a:ext cx="566928" cy="566928"/>
           </a:xfrm>
           <a:prstGeom prst="rect">
             <a:avLst/>
@@ -5988,8 +3525,8 @@
         </p:nvSpPr>
         <p:spPr>
           <a:xfrm>
-            <a:off x="1170432" y="347472"/>
-            <a:ext cx="2743200" cy="402336"/>
+            <a:off x="1444752" y="658368"/>
+            <a:ext cx="4572000" cy="621792"/>
           </a:xfrm>
           <a:prstGeom prst="rect">
             <a:avLst/>
@@ -6005,7 +3542,7 @@
               <a:buNone/>
             </a:pPr>
             <a:r>
-              <a:rPr lang="en-US" sz="1600" b="1" dirty="0">
+              <a:rPr lang="en-US" sz="2400" b="1" dirty="0">
                 <a:solidFill>
                   <a:srgbClr val="0B0F19"/>
                 </a:solidFill>
@@ -6015,59 +3552,20 @@
               </a:rPr>
               <a:t>Quantinvo</a:t>
             </a:r>
-            <a:endParaRPr lang="en-US" sz="1600" dirty="0"/>
-          </a:p>
-        </p:txBody>
-      </p:sp>
-      <p:sp>
-        <p:nvSpPr>
-          <p:cNvPr id="4" name="Text 1"/>
-          <p:cNvSpPr/>
-          <p:nvPr/>
-        </p:nvSpPr>
-        <p:spPr>
-          <a:xfrm>
-            <a:off x="5971032" y="347472"/>
-            <a:ext cx="5486400" cy="402336"/>
-          </a:xfrm>
-          <a:prstGeom prst="rect">
-            <a:avLst/>
-          </a:prstGeom>
-          <a:noFill/>
-          <a:ln/>
-        </p:spPr>
-        <p:txBody>
-          <a:bodyPr wrap="square" lIns="0" tIns="0" rIns="0" bIns="0" rtlCol="0" anchor="ctr"/>
-          <a:lstStyle/>
-          <a:p>
-            <a:pPr algn="r" indent="0" marL="0">
-              <a:buNone/>
-            </a:pPr>
-            <a:r>
-              <a:rPr lang="en-US" sz="1000" dirty="0">
-                <a:solidFill>
-                  <a:srgbClr val="5B6475"/>
-                </a:solidFill>
-                <a:latin typeface="Arial" pitchFamily="34" charset="0"/>
-                <a:ea typeface="Arial" pitchFamily="34" charset="-122"/>
-                <a:cs typeface="Arial" pitchFamily="34" charset="-120"/>
-              </a:rPr>
-              <a:t>Aujourd'hui</a:t>
-            </a:r>
-            <a:endParaRPr lang="en-US" sz="1000" dirty="0"/>
-          </a:p>
-        </p:txBody>
-      </p:sp>
-      <p:sp>
-        <p:nvSpPr>
-          <p:cNvPr id="5" name="Shape 2"/>
-          <p:cNvSpPr/>
-          <p:nvPr/>
-        </p:nvSpPr>
-        <p:spPr>
-          <a:xfrm>
-            <a:off x="731520" y="877824"/>
-            <a:ext cx="10725912" cy="25603"/>
+            <a:endParaRPr lang="en-US" sz="2400" dirty="0"/>
+          </a:p>
+        </p:txBody>
+      </p:sp>
+      <p:sp>
+        <p:nvSpPr>
+          <p:cNvPr id="4" name="Shape 1"/>
+          <p:cNvSpPr/>
+          <p:nvPr/>
+        </p:nvSpPr>
+        <p:spPr>
+          <a:xfrm>
+            <a:off x="731520" y="1481328"/>
+            <a:ext cx="2377440" cy="25603"/>
           </a:xfrm>
           <a:prstGeom prst="rect">
             <a:avLst/>
@@ -6085,14 +3583,53 @@
       </p:sp>
       <p:sp>
         <p:nvSpPr>
+          <p:cNvPr id="5" name="Text 2"/>
+          <p:cNvSpPr/>
+          <p:nvPr/>
+        </p:nvSpPr>
+        <p:spPr>
+          <a:xfrm>
+            <a:off x="731520" y="2331720"/>
+            <a:ext cx="8229600" cy="365760"/>
+          </a:xfrm>
+          <a:prstGeom prst="rect">
+            <a:avLst/>
+          </a:prstGeom>
+          <a:noFill/>
+          <a:ln/>
+        </p:spPr>
+        <p:txBody>
+          <a:bodyPr wrap="square" lIns="0" tIns="0" rIns="0" bIns="0" rtlCol="0" anchor="t"/>
+          <a:lstStyle/>
+          <a:p>
+            <a:pPr indent="0" marL="0">
+              <a:buNone/>
+            </a:pPr>
+            <a:r>
+              <a:rPr lang="en-US" sz="1300" dirty="0">
+                <a:solidFill>
+                  <a:srgbClr val="5B6475"/>
+                </a:solidFill>
+                <a:latin typeface="Arial" pitchFamily="34" charset="0"/>
+                <a:ea typeface="Arial" pitchFamily="34" charset="-122"/>
+                <a:cs typeface="Arial" pitchFamily="34" charset="-120"/>
+              </a:rPr>
+              <a:t>Proposition pour La Samaritaine</a:t>
+            </a:r>
+            <a:endParaRPr lang="en-US" sz="1300" dirty="0"/>
+          </a:p>
+        </p:txBody>
+      </p:sp>
+      <p:sp>
+        <p:nvSpPr>
           <p:cNvPr id="6" name="Text 3"/>
           <p:cNvSpPr/>
           <p:nvPr/>
         </p:nvSpPr>
         <p:spPr>
           <a:xfrm>
-            <a:off x="731520" y="1325880"/>
-            <a:ext cx="4206240" cy="1554480"/>
+            <a:off x="731520" y="2743200"/>
+            <a:ext cx="8686800" cy="1737360"/>
           </a:xfrm>
           <a:prstGeom prst="rect">
             <a:avLst/>
@@ -6111,7 +3648,7 @@
               <a:buNone/>
             </a:pPr>
             <a:r>
-              <a:rPr lang="en-US" sz="2600" b="1" dirty="0">
+              <a:rPr lang="en-US" sz="4000" b="1" dirty="0">
                 <a:solidFill>
                   <a:srgbClr val="4636B0"/>
                 </a:solidFill>
@@ -6119,9 +3656,9 @@
                 <a:ea typeface="Arial" pitchFamily="34" charset="-122"/>
                 <a:cs typeface="Arial" pitchFamily="34" charset="-120"/>
               </a:rPr>
-              <a:t>Votre journée d'inventaire, telle qu'elle se déroule.</a:t>
-            </a:r>
-            <a:endParaRPr lang="en-US" sz="2600" dirty="0"/>
+              <a:t>L'inventaire tournant, rendu aux équipes de vente.</a:t>
+            </a:r>
+            <a:endParaRPr lang="en-US" sz="4000" dirty="0"/>
           </a:p>
         </p:txBody>
       </p:sp>
@@ -6133,8 +3670,8 @@
         </p:nvSpPr>
         <p:spPr>
           <a:xfrm>
-            <a:off x="731520" y="2926080"/>
-            <a:ext cx="4206240" cy="1097280"/>
+            <a:off x="731520" y="4572000"/>
+            <a:ext cx="7498080" cy="822960"/>
           </a:xfrm>
           <a:prstGeom prst="rect">
             <a:avLst/>
@@ -6146,14 +3683,53 @@
           <a:bodyPr wrap="square" lIns="0" tIns="0" rIns="0" bIns="0" rtlCol="0" anchor="t"/>
           <a:lstStyle/>
           <a:p>
-            <a:pPr algn="l" indent="0" marL="0">
+            <a:pPr indent="0" marL="0">
               <a:lnSpc>
-                <a:spcPct val="118000"/>
+                <a:spcPct val="120000"/>
               </a:lnSpc>
               <a:buNone/>
             </a:pPr>
             <a:r>
-              <a:rPr lang="en-US" sz="1200" i="1" dirty="0">
+              <a:rPr lang="en-US" sz="1500" dirty="0">
+                <a:solidFill>
+                  <a:srgbClr val="3D4556"/>
+                </a:solidFill>
+                <a:latin typeface="Arial" pitchFamily="34" charset="0"/>
+                <a:ea typeface="Arial" pitchFamily="34" charset="-122"/>
+                <a:cs typeface="Arial" pitchFamily="34" charset="-120"/>
+              </a:rPr>
+              <a:t>Le balisage, le comptage et la conduite de chaque inventaire passent au floor : les chefs d'équipe supervisent, les vendeurs comptent. L'Inventory Control reçoit le rapport, valide et ajuste.</a:t>
+            </a:r>
+            <a:endParaRPr lang="en-US" sz="1500" dirty="0"/>
+          </a:p>
+        </p:txBody>
+      </p:sp>
+      <p:sp>
+        <p:nvSpPr>
+          <p:cNvPr id="8" name="Text 5"/>
+          <p:cNvSpPr/>
+          <p:nvPr/>
+        </p:nvSpPr>
+        <p:spPr>
+          <a:xfrm>
+            <a:off x="731520" y="6080760"/>
+            <a:ext cx="9144000" cy="320040"/>
+          </a:xfrm>
+          <a:prstGeom prst="rect">
+            <a:avLst/>
+          </a:prstGeom>
+          <a:noFill/>
+          <a:ln/>
+        </p:spPr>
+        <p:txBody>
+          <a:bodyPr wrap="square" lIns="0" tIns="0" rIns="0" bIns="0" rtlCol="0" anchor="t"/>
+          <a:lstStyle/>
+          <a:p>
+            <a:pPr indent="0" marL="0">
+              <a:buNone/>
+            </a:pPr>
+            <a:r>
+              <a:rPr lang="en-US" sz="1050" dirty="0">
                 <a:solidFill>
                   <a:srgbClr val="5B6475"/>
                 </a:solidFill>
@@ -6161,281 +3737,9 @@
                 <a:ea typeface="Arial" pitchFamily="34" charset="-122"/>
                 <a:cs typeface="Arial" pitchFamily="34" charset="-120"/>
               </a:rPr>
-              <a:t>Reprise de votre déroulement d'inventaire tournant, étape par étape. Chaque ligne est tirée de votre document — et chaque ligne est portée par l'Inventory Control.</a:t>
-            </a:r>
-            <a:endParaRPr lang="en-US" sz="1200" dirty="0"/>
-          </a:p>
-        </p:txBody>
-      </p:sp>
-      <p:sp>
-        <p:nvSpPr>
-          <p:cNvPr id="8" name="Text 5"/>
-          <p:cNvSpPr/>
-          <p:nvPr/>
-        </p:nvSpPr>
-        <p:spPr>
-          <a:xfrm>
-            <a:off x="5394960" y="1371600"/>
-            <a:ext cx="6062472" cy="4754880"/>
-          </a:xfrm>
-          <a:prstGeom prst="rect">
-            <a:avLst/>
-          </a:prstGeom>
-          <a:noFill/>
-          <a:ln/>
-        </p:spPr>
-        <p:txBody>
-          <a:bodyPr wrap="square" lIns="0" tIns="0" rIns="0" bIns="0" rtlCol="0" anchor="t"/>
-          <a:lstStyle/>
-          <a:p>
-            <a:pPr indent="0" marL="0">
-              <a:lnSpc>
-                <a:spcPct val="118000"/>
-              </a:lnSpc>
-              <a:spcAft>
-                <a:spcPts val="1300"/>
-              </a:spcAft>
-              <a:buNone/>
-            </a:pPr>
-            <a:r>
-              <a:rPr lang="en-US" sz="1250" b="1" dirty="0">
-                <a:solidFill>
-                  <a:srgbClr val="0B0F19"/>
-                </a:solidFill>
-                <a:latin typeface="Arial" pitchFamily="34" charset="0"/>
-                <a:ea typeface="Arial" pitchFamily="34" charset="-122"/>
-                <a:cs typeface="Arial" pitchFamily="34" charset="-120"/>
-              </a:rPr>
-              <a:t>La veille. </a:t>
-            </a:r>
-            <a:pPr indent="0" marL="0">
-              <a:lnSpc>
-                <a:spcPct val="118000"/>
-              </a:lnSpc>
-              <a:spcAft>
-                <a:spcPts val="1300"/>
-              </a:spcAft>
-              <a:buNone/>
-            </a:pPr>
-            <a:r>
-              <a:rPr lang="en-US" sz="1250" dirty="0">
-                <a:solidFill>
-                  <a:srgbClr val="3D4556"/>
-                </a:solidFill>
-                <a:latin typeface="Arial" pitchFamily="34" charset="0"/>
-                <a:ea typeface="Arial" pitchFamily="34" charset="-122"/>
-                <a:cs typeface="Arial" pitchFamily="34" charset="-120"/>
-              </a:rPr>
-              <a:t>Balisage des zones à inventorier, stickers posés avec une personne du floor ou du relay.</a:t>
-            </a:r>
-            <a:endParaRPr lang="en-US" sz="1250" dirty="0"/>
-          </a:p>
-          <a:p>
-            <a:pPr indent="0" marL="0">
-              <a:lnSpc>
-                <a:spcPct val="118000"/>
-              </a:lnSpc>
-              <a:spcAft>
-                <a:spcPts val="1300"/>
-              </a:spcAft>
-              <a:buNone/>
-            </a:pPr>
-            <a:r>
-              <a:rPr lang="en-US" sz="1250" b="1" dirty="0">
-                <a:solidFill>
-                  <a:srgbClr val="0B0F19"/>
-                </a:solidFill>
-                <a:latin typeface="Arial" pitchFamily="34" charset="0"/>
-                <a:ea typeface="Arial" pitchFamily="34" charset="-122"/>
-                <a:cs typeface="Arial" pitchFamily="34" charset="-120"/>
-              </a:rPr>
-              <a:t>Le matin. </a:t>
-            </a:r>
-            <a:pPr indent="0" marL="0">
-              <a:lnSpc>
-                <a:spcPct val="118000"/>
-              </a:lnSpc>
-              <a:spcAft>
-                <a:spcPts val="1300"/>
-              </a:spcAft>
-              <a:buNone/>
-            </a:pPr>
-            <a:r>
-              <a:rPr lang="en-US" sz="1250" dirty="0">
-                <a:solidFill>
-                  <a:srgbClr val="3D4556"/>
-                </a:solidFill>
-                <a:latin typeface="Arial" pitchFamily="34" charset="0"/>
-                <a:ea typeface="Arial" pitchFamily="34" charset="-122"/>
-                <a:cs typeface="Arial" pitchFamily="34" charset="-120"/>
-              </a:rPr>
-              <a:t>Télécharger le stock théorique du jour, ouvrir la session SmartCount, connecter les terminaux Zebra un par un — en vérifiant la date et la localisation de chacun (101 floor / BOH, 902 relay). Puis briefer les compteurs sur le maniement des terminaux et la procédure.</a:t>
-            </a:r>
-            <a:endParaRPr lang="en-US" sz="1250" dirty="0"/>
-          </a:p>
-          <a:p>
-            <a:pPr indent="0" marL="0">
-              <a:lnSpc>
-                <a:spcPct val="118000"/>
-              </a:lnSpc>
-              <a:spcAft>
-                <a:spcPts val="1300"/>
-              </a:spcAft>
-              <a:buNone/>
-            </a:pPr>
-            <a:r>
-              <a:rPr lang="en-US" sz="1250" b="1" dirty="0">
-                <a:solidFill>
-                  <a:srgbClr val="0B0F19"/>
-                </a:solidFill>
-                <a:latin typeface="Arial" pitchFamily="34" charset="0"/>
-                <a:ea typeface="Arial" pitchFamily="34" charset="-122"/>
-                <a:cs typeface="Arial" pitchFamily="34" charset="-120"/>
-              </a:rPr>
-              <a:t>Pendant. </a:t>
-            </a:r>
-            <a:pPr indent="0" marL="0">
-              <a:lnSpc>
-                <a:spcPct val="118000"/>
-              </a:lnSpc>
-              <a:spcAft>
-                <a:spcPts val="1300"/>
-              </a:spcAft>
-              <a:buNone/>
-            </a:pPr>
-            <a:r>
-              <a:rPr lang="en-US" sz="1250" dirty="0">
-                <a:solidFill>
-                  <a:srgbClr val="3D4556"/>
-                </a:solidFill>
-                <a:latin typeface="Arial" pitchFamily="34" charset="0"/>
-                <a:ea typeface="Arial" pitchFamily="34" charset="-122"/>
-                <a:cs typeface="Arial" pitchFamily="34" charset="-120"/>
-              </a:rPr>
-              <a:t>Déclencher l'audit des zones comptées — 100 % pour la W&amp;J, 30 % au moins ailleurs —, guetter les failed audits sur SmartCount, faire recompter les zones en désaccord.</a:t>
-            </a:r>
-            <a:endParaRPr lang="en-US" sz="1250" dirty="0"/>
-          </a:p>
-          <a:p>
-            <a:pPr indent="0" marL="0">
-              <a:lnSpc>
-                <a:spcPct val="118000"/>
-              </a:lnSpc>
-              <a:spcAft>
-                <a:spcPts val="1300"/>
-              </a:spcAft>
-              <a:buNone/>
-            </a:pPr>
-            <a:r>
-              <a:rPr lang="en-US" sz="1250" b="1" dirty="0">
-                <a:solidFill>
-                  <a:srgbClr val="0B0F19"/>
-                </a:solidFill>
-                <a:latin typeface="Arial" pitchFamily="34" charset="0"/>
-                <a:ea typeface="Arial" pitchFamily="34" charset="-122"/>
-                <a:cs typeface="Arial" pitchFamily="34" charset="-120"/>
-              </a:rPr>
-              <a:t>Après. </a:t>
-            </a:r>
-            <a:pPr indent="0" marL="0">
-              <a:lnSpc>
-                <a:spcPct val="118000"/>
-              </a:lnSpc>
-              <a:spcAft>
-                <a:spcPts val="1300"/>
-              </a:spcAft>
-              <a:buNone/>
-            </a:pPr>
-            <a:r>
-              <a:rPr lang="en-US" sz="1250" dirty="0">
-                <a:solidFill>
-                  <a:srgbClr val="3D4556"/>
-                </a:solidFill>
-                <a:latin typeface="Arial" pitchFamily="34" charset="0"/>
-                <a:ea typeface="Arial" pitchFamily="34" charset="-122"/>
-                <a:cs typeface="Arial" pitchFamily="34" charset="-120"/>
-              </a:rPr>
-              <a:t>Extraire le rapport SKU Variance, le consolider à la main avec le stock théorique, faire valider les résultats selon la valeur de l'écart (Inventory Control, PSM ou AGM), puis ajuster le stock.</a:t>
-            </a:r>
-            <a:endParaRPr lang="en-US" sz="1250" dirty="0"/>
-          </a:p>
-        </p:txBody>
-      </p:sp>
-      <p:sp>
-        <p:nvSpPr>
-          <p:cNvPr id="9" name="Text 6"/>
-          <p:cNvSpPr/>
-          <p:nvPr/>
-        </p:nvSpPr>
-        <p:spPr>
-          <a:xfrm>
-            <a:off x="731520" y="6400800"/>
-            <a:ext cx="6400800" cy="274320"/>
-          </a:xfrm>
-          <a:prstGeom prst="rect">
-            <a:avLst/>
-          </a:prstGeom>
-          <a:noFill/>
-          <a:ln/>
-        </p:spPr>
-        <p:txBody>
-          <a:bodyPr wrap="square" lIns="0" tIns="0" rIns="0" bIns="0" rtlCol="0" anchor="t"/>
-          <a:lstStyle/>
-          <a:p>
-            <a:pPr indent="0" marL="0">
-              <a:buNone/>
-            </a:pPr>
-            <a:r>
-              <a:rPr lang="en-US" sz="900" dirty="0">
-                <a:solidFill>
-                  <a:srgbClr val="5B6475"/>
-                </a:solidFill>
-                <a:latin typeface="Arial" pitchFamily="34" charset="0"/>
-                <a:ea typeface="Arial" pitchFamily="34" charset="-122"/>
-                <a:cs typeface="Arial" pitchFamily="34" charset="-120"/>
-              </a:rPr>
-              <a:t>Quantinvo · proposition pour La Samaritaine</a:t>
-            </a:r>
-            <a:endParaRPr lang="en-US" sz="900" dirty="0"/>
-          </a:p>
-        </p:txBody>
-      </p:sp>
-      <p:sp>
-        <p:nvSpPr>
-          <p:cNvPr id="10" name="Text 7"/>
-          <p:cNvSpPr/>
-          <p:nvPr/>
-        </p:nvSpPr>
-        <p:spPr>
-          <a:xfrm>
-            <a:off x="11000232" y="6400800"/>
-            <a:ext cx="457200" cy="274320"/>
-          </a:xfrm>
-          <a:prstGeom prst="rect">
-            <a:avLst/>
-          </a:prstGeom>
-          <a:noFill/>
-          <a:ln/>
-        </p:spPr>
-        <p:txBody>
-          <a:bodyPr wrap="square" lIns="0" tIns="0" rIns="0" bIns="0" rtlCol="0" anchor="t"/>
-          <a:lstStyle/>
-          <a:p>
-            <a:pPr algn="r" indent="0" marL="0">
-              <a:buNone/>
-            </a:pPr>
-            <a:r>
-              <a:rPr lang="en-US" sz="900" dirty="0">
-                <a:solidFill>
-                  <a:srgbClr val="5B6475"/>
-                </a:solidFill>
-                <a:latin typeface="Arial" pitchFamily="34" charset="0"/>
-                <a:ea typeface="Arial" pitchFamily="34" charset="-122"/>
-                <a:cs typeface="Arial" pitchFamily="34" charset="-120"/>
-              </a:rPr>
-              <a:t>2</a:t>
-            </a:r>
-            <a:endParaRPr lang="en-US" sz="900" dirty="0"/>
+              <a:t>Devkaylab  ·  septembre 2026  ·  www.quantinvo.com</a:t>
+            </a:r>
+            <a:endParaRPr lang="en-US" sz="1050" dirty="0"/>
           </a:p>
         </p:txBody>
       </p:sp>
@@ -6567,7 +3871,7 @@
                 <a:ea typeface="Arial" pitchFamily="34" charset="-122"/>
                 <a:cs typeface="Arial" pitchFamily="34" charset="-120"/>
               </a:rPr>
-              <a:t>Le constat</a:t>
+              <a:t>Aujourd'hui</a:t>
             </a:r>
             <a:endParaRPr lang="en-US" sz="1000" dirty="0"/>
           </a:p>
@@ -6607,7 +3911,7 @@
         <p:spPr>
           <a:xfrm>
             <a:off x="731520" y="1325880"/>
-            <a:ext cx="4206240" cy="1828800"/>
+            <a:ext cx="4206240" cy="1554480"/>
           </a:xfrm>
           <a:prstGeom prst="rect">
             <a:avLst/>
@@ -6634,7 +3938,7 @@
                 <a:ea typeface="Arial" pitchFamily="34" charset="-122"/>
                 <a:cs typeface="Arial" pitchFamily="34" charset="-120"/>
               </a:rPr>
-              <a:t>Le comptage est fait par les équipes. Tout le reste est fait par vous.</a:t>
+              <a:t>Votre journée d'inventaire, telle qu'elle se déroule.</a:t>
             </a:r>
             <a:endParaRPr lang="en-US" sz="2600" dirty="0"/>
           </a:p>
@@ -6648,8 +3952,8 @@
         </p:nvSpPr>
         <p:spPr>
           <a:xfrm>
-            <a:off x="731520" y="3383280"/>
-            <a:ext cx="4206240" cy="868680"/>
+            <a:off x="731520" y="2926080"/>
+            <a:ext cx="4206240" cy="1097280"/>
           </a:xfrm>
           <a:prstGeom prst="rect">
             <a:avLst/>
@@ -6661,21 +3965,24 @@
           <a:bodyPr wrap="square" lIns="0" tIns="0" rIns="0" bIns="0" rtlCol="0" anchor="t"/>
           <a:lstStyle/>
           <a:p>
-            <a:pPr indent="0" marL="0">
-              <a:buNone/>
-            </a:pPr>
-            <a:r>
-              <a:rPr lang="en-US" sz="5400" b="1" dirty="0">
-                <a:solidFill>
-                  <a:srgbClr val="4636B0"/>
-                </a:solidFill>
-                <a:latin typeface="Arial" pitchFamily="34" charset="0"/>
-                <a:ea typeface="Arial" pitchFamily="34" charset="-122"/>
-                <a:cs typeface="Arial" pitchFamily="34" charset="-120"/>
-              </a:rPr>
-              <a:t>4</a:t>
-            </a:r>
-            <a:endParaRPr lang="en-US" sz="5400" dirty="0"/>
+            <a:pPr algn="l" indent="0" marL="0">
+              <a:lnSpc>
+                <a:spcPct val="118000"/>
+              </a:lnSpc>
+              <a:buNone/>
+            </a:pPr>
+            <a:r>
+              <a:rPr lang="en-US" sz="1200" i="1" dirty="0">
+                <a:solidFill>
+                  <a:srgbClr val="5B6475"/>
+                </a:solidFill>
+                <a:latin typeface="Arial" pitchFamily="34" charset="0"/>
+                <a:ea typeface="Arial" pitchFamily="34" charset="-122"/>
+                <a:cs typeface="Arial" pitchFamily="34" charset="-120"/>
+              </a:rPr>
+              <a:t>Reprise de votre déroulement d'inventaire tournant, étape par étape. Chaque ligne est tirée de votre document — et chaque ligne est portée par l'Inventory Control.</a:t>
+            </a:r>
+            <a:endParaRPr lang="en-US" sz="1200" dirty="0"/>
           </a:p>
         </p:txBody>
       </p:sp>
@@ -6687,50 +3994,8 @@
         </p:nvSpPr>
         <p:spPr>
           <a:xfrm>
-            <a:off x="731520" y="4297680"/>
-            <a:ext cx="4206240" cy="731520"/>
-          </a:xfrm>
-          <a:prstGeom prst="rect">
-            <a:avLst/>
-          </a:prstGeom>
-          <a:noFill/>
-          <a:ln/>
-        </p:spPr>
-        <p:txBody>
-          <a:bodyPr wrap="square" lIns="0" tIns="0" rIns="0" bIns="0" rtlCol="0" anchor="t"/>
-          <a:lstStyle/>
-          <a:p>
-            <a:pPr indent="0" marL="0">
-              <a:lnSpc>
-                <a:spcPct val="115000"/>
-              </a:lnSpc>
-              <a:buNone/>
-            </a:pPr>
-            <a:r>
-              <a:rPr lang="en-US" sz="1200" dirty="0">
-                <a:solidFill>
-                  <a:srgbClr val="5B6475"/>
-                </a:solidFill>
-                <a:latin typeface="Arial" pitchFamily="34" charset="0"/>
-                <a:ea typeface="Arial" pitchFamily="34" charset="-122"/>
-                <a:cs typeface="Arial" pitchFamily="34" charset="-120"/>
-              </a:rPr>
-              <a:t>casquettes portées par l'Inventory Control à chaque inventaire : préparer, surveiller, réconcilier, corriger.</a:t>
-            </a:r>
-            <a:endParaRPr lang="en-US" sz="1200" dirty="0"/>
-          </a:p>
-        </p:txBody>
-      </p:sp>
-      <p:sp>
-        <p:nvSpPr>
-          <p:cNvPr id="9" name="Text 6"/>
-          <p:cNvSpPr/>
-          <p:nvPr/>
-        </p:nvSpPr>
-        <p:spPr>
-          <a:xfrm>
             <a:off x="5394960" y="1371600"/>
-            <a:ext cx="6062472" cy="4206240"/>
+            <a:ext cx="6062472" cy="4754880"/>
           </a:xfrm>
           <a:prstGeom prst="rect">
             <a:avLst/>
@@ -6747,7 +4012,7 @@
                 <a:spcPct val="118000"/>
               </a:lnSpc>
               <a:spcAft>
-                <a:spcPts val="1300"/>
+                <a:spcPts val="1600"/>
               </a:spcAft>
               <a:buNone/>
             </a:pPr>
@@ -6760,14 +4025,14 @@
                 <a:ea typeface="Arial" pitchFamily="34" charset="-122"/>
                 <a:cs typeface="Arial" pitchFamily="34" charset="-120"/>
               </a:rPr>
-              <a:t>La préparation. </a:t>
+              <a:t>La veille. </a:t>
             </a:r>
             <a:pPr indent="0" marL="0">
               <a:lnSpc>
                 <a:spcPct val="118000"/>
               </a:lnSpc>
               <a:spcAft>
-                <a:spcPts val="1300"/>
+                <a:spcPts val="1600"/>
               </a:spcAft>
               <a:buNone/>
             </a:pPr>
@@ -6780,7 +4045,7 @@
                 <a:ea typeface="Arial" pitchFamily="34" charset="-122"/>
                 <a:cs typeface="Arial" pitchFamily="34" charset="-120"/>
               </a:rPr>
-              <a:t>Le balisage, le stock du jour, la session, les terminaux, le briefing : la moitié de chaque inventaire ne compte aucun article.</a:t>
+              <a:t>Balisage des zones à inventorier, stickers posés avec une personne du floor ou du relay.</a:t>
             </a:r>
             <a:endParaRPr lang="en-US" sz="1300" dirty="0"/>
           </a:p>
@@ -6790,7 +4055,7 @@
                 <a:spcPct val="118000"/>
               </a:lnSpc>
               <a:spcAft>
-                <a:spcPts val="1300"/>
+                <a:spcPts val="1600"/>
               </a:spcAft>
               <a:buNone/>
             </a:pPr>
@@ -6803,14 +4068,14 @@
                 <a:ea typeface="Arial" pitchFamily="34" charset="-122"/>
                 <a:cs typeface="Arial" pitchFamily="34" charset="-120"/>
               </a:rPr>
-              <a:t>La surveillance. </a:t>
+              <a:t>Le matin. </a:t>
             </a:r>
             <a:pPr indent="0" marL="0">
               <a:lnSpc>
                 <a:spcPct val="118000"/>
               </a:lnSpc>
               <a:spcAft>
-                <a:spcPts val="1300"/>
+                <a:spcPts val="1600"/>
               </a:spcAft>
               <a:buNone/>
             </a:pPr>
@@ -6823,7 +4088,7 @@
                 <a:ea typeface="Arial" pitchFamily="34" charset="-122"/>
                 <a:cs typeface="Arial" pitchFamily="34" charset="-120"/>
               </a:rPr>
-              <a:t>Pendant tout le comptage, quelqu'un reste posté sur la plateforme pour suivre les audits et guetter les failed audits. Ce quelqu'un, c'est vous.</a:t>
+              <a:t>Télécharger le stock théorique du jour, ouvrir la session SmartCount, connecter les terminaux Zebra un par un — en vérifiant la date et la localisation de chacun (101 floor / BOH, 902 relay). Puis briefer les compteurs sur le maniement des terminaux et la procédure.</a:t>
             </a:r>
             <a:endParaRPr lang="en-US" sz="1300" dirty="0"/>
           </a:p>
@@ -6833,7 +4098,7 @@
                 <a:spcPct val="118000"/>
               </a:lnSpc>
               <a:spcAft>
-                <a:spcPts val="1300"/>
+                <a:spcPts val="1600"/>
               </a:spcAft>
               <a:buNone/>
             </a:pPr>
@@ -6846,14 +4111,14 @@
                 <a:ea typeface="Arial" pitchFamily="34" charset="-122"/>
                 <a:cs typeface="Arial" pitchFamily="34" charset="-120"/>
               </a:rPr>
-              <a:t>La réconciliation. </a:t>
+              <a:t>Pendant. </a:t>
             </a:r>
             <a:pPr indent="0" marL="0">
               <a:lnSpc>
                 <a:spcPct val="118000"/>
               </a:lnSpc>
               <a:spcAft>
-                <a:spcPts val="1300"/>
+                <a:spcPts val="1600"/>
               </a:spcAft>
               <a:buNone/>
             </a:pPr>
@@ -6866,7 +4131,7 @@
                 <a:ea typeface="Arial" pitchFamily="34" charset="-122"/>
                 <a:cs typeface="Arial" pitchFamily="34" charset="-120"/>
               </a:rPr>
-              <a:t>Deux fichiers à rapprocher à la main après chaque inventaire — le stock théorique et le SKU Variance. C'est long, et c'est là que les erreurs se glissent.</a:t>
+              <a:t>Déclencher l'audit des zones comptées — 100 % pour la W&amp;J, 30 % au moins ailleurs —, guetter les failed audits sur SmartCount, faire recompter les zones en désaccord.</a:t>
             </a:r>
             <a:endParaRPr lang="en-US" sz="1300" dirty="0"/>
           </a:p>
@@ -6876,7 +4141,7 @@
                 <a:spcPct val="118000"/>
               </a:lnSpc>
               <a:spcAft>
-                <a:spcPts val="1300"/>
+                <a:spcPts val="1600"/>
               </a:spcAft>
               <a:buNone/>
             </a:pPr>
@@ -6889,14 +4154,14 @@
                 <a:ea typeface="Arial" pitchFamily="34" charset="-122"/>
                 <a:cs typeface="Arial" pitchFamily="34" charset="-120"/>
               </a:rPr>
-              <a:t>La correction. </a:t>
+              <a:t>Après. </a:t>
             </a:r>
             <a:pPr indent="0" marL="0">
               <a:lnSpc>
                 <a:spcPct val="118000"/>
               </a:lnSpc>
               <a:spcAft>
-                <a:spcPts val="1300"/>
+                <a:spcPts val="1600"/>
               </a:spcAft>
               <a:buNone/>
             </a:pPr>
@@ -6909,7 +4174,7 @@
                 <a:ea typeface="Arial" pitchFamily="34" charset="-122"/>
                 <a:cs typeface="Arial" pitchFamily="34" charset="-120"/>
               </a:rPr>
-              <a:t>L'ajustement du stock, après validation. Avec le programme des inventaires, la seule chose qui doive vraiment rester entre vos mains.</a:t>
+              <a:t>Extraire le rapport SKU Variance, le consolider à la main avec le stock théorique, faire valider les résultats selon la valeur de l'écart (Inventory Control, PSM ou AGM), puis ajuster le stock.</a:t>
             </a:r>
             <a:endParaRPr lang="en-US" sz="1300" dirty="0"/>
           </a:p>
@@ -6917,115 +4182,7 @@
       </p:sp>
       <p:sp>
         <p:nvSpPr>
-          <p:cNvPr id="10" name="Shape 7"/>
-          <p:cNvSpPr/>
-          <p:nvPr/>
-        </p:nvSpPr>
-        <p:spPr>
-          <a:xfrm>
-            <a:off x="5394960" y="5212080"/>
-            <a:ext cx="6062472" cy="1097280"/>
-          </a:xfrm>
-          <a:prstGeom prst="roundRect">
-            <a:avLst>
-              <a:gd name="adj" fmla="val 6667"/>
-            </a:avLst>
-          </a:prstGeom>
-          <a:solidFill>
-            <a:srgbClr val="F4F5F9"/>
-          </a:solidFill>
-          <a:ln w="12700">
-            <a:solidFill>
-              <a:srgbClr val="F4F5F9"/>
-            </a:solidFill>
-            <a:prstDash val="solid"/>
-          </a:ln>
-        </p:spPr>
-      </p:sp>
-      <p:sp>
-        <p:nvSpPr>
-          <p:cNvPr id="11" name="Text 8"/>
-          <p:cNvSpPr/>
-          <p:nvPr/>
-        </p:nvSpPr>
-        <p:spPr>
-          <a:xfrm>
-            <a:off x="5669280" y="5376672"/>
-            <a:ext cx="5513832" cy="228600"/>
-          </a:xfrm>
-          <a:prstGeom prst="rect">
-            <a:avLst/>
-          </a:prstGeom>
-          <a:noFill/>
-          <a:ln/>
-        </p:spPr>
-        <p:txBody>
-          <a:bodyPr wrap="square" lIns="0" tIns="0" rIns="0" bIns="0" rtlCol="0" anchor="t"/>
-          <a:lstStyle/>
-          <a:p>
-            <a:pPr indent="0" marL="0">
-              <a:buNone/>
-            </a:pPr>
-            <a:r>
-              <a:rPr lang="en-US" sz="950" b="1" dirty="0">
-                <a:solidFill>
-                  <a:srgbClr val="5B6475"/>
-                </a:solidFill>
-                <a:latin typeface="Arial" pitchFamily="34" charset="0"/>
-                <a:ea typeface="Arial" pitchFamily="34" charset="-122"/>
-                <a:cs typeface="Arial" pitchFamily="34" charset="-120"/>
-              </a:rPr>
-              <a:t>L'idée de cette proposition</a:t>
-            </a:r>
-            <a:endParaRPr lang="en-US" sz="950" dirty="0"/>
-          </a:p>
-        </p:txBody>
-      </p:sp>
-      <p:sp>
-        <p:nvSpPr>
-          <p:cNvPr id="12" name="Text 9"/>
-          <p:cNvSpPr/>
-          <p:nvPr/>
-        </p:nvSpPr>
-        <p:spPr>
-          <a:xfrm>
-            <a:off x="5669280" y="5632704"/>
-            <a:ext cx="5513832" cy="548640"/>
-          </a:xfrm>
-          <a:prstGeom prst="rect">
-            <a:avLst/>
-          </a:prstGeom>
-          <a:noFill/>
-          <a:ln/>
-        </p:spPr>
-        <p:txBody>
-          <a:bodyPr wrap="square" lIns="0" tIns="0" rIns="0" bIns="0" rtlCol="0" anchor="t"/>
-          <a:lstStyle/>
-          <a:p>
-            <a:pPr indent="0" marL="0">
-              <a:lnSpc>
-                <a:spcPct val="115000"/>
-              </a:lnSpc>
-              <a:buNone/>
-            </a:pPr>
-            <a:r>
-              <a:rPr lang="en-US" sz="1150" i="1" dirty="0">
-                <a:solidFill>
-                  <a:srgbClr val="3D4556"/>
-                </a:solidFill>
-                <a:latin typeface="Arial" pitchFamily="34" charset="0"/>
-                <a:ea typeface="Arial" pitchFamily="34" charset="-122"/>
-                <a:cs typeface="Arial" pitchFamily="34" charset="-120"/>
-              </a:rPr>
-              <a:t>Rendre l'inventaire aux équipes de vente, du balisage au dernier scan : le chef d'équipe supervise, ses vendeurs comptent. L'Inventory Control fixe les règles, reçoit le rapport, valide et ajuste — il ne conduit plus rien.</a:t>
-            </a:r>
-            <a:endParaRPr lang="en-US" sz="1150" dirty="0"/>
-          </a:p>
-        </p:txBody>
-      </p:sp>
-      <p:sp>
-        <p:nvSpPr>
-          <p:cNvPr id="13" name="Text 10"/>
+          <p:cNvPr id="9" name="Text 6"/>
           <p:cNvSpPr/>
           <p:nvPr/>
         </p:nvSpPr>
@@ -7064,7 +4221,7 @@
       </p:sp>
       <p:sp>
         <p:nvSpPr>
-          <p:cNvPr id="14" name="Text 11"/>
+          <p:cNvPr id="10" name="Text 7"/>
           <p:cNvSpPr/>
           <p:nvPr/>
         </p:nvSpPr>
@@ -7229,7 +4386,7 @@
                 <a:ea typeface="Arial" pitchFamily="34" charset="-122"/>
                 <a:cs typeface="Arial" pitchFamily="34" charset="-120"/>
               </a:rPr>
-              <a:t>Qu'est-ce que Quantinvo</a:t>
+              <a:t>Ce qui change</a:t>
             </a:r>
             <a:endParaRPr lang="en-US" sz="1000" dirty="0"/>
           </a:p>
@@ -7268,8 +4425,8 @@
         </p:nvSpPr>
         <p:spPr>
           <a:xfrm>
-            <a:off x="731520" y="1371600"/>
-            <a:ext cx="4206240" cy="2194560"/>
+            <a:off x="731520" y="1143000"/>
+            <a:ext cx="10725912" cy="822960"/>
           </a:xfrm>
           <a:prstGeom prst="rect">
             <a:avLst/>
@@ -7283,12 +4440,12 @@
           <a:p>
             <a:pPr indent="0" marL="0">
               <a:lnSpc>
-                <a:spcPct val="115000"/>
+                <a:spcPct val="105000"/>
               </a:lnSpc>
               <a:buNone/>
             </a:pPr>
             <a:r>
-              <a:rPr lang="en-US" sz="2200" i="1" dirty="0">
+              <a:rPr lang="en-US" sz="2500" b="1" dirty="0">
                 <a:solidFill>
                   <a:srgbClr val="4636B0"/>
                 </a:solidFill>
@@ -7296,9 +4453,9 @@
                 <a:ea typeface="Arial" pitchFamily="34" charset="-122"/>
                 <a:cs typeface="Arial" pitchFamily="34" charset="-120"/>
               </a:rPr>
-              <a:t>« J'ai dessiné Quantinvo pendant des inventaires, pas dans une salle de réunion. »</a:t>
-            </a:r>
-            <a:endParaRPr lang="en-US" sz="2200" dirty="0"/>
+              <a:t>Le déroulement ne change pas. Ce qui change, c'est qui le porte.</a:t>
+            </a:r>
+            <a:endParaRPr lang="en-US" sz="2500" dirty="0"/>
           </a:p>
         </p:txBody>
       </p:sp>
@@ -7310,8 +4467,8 @@
         </p:nvSpPr>
         <p:spPr>
           <a:xfrm>
-            <a:off x="731520" y="3154680"/>
-            <a:ext cx="4206240" cy="365760"/>
+            <a:off x="731520" y="1828800"/>
+            <a:ext cx="10725912" cy="365760"/>
           </a:xfrm>
           <a:prstGeom prst="rect">
             <a:avLst/>
@@ -7330,7 +4487,7 @@
               <a:buNone/>
             </a:pPr>
             <a:r>
-              <a:rPr lang="en-US" sz="1200" dirty="0">
+              <a:rPr lang="en-US" sz="1200" i="1" dirty="0">
                 <a:solidFill>
                   <a:srgbClr val="5B6475"/>
                 </a:solidFill>
@@ -7338,7 +4495,7 @@
                 <a:ea typeface="Arial" pitchFamily="34" charset="-122"/>
                 <a:cs typeface="Arial" pitchFamily="34" charset="-120"/>
               </a:rPr>
-              <a:t>Julien Thiong-kay, Devkaylab</a:t>
+              <a:t>Votre journée, ligne à ligne, et la même conduite par les équipes de vente.</a:t>
             </a:r>
             <a:endParaRPr lang="en-US" sz="1200" dirty="0"/>
           </a:p>
@@ -7352,8 +4509,8 @@
         </p:nvSpPr>
         <p:spPr>
           <a:xfrm>
-            <a:off x="5394960" y="1371600"/>
-            <a:ext cx="6062472" cy="4572000"/>
+            <a:off x="731520" y="2331720"/>
+            <a:ext cx="5088636" cy="274320"/>
           </a:xfrm>
           <a:prstGeom prst="rect">
             <a:avLst/>
@@ -7366,16 +4523,131 @@
           <a:lstStyle/>
           <a:p>
             <a:pPr indent="0" marL="0">
+              <a:buNone/>
+            </a:pPr>
+            <a:r>
+              <a:rPr lang="en-US" sz="1050" b="1" dirty="0">
+                <a:solidFill>
+                  <a:srgbClr val="5B6475"/>
+                </a:solidFill>
+                <a:latin typeface="Arial" pitchFamily="34" charset="0"/>
+                <a:ea typeface="Arial" pitchFamily="34" charset="-122"/>
+                <a:cs typeface="Arial" pitchFamily="34" charset="-120"/>
+              </a:rPr>
+              <a:t>Aujourd'hui</a:t>
+            </a:r>
+            <a:endParaRPr lang="en-US" sz="1050" dirty="0"/>
+          </a:p>
+        </p:txBody>
+      </p:sp>
+      <p:sp>
+        <p:nvSpPr>
+          <p:cNvPr id="9" name="Text 6"/>
+          <p:cNvSpPr/>
+          <p:nvPr/>
+        </p:nvSpPr>
+        <p:spPr>
+          <a:xfrm>
+            <a:off x="6368796" y="2331720"/>
+            <a:ext cx="5088636" cy="274320"/>
+          </a:xfrm>
+          <a:prstGeom prst="rect">
+            <a:avLst/>
+          </a:prstGeom>
+          <a:noFill/>
+          <a:ln/>
+        </p:spPr>
+        <p:txBody>
+          <a:bodyPr wrap="square" lIns="0" tIns="0" rIns="0" bIns="0" rtlCol="0" anchor="t"/>
+          <a:lstStyle/>
+          <a:p>
+            <a:pPr indent="0" marL="0">
+              <a:buNone/>
+            </a:pPr>
+            <a:r>
+              <a:rPr lang="en-US" sz="1050" b="1" dirty="0">
+                <a:solidFill>
+                  <a:srgbClr val="4636B0"/>
+                </a:solidFill>
+                <a:latin typeface="Arial" pitchFamily="34" charset="0"/>
+                <a:ea typeface="Arial" pitchFamily="34" charset="-122"/>
+                <a:cs typeface="Arial" pitchFamily="34" charset="-120"/>
+              </a:rPr>
+              <a:t>Avec Quantinvo</a:t>
+            </a:r>
+            <a:endParaRPr lang="en-US" sz="1050" dirty="0"/>
+          </a:p>
+        </p:txBody>
+      </p:sp>
+      <p:sp>
+        <p:nvSpPr>
+          <p:cNvPr id="10" name="Shape 7"/>
+          <p:cNvSpPr/>
+          <p:nvPr/>
+        </p:nvSpPr>
+        <p:spPr>
+          <a:xfrm>
+            <a:off x="731520" y="2679192"/>
+            <a:ext cx="10725912" cy="0"/>
+          </a:xfrm>
+          <a:prstGeom prst="line">
+            <a:avLst/>
+          </a:prstGeom>
+          <a:noFill/>
+          <a:ln w="9525">
+            <a:solidFill>
+              <a:srgbClr val="E3E6EE"/>
+            </a:solidFill>
+            <a:prstDash val="solid"/>
+          </a:ln>
+        </p:spPr>
+      </p:sp>
+      <p:sp>
+        <p:nvSpPr>
+          <p:cNvPr id="11" name="Text 8"/>
+          <p:cNvSpPr/>
+          <p:nvPr/>
+        </p:nvSpPr>
+        <p:spPr>
+          <a:xfrm>
+            <a:off x="731520" y="2807208"/>
+            <a:ext cx="5088636" cy="548640"/>
+          </a:xfrm>
+          <a:prstGeom prst="rect">
+            <a:avLst/>
+          </a:prstGeom>
+          <a:noFill/>
+          <a:ln/>
+        </p:spPr>
+        <p:txBody>
+          <a:bodyPr wrap="square" lIns="0" tIns="0" rIns="0" bIns="0" rtlCol="0" anchor="t"/>
+          <a:lstStyle/>
+          <a:p>
+            <a:pPr indent="0" marL="0">
               <a:lnSpc>
-                <a:spcPct val="118000"/>
+                <a:spcPct val="115000"/>
               </a:lnSpc>
-              <a:spcAft>
-                <a:spcPts val="1300"/>
-              </a:spcAft>
-              <a:buNone/>
-            </a:pPr>
-            <a:r>
-              <a:rPr lang="en-US" sz="1300" dirty="0">
+              <a:buNone/>
+            </a:pPr>
+            <a:r>
+              <a:rPr lang="en-US" sz="1150" b="1" dirty="0">
+                <a:solidFill>
+                  <a:srgbClr val="0B0F19"/>
+                </a:solidFill>
+                <a:latin typeface="Arial" pitchFamily="34" charset="0"/>
+                <a:ea typeface="Arial" pitchFamily="34" charset="-122"/>
+                <a:cs typeface="Arial" pitchFamily="34" charset="-120"/>
+              </a:rPr>
+              <a:t>La veille. </a:t>
+            </a:r>
+            <a:pPr indent="0" marL="0">
+              <a:lnSpc>
+                <a:spcPct val="115000"/>
+              </a:lnSpc>
+              <a:buNone/>
+            </a:pPr>
+            <a:r>
+              <a:rPr lang="en-US" sz="1150" dirty="0">
                 <a:solidFill>
                   <a:srgbClr val="3D4556"/>
                 </a:solidFill>
@@ -7383,22 +4655,41 @@
                 <a:ea typeface="Arial" pitchFamily="34" charset="-122"/>
                 <a:cs typeface="Arial" pitchFamily="34" charset="-120"/>
               </a:rPr>
-              <a:t>Quantinvo est un outil d'inventaire complet : une application sur l'iPhone des compteurs, un tableau de bord web pour celui qui pilote, un rapport à la fin. Rien d'autre à installer, rien à acheter.</a:t>
-            </a:r>
-            <a:endParaRPr lang="en-US" sz="1300" dirty="0"/>
-          </a:p>
+              <a:t>Balisage par l'Inventory Control, stickers posés avec une personne du floor ou du relay.</a:t>
+            </a:r>
+            <a:endParaRPr lang="en-US" sz="1150" dirty="0"/>
+          </a:p>
+        </p:txBody>
+      </p:sp>
+      <p:sp>
+        <p:nvSpPr>
+          <p:cNvPr id="12" name="Text 9"/>
+          <p:cNvSpPr/>
+          <p:nvPr/>
+        </p:nvSpPr>
+        <p:spPr>
+          <a:xfrm>
+            <a:off x="6368796" y="2807208"/>
+            <a:ext cx="5088636" cy="548640"/>
+          </a:xfrm>
+          <a:prstGeom prst="rect">
+            <a:avLst/>
+          </a:prstGeom>
+          <a:noFill/>
+          <a:ln/>
+        </p:spPr>
+        <p:txBody>
+          <a:bodyPr wrap="square" lIns="0" tIns="0" rIns="0" bIns="0" rtlCol="0" anchor="t"/>
+          <a:lstStyle/>
           <a:p>
             <a:pPr indent="0" marL="0">
               <a:lnSpc>
-                <a:spcPct val="118000"/>
+                <a:spcPct val="115000"/>
               </a:lnSpc>
-              <a:spcAft>
-                <a:spcPts val="1300"/>
-              </a:spcAft>
-              <a:buNone/>
-            </a:pPr>
-            <a:r>
-              <a:rPr lang="en-US" sz="1300" b="1" dirty="0">
+              <a:buNone/>
+            </a:pPr>
+            <a:r>
+              <a:rPr lang="en-US" sz="1150" dirty="0">
                 <a:solidFill>
                   <a:srgbClr val="0B0F19"/>
                 </a:solidFill>
@@ -7406,19 +4697,81 @@
                 <a:ea typeface="Arial" pitchFamily="34" charset="-122"/>
                 <a:cs typeface="Arial" pitchFamily="34" charset="-120"/>
               </a:rPr>
-              <a:t>Né du terrain. </a:t>
-            </a:r>
+              <a:t>Le chef d'équipe imprime ses balises — une planche d'étiquettes numérotées, en PDF — et les pose avec son équipe.</a:t>
+            </a:r>
+            <a:endParaRPr lang="en-US" sz="1150" dirty="0"/>
+          </a:p>
+        </p:txBody>
+      </p:sp>
+      <p:sp>
+        <p:nvSpPr>
+          <p:cNvPr id="13" name="Shape 10"/>
+          <p:cNvSpPr/>
+          <p:nvPr/>
+        </p:nvSpPr>
+        <p:spPr>
+          <a:xfrm>
+            <a:off x="731520" y="3374136"/>
+            <a:ext cx="10725912" cy="0"/>
+          </a:xfrm>
+          <a:prstGeom prst="line">
+            <a:avLst/>
+          </a:prstGeom>
+          <a:noFill/>
+          <a:ln w="9525">
+            <a:solidFill>
+              <a:srgbClr val="E3E6EE"/>
+            </a:solidFill>
+            <a:prstDash val="solid"/>
+          </a:ln>
+        </p:spPr>
+      </p:sp>
+      <p:sp>
+        <p:nvSpPr>
+          <p:cNvPr id="14" name="Text 11"/>
+          <p:cNvSpPr/>
+          <p:nvPr/>
+        </p:nvSpPr>
+        <p:spPr>
+          <a:xfrm>
+            <a:off x="731520" y="3502152"/>
+            <a:ext cx="5088636" cy="548640"/>
+          </a:xfrm>
+          <a:prstGeom prst="rect">
+            <a:avLst/>
+          </a:prstGeom>
+          <a:noFill/>
+          <a:ln/>
+        </p:spPr>
+        <p:txBody>
+          <a:bodyPr wrap="square" lIns="0" tIns="0" rIns="0" bIns="0" rtlCol="0" anchor="t"/>
+          <a:lstStyle/>
+          <a:p>
             <a:pPr indent="0" marL="0">
               <a:lnSpc>
-                <a:spcPct val="118000"/>
+                <a:spcPct val="115000"/>
               </a:lnSpc>
-              <a:spcAft>
-                <a:spcPts val="1300"/>
-              </a:spcAft>
-              <a:buNone/>
-            </a:pPr>
-            <a:r>
-              <a:rPr lang="en-US" sz="1300" dirty="0">
+              <a:buNone/>
+            </a:pPr>
+            <a:r>
+              <a:rPr lang="en-US" sz="1150" b="1" dirty="0">
+                <a:solidFill>
+                  <a:srgbClr val="0B0F19"/>
+                </a:solidFill>
+                <a:latin typeface="Arial" pitchFamily="34" charset="0"/>
+                <a:ea typeface="Arial" pitchFamily="34" charset="-122"/>
+                <a:cs typeface="Arial" pitchFamily="34" charset="-120"/>
+              </a:rPr>
+              <a:t>Le matin. </a:t>
+            </a:r>
+            <a:pPr indent="0" marL="0">
+              <a:lnSpc>
+                <a:spcPct val="115000"/>
+              </a:lnSpc>
+              <a:buNone/>
+            </a:pPr>
+            <a:r>
+              <a:rPr lang="en-US" sz="1150" dirty="0">
                 <a:solidFill>
                   <a:srgbClr val="3D4556"/>
                 </a:solidFill>
@@ -7426,22 +4779,41 @@
                 <a:ea typeface="Arial" pitchFamily="34" charset="-122"/>
                 <a:cs typeface="Arial" pitchFamily="34" charset="-120"/>
               </a:rPr>
-              <a:t>Je fais du contrôle des stocks en magasin. La balise qu'on ne retrouve pas, la réserve sans réseau, la consolidation qui prend l'après-midi : Quantinvo est la réponse à ces irritants, et rien de plus.</a:t>
-            </a:r>
-            <a:endParaRPr lang="en-US" sz="1300" dirty="0"/>
-          </a:p>
+              <a:t>Stock théorique à télécharger, session à ouvrir, terminaux à connecter et vérifier un par un, briefing sur le matériel.</a:t>
+            </a:r>
+            <a:endParaRPr lang="en-US" sz="1150" dirty="0"/>
+          </a:p>
+        </p:txBody>
+      </p:sp>
+      <p:sp>
+        <p:nvSpPr>
+          <p:cNvPr id="15" name="Text 12"/>
+          <p:cNvSpPr/>
+          <p:nvPr/>
+        </p:nvSpPr>
+        <p:spPr>
+          <a:xfrm>
+            <a:off x="6368796" y="3502152"/>
+            <a:ext cx="5088636" cy="548640"/>
+          </a:xfrm>
+          <a:prstGeom prst="rect">
+            <a:avLst/>
+          </a:prstGeom>
+          <a:noFill/>
+          <a:ln/>
+        </p:spPr>
+        <p:txBody>
+          <a:bodyPr wrap="square" lIns="0" tIns="0" rIns="0" bIns="0" rtlCol="0" anchor="t"/>
+          <a:lstStyle/>
           <a:p>
             <a:pPr indent="0" marL="0">
               <a:lnSpc>
-                <a:spcPct val="118000"/>
+                <a:spcPct val="115000"/>
               </a:lnSpc>
-              <a:spcAft>
-                <a:spcPts val="1300"/>
-              </a:spcAft>
-              <a:buNone/>
-            </a:pPr>
-            <a:r>
-              <a:rPr lang="en-US" sz="1300" b="1" dirty="0">
+              <a:buNone/>
+            </a:pPr>
+            <a:r>
+              <a:rPr lang="en-US" sz="1150" dirty="0">
                 <a:solidFill>
                   <a:srgbClr val="0B0F19"/>
                 </a:solidFill>
@@ -7449,19 +4821,81 @@
                 <a:ea typeface="Arial" pitchFamily="34" charset="-122"/>
                 <a:cs typeface="Arial" pitchFamily="34" charset="-120"/>
               </a:rPr>
-              <a:t>Assez simple pour le floor. </a:t>
-            </a:r>
+              <a:t>Il importe le stock théorique tel quel, colonnes reconnues, et ouvre l'inventaire. Chaque vendeur le rejoint depuis son téléphone.</a:t>
+            </a:r>
+            <a:endParaRPr lang="en-US" sz="1150" dirty="0"/>
+          </a:p>
+        </p:txBody>
+      </p:sp>
+      <p:sp>
+        <p:nvSpPr>
+          <p:cNvPr id="16" name="Shape 13"/>
+          <p:cNvSpPr/>
+          <p:nvPr/>
+        </p:nvSpPr>
+        <p:spPr>
+          <a:xfrm>
+            <a:off x="731520" y="4069080"/>
+            <a:ext cx="10725912" cy="0"/>
+          </a:xfrm>
+          <a:prstGeom prst="line">
+            <a:avLst/>
+          </a:prstGeom>
+          <a:noFill/>
+          <a:ln w="9525">
+            <a:solidFill>
+              <a:srgbClr val="E3E6EE"/>
+            </a:solidFill>
+            <a:prstDash val="solid"/>
+          </a:ln>
+        </p:spPr>
+      </p:sp>
+      <p:sp>
+        <p:nvSpPr>
+          <p:cNvPr id="17" name="Text 14"/>
+          <p:cNvSpPr/>
+          <p:nvPr/>
+        </p:nvSpPr>
+        <p:spPr>
+          <a:xfrm>
+            <a:off x="731520" y="4197096"/>
+            <a:ext cx="5088636" cy="548640"/>
+          </a:xfrm>
+          <a:prstGeom prst="rect">
+            <a:avLst/>
+          </a:prstGeom>
+          <a:noFill/>
+          <a:ln/>
+        </p:spPr>
+        <p:txBody>
+          <a:bodyPr wrap="square" lIns="0" tIns="0" rIns="0" bIns="0" rtlCol="0" anchor="t"/>
+          <a:lstStyle/>
+          <a:p>
             <a:pPr indent="0" marL="0">
               <a:lnSpc>
-                <a:spcPct val="118000"/>
+                <a:spcPct val="115000"/>
               </a:lnSpc>
-              <a:spcAft>
-                <a:spcPts val="1300"/>
-              </a:spcAft>
-              <a:buNone/>
-            </a:pPr>
-            <a:r>
-              <a:rPr lang="en-US" sz="1300" dirty="0">
+              <a:buNone/>
+            </a:pPr>
+            <a:r>
+              <a:rPr lang="en-US" sz="1150" b="1" dirty="0">
+                <a:solidFill>
+                  <a:srgbClr val="0B0F19"/>
+                </a:solidFill>
+                <a:latin typeface="Arial" pitchFamily="34" charset="0"/>
+                <a:ea typeface="Arial" pitchFamily="34" charset="-122"/>
+                <a:cs typeface="Arial" pitchFamily="34" charset="-120"/>
+              </a:rPr>
+              <a:t>Pendant. </a:t>
+            </a:r>
+            <a:pPr indent="0" marL="0">
+              <a:lnSpc>
+                <a:spcPct val="115000"/>
+              </a:lnSpc>
+              <a:buNone/>
+            </a:pPr>
+            <a:r>
+              <a:rPr lang="en-US" sz="1150" dirty="0">
                 <a:solidFill>
                   <a:srgbClr val="3D4556"/>
                 </a:solidFill>
@@ -7469,22 +4903,41 @@
                 <a:ea typeface="Arial" pitchFamily="34" charset="-122"/>
                 <a:cs typeface="Arial" pitchFamily="34" charset="-120"/>
               </a:rPr>
-              <a:t>Prise en main en dix minutes, sans briefing matériel : c'est ce qui permet de confier l'inventaire aux équipes de vente plutôt qu'à un service spécialisé.</a:t>
-            </a:r>
-            <a:endParaRPr lang="en-US" sz="1300" dirty="0"/>
-          </a:p>
+              <a:t>Quelqu'un reste posté sur la plateforme pour guetter les failed audits et faire recompter les zones.</a:t>
+            </a:r>
+            <a:endParaRPr lang="en-US" sz="1150" dirty="0"/>
+          </a:p>
+        </p:txBody>
+      </p:sp>
+      <p:sp>
+        <p:nvSpPr>
+          <p:cNvPr id="18" name="Text 15"/>
+          <p:cNvSpPr/>
+          <p:nvPr/>
+        </p:nvSpPr>
+        <p:spPr>
+          <a:xfrm>
+            <a:off x="6368796" y="4197096"/>
+            <a:ext cx="5088636" cy="548640"/>
+          </a:xfrm>
+          <a:prstGeom prst="rect">
+            <a:avLst/>
+          </a:prstGeom>
+          <a:noFill/>
+          <a:ln/>
+        </p:spPr>
+        <p:txBody>
+          <a:bodyPr wrap="square" lIns="0" tIns="0" rIns="0" bIns="0" rtlCol="0" anchor="t"/>
+          <a:lstStyle/>
           <a:p>
             <a:pPr indent="0" marL="0">
               <a:lnSpc>
-                <a:spcPct val="118000"/>
+                <a:spcPct val="115000"/>
               </a:lnSpc>
-              <a:spcAft>
-                <a:spcPts val="1300"/>
-              </a:spcAft>
-              <a:buNone/>
-            </a:pPr>
-            <a:r>
-              <a:rPr lang="en-US" sz="1300" b="1" dirty="0">
+              <a:buNone/>
+            </a:pPr>
+            <a:r>
+              <a:rPr lang="en-US" sz="1150" dirty="0">
                 <a:solidFill>
                   <a:srgbClr val="0B0F19"/>
                 </a:solidFill>
@@ -7492,19 +4945,81 @@
                 <a:ea typeface="Arial" pitchFamily="34" charset="-122"/>
                 <a:cs typeface="Arial" pitchFamily="34" charset="-120"/>
               </a:rPr>
-              <a:t>Pensé pour l'inventaire tournant. </a:t>
-            </a:r>
+              <a:t>Le chef d'équipe suit l'avancement, audite selon votre règle et tranche les désaccords au rayon, en direct.</a:t>
+            </a:r>
+            <a:endParaRPr lang="en-US" sz="1150" dirty="0"/>
+          </a:p>
+        </p:txBody>
+      </p:sp>
+      <p:sp>
+        <p:nvSpPr>
+          <p:cNvPr id="19" name="Shape 16"/>
+          <p:cNvSpPr/>
+          <p:nvPr/>
+        </p:nvSpPr>
+        <p:spPr>
+          <a:xfrm>
+            <a:off x="731520" y="4764024"/>
+            <a:ext cx="10725912" cy="0"/>
+          </a:xfrm>
+          <a:prstGeom prst="line">
+            <a:avLst/>
+          </a:prstGeom>
+          <a:noFill/>
+          <a:ln w="9525">
+            <a:solidFill>
+              <a:srgbClr val="E3E6EE"/>
+            </a:solidFill>
+            <a:prstDash val="solid"/>
+          </a:ln>
+        </p:spPr>
+      </p:sp>
+      <p:sp>
+        <p:nvSpPr>
+          <p:cNvPr id="20" name="Text 17"/>
+          <p:cNvSpPr/>
+          <p:nvPr/>
+        </p:nvSpPr>
+        <p:spPr>
+          <a:xfrm>
+            <a:off x="731520" y="4892040"/>
+            <a:ext cx="5088636" cy="548640"/>
+          </a:xfrm>
+          <a:prstGeom prst="rect">
+            <a:avLst/>
+          </a:prstGeom>
+          <a:noFill/>
+          <a:ln/>
+        </p:spPr>
+        <p:txBody>
+          <a:bodyPr wrap="square" lIns="0" tIns="0" rIns="0" bIns="0" rtlCol="0" anchor="t"/>
+          <a:lstStyle/>
+          <a:p>
             <a:pPr indent="0" marL="0">
               <a:lnSpc>
-                <a:spcPct val="118000"/>
+                <a:spcPct val="115000"/>
               </a:lnSpc>
-              <a:spcAft>
-                <a:spcPts val="1300"/>
-              </a:spcAft>
-              <a:buNone/>
-            </a:pPr>
-            <a:r>
-              <a:rPr lang="en-US" sz="1300" dirty="0">
+              <a:buNone/>
+            </a:pPr>
+            <a:r>
+              <a:rPr lang="en-US" sz="1150" b="1" dirty="0">
+                <a:solidFill>
+                  <a:srgbClr val="0B0F19"/>
+                </a:solidFill>
+                <a:latin typeface="Arial" pitchFamily="34" charset="0"/>
+                <a:ea typeface="Arial" pitchFamily="34" charset="-122"/>
+                <a:cs typeface="Arial" pitchFamily="34" charset="-120"/>
+              </a:rPr>
+              <a:t>Après. </a:t>
+            </a:r>
+            <a:pPr indent="0" marL="0">
+              <a:lnSpc>
+                <a:spcPct val="115000"/>
+              </a:lnSpc>
+              <a:buNone/>
+            </a:pPr>
+            <a:r>
+              <a:rPr lang="en-US" sz="1150" dirty="0">
                 <a:solidFill>
                   <a:srgbClr val="3D4556"/>
                 </a:solidFill>
@@ -7512,15 +5027,204 @@
                 <a:ea typeface="Arial" pitchFamily="34" charset="-122"/>
                 <a:cs typeface="Arial" pitchFamily="34" charset="-120"/>
               </a:rPr>
-              <a:t>Des comptages toute l'année — un rayon, une marque, une liste d'articles — plutôt qu'une nuit par an. C'est le cœur de l'outil, pas une option.</a:t>
-            </a:r>
-            <a:endParaRPr lang="en-US" sz="1300" dirty="0"/>
-          </a:p>
-        </p:txBody>
-      </p:sp>
-      <p:sp>
-        <p:nvSpPr>
-          <p:cNvPr id="9" name="Text 6"/>
+              <a:t>Le SKU Variance à extraire, puis à consolider à la main avec le stock théorique.</a:t>
+            </a:r>
+            <a:endParaRPr lang="en-US" sz="1150" dirty="0"/>
+          </a:p>
+        </p:txBody>
+      </p:sp>
+      <p:sp>
+        <p:nvSpPr>
+          <p:cNvPr id="21" name="Text 18"/>
+          <p:cNvSpPr/>
+          <p:nvPr/>
+        </p:nvSpPr>
+        <p:spPr>
+          <a:xfrm>
+            <a:off x="6368796" y="4892040"/>
+            <a:ext cx="5088636" cy="548640"/>
+          </a:xfrm>
+          <a:prstGeom prst="rect">
+            <a:avLst/>
+          </a:prstGeom>
+          <a:noFill/>
+          <a:ln/>
+        </p:spPr>
+        <p:txBody>
+          <a:bodyPr wrap="square" lIns="0" tIns="0" rIns="0" bIns="0" rtlCol="0" anchor="t"/>
+          <a:lstStyle/>
+          <a:p>
+            <a:pPr indent="0" marL="0">
+              <a:lnSpc>
+                <a:spcPct val="115000"/>
+              </a:lnSpc>
+              <a:buNone/>
+            </a:pPr>
+            <a:r>
+              <a:rPr lang="en-US" sz="1150" dirty="0">
+                <a:solidFill>
+                  <a:srgbClr val="0B0F19"/>
+                </a:solidFill>
+                <a:latin typeface="Arial" pitchFamily="34" charset="0"/>
+                <a:ea typeface="Arial" pitchFamily="34" charset="-122"/>
+                <a:cs typeface="Arial" pitchFamily="34" charset="-120"/>
+              </a:rPr>
+              <a:t>Le rapport arrive déjà croisé avec l'attendu, prêt pour la validation.</a:t>
+            </a:r>
+            <a:endParaRPr lang="en-US" sz="1150" dirty="0"/>
+          </a:p>
+        </p:txBody>
+      </p:sp>
+      <p:sp>
+        <p:nvSpPr>
+          <p:cNvPr id="22" name="Shape 19"/>
+          <p:cNvSpPr/>
+          <p:nvPr/>
+        </p:nvSpPr>
+        <p:spPr>
+          <a:xfrm>
+            <a:off x="731520" y="5458968"/>
+            <a:ext cx="10725912" cy="0"/>
+          </a:xfrm>
+          <a:prstGeom prst="line">
+            <a:avLst/>
+          </a:prstGeom>
+          <a:noFill/>
+          <a:ln w="9525">
+            <a:solidFill>
+              <a:srgbClr val="E3E6EE"/>
+            </a:solidFill>
+            <a:prstDash val="solid"/>
+          </a:ln>
+        </p:spPr>
+      </p:sp>
+      <p:sp>
+        <p:nvSpPr>
+          <p:cNvPr id="23" name="Text 20"/>
+          <p:cNvSpPr/>
+          <p:nvPr/>
+        </p:nvSpPr>
+        <p:spPr>
+          <a:xfrm>
+            <a:off x="731520" y="5586984"/>
+            <a:ext cx="5088636" cy="548640"/>
+          </a:xfrm>
+          <a:prstGeom prst="rect">
+            <a:avLst/>
+          </a:prstGeom>
+          <a:noFill/>
+          <a:ln/>
+        </p:spPr>
+        <p:txBody>
+          <a:bodyPr wrap="square" lIns="0" tIns="0" rIns="0" bIns="0" rtlCol="0" anchor="t"/>
+          <a:lstStyle/>
+          <a:p>
+            <a:pPr indent="0" marL="0">
+              <a:lnSpc>
+                <a:spcPct val="115000"/>
+              </a:lnSpc>
+              <a:buNone/>
+            </a:pPr>
+            <a:r>
+              <a:rPr lang="en-US" sz="1150" b="1" dirty="0">
+                <a:solidFill>
+                  <a:srgbClr val="0B0F19"/>
+                </a:solidFill>
+                <a:latin typeface="Arial" pitchFamily="34" charset="0"/>
+                <a:ea typeface="Arial" pitchFamily="34" charset="-122"/>
+                <a:cs typeface="Arial" pitchFamily="34" charset="-120"/>
+              </a:rPr>
+              <a:t>Au total. </a:t>
+            </a:r>
+            <a:pPr indent="0" marL="0">
+              <a:lnSpc>
+                <a:spcPct val="115000"/>
+              </a:lnSpc>
+              <a:buNone/>
+            </a:pPr>
+            <a:r>
+              <a:rPr lang="en-US" sz="1150" dirty="0">
+                <a:solidFill>
+                  <a:srgbClr val="3D4556"/>
+                </a:solidFill>
+                <a:latin typeface="Arial" pitchFamily="34" charset="0"/>
+                <a:ea typeface="Arial" pitchFamily="34" charset="-122"/>
+                <a:cs typeface="Arial" pitchFamily="34" charset="-120"/>
+              </a:rPr>
+              <a:t>Quatre casquettes pour l'Inventory Control : préparer, surveiller, réconcilier, corriger.</a:t>
+            </a:r>
+            <a:endParaRPr lang="en-US" sz="1150" dirty="0"/>
+          </a:p>
+        </p:txBody>
+      </p:sp>
+      <p:sp>
+        <p:nvSpPr>
+          <p:cNvPr id="24" name="Text 21"/>
+          <p:cNvSpPr/>
+          <p:nvPr/>
+        </p:nvSpPr>
+        <p:spPr>
+          <a:xfrm>
+            <a:off x="6368796" y="5586984"/>
+            <a:ext cx="5088636" cy="548640"/>
+          </a:xfrm>
+          <a:prstGeom prst="rect">
+            <a:avLst/>
+          </a:prstGeom>
+          <a:noFill/>
+          <a:ln/>
+        </p:spPr>
+        <p:txBody>
+          <a:bodyPr wrap="square" lIns="0" tIns="0" rIns="0" bIns="0" rtlCol="0" anchor="t"/>
+          <a:lstStyle/>
+          <a:p>
+            <a:pPr indent="0" marL="0">
+              <a:lnSpc>
+                <a:spcPct val="115000"/>
+              </a:lnSpc>
+              <a:buNone/>
+            </a:pPr>
+            <a:r>
+              <a:rPr lang="en-US" sz="1150" dirty="0">
+                <a:solidFill>
+                  <a:srgbClr val="0B0F19"/>
+                </a:solidFill>
+                <a:latin typeface="Arial" pitchFamily="34" charset="0"/>
+                <a:ea typeface="Arial" pitchFamily="34" charset="-122"/>
+                <a:cs typeface="Arial" pitchFamily="34" charset="-120"/>
+              </a:rPr>
+              <a:t>Une seule vous reste : valider l'écart, ajuster le stock.</a:t>
+            </a:r>
+            <a:endParaRPr lang="en-US" sz="1150" dirty="0"/>
+          </a:p>
+        </p:txBody>
+      </p:sp>
+      <p:sp>
+        <p:nvSpPr>
+          <p:cNvPr id="25" name="Shape 22"/>
+          <p:cNvSpPr/>
+          <p:nvPr/>
+        </p:nvSpPr>
+        <p:spPr>
+          <a:xfrm>
+            <a:off x="731520" y="6153912"/>
+            <a:ext cx="10725912" cy="0"/>
+          </a:xfrm>
+          <a:prstGeom prst="line">
+            <a:avLst/>
+          </a:prstGeom>
+          <a:noFill/>
+          <a:ln w="9525">
+            <a:solidFill>
+              <a:srgbClr val="E3E6EE"/>
+            </a:solidFill>
+            <a:prstDash val="solid"/>
+          </a:ln>
+        </p:spPr>
+      </p:sp>
+      <p:sp>
+        <p:nvSpPr>
+          <p:cNvPr id="26" name="Text 23"/>
           <p:cNvSpPr/>
           <p:nvPr/>
         </p:nvSpPr>
@@ -7559,7 +5263,7 @@
       </p:sp>
       <p:sp>
         <p:nvSpPr>
-          <p:cNvPr id="10" name="Text 7"/>
+          <p:cNvPr id="27" name="Text 24"/>
           <p:cNvSpPr/>
           <p:nvPr/>
         </p:nvSpPr>
@@ -7763,7 +5467,7 @@
         </p:nvSpPr>
         <p:spPr>
           <a:xfrm>
-            <a:off x="731520" y="1234440"/>
+            <a:off x="731520" y="1143000"/>
             <a:ext cx="10725912" cy="822960"/>
           </a:xfrm>
           <a:prstGeom prst="rect">
@@ -7805,7 +5509,49 @@
         </p:nvSpPr>
         <p:spPr>
           <a:xfrm>
-            <a:off x="731520" y="1965960"/>
+            <a:off x="731520" y="1737360"/>
+            <a:ext cx="10725912" cy="365760"/>
+          </a:xfrm>
+          <a:prstGeom prst="rect">
+            <a:avLst/>
+          </a:prstGeom>
+          <a:noFill/>
+          <a:ln/>
+        </p:spPr>
+        <p:txBody>
+          <a:bodyPr wrap="square" lIns="0" tIns="0" rIns="0" bIns="0" rtlCol="0" anchor="t"/>
+          <a:lstStyle/>
+          <a:p>
+            <a:pPr algn="l" indent="0" marL="0">
+              <a:lnSpc>
+                <a:spcPct val="118000"/>
+              </a:lnSpc>
+              <a:buNone/>
+            </a:pPr>
+            <a:r>
+              <a:rPr lang="en-US" sz="1200" dirty="0">
+                <a:solidFill>
+                  <a:srgbClr val="5B6475"/>
+                </a:solidFill>
+                <a:latin typeface="Arial" pitchFamily="34" charset="0"/>
+                <a:ea typeface="Arial" pitchFamily="34" charset="-122"/>
+                <a:cs typeface="Arial" pitchFamily="34" charset="-120"/>
+              </a:rPr>
+              <a:t>Une application sur l'iPhone des compteurs, un tableau de bord pour celui qui pilote, un rapport à la fin. Rien d'autre à installer, rien à acheter.</a:t>
+            </a:r>
+            <a:endParaRPr lang="en-US" sz="1200" dirty="0"/>
+          </a:p>
+        </p:txBody>
+      </p:sp>
+      <p:sp>
+        <p:nvSpPr>
+          <p:cNvPr id="8" name="Text 5"/>
+          <p:cNvSpPr/>
+          <p:nvPr/>
+        </p:nvSpPr>
+        <p:spPr>
+          <a:xfrm>
+            <a:off x="731520" y="2240280"/>
             <a:ext cx="3392424" cy="365760"/>
           </a:xfrm>
           <a:prstGeom prst="rect">
@@ -7841,13 +5587,13 @@
       </p:sp>
       <p:sp>
         <p:nvSpPr>
-          <p:cNvPr id="8" name="Text 5"/>
-          <p:cNvSpPr/>
-          <p:nvPr/>
-        </p:nvSpPr>
-        <p:spPr>
-          <a:xfrm>
-            <a:off x="731520" y="2350008"/>
+          <p:cNvPr id="9" name="Text 6"/>
+          <p:cNvSpPr/>
+          <p:nvPr/>
+        </p:nvSpPr>
+        <p:spPr>
+          <a:xfrm>
+            <a:off x="731520" y="2624328"/>
             <a:ext cx="3392424" cy="585216"/>
           </a:xfrm>
           <a:prstGeom prst="rect">
@@ -7875,7 +5621,7 @@
                 <a:ea typeface="Arial" pitchFamily="34" charset="-122"/>
                 <a:cs typeface="Arial" pitchFamily="34" charset="-120"/>
               </a:rPr>
-              <a:t>Il imprime ses balises depuis l'outil et les pose avec son équipe. Aucun matériel à réserver.</a:t>
+              <a:t>Il choisit la numérotation et imprime sa planche d'étiquettes.</a:t>
             </a:r>
             <a:endParaRPr lang="en-US" sz="1100" dirty="0"/>
           </a:p>
@@ -7883,18 +5629,18 @@
       </p:sp>
       <p:sp>
         <p:nvSpPr>
-          <p:cNvPr id="9" name="Shape 6"/>
-          <p:cNvSpPr/>
-          <p:nvPr/>
-        </p:nvSpPr>
-        <p:spPr>
-          <a:xfrm>
-            <a:off x="731520" y="2971800"/>
-            <a:ext cx="3392424" cy="3227832"/>
+          <p:cNvPr id="10" name="Shape 7"/>
+          <p:cNvSpPr/>
+          <p:nvPr/>
+        </p:nvSpPr>
+        <p:spPr>
+          <a:xfrm>
+            <a:off x="731520" y="3246120"/>
+            <a:ext cx="3392424" cy="2953512"/>
           </a:xfrm>
           <a:prstGeom prst="roundRect">
             <a:avLst>
-              <a:gd name="adj" fmla="val 3966"/>
+              <a:gd name="adj" fmla="val 4334"/>
             </a:avLst>
           </a:prstGeom>
           <a:solidFill>
@@ -7910,7 +5656,7 @@
       </p:sp>
       <p:pic>
         <p:nvPicPr>
-          <p:cNvPr id="10" name="Image 1" descr="preencoded.png">    </p:cNvPr>
+          <p:cNvPr id="11" name="Image 1" descr="preencoded.png">    </p:cNvPr>
           <p:cNvPicPr>
             <a:picLocks noChangeAspect="1"/>
           </p:cNvPicPr>
@@ -7924,8 +5670,8 @@
         </p:blipFill>
         <p:spPr>
           <a:xfrm>
-            <a:off x="1042416" y="2972302"/>
-            <a:ext cx="2770632" cy="3227330"/>
+            <a:off x="1042416" y="3246321"/>
+            <a:ext cx="2770632" cy="2953311"/>
           </a:xfrm>
           <a:prstGeom prst="rect">
             <a:avLst/>
@@ -7934,13 +5680,13 @@
       </p:pic>
       <p:sp>
         <p:nvSpPr>
-          <p:cNvPr id="11" name="Text 7"/>
-          <p:cNvSpPr/>
-          <p:nvPr/>
-        </p:nvSpPr>
-        <p:spPr>
-          <a:xfrm>
-            <a:off x="4398264" y="1965960"/>
+          <p:cNvPr id="12" name="Text 8"/>
+          <p:cNvSpPr/>
+          <p:nvPr/>
+        </p:nvSpPr>
+        <p:spPr>
+          <a:xfrm>
+            <a:off x="4398264" y="2240280"/>
             <a:ext cx="3392424" cy="365760"/>
           </a:xfrm>
           <a:prstGeom prst="rect">
@@ -7976,13 +5722,13 @@
       </p:sp>
       <p:sp>
         <p:nvSpPr>
-          <p:cNvPr id="12" name="Text 8"/>
-          <p:cNvSpPr/>
-          <p:nvPr/>
-        </p:nvSpPr>
-        <p:spPr>
-          <a:xfrm>
-            <a:off x="4398264" y="2350008"/>
+          <p:cNvPr id="13" name="Text 9"/>
+          <p:cNvSpPr/>
+          <p:nvPr/>
+        </p:nvSpPr>
+        <p:spPr>
+          <a:xfrm>
+            <a:off x="4398264" y="2624328"/>
             <a:ext cx="3392424" cy="585216"/>
           </a:xfrm>
           <a:prstGeom prst="rect">
@@ -8010,7 +5756,7 @@
                 <a:ea typeface="Arial" pitchFamily="34" charset="-122"/>
                 <a:cs typeface="Arial" pitchFamily="34" charset="-120"/>
               </a:rPr>
-              <a:t>Scanner la balise du rayon, puis les articles, avec le téléphone qu'ils ont en poche.</a:t>
+              <a:t>Ils scannent la balise du rayon, puis les articles. Le geste qu'ils connaissent.</a:t>
             </a:r>
             <a:endParaRPr lang="en-US" sz="1100" dirty="0"/>
           </a:p>
@@ -8018,18 +5764,18 @@
       </p:sp>
       <p:sp>
         <p:nvSpPr>
-          <p:cNvPr id="13" name="Shape 9"/>
-          <p:cNvSpPr/>
-          <p:nvPr/>
-        </p:nvSpPr>
-        <p:spPr>
-          <a:xfrm>
-            <a:off x="4398264" y="2971800"/>
-            <a:ext cx="3392424" cy="3227832"/>
+          <p:cNvPr id="14" name="Shape 10"/>
+          <p:cNvSpPr/>
+          <p:nvPr/>
+        </p:nvSpPr>
+        <p:spPr>
+          <a:xfrm>
+            <a:off x="4398264" y="3246120"/>
+            <a:ext cx="3392424" cy="2953512"/>
           </a:xfrm>
           <a:prstGeom prst="roundRect">
             <a:avLst>
-              <a:gd name="adj" fmla="val 3966"/>
+              <a:gd name="adj" fmla="val 4334"/>
             </a:avLst>
           </a:prstGeom>
           <a:solidFill>
@@ -8045,7 +5791,7 @@
       </p:sp>
       <p:pic>
         <p:nvPicPr>
-          <p:cNvPr id="14" name="Image 2" descr="preencoded.png">    </p:cNvPr>
+          <p:cNvPr id="15" name="Image 2" descr="preencoded.png">    </p:cNvPr>
           <p:cNvPicPr>
             <a:picLocks noChangeAspect="1"/>
           </p:cNvPicPr>
@@ -8059,8 +5805,8 @@
         </p:blipFill>
         <p:spPr>
           <a:xfrm>
-            <a:off x="4709160" y="2972302"/>
-            <a:ext cx="2770632" cy="3227330"/>
+            <a:off x="4709160" y="3246321"/>
+            <a:ext cx="2770632" cy="2953311"/>
           </a:xfrm>
           <a:prstGeom prst="rect">
             <a:avLst/>
@@ -8069,13 +5815,13 @@
       </p:pic>
       <p:sp>
         <p:nvSpPr>
-          <p:cNvPr id="15" name="Text 10"/>
-          <p:cNvSpPr/>
-          <p:nvPr/>
-        </p:nvSpPr>
-        <p:spPr>
-          <a:xfrm>
-            <a:off x="8065008" y="1965960"/>
+          <p:cNvPr id="16" name="Text 11"/>
+          <p:cNvSpPr/>
+          <p:nvPr/>
+        </p:nvSpPr>
+        <p:spPr>
+          <a:xfrm>
+            <a:off x="8065008" y="2240280"/>
             <a:ext cx="3392424" cy="365760"/>
           </a:xfrm>
           <a:prstGeom prst="rect">
@@ -8103,7 +5849,7 @@
                 <a:ea typeface="Arial" pitchFamily="34" charset="-122"/>
                 <a:cs typeface="Arial" pitchFamily="34" charset="-120"/>
               </a:rPr>
-              <a:t>Le chef d'équipe tranche</a:t>
+              <a:t>Le chef d'équipe repasse</a:t>
             </a:r>
             <a:endParaRPr lang="en-US" sz="1350" dirty="0"/>
           </a:p>
@@ -8111,13 +5857,13 @@
       </p:sp>
       <p:sp>
         <p:nvSpPr>
-          <p:cNvPr id="16" name="Text 11"/>
-          <p:cNvSpPr/>
-          <p:nvPr/>
-        </p:nvSpPr>
-        <p:spPr>
-          <a:xfrm>
-            <a:off x="8065008" y="2350008"/>
+          <p:cNvPr id="17" name="Text 12"/>
+          <p:cNvSpPr/>
+          <p:nvPr/>
+        </p:nvSpPr>
+        <p:spPr>
+          <a:xfrm>
+            <a:off x="8065008" y="2624328"/>
             <a:ext cx="3392424" cy="585216"/>
           </a:xfrm>
           <a:prstGeom prst="rect">
@@ -8145,7 +5891,7 @@
                 <a:ea typeface="Arial" pitchFamily="34" charset="-122"/>
                 <a:cs typeface="Arial" pitchFamily="34" charset="-120"/>
               </a:rPr>
-              <a:t>Il audite selon votre règle et règle les désaccords au rayon, pendant que ça compte.</a:t>
+              <a:t>Il audite la zone selon votre règle, pendant que le comptage continue ailleurs.</a:t>
             </a:r>
             <a:endParaRPr lang="en-US" sz="1100" dirty="0"/>
           </a:p>
@@ -8153,18 +5899,18 @@
       </p:sp>
       <p:sp>
         <p:nvSpPr>
-          <p:cNvPr id="17" name="Shape 12"/>
-          <p:cNvSpPr/>
-          <p:nvPr/>
-        </p:nvSpPr>
-        <p:spPr>
-          <a:xfrm>
-            <a:off x="8065008" y="2971800"/>
-            <a:ext cx="3392424" cy="3227832"/>
+          <p:cNvPr id="18" name="Shape 13"/>
+          <p:cNvSpPr/>
+          <p:nvPr/>
+        </p:nvSpPr>
+        <p:spPr>
+          <a:xfrm>
+            <a:off x="8065008" y="3246120"/>
+            <a:ext cx="3392424" cy="2953512"/>
           </a:xfrm>
           <a:prstGeom prst="roundRect">
             <a:avLst>
-              <a:gd name="adj" fmla="val 3966"/>
+              <a:gd name="adj" fmla="val 4334"/>
             </a:avLst>
           </a:prstGeom>
           <a:solidFill>
@@ -8180,7 +5926,7 @@
       </p:sp>
       <p:pic>
         <p:nvPicPr>
-          <p:cNvPr id="18" name="Image 3" descr="preencoded.png">    </p:cNvPr>
+          <p:cNvPr id="19" name="Image 3" descr="preencoded.png">    </p:cNvPr>
           <p:cNvPicPr>
             <a:picLocks noChangeAspect="1"/>
           </p:cNvPicPr>
@@ -8194,8 +5940,8 @@
         </p:blipFill>
         <p:spPr>
           <a:xfrm>
-            <a:off x="8375904" y="2972302"/>
-            <a:ext cx="2770632" cy="3227330"/>
+            <a:off x="8375904" y="3246321"/>
+            <a:ext cx="2770632" cy="2953311"/>
           </a:xfrm>
           <a:prstGeom prst="rect">
             <a:avLst/>
@@ -8204,7 +5950,7 @@
       </p:pic>
       <p:sp>
         <p:nvSpPr>
-          <p:cNvPr id="19" name="Text 13"/>
+          <p:cNvPr id="20" name="Text 14"/>
           <p:cNvSpPr/>
           <p:nvPr/>
         </p:nvSpPr>
@@ -8243,7 +5989,7 @@
       </p:sp>
       <p:sp>
         <p:nvSpPr>
-          <p:cNvPr id="20" name="Text 14"/>
+          <p:cNvPr id="21" name="Text 15"/>
           <p:cNvSpPr/>
           <p:nvPr/>
         </p:nvSpPr>
@@ -8408,7 +6154,7 @@
                 <a:ea typeface="Arial" pitchFamily="34" charset="-122"/>
                 <a:cs typeface="Arial" pitchFamily="34" charset="-120"/>
               </a:rPr>
-              <a:t>Avec Quantinvo</a:t>
+              <a:t>Pendant le comptage</a:t>
             </a:r>
             <a:endParaRPr lang="en-US" sz="1000" dirty="0"/>
           </a:p>
@@ -8447,8 +6193,8 @@
         </p:nvSpPr>
         <p:spPr>
           <a:xfrm>
-            <a:off x="731520" y="1325880"/>
-            <a:ext cx="4206240" cy="1280160"/>
+            <a:off x="731520" y="1143000"/>
+            <a:ext cx="10725912" cy="822960"/>
           </a:xfrm>
           <a:prstGeom prst="rect">
             <a:avLst/>
@@ -8467,7 +6213,7 @@
               <a:buNone/>
             </a:pPr>
             <a:r>
-              <a:rPr lang="en-US" sz="2600" b="1" dirty="0">
+              <a:rPr lang="en-US" sz="2500" b="1" dirty="0">
                 <a:solidFill>
                   <a:srgbClr val="4636B0"/>
                 </a:solidFill>
@@ -8475,9 +6221,9 @@
                 <a:ea typeface="Arial" pitchFamily="34" charset="-122"/>
                 <a:cs typeface="Arial" pitchFamily="34" charset="-120"/>
               </a:rPr>
-              <a:t>La même journée, conduite par le floor.</a:t>
-            </a:r>
-            <a:endParaRPr lang="en-US" sz="2600" dirty="0"/>
+              <a:t>Vous fixez la règle d'audit. Le floor l'applique.</a:t>
+            </a:r>
+            <a:endParaRPr lang="en-US" sz="2500" dirty="0"/>
           </a:p>
         </p:txBody>
       </p:sp>
@@ -8489,8 +6235,8 @@
         </p:nvSpPr>
         <p:spPr>
           <a:xfrm>
-            <a:off x="731520" y="2651760"/>
-            <a:ext cx="4206240" cy="914400"/>
+            <a:off x="731520" y="1783080"/>
+            <a:ext cx="10725912" cy="777240"/>
           </a:xfrm>
           <a:prstGeom prst="rect">
             <a:avLst/>
@@ -8509,7 +6255,226 @@
               <a:buNone/>
             </a:pPr>
             <a:r>
-              <a:rPr lang="en-US" sz="1200" i="1" dirty="0">
+              <a:rPr lang="en-US" sz="1250" dirty="0">
+                <a:solidFill>
+                  <a:srgbClr val="3D4556"/>
+                </a:solidFill>
+                <a:latin typeface="Arial" pitchFamily="34" charset="0"/>
+                <a:ea typeface="Arial" pitchFamily="34" charset="-122"/>
+                <a:cs typeface="Arial" pitchFamily="34" charset="-120"/>
+              </a:rPr>
+              <a:t>100 % de la W&amp;J, 30 % au moins ailleurs : la règle reste la vôtre. Un failed audit ne s'attend plus dans un rapport — les deux comptages s'affichent côte à côte, l'écart en pièces et en valeur d'achat, et il se tranche pendant que le compteur est encore au rayon. L'Inventory Control ouvre la même vue sur n'importe quel inventaire en cours, sans en conduire aucun.</a:t>
+            </a:r>
+            <a:endParaRPr lang="en-US" sz="1250" dirty="0"/>
+          </a:p>
+        </p:txBody>
+      </p:sp>
+      <p:sp>
+        <p:nvSpPr>
+          <p:cNvPr id="8" name="Text 5"/>
+          <p:cNvSpPr/>
+          <p:nvPr/>
+        </p:nvSpPr>
+        <p:spPr>
+          <a:xfrm>
+            <a:off x="731520" y="2935224"/>
+            <a:ext cx="5134356" cy="274320"/>
+          </a:xfrm>
+          <a:prstGeom prst="rect">
+            <a:avLst/>
+          </a:prstGeom>
+          <a:noFill/>
+          <a:ln/>
+        </p:spPr>
+        <p:txBody>
+          <a:bodyPr wrap="square" lIns="0" tIns="0" rIns="0" bIns="0" rtlCol="0" anchor="t"/>
+          <a:lstStyle/>
+          <a:p>
+            <a:pPr indent="0" marL="0">
+              <a:buNone/>
+            </a:pPr>
+            <a:r>
+              <a:rPr lang="en-US" sz="1250" b="1" dirty="0">
+                <a:solidFill>
+                  <a:srgbClr val="0B0F19"/>
+                </a:solidFill>
+                <a:latin typeface="Arial" pitchFamily="34" charset="0"/>
+                <a:ea typeface="Arial" pitchFamily="34" charset="-122"/>
+                <a:cs typeface="Arial" pitchFamily="34" charset="-120"/>
+              </a:rPr>
+              <a:t>L'avancement, zone par zone</a:t>
+            </a:r>
+            <a:endParaRPr lang="en-US" sz="1250" dirty="0"/>
+          </a:p>
+        </p:txBody>
+      </p:sp>
+      <p:sp>
+        <p:nvSpPr>
+          <p:cNvPr id="9" name="Text 6"/>
+          <p:cNvSpPr/>
+          <p:nvPr/>
+        </p:nvSpPr>
+        <p:spPr>
+          <a:xfrm>
+            <a:off x="6323076" y="2935224"/>
+            <a:ext cx="5134356" cy="274320"/>
+          </a:xfrm>
+          <a:prstGeom prst="rect">
+            <a:avLst/>
+          </a:prstGeom>
+          <a:noFill/>
+          <a:ln/>
+        </p:spPr>
+        <p:txBody>
+          <a:bodyPr wrap="square" lIns="0" tIns="0" rIns="0" bIns="0" rtlCol="0" anchor="t"/>
+          <a:lstStyle/>
+          <a:p>
+            <a:pPr indent="0" marL="0">
+              <a:buNone/>
+            </a:pPr>
+            <a:r>
+              <a:rPr lang="en-US" sz="1250" b="1" dirty="0">
+                <a:solidFill>
+                  <a:srgbClr val="0B0F19"/>
+                </a:solidFill>
+                <a:latin typeface="Arial" pitchFamily="34" charset="0"/>
+                <a:ea typeface="Arial" pitchFamily="34" charset="-122"/>
+                <a:cs typeface="Arial" pitchFamily="34" charset="-120"/>
+              </a:rPr>
+              <a:t>L'écart, tranché au rayon</a:t>
+            </a:r>
+            <a:endParaRPr lang="en-US" sz="1250" dirty="0"/>
+          </a:p>
+        </p:txBody>
+      </p:sp>
+      <p:sp>
+        <p:nvSpPr>
+          <p:cNvPr id="10" name="Shape 7"/>
+          <p:cNvSpPr/>
+          <p:nvPr/>
+        </p:nvSpPr>
+        <p:spPr>
+          <a:xfrm>
+            <a:off x="676656" y="3191256"/>
+            <a:ext cx="5244084" cy="2059239"/>
+          </a:xfrm>
+          <a:prstGeom prst="roundRect">
+            <a:avLst>
+              <a:gd name="adj" fmla="val 3552"/>
+            </a:avLst>
+          </a:prstGeom>
+          <a:solidFill>
+            <a:srgbClr val="FFFFFF"/>
+          </a:solidFill>
+          <a:ln w="12700">
+            <a:solidFill>
+              <a:srgbClr val="E3E6EE"/>
+            </a:solidFill>
+            <a:prstDash val="solid"/>
+          </a:ln>
+        </p:spPr>
+      </p:sp>
+      <p:pic>
+        <p:nvPicPr>
+          <p:cNvPr id="11" name="Image 1" descr="preencoded.png">    </p:cNvPr>
+          <p:cNvPicPr>
+            <a:picLocks noChangeAspect="1"/>
+          </p:cNvPicPr>
+          <p:nvPr/>
+        </p:nvPicPr>
+        <p:blipFill>
+          <a:blip r:embed="rId2"/>
+          <a:stretch>
+            <a:fillRect/>
+          </a:stretch>
+        </p:blipFill>
+        <p:spPr>
+          <a:xfrm>
+            <a:off x="731520" y="3246120"/>
+            <a:ext cx="5134356" cy="1949511"/>
+          </a:xfrm>
+          <a:prstGeom prst="rect">
+            <a:avLst/>
+          </a:prstGeom>
+        </p:spPr>
+      </p:pic>
+      <p:sp>
+        <p:nvSpPr>
+          <p:cNvPr id="12" name="Shape 8"/>
+          <p:cNvSpPr/>
+          <p:nvPr/>
+        </p:nvSpPr>
+        <p:spPr>
+          <a:xfrm>
+            <a:off x="6268212" y="3191256"/>
+            <a:ext cx="5244084" cy="2080383"/>
+          </a:xfrm>
+          <a:prstGeom prst="roundRect">
+            <a:avLst>
+              <a:gd name="adj" fmla="val 3516"/>
+            </a:avLst>
+          </a:prstGeom>
+          <a:solidFill>
+            <a:srgbClr val="FFFFFF"/>
+          </a:solidFill>
+          <a:ln w="12700">
+            <a:solidFill>
+              <a:srgbClr val="E3E6EE"/>
+            </a:solidFill>
+            <a:prstDash val="solid"/>
+          </a:ln>
+        </p:spPr>
+      </p:sp>
+      <p:pic>
+        <p:nvPicPr>
+          <p:cNvPr id="13" name="Image 2" descr="preencoded.png">    </p:cNvPr>
+          <p:cNvPicPr>
+            <a:picLocks noChangeAspect="1"/>
+          </p:cNvPicPr>
+          <p:nvPr/>
+        </p:nvPicPr>
+        <p:blipFill>
+          <a:blip r:embed="rId3"/>
+          <a:stretch>
+            <a:fillRect/>
+          </a:stretch>
+        </p:blipFill>
+        <p:spPr>
+          <a:xfrm>
+            <a:off x="6323076" y="3246120"/>
+            <a:ext cx="5134356" cy="1970655"/>
+          </a:xfrm>
+          <a:prstGeom prst="rect">
+            <a:avLst/>
+          </a:prstGeom>
+        </p:spPr>
+      </p:pic>
+      <p:sp>
+        <p:nvSpPr>
+          <p:cNvPr id="14" name="Text 9"/>
+          <p:cNvSpPr/>
+          <p:nvPr/>
+        </p:nvSpPr>
+        <p:spPr>
+          <a:xfrm>
+            <a:off x="731520" y="5344791"/>
+            <a:ext cx="5134356" cy="365760"/>
+          </a:xfrm>
+          <a:prstGeom prst="rect">
+            <a:avLst/>
+          </a:prstGeom>
+          <a:noFill/>
+          <a:ln/>
+        </p:spPr>
+        <p:txBody>
+          <a:bodyPr wrap="square" lIns="0" tIns="0" rIns="0" bIns="0" rtlCol="0" anchor="t"/>
+          <a:lstStyle/>
+          <a:p>
+            <a:pPr indent="0" marL="0">
+              <a:buNone/>
+            </a:pPr>
+            <a:r>
+              <a:rPr lang="en-US" sz="1000" i="1" dirty="0">
                 <a:solidFill>
                   <a:srgbClr val="5B6475"/>
                 </a:solidFill>
@@ -8517,22 +6482,22 @@
                 <a:ea typeface="Arial" pitchFamily="34" charset="-122"/>
                 <a:cs typeface="Arial" pitchFamily="34" charset="-120"/>
               </a:rPr>
-              <a:t>Le déroulement ne change pas. Ce qui change, c'est qui le porte : vous n'apparaissez qu'à la dernière ligne.</a:t>
-            </a:r>
-            <a:endParaRPr lang="en-US" sz="1200" dirty="0"/>
-          </a:p>
-        </p:txBody>
-      </p:sp>
-      <p:sp>
-        <p:nvSpPr>
-          <p:cNvPr id="8" name="Text 5"/>
-          <p:cNvSpPr/>
-          <p:nvPr/>
-        </p:nvSpPr>
-        <p:spPr>
-          <a:xfrm>
-            <a:off x="5394960" y="1371600"/>
-            <a:ext cx="6062472" cy="4754880"/>
+              <a:t>Onglet Suivi, données d'essai.</a:t>
+            </a:r>
+            <a:endParaRPr lang="en-US" sz="1000" dirty="0"/>
+          </a:p>
+        </p:txBody>
+      </p:sp>
+      <p:sp>
+        <p:nvSpPr>
+          <p:cNvPr id="15" name="Text 10"/>
+          <p:cNvSpPr/>
+          <p:nvPr/>
+        </p:nvSpPr>
+        <p:spPr>
+          <a:xfrm>
+            <a:off x="6323076" y="5344791"/>
+            <a:ext cx="5134356" cy="365760"/>
           </a:xfrm>
           <a:prstGeom prst="rect">
             <a:avLst/>
@@ -8545,181 +6510,26 @@
           <a:lstStyle/>
           <a:p>
             <a:pPr indent="0" marL="0">
-              <a:lnSpc>
-                <a:spcPct val="118000"/>
-              </a:lnSpc>
-              <a:spcAft>
-                <a:spcPts val="1300"/>
-              </a:spcAft>
-              <a:buNone/>
-            </a:pPr>
-            <a:r>
-              <a:rPr lang="en-US" sz="1250" b="1" dirty="0">
-                <a:solidFill>
-                  <a:srgbClr val="0B0F19"/>
-                </a:solidFill>
-                <a:latin typeface="Arial" pitchFamily="34" charset="0"/>
-                <a:ea typeface="Arial" pitchFamily="34" charset="-122"/>
-                <a:cs typeface="Arial" pitchFamily="34" charset="-120"/>
-              </a:rPr>
-              <a:t>La veille. </a:t>
-            </a:r>
-            <a:pPr indent="0" marL="0">
-              <a:lnSpc>
-                <a:spcPct val="118000"/>
-              </a:lnSpc>
-              <a:spcAft>
-                <a:spcPts val="1300"/>
-              </a:spcAft>
-              <a:buNone/>
-            </a:pPr>
-            <a:r>
-              <a:rPr lang="en-US" sz="1250" dirty="0">
-                <a:solidFill>
-                  <a:srgbClr val="3D4556"/>
-                </a:solidFill>
-                <a:latin typeface="Arial" pitchFamily="34" charset="0"/>
-                <a:ea typeface="Arial" pitchFamily="34" charset="-122"/>
-                <a:cs typeface="Arial" pitchFamily="34" charset="-120"/>
-              </a:rPr>
-              <a:t>Le chef d'équipe imprime ses balises — une planche d'étiquettes numérotées, en PDF — et les pose avec son équipe. Personne d'autre à mobiliser.</a:t>
-            </a:r>
-            <a:endParaRPr lang="en-US" sz="1250" dirty="0"/>
-          </a:p>
-          <a:p>
-            <a:pPr indent="0" marL="0">
-              <a:lnSpc>
-                <a:spcPct val="118000"/>
-              </a:lnSpc>
-              <a:spcAft>
-                <a:spcPts val="1300"/>
-              </a:spcAft>
-              <a:buNone/>
-            </a:pPr>
-            <a:r>
-              <a:rPr lang="en-US" sz="1250" b="1" dirty="0">
-                <a:solidFill>
-                  <a:srgbClr val="0B0F19"/>
-                </a:solidFill>
-                <a:latin typeface="Arial" pitchFamily="34" charset="0"/>
-                <a:ea typeface="Arial" pitchFamily="34" charset="-122"/>
-                <a:cs typeface="Arial" pitchFamily="34" charset="-120"/>
-              </a:rPr>
-              <a:t>Le matin. </a:t>
-            </a:r>
-            <a:pPr indent="0" marL="0">
-              <a:lnSpc>
-                <a:spcPct val="118000"/>
-              </a:lnSpc>
-              <a:spcAft>
-                <a:spcPts val="1300"/>
-              </a:spcAft>
-              <a:buNone/>
-            </a:pPr>
-            <a:r>
-              <a:rPr lang="en-US" sz="1250" dirty="0">
-                <a:solidFill>
-                  <a:srgbClr val="3D4556"/>
-                </a:solidFill>
-                <a:latin typeface="Arial" pitchFamily="34" charset="0"/>
-                <a:ea typeface="Arial" pitchFamily="34" charset="-122"/>
-                <a:cs typeface="Arial" pitchFamily="34" charset="-120"/>
-              </a:rPr>
-              <a:t>Il importe le stock théorique tel quel, colonnes reconnues, et ouvre l'inventaire. Pas de flotte à préparer : chaque vendeur le rejoint depuis son téléphone.</a:t>
-            </a:r>
-            <a:endParaRPr lang="en-US" sz="1250" dirty="0"/>
-          </a:p>
-          <a:p>
-            <a:pPr indent="0" marL="0">
-              <a:lnSpc>
-                <a:spcPct val="118000"/>
-              </a:lnSpc>
-              <a:spcAft>
-                <a:spcPts val="1300"/>
-              </a:spcAft>
-              <a:buNone/>
-            </a:pPr>
-            <a:r>
-              <a:rPr lang="en-US" sz="1250" b="1" dirty="0">
-                <a:solidFill>
-                  <a:srgbClr val="0B0F19"/>
-                </a:solidFill>
-                <a:latin typeface="Arial" pitchFamily="34" charset="0"/>
-                <a:ea typeface="Arial" pitchFamily="34" charset="-122"/>
-                <a:cs typeface="Arial" pitchFamily="34" charset="-120"/>
-              </a:rPr>
-              <a:t>Pendant. </a:t>
-            </a:r>
-            <a:pPr indent="0" marL="0">
-              <a:lnSpc>
-                <a:spcPct val="118000"/>
-              </a:lnSpc>
-              <a:spcAft>
-                <a:spcPts val="1300"/>
-              </a:spcAft>
-              <a:buNone/>
-            </a:pPr>
-            <a:r>
-              <a:rPr lang="en-US" sz="1250" dirty="0">
-                <a:solidFill>
-                  <a:srgbClr val="3D4556"/>
-                </a:solidFill>
-                <a:latin typeface="Arial" pitchFamily="34" charset="0"/>
-                <a:ea typeface="Arial" pitchFamily="34" charset="-122"/>
-                <a:cs typeface="Arial" pitchFamily="34" charset="-120"/>
-              </a:rPr>
-              <a:t>Les vendeurs comptent, zone par zone. Le chef d'équipe suit l'avancement, audite selon votre règle — 100 % W&amp;J, 30 % au moins ailleurs — et tranche les désaccords au rayon, en direct.</a:t>
-            </a:r>
-            <a:endParaRPr lang="en-US" sz="1250" dirty="0"/>
-          </a:p>
-          <a:p>
-            <a:pPr indent="0" marL="0">
-              <a:lnSpc>
-                <a:spcPct val="118000"/>
-              </a:lnSpc>
-              <a:spcAft>
-                <a:spcPts val="1300"/>
-              </a:spcAft>
-              <a:buNone/>
-            </a:pPr>
-            <a:r>
-              <a:rPr lang="en-US" sz="1250" b="1" dirty="0">
-                <a:solidFill>
-                  <a:srgbClr val="0B0F19"/>
-                </a:solidFill>
-                <a:latin typeface="Arial" pitchFamily="34" charset="0"/>
-                <a:ea typeface="Arial" pitchFamily="34" charset="-122"/>
-                <a:cs typeface="Arial" pitchFamily="34" charset="-120"/>
-              </a:rPr>
-              <a:t>Après. </a:t>
-            </a:r>
-            <a:pPr indent="0" marL="0">
-              <a:lnSpc>
-                <a:spcPct val="118000"/>
-              </a:lnSpc>
-              <a:spcAft>
-                <a:spcPts val="1300"/>
-              </a:spcAft>
-              <a:buNone/>
-            </a:pPr>
-            <a:r>
-              <a:rPr lang="en-US" sz="1250" dirty="0">
-                <a:solidFill>
-                  <a:srgbClr val="3D4556"/>
-                </a:solidFill>
-                <a:latin typeface="Arial" pitchFamily="34" charset="0"/>
-                <a:ea typeface="Arial" pitchFamily="34" charset="-122"/>
-                <a:cs typeface="Arial" pitchFamily="34" charset="-120"/>
-              </a:rPr>
-              <a:t>Le rapport croise déjà l'attendu et le compté. L'Inventory Control le reçoit, le fait valider selon la valeur de l'écart, et ajuste le stock. C'est sa première apparition de la journée.</a:t>
-            </a:r>
-            <a:endParaRPr lang="en-US" sz="1250" dirty="0"/>
-          </a:p>
-        </p:txBody>
-      </p:sp>
-      <p:sp>
-        <p:nvSpPr>
-          <p:cNvPr id="9" name="Text 6"/>
+              <a:buNone/>
+            </a:pPr>
+            <a:r>
+              <a:rPr lang="en-US" sz="1000" i="1" dirty="0">
+                <a:solidFill>
+                  <a:srgbClr val="5B6475"/>
+                </a:solidFill>
+                <a:latin typeface="Arial" pitchFamily="34" charset="0"/>
+                <a:ea typeface="Arial" pitchFamily="34" charset="-122"/>
+                <a:cs typeface="Arial" pitchFamily="34" charset="-120"/>
+              </a:rPr>
+              <a:t>Onglet Écarts d'audit, données d'essai.</a:t>
+            </a:r>
+            <a:endParaRPr lang="en-US" sz="1000" dirty="0"/>
+          </a:p>
+        </p:txBody>
+      </p:sp>
+      <p:sp>
+        <p:nvSpPr>
+          <p:cNvPr id="16" name="Text 11"/>
           <p:cNvSpPr/>
           <p:nvPr/>
         </p:nvSpPr>
@@ -8758,7 +6568,7 @@
       </p:sp>
       <p:sp>
         <p:nvSpPr>
-          <p:cNvPr id="10" name="Text 7"/>
+          <p:cNvPr id="17" name="Text 12"/>
           <p:cNvSpPr/>
           <p:nvPr/>
         </p:nvSpPr>
@@ -8923,7 +6733,7 @@
                 <a:ea typeface="Arial" pitchFamily="34" charset="-122"/>
                 <a:cs typeface="Arial" pitchFamily="34" charset="-120"/>
               </a:rPr>
-              <a:t>Sans, avec</a:t>
+              <a:t>Après le comptage</a:t>
             </a:r>
             <a:endParaRPr lang="en-US" sz="1000" dirty="0"/>
           </a:p>
@@ -8962,8 +6772,8 @@
         </p:nvSpPr>
         <p:spPr>
           <a:xfrm>
-            <a:off x="731520" y="1280160"/>
-            <a:ext cx="10725912" cy="822960"/>
+            <a:off x="731520" y="1325880"/>
+            <a:ext cx="4206240" cy="1371600"/>
           </a:xfrm>
           <a:prstGeom prst="rect">
             <a:avLst/>
@@ -8982,7 +6792,7 @@
               <a:buNone/>
             </a:pPr>
             <a:r>
-              <a:rPr lang="en-US" sz="2600" b="1" dirty="0">
+              <a:rPr lang="en-US" sz="2400" b="1" dirty="0">
                 <a:solidFill>
                   <a:srgbClr val="4636B0"/>
                 </a:solidFill>
@@ -8990,9 +6800,9 @@
                 <a:ea typeface="Arial" pitchFamily="34" charset="-122"/>
                 <a:cs typeface="Arial" pitchFamily="34" charset="-120"/>
               </a:rPr>
-              <a:t>Ce qui change de mains</a:t>
-            </a:r>
-            <a:endParaRPr lang="en-US" sz="2600" dirty="0"/>
+              <a:t>Ce qui vous revient : un rapport déjà consolidé.</a:t>
+            </a:r>
+            <a:endParaRPr lang="en-US" sz="2400" dirty="0"/>
           </a:p>
         </p:txBody>
       </p:sp>
@@ -9004,8 +6814,8 @@
         </p:nvSpPr>
         <p:spPr>
           <a:xfrm>
-            <a:off x="731520" y="2240280"/>
-            <a:ext cx="4846320" cy="274320"/>
+            <a:off x="731520" y="2880360"/>
+            <a:ext cx="4206240" cy="1463040"/>
           </a:xfrm>
           <a:prstGeom prst="rect">
             <a:avLst/>
@@ -9017,21 +6827,24 @@
           <a:bodyPr wrap="square" lIns="0" tIns="0" rIns="0" bIns="0" rtlCol="0" anchor="t"/>
           <a:lstStyle/>
           <a:p>
-            <a:pPr indent="0" marL="0">
-              <a:buNone/>
-            </a:pPr>
-            <a:r>
-              <a:rPr lang="en-US" sz="1050" b="1" dirty="0">
-                <a:solidFill>
-                  <a:srgbClr val="5B6475"/>
-                </a:solidFill>
-                <a:latin typeface="Arial" pitchFamily="34" charset="0"/>
-                <a:ea typeface="Arial" pitchFamily="34" charset="-122"/>
-                <a:cs typeface="Arial" pitchFamily="34" charset="-120"/>
-              </a:rPr>
-              <a:t>Sans Quantinvo</a:t>
-            </a:r>
-            <a:endParaRPr lang="en-US" sz="1050" dirty="0"/>
+            <a:pPr algn="l" indent="0" marL="0">
+              <a:lnSpc>
+                <a:spcPct val="118000"/>
+              </a:lnSpc>
+              <a:buNone/>
+            </a:pPr>
+            <a:r>
+              <a:rPr lang="en-US" sz="1250" dirty="0">
+                <a:solidFill>
+                  <a:srgbClr val="3D4556"/>
+                </a:solidFill>
+                <a:latin typeface="Arial" pitchFamily="34" charset="0"/>
+                <a:ea typeface="Arial" pitchFamily="34" charset="-122"/>
+                <a:cs typeface="Arial" pitchFamily="34" charset="-120"/>
+              </a:rPr>
+              <a:t>Le rapport part du stock théorique, pas seulement de ce qui a été scanné. Un article attendu et jamais trouvé y figure, avec son manque : la démarque que l'inventaire est censé révéler est déjà dans le fichier.</a:t>
+            </a:r>
+            <a:endParaRPr lang="en-US" sz="1250" dirty="0"/>
           </a:p>
         </p:txBody>
       </p:sp>
@@ -9043,8 +6856,8 @@
         </p:nvSpPr>
         <p:spPr>
           <a:xfrm>
-            <a:off x="5852160" y="2240280"/>
-            <a:ext cx="4846320" cy="274320"/>
+            <a:off x="731520" y="4297680"/>
+            <a:ext cx="4206240" cy="1097280"/>
           </a:xfrm>
           <a:prstGeom prst="rect">
             <a:avLst/>
@@ -9056,21 +6869,24 @@
           <a:bodyPr wrap="square" lIns="0" tIns="0" rIns="0" bIns="0" rtlCol="0" anchor="t"/>
           <a:lstStyle/>
           <a:p>
-            <a:pPr indent="0" marL="0">
-              <a:buNone/>
-            </a:pPr>
-            <a:r>
-              <a:rPr lang="en-US" sz="1050" b="1" dirty="0">
-                <a:solidFill>
-                  <a:srgbClr val="4636B0"/>
-                </a:solidFill>
-                <a:latin typeface="Arial" pitchFamily="34" charset="0"/>
-                <a:ea typeface="Arial" pitchFamily="34" charset="-122"/>
-                <a:cs typeface="Arial" pitchFamily="34" charset="-120"/>
-              </a:rPr>
-              <a:t>Avec Quantinvo</a:t>
-            </a:r>
-            <a:endParaRPr lang="en-US" sz="1050" dirty="0"/>
+            <a:pPr algn="l" indent="0" marL="0">
+              <a:lnSpc>
+                <a:spcPct val="118000"/>
+              </a:lnSpc>
+              <a:buNone/>
+            </a:pPr>
+            <a:r>
+              <a:rPr lang="en-US" sz="1250" dirty="0">
+                <a:solidFill>
+                  <a:srgbClr val="3D4556"/>
+                </a:solidFill>
+                <a:latin typeface="Arial" pitchFamily="34" charset="0"/>
+                <a:ea typeface="Arial" pitchFamily="34" charset="-122"/>
+                <a:cs typeface="Arial" pitchFamily="34" charset="-120"/>
+              </a:rPr>
+              <a:t>Export Excel en un clic. Il ne reste que la validation — Inventory Control, PSM ou AGM selon la valeur de l'écart — et l'ajustement du stock.</a:t>
+            </a:r>
+            <a:endParaRPr lang="en-US" sz="1250" dirty="0"/>
           </a:p>
         </p:txBody>
       </p:sp>
@@ -9082,14 +6898,18 @@
         </p:nvSpPr>
         <p:spPr>
           <a:xfrm>
-            <a:off x="731520" y="2606040"/>
-            <a:ext cx="10725912" cy="0"/>
-          </a:xfrm>
-          <a:prstGeom prst="line">
-            <a:avLst/>
-          </a:prstGeom>
-          <a:noFill/>
-          <a:ln w="9525">
+            <a:off x="5340096" y="1316736"/>
+            <a:ext cx="6172200" cy="4260383"/>
+          </a:xfrm>
+          <a:prstGeom prst="roundRect">
+            <a:avLst>
+              <a:gd name="adj" fmla="val 1717"/>
+            </a:avLst>
+          </a:prstGeom>
+          <a:solidFill>
+            <a:srgbClr val="FFFFFF"/>
+          </a:solidFill>
+          <a:ln w="12700">
             <a:solidFill>
               <a:srgbClr val="E3E6EE"/>
             </a:solidFill>
@@ -9097,16 +6917,40 @@
           </a:ln>
         </p:spPr>
       </p:sp>
-      <p:sp>
-        <p:nvSpPr>
-          <p:cNvPr id="10" name="Text 7"/>
-          <p:cNvSpPr/>
-          <p:nvPr/>
-        </p:nvSpPr>
-        <p:spPr>
-          <a:xfrm>
-            <a:off x="731520" y="2752344"/>
-            <a:ext cx="4846320" cy="548640"/>
+      <p:pic>
+        <p:nvPicPr>
+          <p:cNvPr id="10" name="Image 1" descr="preencoded.png">    </p:cNvPr>
+          <p:cNvPicPr>
+            <a:picLocks noChangeAspect="1"/>
+          </p:cNvPicPr>
+          <p:nvPr/>
+        </p:nvPicPr>
+        <p:blipFill>
+          <a:blip r:embed="rId2"/>
+          <a:stretch>
+            <a:fillRect/>
+          </a:stretch>
+        </p:blipFill>
+        <p:spPr>
+          <a:xfrm>
+            <a:off x="5394960" y="1371600"/>
+            <a:ext cx="6062472" cy="4150655"/>
+          </a:xfrm>
+          <a:prstGeom prst="rect">
+            <a:avLst/>
+          </a:prstGeom>
+        </p:spPr>
+      </p:pic>
+      <p:sp>
+        <p:nvSpPr>
+          <p:cNvPr id="11" name="Text 7"/>
+          <p:cNvSpPr/>
+          <p:nvPr/>
+        </p:nvSpPr>
+        <p:spPr>
+          <a:xfrm>
+            <a:off x="5394960" y="5659415"/>
+            <a:ext cx="6062472" cy="365760"/>
           </a:xfrm>
           <a:prstGeom prst="rect">
             <a:avLst/>
@@ -9119,522 +6963,26 @@
           <a:lstStyle/>
           <a:p>
             <a:pPr indent="0" marL="0">
-              <a:lnSpc>
-                <a:spcPct val="115000"/>
-              </a:lnSpc>
-              <a:buNone/>
-            </a:pPr>
-            <a:r>
-              <a:rPr lang="en-US" sz="1250" dirty="0">
-                <a:solidFill>
-                  <a:srgbClr val="3D4556"/>
-                </a:solidFill>
-                <a:latin typeface="Arial" pitchFamily="34" charset="0"/>
-                <a:ea typeface="Arial" pitchFamily="34" charset="-122"/>
-                <a:cs typeface="Arial" pitchFamily="34" charset="-120"/>
-              </a:rPr>
-              <a:t>Le balisage la veille, par l’Inventory Control avec une personne du floor.</a:t>
-            </a:r>
-            <a:endParaRPr lang="en-US" sz="1250" dirty="0"/>
-          </a:p>
-        </p:txBody>
-      </p:sp>
-      <p:sp>
-        <p:nvSpPr>
-          <p:cNvPr id="11" name="Text 8"/>
-          <p:cNvSpPr/>
-          <p:nvPr/>
-        </p:nvSpPr>
-        <p:spPr>
-          <a:xfrm>
-            <a:off x="5852160" y="2752344"/>
-            <a:ext cx="4846320" cy="548640"/>
-          </a:xfrm>
-          <a:prstGeom prst="rect">
-            <a:avLst/>
-          </a:prstGeom>
-          <a:noFill/>
-          <a:ln/>
-        </p:spPr>
-        <p:txBody>
-          <a:bodyPr wrap="square" lIns="0" tIns="0" rIns="0" bIns="0" rtlCol="0" anchor="t"/>
-          <a:lstStyle/>
-          <a:p>
-            <a:pPr indent="0" marL="0">
-              <a:lnSpc>
-                <a:spcPct val="115000"/>
-              </a:lnSpc>
-              <a:buNone/>
-            </a:pPr>
-            <a:r>
-              <a:rPr lang="en-US" sz="1250" dirty="0">
-                <a:solidFill>
-                  <a:srgbClr val="0B0F19"/>
-                </a:solidFill>
-                <a:latin typeface="Arial" pitchFamily="34" charset="0"/>
-                <a:ea typeface="Arial" pitchFamily="34" charset="-122"/>
-                <a:cs typeface="Arial" pitchFamily="34" charset="-120"/>
-              </a:rPr>
-              <a:t>Le chef d’équipe imprime ses balises et les pose avec son équipe.</a:t>
-            </a:r>
-            <a:endParaRPr lang="en-US" sz="1250" dirty="0"/>
-          </a:p>
-        </p:txBody>
-      </p:sp>
-      <p:sp>
-        <p:nvSpPr>
-          <p:cNvPr id="12" name="Shape 9"/>
-          <p:cNvSpPr/>
-          <p:nvPr/>
-        </p:nvSpPr>
-        <p:spPr>
-          <a:xfrm>
-            <a:off x="731520" y="3355848"/>
-            <a:ext cx="10725912" cy="0"/>
-          </a:xfrm>
-          <a:prstGeom prst="line">
-            <a:avLst/>
-          </a:prstGeom>
-          <a:noFill/>
-          <a:ln w="9525">
-            <a:solidFill>
-              <a:srgbClr val="E3E6EE"/>
-            </a:solidFill>
-            <a:prstDash val="solid"/>
-          </a:ln>
-        </p:spPr>
-      </p:sp>
-      <p:sp>
-        <p:nvSpPr>
-          <p:cNvPr id="13" name="Text 10"/>
-          <p:cNvSpPr/>
-          <p:nvPr/>
-        </p:nvSpPr>
-        <p:spPr>
-          <a:xfrm>
-            <a:off x="731520" y="3502152"/>
-            <a:ext cx="4846320" cy="548640"/>
-          </a:xfrm>
-          <a:prstGeom prst="rect">
-            <a:avLst/>
-          </a:prstGeom>
-          <a:noFill/>
-          <a:ln/>
-        </p:spPr>
-        <p:txBody>
-          <a:bodyPr wrap="square" lIns="0" tIns="0" rIns="0" bIns="0" rtlCol="0" anchor="t"/>
-          <a:lstStyle/>
-          <a:p>
-            <a:pPr indent="0" marL="0">
-              <a:lnSpc>
-                <a:spcPct val="115000"/>
-              </a:lnSpc>
-              <a:buNone/>
-            </a:pPr>
-            <a:r>
-              <a:rPr lang="en-US" sz="1250" dirty="0">
-                <a:solidFill>
-                  <a:srgbClr val="3D4556"/>
-                </a:solidFill>
-                <a:latin typeface="Arial" pitchFamily="34" charset="0"/>
-                <a:ea typeface="Arial" pitchFamily="34" charset="-122"/>
-                <a:cs typeface="Arial" pitchFamily="34" charset="-120"/>
-              </a:rPr>
-              <a:t>Des terminaux à connecter et vérifier un par un avant chaque session.</a:t>
-            </a:r>
-            <a:endParaRPr lang="en-US" sz="1250" dirty="0"/>
-          </a:p>
-        </p:txBody>
-      </p:sp>
-      <p:sp>
-        <p:nvSpPr>
-          <p:cNvPr id="14" name="Text 11"/>
-          <p:cNvSpPr/>
-          <p:nvPr/>
-        </p:nvSpPr>
-        <p:spPr>
-          <a:xfrm>
-            <a:off x="5852160" y="3502152"/>
-            <a:ext cx="4846320" cy="548640"/>
-          </a:xfrm>
-          <a:prstGeom prst="rect">
-            <a:avLst/>
-          </a:prstGeom>
-          <a:noFill/>
-          <a:ln/>
-        </p:spPr>
-        <p:txBody>
-          <a:bodyPr wrap="square" lIns="0" tIns="0" rIns="0" bIns="0" rtlCol="0" anchor="t"/>
-          <a:lstStyle/>
-          <a:p>
-            <a:pPr indent="0" marL="0">
-              <a:lnSpc>
-                <a:spcPct val="115000"/>
-              </a:lnSpc>
-              <a:buNone/>
-            </a:pPr>
-            <a:r>
-              <a:rPr lang="en-US" sz="1250" dirty="0">
-                <a:solidFill>
-                  <a:srgbClr val="0B0F19"/>
-                </a:solidFill>
-                <a:latin typeface="Arial" pitchFamily="34" charset="0"/>
-                <a:ea typeface="Arial" pitchFamily="34" charset="-122"/>
-                <a:cs typeface="Arial" pitchFamily="34" charset="-120"/>
-              </a:rPr>
-              <a:t>Aucune flotte : chaque vendeur rejoint l’inventaire depuis son téléphone.</a:t>
-            </a:r>
-            <a:endParaRPr lang="en-US" sz="1250" dirty="0"/>
-          </a:p>
-        </p:txBody>
-      </p:sp>
-      <p:sp>
-        <p:nvSpPr>
-          <p:cNvPr id="15" name="Shape 12"/>
-          <p:cNvSpPr/>
-          <p:nvPr/>
-        </p:nvSpPr>
-        <p:spPr>
-          <a:xfrm>
-            <a:off x="731520" y="4105656"/>
-            <a:ext cx="10725912" cy="0"/>
-          </a:xfrm>
-          <a:prstGeom prst="line">
-            <a:avLst/>
-          </a:prstGeom>
-          <a:noFill/>
-          <a:ln w="9525">
-            <a:solidFill>
-              <a:srgbClr val="E3E6EE"/>
-            </a:solidFill>
-            <a:prstDash val="solid"/>
-          </a:ln>
-        </p:spPr>
-      </p:sp>
-      <p:sp>
-        <p:nvSpPr>
-          <p:cNvPr id="16" name="Text 13"/>
-          <p:cNvSpPr/>
-          <p:nvPr/>
-        </p:nvSpPr>
-        <p:spPr>
-          <a:xfrm>
-            <a:off x="731520" y="4251960"/>
-            <a:ext cx="4846320" cy="548640"/>
-          </a:xfrm>
-          <a:prstGeom prst="rect">
-            <a:avLst/>
-          </a:prstGeom>
-          <a:noFill/>
-          <a:ln/>
-        </p:spPr>
-        <p:txBody>
-          <a:bodyPr wrap="square" lIns="0" tIns="0" rIns="0" bIns="0" rtlCol="0" anchor="t"/>
-          <a:lstStyle/>
-          <a:p>
-            <a:pPr indent="0" marL="0">
-              <a:lnSpc>
-                <a:spcPct val="115000"/>
-              </a:lnSpc>
-              <a:buNone/>
-            </a:pPr>
-            <a:r>
-              <a:rPr lang="en-US" sz="1250" dirty="0">
-                <a:solidFill>
-                  <a:srgbClr val="3D4556"/>
-                </a:solidFill>
-                <a:latin typeface="Arial" pitchFamily="34" charset="0"/>
-                <a:ea typeface="Arial" pitchFamily="34" charset="-122"/>
-                <a:cs typeface="Arial" pitchFamily="34" charset="-120"/>
-              </a:rPr>
-              <a:t>Un briefing sur le maniement des terminaux à chaque inventaire.</a:t>
-            </a:r>
-            <a:endParaRPr lang="en-US" sz="1250" dirty="0"/>
-          </a:p>
-        </p:txBody>
-      </p:sp>
-      <p:sp>
-        <p:nvSpPr>
-          <p:cNvPr id="17" name="Text 14"/>
-          <p:cNvSpPr/>
-          <p:nvPr/>
-        </p:nvSpPr>
-        <p:spPr>
-          <a:xfrm>
-            <a:off x="5852160" y="4251960"/>
-            <a:ext cx="4846320" cy="548640"/>
-          </a:xfrm>
-          <a:prstGeom prst="rect">
-            <a:avLst/>
-          </a:prstGeom>
-          <a:noFill/>
-          <a:ln/>
-        </p:spPr>
-        <p:txBody>
-          <a:bodyPr wrap="square" lIns="0" tIns="0" rIns="0" bIns="0" rtlCol="0" anchor="t"/>
-          <a:lstStyle/>
-          <a:p>
-            <a:pPr indent="0" marL="0">
-              <a:lnSpc>
-                <a:spcPct val="115000"/>
-              </a:lnSpc>
-              <a:buNone/>
-            </a:pPr>
-            <a:r>
-              <a:rPr lang="en-US" sz="1250" dirty="0">
-                <a:solidFill>
-                  <a:srgbClr val="0B0F19"/>
-                </a:solidFill>
-                <a:latin typeface="Arial" pitchFamily="34" charset="0"/>
-                <a:ea typeface="Arial" pitchFamily="34" charset="-122"/>
-                <a:cs typeface="Arial" pitchFamily="34" charset="-120"/>
-              </a:rPr>
-              <a:t>Le geste qu’ils connaissent : scanner la balise, scanner les articles.</a:t>
-            </a:r>
-            <a:endParaRPr lang="en-US" sz="1250" dirty="0"/>
-          </a:p>
-        </p:txBody>
-      </p:sp>
-      <p:sp>
-        <p:nvSpPr>
-          <p:cNvPr id="18" name="Shape 15"/>
-          <p:cNvSpPr/>
-          <p:nvPr/>
-        </p:nvSpPr>
-        <p:spPr>
-          <a:xfrm>
-            <a:off x="731520" y="4855464"/>
-            <a:ext cx="10725912" cy="0"/>
-          </a:xfrm>
-          <a:prstGeom prst="line">
-            <a:avLst/>
-          </a:prstGeom>
-          <a:noFill/>
-          <a:ln w="9525">
-            <a:solidFill>
-              <a:srgbClr val="E3E6EE"/>
-            </a:solidFill>
-            <a:prstDash val="solid"/>
-          </a:ln>
-        </p:spPr>
-      </p:sp>
-      <p:sp>
-        <p:nvSpPr>
-          <p:cNvPr id="19" name="Text 16"/>
-          <p:cNvSpPr/>
-          <p:nvPr/>
-        </p:nvSpPr>
-        <p:spPr>
-          <a:xfrm>
-            <a:off x="731520" y="5001768"/>
-            <a:ext cx="4846320" cy="548640"/>
-          </a:xfrm>
-          <a:prstGeom prst="rect">
-            <a:avLst/>
-          </a:prstGeom>
-          <a:noFill/>
-          <a:ln/>
-        </p:spPr>
-        <p:txBody>
-          <a:bodyPr wrap="square" lIns="0" tIns="0" rIns="0" bIns="0" rtlCol="0" anchor="t"/>
-          <a:lstStyle/>
-          <a:p>
-            <a:pPr indent="0" marL="0">
-              <a:lnSpc>
-                <a:spcPct val="115000"/>
-              </a:lnSpc>
-              <a:buNone/>
-            </a:pPr>
-            <a:r>
-              <a:rPr lang="en-US" sz="1250" dirty="0">
-                <a:solidFill>
-                  <a:srgbClr val="3D4556"/>
-                </a:solidFill>
-                <a:latin typeface="Arial" pitchFamily="34" charset="0"/>
-                <a:ea typeface="Arial" pitchFamily="34" charset="-122"/>
-                <a:cs typeface="Arial" pitchFamily="34" charset="-120"/>
-              </a:rPr>
-              <a:t>Quelqu’un posté sur la plateforme pour guetter les failed audits.</a:t>
-            </a:r>
-            <a:endParaRPr lang="en-US" sz="1250" dirty="0"/>
-          </a:p>
-        </p:txBody>
-      </p:sp>
-      <p:sp>
-        <p:nvSpPr>
-          <p:cNvPr id="20" name="Text 17"/>
-          <p:cNvSpPr/>
-          <p:nvPr/>
-        </p:nvSpPr>
-        <p:spPr>
-          <a:xfrm>
-            <a:off x="5852160" y="5001768"/>
-            <a:ext cx="4846320" cy="548640"/>
-          </a:xfrm>
-          <a:prstGeom prst="rect">
-            <a:avLst/>
-          </a:prstGeom>
-          <a:noFill/>
-          <a:ln/>
-        </p:spPr>
-        <p:txBody>
-          <a:bodyPr wrap="square" lIns="0" tIns="0" rIns="0" bIns="0" rtlCol="0" anchor="t"/>
-          <a:lstStyle/>
-          <a:p>
-            <a:pPr indent="0" marL="0">
-              <a:lnSpc>
-                <a:spcPct val="115000"/>
-              </a:lnSpc>
-              <a:buNone/>
-            </a:pPr>
-            <a:r>
-              <a:rPr lang="en-US" sz="1250" dirty="0">
-                <a:solidFill>
-                  <a:srgbClr val="0B0F19"/>
-                </a:solidFill>
-                <a:latin typeface="Arial" pitchFamily="34" charset="0"/>
-                <a:ea typeface="Arial" pitchFamily="34" charset="-122"/>
-                <a:cs typeface="Arial" pitchFamily="34" charset="-120"/>
-              </a:rPr>
-              <a:t>Le chef d’équipe voit tout et tranche les écarts au rayon.</a:t>
-            </a:r>
-            <a:endParaRPr lang="en-US" sz="1250" dirty="0"/>
-          </a:p>
-        </p:txBody>
-      </p:sp>
-      <p:sp>
-        <p:nvSpPr>
-          <p:cNvPr id="21" name="Shape 18"/>
-          <p:cNvSpPr/>
-          <p:nvPr/>
-        </p:nvSpPr>
-        <p:spPr>
-          <a:xfrm>
-            <a:off x="731520" y="5605272"/>
-            <a:ext cx="10725912" cy="0"/>
-          </a:xfrm>
-          <a:prstGeom prst="line">
-            <a:avLst/>
-          </a:prstGeom>
-          <a:noFill/>
-          <a:ln w="9525">
-            <a:solidFill>
-              <a:srgbClr val="E3E6EE"/>
-            </a:solidFill>
-            <a:prstDash val="solid"/>
-          </a:ln>
-        </p:spPr>
-      </p:sp>
-      <p:sp>
-        <p:nvSpPr>
-          <p:cNvPr id="22" name="Text 19"/>
-          <p:cNvSpPr/>
-          <p:nvPr/>
-        </p:nvSpPr>
-        <p:spPr>
-          <a:xfrm>
-            <a:off x="731520" y="5751576"/>
-            <a:ext cx="4846320" cy="548640"/>
-          </a:xfrm>
-          <a:prstGeom prst="rect">
-            <a:avLst/>
-          </a:prstGeom>
-          <a:noFill/>
-          <a:ln/>
-        </p:spPr>
-        <p:txBody>
-          <a:bodyPr wrap="square" lIns="0" tIns="0" rIns="0" bIns="0" rtlCol="0" anchor="t"/>
-          <a:lstStyle/>
-          <a:p>
-            <a:pPr indent="0" marL="0">
-              <a:lnSpc>
-                <a:spcPct val="115000"/>
-              </a:lnSpc>
-              <a:buNone/>
-            </a:pPr>
-            <a:r>
-              <a:rPr lang="en-US" sz="1250" dirty="0">
-                <a:solidFill>
-                  <a:srgbClr val="3D4556"/>
-                </a:solidFill>
-                <a:latin typeface="Arial" pitchFamily="34" charset="0"/>
-                <a:ea typeface="Arial" pitchFamily="34" charset="-122"/>
-                <a:cs typeface="Arial" pitchFamily="34" charset="-120"/>
-              </a:rPr>
-              <a:t>Le SKU Variance à consolider, l’Inventory Control présent du début à la fin.</a:t>
-            </a:r>
-            <a:endParaRPr lang="en-US" sz="1250" dirty="0"/>
-          </a:p>
-        </p:txBody>
-      </p:sp>
-      <p:sp>
-        <p:nvSpPr>
-          <p:cNvPr id="23" name="Text 20"/>
-          <p:cNvSpPr/>
-          <p:nvPr/>
-        </p:nvSpPr>
-        <p:spPr>
-          <a:xfrm>
-            <a:off x="5852160" y="5751576"/>
-            <a:ext cx="4846320" cy="548640"/>
-          </a:xfrm>
-          <a:prstGeom prst="rect">
-            <a:avLst/>
-          </a:prstGeom>
-          <a:noFill/>
-          <a:ln/>
-        </p:spPr>
-        <p:txBody>
-          <a:bodyPr wrap="square" lIns="0" tIns="0" rIns="0" bIns="0" rtlCol="0" anchor="t"/>
-          <a:lstStyle/>
-          <a:p>
-            <a:pPr indent="0" marL="0">
-              <a:lnSpc>
-                <a:spcPct val="115000"/>
-              </a:lnSpc>
-              <a:buNone/>
-            </a:pPr>
-            <a:r>
-              <a:rPr lang="en-US" sz="1250" dirty="0">
-                <a:solidFill>
-                  <a:srgbClr val="0B0F19"/>
-                </a:solidFill>
-                <a:latin typeface="Arial" pitchFamily="34" charset="0"/>
-                <a:ea typeface="Arial" pitchFamily="34" charset="-122"/>
-                <a:cs typeface="Arial" pitchFamily="34" charset="-120"/>
-              </a:rPr>
-              <a:t>Un rapport déjà croisé avec le théorique. Vous validez, vous ajustez.</a:t>
-            </a:r>
-            <a:endParaRPr lang="en-US" sz="1250" dirty="0"/>
-          </a:p>
-        </p:txBody>
-      </p:sp>
-      <p:sp>
-        <p:nvSpPr>
-          <p:cNvPr id="24" name="Shape 21"/>
-          <p:cNvSpPr/>
-          <p:nvPr/>
-        </p:nvSpPr>
-        <p:spPr>
-          <a:xfrm>
-            <a:off x="731520" y="6355080"/>
-            <a:ext cx="10725912" cy="0"/>
-          </a:xfrm>
-          <a:prstGeom prst="line">
-            <a:avLst/>
-          </a:prstGeom>
-          <a:noFill/>
-          <a:ln w="9525">
-            <a:solidFill>
-              <a:srgbClr val="E3E6EE"/>
-            </a:solidFill>
-            <a:prstDash val="solid"/>
-          </a:ln>
-        </p:spPr>
-      </p:sp>
-      <p:sp>
-        <p:nvSpPr>
-          <p:cNvPr id="25" name="Text 22"/>
+              <a:buNone/>
+            </a:pPr>
+            <a:r>
+              <a:rPr lang="en-US" sz="1000" i="1" dirty="0">
+                <a:solidFill>
+                  <a:srgbClr val="5B6475"/>
+                </a:solidFill>
+                <a:latin typeface="Arial" pitchFamily="34" charset="0"/>
+                <a:ea typeface="Arial" pitchFamily="34" charset="-122"/>
+                <a:cs typeface="Arial" pitchFamily="34" charset="-120"/>
+              </a:rPr>
+              <a:t>Onglet Rapport, données d'essai.</a:t>
+            </a:r>
+            <a:endParaRPr lang="en-US" sz="1000" dirty="0"/>
+          </a:p>
+        </p:txBody>
+      </p:sp>
+      <p:sp>
+        <p:nvSpPr>
+          <p:cNvPr id="12" name="Text 8"/>
           <p:cNvSpPr/>
           <p:nvPr/>
         </p:nvSpPr>
@@ -9673,7 +7021,7 @@
       </p:sp>
       <p:sp>
         <p:nvSpPr>
-          <p:cNvPr id="26" name="Text 23"/>
+          <p:cNvPr id="13" name="Text 9"/>
           <p:cNvSpPr/>
           <p:nvPr/>
         </p:nvSpPr>
@@ -9838,7 +7186,7 @@
                 <a:ea typeface="Arial" pitchFamily="34" charset="-122"/>
                 <a:cs typeface="Arial" pitchFamily="34" charset="-120"/>
               </a:rPr>
-              <a:t>Pendant le comptage</a:t>
+              <a:t>L'inventaire aléatoire</a:t>
             </a:r>
             <a:endParaRPr lang="en-US" sz="1000" dirty="0"/>
           </a:p>
@@ -9877,7 +7225,7 @@
         </p:nvSpPr>
         <p:spPr>
           <a:xfrm>
-            <a:off x="731520" y="1280160"/>
+            <a:off x="731520" y="1143000"/>
             <a:ext cx="10725912" cy="822960"/>
           </a:xfrm>
           <a:prstGeom prst="rect">
@@ -9897,7 +7245,7 @@
               <a:buNone/>
             </a:pPr>
             <a:r>
-              <a:rPr lang="en-US" sz="2600" b="1" dirty="0">
+              <a:rPr lang="en-US" sz="2500" b="1" dirty="0">
                 <a:solidFill>
                   <a:srgbClr val="4636B0"/>
                 </a:solidFill>
@@ -9905,9 +7253,9 @@
                 <a:ea typeface="Arial" pitchFamily="34" charset="-122"/>
                 <a:cs typeface="Arial" pitchFamily="34" charset="-120"/>
               </a:rPr>
-              <a:t>Chacun suit son inventaire. Vous gardez la vue d’ensemble.</a:t>
-            </a:r>
-            <a:endParaRPr lang="en-US" sz="2600" dirty="0"/>
+              <a:t>Votre projet d'inventaire aléatoire, prêt à fonctionner.</a:t>
+            </a:r>
+            <a:endParaRPr lang="en-US" sz="2500" dirty="0"/>
           </a:p>
         </p:txBody>
       </p:sp>
@@ -9919,8 +7267,8 @@
         </p:nvSpPr>
         <p:spPr>
           <a:xfrm>
-            <a:off x="731520" y="2103120"/>
-            <a:ext cx="10725912" cy="731520"/>
+            <a:off x="731520" y="1783080"/>
+            <a:ext cx="8348472" cy="548640"/>
           </a:xfrm>
           <a:prstGeom prst="rect">
             <a:avLst/>
@@ -9939,17 +7287,17 @@
               <a:buNone/>
             </a:pPr>
             <a:r>
-              <a:rPr lang="en-US" sz="1250" dirty="0">
-                <a:solidFill>
-                  <a:srgbClr val="3D4556"/>
-                </a:solidFill>
-                <a:latin typeface="Arial" pitchFamily="34" charset="0"/>
-                <a:ea typeface="Arial" pitchFamily="34" charset="-122"/>
-                <a:cs typeface="Arial" pitchFamily="34" charset="-120"/>
-              </a:rPr>
-              <a:t>Le chef d'équipe suit son rayon en direct : l'avancement zone par zone, les appareils en comptage et en audit, les derniers scans. L'Inventory Control, s'il le souhaite, ouvre la même vue sur n'importe quel inventaire en cours — sans en conduire aucun. Le suivi est agrégé : on pilote le travail, pas les personnes.</a:t>
-            </a:r>
-            <a:endParaRPr lang="en-US" sz="1250" dirty="0"/>
+              <a:rPr lang="en-US" sz="1200" i="1" dirty="0">
+                <a:solidFill>
+                  <a:srgbClr val="5B6475"/>
+                </a:solidFill>
+                <a:latin typeface="Arial" pitchFamily="34" charset="0"/>
+                <a:ea typeface="Arial" pitchFamily="34" charset="-122"/>
+                <a:cs typeface="Arial" pitchFamily="34" charset="-120"/>
+              </a:rPr>
+              <a:t>Vous en avez posé les objectifs : identifier les vols, tester la rigueur des procédures, garantir que chaque responsable maîtrise son stock. Confier le comptage au floor, c'est exactement cela.</a:t>
+            </a:r>
+            <a:endParaRPr lang="en-US" sz="1200" dirty="0"/>
           </a:p>
         </p:txBody>
       </p:sp>
@@ -9961,12 +7309,12 @@
         </p:nvSpPr>
         <p:spPr>
           <a:xfrm>
-            <a:off x="2005841" y="2825496"/>
-            <a:ext cx="8177271" cy="3172968"/>
+            <a:off x="9725171" y="2377440"/>
+            <a:ext cx="1732261" cy="3657600"/>
           </a:xfrm>
           <a:prstGeom prst="roundRect">
             <a:avLst>
-              <a:gd name="adj" fmla="val 2305"/>
+              <a:gd name="adj" fmla="val 15836"/>
             </a:avLst>
           </a:prstGeom>
           <a:solidFill>
@@ -9974,10 +7322,17 @@
           </a:solidFill>
           <a:ln w="12700">
             <a:solidFill>
-              <a:srgbClr val="E3E6EE"/>
+              <a:srgbClr val="FFFFFF"/>
             </a:solidFill>
             <a:prstDash val="solid"/>
           </a:ln>
+          <a:effectLst>
+            <a:outerShdw sx="100000" sy="100000" kx="0" ky="0" algn="bl" rotWithShape="0" blurRad="177800" dist="38100" dir="5400000">
+              <a:srgbClr val="0B0F19">
+                <a:alpha val="18000"/>
+              </a:srgbClr>
+            </a:outerShdw>
+          </a:effectLst>
         </p:spPr>
       </p:sp>
       <p:pic>
@@ -9996,8 +7351,8 @@
         </p:blipFill>
         <p:spPr>
           <a:xfrm>
-            <a:off x="2060705" y="2880360"/>
-            <a:ext cx="8067543" cy="3063240"/>
+            <a:off x="9725171" y="2377440"/>
+            <a:ext cx="1732261" cy="3657600"/>
           </a:xfrm>
           <a:prstGeom prst="rect">
             <a:avLst/>
@@ -10012,8 +7367,8 @@
         </p:nvSpPr>
         <p:spPr>
           <a:xfrm>
-            <a:off x="2060705" y="6080760"/>
-            <a:ext cx="6062472" cy="365760"/>
+            <a:off x="9267971" y="6163056"/>
+            <a:ext cx="2646661" cy="329184"/>
           </a:xfrm>
           <a:prstGeom prst="rect">
             <a:avLst/>
@@ -10025,7 +7380,7 @@
           <a:bodyPr wrap="square" lIns="0" tIns="0" rIns="0" bIns="0" rtlCol="0" anchor="t"/>
           <a:lstStyle/>
           <a:p>
-            <a:pPr indent="0" marL="0">
+            <a:pPr algn="ctr" indent="0" marL="0">
               <a:buNone/>
             </a:pPr>
             <a:r>
@@ -10037,7 +7392,7 @@
                 <a:ea typeface="Arial" pitchFamily="34" charset="-122"/>
                 <a:cs typeface="Arial" pitchFamily="34" charset="-120"/>
               </a:rPr>
-              <a:t>Onglet Suivi, données d'essai.</a:t>
+              <a:t>Créer un inventaire ciblé, dans l'application.</a:t>
             </a:r>
             <a:endParaRPr lang="en-US" sz="1000" dirty="0"/>
           </a:p>
@@ -10046,6 +7401,200 @@
       <p:sp>
         <p:nvSpPr>
           <p:cNvPr id="11" name="Text 7"/>
+          <p:cNvSpPr/>
+          <p:nvPr/>
+        </p:nvSpPr>
+        <p:spPr>
+          <a:xfrm>
+            <a:off x="731520" y="2514600"/>
+            <a:ext cx="8445011" cy="3566160"/>
+          </a:xfrm>
+          <a:prstGeom prst="rect">
+            <a:avLst/>
+          </a:prstGeom>
+          <a:noFill/>
+          <a:ln/>
+        </p:spPr>
+        <p:txBody>
+          <a:bodyPr wrap="square" lIns="0" tIns="0" rIns="0" bIns="0" rtlCol="0" anchor="t"/>
+          <a:lstStyle/>
+          <a:p>
+            <a:pPr indent="0" marL="0">
+              <a:lnSpc>
+                <a:spcPct val="118000"/>
+              </a:lnSpc>
+              <a:spcAft>
+                <a:spcPts val="1400"/>
+              </a:spcAft>
+              <a:buNone/>
+            </a:pPr>
+            <a:r>
+              <a:rPr lang="en-US" sz="1300" b="1" dirty="0">
+                <a:solidFill>
+                  <a:srgbClr val="0B0F19"/>
+                </a:solidFill>
+                <a:latin typeface="Arial" pitchFamily="34" charset="0"/>
+                <a:ea typeface="Arial" pitchFamily="34" charset="-122"/>
+                <a:cs typeface="Arial" pitchFamily="34" charset="-120"/>
+              </a:rPr>
+              <a:t>La sélection. </a:t>
+            </a:r>
+            <a:pPr indent="0" marL="0">
+              <a:lnSpc>
+                <a:spcPct val="118000"/>
+              </a:lnSpc>
+              <a:spcAft>
+                <a:spcPts val="1400"/>
+              </a:spcAft>
+              <a:buNone/>
+            </a:pPr>
+            <a:r>
+              <a:rPr lang="en-US" sz="1300" dirty="0">
+                <a:solidFill>
+                  <a:srgbClr val="3D4556"/>
+                </a:solidFill>
+                <a:latin typeface="Arial" pitchFamily="34" charset="0"/>
+                <a:ea typeface="Arial" pitchFamily="34" charset="-122"/>
+                <a:cs typeface="Arial" pitchFamily="34" charset="-120"/>
+              </a:rPr>
+              <a:t>Elle reste chez vous : variances négatives répétées, articles sensibles, slow movers. Les rapports des inventaires précédents donnent les chiffres d'où cette sélection se tire.</a:t>
+            </a:r>
+            <a:endParaRPr lang="en-US" sz="1300" dirty="0"/>
+          </a:p>
+          <a:p>
+            <a:pPr indent="0" marL="0">
+              <a:lnSpc>
+                <a:spcPct val="118000"/>
+              </a:lnSpc>
+              <a:spcAft>
+                <a:spcPts val="1400"/>
+              </a:spcAft>
+              <a:buNone/>
+            </a:pPr>
+            <a:r>
+              <a:rPr lang="en-US" sz="1300" b="1" dirty="0">
+                <a:solidFill>
+                  <a:srgbClr val="0B0F19"/>
+                </a:solidFill>
+                <a:latin typeface="Arial" pitchFamily="34" charset="0"/>
+                <a:ea typeface="Arial" pitchFamily="34" charset="-122"/>
+                <a:cs typeface="Arial" pitchFamily="34" charset="-120"/>
+              </a:rPr>
+              <a:t>Le déclenchement. </a:t>
+            </a:r>
+            <a:pPr indent="0" marL="0">
+              <a:lnSpc>
+                <a:spcPct val="118000"/>
+              </a:lnSpc>
+              <a:spcAft>
+                <a:spcPts val="1400"/>
+              </a:spcAft>
+              <a:buNone/>
+            </a:pPr>
+            <a:r>
+              <a:rPr lang="en-US" sz="1300" dirty="0">
+                <a:solidFill>
+                  <a:srgbClr val="3D4556"/>
+                </a:solidFill>
+                <a:latin typeface="Arial" pitchFamily="34" charset="0"/>
+                <a:ea typeface="Arial" pitchFamily="34" charset="-122"/>
+                <a:cs typeface="Arial" pitchFamily="34" charset="-120"/>
+              </a:rPr>
+              <a:t>Un inventaire ciblé se crée en quelques minutes — une marque, un rayon, une liste d'articles — le jour même s'il le faut. Les équipes concernées sont invitées depuis l'outil.</a:t>
+            </a:r>
+            <a:endParaRPr lang="en-US" sz="1300" dirty="0"/>
+          </a:p>
+          <a:p>
+            <a:pPr indent="0" marL="0">
+              <a:lnSpc>
+                <a:spcPct val="118000"/>
+              </a:lnSpc>
+              <a:spcAft>
+                <a:spcPts val="1400"/>
+              </a:spcAft>
+              <a:buNone/>
+            </a:pPr>
+            <a:r>
+              <a:rPr lang="en-US" sz="1300" b="1" dirty="0">
+                <a:solidFill>
+                  <a:srgbClr val="0B0F19"/>
+                </a:solidFill>
+                <a:latin typeface="Arial" pitchFamily="34" charset="0"/>
+                <a:ea typeface="Arial" pitchFamily="34" charset="-122"/>
+                <a:cs typeface="Arial" pitchFamily="34" charset="-120"/>
+              </a:rPr>
+              <a:t>Le comptage. </a:t>
+            </a:r>
+            <a:pPr indent="0" marL="0">
+              <a:lnSpc>
+                <a:spcPct val="118000"/>
+              </a:lnSpc>
+              <a:spcAft>
+                <a:spcPts val="1400"/>
+              </a:spcAft>
+              <a:buNone/>
+            </a:pPr>
+            <a:r>
+              <a:rPr lang="en-US" sz="1300" dirty="0">
+                <a:solidFill>
+                  <a:srgbClr val="3D4556"/>
+                </a:solidFill>
+                <a:latin typeface="Arial" pitchFamily="34" charset="0"/>
+                <a:ea typeface="Arial" pitchFamily="34" charset="-122"/>
+                <a:cs typeface="Arial" pitchFamily="34" charset="-120"/>
+              </a:rPr>
+              <a:t>Rien à sortir, rien à monter : c'est ce qui rend l'aléatoire réellement aléatoire, et non un rendez-vous annoncé par la préparation qu'il demande.</a:t>
+            </a:r>
+            <a:endParaRPr lang="en-US" sz="1300" dirty="0"/>
+          </a:p>
+          <a:p>
+            <a:pPr indent="0" marL="0">
+              <a:lnSpc>
+                <a:spcPct val="118000"/>
+              </a:lnSpc>
+              <a:spcAft>
+                <a:spcPts val="1400"/>
+              </a:spcAft>
+              <a:buNone/>
+            </a:pPr>
+            <a:r>
+              <a:rPr lang="en-US" sz="1300" b="1" dirty="0">
+                <a:solidFill>
+                  <a:srgbClr val="0B0F19"/>
+                </a:solidFill>
+                <a:latin typeface="Arial" pitchFamily="34" charset="0"/>
+                <a:ea typeface="Arial" pitchFamily="34" charset="-122"/>
+                <a:cs typeface="Arial" pitchFamily="34" charset="-120"/>
+              </a:rPr>
+              <a:t>Le contrôle. </a:t>
+            </a:r>
+            <a:pPr indent="0" marL="0">
+              <a:lnSpc>
+                <a:spcPct val="118000"/>
+              </a:lnSpc>
+              <a:spcAft>
+                <a:spcPts val="1400"/>
+              </a:spcAft>
+              <a:buNone/>
+            </a:pPr>
+            <a:r>
+              <a:rPr lang="en-US" sz="1300" dirty="0">
+                <a:solidFill>
+                  <a:srgbClr val="3D4556"/>
+                </a:solidFill>
+                <a:latin typeface="Arial" pitchFamily="34" charset="0"/>
+                <a:ea typeface="Arial" pitchFamily="34" charset="-122"/>
+                <a:cs typeface="Arial" pitchFamily="34" charset="-120"/>
+              </a:rPr>
+              <a:t>L'écart se lit en direct. S'il dépasse votre seuil, l'Inventory Control reprend la main, et le rapport nourrit l'enquête.</a:t>
+            </a:r>
+            <a:endParaRPr lang="en-US" sz="1300" dirty="0"/>
+          </a:p>
+        </p:txBody>
+      </p:sp>
+      <p:sp>
+        <p:nvSpPr>
+          <p:cNvPr id="12" name="Text 8"/>
           <p:cNvSpPr/>
           <p:nvPr/>
         </p:nvSpPr>
@@ -10084,7 +7633,7 @@
       </p:sp>
       <p:sp>
         <p:nvSpPr>
-          <p:cNvPr id="12" name="Text 8"/>
+          <p:cNvPr id="13" name="Text 9"/>
           <p:cNvSpPr/>
           <p:nvPr/>
         </p:nvSpPr>
@@ -10249,7 +7798,7 @@
                 <a:ea typeface="Arial" pitchFamily="34" charset="-122"/>
                 <a:cs typeface="Arial" pitchFamily="34" charset="-120"/>
               </a:rPr>
-              <a:t>L'audit</a:t>
+              <a:t>Pour être clair</a:t>
             </a:r>
             <a:endParaRPr lang="en-US" sz="1000" dirty="0"/>
           </a:p>
@@ -10288,7 +7837,7 @@
         </p:nvSpPr>
         <p:spPr>
           <a:xfrm>
-            <a:off x="731520" y="1280160"/>
+            <a:off x="731520" y="1143000"/>
             <a:ext cx="10725912" cy="822960"/>
           </a:xfrm>
           <a:prstGeom prst="rect">
@@ -10308,7 +7857,7 @@
               <a:buNone/>
             </a:pPr>
             <a:r>
-              <a:rPr lang="en-US" sz="2600" b="1" dirty="0">
+              <a:rPr lang="en-US" sz="2500" b="1" dirty="0">
                 <a:solidFill>
                   <a:srgbClr val="4636B0"/>
                 </a:solidFill>
@@ -10316,9 +7865,9 @@
                 <a:ea typeface="Arial" pitchFamily="34" charset="-122"/>
                 <a:cs typeface="Arial" pitchFamily="34" charset="-120"/>
               </a:rPr>
-              <a:t>Vous fixez la règle d’audit. Le floor l’applique.</a:t>
-            </a:r>
-            <a:endParaRPr lang="en-US" sz="2600" dirty="0"/>
+              <a:t>Pourquoi nous — et ce que nous ne promettons pas.</a:t>
+            </a:r>
+            <a:endParaRPr lang="en-US" sz="2500" dirty="0"/>
           </a:p>
         </p:txBody>
       </p:sp>
@@ -10330,60 +7879,92 @@
         </p:nvSpPr>
         <p:spPr>
           <a:xfrm>
+            <a:off x="731520" y="1783080"/>
+            <a:ext cx="5042916" cy="274320"/>
+          </a:xfrm>
+          <a:prstGeom prst="rect">
+            <a:avLst/>
+          </a:prstGeom>
+          <a:noFill/>
+          <a:ln/>
+        </p:spPr>
+        <p:txBody>
+          <a:bodyPr wrap="square" lIns="0" tIns="0" rIns="0" bIns="0" rtlCol="0" anchor="t"/>
+          <a:lstStyle/>
+          <a:p>
+            <a:pPr indent="0" marL="0">
+              <a:buNone/>
+            </a:pPr>
+            <a:r>
+              <a:rPr lang="en-US" sz="1050" b="1" dirty="0">
+                <a:solidFill>
+                  <a:srgbClr val="4636B0"/>
+                </a:solidFill>
+                <a:latin typeface="Arial" pitchFamily="34" charset="0"/>
+                <a:ea typeface="Arial" pitchFamily="34" charset="-122"/>
+                <a:cs typeface="Arial" pitchFamily="34" charset="-120"/>
+              </a:rPr>
+              <a:t>Plutôt que SmartCount</a:t>
+            </a:r>
+            <a:endParaRPr lang="en-US" sz="1050" dirty="0"/>
+          </a:p>
+        </p:txBody>
+      </p:sp>
+      <p:sp>
+        <p:nvSpPr>
+          <p:cNvPr id="8" name="Text 5"/>
+          <p:cNvSpPr/>
+          <p:nvPr/>
+        </p:nvSpPr>
+        <p:spPr>
+          <a:xfrm>
+            <a:off x="6414516" y="1783080"/>
+            <a:ext cx="5042916" cy="274320"/>
+          </a:xfrm>
+          <a:prstGeom prst="rect">
+            <a:avLst/>
+          </a:prstGeom>
+          <a:noFill/>
+          <a:ln/>
+        </p:spPr>
+        <p:txBody>
+          <a:bodyPr wrap="square" lIns="0" tIns="0" rIns="0" bIns="0" rtlCol="0" anchor="t"/>
+          <a:lstStyle/>
+          <a:p>
+            <a:pPr indent="0" marL="0">
+              <a:buNone/>
+            </a:pPr>
+            <a:r>
+              <a:rPr lang="en-US" sz="1050" b="1" dirty="0">
+                <a:solidFill>
+                  <a:srgbClr val="5B6475"/>
+                </a:solidFill>
+                <a:latin typeface="Arial" pitchFamily="34" charset="0"/>
+                <a:ea typeface="Arial" pitchFamily="34" charset="-122"/>
+                <a:cs typeface="Arial" pitchFamily="34" charset="-120"/>
+              </a:rPr>
+              <a:t>Ce qu'on ne vous promet pas</a:t>
+            </a:r>
+            <a:endParaRPr lang="en-US" sz="1050" dirty="0"/>
+          </a:p>
+        </p:txBody>
+      </p:sp>
+      <p:sp>
+        <p:nvSpPr>
+          <p:cNvPr id="9" name="Shape 6"/>
+          <p:cNvSpPr/>
+          <p:nvPr/>
+        </p:nvSpPr>
+        <p:spPr>
+          <a:xfrm>
             <a:off x="731520" y="2103120"/>
-            <a:ext cx="10725912" cy="731520"/>
-          </a:xfrm>
-          <a:prstGeom prst="rect">
-            <a:avLst/>
-          </a:prstGeom>
-          <a:noFill/>
-          <a:ln/>
-        </p:spPr>
-        <p:txBody>
-          <a:bodyPr wrap="square" lIns="0" tIns="0" rIns="0" bIns="0" rtlCol="0" anchor="t"/>
-          <a:lstStyle/>
-          <a:p>
-            <a:pPr algn="l" indent="0" marL="0">
-              <a:lnSpc>
-                <a:spcPct val="118000"/>
-              </a:lnSpc>
-              <a:buNone/>
-            </a:pPr>
-            <a:r>
-              <a:rPr lang="en-US" sz="1250" dirty="0">
-                <a:solidFill>
-                  <a:srgbClr val="3D4556"/>
-                </a:solidFill>
-                <a:latin typeface="Arial" pitchFamily="34" charset="0"/>
-                <a:ea typeface="Arial" pitchFamily="34" charset="-122"/>
-                <a:cs typeface="Arial" pitchFamily="34" charset="-120"/>
-              </a:rPr>
-              <a:t>100 % de la W&amp;J, 30 % au moins ailleurs : la règle reste la vôtre — le chef d'équipe l'exécute. Un failed audit ne s'attend plus dans un rapport : les deux comptages s'affichent côte à côte, l'écart en pièces et en valeur d'achat, et il se tranche pendant que le compteur est encore au rayon.</a:t>
-            </a:r>
-            <a:endParaRPr lang="en-US" sz="1250" dirty="0"/>
-          </a:p>
-        </p:txBody>
-      </p:sp>
-      <p:sp>
-        <p:nvSpPr>
-          <p:cNvPr id="8" name="Shape 5"/>
-          <p:cNvSpPr/>
-          <p:nvPr/>
-        </p:nvSpPr>
-        <p:spPr>
-          <a:xfrm>
-            <a:off x="2139696" y="2871216"/>
-            <a:ext cx="7909560" cy="3103439"/>
-          </a:xfrm>
-          <a:prstGeom prst="roundRect">
-            <a:avLst>
-              <a:gd name="adj" fmla="val 2357"/>
-            </a:avLst>
-          </a:prstGeom>
-          <a:solidFill>
-            <a:srgbClr val="FFFFFF"/>
-          </a:solidFill>
-          <a:ln w="12700">
+            <a:ext cx="10725912" cy="0"/>
+          </a:xfrm>
+          <a:prstGeom prst="line">
+            <a:avLst/>
+          </a:prstGeom>
+          <a:noFill/>
+          <a:ln w="9525">
             <a:solidFill>
               <a:srgbClr val="E3E6EE"/>
             </a:solidFill>
@@ -10391,40 +7972,16 @@
           </a:ln>
         </p:spPr>
       </p:sp>
-      <p:pic>
-        <p:nvPicPr>
-          <p:cNvPr id="9" name="Image 1" descr="preencoded.png">    </p:cNvPr>
-          <p:cNvPicPr>
-            <a:picLocks noChangeAspect="1"/>
-          </p:cNvPicPr>
-          <p:nvPr/>
-        </p:nvPicPr>
-        <p:blipFill>
-          <a:blip r:embed="rId2"/>
-          <a:stretch>
-            <a:fillRect/>
-          </a:stretch>
-        </p:blipFill>
-        <p:spPr>
-          <a:xfrm>
-            <a:off x="2194560" y="2926080"/>
-            <a:ext cx="7799832" cy="2993711"/>
-          </a:xfrm>
-          <a:prstGeom prst="rect">
-            <a:avLst/>
-          </a:prstGeom>
-        </p:spPr>
-      </p:pic>
-      <p:sp>
-        <p:nvSpPr>
-          <p:cNvPr id="10" name="Text 6"/>
-          <p:cNvSpPr/>
-          <p:nvPr/>
-        </p:nvSpPr>
-        <p:spPr>
-          <a:xfrm>
-            <a:off x="2194560" y="6056951"/>
-            <a:ext cx="6062472" cy="365760"/>
+      <p:sp>
+        <p:nvSpPr>
+          <p:cNvPr id="10" name="Text 7"/>
+          <p:cNvSpPr/>
+          <p:nvPr/>
+        </p:nvSpPr>
+        <p:spPr>
+          <a:xfrm>
+            <a:off x="731520" y="2286000"/>
+            <a:ext cx="5042916" cy="2651760"/>
           </a:xfrm>
           <a:prstGeom prst="rect">
             <a:avLst/>
@@ -10437,10 +7994,382 @@
           <a:lstStyle/>
           <a:p>
             <a:pPr indent="0" marL="0">
-              <a:buNone/>
-            </a:pPr>
-            <a:r>
-              <a:rPr lang="en-US" sz="1000" i="1" dirty="0">
+              <a:lnSpc>
+                <a:spcPct val="118000"/>
+              </a:lnSpc>
+              <a:spcAft>
+                <a:spcPts val="1000"/>
+              </a:spcAft>
+              <a:buNone/>
+            </a:pPr>
+            <a:r>
+              <a:rPr lang="en-US" sz="1150" b="1" dirty="0">
+                <a:solidFill>
+                  <a:srgbClr val="0B0F19"/>
+                </a:solidFill>
+                <a:latin typeface="Arial" pitchFamily="34" charset="0"/>
+                <a:ea typeface="Arial" pitchFamily="34" charset="-122"/>
+                <a:cs typeface="Arial" pitchFamily="34" charset="-120"/>
+              </a:rPr>
+              <a:t>Le matériel. </a:t>
+            </a:r>
+            <a:pPr indent="0" marL="0">
+              <a:lnSpc>
+                <a:spcPct val="118000"/>
+              </a:lnSpc>
+              <a:spcAft>
+                <a:spcPts val="1000"/>
+              </a:spcAft>
+              <a:buNone/>
+            </a:pPr>
+            <a:r>
+              <a:rPr lang="en-US" sz="1150" dirty="0">
+                <a:solidFill>
+                  <a:srgbClr val="3D4556"/>
+                </a:solidFill>
+                <a:latin typeface="Arial" pitchFamily="34" charset="0"/>
+                <a:ea typeface="Arial" pitchFamily="34" charset="-122"/>
+                <a:cs typeface="Arial" pitchFamily="34" charset="-120"/>
+              </a:rPr>
+              <a:t>SmartCount repose sur une flotte de terminaux dédiés : à charger, configurer, vérifier avant chaque session — le métier qu'on cherche justement à ne plus faire. Quantinvo tourne sur les iPhone que vos équipes ont déjà, et une douchette Bluetooth s'y branche pour les gros volumes.</a:t>
+            </a:r>
+            <a:endParaRPr lang="en-US" sz="1150" dirty="0"/>
+          </a:p>
+          <a:p>
+            <a:pPr indent="0" marL="0">
+              <a:lnSpc>
+                <a:spcPct val="118000"/>
+              </a:lnSpc>
+              <a:spcAft>
+                <a:spcPts val="1000"/>
+              </a:spcAft>
+              <a:buNone/>
+            </a:pPr>
+            <a:r>
+              <a:rPr lang="en-US" sz="1150" b="1" dirty="0">
+                <a:solidFill>
+                  <a:srgbClr val="0B0F19"/>
+                </a:solidFill>
+                <a:latin typeface="Arial" pitchFamily="34" charset="0"/>
+                <a:ea typeface="Arial" pitchFamily="34" charset="-122"/>
+                <a:cs typeface="Arial" pitchFamily="34" charset="-120"/>
+              </a:rPr>
+              <a:t>La réconciliation. </a:t>
+            </a:r>
+            <a:pPr indent="0" marL="0">
+              <a:lnSpc>
+                <a:spcPct val="118000"/>
+              </a:lnSpc>
+              <a:spcAft>
+                <a:spcPts val="1000"/>
+              </a:spcAft>
+              <a:buNone/>
+            </a:pPr>
+            <a:r>
+              <a:rPr lang="en-US" sz="1150" dirty="0">
+                <a:solidFill>
+                  <a:srgbClr val="3D4556"/>
+                </a:solidFill>
+                <a:latin typeface="Arial" pitchFamily="34" charset="0"/>
+                <a:ea typeface="Arial" pitchFamily="34" charset="-122"/>
+                <a:cs typeface="Arial" pitchFamily="34" charset="-120"/>
+              </a:rPr>
+              <a:t>SmartCount rend un rapport de variance, à consolider ensuite avec le stock théorique. Quantinvo rend ce croisement déjà fait : l'attendu, le compté, le non-compté, l'écart en valeur.</a:t>
+            </a:r>
+            <a:endParaRPr lang="en-US" sz="1150" dirty="0"/>
+          </a:p>
+          <a:p>
+            <a:pPr indent="0" marL="0">
+              <a:lnSpc>
+                <a:spcPct val="118000"/>
+              </a:lnSpc>
+              <a:spcAft>
+                <a:spcPts val="1000"/>
+              </a:spcAft>
+              <a:buNone/>
+            </a:pPr>
+            <a:r>
+              <a:rPr lang="en-US" sz="1150" b="1" dirty="0">
+                <a:solidFill>
+                  <a:srgbClr val="0B0F19"/>
+                </a:solidFill>
+                <a:latin typeface="Arial" pitchFamily="34" charset="0"/>
+                <a:ea typeface="Arial" pitchFamily="34" charset="-122"/>
+                <a:cs typeface="Arial" pitchFamily="34" charset="-120"/>
+              </a:rPr>
+              <a:t>L'éditeur. </a:t>
+            </a:r>
+            <a:pPr indent="0" marL="0">
+              <a:lnSpc>
+                <a:spcPct val="118000"/>
+              </a:lnSpc>
+              <a:spcAft>
+                <a:spcPts val="1000"/>
+              </a:spcAft>
+              <a:buNone/>
+            </a:pPr>
+            <a:r>
+              <a:rPr lang="en-US" sz="1150" dirty="0">
+                <a:solidFill>
+                  <a:srgbClr val="3D4556"/>
+                </a:solidFill>
+                <a:latin typeface="Arial" pitchFamily="34" charset="0"/>
+                <a:ea typeface="Arial" pitchFamily="34" charset="-122"/>
+                <a:cs typeface="Arial" pitchFamily="34" charset="-120"/>
+              </a:rPr>
+              <a:t>SmartCount est un module au catalogue d'un géant du matériel. Quantinvo ne fait qu'une chose — l'inventaire — et la personne qui l'a dessiné répond elle-même à vos questions.</a:t>
+            </a:r>
+            <a:endParaRPr lang="en-US" sz="1150" dirty="0"/>
+          </a:p>
+        </p:txBody>
+      </p:sp>
+      <p:sp>
+        <p:nvSpPr>
+          <p:cNvPr id="11" name="Text 8"/>
+          <p:cNvSpPr/>
+          <p:nvPr/>
+        </p:nvSpPr>
+        <p:spPr>
+          <a:xfrm>
+            <a:off x="6414516" y="2286000"/>
+            <a:ext cx="5042916" cy="2651760"/>
+          </a:xfrm>
+          <a:prstGeom prst="rect">
+            <a:avLst/>
+          </a:prstGeom>
+          <a:noFill/>
+          <a:ln/>
+        </p:spPr>
+        <p:txBody>
+          <a:bodyPr wrap="square" lIns="0" tIns="0" rIns="0" bIns="0" rtlCol="0" anchor="t"/>
+          <a:lstStyle/>
+          <a:p>
+            <a:pPr indent="0" marL="0">
+              <a:lnSpc>
+                <a:spcPct val="118000"/>
+              </a:lnSpc>
+              <a:spcAft>
+                <a:spcPts val="1000"/>
+              </a:spcAft>
+              <a:buNone/>
+            </a:pPr>
+            <a:r>
+              <a:rPr lang="en-US" sz="1150" b="1" dirty="0">
+                <a:solidFill>
+                  <a:srgbClr val="0B0F19"/>
+                </a:solidFill>
+                <a:latin typeface="Arial" pitchFamily="34" charset="0"/>
+                <a:ea typeface="Arial" pitchFamily="34" charset="-122"/>
+                <a:cs typeface="Arial" pitchFamily="34" charset="-120"/>
+              </a:rPr>
+              <a:t>L'inventaire fiscal certifié. </a:t>
+            </a:r>
+            <a:pPr indent="0" marL="0">
+              <a:lnSpc>
+                <a:spcPct val="118000"/>
+              </a:lnSpc>
+              <a:spcAft>
+                <a:spcPts val="1000"/>
+              </a:spcAft>
+              <a:buNone/>
+            </a:pPr>
+            <a:r>
+              <a:rPr lang="en-US" sz="1150" dirty="0">
+                <a:solidFill>
+                  <a:srgbClr val="3D4556"/>
+                </a:solidFill>
+                <a:latin typeface="Arial" pitchFamily="34" charset="0"/>
+                <a:ea typeface="Arial" pitchFamily="34" charset="-122"/>
+                <a:cs typeface="Arial" pitchFamily="34" charset="-120"/>
+              </a:rPr>
+              <a:t>Si votre commissaire aux comptes exige un comptage par un tiers, ce comptage reste. Quantinvo fait tout le reste de l'année, et il le prépare.</a:t>
+            </a:r>
+            <a:endParaRPr lang="en-US" sz="1150" dirty="0"/>
+          </a:p>
+          <a:p>
+            <a:pPr indent="0" marL="0">
+              <a:lnSpc>
+                <a:spcPct val="118000"/>
+              </a:lnSpc>
+              <a:spcAft>
+                <a:spcPts val="1000"/>
+              </a:spcAft>
+              <a:buNone/>
+            </a:pPr>
+            <a:r>
+              <a:rPr lang="en-US" sz="1150" b="1" dirty="0">
+                <a:solidFill>
+                  <a:srgbClr val="0B0F19"/>
+                </a:solidFill>
+                <a:latin typeface="Arial" pitchFamily="34" charset="0"/>
+                <a:ea typeface="Arial" pitchFamily="34" charset="-122"/>
+                <a:cs typeface="Arial" pitchFamily="34" charset="-120"/>
+              </a:rPr>
+              <a:t>Une connexion à votre ERP. </a:t>
+            </a:r>
+            <a:pPr indent="0" marL="0">
+              <a:lnSpc>
+                <a:spcPct val="118000"/>
+              </a:lnSpc>
+              <a:spcAft>
+                <a:spcPts val="1000"/>
+              </a:spcAft>
+              <a:buNone/>
+            </a:pPr>
+            <a:r>
+              <a:rPr lang="en-US" sz="1150" dirty="0">
+                <a:solidFill>
+                  <a:srgbClr val="3D4556"/>
+                </a:solidFill>
+                <a:latin typeface="Arial" pitchFamily="34" charset="0"/>
+                <a:ea typeface="Arial" pitchFamily="34" charset="-122"/>
+                <a:cs typeface="Arial" pitchFamily="34" charset="-120"/>
+              </a:rPr>
+              <a:t>Quantinvo importe vos fichiers et rend un Excel. L'ajustement du stock reste un geste dans votre système — le seul qui doive le rester.</a:t>
+            </a:r>
+            <a:endParaRPr lang="en-US" sz="1150" dirty="0"/>
+          </a:p>
+          <a:p>
+            <a:pPr indent="0" marL="0">
+              <a:lnSpc>
+                <a:spcPct val="118000"/>
+              </a:lnSpc>
+              <a:spcAft>
+                <a:spcPts val="1000"/>
+              </a:spcAft>
+              <a:buNone/>
+            </a:pPr>
+            <a:r>
+              <a:rPr lang="en-US" sz="1150" b="1" dirty="0">
+                <a:solidFill>
+                  <a:srgbClr val="0B0F19"/>
+                </a:solidFill>
+                <a:latin typeface="Arial" pitchFamily="34" charset="0"/>
+                <a:ea typeface="Arial" pitchFamily="34" charset="-122"/>
+                <a:cs typeface="Arial" pitchFamily="34" charset="-120"/>
+              </a:rPr>
+              <a:t>La connexion par votre annuaire. </a:t>
+            </a:r>
+            <a:pPr indent="0" marL="0">
+              <a:lnSpc>
+                <a:spcPct val="118000"/>
+              </a:lnSpc>
+              <a:spcAft>
+                <a:spcPts val="1000"/>
+              </a:spcAft>
+              <a:buNone/>
+            </a:pPr>
+            <a:r>
+              <a:rPr lang="en-US" sz="1150" dirty="0">
+                <a:solidFill>
+                  <a:srgbClr val="3D4556"/>
+                </a:solidFill>
+                <a:latin typeface="Arial" pitchFamily="34" charset="0"/>
+                <a:ea typeface="Arial" pitchFamily="34" charset="-122"/>
+                <a:cs typeface="Arial" pitchFamily="34" charset="-120"/>
+              </a:rPr>
+              <a:t>Les comptes sont nominatifs, créés par invitation. Pas de SAML ni d'Entra ID ; dites-nous si c'est une exigence.</a:t>
+            </a:r>
+            <a:endParaRPr lang="en-US" sz="1150" dirty="0"/>
+          </a:p>
+          <a:p>
+            <a:pPr indent="0" marL="0">
+              <a:lnSpc>
+                <a:spcPct val="118000"/>
+              </a:lnSpc>
+              <a:spcAft>
+                <a:spcPts val="1000"/>
+              </a:spcAft>
+              <a:buNone/>
+            </a:pPr>
+            <a:r>
+              <a:rPr lang="en-US" sz="1150" b="1" dirty="0">
+                <a:solidFill>
+                  <a:srgbClr val="0B0F19"/>
+                </a:solidFill>
+                <a:latin typeface="Arial" pitchFamily="34" charset="0"/>
+                <a:ea typeface="Arial" pitchFamily="34" charset="-122"/>
+                <a:cs typeface="Arial" pitchFamily="34" charset="-120"/>
+              </a:rPr>
+              <a:t>Android sur les boutiques. </a:t>
+            </a:r>
+            <a:pPr indent="0" marL="0">
+              <a:lnSpc>
+                <a:spcPct val="118000"/>
+              </a:lnSpc>
+              <a:spcAft>
+                <a:spcPts val="1000"/>
+              </a:spcAft>
+              <a:buNone/>
+            </a:pPr>
+            <a:r>
+              <a:rPr lang="en-US" sz="1150" dirty="0">
+                <a:solidFill>
+                  <a:srgbClr val="3D4556"/>
+                </a:solidFill>
+                <a:latin typeface="Arial" pitchFamily="34" charset="0"/>
+                <a:ea typeface="Arial" pitchFamily="34" charset="-122"/>
+                <a:cs typeface="Arial" pitchFamily="34" charset="-120"/>
+              </a:rPr>
+              <a:t>L'application tourne sur Android et sur iPhone. Sa mise en ligne sur Google Play est en cours ; d'ici là, elle passe par votre catalogue d'entreprise.</a:t>
+            </a:r>
+            <a:endParaRPr lang="en-US" sz="1150" dirty="0"/>
+          </a:p>
+        </p:txBody>
+      </p:sp>
+      <p:sp>
+        <p:nvSpPr>
+          <p:cNvPr id="12" name="Shape 9"/>
+          <p:cNvSpPr/>
+          <p:nvPr/>
+        </p:nvSpPr>
+        <p:spPr>
+          <a:xfrm>
+            <a:off x="731520" y="5166360"/>
+            <a:ext cx="10725912" cy="1051560"/>
+          </a:xfrm>
+          <a:prstGeom prst="roundRect">
+            <a:avLst>
+              <a:gd name="adj" fmla="val 6957"/>
+            </a:avLst>
+          </a:prstGeom>
+          <a:solidFill>
+            <a:srgbClr val="F4F5F9"/>
+          </a:solidFill>
+          <a:ln w="12700">
+            <a:solidFill>
+              <a:srgbClr val="F4F5F9"/>
+            </a:solidFill>
+            <a:prstDash val="solid"/>
+          </a:ln>
+        </p:spPr>
+      </p:sp>
+      <p:sp>
+        <p:nvSpPr>
+          <p:cNvPr id="13" name="Text 10"/>
+          <p:cNvSpPr/>
+          <p:nvPr/>
+        </p:nvSpPr>
+        <p:spPr>
+          <a:xfrm>
+            <a:off x="1005840" y="5330952"/>
+            <a:ext cx="10177272" cy="228600"/>
+          </a:xfrm>
+          <a:prstGeom prst="rect">
+            <a:avLst/>
+          </a:prstGeom>
+          <a:noFill/>
+          <a:ln/>
+        </p:spPr>
+        <p:txBody>
+          <a:bodyPr wrap="square" lIns="0" tIns="0" rIns="0" bIns="0" rtlCol="0" anchor="t"/>
+          <a:lstStyle/>
+          <a:p>
+            <a:pPr indent="0" marL="0">
+              <a:buNone/>
+            </a:pPr>
+            <a:r>
+              <a:rPr lang="en-US" sz="950" b="1" dirty="0">
                 <a:solidFill>
                   <a:srgbClr val="5B6475"/>
                 </a:solidFill>
@@ -10448,15 +8377,57 @@
                 <a:ea typeface="Arial" pitchFamily="34" charset="-122"/>
                 <a:cs typeface="Arial" pitchFamily="34" charset="-120"/>
               </a:rPr>
-              <a:t>Onglet Écarts d'audit, données d'essai.</a:t>
-            </a:r>
-            <a:endParaRPr lang="en-US" sz="1000" dirty="0"/>
-          </a:p>
-        </p:txBody>
-      </p:sp>
-      <p:sp>
-        <p:nvSpPr>
-          <p:cNvPr id="11" name="Text 7"/>
+              <a:t>Pour être honnête</a:t>
+            </a:r>
+            <a:endParaRPr lang="en-US" sz="950" dirty="0"/>
+          </a:p>
+        </p:txBody>
+      </p:sp>
+      <p:sp>
+        <p:nvSpPr>
+          <p:cNvPr id="14" name="Text 11"/>
+          <p:cNvSpPr/>
+          <p:nvPr/>
+        </p:nvSpPr>
+        <p:spPr>
+          <a:xfrm>
+            <a:off x="1005840" y="5586984"/>
+            <a:ext cx="10177272" cy="502920"/>
+          </a:xfrm>
+          <a:prstGeom prst="rect">
+            <a:avLst/>
+          </a:prstGeom>
+          <a:noFill/>
+          <a:ln/>
+        </p:spPr>
+        <p:txBody>
+          <a:bodyPr wrap="square" lIns="0" tIns="0" rIns="0" bIns="0" rtlCol="0" anchor="t"/>
+          <a:lstStyle/>
+          <a:p>
+            <a:pPr indent="0" marL="0">
+              <a:lnSpc>
+                <a:spcPct val="115000"/>
+              </a:lnSpc>
+              <a:buNone/>
+            </a:pPr>
+            <a:r>
+              <a:rPr lang="en-US" sz="1150" i="1" dirty="0">
+                <a:solidFill>
+                  <a:srgbClr val="3D4556"/>
+                </a:solidFill>
+                <a:latin typeface="Arial" pitchFamily="34" charset="0"/>
+                <a:ea typeface="Arial" pitchFamily="34" charset="-122"/>
+                <a:cs typeface="Arial" pitchFamily="34" charset="-120"/>
+              </a:rPr>
+              <a:t>Un terminal durci encaisse mieux les chocs qu'un téléphone, et si votre flotte est déjà amortie, l'argument du matériel pèse moins. Ce qui ne bouge pas : un outil que le floor prend en main sans briefing, et une réconciliation qui n'existe plus.</a:t>
+            </a:r>
+            <a:endParaRPr lang="en-US" sz="1150" dirty="0"/>
+          </a:p>
+        </p:txBody>
+      </p:sp>
+      <p:sp>
+        <p:nvSpPr>
+          <p:cNvPr id="15" name="Text 12"/>
           <p:cNvSpPr/>
           <p:nvPr/>
         </p:nvSpPr>
@@ -10495,7 +8466,7 @@
       </p:sp>
       <p:sp>
         <p:nvSpPr>
-          <p:cNvPr id="12" name="Text 8"/>
+          <p:cNvPr id="16" name="Text 13"/>
           <p:cNvSpPr/>
           <p:nvPr/>
         </p:nvSpPr>

--- a/docs/entreprise/deck/Quantinvo-Samaritaine.pptx
+++ b/docs/entreprise/deck/Quantinvo-Samaritaine.pptx
@@ -864,7 +864,7 @@
           <a:p>
             <a:r>
               <a:rPr lang="en-US" dirty="0"/>
-              <a:t>Ne rien commenter : lire, et laisser la page faire son effet. C'est leur document, ils s'y reconnaissent. La question qui vient toute seule : pourquoi tout cela passe-t-il par l'Inventory Control ?</a:t>
+              <a:t>Poser le décor, sans commenter : c'est leur journée, ils s'y reconnaissent. Ne pas s'attarder — cette page n'est pas le sujet, elle prépare la suivante.</a:t>
             </a:r>
             <a:endParaRPr lang="en-US" dirty="0"/>
           </a:p>
@@ -952,7 +952,7 @@
           <a:p>
             <a:r>
               <a:rPr lang="en-US" dirty="0"/>
-              <a:t>Ne pas lire les cinq lignes : lire « La veille », puis descendre directement sur « Au total ». Chaque ligne de gauche est portée par l'Inventory Control, chaque ligne de droite par le floor — sauf la dernière, la seule qui vous reste. C'est le pivot de toute la proposition : on ne propose pas d'alléger votre charge, on propose de la transférer.</a:t>
+              <a:t>La page du problème. Lire l'encadré à voix haute : c'est lui qui articule tout le deck — un inventaire tournant suppose de compter souvent, et ce qu'on vient d'énumérer est précisément ce qui l'en empêche. Ne pas en rajouter : ces quatre points suffisent, et ils sont vrais.</a:t>
             </a:r>
             <a:endParaRPr lang="en-US" dirty="0"/>
           </a:p>
@@ -1040,7 +1040,7 @@
           <a:p>
             <a:r>
               <a:rPr lang="en-US" dirty="0"/>
-              <a:t>Les écrans sont de vraies captures de l'application, celles du guide de prise en main. Et l'Inventory Control ? Il n'a pas d'écran sur cette page — c'est le message. Le sien arrive deux pages plus loin : le rapport.</a:t>
+              <a:t>Les trois cartes répondent aux irritants dans leur ordre d'apparition : le balisage, le briefing, puis la conduite. La flotte est réglée par la phrase du haut. Les écrans sont de vraies captures. Et l'Inventory Control ? Il n'a pas d'écran sur cette page — c'est le message ; le sien arrive deux pages plus loin.</a:t>
             </a:r>
             <a:endParaRPr lang="en-US" dirty="0"/>
           </a:p>
@@ -1128,7 +1128,7 @@
           <a:p>
             <a:r>
               <a:rPr lang="en-US" dirty="0"/>
-              <a:t>Le poste de surveillance n'est pas supprimé, il est distribué : chaque chef d'équipe voit son rayon, et vous voyez tout sans rien opérer. Le recomptage ne disparaît pas non plus — il se décide à chaud plutôt que d'être découvert sur la plateforme. Le suivi est agrégé, personne n'est suivi nominativement en direct : cela parle aux RH et au CSE d'une maison de cette taille.</a:t>
+              <a:t>La réponse au premier irritant : le poste de surveillance n'est pas supprimé, il est distribué. Chaque chef d'équipe voit son rayon ; vous voyez tout sans avoir à rester dessus. Le recomptage ne disparaît pas — il se décide à chaud. Le suivi est agrégé, personne n'est suivi nominativement en direct : cela parle aux RH et au CSE d'une maison de cette taille.</a:t>
             </a:r>
             <a:endParaRPr lang="en-US" dirty="0"/>
           </a:p>
@@ -1216,7 +1216,7 @@
           <a:p>
             <a:r>
               <a:rPr lang="en-US" dirty="0"/>
-              <a:t>C'est la page de l'Inventory Control : son travail commence ici, sur un fichier déjà croisé avec le théorique. Le circuit de validation ne change pas — il s'exerce sur un fichier mieux rangé, et plus tôt dans la journée.</a:t>
+              <a:t>La page de l'Inventory Control : son travail commence ici. Ne pas survendre — le recoupement n'était pas le plus dur de la journée, c'est simplement une chose de moins à faire, et le circuit de validation ne change pas.</a:t>
             </a:r>
             <a:endParaRPr lang="en-US" dirty="0"/>
           </a:p>
@@ -3911,7 +3911,7 @@
         <p:spPr>
           <a:xfrm>
             <a:off x="731520" y="1325880"/>
-            <a:ext cx="4206240" cy="1554480"/>
+            <a:ext cx="4206240" cy="1463040"/>
           </a:xfrm>
           <a:prstGeom prst="rect">
             <a:avLst/>
@@ -3938,7 +3938,7 @@
                 <a:ea typeface="Arial" pitchFamily="34" charset="-122"/>
                 <a:cs typeface="Arial" pitchFamily="34" charset="-120"/>
               </a:rPr>
-              <a:t>Votre journée d'inventaire, telle qu'elle se déroule.</a:t>
+              <a:t>Un inventaire tournant, aujourd’hui.</a:t>
             </a:r>
             <a:endParaRPr lang="en-US" sz="2600" dirty="0"/>
           </a:p>
@@ -3952,8 +3952,8 @@
         </p:nvSpPr>
         <p:spPr>
           <a:xfrm>
-            <a:off x="731520" y="2926080"/>
-            <a:ext cx="4206240" cy="1097280"/>
+            <a:off x="731520" y="2834640"/>
+            <a:ext cx="4206240" cy="914400"/>
           </a:xfrm>
           <a:prstGeom prst="rect">
             <a:avLst/>
@@ -3980,7 +3980,7 @@
                 <a:ea typeface="Arial" pitchFamily="34" charset="-122"/>
                 <a:cs typeface="Arial" pitchFamily="34" charset="-120"/>
               </a:rPr>
-              <a:t>Reprise de votre déroulement d'inventaire tournant, étape par étape. Chaque ligne est tirée de votre document — et chaque ligne est portée par l'Inventory Control.</a:t>
+              <a:t>Le déroulement est le même partout, quel que soit l'outil de comptage.</a:t>
             </a:r>
             <a:endParaRPr lang="en-US" sz="1200" dirty="0"/>
           </a:p>
@@ -4045,7 +4045,7 @@
                 <a:ea typeface="Arial" pitchFamily="34" charset="-122"/>
                 <a:cs typeface="Arial" pitchFamily="34" charset="-120"/>
               </a:rPr>
-              <a:t>Balisage des zones à inventorier, stickers posés avec une personne du floor ou du relay.</a:t>
+              <a:t>On balise les zones à inventorier : quelqu'un passe dans le magasin poser les étiquettes, rayon par rayon.</a:t>
             </a:r>
             <a:endParaRPr lang="en-US" sz="1300" dirty="0"/>
           </a:p>
@@ -4088,7 +4088,7 @@
                 <a:ea typeface="Arial" pitchFamily="34" charset="-122"/>
                 <a:cs typeface="Arial" pitchFamily="34" charset="-120"/>
               </a:rPr>
-              <a:t>Télécharger le stock théorique du jour, ouvrir la session SmartCount, connecter les terminaux Zebra un par un — en vérifiant la date et la localisation de chacun (101 floor / BOH, 902 relay). Puis briefer les compteurs sur le maniement des terminaux et la procédure.</a:t>
+              <a:t>On télécharge le stock théorique du jour, on ouvre la session, on prépare les terminaux un par un — charge, date, localisation — puis on briefe les compteurs sur le maniement du matériel et sur la procédure.</a:t>
             </a:r>
             <a:endParaRPr lang="en-US" sz="1300" dirty="0"/>
           </a:p>
@@ -4131,7 +4131,7 @@
                 <a:ea typeface="Arial" pitchFamily="34" charset="-122"/>
                 <a:cs typeface="Arial" pitchFamily="34" charset="-120"/>
               </a:rPr>
-              <a:t>Déclencher l'audit des zones comptées — 100 % pour la W&amp;J, 30 % au moins ailleurs —, guetter les failed audits sur SmartCount, faire recompter les zones en désaccord.</a:t>
+              <a:t>Les équipes comptent. On déclenche l'audit selon la règle du magasin — 100 % sur l'horlogerie et la joaillerie, 30 % au moins ailleurs — et on fait recompter les zones en désaccord.</a:t>
             </a:r>
             <a:endParaRPr lang="en-US" sz="1300" dirty="0"/>
           </a:p>
@@ -4174,7 +4174,7 @@
                 <a:ea typeface="Arial" pitchFamily="34" charset="-122"/>
                 <a:cs typeface="Arial" pitchFamily="34" charset="-120"/>
               </a:rPr>
-              <a:t>Extraire le rapport SKU Variance, le consolider à la main avec le stock théorique, faire valider les résultats selon la valeur de l'écart (Inventory Control, PSM ou AGM), puis ajuster le stock.</a:t>
+              <a:t>On sort le rapport d'inventaire, on le recoupe avec le stock théorique, on fait valider selon la valeur de l'écart, puis on ajuste le stock.</a:t>
             </a:r>
             <a:endParaRPr lang="en-US" sz="1300" dirty="0"/>
           </a:p>
@@ -4386,7 +4386,7 @@
                 <a:ea typeface="Arial" pitchFamily="34" charset="-122"/>
                 <a:cs typeface="Arial" pitchFamily="34" charset="-120"/>
               </a:rPr>
-              <a:t>Ce qui change</a:t>
+              <a:t>Ce que ça demande</a:t>
             </a:r>
             <a:endParaRPr lang="en-US" sz="1000" dirty="0"/>
           </a:p>
@@ -4445,7 +4445,7 @@
               <a:buNone/>
             </a:pPr>
             <a:r>
-              <a:rPr lang="en-US" sz="2500" b="1" dirty="0">
+              <a:rPr lang="en-US" sz="2400" b="1" dirty="0">
                 <a:solidFill>
                   <a:srgbClr val="4636B0"/>
                 </a:solidFill>
@@ -4453,9 +4453,9 @@
                 <a:ea typeface="Arial" pitchFamily="34" charset="-122"/>
                 <a:cs typeface="Arial" pitchFamily="34" charset="-120"/>
               </a:rPr>
-              <a:t>Le déroulement ne change pas. Ce qui change, c'est qui le porte.</a:t>
-            </a:r>
-            <a:endParaRPr lang="en-US" sz="2500" dirty="0"/>
+              <a:t>Le comptage est fait par les équipes. Tout ce qui l’entoure est fait par vous.</a:t>
+            </a:r>
+            <a:endParaRPr lang="en-US" sz="2400" dirty="0"/>
           </a:p>
         </p:txBody>
       </p:sp>
@@ -4467,8 +4467,8 @@
         </p:nvSpPr>
         <p:spPr>
           <a:xfrm>
-            <a:off x="731520" y="1828800"/>
-            <a:ext cx="10725912" cy="365760"/>
+            <a:off x="731520" y="2286000"/>
+            <a:ext cx="10725912" cy="2743200"/>
           </a:xfrm>
           <a:prstGeom prst="rect">
             <a:avLst/>
@@ -4480,123 +4480,201 @@
           <a:bodyPr wrap="square" lIns="0" tIns="0" rIns="0" bIns="0" rtlCol="0" anchor="t"/>
           <a:lstStyle/>
           <a:p>
-            <a:pPr algn="l" indent="0" marL="0">
+            <a:pPr indent="0" marL="0">
               <a:lnSpc>
                 <a:spcPct val="118000"/>
               </a:lnSpc>
-              <a:buNone/>
-            </a:pPr>
-            <a:r>
-              <a:rPr lang="en-US" sz="1200" i="1" dirty="0">
-                <a:solidFill>
-                  <a:srgbClr val="5B6475"/>
-                </a:solidFill>
-                <a:latin typeface="Arial" pitchFamily="34" charset="0"/>
-                <a:ea typeface="Arial" pitchFamily="34" charset="-122"/>
-                <a:cs typeface="Arial" pitchFamily="34" charset="-120"/>
-              </a:rPr>
-              <a:t>Votre journée, ligne à ligne, et la même conduite par les équipes de vente.</a:t>
-            </a:r>
-            <a:endParaRPr lang="en-US" sz="1200" dirty="0"/>
-          </a:p>
-        </p:txBody>
-      </p:sp>
-      <p:sp>
-        <p:nvSpPr>
-          <p:cNvPr id="8" name="Text 5"/>
-          <p:cNvSpPr/>
-          <p:nvPr/>
-        </p:nvSpPr>
-        <p:spPr>
-          <a:xfrm>
-            <a:off x="731520" y="2331720"/>
-            <a:ext cx="5088636" cy="274320"/>
-          </a:xfrm>
-          <a:prstGeom prst="rect">
-            <a:avLst/>
-          </a:prstGeom>
-          <a:noFill/>
-          <a:ln/>
-        </p:spPr>
-        <p:txBody>
-          <a:bodyPr wrap="square" lIns="0" tIns="0" rIns="0" bIns="0" rtlCol="0" anchor="t"/>
-          <a:lstStyle/>
-          <a:p>
-            <a:pPr indent="0" marL="0">
-              <a:buNone/>
-            </a:pPr>
-            <a:r>
-              <a:rPr lang="en-US" sz="1050" b="1" dirty="0">
-                <a:solidFill>
-                  <a:srgbClr val="5B6475"/>
-                </a:solidFill>
-                <a:latin typeface="Arial" pitchFamily="34" charset="0"/>
-                <a:ea typeface="Arial" pitchFamily="34" charset="-122"/>
-                <a:cs typeface="Arial" pitchFamily="34" charset="-120"/>
-              </a:rPr>
-              <a:t>Aujourd'hui</a:t>
-            </a:r>
-            <a:endParaRPr lang="en-US" sz="1050" dirty="0"/>
-          </a:p>
-        </p:txBody>
-      </p:sp>
-      <p:sp>
-        <p:nvSpPr>
-          <p:cNvPr id="9" name="Text 6"/>
-          <p:cNvSpPr/>
-          <p:nvPr/>
-        </p:nvSpPr>
-        <p:spPr>
-          <a:xfrm>
-            <a:off x="6368796" y="2331720"/>
-            <a:ext cx="5088636" cy="274320"/>
-          </a:xfrm>
-          <a:prstGeom prst="rect">
-            <a:avLst/>
-          </a:prstGeom>
-          <a:noFill/>
-          <a:ln/>
-        </p:spPr>
-        <p:txBody>
-          <a:bodyPr wrap="square" lIns="0" tIns="0" rIns="0" bIns="0" rtlCol="0" anchor="t"/>
-          <a:lstStyle/>
-          <a:p>
-            <a:pPr indent="0" marL="0">
-              <a:buNone/>
-            </a:pPr>
-            <a:r>
-              <a:rPr lang="en-US" sz="1050" b="1" dirty="0">
-                <a:solidFill>
-                  <a:srgbClr val="4636B0"/>
-                </a:solidFill>
-                <a:latin typeface="Arial" pitchFamily="34" charset="0"/>
-                <a:ea typeface="Arial" pitchFamily="34" charset="-122"/>
-                <a:cs typeface="Arial" pitchFamily="34" charset="-120"/>
-              </a:rPr>
-              <a:t>Avec Quantinvo</a:t>
-            </a:r>
-            <a:endParaRPr lang="en-US" sz="1050" dirty="0"/>
-          </a:p>
-        </p:txBody>
-      </p:sp>
-      <p:sp>
-        <p:nvSpPr>
-          <p:cNvPr id="10" name="Shape 7"/>
-          <p:cNvSpPr/>
-          <p:nvPr/>
-        </p:nvSpPr>
-        <p:spPr>
-          <a:xfrm>
-            <a:off x="731520" y="2679192"/>
-            <a:ext cx="10725912" cy="0"/>
-          </a:xfrm>
-          <a:prstGeom prst="line">
-            <a:avLst/>
-          </a:prstGeom>
-          <a:noFill/>
-          <a:ln w="9525">
+              <a:spcAft>
+                <a:spcPts val="1400"/>
+              </a:spcAft>
+              <a:buNone/>
+            </a:pPr>
+            <a:r>
+              <a:rPr lang="en-US" sz="1300" b="1" dirty="0">
+                <a:solidFill>
+                  <a:srgbClr val="0B0F19"/>
+                </a:solidFill>
+                <a:latin typeface="Arial" pitchFamily="34" charset="0"/>
+                <a:ea typeface="Arial" pitchFamily="34" charset="-122"/>
+                <a:cs typeface="Arial" pitchFamily="34" charset="-120"/>
+              </a:rPr>
+              <a:t>Un service mobilisé du début à la fin. </a:t>
+            </a:r>
+            <a:pPr indent="0" marL="0">
+              <a:lnSpc>
+                <a:spcPct val="118000"/>
+              </a:lnSpc>
+              <a:spcAft>
+                <a:spcPts val="1400"/>
+              </a:spcAft>
+              <a:buNone/>
+            </a:pPr>
+            <a:r>
+              <a:rPr lang="en-US" sz="1300" dirty="0">
+                <a:solidFill>
+                  <a:srgbClr val="3D4556"/>
+                </a:solidFill>
+                <a:latin typeface="Arial" pitchFamily="34" charset="0"/>
+                <a:ea typeface="Arial" pitchFamily="34" charset="-122"/>
+                <a:cs typeface="Arial" pitchFamily="34" charset="-120"/>
+              </a:rPr>
+              <a:t>Quelqu'un de l'Inventory Control prépare l'inventaire, reste disponible pendant le comptage, puis reprend le fichier pour le recouper avec le théorique.</a:t>
+            </a:r>
+            <a:endParaRPr lang="en-US" sz="1300" dirty="0"/>
+          </a:p>
+          <a:p>
+            <a:pPr indent="0" marL="0">
+              <a:lnSpc>
+                <a:spcPct val="118000"/>
+              </a:lnSpc>
+              <a:spcAft>
+                <a:spcPts val="1400"/>
+              </a:spcAft>
+              <a:buNone/>
+            </a:pPr>
+            <a:r>
+              <a:rPr lang="en-US" sz="1300" b="1" dirty="0">
+                <a:solidFill>
+                  <a:srgbClr val="0B0F19"/>
+                </a:solidFill>
+                <a:latin typeface="Arial" pitchFamily="34" charset="0"/>
+                <a:ea typeface="Arial" pitchFamily="34" charset="-122"/>
+                <a:cs typeface="Arial" pitchFamily="34" charset="-120"/>
+              </a:rPr>
+              <a:t>Une flotte à préparer. </a:t>
+            </a:r>
+            <a:pPr indent="0" marL="0">
+              <a:lnSpc>
+                <a:spcPct val="118000"/>
+              </a:lnSpc>
+              <a:spcAft>
+                <a:spcPts val="1400"/>
+              </a:spcAft>
+              <a:buNone/>
+            </a:pPr>
+            <a:r>
+              <a:rPr lang="en-US" sz="1300" dirty="0">
+                <a:solidFill>
+                  <a:srgbClr val="3D4556"/>
+                </a:solidFill>
+                <a:latin typeface="Arial" pitchFamily="34" charset="0"/>
+                <a:ea typeface="Arial" pitchFamily="34" charset="-122"/>
+                <a:cs typeface="Arial" pitchFamily="34" charset="-120"/>
+              </a:rPr>
+              <a:t>Les terminaux se chargent, se connectent et se vérifient un par un avant chaque session — date, localisation. C'est un travail en soi, et il ne compte aucun article.</a:t>
+            </a:r>
+            <a:endParaRPr lang="en-US" sz="1300" dirty="0"/>
+          </a:p>
+          <a:p>
+            <a:pPr indent="0" marL="0">
+              <a:lnSpc>
+                <a:spcPct val="118000"/>
+              </a:lnSpc>
+              <a:spcAft>
+                <a:spcPts val="1400"/>
+              </a:spcAft>
+              <a:buNone/>
+            </a:pPr>
+            <a:r>
+              <a:rPr lang="en-US" sz="1300" b="1" dirty="0">
+                <a:solidFill>
+                  <a:srgbClr val="0B0F19"/>
+                </a:solidFill>
+                <a:latin typeface="Arial" pitchFamily="34" charset="0"/>
+                <a:ea typeface="Arial" pitchFamily="34" charset="-122"/>
+                <a:cs typeface="Arial" pitchFamily="34" charset="-120"/>
+              </a:rPr>
+              <a:t>Un briefing à chaque fois. </a:t>
+            </a:r>
+            <a:pPr indent="0" marL="0">
+              <a:lnSpc>
+                <a:spcPct val="118000"/>
+              </a:lnSpc>
+              <a:spcAft>
+                <a:spcPts val="1400"/>
+              </a:spcAft>
+              <a:buNone/>
+            </a:pPr>
+            <a:r>
+              <a:rPr lang="en-US" sz="1300" dirty="0">
+                <a:solidFill>
+                  <a:srgbClr val="3D4556"/>
+                </a:solidFill>
+                <a:latin typeface="Arial" pitchFamily="34" charset="0"/>
+                <a:ea typeface="Arial" pitchFamily="34" charset="-122"/>
+                <a:cs typeface="Arial" pitchFamily="34" charset="-120"/>
+              </a:rPr>
+              <a:t>Le maniement du matériel s'explique à chaque équipe et à chaque inventaire. Les compteurs changent, la procédure se réapprend.</a:t>
+            </a:r>
+            <a:endParaRPr lang="en-US" sz="1300" dirty="0"/>
+          </a:p>
+          <a:p>
+            <a:pPr indent="0" marL="0">
+              <a:lnSpc>
+                <a:spcPct val="118000"/>
+              </a:lnSpc>
+              <a:spcAft>
+                <a:spcPts val="1400"/>
+              </a:spcAft>
+              <a:buNone/>
+            </a:pPr>
+            <a:r>
+              <a:rPr lang="en-US" sz="1300" b="1" dirty="0">
+                <a:solidFill>
+                  <a:srgbClr val="0B0F19"/>
+                </a:solidFill>
+                <a:latin typeface="Arial" pitchFamily="34" charset="0"/>
+                <a:ea typeface="Arial" pitchFamily="34" charset="-122"/>
+                <a:cs typeface="Arial" pitchFamily="34" charset="-120"/>
+              </a:rPr>
+              <a:t>Un balisage la veille. </a:t>
+            </a:r>
+            <a:pPr indent="0" marL="0">
+              <a:lnSpc>
+                <a:spcPct val="118000"/>
+              </a:lnSpc>
+              <a:spcAft>
+                <a:spcPts val="1400"/>
+              </a:spcAft>
+              <a:buNone/>
+            </a:pPr>
+            <a:r>
+              <a:rPr lang="en-US" sz="1300" dirty="0">
+                <a:solidFill>
+                  <a:srgbClr val="3D4556"/>
+                </a:solidFill>
+                <a:latin typeface="Arial" pitchFamily="34" charset="0"/>
+                <a:ea typeface="Arial" pitchFamily="34" charset="-122"/>
+                <a:cs typeface="Arial" pitchFamily="34" charset="-120"/>
+              </a:rPr>
+              <a:t>Il faut mobiliser quelqu'un du magasin pour poser les étiquettes, avant même que le comptage ait commencé.</a:t>
+            </a:r>
+            <a:endParaRPr lang="en-US" sz="1300" dirty="0"/>
+          </a:p>
+        </p:txBody>
+      </p:sp>
+      <p:sp>
+        <p:nvSpPr>
+          <p:cNvPr id="8" name="Shape 5"/>
+          <p:cNvSpPr/>
+          <p:nvPr/>
+        </p:nvSpPr>
+        <p:spPr>
+          <a:xfrm>
+            <a:off x="731520" y="5120640"/>
+            <a:ext cx="10725912" cy="1051560"/>
+          </a:xfrm>
+          <a:prstGeom prst="roundRect">
+            <a:avLst>
+              <a:gd name="adj" fmla="val 6957"/>
+            </a:avLst>
+          </a:prstGeom>
+          <a:solidFill>
+            <a:srgbClr val="F4F5F9"/>
+          </a:solidFill>
+          <a:ln w="12700">
             <a:solidFill>
-              <a:srgbClr val="E3E6EE"/>
+              <a:srgbClr val="F4F5F9"/>
             </a:solidFill>
             <a:prstDash val="solid"/>
           </a:ln>
@@ -4604,14 +4682,53 @@
       </p:sp>
       <p:sp>
         <p:nvSpPr>
-          <p:cNvPr id="11" name="Text 8"/>
-          <p:cNvSpPr/>
-          <p:nvPr/>
-        </p:nvSpPr>
-        <p:spPr>
-          <a:xfrm>
-            <a:off x="731520" y="2807208"/>
-            <a:ext cx="5088636" cy="548640"/>
+          <p:cNvPr id="9" name="Text 6"/>
+          <p:cNvSpPr/>
+          <p:nvPr/>
+        </p:nvSpPr>
+        <p:spPr>
+          <a:xfrm>
+            <a:off x="1005840" y="5285232"/>
+            <a:ext cx="10177272" cy="228600"/>
+          </a:xfrm>
+          <a:prstGeom prst="rect">
+            <a:avLst/>
+          </a:prstGeom>
+          <a:noFill/>
+          <a:ln/>
+        </p:spPr>
+        <p:txBody>
+          <a:bodyPr wrap="square" lIns="0" tIns="0" rIns="0" bIns="0" rtlCol="0" anchor="t"/>
+          <a:lstStyle/>
+          <a:p>
+            <a:pPr indent="0" marL="0">
+              <a:buNone/>
+            </a:pPr>
+            <a:r>
+              <a:rPr lang="en-US" sz="950" b="1" dirty="0">
+                <a:solidFill>
+                  <a:srgbClr val="5B6475"/>
+                </a:solidFill>
+                <a:latin typeface="Arial" pitchFamily="34" charset="0"/>
+                <a:ea typeface="Arial" pitchFamily="34" charset="-122"/>
+                <a:cs typeface="Arial" pitchFamily="34" charset="-120"/>
+              </a:rPr>
+              <a:t>Ce que ça coûte vraiment</a:t>
+            </a:r>
+            <a:endParaRPr lang="en-US" sz="950" dirty="0"/>
+          </a:p>
+        </p:txBody>
+      </p:sp>
+      <p:sp>
+        <p:nvSpPr>
+          <p:cNvPr id="10" name="Text 7"/>
+          <p:cNvSpPr/>
+          <p:nvPr/>
+        </p:nvSpPr>
+        <p:spPr>
+          <a:xfrm>
+            <a:off x="1005840" y="5541264"/>
+            <a:ext cx="10177272" cy="502920"/>
           </a:xfrm>
           <a:prstGeom prst="rect">
             <a:avLst/>
@@ -4630,24 +4747,7 @@
               <a:buNone/>
             </a:pPr>
             <a:r>
-              <a:rPr lang="en-US" sz="1150" b="1" dirty="0">
-                <a:solidFill>
-                  <a:srgbClr val="0B0F19"/>
-                </a:solidFill>
-                <a:latin typeface="Arial" pitchFamily="34" charset="0"/>
-                <a:ea typeface="Arial" pitchFamily="34" charset="-122"/>
-                <a:cs typeface="Arial" pitchFamily="34" charset="-120"/>
-              </a:rPr>
-              <a:t>La veille. </a:t>
-            </a:r>
-            <a:pPr indent="0" marL="0">
-              <a:lnSpc>
-                <a:spcPct val="115000"/>
-              </a:lnSpc>
-              <a:buNone/>
-            </a:pPr>
-            <a:r>
-              <a:rPr lang="en-US" sz="1150" dirty="0">
+              <a:rPr lang="en-US" sz="1150" i="1" dirty="0">
                 <a:solidFill>
                   <a:srgbClr val="3D4556"/>
                 </a:solidFill>
@@ -4655,7 +4755,7 @@
                 <a:ea typeface="Arial" pitchFamily="34" charset="-122"/>
                 <a:cs typeface="Arial" pitchFamily="34" charset="-120"/>
               </a:rPr>
-              <a:t>Balisage par l'Inventory Control, stickers posés avec une personne du floor ou du relay.</a:t>
+              <a:t>Ce n'est pas le comptage qui pèse — il est fait par les équipes de vente, et il se fait bien. C'est tout ce qu'il faut monter autour, à chaque fois, et qui interdit de compter souvent.</a:t>
             </a:r>
             <a:endParaRPr lang="en-US" sz="1150" dirty="0"/>
           </a:p>
@@ -4663,568 +4763,7 @@
       </p:sp>
       <p:sp>
         <p:nvSpPr>
-          <p:cNvPr id="12" name="Text 9"/>
-          <p:cNvSpPr/>
-          <p:nvPr/>
-        </p:nvSpPr>
-        <p:spPr>
-          <a:xfrm>
-            <a:off x="6368796" y="2807208"/>
-            <a:ext cx="5088636" cy="548640"/>
-          </a:xfrm>
-          <a:prstGeom prst="rect">
-            <a:avLst/>
-          </a:prstGeom>
-          <a:noFill/>
-          <a:ln/>
-        </p:spPr>
-        <p:txBody>
-          <a:bodyPr wrap="square" lIns="0" tIns="0" rIns="0" bIns="0" rtlCol="0" anchor="t"/>
-          <a:lstStyle/>
-          <a:p>
-            <a:pPr indent="0" marL="0">
-              <a:lnSpc>
-                <a:spcPct val="115000"/>
-              </a:lnSpc>
-              <a:buNone/>
-            </a:pPr>
-            <a:r>
-              <a:rPr lang="en-US" sz="1150" dirty="0">
-                <a:solidFill>
-                  <a:srgbClr val="0B0F19"/>
-                </a:solidFill>
-                <a:latin typeface="Arial" pitchFamily="34" charset="0"/>
-                <a:ea typeface="Arial" pitchFamily="34" charset="-122"/>
-                <a:cs typeface="Arial" pitchFamily="34" charset="-120"/>
-              </a:rPr>
-              <a:t>Le chef d'équipe imprime ses balises — une planche d'étiquettes numérotées, en PDF — et les pose avec son équipe.</a:t>
-            </a:r>
-            <a:endParaRPr lang="en-US" sz="1150" dirty="0"/>
-          </a:p>
-        </p:txBody>
-      </p:sp>
-      <p:sp>
-        <p:nvSpPr>
-          <p:cNvPr id="13" name="Shape 10"/>
-          <p:cNvSpPr/>
-          <p:nvPr/>
-        </p:nvSpPr>
-        <p:spPr>
-          <a:xfrm>
-            <a:off x="731520" y="3374136"/>
-            <a:ext cx="10725912" cy="0"/>
-          </a:xfrm>
-          <a:prstGeom prst="line">
-            <a:avLst/>
-          </a:prstGeom>
-          <a:noFill/>
-          <a:ln w="9525">
-            <a:solidFill>
-              <a:srgbClr val="E3E6EE"/>
-            </a:solidFill>
-            <a:prstDash val="solid"/>
-          </a:ln>
-        </p:spPr>
-      </p:sp>
-      <p:sp>
-        <p:nvSpPr>
-          <p:cNvPr id="14" name="Text 11"/>
-          <p:cNvSpPr/>
-          <p:nvPr/>
-        </p:nvSpPr>
-        <p:spPr>
-          <a:xfrm>
-            <a:off x="731520" y="3502152"/>
-            <a:ext cx="5088636" cy="548640"/>
-          </a:xfrm>
-          <a:prstGeom prst="rect">
-            <a:avLst/>
-          </a:prstGeom>
-          <a:noFill/>
-          <a:ln/>
-        </p:spPr>
-        <p:txBody>
-          <a:bodyPr wrap="square" lIns="0" tIns="0" rIns="0" bIns="0" rtlCol="0" anchor="t"/>
-          <a:lstStyle/>
-          <a:p>
-            <a:pPr indent="0" marL="0">
-              <a:lnSpc>
-                <a:spcPct val="115000"/>
-              </a:lnSpc>
-              <a:buNone/>
-            </a:pPr>
-            <a:r>
-              <a:rPr lang="en-US" sz="1150" b="1" dirty="0">
-                <a:solidFill>
-                  <a:srgbClr val="0B0F19"/>
-                </a:solidFill>
-                <a:latin typeface="Arial" pitchFamily="34" charset="0"/>
-                <a:ea typeface="Arial" pitchFamily="34" charset="-122"/>
-                <a:cs typeface="Arial" pitchFamily="34" charset="-120"/>
-              </a:rPr>
-              <a:t>Le matin. </a:t>
-            </a:r>
-            <a:pPr indent="0" marL="0">
-              <a:lnSpc>
-                <a:spcPct val="115000"/>
-              </a:lnSpc>
-              <a:buNone/>
-            </a:pPr>
-            <a:r>
-              <a:rPr lang="en-US" sz="1150" dirty="0">
-                <a:solidFill>
-                  <a:srgbClr val="3D4556"/>
-                </a:solidFill>
-                <a:latin typeface="Arial" pitchFamily="34" charset="0"/>
-                <a:ea typeface="Arial" pitchFamily="34" charset="-122"/>
-                <a:cs typeface="Arial" pitchFamily="34" charset="-120"/>
-              </a:rPr>
-              <a:t>Stock théorique à télécharger, session à ouvrir, terminaux à connecter et vérifier un par un, briefing sur le matériel.</a:t>
-            </a:r>
-            <a:endParaRPr lang="en-US" sz="1150" dirty="0"/>
-          </a:p>
-        </p:txBody>
-      </p:sp>
-      <p:sp>
-        <p:nvSpPr>
-          <p:cNvPr id="15" name="Text 12"/>
-          <p:cNvSpPr/>
-          <p:nvPr/>
-        </p:nvSpPr>
-        <p:spPr>
-          <a:xfrm>
-            <a:off x="6368796" y="3502152"/>
-            <a:ext cx="5088636" cy="548640"/>
-          </a:xfrm>
-          <a:prstGeom prst="rect">
-            <a:avLst/>
-          </a:prstGeom>
-          <a:noFill/>
-          <a:ln/>
-        </p:spPr>
-        <p:txBody>
-          <a:bodyPr wrap="square" lIns="0" tIns="0" rIns="0" bIns="0" rtlCol="0" anchor="t"/>
-          <a:lstStyle/>
-          <a:p>
-            <a:pPr indent="0" marL="0">
-              <a:lnSpc>
-                <a:spcPct val="115000"/>
-              </a:lnSpc>
-              <a:buNone/>
-            </a:pPr>
-            <a:r>
-              <a:rPr lang="en-US" sz="1150" dirty="0">
-                <a:solidFill>
-                  <a:srgbClr val="0B0F19"/>
-                </a:solidFill>
-                <a:latin typeface="Arial" pitchFamily="34" charset="0"/>
-                <a:ea typeface="Arial" pitchFamily="34" charset="-122"/>
-                <a:cs typeface="Arial" pitchFamily="34" charset="-120"/>
-              </a:rPr>
-              <a:t>Il importe le stock théorique tel quel, colonnes reconnues, et ouvre l'inventaire. Chaque vendeur le rejoint depuis son téléphone.</a:t>
-            </a:r>
-            <a:endParaRPr lang="en-US" sz="1150" dirty="0"/>
-          </a:p>
-        </p:txBody>
-      </p:sp>
-      <p:sp>
-        <p:nvSpPr>
-          <p:cNvPr id="16" name="Shape 13"/>
-          <p:cNvSpPr/>
-          <p:nvPr/>
-        </p:nvSpPr>
-        <p:spPr>
-          <a:xfrm>
-            <a:off x="731520" y="4069080"/>
-            <a:ext cx="10725912" cy="0"/>
-          </a:xfrm>
-          <a:prstGeom prst="line">
-            <a:avLst/>
-          </a:prstGeom>
-          <a:noFill/>
-          <a:ln w="9525">
-            <a:solidFill>
-              <a:srgbClr val="E3E6EE"/>
-            </a:solidFill>
-            <a:prstDash val="solid"/>
-          </a:ln>
-        </p:spPr>
-      </p:sp>
-      <p:sp>
-        <p:nvSpPr>
-          <p:cNvPr id="17" name="Text 14"/>
-          <p:cNvSpPr/>
-          <p:nvPr/>
-        </p:nvSpPr>
-        <p:spPr>
-          <a:xfrm>
-            <a:off x="731520" y="4197096"/>
-            <a:ext cx="5088636" cy="548640"/>
-          </a:xfrm>
-          <a:prstGeom prst="rect">
-            <a:avLst/>
-          </a:prstGeom>
-          <a:noFill/>
-          <a:ln/>
-        </p:spPr>
-        <p:txBody>
-          <a:bodyPr wrap="square" lIns="0" tIns="0" rIns="0" bIns="0" rtlCol="0" anchor="t"/>
-          <a:lstStyle/>
-          <a:p>
-            <a:pPr indent="0" marL="0">
-              <a:lnSpc>
-                <a:spcPct val="115000"/>
-              </a:lnSpc>
-              <a:buNone/>
-            </a:pPr>
-            <a:r>
-              <a:rPr lang="en-US" sz="1150" b="1" dirty="0">
-                <a:solidFill>
-                  <a:srgbClr val="0B0F19"/>
-                </a:solidFill>
-                <a:latin typeface="Arial" pitchFamily="34" charset="0"/>
-                <a:ea typeface="Arial" pitchFamily="34" charset="-122"/>
-                <a:cs typeface="Arial" pitchFamily="34" charset="-120"/>
-              </a:rPr>
-              <a:t>Pendant. </a:t>
-            </a:r>
-            <a:pPr indent="0" marL="0">
-              <a:lnSpc>
-                <a:spcPct val="115000"/>
-              </a:lnSpc>
-              <a:buNone/>
-            </a:pPr>
-            <a:r>
-              <a:rPr lang="en-US" sz="1150" dirty="0">
-                <a:solidFill>
-                  <a:srgbClr val="3D4556"/>
-                </a:solidFill>
-                <a:latin typeface="Arial" pitchFamily="34" charset="0"/>
-                <a:ea typeface="Arial" pitchFamily="34" charset="-122"/>
-                <a:cs typeface="Arial" pitchFamily="34" charset="-120"/>
-              </a:rPr>
-              <a:t>Quelqu'un reste posté sur la plateforme pour guetter les failed audits et faire recompter les zones.</a:t>
-            </a:r>
-            <a:endParaRPr lang="en-US" sz="1150" dirty="0"/>
-          </a:p>
-        </p:txBody>
-      </p:sp>
-      <p:sp>
-        <p:nvSpPr>
-          <p:cNvPr id="18" name="Text 15"/>
-          <p:cNvSpPr/>
-          <p:nvPr/>
-        </p:nvSpPr>
-        <p:spPr>
-          <a:xfrm>
-            <a:off x="6368796" y="4197096"/>
-            <a:ext cx="5088636" cy="548640"/>
-          </a:xfrm>
-          <a:prstGeom prst="rect">
-            <a:avLst/>
-          </a:prstGeom>
-          <a:noFill/>
-          <a:ln/>
-        </p:spPr>
-        <p:txBody>
-          <a:bodyPr wrap="square" lIns="0" tIns="0" rIns="0" bIns="0" rtlCol="0" anchor="t"/>
-          <a:lstStyle/>
-          <a:p>
-            <a:pPr indent="0" marL="0">
-              <a:lnSpc>
-                <a:spcPct val="115000"/>
-              </a:lnSpc>
-              <a:buNone/>
-            </a:pPr>
-            <a:r>
-              <a:rPr lang="en-US" sz="1150" dirty="0">
-                <a:solidFill>
-                  <a:srgbClr val="0B0F19"/>
-                </a:solidFill>
-                <a:latin typeface="Arial" pitchFamily="34" charset="0"/>
-                <a:ea typeface="Arial" pitchFamily="34" charset="-122"/>
-                <a:cs typeface="Arial" pitchFamily="34" charset="-120"/>
-              </a:rPr>
-              <a:t>Le chef d'équipe suit l'avancement, audite selon votre règle et tranche les désaccords au rayon, en direct.</a:t>
-            </a:r>
-            <a:endParaRPr lang="en-US" sz="1150" dirty="0"/>
-          </a:p>
-        </p:txBody>
-      </p:sp>
-      <p:sp>
-        <p:nvSpPr>
-          <p:cNvPr id="19" name="Shape 16"/>
-          <p:cNvSpPr/>
-          <p:nvPr/>
-        </p:nvSpPr>
-        <p:spPr>
-          <a:xfrm>
-            <a:off x="731520" y="4764024"/>
-            <a:ext cx="10725912" cy="0"/>
-          </a:xfrm>
-          <a:prstGeom prst="line">
-            <a:avLst/>
-          </a:prstGeom>
-          <a:noFill/>
-          <a:ln w="9525">
-            <a:solidFill>
-              <a:srgbClr val="E3E6EE"/>
-            </a:solidFill>
-            <a:prstDash val="solid"/>
-          </a:ln>
-        </p:spPr>
-      </p:sp>
-      <p:sp>
-        <p:nvSpPr>
-          <p:cNvPr id="20" name="Text 17"/>
-          <p:cNvSpPr/>
-          <p:nvPr/>
-        </p:nvSpPr>
-        <p:spPr>
-          <a:xfrm>
-            <a:off x="731520" y="4892040"/>
-            <a:ext cx="5088636" cy="548640"/>
-          </a:xfrm>
-          <a:prstGeom prst="rect">
-            <a:avLst/>
-          </a:prstGeom>
-          <a:noFill/>
-          <a:ln/>
-        </p:spPr>
-        <p:txBody>
-          <a:bodyPr wrap="square" lIns="0" tIns="0" rIns="0" bIns="0" rtlCol="0" anchor="t"/>
-          <a:lstStyle/>
-          <a:p>
-            <a:pPr indent="0" marL="0">
-              <a:lnSpc>
-                <a:spcPct val="115000"/>
-              </a:lnSpc>
-              <a:buNone/>
-            </a:pPr>
-            <a:r>
-              <a:rPr lang="en-US" sz="1150" b="1" dirty="0">
-                <a:solidFill>
-                  <a:srgbClr val="0B0F19"/>
-                </a:solidFill>
-                <a:latin typeface="Arial" pitchFamily="34" charset="0"/>
-                <a:ea typeface="Arial" pitchFamily="34" charset="-122"/>
-                <a:cs typeface="Arial" pitchFamily="34" charset="-120"/>
-              </a:rPr>
-              <a:t>Après. </a:t>
-            </a:r>
-            <a:pPr indent="0" marL="0">
-              <a:lnSpc>
-                <a:spcPct val="115000"/>
-              </a:lnSpc>
-              <a:buNone/>
-            </a:pPr>
-            <a:r>
-              <a:rPr lang="en-US" sz="1150" dirty="0">
-                <a:solidFill>
-                  <a:srgbClr val="3D4556"/>
-                </a:solidFill>
-                <a:latin typeface="Arial" pitchFamily="34" charset="0"/>
-                <a:ea typeface="Arial" pitchFamily="34" charset="-122"/>
-                <a:cs typeface="Arial" pitchFamily="34" charset="-120"/>
-              </a:rPr>
-              <a:t>Le SKU Variance à extraire, puis à consolider à la main avec le stock théorique.</a:t>
-            </a:r>
-            <a:endParaRPr lang="en-US" sz="1150" dirty="0"/>
-          </a:p>
-        </p:txBody>
-      </p:sp>
-      <p:sp>
-        <p:nvSpPr>
-          <p:cNvPr id="21" name="Text 18"/>
-          <p:cNvSpPr/>
-          <p:nvPr/>
-        </p:nvSpPr>
-        <p:spPr>
-          <a:xfrm>
-            <a:off x="6368796" y="4892040"/>
-            <a:ext cx="5088636" cy="548640"/>
-          </a:xfrm>
-          <a:prstGeom prst="rect">
-            <a:avLst/>
-          </a:prstGeom>
-          <a:noFill/>
-          <a:ln/>
-        </p:spPr>
-        <p:txBody>
-          <a:bodyPr wrap="square" lIns="0" tIns="0" rIns="0" bIns="0" rtlCol="0" anchor="t"/>
-          <a:lstStyle/>
-          <a:p>
-            <a:pPr indent="0" marL="0">
-              <a:lnSpc>
-                <a:spcPct val="115000"/>
-              </a:lnSpc>
-              <a:buNone/>
-            </a:pPr>
-            <a:r>
-              <a:rPr lang="en-US" sz="1150" dirty="0">
-                <a:solidFill>
-                  <a:srgbClr val="0B0F19"/>
-                </a:solidFill>
-                <a:latin typeface="Arial" pitchFamily="34" charset="0"/>
-                <a:ea typeface="Arial" pitchFamily="34" charset="-122"/>
-                <a:cs typeface="Arial" pitchFamily="34" charset="-120"/>
-              </a:rPr>
-              <a:t>Le rapport arrive déjà croisé avec l'attendu, prêt pour la validation.</a:t>
-            </a:r>
-            <a:endParaRPr lang="en-US" sz="1150" dirty="0"/>
-          </a:p>
-        </p:txBody>
-      </p:sp>
-      <p:sp>
-        <p:nvSpPr>
-          <p:cNvPr id="22" name="Shape 19"/>
-          <p:cNvSpPr/>
-          <p:nvPr/>
-        </p:nvSpPr>
-        <p:spPr>
-          <a:xfrm>
-            <a:off x="731520" y="5458968"/>
-            <a:ext cx="10725912" cy="0"/>
-          </a:xfrm>
-          <a:prstGeom prst="line">
-            <a:avLst/>
-          </a:prstGeom>
-          <a:noFill/>
-          <a:ln w="9525">
-            <a:solidFill>
-              <a:srgbClr val="E3E6EE"/>
-            </a:solidFill>
-            <a:prstDash val="solid"/>
-          </a:ln>
-        </p:spPr>
-      </p:sp>
-      <p:sp>
-        <p:nvSpPr>
-          <p:cNvPr id="23" name="Text 20"/>
-          <p:cNvSpPr/>
-          <p:nvPr/>
-        </p:nvSpPr>
-        <p:spPr>
-          <a:xfrm>
-            <a:off x="731520" y="5586984"/>
-            <a:ext cx="5088636" cy="548640"/>
-          </a:xfrm>
-          <a:prstGeom prst="rect">
-            <a:avLst/>
-          </a:prstGeom>
-          <a:noFill/>
-          <a:ln/>
-        </p:spPr>
-        <p:txBody>
-          <a:bodyPr wrap="square" lIns="0" tIns="0" rIns="0" bIns="0" rtlCol="0" anchor="t"/>
-          <a:lstStyle/>
-          <a:p>
-            <a:pPr indent="0" marL="0">
-              <a:lnSpc>
-                <a:spcPct val="115000"/>
-              </a:lnSpc>
-              <a:buNone/>
-            </a:pPr>
-            <a:r>
-              <a:rPr lang="en-US" sz="1150" b="1" dirty="0">
-                <a:solidFill>
-                  <a:srgbClr val="0B0F19"/>
-                </a:solidFill>
-                <a:latin typeface="Arial" pitchFamily="34" charset="0"/>
-                <a:ea typeface="Arial" pitchFamily="34" charset="-122"/>
-                <a:cs typeface="Arial" pitchFamily="34" charset="-120"/>
-              </a:rPr>
-              <a:t>Au total. </a:t>
-            </a:r>
-            <a:pPr indent="0" marL="0">
-              <a:lnSpc>
-                <a:spcPct val="115000"/>
-              </a:lnSpc>
-              <a:buNone/>
-            </a:pPr>
-            <a:r>
-              <a:rPr lang="en-US" sz="1150" dirty="0">
-                <a:solidFill>
-                  <a:srgbClr val="3D4556"/>
-                </a:solidFill>
-                <a:latin typeface="Arial" pitchFamily="34" charset="0"/>
-                <a:ea typeface="Arial" pitchFamily="34" charset="-122"/>
-                <a:cs typeface="Arial" pitchFamily="34" charset="-120"/>
-              </a:rPr>
-              <a:t>Quatre casquettes pour l'Inventory Control : préparer, surveiller, réconcilier, corriger.</a:t>
-            </a:r>
-            <a:endParaRPr lang="en-US" sz="1150" dirty="0"/>
-          </a:p>
-        </p:txBody>
-      </p:sp>
-      <p:sp>
-        <p:nvSpPr>
-          <p:cNvPr id="24" name="Text 21"/>
-          <p:cNvSpPr/>
-          <p:nvPr/>
-        </p:nvSpPr>
-        <p:spPr>
-          <a:xfrm>
-            <a:off x="6368796" y="5586984"/>
-            <a:ext cx="5088636" cy="548640"/>
-          </a:xfrm>
-          <a:prstGeom prst="rect">
-            <a:avLst/>
-          </a:prstGeom>
-          <a:noFill/>
-          <a:ln/>
-        </p:spPr>
-        <p:txBody>
-          <a:bodyPr wrap="square" lIns="0" tIns="0" rIns="0" bIns="0" rtlCol="0" anchor="t"/>
-          <a:lstStyle/>
-          <a:p>
-            <a:pPr indent="0" marL="0">
-              <a:lnSpc>
-                <a:spcPct val="115000"/>
-              </a:lnSpc>
-              <a:buNone/>
-            </a:pPr>
-            <a:r>
-              <a:rPr lang="en-US" sz="1150" dirty="0">
-                <a:solidFill>
-                  <a:srgbClr val="0B0F19"/>
-                </a:solidFill>
-                <a:latin typeface="Arial" pitchFamily="34" charset="0"/>
-                <a:ea typeface="Arial" pitchFamily="34" charset="-122"/>
-                <a:cs typeface="Arial" pitchFamily="34" charset="-120"/>
-              </a:rPr>
-              <a:t>Une seule vous reste : valider l'écart, ajuster le stock.</a:t>
-            </a:r>
-            <a:endParaRPr lang="en-US" sz="1150" dirty="0"/>
-          </a:p>
-        </p:txBody>
-      </p:sp>
-      <p:sp>
-        <p:nvSpPr>
-          <p:cNvPr id="25" name="Shape 22"/>
-          <p:cNvSpPr/>
-          <p:nvPr/>
-        </p:nvSpPr>
-        <p:spPr>
-          <a:xfrm>
-            <a:off x="731520" y="6153912"/>
-            <a:ext cx="10725912" cy="0"/>
-          </a:xfrm>
-          <a:prstGeom prst="line">
-            <a:avLst/>
-          </a:prstGeom>
-          <a:noFill/>
-          <a:ln w="9525">
-            <a:solidFill>
-              <a:srgbClr val="E3E6EE"/>
-            </a:solidFill>
-            <a:prstDash val="solid"/>
-          </a:ln>
-        </p:spPr>
-      </p:sp>
-      <p:sp>
-        <p:nvSpPr>
-          <p:cNvPr id="26" name="Text 23"/>
+          <p:cNvPr id="11" name="Text 8"/>
           <p:cNvSpPr/>
           <p:nvPr/>
         </p:nvSpPr>
@@ -5263,7 +4802,7 @@
       </p:sp>
       <p:sp>
         <p:nvSpPr>
-          <p:cNvPr id="27" name="Text 24"/>
+          <p:cNvPr id="12" name="Text 9"/>
           <p:cNvSpPr/>
           <p:nvPr/>
         </p:nvSpPr>
@@ -5428,7 +4967,7 @@
                 <a:ea typeface="Arial" pitchFamily="34" charset="-122"/>
                 <a:cs typeface="Arial" pitchFamily="34" charset="-120"/>
               </a:rPr>
-              <a:t>Qui fait quoi</a:t>
+              <a:t>Avec Quantinvo</a:t>
             </a:r>
             <a:endParaRPr lang="en-US" sz="1000" dirty="0"/>
           </a:p>
@@ -5487,7 +5026,7 @@
               <a:buNone/>
             </a:pPr>
             <a:r>
-              <a:rPr lang="en-US" sz="2400" b="1" dirty="0">
+              <a:rPr lang="en-US" sz="2500" b="1" dirty="0">
                 <a:solidFill>
                   <a:srgbClr val="4636B0"/>
                 </a:solidFill>
@@ -5495,9 +5034,9 @@
                 <a:ea typeface="Arial" pitchFamily="34" charset="-122"/>
                 <a:cs typeface="Arial" pitchFamily="34" charset="-120"/>
               </a:rPr>
-              <a:t>L'inventaire appartient au floor. Voici leurs écrans.</a:t>
-            </a:r>
-            <a:endParaRPr lang="en-US" sz="2400" dirty="0"/>
+              <a:t>Le chef d’équipe conduit. Ses vendeurs comptent.</a:t>
+            </a:r>
+            <a:endParaRPr lang="en-US" sz="2500" dirty="0"/>
           </a:p>
         </p:txBody>
       </p:sp>
@@ -5509,7 +5048,7 @@
         </p:nvSpPr>
         <p:spPr>
           <a:xfrm>
-            <a:off x="731520" y="1737360"/>
+            <a:off x="731520" y="1783080"/>
             <a:ext cx="10725912" cy="365760"/>
           </a:xfrm>
           <a:prstGeom prst="rect">
@@ -5537,7 +5076,7 @@
                 <a:ea typeface="Arial" pitchFamily="34" charset="-122"/>
                 <a:cs typeface="Arial" pitchFamily="34" charset="-120"/>
               </a:rPr>
-              <a:t>Une application sur l'iPhone des compteurs, un tableau de bord pour celui qui pilote, un rapport à la fin. Rien d'autre à installer, rien à acheter.</a:t>
+              <a:t>Une application sur les iPhone que vos équipes ont déjà, un tableau de bord pour celui qui pilote, un rapport à la fin. Rien à charger la veille, rien à briefer, aucune flotte à préparer.</a:t>
             </a:r>
             <a:endParaRPr lang="en-US" sz="1200" dirty="0"/>
           </a:p>
@@ -5551,7 +5090,7 @@
         </p:nvSpPr>
         <p:spPr>
           <a:xfrm>
-            <a:off x="731520" y="2240280"/>
+            <a:off x="731520" y="2286000"/>
             <a:ext cx="3392424" cy="365760"/>
           </a:xfrm>
           <a:prstGeom prst="rect">
@@ -5579,7 +5118,7 @@
                 <a:ea typeface="Arial" pitchFamily="34" charset="-122"/>
                 <a:cs typeface="Arial" pitchFamily="34" charset="-120"/>
               </a:rPr>
-              <a:t>Le chef d'équipe prépare</a:t>
+              <a:t>Il imprime ses balises</a:t>
             </a:r>
             <a:endParaRPr lang="en-US" sz="1350" dirty="0"/>
           </a:p>
@@ -5593,7 +5132,7 @@
         </p:nvSpPr>
         <p:spPr>
           <a:xfrm>
-            <a:off x="731520" y="2624328"/>
+            <a:off x="731520" y="2670048"/>
             <a:ext cx="3392424" cy="585216"/>
           </a:xfrm>
           <a:prstGeom prst="rect">
@@ -5621,7 +5160,7 @@
                 <a:ea typeface="Arial" pitchFamily="34" charset="-122"/>
                 <a:cs typeface="Arial" pitchFamily="34" charset="-120"/>
               </a:rPr>
-              <a:t>Il choisit la numérotation et imprime sa planche d'étiquettes.</a:t>
+              <a:t>Une planche d'étiquettes numérotées, en PDF. Personne d'autre à mobiliser la veille.</a:t>
             </a:r>
             <a:endParaRPr lang="en-US" sz="1100" dirty="0"/>
           </a:p>
@@ -5635,12 +5174,12 @@
         </p:nvSpPr>
         <p:spPr>
           <a:xfrm>
-            <a:off x="731520" y="3246120"/>
-            <a:ext cx="3392424" cy="2953512"/>
+            <a:off x="731520" y="3291840"/>
+            <a:ext cx="3392424" cy="2907792"/>
           </a:xfrm>
           <a:prstGeom prst="roundRect">
             <a:avLst>
-              <a:gd name="adj" fmla="val 4334"/>
+              <a:gd name="adj" fmla="val 4403"/>
             </a:avLst>
           </a:prstGeom>
           <a:solidFill>
@@ -5670,8 +5209,8 @@
         </p:blipFill>
         <p:spPr>
           <a:xfrm>
-            <a:off x="1042416" y="3246321"/>
-            <a:ext cx="2770632" cy="2953311"/>
+            <a:off x="1042416" y="3289816"/>
+            <a:ext cx="2770632" cy="2909816"/>
           </a:xfrm>
           <a:prstGeom prst="rect">
             <a:avLst/>
@@ -5686,7 +5225,7 @@
         </p:nvSpPr>
         <p:spPr>
           <a:xfrm>
-            <a:off x="4398264" y="2240280"/>
+            <a:off x="4398264" y="2286000"/>
             <a:ext cx="3392424" cy="365760"/>
           </a:xfrm>
           <a:prstGeom prst="rect">
@@ -5714,7 +5253,7 @@
                 <a:ea typeface="Arial" pitchFamily="34" charset="-122"/>
                 <a:cs typeface="Arial" pitchFamily="34" charset="-120"/>
               </a:rPr>
-              <a:t>Les vendeurs comptent</a:t>
+              <a:t>Ils comptent au rayon</a:t>
             </a:r>
             <a:endParaRPr lang="en-US" sz="1350" dirty="0"/>
           </a:p>
@@ -5728,7 +5267,7 @@
         </p:nvSpPr>
         <p:spPr>
           <a:xfrm>
-            <a:off x="4398264" y="2624328"/>
+            <a:off x="4398264" y="2670048"/>
             <a:ext cx="3392424" cy="585216"/>
           </a:xfrm>
           <a:prstGeom prst="rect">
@@ -5756,7 +5295,7 @@
                 <a:ea typeface="Arial" pitchFamily="34" charset="-122"/>
                 <a:cs typeface="Arial" pitchFamily="34" charset="-120"/>
               </a:rPr>
-              <a:t>Ils scannent la balise du rayon, puis les articles. Le geste qu'ils connaissent.</a:t>
+              <a:t>Scanner l'étiquette, puis les articles. Le geste ne demande pas de briefing.</a:t>
             </a:r>
             <a:endParaRPr lang="en-US" sz="1100" dirty="0"/>
           </a:p>
@@ -5770,12 +5309,12 @@
         </p:nvSpPr>
         <p:spPr>
           <a:xfrm>
-            <a:off x="4398264" y="3246120"/>
-            <a:ext cx="3392424" cy="2953512"/>
+            <a:off x="4398264" y="3291840"/>
+            <a:ext cx="3392424" cy="2907792"/>
           </a:xfrm>
           <a:prstGeom prst="roundRect">
             <a:avLst>
-              <a:gd name="adj" fmla="val 4334"/>
+              <a:gd name="adj" fmla="val 4403"/>
             </a:avLst>
           </a:prstGeom>
           <a:solidFill>
@@ -5805,8 +5344,8 @@
         </p:blipFill>
         <p:spPr>
           <a:xfrm>
-            <a:off x="4709160" y="3246321"/>
-            <a:ext cx="2770632" cy="2953311"/>
+            <a:off x="4709160" y="3289816"/>
+            <a:ext cx="2770632" cy="2909816"/>
           </a:xfrm>
           <a:prstGeom prst="rect">
             <a:avLst/>
@@ -5821,7 +5360,7 @@
         </p:nvSpPr>
         <p:spPr>
           <a:xfrm>
-            <a:off x="8065008" y="2240280"/>
+            <a:off x="8065008" y="2286000"/>
             <a:ext cx="3392424" cy="365760"/>
           </a:xfrm>
           <a:prstGeom prst="rect">
@@ -5849,7 +5388,7 @@
                 <a:ea typeface="Arial" pitchFamily="34" charset="-122"/>
                 <a:cs typeface="Arial" pitchFamily="34" charset="-120"/>
               </a:rPr>
-              <a:t>Le chef d'équipe repasse</a:t>
+              <a:t>Il audite selon votre règle</a:t>
             </a:r>
             <a:endParaRPr lang="en-US" sz="1350" dirty="0"/>
           </a:p>
@@ -5863,7 +5402,7 @@
         </p:nvSpPr>
         <p:spPr>
           <a:xfrm>
-            <a:off x="8065008" y="2624328"/>
+            <a:off x="8065008" y="2670048"/>
             <a:ext cx="3392424" cy="585216"/>
           </a:xfrm>
           <a:prstGeom prst="rect">
@@ -5891,7 +5430,7 @@
                 <a:ea typeface="Arial" pitchFamily="34" charset="-122"/>
                 <a:cs typeface="Arial" pitchFamily="34" charset="-120"/>
               </a:rPr>
-              <a:t>Il audite la zone selon votre règle, pendant que le comptage continue ailleurs.</a:t>
+              <a:t>La deuxième passe se lance du même téléphone, pendant que le comptage continue.</a:t>
             </a:r>
             <a:endParaRPr lang="en-US" sz="1100" dirty="0"/>
           </a:p>
@@ -5905,12 +5444,12 @@
         </p:nvSpPr>
         <p:spPr>
           <a:xfrm>
-            <a:off x="8065008" y="3246120"/>
-            <a:ext cx="3392424" cy="2953512"/>
+            <a:off x="8065008" y="3291840"/>
+            <a:ext cx="3392424" cy="2907792"/>
           </a:xfrm>
           <a:prstGeom prst="roundRect">
             <a:avLst>
-              <a:gd name="adj" fmla="val 4334"/>
+              <a:gd name="adj" fmla="val 4403"/>
             </a:avLst>
           </a:prstGeom>
           <a:solidFill>
@@ -5940,8 +5479,8 @@
         </p:blipFill>
         <p:spPr>
           <a:xfrm>
-            <a:off x="8375904" y="3246321"/>
-            <a:ext cx="2770632" cy="2953311"/>
+            <a:off x="8375904" y="3289816"/>
+            <a:ext cx="2770632" cy="2909816"/>
           </a:xfrm>
           <a:prstGeom prst="rect">
             <a:avLst/>
@@ -6263,7 +5802,7 @@
                 <a:ea typeface="Arial" pitchFamily="34" charset="-122"/>
                 <a:cs typeface="Arial" pitchFamily="34" charset="-120"/>
               </a:rPr>
-              <a:t>100 % de la W&amp;J, 30 % au moins ailleurs : la règle reste la vôtre. Un failed audit ne s'attend plus dans un rapport — les deux comptages s'affichent côte à côte, l'écart en pièces et en valeur d'achat, et il se tranche pendant que le compteur est encore au rayon. L'Inventory Control ouvre la même vue sur n'importe quel inventaire en cours, sans en conduire aucun.</a:t>
+              <a:t>La règle d'audit reste la vôtre — 100 % sur l'horlogerie et la joaillerie, 30 % au moins ailleurs. Le désaccord entre les deux comptages ne s'attend plus dans un fichier : ils s'affichent côte à côte, l'écart en pièces et en valeur d'achat, et il se tranche pendant que le compteur est encore devant l'article. L'Inventory Control ouvre la même vue sur n'importe quel inventaire en cours, sans avoir à s'y tenir.</a:t>
             </a:r>
             <a:endParaRPr lang="en-US" sz="1250" dirty="0"/>
           </a:p>
@@ -6773,7 +6312,7 @@
         <p:spPr>
           <a:xfrm>
             <a:off x="731520" y="1325880"/>
-            <a:ext cx="4206240" cy="1371600"/>
+            <a:ext cx="4206240" cy="1097280"/>
           </a:xfrm>
           <a:prstGeom prst="rect">
             <a:avLst/>
@@ -6792,7 +6331,7 @@
               <a:buNone/>
             </a:pPr>
             <a:r>
-              <a:rPr lang="en-US" sz="2400" b="1" dirty="0">
+              <a:rPr lang="en-US" sz="2600" b="1" dirty="0">
                 <a:solidFill>
                   <a:srgbClr val="4636B0"/>
                 </a:solidFill>
@@ -6800,9 +6339,9 @@
                 <a:ea typeface="Arial" pitchFamily="34" charset="-122"/>
                 <a:cs typeface="Arial" pitchFamily="34" charset="-120"/>
               </a:rPr>
-              <a:t>Ce qui vous revient : un rapport déjà consolidé.</a:t>
-            </a:r>
-            <a:endParaRPr lang="en-US" sz="2400" dirty="0"/>
+              <a:t>Le rapport arrive déjà croisé.</a:t>
+            </a:r>
+            <a:endParaRPr lang="en-US" sz="2600" dirty="0"/>
           </a:p>
         </p:txBody>
       </p:sp>
@@ -6814,8 +6353,8 @@
         </p:nvSpPr>
         <p:spPr>
           <a:xfrm>
-            <a:off x="731520" y="2880360"/>
-            <a:ext cx="4206240" cy="1463040"/>
+            <a:off x="731520" y="2606040"/>
+            <a:ext cx="4206240" cy="1371600"/>
           </a:xfrm>
           <a:prstGeom prst="rect">
             <a:avLst/>
@@ -6842,7 +6381,7 @@
                 <a:ea typeface="Arial" pitchFamily="34" charset="-122"/>
                 <a:cs typeface="Arial" pitchFamily="34" charset="-120"/>
               </a:rPr>
-              <a:t>Le rapport part du stock théorique, pas seulement de ce qui a été scanné. Un article attendu et jamais trouvé y figure, avec son manque : la démarque que l'inventaire est censé révéler est déjà dans le fichier.</a:t>
+              <a:t>Il part du stock théorique, pas seulement de ce qui a été scanné : un article attendu et jamais trouvé y figure, avec son manque. Le recoupement n'est plus à faire.</a:t>
             </a:r>
             <a:endParaRPr lang="en-US" sz="1250" dirty="0"/>
           </a:p>
@@ -6856,7 +6395,7 @@
         </p:nvSpPr>
         <p:spPr>
           <a:xfrm>
-            <a:off x="731520" y="4297680"/>
+            <a:off x="731520" y="3977640"/>
             <a:ext cx="4206240" cy="1097280"/>
           </a:xfrm>
           <a:prstGeom prst="rect">
@@ -6884,7 +6423,7 @@
                 <a:ea typeface="Arial" pitchFamily="34" charset="-122"/>
                 <a:cs typeface="Arial" pitchFamily="34" charset="-120"/>
               </a:rPr>
-              <a:t>Export Excel en un clic. Il ne reste que la validation — Inventory Control, PSM ou AGM selon la valeur de l'écart — et l'ajustement du stock.</a:t>
+              <a:t>Export Excel en un clic. Restent la validation, selon la valeur de l'écart, et l'ajustement du stock.</a:t>
             </a:r>
             <a:endParaRPr lang="en-US" sz="1250" dirty="0"/>
           </a:p>
@@ -7543,7 +7082,7 @@
                 <a:ea typeface="Arial" pitchFamily="34" charset="-122"/>
                 <a:cs typeface="Arial" pitchFamily="34" charset="-120"/>
               </a:rPr>
-              <a:t>Rien à sortir, rien à monter : c'est ce qui rend l'aléatoire réellement aléatoire, et non un rendez-vous annoncé par la préparation qu'il demande.</a:t>
+              <a:t>Rien à sortir, rien à monter la veille : c'est ce qui permet à un inventaire ciblé de rester discret, au lieu d'être annoncé par sa préparation.</a:t>
             </a:r>
             <a:endParaRPr lang="en-US" sz="1300" dirty="0"/>
           </a:p>

--- a/docs/entreprise/deck/Quantinvo-Samaritaine.pptx
+++ b/docs/entreprise/deck/Quantinvo-Samaritaine.pptx
@@ -16,9 +16,10 @@
     <p:sldId id="264" r:id="rId10"/>
     <p:sldId id="265" r:id="rId11"/>
     <p:sldId id="266" r:id="rId12"/>
+    <p:sldId id="267" r:id="rId13"/>
   </p:sldIdLst>
   <p:notesMasterIdLst>
-    <p:notesMasterId r:id="rId13"/>
+    <p:notesMasterId r:id="rId14"/>
   </p:notesMasterIdLst>
   <p:sldSz cx="12192000" cy="6858000"/>
   <p:notesSz cx="6858000" cy="12192000"/>
@@ -512,7 +513,7 @@
           <a:p>
             <a:r>
               <a:rPr lang="en-US" dirty="0"/>
-              <a:t>Poser le téléphone sur la table en même temps que la page s'affiche. Ne rien vendre encore : on montre l'objet, on dit d'où il vient, et on enchaîne.</a:t>
+              <a:t>Laisser la page respirer deux secondes, sans commenter. On montre l'objet ; le titre et l'objet de la proposition arrivent à la page suivante.</a:t>
             </a:r>
             <a:endParaRPr lang="en-US" dirty="0"/>
           </a:p>
@@ -600,7 +601,7 @@
           <a:p>
             <a:r>
               <a:rPr lang="en-US" dirty="0"/>
-              <a:t>Le palier se choisit sur le nombre de personnes qui comptent EN MÊME TEMPS, pas sur l'effectif : un floor de cent vendeurs dont vingt comptent le mardi matin relève d'Advanced. Le dépassement ne bloque jamais un comptage, il se règle au renouvellement. Au-delà de cent appareils sur un même magasin, ou pour plusieurs magasins, on établit un devis.</a:t>
+              <a:t>L'argument décisif est le premier : un outil expert suppose un service expert pour le servir, ce qui est incompatible avec le transfert au floor. Ne jamais citer de prix Zebra, même en réponse à une question. Et lire l'encadré : c'est lui qui rend le reste crédible. Un dossier technique séparé existe pour la DSI — le proposer ici, il porte les limites du produit.</a:t>
             </a:r>
             <a:endParaRPr lang="en-US" dirty="0"/>
           </a:p>
@@ -688,7 +689,7 @@
           <a:p>
             <a:r>
               <a:rPr lang="en-US" dirty="0"/>
-              <a:t>Clore sur l'essai qui prouve l'idée : ce n'est pas nous qui faisons la démonstration, c'est un chef d'équipe et ses vendeurs. Si eux y arrivent un mardi matin, le transfert est démontré.</a:t>
+              <a:t>Le palier se choisit sur le nombre de personnes qui comptent EN MÊME TEMPS, pas sur l'effectif : un floor de cent vendeurs dont vingt comptent le mardi matin relève d'Advanced. Le dépassement ne bloque jamais un comptage, il se règle au renouvellement. Au-delà de cent appareils sur un même magasin, ou pour plusieurs magasins, on établit un devis.</a:t>
             </a:r>
             <a:endParaRPr lang="en-US" dirty="0"/>
           </a:p>
@@ -712,6 +713,94 @@
             <a:fld id="{F7021451-1387-4CA6-816F-3879F97B5CBC}" type="slidenum">
               <a:rPr lang="en-US"/>
               <a:t>11</a:t>
+            </a:fld>
+            <a:endParaRPr lang="en-US"/>
+          </a:p>
+        </p:txBody>
+      </p:sp>
+    </p:spTree>
+    <p:extLst>
+      <p:ext uri="{BB962C8B-B14F-4D97-AF65-F5344CB8AC3E}">
+        <p14:creationId xmlns:p14="http://schemas.microsoft.com/office/powerpoint/2010/main" val="1024086991"/>
+      </p:ext>
+    </p:extLst>
+  </p:cSld>
+  <p:clrMapOvr>
+    <a:masterClrMapping/>
+  </p:clrMapOvr>
+</p:notes>
+</file>
+
+<file path=ppt/notesSlides/notesSlide12.xml><?xml version="1.0" encoding="utf-8"?>
+<p:notes xmlns:a="http://schemas.openxmlformats.org/drawingml/2006/main" xmlns:r="http://schemas.openxmlformats.org/officeDocument/2006/relationships" xmlns:p="http://schemas.openxmlformats.org/presentationml/2006/main">
+  <p:cSld>
+    <p:spTree>
+      <p:nvGrpSpPr>
+        <p:cNvPr id="1" name=""/>
+        <p:cNvGrpSpPr/>
+        <p:nvPr/>
+      </p:nvGrpSpPr>
+      <p:grpSpPr>
+        <a:xfrm>
+          <a:off x="0" y="0"/>
+          <a:ext cx="0" cy="0"/>
+          <a:chOff x="0" y="0"/>
+          <a:chExt cx="0" cy="0"/>
+        </a:xfrm>
+      </p:grpSpPr>
+      <p:sp>
+        <p:nvSpPr>
+          <p:cNvPr id="2" name="Slide Image Placeholder 1"/>
+          <p:cNvSpPr>
+            <a:spLocks noGrp="1" noRot="1" noChangeAspect="1"/>
+          </p:cNvSpPr>
+          <p:nvPr>
+            <p:ph type="sldImg"/>
+          </p:nvPr>
+        </p:nvSpPr>
+        <p:spPr/>
+      </p:sp>
+      <p:sp>
+        <p:nvSpPr>
+          <p:cNvPr id="3" name="Notes Placeholder 2"/>
+          <p:cNvSpPr>
+            <a:spLocks noGrp="1"/>
+          </p:cNvSpPr>
+          <p:nvPr>
+            <p:ph type="body" idx="1"/>
+          </p:nvPr>
+        </p:nvSpPr>
+        <p:spPr/>
+        <p:txBody>
+          <a:bodyPr/>
+          <a:lstStyle/>
+          <a:p>
+            <a:r>
+              <a:rPr lang="en-US" dirty="0"/>
+              <a:t>Clore sur l'essai qui prouve l'idée : ce n'est pas nous qui faisons la démonstration, c'est un chef d'équipe et ses vendeurs. Si eux y arrivent un mardi matin, le transfert est démontré.</a:t>
+            </a:r>
+            <a:endParaRPr lang="en-US" dirty="0"/>
+          </a:p>
+        </p:txBody>
+      </p:sp>
+      <p:sp>
+        <p:nvSpPr>
+          <p:cNvPr id="4" name="Slide Number Placeholder 3"/>
+          <p:cNvSpPr>
+            <a:spLocks noGrp="1"/>
+          </p:cNvSpPr>
+          <p:nvPr>
+            <p:ph type="sldNum" sz="quarter" idx="10"/>
+          </p:nvPr>
+        </p:nvSpPr>
+        <p:spPr/>
+        <p:txBody>
+          <a:bodyPr/>
+          <a:lstStyle/>
+          <a:p>
+            <a:fld id="{F7021451-1387-4CA6-816F-3879F97B5CBC}" type="slidenum">
+              <a:rPr lang="en-US"/>
+              <a:t>12</a:t>
             </a:fld>
             <a:endParaRPr lang="en-US"/>
           </a:p>
@@ -1040,7 +1129,7 @@
           <a:p>
             <a:r>
               <a:rPr lang="en-US" dirty="0"/>
-              <a:t>Les trois cartes répondent aux irritants dans leur ordre d'apparition : le balisage, le briefing, puis la conduite. La flotte est réglée par la phrase du haut. Les écrans sont de vraies captures. Et l'Inventory Control ? Il n'a pas d'écran sur cette page — c'est le message ; le sien arrive deux pages plus loin.</a:t>
+              <a:t>La respiration du deck. Une phrase, un silence, on tourne. Ne rien ajouter à l'oral : si on se met à énumérer ce qui vient, la page suivante n'a plus rien à apprendre. La seconde ligne suffit à dire que les réponses arrivent dans l'ordre des contraintes.</a:t>
             </a:r>
             <a:endParaRPr lang="en-US" dirty="0"/>
           </a:p>
@@ -1128,7 +1217,7 @@
           <a:p>
             <a:r>
               <a:rPr lang="en-US" dirty="0"/>
-              <a:t>La réponse au premier irritant : le poste de surveillance n'est pas supprimé, il est distribué. Chaque chef d'équipe voit son rayon ; vous voyez tout sans avoir à rester dessus. Le recomptage ne disparaît pas — il se décide à chaud. Le suivi est agrégé, personne n'est suivi nominativement en direct : cela parle aux RH et au CSE d'une maison de cette taille.</a:t>
+              <a:t>Les trois cartes répondent aux irritants dans leur ordre d'apparition : le balisage, le briefing, puis la conduite. La flotte est réglée par la phrase du haut. Les écrans sont de vraies captures. Et l'Inventory Control ? Il n'a pas d'écran sur cette page — c'est le message ; le sien arrive deux pages plus loin.</a:t>
             </a:r>
             <a:endParaRPr lang="en-US" dirty="0"/>
           </a:p>
@@ -1216,7 +1305,7 @@
           <a:p>
             <a:r>
               <a:rPr lang="en-US" dirty="0"/>
-              <a:t>La page de l'Inventory Control : son travail commence ici. Ne pas survendre — le recoupement n'était pas le plus dur de la journée, c'est simplement une chose de moins à faire, et le circuit de validation ne change pas.</a:t>
+              <a:t>La réponse au premier irritant : le poste de surveillance n'est pas supprimé, il est distribué. Chaque chef d'équipe voit son rayon ; vous voyez tout sans avoir à rester dessus. Le recomptage ne disparaît pas — il se décide à chaud. Le suivi est agrégé, personne n'est suivi nominativement en direct : cela parle aux RH et au CSE d'une maison de cette taille.</a:t>
             </a:r>
             <a:endParaRPr lang="en-US" dirty="0"/>
           </a:p>
@@ -1304,7 +1393,7 @@
           <a:p>
             <a:r>
               <a:rPr lang="en-US" dirty="0"/>
-              <a:t>Leur document dit « en cours d'élaboration » : la page montre que l'outil le rend possible sans rien construire. La répartition est la même que pour le tournant — vous choisissez quoi et quand, le floor compte, vous contrôlez l'écart.</a:t>
+              <a:t>La page de l'Inventory Control : son travail commence ici. Ne pas survendre — le recoupement n'était pas le plus dur de la journée, c'est simplement une chose de moins à faire, et le circuit de validation ne change pas.</a:t>
             </a:r>
             <a:endParaRPr lang="en-US" dirty="0"/>
           </a:p>
@@ -1392,7 +1481,7 @@
           <a:p>
             <a:r>
               <a:rPr lang="en-US" dirty="0"/>
-              <a:t>Deux pages en une : la comparaison et les limites. Ne pas la sauter — un prospect qui découvre une limite après coup perd confiance, un prospect averti la comprend. L'argument décisif de la colonne de gauche : un outil expert suppose un service expert pour le servir, ce qui est incompatible avec le transfert au floor. Un dossier technique séparé existe pour la DSI : le proposer ici.</a:t>
+              <a:t>Leur document dit « en cours d'élaboration » : la page montre que l'outil le rend possible sans rien construire. La répartition est la même que pour le tournant — vous choisissez quoi et quand, le floor compte, vous contrôlez l'écart.</a:t>
             </a:r>
             <a:endParaRPr lang="en-US" dirty="0"/>
           </a:p>
@@ -1773,12 +1862,12 @@
         </p:nvSpPr>
         <p:spPr>
           <a:xfrm>
-            <a:off x="9248799" y="1097280"/>
-            <a:ext cx="2208633" cy="4663440"/>
+            <a:off x="9075573" y="914400"/>
+            <a:ext cx="2381859" cy="5029200"/>
           </a:xfrm>
           <a:prstGeom prst="roundRect">
             <a:avLst>
-              <a:gd name="adj" fmla="val 12420"/>
+              <a:gd name="adj" fmla="val 11517"/>
             </a:avLst>
           </a:prstGeom>
           <a:solidFill>
@@ -1815,8 +1904,8 @@
         </p:blipFill>
         <p:spPr>
           <a:xfrm>
-            <a:off x="9248799" y="1097280"/>
-            <a:ext cx="2208633" cy="4663440"/>
+            <a:off x="9075573" y="914400"/>
+            <a:ext cx="2381859" cy="5029200"/>
           </a:xfrm>
           <a:prstGeom prst="rect">
             <a:avLst/>
@@ -1839,7 +1928,7 @@
         </p:blipFill>
         <p:spPr>
           <a:xfrm>
-            <a:off x="731520" y="1417320"/>
+            <a:off x="731520" y="3017520"/>
             <a:ext cx="566928" cy="566928"/>
           </a:xfrm>
           <a:prstGeom prst="rect">
@@ -1855,7 +1944,7 @@
         </p:nvSpPr>
         <p:spPr>
           <a:xfrm>
-            <a:off x="1444752" y="1389888"/>
+            <a:off x="1444752" y="2990088"/>
             <a:ext cx="4572000" cy="621792"/>
           </a:xfrm>
           <a:prstGeom prst="rect">
@@ -1894,7 +1983,7 @@
         </p:nvSpPr>
         <p:spPr>
           <a:xfrm>
-            <a:off x="731520" y="2212848"/>
+            <a:off x="731520" y="3813048"/>
             <a:ext cx="2377440" cy="25603"/>
           </a:xfrm>
           <a:prstGeom prst="rect">
@@ -1910,132 +1999,6 @@
             <a:prstDash val="solid"/>
           </a:ln>
         </p:spPr>
-      </p:sp>
-      <p:sp>
-        <p:nvSpPr>
-          <p:cNvPr id="7" name="Text 3"/>
-          <p:cNvSpPr/>
-          <p:nvPr/>
-        </p:nvSpPr>
-        <p:spPr>
-          <a:xfrm>
-            <a:off x="731520" y="2788920"/>
-            <a:ext cx="6400800" cy="1828800"/>
-          </a:xfrm>
-          <a:prstGeom prst="rect">
-            <a:avLst/>
-          </a:prstGeom>
-          <a:noFill/>
-          <a:ln/>
-        </p:spPr>
-        <p:txBody>
-          <a:bodyPr wrap="square" lIns="0" tIns="0" rIns="0" bIns="0" rtlCol="0" anchor="t"/>
-          <a:lstStyle/>
-          <a:p>
-            <a:pPr indent="0" marL="0">
-              <a:lnSpc>
-                <a:spcPct val="115000"/>
-              </a:lnSpc>
-              <a:buNone/>
-            </a:pPr>
-            <a:r>
-              <a:rPr lang="en-US" sz="2500" i="1" dirty="0">
-                <a:solidFill>
-                  <a:srgbClr val="4636B0"/>
-                </a:solidFill>
-                <a:latin typeface="Arial" pitchFamily="34" charset="0"/>
-                <a:ea typeface="Arial" pitchFamily="34" charset="-122"/>
-                <a:cs typeface="Arial" pitchFamily="34" charset="-120"/>
-              </a:rPr>
-              <a:t>« J'ai dessiné Quantinvo pendant des inventaires, pas dans une salle de réunion. »</a:t>
-            </a:r>
-            <a:endParaRPr lang="en-US" sz="2500" dirty="0"/>
-          </a:p>
-        </p:txBody>
-      </p:sp>
-      <p:sp>
-        <p:nvSpPr>
-          <p:cNvPr id="8" name="Text 4"/>
-          <p:cNvSpPr/>
-          <p:nvPr/>
-        </p:nvSpPr>
-        <p:spPr>
-          <a:xfrm>
-            <a:off x="731520" y="4206240"/>
-            <a:ext cx="6400800" cy="365760"/>
-          </a:xfrm>
-          <a:prstGeom prst="rect">
-            <a:avLst/>
-          </a:prstGeom>
-          <a:noFill/>
-          <a:ln/>
-        </p:spPr>
-        <p:txBody>
-          <a:bodyPr wrap="square" lIns="0" tIns="0" rIns="0" bIns="0" rtlCol="0" anchor="t"/>
-          <a:lstStyle/>
-          <a:p>
-            <a:pPr algn="l" indent="0" marL="0">
-              <a:lnSpc>
-                <a:spcPct val="118000"/>
-              </a:lnSpc>
-              <a:buNone/>
-            </a:pPr>
-            <a:r>
-              <a:rPr lang="en-US" sz="1250" dirty="0">
-                <a:solidFill>
-                  <a:srgbClr val="5B6475"/>
-                </a:solidFill>
-                <a:latin typeface="Arial" pitchFamily="34" charset="0"/>
-                <a:ea typeface="Arial" pitchFamily="34" charset="-122"/>
-                <a:cs typeface="Arial" pitchFamily="34" charset="-120"/>
-              </a:rPr>
-              <a:t>Julien Thiong-kay, Devkaylab</a:t>
-            </a:r>
-            <a:endParaRPr lang="en-US" sz="1250" dirty="0"/>
-          </a:p>
-        </p:txBody>
-      </p:sp>
-      <p:sp>
-        <p:nvSpPr>
-          <p:cNvPr id="9" name="Text 5"/>
-          <p:cNvSpPr/>
-          <p:nvPr/>
-        </p:nvSpPr>
-        <p:spPr>
-          <a:xfrm>
-            <a:off x="731520" y="5532120"/>
-            <a:ext cx="6400800" cy="320040"/>
-          </a:xfrm>
-          <a:prstGeom prst="rect">
-            <a:avLst/>
-          </a:prstGeom>
-          <a:noFill/>
-          <a:ln/>
-        </p:spPr>
-        <p:txBody>
-          <a:bodyPr wrap="square" lIns="0" tIns="0" rIns="0" bIns="0" rtlCol="0" anchor="t"/>
-          <a:lstStyle/>
-          <a:p>
-            <a:pPr algn="l" indent="0" marL="0">
-              <a:lnSpc>
-                <a:spcPct val="118000"/>
-              </a:lnSpc>
-              <a:buNone/>
-            </a:pPr>
-            <a:r>
-              <a:rPr lang="en-US" sz="1050" dirty="0">
-                <a:solidFill>
-                  <a:srgbClr val="5B6475"/>
-                </a:solidFill>
-                <a:latin typeface="Arial" pitchFamily="34" charset="0"/>
-                <a:ea typeface="Arial" pitchFamily="34" charset="-122"/>
-                <a:cs typeface="Arial" pitchFamily="34" charset="-120"/>
-              </a:rPr>
-              <a:t>L'outil d'inventaire pour le commerce.</a:t>
-            </a:r>
-            <a:endParaRPr lang="en-US" sz="1050" dirty="0"/>
-          </a:p>
-        </p:txBody>
       </p:sp>
     </p:spTree>
   </p:cSld>
@@ -2165,7 +2128,7 @@
                 <a:ea typeface="Arial" pitchFamily="34" charset="-122"/>
                 <a:cs typeface="Arial" pitchFamily="34" charset="-120"/>
               </a:rPr>
-              <a:t>L'offre</a:t>
+              <a:t>Pourquoi nous</a:t>
             </a:r>
             <a:endParaRPr lang="en-US" sz="1000" dirty="0"/>
           </a:p>
@@ -2204,7 +2167,7 @@
         </p:nvSpPr>
         <p:spPr>
           <a:xfrm>
-            <a:off x="731520" y="1188720"/>
+            <a:off x="731520" y="1143000"/>
             <a:ext cx="10725912" cy="822960"/>
           </a:xfrm>
           <a:prstGeom prst="rect">
@@ -2232,7 +2195,7 @@
                 <a:ea typeface="Arial" pitchFamily="34" charset="-122"/>
                 <a:cs typeface="Arial" pitchFamily="34" charset="-120"/>
               </a:rPr>
-              <a:t>Une licence par magasin, inventaires illimités</a:t>
+              <a:t>Pourquoi Quantinvo, et pas SmartCount ?</a:t>
             </a:r>
             <a:endParaRPr lang="en-US" sz="2600" dirty="0"/>
           </a:p>
@@ -2246,806 +2209,8 @@
         </p:nvSpPr>
         <p:spPr>
           <a:xfrm>
-            <a:off x="731520" y="1783080"/>
-            <a:ext cx="10725912" cy="457200"/>
-          </a:xfrm>
-          <a:prstGeom prst="rect">
-            <a:avLst/>
-          </a:prstGeom>
-          <a:noFill/>
-          <a:ln/>
-        </p:spPr>
-        <p:txBody>
-          <a:bodyPr wrap="square" lIns="0" tIns="0" rIns="0" bIns="0" rtlCol="0" anchor="t"/>
-          <a:lstStyle/>
-          <a:p>
-            <a:pPr algn="l" indent="0" marL="0">
-              <a:lnSpc>
-                <a:spcPct val="118000"/>
-              </a:lnSpc>
-              <a:buNone/>
-            </a:pPr>
-            <a:r>
-              <a:rPr lang="en-US" sz="1150" dirty="0">
-                <a:solidFill>
-                  <a:srgbClr val="5B6475"/>
-                </a:solidFill>
-                <a:latin typeface="Arial" pitchFamily="34" charset="0"/>
-                <a:ea typeface="Arial" pitchFamily="34" charset="-122"/>
-                <a:cs typeface="Arial" pitchFamily="34" charset="-120"/>
-              </a:rPr>
-              <a:t>Le prix suit le nombre d'appareils qui comptent en même temps dans le magasin — la seule chose que vous puissiez vérifier vous-même. Ni le volume de votre stock, ni le nombre de comptes, ni le nombre d'inventaires dans l'année.</a:t>
-            </a:r>
-            <a:endParaRPr lang="en-US" sz="1150" dirty="0"/>
-          </a:p>
-        </p:txBody>
-      </p:sp>
-      <p:sp>
-        <p:nvSpPr>
-          <p:cNvPr id="8" name="Shape 5"/>
-          <p:cNvSpPr/>
-          <p:nvPr/>
-        </p:nvSpPr>
-        <p:spPr>
-          <a:xfrm>
-            <a:off x="731520" y="2331720"/>
-            <a:ext cx="3404616" cy="2743200"/>
-          </a:xfrm>
-          <a:prstGeom prst="roundRect">
-            <a:avLst>
-              <a:gd name="adj" fmla="val 4000"/>
-            </a:avLst>
-          </a:prstGeom>
-          <a:solidFill>
-            <a:srgbClr val="FFFFFF"/>
-          </a:solidFill>
-          <a:ln w="12700">
-            <a:solidFill>
-              <a:srgbClr val="E3E6EE"/>
-            </a:solidFill>
-            <a:prstDash val="solid"/>
-          </a:ln>
-        </p:spPr>
-      </p:sp>
-      <p:sp>
-        <p:nvSpPr>
-          <p:cNvPr id="9" name="Text 6"/>
-          <p:cNvSpPr/>
-          <p:nvPr/>
-        </p:nvSpPr>
-        <p:spPr>
-          <a:xfrm>
-            <a:off x="987552" y="2825496"/>
-            <a:ext cx="2892552" cy="347472"/>
-          </a:xfrm>
-          <a:prstGeom prst="rect">
-            <a:avLst/>
-          </a:prstGeom>
-          <a:noFill/>
-          <a:ln/>
-        </p:spPr>
-        <p:txBody>
-          <a:bodyPr wrap="square" lIns="0" tIns="0" rIns="0" bIns="0" rtlCol="0" anchor="t"/>
-          <a:lstStyle/>
-          <a:p>
-            <a:pPr indent="0" marL="0">
-              <a:buNone/>
-            </a:pPr>
-            <a:r>
-              <a:rPr lang="en-US" sz="1800" b="1" dirty="0">
-                <a:solidFill>
-                  <a:srgbClr val="0B0F19"/>
-                </a:solidFill>
-                <a:latin typeface="Arial" pitchFamily="34" charset="0"/>
-                <a:ea typeface="Arial" pitchFamily="34" charset="-122"/>
-                <a:cs typeface="Arial" pitchFamily="34" charset="-120"/>
-              </a:rPr>
-              <a:t>Essential</a:t>
-            </a:r>
-            <a:endParaRPr lang="en-US" sz="1800" dirty="0"/>
-          </a:p>
-        </p:txBody>
-      </p:sp>
-      <p:sp>
-        <p:nvSpPr>
-          <p:cNvPr id="10" name="Text 7"/>
-          <p:cNvSpPr/>
-          <p:nvPr/>
-        </p:nvSpPr>
-        <p:spPr>
-          <a:xfrm>
-            <a:off x="987552" y="3227832"/>
-            <a:ext cx="2892552" cy="256032"/>
-          </a:xfrm>
-          <a:prstGeom prst="rect">
-            <a:avLst/>
-          </a:prstGeom>
-          <a:noFill/>
-          <a:ln/>
-        </p:spPr>
-        <p:txBody>
-          <a:bodyPr wrap="square" lIns="0" tIns="0" rIns="0" bIns="0" rtlCol="0" anchor="t"/>
-          <a:lstStyle/>
-          <a:p>
-            <a:pPr indent="0" marL="0">
-              <a:buNone/>
-            </a:pPr>
-            <a:r>
-              <a:rPr lang="en-US" sz="1100" b="1" dirty="0">
-                <a:solidFill>
-                  <a:srgbClr val="6366F1"/>
-                </a:solidFill>
-                <a:latin typeface="Arial" pitchFamily="34" charset="0"/>
-                <a:ea typeface="Arial" pitchFamily="34" charset="-122"/>
-                <a:cs typeface="Arial" pitchFamily="34" charset="-120"/>
-              </a:rPr>
-              <a:t>2 appareils</a:t>
-            </a:r>
-            <a:endParaRPr lang="en-US" sz="1100" dirty="0"/>
-          </a:p>
-        </p:txBody>
-      </p:sp>
-      <p:sp>
-        <p:nvSpPr>
-          <p:cNvPr id="11" name="Text 8"/>
-          <p:cNvSpPr/>
-          <p:nvPr/>
-        </p:nvSpPr>
-        <p:spPr>
-          <a:xfrm>
-            <a:off x="987552" y="3538728"/>
-            <a:ext cx="2892552" cy="457200"/>
-          </a:xfrm>
-          <a:prstGeom prst="rect">
-            <a:avLst/>
-          </a:prstGeom>
-          <a:noFill/>
-          <a:ln/>
-        </p:spPr>
-        <p:txBody>
-          <a:bodyPr wrap="square" lIns="0" tIns="0" rIns="0" bIns="0" rtlCol="0" anchor="t"/>
-          <a:lstStyle/>
-          <a:p>
-            <a:pPr indent="0" marL="0">
-              <a:lnSpc>
-                <a:spcPct val="112000"/>
-              </a:lnSpc>
-              <a:buNone/>
-            </a:pPr>
-            <a:r>
-              <a:rPr lang="en-US" sz="1000" dirty="0">
-                <a:solidFill>
-                  <a:srgbClr val="5B6475"/>
-                </a:solidFill>
-                <a:latin typeface="Arial" pitchFamily="34" charset="0"/>
-                <a:ea typeface="Arial" pitchFamily="34" charset="-122"/>
-                <a:cs typeface="Arial" pitchFamily="34" charset="-120"/>
-              </a:rPr>
-              <a:t>Vous comptez seul ou à deux, dans un magasin.</a:t>
-            </a:r>
-            <a:endParaRPr lang="en-US" sz="1000" dirty="0"/>
-          </a:p>
-        </p:txBody>
-      </p:sp>
-      <p:sp>
-        <p:nvSpPr>
-          <p:cNvPr id="12" name="Text 9"/>
-          <p:cNvSpPr/>
-          <p:nvPr/>
-        </p:nvSpPr>
-        <p:spPr>
-          <a:xfrm>
-            <a:off x="987552" y="4050792"/>
-            <a:ext cx="2892552" cy="457200"/>
-          </a:xfrm>
-          <a:prstGeom prst="rect">
-            <a:avLst/>
-          </a:prstGeom>
-          <a:noFill/>
-          <a:ln/>
-        </p:spPr>
-        <p:txBody>
-          <a:bodyPr wrap="square" lIns="0" tIns="0" rIns="0" bIns="0" rtlCol="0" anchor="b"/>
-          <a:lstStyle/>
-          <a:p>
-            <a:pPr indent="0" marL="0">
-              <a:buNone/>
-            </a:pPr>
-            <a:r>
-              <a:rPr lang="en-US" sz="2600" b="1" dirty="0">
-                <a:solidFill>
-                  <a:srgbClr val="4636B0"/>
-                </a:solidFill>
-                <a:latin typeface="Arial" pitchFamily="34" charset="0"/>
-                <a:ea typeface="Arial" pitchFamily="34" charset="-122"/>
-                <a:cs typeface="Arial" pitchFamily="34" charset="-120"/>
-              </a:rPr>
-              <a:t>89 €</a:t>
-            </a:r>
-            <a:pPr indent="0" marL="0">
-              <a:buNone/>
-            </a:pPr>
-            <a:r>
-              <a:rPr lang="en-US" sz="1050" dirty="0">
-                <a:solidFill>
-                  <a:srgbClr val="5B6475"/>
-                </a:solidFill>
-                <a:latin typeface="Arial" pitchFamily="34" charset="0"/>
-                <a:ea typeface="Arial" pitchFamily="34" charset="-122"/>
-                <a:cs typeface="Arial" pitchFamily="34" charset="-120"/>
-              </a:rPr>
-              <a:t>  HT / mois</a:t>
-            </a:r>
-            <a:endParaRPr lang="en-US" sz="2600" dirty="0"/>
-          </a:p>
-        </p:txBody>
-      </p:sp>
-      <p:sp>
-        <p:nvSpPr>
-          <p:cNvPr id="13" name="Text 10"/>
-          <p:cNvSpPr/>
-          <p:nvPr/>
-        </p:nvSpPr>
-        <p:spPr>
-          <a:xfrm>
-            <a:off x="987552" y="4507992"/>
-            <a:ext cx="2892552" cy="274320"/>
-          </a:xfrm>
-          <a:prstGeom prst="rect">
-            <a:avLst/>
-          </a:prstGeom>
-          <a:noFill/>
-          <a:ln/>
-        </p:spPr>
-        <p:txBody>
-          <a:bodyPr wrap="square" lIns="0" tIns="0" rIns="0" bIns="0" rtlCol="0" anchor="t"/>
-          <a:lstStyle/>
-          <a:p>
-            <a:pPr indent="0" marL="0">
-              <a:buNone/>
-            </a:pPr>
-            <a:r>
-              <a:rPr lang="en-US" sz="950" dirty="0">
-                <a:solidFill>
-                  <a:srgbClr val="1F7A5C"/>
-                </a:solidFill>
-                <a:latin typeface="Arial" pitchFamily="34" charset="0"/>
-                <a:ea typeface="Arial" pitchFamily="34" charset="-122"/>
-                <a:cs typeface="Arial" pitchFamily="34" charset="-120"/>
-              </a:rPr>
-              <a:t>ou 950 € à l’année — 118 € de moins</a:t>
-            </a:r>
-            <a:endParaRPr lang="en-US" sz="950" dirty="0"/>
-          </a:p>
-        </p:txBody>
-      </p:sp>
-      <p:sp>
-        <p:nvSpPr>
-          <p:cNvPr id="14" name="Shape 11"/>
-          <p:cNvSpPr/>
-          <p:nvPr/>
-        </p:nvSpPr>
-        <p:spPr>
-          <a:xfrm>
-            <a:off x="4392168" y="2331720"/>
-            <a:ext cx="3404616" cy="2743200"/>
-          </a:xfrm>
-          <a:prstGeom prst="roundRect">
-            <a:avLst>
-              <a:gd name="adj" fmla="val 4000"/>
-            </a:avLst>
-          </a:prstGeom>
-          <a:solidFill>
-            <a:srgbClr val="EEEEFC"/>
-          </a:solidFill>
-          <a:ln w="19050">
-            <a:solidFill>
-              <a:srgbClr val="6366F1"/>
-            </a:solidFill>
-            <a:prstDash val="solid"/>
-          </a:ln>
-        </p:spPr>
-      </p:sp>
-      <p:sp>
-        <p:nvSpPr>
-          <p:cNvPr id="15" name="Text 12"/>
-          <p:cNvSpPr/>
-          <p:nvPr/>
-        </p:nvSpPr>
-        <p:spPr>
-          <a:xfrm>
-            <a:off x="4648200" y="2532888"/>
-            <a:ext cx="2892552" cy="219456"/>
-          </a:xfrm>
-          <a:prstGeom prst="rect">
-            <a:avLst/>
-          </a:prstGeom>
-          <a:noFill/>
-          <a:ln/>
-        </p:spPr>
-        <p:txBody>
-          <a:bodyPr wrap="square" lIns="0" tIns="0" rIns="0" bIns="0" rtlCol="0" anchor="t"/>
-          <a:lstStyle/>
-          <a:p>
-            <a:pPr indent="0" marL="0">
-              <a:buNone/>
-            </a:pPr>
-            <a:r>
-              <a:rPr lang="en-US" sz="800" b="1" spc="60" kern="0" dirty="0">
-                <a:solidFill>
-                  <a:srgbClr val="6366F1"/>
-                </a:solidFill>
-                <a:latin typeface="Arial" pitchFamily="34" charset="0"/>
-                <a:ea typeface="Arial" pitchFamily="34" charset="-122"/>
-                <a:cs typeface="Arial" pitchFamily="34" charset="-120"/>
-              </a:rPr>
-              <a:t>LE PLUS COURANT</a:t>
-            </a:r>
-            <a:endParaRPr lang="en-US" sz="800" dirty="0"/>
-          </a:p>
-        </p:txBody>
-      </p:sp>
-      <p:sp>
-        <p:nvSpPr>
-          <p:cNvPr id="16" name="Text 13"/>
-          <p:cNvSpPr/>
-          <p:nvPr/>
-        </p:nvSpPr>
-        <p:spPr>
-          <a:xfrm>
-            <a:off x="4648200" y="2825496"/>
-            <a:ext cx="2892552" cy="347472"/>
-          </a:xfrm>
-          <a:prstGeom prst="rect">
-            <a:avLst/>
-          </a:prstGeom>
-          <a:noFill/>
-          <a:ln/>
-        </p:spPr>
-        <p:txBody>
-          <a:bodyPr wrap="square" lIns="0" tIns="0" rIns="0" bIns="0" rtlCol="0" anchor="t"/>
-          <a:lstStyle/>
-          <a:p>
-            <a:pPr indent="0" marL="0">
-              <a:buNone/>
-            </a:pPr>
-            <a:r>
-              <a:rPr lang="en-US" sz="1800" b="1" dirty="0">
-                <a:solidFill>
-                  <a:srgbClr val="0B0F19"/>
-                </a:solidFill>
-                <a:latin typeface="Arial" pitchFamily="34" charset="0"/>
-                <a:ea typeface="Arial" pitchFamily="34" charset="-122"/>
-                <a:cs typeface="Arial" pitchFamily="34" charset="-120"/>
-              </a:rPr>
-              <a:t>Advanced</a:t>
-            </a:r>
-            <a:endParaRPr lang="en-US" sz="1800" dirty="0"/>
-          </a:p>
-        </p:txBody>
-      </p:sp>
-      <p:sp>
-        <p:nvSpPr>
-          <p:cNvPr id="17" name="Text 14"/>
-          <p:cNvSpPr/>
-          <p:nvPr/>
-        </p:nvSpPr>
-        <p:spPr>
-          <a:xfrm>
-            <a:off x="4648200" y="3227832"/>
-            <a:ext cx="2892552" cy="256032"/>
-          </a:xfrm>
-          <a:prstGeom prst="rect">
-            <a:avLst/>
-          </a:prstGeom>
-          <a:noFill/>
-          <a:ln/>
-        </p:spPr>
-        <p:txBody>
-          <a:bodyPr wrap="square" lIns="0" tIns="0" rIns="0" bIns="0" rtlCol="0" anchor="t"/>
-          <a:lstStyle/>
-          <a:p>
-            <a:pPr indent="0" marL="0">
-              <a:buNone/>
-            </a:pPr>
-            <a:r>
-              <a:rPr lang="en-US" sz="1100" b="1" dirty="0">
-                <a:solidFill>
-                  <a:srgbClr val="6366F1"/>
-                </a:solidFill>
-                <a:latin typeface="Arial" pitchFamily="34" charset="0"/>
-                <a:ea typeface="Arial" pitchFamily="34" charset="-122"/>
-                <a:cs typeface="Arial" pitchFamily="34" charset="-120"/>
-              </a:rPr>
-              <a:t>3 à 20 appareils</a:t>
-            </a:r>
-            <a:endParaRPr lang="en-US" sz="1100" dirty="0"/>
-          </a:p>
-        </p:txBody>
-      </p:sp>
-      <p:sp>
-        <p:nvSpPr>
-          <p:cNvPr id="18" name="Text 15"/>
-          <p:cNvSpPr/>
-          <p:nvPr/>
-        </p:nvSpPr>
-        <p:spPr>
-          <a:xfrm>
-            <a:off x="4648200" y="3538728"/>
-            <a:ext cx="2892552" cy="457200"/>
-          </a:xfrm>
-          <a:prstGeom prst="rect">
-            <a:avLst/>
-          </a:prstGeom>
-          <a:noFill/>
-          <a:ln/>
-        </p:spPr>
-        <p:txBody>
-          <a:bodyPr wrap="square" lIns="0" tIns="0" rIns="0" bIns="0" rtlCol="0" anchor="t"/>
-          <a:lstStyle/>
-          <a:p>
-            <a:pPr indent="0" marL="0">
-              <a:lnSpc>
-                <a:spcPct val="112000"/>
-              </a:lnSpc>
-              <a:buNone/>
-            </a:pPr>
-            <a:r>
-              <a:rPr lang="en-US" sz="1000" dirty="0">
-                <a:solidFill>
-                  <a:srgbClr val="5B6475"/>
-                </a:solidFill>
-                <a:latin typeface="Arial" pitchFamily="34" charset="0"/>
-                <a:ea typeface="Arial" pitchFamily="34" charset="-122"/>
-                <a:cs typeface="Arial" pitchFamily="34" charset="-120"/>
-              </a:rPr>
-              <a:t>Vous montez une équipe le jour de l’inventaire.</a:t>
-            </a:r>
-            <a:endParaRPr lang="en-US" sz="1000" dirty="0"/>
-          </a:p>
-        </p:txBody>
-      </p:sp>
-      <p:sp>
-        <p:nvSpPr>
-          <p:cNvPr id="19" name="Text 16"/>
-          <p:cNvSpPr/>
-          <p:nvPr/>
-        </p:nvSpPr>
-        <p:spPr>
-          <a:xfrm>
-            <a:off x="4648200" y="4050792"/>
-            <a:ext cx="2892552" cy="457200"/>
-          </a:xfrm>
-          <a:prstGeom prst="rect">
-            <a:avLst/>
-          </a:prstGeom>
-          <a:noFill/>
-          <a:ln/>
-        </p:spPr>
-        <p:txBody>
-          <a:bodyPr wrap="square" lIns="0" tIns="0" rIns="0" bIns="0" rtlCol="0" anchor="b"/>
-          <a:lstStyle/>
-          <a:p>
-            <a:pPr indent="0" marL="0">
-              <a:buNone/>
-            </a:pPr>
-            <a:r>
-              <a:rPr lang="en-US" sz="2600" b="1" dirty="0">
-                <a:solidFill>
-                  <a:srgbClr val="4636B0"/>
-                </a:solidFill>
-                <a:latin typeface="Arial" pitchFamily="34" charset="0"/>
-                <a:ea typeface="Arial" pitchFamily="34" charset="-122"/>
-                <a:cs typeface="Arial" pitchFamily="34" charset="-120"/>
-              </a:rPr>
-              <a:t>310 €</a:t>
-            </a:r>
-            <a:pPr indent="0" marL="0">
-              <a:buNone/>
-            </a:pPr>
-            <a:r>
-              <a:rPr lang="en-US" sz="1050" dirty="0">
-                <a:solidFill>
-                  <a:srgbClr val="5B6475"/>
-                </a:solidFill>
-                <a:latin typeface="Arial" pitchFamily="34" charset="0"/>
-                <a:ea typeface="Arial" pitchFamily="34" charset="-122"/>
-                <a:cs typeface="Arial" pitchFamily="34" charset="-120"/>
-              </a:rPr>
-              <a:t>  HT / mois</a:t>
-            </a:r>
-            <a:endParaRPr lang="en-US" sz="2600" dirty="0"/>
-          </a:p>
-        </p:txBody>
-      </p:sp>
-      <p:sp>
-        <p:nvSpPr>
-          <p:cNvPr id="20" name="Text 17"/>
-          <p:cNvSpPr/>
-          <p:nvPr/>
-        </p:nvSpPr>
-        <p:spPr>
-          <a:xfrm>
-            <a:off x="4648200" y="4507992"/>
-            <a:ext cx="2892552" cy="274320"/>
-          </a:xfrm>
-          <a:prstGeom prst="rect">
-            <a:avLst/>
-          </a:prstGeom>
-          <a:noFill/>
-          <a:ln/>
-        </p:spPr>
-        <p:txBody>
-          <a:bodyPr wrap="square" lIns="0" tIns="0" rIns="0" bIns="0" rtlCol="0" anchor="t"/>
-          <a:lstStyle/>
-          <a:p>
-            <a:pPr indent="0" marL="0">
-              <a:buNone/>
-            </a:pPr>
-            <a:r>
-              <a:rPr lang="en-US" sz="950" dirty="0">
-                <a:solidFill>
-                  <a:srgbClr val="1F7A5C"/>
-                </a:solidFill>
-                <a:latin typeface="Arial" pitchFamily="34" charset="0"/>
-                <a:ea typeface="Arial" pitchFamily="34" charset="-122"/>
-                <a:cs typeface="Arial" pitchFamily="34" charset="-120"/>
-              </a:rPr>
-              <a:t>ou 3 300 € à l’année — 420 € de moins</a:t>
-            </a:r>
-            <a:endParaRPr lang="en-US" sz="950" dirty="0"/>
-          </a:p>
-        </p:txBody>
-      </p:sp>
-      <p:sp>
-        <p:nvSpPr>
-          <p:cNvPr id="21" name="Shape 18"/>
-          <p:cNvSpPr/>
-          <p:nvPr/>
-        </p:nvSpPr>
-        <p:spPr>
-          <a:xfrm>
-            <a:off x="8052816" y="2331720"/>
-            <a:ext cx="3404616" cy="2743200"/>
-          </a:xfrm>
-          <a:prstGeom prst="roundRect">
-            <a:avLst>
-              <a:gd name="adj" fmla="val 4000"/>
-            </a:avLst>
-          </a:prstGeom>
-          <a:solidFill>
-            <a:srgbClr val="FFFFFF"/>
-          </a:solidFill>
-          <a:ln w="12700">
-            <a:solidFill>
-              <a:srgbClr val="E3E6EE"/>
-            </a:solidFill>
-            <a:prstDash val="solid"/>
-          </a:ln>
-        </p:spPr>
-      </p:sp>
-      <p:sp>
-        <p:nvSpPr>
-          <p:cNvPr id="22" name="Text 19"/>
-          <p:cNvSpPr/>
-          <p:nvPr/>
-        </p:nvSpPr>
-        <p:spPr>
-          <a:xfrm>
-            <a:off x="8308848" y="2825496"/>
-            <a:ext cx="2892552" cy="347472"/>
-          </a:xfrm>
-          <a:prstGeom prst="rect">
-            <a:avLst/>
-          </a:prstGeom>
-          <a:noFill/>
-          <a:ln/>
-        </p:spPr>
-        <p:txBody>
-          <a:bodyPr wrap="square" lIns="0" tIns="0" rIns="0" bIns="0" rtlCol="0" anchor="t"/>
-          <a:lstStyle/>
-          <a:p>
-            <a:pPr indent="0" marL="0">
-              <a:buNone/>
-            </a:pPr>
-            <a:r>
-              <a:rPr lang="en-US" sz="1800" b="1" dirty="0">
-                <a:solidFill>
-                  <a:srgbClr val="0B0F19"/>
-                </a:solidFill>
-                <a:latin typeface="Arial" pitchFamily="34" charset="0"/>
-                <a:ea typeface="Arial" pitchFamily="34" charset="-122"/>
-                <a:cs typeface="Arial" pitchFamily="34" charset="-120"/>
-              </a:rPr>
-              <a:t>Enterprise</a:t>
-            </a:r>
-            <a:endParaRPr lang="en-US" sz="1800" dirty="0"/>
-          </a:p>
-        </p:txBody>
-      </p:sp>
-      <p:sp>
-        <p:nvSpPr>
-          <p:cNvPr id="23" name="Text 20"/>
-          <p:cNvSpPr/>
-          <p:nvPr/>
-        </p:nvSpPr>
-        <p:spPr>
-          <a:xfrm>
-            <a:off x="8308848" y="3227832"/>
-            <a:ext cx="2892552" cy="256032"/>
-          </a:xfrm>
-          <a:prstGeom prst="rect">
-            <a:avLst/>
-          </a:prstGeom>
-          <a:noFill/>
-          <a:ln/>
-        </p:spPr>
-        <p:txBody>
-          <a:bodyPr wrap="square" lIns="0" tIns="0" rIns="0" bIns="0" rtlCol="0" anchor="t"/>
-          <a:lstStyle/>
-          <a:p>
-            <a:pPr indent="0" marL="0">
-              <a:buNone/>
-            </a:pPr>
-            <a:r>
-              <a:rPr lang="en-US" sz="1100" b="1" dirty="0">
-                <a:solidFill>
-                  <a:srgbClr val="6366F1"/>
-                </a:solidFill>
-                <a:latin typeface="Arial" pitchFamily="34" charset="0"/>
-                <a:ea typeface="Arial" pitchFamily="34" charset="-122"/>
-                <a:cs typeface="Arial" pitchFamily="34" charset="-120"/>
-              </a:rPr>
-              <a:t>21 à 100 appareils</a:t>
-            </a:r>
-            <a:endParaRPr lang="en-US" sz="1100" dirty="0"/>
-          </a:p>
-        </p:txBody>
-      </p:sp>
-      <p:sp>
-        <p:nvSpPr>
-          <p:cNvPr id="24" name="Text 21"/>
-          <p:cNvSpPr/>
-          <p:nvPr/>
-        </p:nvSpPr>
-        <p:spPr>
-          <a:xfrm>
-            <a:off x="8308848" y="3538728"/>
-            <a:ext cx="2892552" cy="457200"/>
-          </a:xfrm>
-          <a:prstGeom prst="rect">
-            <a:avLst/>
-          </a:prstGeom>
-          <a:noFill/>
-          <a:ln/>
-        </p:spPr>
-        <p:txBody>
-          <a:bodyPr wrap="square" lIns="0" tIns="0" rIns="0" bIns="0" rtlCol="0" anchor="t"/>
-          <a:lstStyle/>
-          <a:p>
-            <a:pPr indent="0" marL="0">
-              <a:lnSpc>
-                <a:spcPct val="112000"/>
-              </a:lnSpc>
-              <a:buNone/>
-            </a:pPr>
-            <a:r>
-              <a:rPr lang="en-US" sz="1000" dirty="0">
-                <a:solidFill>
-                  <a:srgbClr val="5B6475"/>
-                </a:solidFill>
-                <a:latin typeface="Arial" pitchFamily="34" charset="0"/>
-                <a:ea typeface="Arial" pitchFamily="34" charset="-122"/>
-                <a:cs typeface="Arial" pitchFamily="34" charset="-120"/>
-              </a:rPr>
-              <a:t>La grande surface, qui mobilise une équipe entière.</a:t>
-            </a:r>
-            <a:endParaRPr lang="en-US" sz="1000" dirty="0"/>
-          </a:p>
-        </p:txBody>
-      </p:sp>
-      <p:sp>
-        <p:nvSpPr>
-          <p:cNvPr id="25" name="Text 22"/>
-          <p:cNvSpPr/>
-          <p:nvPr/>
-        </p:nvSpPr>
-        <p:spPr>
-          <a:xfrm>
-            <a:off x="8308848" y="4050792"/>
-            <a:ext cx="2892552" cy="457200"/>
-          </a:xfrm>
-          <a:prstGeom prst="rect">
-            <a:avLst/>
-          </a:prstGeom>
-          <a:noFill/>
-          <a:ln/>
-        </p:spPr>
-        <p:txBody>
-          <a:bodyPr wrap="square" lIns="0" tIns="0" rIns="0" bIns="0" rtlCol="0" anchor="b"/>
-          <a:lstStyle/>
-          <a:p>
-            <a:pPr indent="0" marL="0">
-              <a:buNone/>
-            </a:pPr>
-            <a:r>
-              <a:rPr lang="en-US" sz="2600" b="1" dirty="0">
-                <a:solidFill>
-                  <a:srgbClr val="4636B0"/>
-                </a:solidFill>
-                <a:latin typeface="Arial" pitchFamily="34" charset="0"/>
-                <a:ea typeface="Arial" pitchFamily="34" charset="-122"/>
-                <a:cs typeface="Arial" pitchFamily="34" charset="-120"/>
-              </a:rPr>
-              <a:t>890 €</a:t>
-            </a:r>
-            <a:pPr indent="0" marL="0">
-              <a:buNone/>
-            </a:pPr>
-            <a:r>
-              <a:rPr lang="en-US" sz="1050" dirty="0">
-                <a:solidFill>
-                  <a:srgbClr val="5B6475"/>
-                </a:solidFill>
-                <a:latin typeface="Arial" pitchFamily="34" charset="0"/>
-                <a:ea typeface="Arial" pitchFamily="34" charset="-122"/>
-                <a:cs typeface="Arial" pitchFamily="34" charset="-120"/>
-              </a:rPr>
-              <a:t>  HT / mois</a:t>
-            </a:r>
-            <a:endParaRPr lang="en-US" sz="2600" dirty="0"/>
-          </a:p>
-        </p:txBody>
-      </p:sp>
-      <p:sp>
-        <p:nvSpPr>
-          <p:cNvPr id="26" name="Text 23"/>
-          <p:cNvSpPr/>
-          <p:nvPr/>
-        </p:nvSpPr>
-        <p:spPr>
-          <a:xfrm>
-            <a:off x="8308848" y="4507992"/>
-            <a:ext cx="2892552" cy="274320"/>
-          </a:xfrm>
-          <a:prstGeom prst="rect">
-            <a:avLst/>
-          </a:prstGeom>
-          <a:noFill/>
-          <a:ln/>
-        </p:spPr>
-        <p:txBody>
-          <a:bodyPr wrap="square" lIns="0" tIns="0" rIns="0" bIns="0" rtlCol="0" anchor="t"/>
-          <a:lstStyle/>
-          <a:p>
-            <a:pPr indent="0" marL="0">
-              <a:buNone/>
-            </a:pPr>
-            <a:r>
-              <a:rPr lang="en-US" sz="950" dirty="0">
-                <a:solidFill>
-                  <a:srgbClr val="1F7A5C"/>
-                </a:solidFill>
-                <a:latin typeface="Arial" pitchFamily="34" charset="0"/>
-                <a:ea typeface="Arial" pitchFamily="34" charset="-122"/>
-                <a:cs typeface="Arial" pitchFamily="34" charset="-120"/>
-              </a:rPr>
-              <a:t>ou 9 450 € à l’année — 1 230 € de moins</a:t>
-            </a:r>
-            <a:endParaRPr lang="en-US" sz="950" dirty="0"/>
-          </a:p>
-        </p:txBody>
-      </p:sp>
-      <p:sp>
-        <p:nvSpPr>
-          <p:cNvPr id="27" name="Text 24"/>
-          <p:cNvSpPr/>
-          <p:nvPr/>
-        </p:nvSpPr>
-        <p:spPr>
-          <a:xfrm>
-            <a:off x="731520" y="5257800"/>
-            <a:ext cx="10725912" cy="914400"/>
+            <a:off x="731520" y="2011680"/>
+            <a:ext cx="10725912" cy="2377440"/>
           </a:xfrm>
           <a:prstGeom prst="rect">
             <a:avLst/>
@@ -3062,12 +2227,12 @@
                 <a:spcPct val="118000"/>
               </a:lnSpc>
               <a:spcAft>
-                <a:spcPts val="900"/>
+                <a:spcPts val="1600"/>
               </a:spcAft>
               <a:buNone/>
             </a:pPr>
             <a:r>
-              <a:rPr lang="en-US" sz="1200" b="1" dirty="0">
+              <a:rPr lang="en-US" sz="1300" b="1" dirty="0">
                 <a:solidFill>
                   <a:srgbClr val="0B0F19"/>
                 </a:solidFill>
@@ -3075,19 +2240,19 @@
                 <a:ea typeface="Arial" pitchFamily="34" charset="-122"/>
                 <a:cs typeface="Arial" pitchFamily="34" charset="-120"/>
               </a:rPr>
-              <a:t>Ce que ça change pour l'inventaire tournant. </a:t>
+              <a:t>Le matériel. </a:t>
             </a:r>
             <a:pPr indent="0" marL="0">
               <a:lnSpc>
                 <a:spcPct val="118000"/>
               </a:lnSpc>
               <a:spcAft>
-                <a:spcPts val="900"/>
+                <a:spcPts val="1600"/>
               </a:spcAft>
               <a:buNone/>
             </a:pPr>
             <a:r>
-              <a:rPr lang="en-US" sz="1200" dirty="0">
+              <a:rPr lang="en-US" sz="1300" dirty="0">
                 <a:solidFill>
                   <a:srgbClr val="3D4556"/>
                 </a:solidFill>
@@ -3095,15 +2260,209 @@
                 <a:ea typeface="Arial" pitchFamily="34" charset="-122"/>
                 <a:cs typeface="Arial" pitchFamily="34" charset="-120"/>
               </a:rPr>
-              <a:t>À l'intérieur d'un palier, compter davantage ne coûte rien : un chef d'équipe qui décide de compter son rayon un mardi matin n'a aucun budget à demander. C'est ce qui rend le transfert au floor tenable dans la durée. L'application, le tableau de bord, les rapports et les mises à jour sont compris.</a:t>
-            </a:r>
-            <a:endParaRPr lang="en-US" sz="1200" dirty="0"/>
-          </a:p>
-        </p:txBody>
-      </p:sp>
-      <p:sp>
-        <p:nvSpPr>
-          <p:cNvPr id="28" name="Text 25"/>
+              <a:t>SmartCount repose sur une flotte de terminaux dédiés : à charger, configurer, vérifier avant chaque session — le travail qu'on cherche justement à ne plus faire. Quantinvo tourne sur les iPhone que vos équipes ont déjà, et une douchette Bluetooth s'y branche pour les gros volumes.</a:t>
+            </a:r>
+            <a:endParaRPr lang="en-US" sz="1300" dirty="0"/>
+          </a:p>
+          <a:p>
+            <a:pPr indent="0" marL="0">
+              <a:lnSpc>
+                <a:spcPct val="118000"/>
+              </a:lnSpc>
+              <a:spcAft>
+                <a:spcPts val="1600"/>
+              </a:spcAft>
+              <a:buNone/>
+            </a:pPr>
+            <a:r>
+              <a:rPr lang="en-US" sz="1300" b="1" dirty="0">
+                <a:solidFill>
+                  <a:srgbClr val="0B0F19"/>
+                </a:solidFill>
+                <a:latin typeface="Arial" pitchFamily="34" charset="0"/>
+                <a:ea typeface="Arial" pitchFamily="34" charset="-122"/>
+                <a:cs typeface="Arial" pitchFamily="34" charset="-120"/>
+              </a:rPr>
+              <a:t>Le fichier. </a:t>
+            </a:r>
+            <a:pPr indent="0" marL="0">
+              <a:lnSpc>
+                <a:spcPct val="118000"/>
+              </a:lnSpc>
+              <a:spcAft>
+                <a:spcPts val="1600"/>
+              </a:spcAft>
+              <a:buNone/>
+            </a:pPr>
+            <a:r>
+              <a:rPr lang="en-US" sz="1300" dirty="0">
+                <a:solidFill>
+                  <a:srgbClr val="3D4556"/>
+                </a:solidFill>
+                <a:latin typeface="Arial" pitchFamily="34" charset="0"/>
+                <a:ea typeface="Arial" pitchFamily="34" charset="-122"/>
+                <a:cs typeface="Arial" pitchFamily="34" charset="-120"/>
+              </a:rPr>
+              <a:t>SmartCount rend un rapport de variance, à recouper ensuite avec le stock théorique. Quantinvo rend ce croisement déjà fait : l'attendu, le compté, le non-compté, l'écart en valeur.</a:t>
+            </a:r>
+            <a:endParaRPr lang="en-US" sz="1300" dirty="0"/>
+          </a:p>
+          <a:p>
+            <a:pPr indent="0" marL="0">
+              <a:lnSpc>
+                <a:spcPct val="118000"/>
+              </a:lnSpc>
+              <a:spcAft>
+                <a:spcPts val="1600"/>
+              </a:spcAft>
+              <a:buNone/>
+            </a:pPr>
+            <a:r>
+              <a:rPr lang="en-US" sz="1300" b="1" dirty="0">
+                <a:solidFill>
+                  <a:srgbClr val="0B0F19"/>
+                </a:solidFill>
+                <a:latin typeface="Arial" pitchFamily="34" charset="0"/>
+                <a:ea typeface="Arial" pitchFamily="34" charset="-122"/>
+                <a:cs typeface="Arial" pitchFamily="34" charset="-120"/>
+              </a:rPr>
+              <a:t>L'éditeur. </a:t>
+            </a:r>
+            <a:pPr indent="0" marL="0">
+              <a:lnSpc>
+                <a:spcPct val="118000"/>
+              </a:lnSpc>
+              <a:spcAft>
+                <a:spcPts val="1600"/>
+              </a:spcAft>
+              <a:buNone/>
+            </a:pPr>
+            <a:r>
+              <a:rPr lang="en-US" sz="1300" dirty="0">
+                <a:solidFill>
+                  <a:srgbClr val="3D4556"/>
+                </a:solidFill>
+                <a:latin typeface="Arial" pitchFamily="34" charset="0"/>
+                <a:ea typeface="Arial" pitchFamily="34" charset="-122"/>
+                <a:cs typeface="Arial" pitchFamily="34" charset="-120"/>
+              </a:rPr>
+              <a:t>SmartCount est un module au catalogue d'un géant du matériel. Quantinvo ne fait qu'une chose — l'inventaire — et la personne qui l'a dessiné répond elle-même à vos questions.</a:t>
+            </a:r>
+            <a:endParaRPr lang="en-US" sz="1300" dirty="0"/>
+          </a:p>
+        </p:txBody>
+      </p:sp>
+      <p:sp>
+        <p:nvSpPr>
+          <p:cNvPr id="8" name="Shape 5"/>
+          <p:cNvSpPr/>
+          <p:nvPr/>
+        </p:nvSpPr>
+        <p:spPr>
+          <a:xfrm>
+            <a:off x="731520" y="4480560"/>
+            <a:ext cx="10725912" cy="1051560"/>
+          </a:xfrm>
+          <a:prstGeom prst="roundRect">
+            <a:avLst>
+              <a:gd name="adj" fmla="val 6957"/>
+            </a:avLst>
+          </a:prstGeom>
+          <a:solidFill>
+            <a:srgbClr val="F4F5F9"/>
+          </a:solidFill>
+          <a:ln w="12700">
+            <a:solidFill>
+              <a:srgbClr val="F4F5F9"/>
+            </a:solidFill>
+            <a:prstDash val="solid"/>
+          </a:ln>
+        </p:spPr>
+      </p:sp>
+      <p:sp>
+        <p:nvSpPr>
+          <p:cNvPr id="9" name="Text 6"/>
+          <p:cNvSpPr/>
+          <p:nvPr/>
+        </p:nvSpPr>
+        <p:spPr>
+          <a:xfrm>
+            <a:off x="1005840" y="4645152"/>
+            <a:ext cx="10177272" cy="228600"/>
+          </a:xfrm>
+          <a:prstGeom prst="rect">
+            <a:avLst/>
+          </a:prstGeom>
+          <a:noFill/>
+          <a:ln/>
+        </p:spPr>
+        <p:txBody>
+          <a:bodyPr wrap="square" lIns="0" tIns="0" rIns="0" bIns="0" rtlCol="0" anchor="t"/>
+          <a:lstStyle/>
+          <a:p>
+            <a:pPr indent="0" marL="0">
+              <a:buNone/>
+            </a:pPr>
+            <a:r>
+              <a:rPr lang="en-US" sz="950" b="1" dirty="0">
+                <a:solidFill>
+                  <a:srgbClr val="5B6475"/>
+                </a:solidFill>
+                <a:latin typeface="Arial" pitchFamily="34" charset="0"/>
+                <a:ea typeface="Arial" pitchFamily="34" charset="-122"/>
+                <a:cs typeface="Arial" pitchFamily="34" charset="-120"/>
+              </a:rPr>
+              <a:t>Pour être honnête</a:t>
+            </a:r>
+            <a:endParaRPr lang="en-US" sz="950" dirty="0"/>
+          </a:p>
+        </p:txBody>
+      </p:sp>
+      <p:sp>
+        <p:nvSpPr>
+          <p:cNvPr id="10" name="Text 7"/>
+          <p:cNvSpPr/>
+          <p:nvPr/>
+        </p:nvSpPr>
+        <p:spPr>
+          <a:xfrm>
+            <a:off x="1005840" y="4901184"/>
+            <a:ext cx="10177272" cy="502920"/>
+          </a:xfrm>
+          <a:prstGeom prst="rect">
+            <a:avLst/>
+          </a:prstGeom>
+          <a:noFill/>
+          <a:ln/>
+        </p:spPr>
+        <p:txBody>
+          <a:bodyPr wrap="square" lIns="0" tIns="0" rIns="0" bIns="0" rtlCol="0" anchor="t"/>
+          <a:lstStyle/>
+          <a:p>
+            <a:pPr indent="0" marL="0">
+              <a:lnSpc>
+                <a:spcPct val="115000"/>
+              </a:lnSpc>
+              <a:buNone/>
+            </a:pPr>
+            <a:r>
+              <a:rPr lang="en-US" sz="1150" i="1" dirty="0">
+                <a:solidFill>
+                  <a:srgbClr val="3D4556"/>
+                </a:solidFill>
+                <a:latin typeface="Arial" pitchFamily="34" charset="0"/>
+                <a:ea typeface="Arial" pitchFamily="34" charset="-122"/>
+                <a:cs typeface="Arial" pitchFamily="34" charset="-120"/>
+              </a:rPr>
+              <a:t>Un terminal durci encaisse mieux les chocs qu'un téléphone, et si votre flotte est déjà amortie, l'argument du matériel pèse moins. Ce qui ne bouge pas : un outil que le floor prend en main sans briefing, et un fichier qui arrive déjà croisé.</a:t>
+            </a:r>
+            <a:endParaRPr lang="en-US" sz="1150" dirty="0"/>
+          </a:p>
+        </p:txBody>
+      </p:sp>
+      <p:sp>
+        <p:nvSpPr>
+          <p:cNvPr id="11" name="Text 8"/>
           <p:cNvSpPr/>
           <p:nvPr/>
         </p:nvSpPr>
@@ -3142,7 +2501,7 @@
       </p:sp>
       <p:sp>
         <p:nvSpPr>
-          <p:cNvPr id="29" name="Text 26"/>
+          <p:cNvPr id="12" name="Text 9"/>
           <p:cNvSpPr/>
           <p:nvPr/>
         </p:nvSpPr>
@@ -3227,6 +2586,1148 @@
         </p:blipFill>
         <p:spPr>
           <a:xfrm>
+            <a:off x="731520" y="384048"/>
+            <a:ext cx="329184" cy="329184"/>
+          </a:xfrm>
+          <a:prstGeom prst="rect">
+            <a:avLst/>
+          </a:prstGeom>
+        </p:spPr>
+      </p:pic>
+      <p:sp>
+        <p:nvSpPr>
+          <p:cNvPr id="3" name="Text 0"/>
+          <p:cNvSpPr/>
+          <p:nvPr/>
+        </p:nvSpPr>
+        <p:spPr>
+          <a:xfrm>
+            <a:off x="1170432" y="347472"/>
+            <a:ext cx="2743200" cy="402336"/>
+          </a:xfrm>
+          <a:prstGeom prst="rect">
+            <a:avLst/>
+          </a:prstGeom>
+          <a:noFill/>
+          <a:ln/>
+        </p:spPr>
+        <p:txBody>
+          <a:bodyPr wrap="square" lIns="0" tIns="0" rIns="0" bIns="0" rtlCol="0" anchor="ctr"/>
+          <a:lstStyle/>
+          <a:p>
+            <a:pPr indent="0" marL="0">
+              <a:buNone/>
+            </a:pPr>
+            <a:r>
+              <a:rPr lang="en-US" sz="1600" b="1" dirty="0">
+                <a:solidFill>
+                  <a:srgbClr val="0B0F19"/>
+                </a:solidFill>
+                <a:latin typeface="Arial" pitchFamily="34" charset="0"/>
+                <a:ea typeface="Arial" pitchFamily="34" charset="-122"/>
+                <a:cs typeface="Arial" pitchFamily="34" charset="-120"/>
+              </a:rPr>
+              <a:t>Quantinvo</a:t>
+            </a:r>
+            <a:endParaRPr lang="en-US" sz="1600" dirty="0"/>
+          </a:p>
+        </p:txBody>
+      </p:sp>
+      <p:sp>
+        <p:nvSpPr>
+          <p:cNvPr id="4" name="Text 1"/>
+          <p:cNvSpPr/>
+          <p:nvPr/>
+        </p:nvSpPr>
+        <p:spPr>
+          <a:xfrm>
+            <a:off x="5971032" y="347472"/>
+            <a:ext cx="5486400" cy="402336"/>
+          </a:xfrm>
+          <a:prstGeom prst="rect">
+            <a:avLst/>
+          </a:prstGeom>
+          <a:noFill/>
+          <a:ln/>
+        </p:spPr>
+        <p:txBody>
+          <a:bodyPr wrap="square" lIns="0" tIns="0" rIns="0" bIns="0" rtlCol="0" anchor="ctr"/>
+          <a:lstStyle/>
+          <a:p>
+            <a:pPr algn="r" indent="0" marL="0">
+              <a:buNone/>
+            </a:pPr>
+            <a:r>
+              <a:rPr lang="en-US" sz="1000" dirty="0">
+                <a:solidFill>
+                  <a:srgbClr val="5B6475"/>
+                </a:solidFill>
+                <a:latin typeface="Arial" pitchFamily="34" charset="0"/>
+                <a:ea typeface="Arial" pitchFamily="34" charset="-122"/>
+                <a:cs typeface="Arial" pitchFamily="34" charset="-120"/>
+              </a:rPr>
+              <a:t>L'offre</a:t>
+            </a:r>
+            <a:endParaRPr lang="en-US" sz="1000" dirty="0"/>
+          </a:p>
+        </p:txBody>
+      </p:sp>
+      <p:sp>
+        <p:nvSpPr>
+          <p:cNvPr id="5" name="Shape 2"/>
+          <p:cNvSpPr/>
+          <p:nvPr/>
+        </p:nvSpPr>
+        <p:spPr>
+          <a:xfrm>
+            <a:off x="731520" y="877824"/>
+            <a:ext cx="10725912" cy="25603"/>
+          </a:xfrm>
+          <a:prstGeom prst="rect">
+            <a:avLst/>
+          </a:prstGeom>
+          <a:solidFill>
+            <a:srgbClr val="38C9FF"/>
+          </a:solidFill>
+          <a:ln w="12700">
+            <a:solidFill>
+              <a:srgbClr val="38C9FF"/>
+            </a:solidFill>
+            <a:prstDash val="solid"/>
+          </a:ln>
+        </p:spPr>
+      </p:sp>
+      <p:sp>
+        <p:nvSpPr>
+          <p:cNvPr id="6" name="Text 3"/>
+          <p:cNvSpPr/>
+          <p:nvPr/>
+        </p:nvSpPr>
+        <p:spPr>
+          <a:xfrm>
+            <a:off x="731520" y="1188720"/>
+            <a:ext cx="10725912" cy="822960"/>
+          </a:xfrm>
+          <a:prstGeom prst="rect">
+            <a:avLst/>
+          </a:prstGeom>
+          <a:noFill/>
+          <a:ln/>
+        </p:spPr>
+        <p:txBody>
+          <a:bodyPr wrap="square" lIns="0" tIns="0" rIns="0" bIns="0" rtlCol="0" anchor="t"/>
+          <a:lstStyle/>
+          <a:p>
+            <a:pPr indent="0" marL="0">
+              <a:lnSpc>
+                <a:spcPct val="105000"/>
+              </a:lnSpc>
+              <a:buNone/>
+            </a:pPr>
+            <a:r>
+              <a:rPr lang="en-US" sz="2600" b="1" dirty="0">
+                <a:solidFill>
+                  <a:srgbClr val="4636B0"/>
+                </a:solidFill>
+                <a:latin typeface="Arial" pitchFamily="34" charset="0"/>
+                <a:ea typeface="Arial" pitchFamily="34" charset="-122"/>
+                <a:cs typeface="Arial" pitchFamily="34" charset="-120"/>
+              </a:rPr>
+              <a:t>Une licence par magasin, inventaires illimités</a:t>
+            </a:r>
+            <a:endParaRPr lang="en-US" sz="2600" dirty="0"/>
+          </a:p>
+        </p:txBody>
+      </p:sp>
+      <p:sp>
+        <p:nvSpPr>
+          <p:cNvPr id="7" name="Text 4"/>
+          <p:cNvSpPr/>
+          <p:nvPr/>
+        </p:nvSpPr>
+        <p:spPr>
+          <a:xfrm>
+            <a:off x="731520" y="1783080"/>
+            <a:ext cx="10725912" cy="457200"/>
+          </a:xfrm>
+          <a:prstGeom prst="rect">
+            <a:avLst/>
+          </a:prstGeom>
+          <a:noFill/>
+          <a:ln/>
+        </p:spPr>
+        <p:txBody>
+          <a:bodyPr wrap="square" lIns="0" tIns="0" rIns="0" bIns="0" rtlCol="0" anchor="t"/>
+          <a:lstStyle/>
+          <a:p>
+            <a:pPr algn="l" indent="0" marL="0">
+              <a:lnSpc>
+                <a:spcPct val="118000"/>
+              </a:lnSpc>
+              <a:buNone/>
+            </a:pPr>
+            <a:r>
+              <a:rPr lang="en-US" sz="1150" dirty="0">
+                <a:solidFill>
+                  <a:srgbClr val="5B6475"/>
+                </a:solidFill>
+                <a:latin typeface="Arial" pitchFamily="34" charset="0"/>
+                <a:ea typeface="Arial" pitchFamily="34" charset="-122"/>
+                <a:cs typeface="Arial" pitchFamily="34" charset="-120"/>
+              </a:rPr>
+              <a:t>Le prix suit le nombre d'appareils qui comptent en même temps dans le magasin — la seule chose que vous puissiez vérifier vous-même. Ni le volume de votre stock, ni le nombre de comptes, ni le nombre d'inventaires dans l'année.</a:t>
+            </a:r>
+            <a:endParaRPr lang="en-US" sz="1150" dirty="0"/>
+          </a:p>
+        </p:txBody>
+      </p:sp>
+      <p:sp>
+        <p:nvSpPr>
+          <p:cNvPr id="8" name="Shape 5"/>
+          <p:cNvSpPr/>
+          <p:nvPr/>
+        </p:nvSpPr>
+        <p:spPr>
+          <a:xfrm>
+            <a:off x="731520" y="2331720"/>
+            <a:ext cx="3404616" cy="2743200"/>
+          </a:xfrm>
+          <a:prstGeom prst="roundRect">
+            <a:avLst>
+              <a:gd name="adj" fmla="val 4000"/>
+            </a:avLst>
+          </a:prstGeom>
+          <a:solidFill>
+            <a:srgbClr val="FFFFFF"/>
+          </a:solidFill>
+          <a:ln w="12700">
+            <a:solidFill>
+              <a:srgbClr val="E3E6EE"/>
+            </a:solidFill>
+            <a:prstDash val="solid"/>
+          </a:ln>
+        </p:spPr>
+      </p:sp>
+      <p:sp>
+        <p:nvSpPr>
+          <p:cNvPr id="9" name="Text 6"/>
+          <p:cNvSpPr/>
+          <p:nvPr/>
+        </p:nvSpPr>
+        <p:spPr>
+          <a:xfrm>
+            <a:off x="987552" y="2825496"/>
+            <a:ext cx="2892552" cy="347472"/>
+          </a:xfrm>
+          <a:prstGeom prst="rect">
+            <a:avLst/>
+          </a:prstGeom>
+          <a:noFill/>
+          <a:ln/>
+        </p:spPr>
+        <p:txBody>
+          <a:bodyPr wrap="square" lIns="0" tIns="0" rIns="0" bIns="0" rtlCol="0" anchor="t"/>
+          <a:lstStyle/>
+          <a:p>
+            <a:pPr indent="0" marL="0">
+              <a:buNone/>
+            </a:pPr>
+            <a:r>
+              <a:rPr lang="en-US" sz="1800" b="1" dirty="0">
+                <a:solidFill>
+                  <a:srgbClr val="0B0F19"/>
+                </a:solidFill>
+                <a:latin typeface="Arial" pitchFamily="34" charset="0"/>
+                <a:ea typeface="Arial" pitchFamily="34" charset="-122"/>
+                <a:cs typeface="Arial" pitchFamily="34" charset="-120"/>
+              </a:rPr>
+              <a:t>Essential</a:t>
+            </a:r>
+            <a:endParaRPr lang="en-US" sz="1800" dirty="0"/>
+          </a:p>
+        </p:txBody>
+      </p:sp>
+      <p:sp>
+        <p:nvSpPr>
+          <p:cNvPr id="10" name="Text 7"/>
+          <p:cNvSpPr/>
+          <p:nvPr/>
+        </p:nvSpPr>
+        <p:spPr>
+          <a:xfrm>
+            <a:off x="987552" y="3227832"/>
+            <a:ext cx="2892552" cy="256032"/>
+          </a:xfrm>
+          <a:prstGeom prst="rect">
+            <a:avLst/>
+          </a:prstGeom>
+          <a:noFill/>
+          <a:ln/>
+        </p:spPr>
+        <p:txBody>
+          <a:bodyPr wrap="square" lIns="0" tIns="0" rIns="0" bIns="0" rtlCol="0" anchor="t"/>
+          <a:lstStyle/>
+          <a:p>
+            <a:pPr indent="0" marL="0">
+              <a:buNone/>
+            </a:pPr>
+            <a:r>
+              <a:rPr lang="en-US" sz="1100" b="1" dirty="0">
+                <a:solidFill>
+                  <a:srgbClr val="6366F1"/>
+                </a:solidFill>
+                <a:latin typeface="Arial" pitchFamily="34" charset="0"/>
+                <a:ea typeface="Arial" pitchFamily="34" charset="-122"/>
+                <a:cs typeface="Arial" pitchFamily="34" charset="-120"/>
+              </a:rPr>
+              <a:t>2 appareils</a:t>
+            </a:r>
+            <a:endParaRPr lang="en-US" sz="1100" dirty="0"/>
+          </a:p>
+        </p:txBody>
+      </p:sp>
+      <p:sp>
+        <p:nvSpPr>
+          <p:cNvPr id="11" name="Text 8"/>
+          <p:cNvSpPr/>
+          <p:nvPr/>
+        </p:nvSpPr>
+        <p:spPr>
+          <a:xfrm>
+            <a:off x="987552" y="3538728"/>
+            <a:ext cx="2892552" cy="457200"/>
+          </a:xfrm>
+          <a:prstGeom prst="rect">
+            <a:avLst/>
+          </a:prstGeom>
+          <a:noFill/>
+          <a:ln/>
+        </p:spPr>
+        <p:txBody>
+          <a:bodyPr wrap="square" lIns="0" tIns="0" rIns="0" bIns="0" rtlCol="0" anchor="t"/>
+          <a:lstStyle/>
+          <a:p>
+            <a:pPr indent="0" marL="0">
+              <a:lnSpc>
+                <a:spcPct val="112000"/>
+              </a:lnSpc>
+              <a:buNone/>
+            </a:pPr>
+            <a:r>
+              <a:rPr lang="en-US" sz="1000" dirty="0">
+                <a:solidFill>
+                  <a:srgbClr val="5B6475"/>
+                </a:solidFill>
+                <a:latin typeface="Arial" pitchFamily="34" charset="0"/>
+                <a:ea typeface="Arial" pitchFamily="34" charset="-122"/>
+                <a:cs typeface="Arial" pitchFamily="34" charset="-120"/>
+              </a:rPr>
+              <a:t>Vous comptez seul ou à deux, dans un magasin.</a:t>
+            </a:r>
+            <a:endParaRPr lang="en-US" sz="1000" dirty="0"/>
+          </a:p>
+        </p:txBody>
+      </p:sp>
+      <p:sp>
+        <p:nvSpPr>
+          <p:cNvPr id="12" name="Text 9"/>
+          <p:cNvSpPr/>
+          <p:nvPr/>
+        </p:nvSpPr>
+        <p:spPr>
+          <a:xfrm>
+            <a:off x="987552" y="4050792"/>
+            <a:ext cx="2892552" cy="457200"/>
+          </a:xfrm>
+          <a:prstGeom prst="rect">
+            <a:avLst/>
+          </a:prstGeom>
+          <a:noFill/>
+          <a:ln/>
+        </p:spPr>
+        <p:txBody>
+          <a:bodyPr wrap="square" lIns="0" tIns="0" rIns="0" bIns="0" rtlCol="0" anchor="b"/>
+          <a:lstStyle/>
+          <a:p>
+            <a:pPr indent="0" marL="0">
+              <a:buNone/>
+            </a:pPr>
+            <a:r>
+              <a:rPr lang="en-US" sz="2600" b="1" dirty="0">
+                <a:solidFill>
+                  <a:srgbClr val="4636B0"/>
+                </a:solidFill>
+                <a:latin typeface="Arial" pitchFamily="34" charset="0"/>
+                <a:ea typeface="Arial" pitchFamily="34" charset="-122"/>
+                <a:cs typeface="Arial" pitchFamily="34" charset="-120"/>
+              </a:rPr>
+              <a:t>89 €</a:t>
+            </a:r>
+            <a:pPr indent="0" marL="0">
+              <a:buNone/>
+            </a:pPr>
+            <a:r>
+              <a:rPr lang="en-US" sz="1050" dirty="0">
+                <a:solidFill>
+                  <a:srgbClr val="5B6475"/>
+                </a:solidFill>
+                <a:latin typeface="Arial" pitchFamily="34" charset="0"/>
+                <a:ea typeface="Arial" pitchFamily="34" charset="-122"/>
+                <a:cs typeface="Arial" pitchFamily="34" charset="-120"/>
+              </a:rPr>
+              <a:t>  HT / mois</a:t>
+            </a:r>
+            <a:endParaRPr lang="en-US" sz="2600" dirty="0"/>
+          </a:p>
+        </p:txBody>
+      </p:sp>
+      <p:sp>
+        <p:nvSpPr>
+          <p:cNvPr id="13" name="Text 10"/>
+          <p:cNvSpPr/>
+          <p:nvPr/>
+        </p:nvSpPr>
+        <p:spPr>
+          <a:xfrm>
+            <a:off x="987552" y="4507992"/>
+            <a:ext cx="2892552" cy="274320"/>
+          </a:xfrm>
+          <a:prstGeom prst="rect">
+            <a:avLst/>
+          </a:prstGeom>
+          <a:noFill/>
+          <a:ln/>
+        </p:spPr>
+        <p:txBody>
+          <a:bodyPr wrap="square" lIns="0" tIns="0" rIns="0" bIns="0" rtlCol="0" anchor="t"/>
+          <a:lstStyle/>
+          <a:p>
+            <a:pPr indent="0" marL="0">
+              <a:buNone/>
+            </a:pPr>
+            <a:r>
+              <a:rPr lang="en-US" sz="950" dirty="0">
+                <a:solidFill>
+                  <a:srgbClr val="1F7A5C"/>
+                </a:solidFill>
+                <a:latin typeface="Arial" pitchFamily="34" charset="0"/>
+                <a:ea typeface="Arial" pitchFamily="34" charset="-122"/>
+                <a:cs typeface="Arial" pitchFamily="34" charset="-120"/>
+              </a:rPr>
+              <a:t>ou 950 € à l’année — 118 € de moins</a:t>
+            </a:r>
+            <a:endParaRPr lang="en-US" sz="950" dirty="0"/>
+          </a:p>
+        </p:txBody>
+      </p:sp>
+      <p:sp>
+        <p:nvSpPr>
+          <p:cNvPr id="14" name="Shape 11"/>
+          <p:cNvSpPr/>
+          <p:nvPr/>
+        </p:nvSpPr>
+        <p:spPr>
+          <a:xfrm>
+            <a:off x="4392168" y="2331720"/>
+            <a:ext cx="3404616" cy="2743200"/>
+          </a:xfrm>
+          <a:prstGeom prst="roundRect">
+            <a:avLst>
+              <a:gd name="adj" fmla="val 4000"/>
+            </a:avLst>
+          </a:prstGeom>
+          <a:solidFill>
+            <a:srgbClr val="EEEEFC"/>
+          </a:solidFill>
+          <a:ln w="19050">
+            <a:solidFill>
+              <a:srgbClr val="6366F1"/>
+            </a:solidFill>
+            <a:prstDash val="solid"/>
+          </a:ln>
+        </p:spPr>
+      </p:sp>
+      <p:sp>
+        <p:nvSpPr>
+          <p:cNvPr id="15" name="Text 12"/>
+          <p:cNvSpPr/>
+          <p:nvPr/>
+        </p:nvSpPr>
+        <p:spPr>
+          <a:xfrm>
+            <a:off x="4648200" y="2532888"/>
+            <a:ext cx="2892552" cy="219456"/>
+          </a:xfrm>
+          <a:prstGeom prst="rect">
+            <a:avLst/>
+          </a:prstGeom>
+          <a:noFill/>
+          <a:ln/>
+        </p:spPr>
+        <p:txBody>
+          <a:bodyPr wrap="square" lIns="0" tIns="0" rIns="0" bIns="0" rtlCol="0" anchor="t"/>
+          <a:lstStyle/>
+          <a:p>
+            <a:pPr indent="0" marL="0">
+              <a:buNone/>
+            </a:pPr>
+            <a:r>
+              <a:rPr lang="en-US" sz="800" b="1" spc="60" kern="0" dirty="0">
+                <a:solidFill>
+                  <a:srgbClr val="6366F1"/>
+                </a:solidFill>
+                <a:latin typeface="Arial" pitchFamily="34" charset="0"/>
+                <a:ea typeface="Arial" pitchFamily="34" charset="-122"/>
+                <a:cs typeface="Arial" pitchFamily="34" charset="-120"/>
+              </a:rPr>
+              <a:t>LE PLUS COURANT</a:t>
+            </a:r>
+            <a:endParaRPr lang="en-US" sz="800" dirty="0"/>
+          </a:p>
+        </p:txBody>
+      </p:sp>
+      <p:sp>
+        <p:nvSpPr>
+          <p:cNvPr id="16" name="Text 13"/>
+          <p:cNvSpPr/>
+          <p:nvPr/>
+        </p:nvSpPr>
+        <p:spPr>
+          <a:xfrm>
+            <a:off x="4648200" y="2825496"/>
+            <a:ext cx="2892552" cy="347472"/>
+          </a:xfrm>
+          <a:prstGeom prst="rect">
+            <a:avLst/>
+          </a:prstGeom>
+          <a:noFill/>
+          <a:ln/>
+        </p:spPr>
+        <p:txBody>
+          <a:bodyPr wrap="square" lIns="0" tIns="0" rIns="0" bIns="0" rtlCol="0" anchor="t"/>
+          <a:lstStyle/>
+          <a:p>
+            <a:pPr indent="0" marL="0">
+              <a:buNone/>
+            </a:pPr>
+            <a:r>
+              <a:rPr lang="en-US" sz="1800" b="1" dirty="0">
+                <a:solidFill>
+                  <a:srgbClr val="0B0F19"/>
+                </a:solidFill>
+                <a:latin typeface="Arial" pitchFamily="34" charset="0"/>
+                <a:ea typeface="Arial" pitchFamily="34" charset="-122"/>
+                <a:cs typeface="Arial" pitchFamily="34" charset="-120"/>
+              </a:rPr>
+              <a:t>Advanced</a:t>
+            </a:r>
+            <a:endParaRPr lang="en-US" sz="1800" dirty="0"/>
+          </a:p>
+        </p:txBody>
+      </p:sp>
+      <p:sp>
+        <p:nvSpPr>
+          <p:cNvPr id="17" name="Text 14"/>
+          <p:cNvSpPr/>
+          <p:nvPr/>
+        </p:nvSpPr>
+        <p:spPr>
+          <a:xfrm>
+            <a:off x="4648200" y="3227832"/>
+            <a:ext cx="2892552" cy="256032"/>
+          </a:xfrm>
+          <a:prstGeom prst="rect">
+            <a:avLst/>
+          </a:prstGeom>
+          <a:noFill/>
+          <a:ln/>
+        </p:spPr>
+        <p:txBody>
+          <a:bodyPr wrap="square" lIns="0" tIns="0" rIns="0" bIns="0" rtlCol="0" anchor="t"/>
+          <a:lstStyle/>
+          <a:p>
+            <a:pPr indent="0" marL="0">
+              <a:buNone/>
+            </a:pPr>
+            <a:r>
+              <a:rPr lang="en-US" sz="1100" b="1" dirty="0">
+                <a:solidFill>
+                  <a:srgbClr val="6366F1"/>
+                </a:solidFill>
+                <a:latin typeface="Arial" pitchFamily="34" charset="0"/>
+                <a:ea typeface="Arial" pitchFamily="34" charset="-122"/>
+                <a:cs typeface="Arial" pitchFamily="34" charset="-120"/>
+              </a:rPr>
+              <a:t>3 à 20 appareils</a:t>
+            </a:r>
+            <a:endParaRPr lang="en-US" sz="1100" dirty="0"/>
+          </a:p>
+        </p:txBody>
+      </p:sp>
+      <p:sp>
+        <p:nvSpPr>
+          <p:cNvPr id="18" name="Text 15"/>
+          <p:cNvSpPr/>
+          <p:nvPr/>
+        </p:nvSpPr>
+        <p:spPr>
+          <a:xfrm>
+            <a:off x="4648200" y="3538728"/>
+            <a:ext cx="2892552" cy="457200"/>
+          </a:xfrm>
+          <a:prstGeom prst="rect">
+            <a:avLst/>
+          </a:prstGeom>
+          <a:noFill/>
+          <a:ln/>
+        </p:spPr>
+        <p:txBody>
+          <a:bodyPr wrap="square" lIns="0" tIns="0" rIns="0" bIns="0" rtlCol="0" anchor="t"/>
+          <a:lstStyle/>
+          <a:p>
+            <a:pPr indent="0" marL="0">
+              <a:lnSpc>
+                <a:spcPct val="112000"/>
+              </a:lnSpc>
+              <a:buNone/>
+            </a:pPr>
+            <a:r>
+              <a:rPr lang="en-US" sz="1000" dirty="0">
+                <a:solidFill>
+                  <a:srgbClr val="5B6475"/>
+                </a:solidFill>
+                <a:latin typeface="Arial" pitchFamily="34" charset="0"/>
+                <a:ea typeface="Arial" pitchFamily="34" charset="-122"/>
+                <a:cs typeface="Arial" pitchFamily="34" charset="-120"/>
+              </a:rPr>
+              <a:t>Vous montez une équipe le jour de l’inventaire.</a:t>
+            </a:r>
+            <a:endParaRPr lang="en-US" sz="1000" dirty="0"/>
+          </a:p>
+        </p:txBody>
+      </p:sp>
+      <p:sp>
+        <p:nvSpPr>
+          <p:cNvPr id="19" name="Text 16"/>
+          <p:cNvSpPr/>
+          <p:nvPr/>
+        </p:nvSpPr>
+        <p:spPr>
+          <a:xfrm>
+            <a:off x="4648200" y="4050792"/>
+            <a:ext cx="2892552" cy="457200"/>
+          </a:xfrm>
+          <a:prstGeom prst="rect">
+            <a:avLst/>
+          </a:prstGeom>
+          <a:noFill/>
+          <a:ln/>
+        </p:spPr>
+        <p:txBody>
+          <a:bodyPr wrap="square" lIns="0" tIns="0" rIns="0" bIns="0" rtlCol="0" anchor="b"/>
+          <a:lstStyle/>
+          <a:p>
+            <a:pPr indent="0" marL="0">
+              <a:buNone/>
+            </a:pPr>
+            <a:r>
+              <a:rPr lang="en-US" sz="2600" b="1" dirty="0">
+                <a:solidFill>
+                  <a:srgbClr val="4636B0"/>
+                </a:solidFill>
+                <a:latin typeface="Arial" pitchFamily="34" charset="0"/>
+                <a:ea typeface="Arial" pitchFamily="34" charset="-122"/>
+                <a:cs typeface="Arial" pitchFamily="34" charset="-120"/>
+              </a:rPr>
+              <a:t>310 €</a:t>
+            </a:r>
+            <a:pPr indent="0" marL="0">
+              <a:buNone/>
+            </a:pPr>
+            <a:r>
+              <a:rPr lang="en-US" sz="1050" dirty="0">
+                <a:solidFill>
+                  <a:srgbClr val="5B6475"/>
+                </a:solidFill>
+                <a:latin typeface="Arial" pitchFamily="34" charset="0"/>
+                <a:ea typeface="Arial" pitchFamily="34" charset="-122"/>
+                <a:cs typeface="Arial" pitchFamily="34" charset="-120"/>
+              </a:rPr>
+              <a:t>  HT / mois</a:t>
+            </a:r>
+            <a:endParaRPr lang="en-US" sz="2600" dirty="0"/>
+          </a:p>
+        </p:txBody>
+      </p:sp>
+      <p:sp>
+        <p:nvSpPr>
+          <p:cNvPr id="20" name="Text 17"/>
+          <p:cNvSpPr/>
+          <p:nvPr/>
+        </p:nvSpPr>
+        <p:spPr>
+          <a:xfrm>
+            <a:off x="4648200" y="4507992"/>
+            <a:ext cx="2892552" cy="274320"/>
+          </a:xfrm>
+          <a:prstGeom prst="rect">
+            <a:avLst/>
+          </a:prstGeom>
+          <a:noFill/>
+          <a:ln/>
+        </p:spPr>
+        <p:txBody>
+          <a:bodyPr wrap="square" lIns="0" tIns="0" rIns="0" bIns="0" rtlCol="0" anchor="t"/>
+          <a:lstStyle/>
+          <a:p>
+            <a:pPr indent="0" marL="0">
+              <a:buNone/>
+            </a:pPr>
+            <a:r>
+              <a:rPr lang="en-US" sz="950" dirty="0">
+                <a:solidFill>
+                  <a:srgbClr val="1F7A5C"/>
+                </a:solidFill>
+                <a:latin typeface="Arial" pitchFamily="34" charset="0"/>
+                <a:ea typeface="Arial" pitchFamily="34" charset="-122"/>
+                <a:cs typeface="Arial" pitchFamily="34" charset="-120"/>
+              </a:rPr>
+              <a:t>ou 3 300 € à l’année — 420 € de moins</a:t>
+            </a:r>
+            <a:endParaRPr lang="en-US" sz="950" dirty="0"/>
+          </a:p>
+        </p:txBody>
+      </p:sp>
+      <p:sp>
+        <p:nvSpPr>
+          <p:cNvPr id="21" name="Shape 18"/>
+          <p:cNvSpPr/>
+          <p:nvPr/>
+        </p:nvSpPr>
+        <p:spPr>
+          <a:xfrm>
+            <a:off x="8052816" y="2331720"/>
+            <a:ext cx="3404616" cy="2743200"/>
+          </a:xfrm>
+          <a:prstGeom prst="roundRect">
+            <a:avLst>
+              <a:gd name="adj" fmla="val 4000"/>
+            </a:avLst>
+          </a:prstGeom>
+          <a:solidFill>
+            <a:srgbClr val="FFFFFF"/>
+          </a:solidFill>
+          <a:ln w="12700">
+            <a:solidFill>
+              <a:srgbClr val="E3E6EE"/>
+            </a:solidFill>
+            <a:prstDash val="solid"/>
+          </a:ln>
+        </p:spPr>
+      </p:sp>
+      <p:sp>
+        <p:nvSpPr>
+          <p:cNvPr id="22" name="Text 19"/>
+          <p:cNvSpPr/>
+          <p:nvPr/>
+        </p:nvSpPr>
+        <p:spPr>
+          <a:xfrm>
+            <a:off x="8308848" y="2825496"/>
+            <a:ext cx="2892552" cy="347472"/>
+          </a:xfrm>
+          <a:prstGeom prst="rect">
+            <a:avLst/>
+          </a:prstGeom>
+          <a:noFill/>
+          <a:ln/>
+        </p:spPr>
+        <p:txBody>
+          <a:bodyPr wrap="square" lIns="0" tIns="0" rIns="0" bIns="0" rtlCol="0" anchor="t"/>
+          <a:lstStyle/>
+          <a:p>
+            <a:pPr indent="0" marL="0">
+              <a:buNone/>
+            </a:pPr>
+            <a:r>
+              <a:rPr lang="en-US" sz="1800" b="1" dirty="0">
+                <a:solidFill>
+                  <a:srgbClr val="0B0F19"/>
+                </a:solidFill>
+                <a:latin typeface="Arial" pitchFamily="34" charset="0"/>
+                <a:ea typeface="Arial" pitchFamily="34" charset="-122"/>
+                <a:cs typeface="Arial" pitchFamily="34" charset="-120"/>
+              </a:rPr>
+              <a:t>Enterprise</a:t>
+            </a:r>
+            <a:endParaRPr lang="en-US" sz="1800" dirty="0"/>
+          </a:p>
+        </p:txBody>
+      </p:sp>
+      <p:sp>
+        <p:nvSpPr>
+          <p:cNvPr id="23" name="Text 20"/>
+          <p:cNvSpPr/>
+          <p:nvPr/>
+        </p:nvSpPr>
+        <p:spPr>
+          <a:xfrm>
+            <a:off x="8308848" y="3227832"/>
+            <a:ext cx="2892552" cy="256032"/>
+          </a:xfrm>
+          <a:prstGeom prst="rect">
+            <a:avLst/>
+          </a:prstGeom>
+          <a:noFill/>
+          <a:ln/>
+        </p:spPr>
+        <p:txBody>
+          <a:bodyPr wrap="square" lIns="0" tIns="0" rIns="0" bIns="0" rtlCol="0" anchor="t"/>
+          <a:lstStyle/>
+          <a:p>
+            <a:pPr indent="0" marL="0">
+              <a:buNone/>
+            </a:pPr>
+            <a:r>
+              <a:rPr lang="en-US" sz="1100" b="1" dirty="0">
+                <a:solidFill>
+                  <a:srgbClr val="6366F1"/>
+                </a:solidFill>
+                <a:latin typeface="Arial" pitchFamily="34" charset="0"/>
+                <a:ea typeface="Arial" pitchFamily="34" charset="-122"/>
+                <a:cs typeface="Arial" pitchFamily="34" charset="-120"/>
+              </a:rPr>
+              <a:t>21 à 100 appareils</a:t>
+            </a:r>
+            <a:endParaRPr lang="en-US" sz="1100" dirty="0"/>
+          </a:p>
+        </p:txBody>
+      </p:sp>
+      <p:sp>
+        <p:nvSpPr>
+          <p:cNvPr id="24" name="Text 21"/>
+          <p:cNvSpPr/>
+          <p:nvPr/>
+        </p:nvSpPr>
+        <p:spPr>
+          <a:xfrm>
+            <a:off x="8308848" y="3538728"/>
+            <a:ext cx="2892552" cy="457200"/>
+          </a:xfrm>
+          <a:prstGeom prst="rect">
+            <a:avLst/>
+          </a:prstGeom>
+          <a:noFill/>
+          <a:ln/>
+        </p:spPr>
+        <p:txBody>
+          <a:bodyPr wrap="square" lIns="0" tIns="0" rIns="0" bIns="0" rtlCol="0" anchor="t"/>
+          <a:lstStyle/>
+          <a:p>
+            <a:pPr indent="0" marL="0">
+              <a:lnSpc>
+                <a:spcPct val="112000"/>
+              </a:lnSpc>
+              <a:buNone/>
+            </a:pPr>
+            <a:r>
+              <a:rPr lang="en-US" sz="1000" dirty="0">
+                <a:solidFill>
+                  <a:srgbClr val="5B6475"/>
+                </a:solidFill>
+                <a:latin typeface="Arial" pitchFamily="34" charset="0"/>
+                <a:ea typeface="Arial" pitchFamily="34" charset="-122"/>
+                <a:cs typeface="Arial" pitchFamily="34" charset="-120"/>
+              </a:rPr>
+              <a:t>La grande surface, qui mobilise une équipe entière.</a:t>
+            </a:r>
+            <a:endParaRPr lang="en-US" sz="1000" dirty="0"/>
+          </a:p>
+        </p:txBody>
+      </p:sp>
+      <p:sp>
+        <p:nvSpPr>
+          <p:cNvPr id="25" name="Text 22"/>
+          <p:cNvSpPr/>
+          <p:nvPr/>
+        </p:nvSpPr>
+        <p:spPr>
+          <a:xfrm>
+            <a:off x="8308848" y="4050792"/>
+            <a:ext cx="2892552" cy="457200"/>
+          </a:xfrm>
+          <a:prstGeom prst="rect">
+            <a:avLst/>
+          </a:prstGeom>
+          <a:noFill/>
+          <a:ln/>
+        </p:spPr>
+        <p:txBody>
+          <a:bodyPr wrap="square" lIns="0" tIns="0" rIns="0" bIns="0" rtlCol="0" anchor="b"/>
+          <a:lstStyle/>
+          <a:p>
+            <a:pPr indent="0" marL="0">
+              <a:buNone/>
+            </a:pPr>
+            <a:r>
+              <a:rPr lang="en-US" sz="2600" b="1" dirty="0">
+                <a:solidFill>
+                  <a:srgbClr val="4636B0"/>
+                </a:solidFill>
+                <a:latin typeface="Arial" pitchFamily="34" charset="0"/>
+                <a:ea typeface="Arial" pitchFamily="34" charset="-122"/>
+                <a:cs typeface="Arial" pitchFamily="34" charset="-120"/>
+              </a:rPr>
+              <a:t>890 €</a:t>
+            </a:r>
+            <a:pPr indent="0" marL="0">
+              <a:buNone/>
+            </a:pPr>
+            <a:r>
+              <a:rPr lang="en-US" sz="1050" dirty="0">
+                <a:solidFill>
+                  <a:srgbClr val="5B6475"/>
+                </a:solidFill>
+                <a:latin typeface="Arial" pitchFamily="34" charset="0"/>
+                <a:ea typeface="Arial" pitchFamily="34" charset="-122"/>
+                <a:cs typeface="Arial" pitchFamily="34" charset="-120"/>
+              </a:rPr>
+              <a:t>  HT / mois</a:t>
+            </a:r>
+            <a:endParaRPr lang="en-US" sz="2600" dirty="0"/>
+          </a:p>
+        </p:txBody>
+      </p:sp>
+      <p:sp>
+        <p:nvSpPr>
+          <p:cNvPr id="26" name="Text 23"/>
+          <p:cNvSpPr/>
+          <p:nvPr/>
+        </p:nvSpPr>
+        <p:spPr>
+          <a:xfrm>
+            <a:off x="8308848" y="4507992"/>
+            <a:ext cx="2892552" cy="274320"/>
+          </a:xfrm>
+          <a:prstGeom prst="rect">
+            <a:avLst/>
+          </a:prstGeom>
+          <a:noFill/>
+          <a:ln/>
+        </p:spPr>
+        <p:txBody>
+          <a:bodyPr wrap="square" lIns="0" tIns="0" rIns="0" bIns="0" rtlCol="0" anchor="t"/>
+          <a:lstStyle/>
+          <a:p>
+            <a:pPr indent="0" marL="0">
+              <a:buNone/>
+            </a:pPr>
+            <a:r>
+              <a:rPr lang="en-US" sz="950" dirty="0">
+                <a:solidFill>
+                  <a:srgbClr val="1F7A5C"/>
+                </a:solidFill>
+                <a:latin typeface="Arial" pitchFamily="34" charset="0"/>
+                <a:ea typeface="Arial" pitchFamily="34" charset="-122"/>
+                <a:cs typeface="Arial" pitchFamily="34" charset="-120"/>
+              </a:rPr>
+              <a:t>ou 9 450 € à l’année — 1 230 € de moins</a:t>
+            </a:r>
+            <a:endParaRPr lang="en-US" sz="950" dirty="0"/>
+          </a:p>
+        </p:txBody>
+      </p:sp>
+      <p:sp>
+        <p:nvSpPr>
+          <p:cNvPr id="27" name="Text 24"/>
+          <p:cNvSpPr/>
+          <p:nvPr/>
+        </p:nvSpPr>
+        <p:spPr>
+          <a:xfrm>
+            <a:off x="731520" y="5257800"/>
+            <a:ext cx="10725912" cy="914400"/>
+          </a:xfrm>
+          <a:prstGeom prst="rect">
+            <a:avLst/>
+          </a:prstGeom>
+          <a:noFill/>
+          <a:ln/>
+        </p:spPr>
+        <p:txBody>
+          <a:bodyPr wrap="square" lIns="0" tIns="0" rIns="0" bIns="0" rtlCol="0" anchor="t"/>
+          <a:lstStyle/>
+          <a:p>
+            <a:pPr indent="0" marL="0">
+              <a:lnSpc>
+                <a:spcPct val="118000"/>
+              </a:lnSpc>
+              <a:spcAft>
+                <a:spcPts val="900"/>
+              </a:spcAft>
+              <a:buNone/>
+            </a:pPr>
+            <a:r>
+              <a:rPr lang="en-US" sz="1200" b="1" dirty="0">
+                <a:solidFill>
+                  <a:srgbClr val="0B0F19"/>
+                </a:solidFill>
+                <a:latin typeface="Arial" pitchFamily="34" charset="0"/>
+                <a:ea typeface="Arial" pitchFamily="34" charset="-122"/>
+                <a:cs typeface="Arial" pitchFamily="34" charset="-120"/>
+              </a:rPr>
+              <a:t>Ce que ça change pour l'inventaire tournant. </a:t>
+            </a:r>
+            <a:pPr indent="0" marL="0">
+              <a:lnSpc>
+                <a:spcPct val="118000"/>
+              </a:lnSpc>
+              <a:spcAft>
+                <a:spcPts val="900"/>
+              </a:spcAft>
+              <a:buNone/>
+            </a:pPr>
+            <a:r>
+              <a:rPr lang="en-US" sz="1200" dirty="0">
+                <a:solidFill>
+                  <a:srgbClr val="3D4556"/>
+                </a:solidFill>
+                <a:latin typeface="Arial" pitchFamily="34" charset="0"/>
+                <a:ea typeface="Arial" pitchFamily="34" charset="-122"/>
+                <a:cs typeface="Arial" pitchFamily="34" charset="-120"/>
+              </a:rPr>
+              <a:t>À l'intérieur d'un palier, compter davantage ne coûte rien : un chef d'équipe qui décide de compter son rayon un mardi matin n'a aucun budget à demander. C'est ce qui rend le transfert au floor tenable dans la durée. L'application, le tableau de bord, les rapports et les mises à jour sont compris.</a:t>
+            </a:r>
+            <a:endParaRPr lang="en-US" sz="1200" dirty="0"/>
+          </a:p>
+        </p:txBody>
+      </p:sp>
+      <p:sp>
+        <p:nvSpPr>
+          <p:cNvPr id="28" name="Text 25"/>
+          <p:cNvSpPr/>
+          <p:nvPr/>
+        </p:nvSpPr>
+        <p:spPr>
+          <a:xfrm>
+            <a:off x="731520" y="6400800"/>
+            <a:ext cx="6400800" cy="274320"/>
+          </a:xfrm>
+          <a:prstGeom prst="rect">
+            <a:avLst/>
+          </a:prstGeom>
+          <a:noFill/>
+          <a:ln/>
+        </p:spPr>
+        <p:txBody>
+          <a:bodyPr wrap="square" lIns="0" tIns="0" rIns="0" bIns="0" rtlCol="0" anchor="t"/>
+          <a:lstStyle/>
+          <a:p>
+            <a:pPr indent="0" marL="0">
+              <a:buNone/>
+            </a:pPr>
+            <a:r>
+              <a:rPr lang="en-US" sz="900" dirty="0">
+                <a:solidFill>
+                  <a:srgbClr val="5B6475"/>
+                </a:solidFill>
+                <a:latin typeface="Arial" pitchFamily="34" charset="0"/>
+                <a:ea typeface="Arial" pitchFamily="34" charset="-122"/>
+                <a:cs typeface="Arial" pitchFamily="34" charset="-120"/>
+              </a:rPr>
+              <a:t>Quantinvo · proposition pour La Samaritaine</a:t>
+            </a:r>
+            <a:endParaRPr lang="en-US" sz="900" dirty="0"/>
+          </a:p>
+        </p:txBody>
+      </p:sp>
+      <p:sp>
+        <p:nvSpPr>
+          <p:cNvPr id="29" name="Text 26"/>
+          <p:cNvSpPr/>
+          <p:nvPr/>
+        </p:nvSpPr>
+        <p:spPr>
+          <a:xfrm>
+            <a:off x="11000232" y="6400800"/>
+            <a:ext cx="457200" cy="274320"/>
+          </a:xfrm>
+          <a:prstGeom prst="rect">
+            <a:avLst/>
+          </a:prstGeom>
+          <a:noFill/>
+          <a:ln/>
+        </p:spPr>
+        <p:txBody>
+          <a:bodyPr wrap="square" lIns="0" tIns="0" rIns="0" bIns="0" rtlCol="0" anchor="t"/>
+          <a:lstStyle/>
+          <a:p>
+            <a:pPr algn="r" indent="0" marL="0">
+              <a:buNone/>
+            </a:pPr>
+            <a:r>
+              <a:rPr lang="en-US" sz="900" dirty="0">
+                <a:solidFill>
+                  <a:srgbClr val="5B6475"/>
+                </a:solidFill>
+                <a:latin typeface="Arial" pitchFamily="34" charset="0"/>
+                <a:ea typeface="Arial" pitchFamily="34" charset="-122"/>
+                <a:cs typeface="Arial" pitchFamily="34" charset="-120"/>
+              </a:rPr>
+              <a:t>11</a:t>
+            </a:r>
+            <a:endParaRPr lang="en-US" sz="900" dirty="0"/>
+          </a:p>
+        </p:txBody>
+      </p:sp>
+    </p:spTree>
+  </p:cSld>
+  <p:clrMapOvr>
+    <a:masterClrMapping/>
+  </p:clrMapOvr>
+</p:sld>
+</file>
+
+<file path=ppt/slides/slide12.xml><?xml version="1.0" encoding="utf-8"?>
+<p:sld xmlns:a="http://schemas.openxmlformats.org/drawingml/2006/main" xmlns:r="http://schemas.openxmlformats.org/officeDocument/2006/relationships" xmlns:p="http://schemas.openxmlformats.org/presentationml/2006/main">
+  <p:cSld name="Slide 12">
+    <p:bg>
+      <p:bgPr>
+        <a:solidFill>
+          <a:srgbClr val="FFFFFF"/>
+        </a:solidFill>
+      </p:bgPr>
+    </p:bg>
+    <p:spTree>
+      <p:nvGrpSpPr>
+        <p:cNvPr id="1" name=""/>
+        <p:cNvGrpSpPr/>
+        <p:nvPr/>
+      </p:nvGrpSpPr>
+      <p:grpSpPr>
+        <a:xfrm>
+          <a:off x="0" y="0"/>
+          <a:ext cx="0" cy="0"/>
+          <a:chOff x="0" y="0"/>
+          <a:chExt cx="0" cy="0"/>
+        </a:xfrm>
+      </p:grpSpPr>
+      <p:pic>
+        <p:nvPicPr>
+          <p:cNvPr id="2" name="Image 0" descr="preencoded.png">    </p:cNvPr>
+          <p:cNvPicPr>
+            <a:picLocks noChangeAspect="1"/>
+          </p:cNvPicPr>
+          <p:nvPr/>
+        </p:nvPicPr>
+        <p:blipFill>
+          <a:blip r:embed="rId1"/>
+          <a:stretch>
+            <a:fillRect/>
+          </a:stretch>
+        </p:blipFill>
+        <p:spPr>
+          <a:xfrm>
             <a:off x="731520" y="685800"/>
             <a:ext cx="566928" cy="566928"/>
           </a:xfrm>
@@ -5006,8 +5507,8 @@
         </p:nvSpPr>
         <p:spPr>
           <a:xfrm>
-            <a:off x="731520" y="1143000"/>
-            <a:ext cx="10725912" cy="822960"/>
+            <a:off x="731520" y="2514600"/>
+            <a:ext cx="10725912" cy="1737360"/>
           </a:xfrm>
           <a:prstGeom prst="rect">
             <a:avLst/>
@@ -5021,12 +5522,12 @@
           <a:p>
             <a:pPr indent="0" marL="0">
               <a:lnSpc>
-                <a:spcPct val="105000"/>
+                <a:spcPct val="112000"/>
               </a:lnSpc>
               <a:buNone/>
             </a:pPr>
             <a:r>
-              <a:rPr lang="en-US" sz="2500" b="1" dirty="0">
+              <a:rPr lang="en-US" sz="3000" b="1" dirty="0">
                 <a:solidFill>
                   <a:srgbClr val="4636B0"/>
                 </a:solidFill>
@@ -5034,9 +5535,29 @@
                 <a:ea typeface="Arial" pitchFamily="34" charset="-122"/>
                 <a:cs typeface="Arial" pitchFamily="34" charset="-120"/>
               </a:rPr>
-              <a:t>Le chef d’équipe conduit. Ses vendeurs comptent.</a:t>
-            </a:r>
-            <a:endParaRPr lang="en-US" sz="2500" dirty="0"/>
+              <a:t>Quantinvo n’ajoute pas un outil de plus.</a:t>
+            </a:r>
+            <a:endParaRPr lang="en-US" sz="3000" dirty="0"/>
+          </a:p>
+          <a:p>
+            <a:pPr indent="0" marL="0">
+              <a:lnSpc>
+                <a:spcPct val="112000"/>
+              </a:lnSpc>
+              <a:buNone/>
+            </a:pPr>
+            <a:r>
+              <a:rPr lang="en-US" sz="3000" b="1" dirty="0">
+                <a:solidFill>
+                  <a:srgbClr val="4636B0"/>
+                </a:solidFill>
+                <a:latin typeface="Arial" pitchFamily="34" charset="0"/>
+                <a:ea typeface="Arial" pitchFamily="34" charset="-122"/>
+                <a:cs typeface="Arial" pitchFamily="34" charset="-120"/>
+              </a:rPr>
+              <a:t>Il retire ce qu’il faut monter autour d’un comptage.</a:t>
+            </a:r>
+            <a:endParaRPr lang="en-US" sz="3000" dirty="0"/>
           </a:p>
         </p:txBody>
       </p:sp>
@@ -5048,7 +5569,7 @@
         </p:nvSpPr>
         <p:spPr>
           <a:xfrm>
-            <a:off x="731520" y="1783080"/>
+            <a:off x="731520" y="4343400"/>
             <a:ext cx="10725912" cy="365760"/>
           </a:xfrm>
           <a:prstGeom prst="rect">
@@ -5068,7 +5589,7 @@
               <a:buNone/>
             </a:pPr>
             <a:r>
-              <a:rPr lang="en-US" sz="1200" dirty="0">
+              <a:rPr lang="en-US" sz="1300" dirty="0">
                 <a:solidFill>
                   <a:srgbClr val="5B6475"/>
                 </a:solidFill>
@@ -5076,420 +5597,15 @@
                 <a:ea typeface="Arial" pitchFamily="34" charset="-122"/>
                 <a:cs typeface="Arial" pitchFamily="34" charset="-120"/>
               </a:rPr>
-              <a:t>Une application sur les iPhone que vos équipes ont déjà, un tableau de bord pour celui qui pilote, un rapport à la fin. Rien à charger la veille, rien à briefer, aucune flotte à préparer.</a:t>
-            </a:r>
-            <a:endParaRPr lang="en-US" sz="1200" dirty="0"/>
+              <a:t>Les pages qui suivent le montrent, dans l'ordre où ces contraintes se présentent aujourd'hui.</a:t>
+            </a:r>
+            <a:endParaRPr lang="en-US" sz="1300" dirty="0"/>
           </a:p>
         </p:txBody>
       </p:sp>
       <p:sp>
         <p:nvSpPr>
           <p:cNvPr id="8" name="Text 5"/>
-          <p:cNvSpPr/>
-          <p:nvPr/>
-        </p:nvSpPr>
-        <p:spPr>
-          <a:xfrm>
-            <a:off x="731520" y="2286000"/>
-            <a:ext cx="3392424" cy="365760"/>
-          </a:xfrm>
-          <a:prstGeom prst="rect">
-            <a:avLst/>
-          </a:prstGeom>
-          <a:noFill/>
-          <a:ln/>
-        </p:spPr>
-        <p:txBody>
-          <a:bodyPr wrap="square" lIns="0" tIns="0" rIns="0" bIns="0" rtlCol="0" anchor="t"/>
-          <a:lstStyle/>
-          <a:p>
-            <a:pPr indent="0" marL="0">
-              <a:lnSpc>
-                <a:spcPct val="100000"/>
-              </a:lnSpc>
-              <a:buNone/>
-            </a:pPr>
-            <a:r>
-              <a:rPr lang="en-US" sz="1350" b="1" dirty="0">
-                <a:solidFill>
-                  <a:srgbClr val="4636B0"/>
-                </a:solidFill>
-                <a:latin typeface="Arial" pitchFamily="34" charset="0"/>
-                <a:ea typeface="Arial" pitchFamily="34" charset="-122"/>
-                <a:cs typeface="Arial" pitchFamily="34" charset="-120"/>
-              </a:rPr>
-              <a:t>Il imprime ses balises</a:t>
-            </a:r>
-            <a:endParaRPr lang="en-US" sz="1350" dirty="0"/>
-          </a:p>
-        </p:txBody>
-      </p:sp>
-      <p:sp>
-        <p:nvSpPr>
-          <p:cNvPr id="9" name="Text 6"/>
-          <p:cNvSpPr/>
-          <p:nvPr/>
-        </p:nvSpPr>
-        <p:spPr>
-          <a:xfrm>
-            <a:off x="731520" y="2670048"/>
-            <a:ext cx="3392424" cy="585216"/>
-          </a:xfrm>
-          <a:prstGeom prst="rect">
-            <a:avLst/>
-          </a:prstGeom>
-          <a:noFill/>
-          <a:ln/>
-        </p:spPr>
-        <p:txBody>
-          <a:bodyPr wrap="square" lIns="0" tIns="0" rIns="0" bIns="0" rtlCol="0" anchor="t"/>
-          <a:lstStyle/>
-          <a:p>
-            <a:pPr indent="0" marL="0">
-              <a:lnSpc>
-                <a:spcPct val="115000"/>
-              </a:lnSpc>
-              <a:buNone/>
-            </a:pPr>
-            <a:r>
-              <a:rPr lang="en-US" sz="1100" dirty="0">
-                <a:solidFill>
-                  <a:srgbClr val="3D4556"/>
-                </a:solidFill>
-                <a:latin typeface="Arial" pitchFamily="34" charset="0"/>
-                <a:ea typeface="Arial" pitchFamily="34" charset="-122"/>
-                <a:cs typeface="Arial" pitchFamily="34" charset="-120"/>
-              </a:rPr>
-              <a:t>Une planche d'étiquettes numérotées, en PDF. Personne d'autre à mobiliser la veille.</a:t>
-            </a:r>
-            <a:endParaRPr lang="en-US" sz="1100" dirty="0"/>
-          </a:p>
-        </p:txBody>
-      </p:sp>
-      <p:sp>
-        <p:nvSpPr>
-          <p:cNvPr id="10" name="Shape 7"/>
-          <p:cNvSpPr/>
-          <p:nvPr/>
-        </p:nvSpPr>
-        <p:spPr>
-          <a:xfrm>
-            <a:off x="731520" y="3291840"/>
-            <a:ext cx="3392424" cy="2907792"/>
-          </a:xfrm>
-          <a:prstGeom prst="roundRect">
-            <a:avLst>
-              <a:gd name="adj" fmla="val 4403"/>
-            </a:avLst>
-          </a:prstGeom>
-          <a:solidFill>
-            <a:srgbClr val="F4F5F9"/>
-          </a:solidFill>
-          <a:ln w="12700">
-            <a:solidFill>
-              <a:srgbClr val="F4F5F9"/>
-            </a:solidFill>
-            <a:prstDash val="solid"/>
-          </a:ln>
-        </p:spPr>
-      </p:sp>
-      <p:pic>
-        <p:nvPicPr>
-          <p:cNvPr id="11" name="Image 1" descr="preencoded.png">    </p:cNvPr>
-          <p:cNvPicPr>
-            <a:picLocks noChangeAspect="1"/>
-          </p:cNvPicPr>
-          <p:nvPr/>
-        </p:nvPicPr>
-        <p:blipFill>
-          <a:blip r:embed="rId2"/>
-          <a:stretch>
-            <a:fillRect/>
-          </a:stretch>
-        </p:blipFill>
-        <p:spPr>
-          <a:xfrm>
-            <a:off x="1042416" y="3289816"/>
-            <a:ext cx="2770632" cy="2909816"/>
-          </a:xfrm>
-          <a:prstGeom prst="rect">
-            <a:avLst/>
-          </a:prstGeom>
-        </p:spPr>
-      </p:pic>
-      <p:sp>
-        <p:nvSpPr>
-          <p:cNvPr id="12" name="Text 8"/>
-          <p:cNvSpPr/>
-          <p:nvPr/>
-        </p:nvSpPr>
-        <p:spPr>
-          <a:xfrm>
-            <a:off x="4398264" y="2286000"/>
-            <a:ext cx="3392424" cy="365760"/>
-          </a:xfrm>
-          <a:prstGeom prst="rect">
-            <a:avLst/>
-          </a:prstGeom>
-          <a:noFill/>
-          <a:ln/>
-        </p:spPr>
-        <p:txBody>
-          <a:bodyPr wrap="square" lIns="0" tIns="0" rIns="0" bIns="0" rtlCol="0" anchor="t"/>
-          <a:lstStyle/>
-          <a:p>
-            <a:pPr indent="0" marL="0">
-              <a:lnSpc>
-                <a:spcPct val="100000"/>
-              </a:lnSpc>
-              <a:buNone/>
-            </a:pPr>
-            <a:r>
-              <a:rPr lang="en-US" sz="1350" b="1" dirty="0">
-                <a:solidFill>
-                  <a:srgbClr val="4636B0"/>
-                </a:solidFill>
-                <a:latin typeface="Arial" pitchFamily="34" charset="0"/>
-                <a:ea typeface="Arial" pitchFamily="34" charset="-122"/>
-                <a:cs typeface="Arial" pitchFamily="34" charset="-120"/>
-              </a:rPr>
-              <a:t>Ils comptent au rayon</a:t>
-            </a:r>
-            <a:endParaRPr lang="en-US" sz="1350" dirty="0"/>
-          </a:p>
-        </p:txBody>
-      </p:sp>
-      <p:sp>
-        <p:nvSpPr>
-          <p:cNvPr id="13" name="Text 9"/>
-          <p:cNvSpPr/>
-          <p:nvPr/>
-        </p:nvSpPr>
-        <p:spPr>
-          <a:xfrm>
-            <a:off x="4398264" y="2670048"/>
-            <a:ext cx="3392424" cy="585216"/>
-          </a:xfrm>
-          <a:prstGeom prst="rect">
-            <a:avLst/>
-          </a:prstGeom>
-          <a:noFill/>
-          <a:ln/>
-        </p:spPr>
-        <p:txBody>
-          <a:bodyPr wrap="square" lIns="0" tIns="0" rIns="0" bIns="0" rtlCol="0" anchor="t"/>
-          <a:lstStyle/>
-          <a:p>
-            <a:pPr indent="0" marL="0">
-              <a:lnSpc>
-                <a:spcPct val="115000"/>
-              </a:lnSpc>
-              <a:buNone/>
-            </a:pPr>
-            <a:r>
-              <a:rPr lang="en-US" sz="1100" dirty="0">
-                <a:solidFill>
-                  <a:srgbClr val="3D4556"/>
-                </a:solidFill>
-                <a:latin typeface="Arial" pitchFamily="34" charset="0"/>
-                <a:ea typeface="Arial" pitchFamily="34" charset="-122"/>
-                <a:cs typeface="Arial" pitchFamily="34" charset="-120"/>
-              </a:rPr>
-              <a:t>Scanner l'étiquette, puis les articles. Le geste ne demande pas de briefing.</a:t>
-            </a:r>
-            <a:endParaRPr lang="en-US" sz="1100" dirty="0"/>
-          </a:p>
-        </p:txBody>
-      </p:sp>
-      <p:sp>
-        <p:nvSpPr>
-          <p:cNvPr id="14" name="Shape 10"/>
-          <p:cNvSpPr/>
-          <p:nvPr/>
-        </p:nvSpPr>
-        <p:spPr>
-          <a:xfrm>
-            <a:off x="4398264" y="3291840"/>
-            <a:ext cx="3392424" cy="2907792"/>
-          </a:xfrm>
-          <a:prstGeom prst="roundRect">
-            <a:avLst>
-              <a:gd name="adj" fmla="val 4403"/>
-            </a:avLst>
-          </a:prstGeom>
-          <a:solidFill>
-            <a:srgbClr val="EEEEFC"/>
-          </a:solidFill>
-          <a:ln w="12700">
-            <a:solidFill>
-              <a:srgbClr val="EEEEFC"/>
-            </a:solidFill>
-            <a:prstDash val="solid"/>
-          </a:ln>
-        </p:spPr>
-      </p:sp>
-      <p:pic>
-        <p:nvPicPr>
-          <p:cNvPr id="15" name="Image 2" descr="preencoded.png">    </p:cNvPr>
-          <p:cNvPicPr>
-            <a:picLocks noChangeAspect="1"/>
-          </p:cNvPicPr>
-          <p:nvPr/>
-        </p:nvPicPr>
-        <p:blipFill>
-          <a:blip r:embed="rId3"/>
-          <a:stretch>
-            <a:fillRect/>
-          </a:stretch>
-        </p:blipFill>
-        <p:spPr>
-          <a:xfrm>
-            <a:off x="4709160" y="3289816"/>
-            <a:ext cx="2770632" cy="2909816"/>
-          </a:xfrm>
-          <a:prstGeom prst="rect">
-            <a:avLst/>
-          </a:prstGeom>
-        </p:spPr>
-      </p:pic>
-      <p:sp>
-        <p:nvSpPr>
-          <p:cNvPr id="16" name="Text 11"/>
-          <p:cNvSpPr/>
-          <p:nvPr/>
-        </p:nvSpPr>
-        <p:spPr>
-          <a:xfrm>
-            <a:off x="8065008" y="2286000"/>
-            <a:ext cx="3392424" cy="365760"/>
-          </a:xfrm>
-          <a:prstGeom prst="rect">
-            <a:avLst/>
-          </a:prstGeom>
-          <a:noFill/>
-          <a:ln/>
-        </p:spPr>
-        <p:txBody>
-          <a:bodyPr wrap="square" lIns="0" tIns="0" rIns="0" bIns="0" rtlCol="0" anchor="t"/>
-          <a:lstStyle/>
-          <a:p>
-            <a:pPr indent="0" marL="0">
-              <a:lnSpc>
-                <a:spcPct val="100000"/>
-              </a:lnSpc>
-              <a:buNone/>
-            </a:pPr>
-            <a:r>
-              <a:rPr lang="en-US" sz="1350" b="1" dirty="0">
-                <a:solidFill>
-                  <a:srgbClr val="4636B0"/>
-                </a:solidFill>
-                <a:latin typeface="Arial" pitchFamily="34" charset="0"/>
-                <a:ea typeface="Arial" pitchFamily="34" charset="-122"/>
-                <a:cs typeface="Arial" pitchFamily="34" charset="-120"/>
-              </a:rPr>
-              <a:t>Il audite selon votre règle</a:t>
-            </a:r>
-            <a:endParaRPr lang="en-US" sz="1350" dirty="0"/>
-          </a:p>
-        </p:txBody>
-      </p:sp>
-      <p:sp>
-        <p:nvSpPr>
-          <p:cNvPr id="17" name="Text 12"/>
-          <p:cNvSpPr/>
-          <p:nvPr/>
-        </p:nvSpPr>
-        <p:spPr>
-          <a:xfrm>
-            <a:off x="8065008" y="2670048"/>
-            <a:ext cx="3392424" cy="585216"/>
-          </a:xfrm>
-          <a:prstGeom prst="rect">
-            <a:avLst/>
-          </a:prstGeom>
-          <a:noFill/>
-          <a:ln/>
-        </p:spPr>
-        <p:txBody>
-          <a:bodyPr wrap="square" lIns="0" tIns="0" rIns="0" bIns="0" rtlCol="0" anchor="t"/>
-          <a:lstStyle/>
-          <a:p>
-            <a:pPr indent="0" marL="0">
-              <a:lnSpc>
-                <a:spcPct val="115000"/>
-              </a:lnSpc>
-              <a:buNone/>
-            </a:pPr>
-            <a:r>
-              <a:rPr lang="en-US" sz="1100" dirty="0">
-                <a:solidFill>
-                  <a:srgbClr val="3D4556"/>
-                </a:solidFill>
-                <a:latin typeface="Arial" pitchFamily="34" charset="0"/>
-                <a:ea typeface="Arial" pitchFamily="34" charset="-122"/>
-                <a:cs typeface="Arial" pitchFamily="34" charset="-120"/>
-              </a:rPr>
-              <a:t>La deuxième passe se lance du même téléphone, pendant que le comptage continue.</a:t>
-            </a:r>
-            <a:endParaRPr lang="en-US" sz="1100" dirty="0"/>
-          </a:p>
-        </p:txBody>
-      </p:sp>
-      <p:sp>
-        <p:nvSpPr>
-          <p:cNvPr id="18" name="Shape 13"/>
-          <p:cNvSpPr/>
-          <p:nvPr/>
-        </p:nvSpPr>
-        <p:spPr>
-          <a:xfrm>
-            <a:off x="8065008" y="3291840"/>
-            <a:ext cx="3392424" cy="2907792"/>
-          </a:xfrm>
-          <a:prstGeom prst="roundRect">
-            <a:avLst>
-              <a:gd name="adj" fmla="val 4403"/>
-            </a:avLst>
-          </a:prstGeom>
-          <a:solidFill>
-            <a:srgbClr val="F4F5F9"/>
-          </a:solidFill>
-          <a:ln w="12700">
-            <a:solidFill>
-              <a:srgbClr val="F4F5F9"/>
-            </a:solidFill>
-            <a:prstDash val="solid"/>
-          </a:ln>
-        </p:spPr>
-      </p:sp>
-      <p:pic>
-        <p:nvPicPr>
-          <p:cNvPr id="19" name="Image 3" descr="preencoded.png">    </p:cNvPr>
-          <p:cNvPicPr>
-            <a:picLocks noChangeAspect="1"/>
-          </p:cNvPicPr>
-          <p:nvPr/>
-        </p:nvPicPr>
-        <p:blipFill>
-          <a:blip r:embed="rId4"/>
-          <a:stretch>
-            <a:fillRect/>
-          </a:stretch>
-        </p:blipFill>
-        <p:spPr>
-          <a:xfrm>
-            <a:off x="8375904" y="3289816"/>
-            <a:ext cx="2770632" cy="2909816"/>
-          </a:xfrm>
-          <a:prstGeom prst="rect">
-            <a:avLst/>
-          </a:prstGeom>
-        </p:spPr>
-      </p:pic>
-      <p:sp>
-        <p:nvSpPr>
-          <p:cNvPr id="20" name="Text 14"/>
           <p:cNvSpPr/>
           <p:nvPr/>
         </p:nvSpPr>
@@ -5528,7 +5644,7 @@
       </p:sp>
       <p:sp>
         <p:nvSpPr>
-          <p:cNvPr id="21" name="Text 15"/>
+          <p:cNvPr id="9" name="Text 6"/>
           <p:cNvSpPr/>
           <p:nvPr/>
         </p:nvSpPr>
@@ -5693,7 +5809,7 @@
                 <a:ea typeface="Arial" pitchFamily="34" charset="-122"/>
                 <a:cs typeface="Arial" pitchFamily="34" charset="-120"/>
               </a:rPr>
-              <a:t>Pendant le comptage</a:t>
+              <a:t>Avec Quantinvo</a:t>
             </a:r>
             <a:endParaRPr lang="en-US" sz="1000" dirty="0"/>
           </a:p>
@@ -5760,7 +5876,7 @@
                 <a:ea typeface="Arial" pitchFamily="34" charset="-122"/>
                 <a:cs typeface="Arial" pitchFamily="34" charset="-120"/>
               </a:rPr>
-              <a:t>Vous fixez la règle d'audit. Le floor l'applique.</a:t>
+              <a:t>Le chef d’équipe conduit. Ses vendeurs comptent.</a:t>
             </a:r>
             <a:endParaRPr lang="en-US" sz="2500" dirty="0"/>
           </a:p>
@@ -5775,7 +5891,7 @@
         <p:spPr>
           <a:xfrm>
             <a:off x="731520" y="1783080"/>
-            <a:ext cx="10725912" cy="777240"/>
+            <a:ext cx="10725912" cy="365760"/>
           </a:xfrm>
           <a:prstGeom prst="rect">
             <a:avLst/>
@@ -5794,7 +5910,91 @@
               <a:buNone/>
             </a:pPr>
             <a:r>
-              <a:rPr lang="en-US" sz="1250" dirty="0">
+              <a:rPr lang="en-US" sz="1200" dirty="0">
+                <a:solidFill>
+                  <a:srgbClr val="5B6475"/>
+                </a:solidFill>
+                <a:latin typeface="Arial" pitchFamily="34" charset="0"/>
+                <a:ea typeface="Arial" pitchFamily="34" charset="-122"/>
+                <a:cs typeface="Arial" pitchFamily="34" charset="-120"/>
+              </a:rPr>
+              <a:t>Une application sur les iPhone que vos équipes ont déjà, un tableau de bord pour celui qui pilote, un rapport à la fin. Rien à charger la veille, rien à briefer, aucune flotte à préparer.</a:t>
+            </a:r>
+            <a:endParaRPr lang="en-US" sz="1200" dirty="0"/>
+          </a:p>
+        </p:txBody>
+      </p:sp>
+      <p:sp>
+        <p:nvSpPr>
+          <p:cNvPr id="8" name="Text 5"/>
+          <p:cNvSpPr/>
+          <p:nvPr/>
+        </p:nvSpPr>
+        <p:spPr>
+          <a:xfrm>
+            <a:off x="731520" y="2286000"/>
+            <a:ext cx="3392424" cy="365760"/>
+          </a:xfrm>
+          <a:prstGeom prst="rect">
+            <a:avLst/>
+          </a:prstGeom>
+          <a:noFill/>
+          <a:ln/>
+        </p:spPr>
+        <p:txBody>
+          <a:bodyPr wrap="square" lIns="0" tIns="0" rIns="0" bIns="0" rtlCol="0" anchor="t"/>
+          <a:lstStyle/>
+          <a:p>
+            <a:pPr indent="0" marL="0">
+              <a:lnSpc>
+                <a:spcPct val="100000"/>
+              </a:lnSpc>
+              <a:buNone/>
+            </a:pPr>
+            <a:r>
+              <a:rPr lang="en-US" sz="1350" b="1" dirty="0">
+                <a:solidFill>
+                  <a:srgbClr val="4636B0"/>
+                </a:solidFill>
+                <a:latin typeface="Arial" pitchFamily="34" charset="0"/>
+                <a:ea typeface="Arial" pitchFamily="34" charset="-122"/>
+                <a:cs typeface="Arial" pitchFamily="34" charset="-120"/>
+              </a:rPr>
+              <a:t>Il imprime ses balises</a:t>
+            </a:r>
+            <a:endParaRPr lang="en-US" sz="1350" dirty="0"/>
+          </a:p>
+        </p:txBody>
+      </p:sp>
+      <p:sp>
+        <p:nvSpPr>
+          <p:cNvPr id="9" name="Text 6"/>
+          <p:cNvSpPr/>
+          <p:nvPr/>
+        </p:nvSpPr>
+        <p:spPr>
+          <a:xfrm>
+            <a:off x="731520" y="2670048"/>
+            <a:ext cx="3392424" cy="585216"/>
+          </a:xfrm>
+          <a:prstGeom prst="rect">
+            <a:avLst/>
+          </a:prstGeom>
+          <a:noFill/>
+          <a:ln/>
+        </p:spPr>
+        <p:txBody>
+          <a:bodyPr wrap="square" lIns="0" tIns="0" rIns="0" bIns="0" rtlCol="0" anchor="t"/>
+          <a:lstStyle/>
+          <a:p>
+            <a:pPr indent="0" marL="0">
+              <a:lnSpc>
+                <a:spcPct val="115000"/>
+              </a:lnSpc>
+              <a:buNone/>
+            </a:pPr>
+            <a:r>
+              <a:rPr lang="en-US" sz="1100" dirty="0">
                 <a:solidFill>
                   <a:srgbClr val="3D4556"/>
                 </a:solidFill>
@@ -5802,87 +6002,9 @@
                 <a:ea typeface="Arial" pitchFamily="34" charset="-122"/>
                 <a:cs typeface="Arial" pitchFamily="34" charset="-120"/>
               </a:rPr>
-              <a:t>La règle d'audit reste la vôtre — 100 % sur l'horlogerie et la joaillerie, 30 % au moins ailleurs. Le désaccord entre les deux comptages ne s'attend plus dans un fichier : ils s'affichent côte à côte, l'écart en pièces et en valeur d'achat, et il se tranche pendant que le compteur est encore devant l'article. L'Inventory Control ouvre la même vue sur n'importe quel inventaire en cours, sans avoir à s'y tenir.</a:t>
-            </a:r>
-            <a:endParaRPr lang="en-US" sz="1250" dirty="0"/>
-          </a:p>
-        </p:txBody>
-      </p:sp>
-      <p:sp>
-        <p:nvSpPr>
-          <p:cNvPr id="8" name="Text 5"/>
-          <p:cNvSpPr/>
-          <p:nvPr/>
-        </p:nvSpPr>
-        <p:spPr>
-          <a:xfrm>
-            <a:off x="731520" y="2935224"/>
-            <a:ext cx="5134356" cy="274320"/>
-          </a:xfrm>
-          <a:prstGeom prst="rect">
-            <a:avLst/>
-          </a:prstGeom>
-          <a:noFill/>
-          <a:ln/>
-        </p:spPr>
-        <p:txBody>
-          <a:bodyPr wrap="square" lIns="0" tIns="0" rIns="0" bIns="0" rtlCol="0" anchor="t"/>
-          <a:lstStyle/>
-          <a:p>
-            <a:pPr indent="0" marL="0">
-              <a:buNone/>
-            </a:pPr>
-            <a:r>
-              <a:rPr lang="en-US" sz="1250" b="1" dirty="0">
-                <a:solidFill>
-                  <a:srgbClr val="0B0F19"/>
-                </a:solidFill>
-                <a:latin typeface="Arial" pitchFamily="34" charset="0"/>
-                <a:ea typeface="Arial" pitchFamily="34" charset="-122"/>
-                <a:cs typeface="Arial" pitchFamily="34" charset="-120"/>
-              </a:rPr>
-              <a:t>L'avancement, zone par zone</a:t>
-            </a:r>
-            <a:endParaRPr lang="en-US" sz="1250" dirty="0"/>
-          </a:p>
-        </p:txBody>
-      </p:sp>
-      <p:sp>
-        <p:nvSpPr>
-          <p:cNvPr id="9" name="Text 6"/>
-          <p:cNvSpPr/>
-          <p:nvPr/>
-        </p:nvSpPr>
-        <p:spPr>
-          <a:xfrm>
-            <a:off x="6323076" y="2935224"/>
-            <a:ext cx="5134356" cy="274320"/>
-          </a:xfrm>
-          <a:prstGeom prst="rect">
-            <a:avLst/>
-          </a:prstGeom>
-          <a:noFill/>
-          <a:ln/>
-        </p:spPr>
-        <p:txBody>
-          <a:bodyPr wrap="square" lIns="0" tIns="0" rIns="0" bIns="0" rtlCol="0" anchor="t"/>
-          <a:lstStyle/>
-          <a:p>
-            <a:pPr indent="0" marL="0">
-              <a:buNone/>
-            </a:pPr>
-            <a:r>
-              <a:rPr lang="en-US" sz="1250" b="1" dirty="0">
-                <a:solidFill>
-                  <a:srgbClr val="0B0F19"/>
-                </a:solidFill>
-                <a:latin typeface="Arial" pitchFamily="34" charset="0"/>
-                <a:ea typeface="Arial" pitchFamily="34" charset="-122"/>
-                <a:cs typeface="Arial" pitchFamily="34" charset="-120"/>
-              </a:rPr>
-              <a:t>L'écart, tranché au rayon</a:t>
-            </a:r>
-            <a:endParaRPr lang="en-US" sz="1250" dirty="0"/>
+              <a:t>Une planche d'étiquettes numérotées, en PDF. Personne d'autre à mobiliser la veille.</a:t>
+            </a:r>
+            <a:endParaRPr lang="en-US" sz="1100" dirty="0"/>
           </a:p>
         </p:txBody>
       </p:sp>
@@ -5894,20 +6016,20 @@
         </p:nvSpPr>
         <p:spPr>
           <a:xfrm>
-            <a:off x="676656" y="3191256"/>
-            <a:ext cx="5244084" cy="2059239"/>
+            <a:off x="731520" y="3291840"/>
+            <a:ext cx="3392424" cy="2907792"/>
           </a:xfrm>
           <a:prstGeom prst="roundRect">
             <a:avLst>
-              <a:gd name="adj" fmla="val 3552"/>
+              <a:gd name="adj" fmla="val 4403"/>
             </a:avLst>
           </a:prstGeom>
           <a:solidFill>
-            <a:srgbClr val="FFFFFF"/>
+            <a:srgbClr val="F4F5F9"/>
           </a:solidFill>
           <a:ln w="12700">
             <a:solidFill>
-              <a:srgbClr val="E3E6EE"/>
+              <a:srgbClr val="F4F5F9"/>
             </a:solidFill>
             <a:prstDash val="solid"/>
           </a:ln>
@@ -5929,8 +6051,8 @@
         </p:blipFill>
         <p:spPr>
           <a:xfrm>
-            <a:off x="731520" y="3246120"/>
-            <a:ext cx="5134356" cy="1949511"/>
+            <a:off x="1042416" y="3289816"/>
+            <a:ext cx="2770632" cy="2909816"/>
           </a:xfrm>
           <a:prstGeom prst="rect">
             <a:avLst/>
@@ -5939,26 +6061,110 @@
       </p:pic>
       <p:sp>
         <p:nvSpPr>
-          <p:cNvPr id="12" name="Shape 8"/>
-          <p:cNvSpPr/>
-          <p:nvPr/>
-        </p:nvSpPr>
-        <p:spPr>
-          <a:xfrm>
-            <a:off x="6268212" y="3191256"/>
-            <a:ext cx="5244084" cy="2080383"/>
+          <p:cNvPr id="12" name="Text 8"/>
+          <p:cNvSpPr/>
+          <p:nvPr/>
+        </p:nvSpPr>
+        <p:spPr>
+          <a:xfrm>
+            <a:off x="4398264" y="2286000"/>
+            <a:ext cx="3392424" cy="365760"/>
+          </a:xfrm>
+          <a:prstGeom prst="rect">
+            <a:avLst/>
+          </a:prstGeom>
+          <a:noFill/>
+          <a:ln/>
+        </p:spPr>
+        <p:txBody>
+          <a:bodyPr wrap="square" lIns="0" tIns="0" rIns="0" bIns="0" rtlCol="0" anchor="t"/>
+          <a:lstStyle/>
+          <a:p>
+            <a:pPr indent="0" marL="0">
+              <a:lnSpc>
+                <a:spcPct val="100000"/>
+              </a:lnSpc>
+              <a:buNone/>
+            </a:pPr>
+            <a:r>
+              <a:rPr lang="en-US" sz="1350" b="1" dirty="0">
+                <a:solidFill>
+                  <a:srgbClr val="4636B0"/>
+                </a:solidFill>
+                <a:latin typeface="Arial" pitchFamily="34" charset="0"/>
+                <a:ea typeface="Arial" pitchFamily="34" charset="-122"/>
+                <a:cs typeface="Arial" pitchFamily="34" charset="-120"/>
+              </a:rPr>
+              <a:t>Ils comptent au rayon</a:t>
+            </a:r>
+            <a:endParaRPr lang="en-US" sz="1350" dirty="0"/>
+          </a:p>
+        </p:txBody>
+      </p:sp>
+      <p:sp>
+        <p:nvSpPr>
+          <p:cNvPr id="13" name="Text 9"/>
+          <p:cNvSpPr/>
+          <p:nvPr/>
+        </p:nvSpPr>
+        <p:spPr>
+          <a:xfrm>
+            <a:off x="4398264" y="2670048"/>
+            <a:ext cx="3392424" cy="585216"/>
+          </a:xfrm>
+          <a:prstGeom prst="rect">
+            <a:avLst/>
+          </a:prstGeom>
+          <a:noFill/>
+          <a:ln/>
+        </p:spPr>
+        <p:txBody>
+          <a:bodyPr wrap="square" lIns="0" tIns="0" rIns="0" bIns="0" rtlCol="0" anchor="t"/>
+          <a:lstStyle/>
+          <a:p>
+            <a:pPr indent="0" marL="0">
+              <a:lnSpc>
+                <a:spcPct val="115000"/>
+              </a:lnSpc>
+              <a:buNone/>
+            </a:pPr>
+            <a:r>
+              <a:rPr lang="en-US" sz="1100" dirty="0">
+                <a:solidFill>
+                  <a:srgbClr val="3D4556"/>
+                </a:solidFill>
+                <a:latin typeface="Arial" pitchFamily="34" charset="0"/>
+                <a:ea typeface="Arial" pitchFamily="34" charset="-122"/>
+                <a:cs typeface="Arial" pitchFamily="34" charset="-120"/>
+              </a:rPr>
+              <a:t>Scanner l'étiquette, puis les articles. Le geste ne demande pas de briefing.</a:t>
+            </a:r>
+            <a:endParaRPr lang="en-US" sz="1100" dirty="0"/>
+          </a:p>
+        </p:txBody>
+      </p:sp>
+      <p:sp>
+        <p:nvSpPr>
+          <p:cNvPr id="14" name="Shape 10"/>
+          <p:cNvSpPr/>
+          <p:nvPr/>
+        </p:nvSpPr>
+        <p:spPr>
+          <a:xfrm>
+            <a:off x="4398264" y="3291840"/>
+            <a:ext cx="3392424" cy="2907792"/>
           </a:xfrm>
           <a:prstGeom prst="roundRect">
             <a:avLst>
-              <a:gd name="adj" fmla="val 3516"/>
+              <a:gd name="adj" fmla="val 4403"/>
             </a:avLst>
           </a:prstGeom>
           <a:solidFill>
-            <a:srgbClr val="FFFFFF"/>
+            <a:srgbClr val="EEEEFC"/>
           </a:solidFill>
           <a:ln w="12700">
             <a:solidFill>
-              <a:srgbClr val="E3E6EE"/>
+              <a:srgbClr val="EEEEFC"/>
             </a:solidFill>
             <a:prstDash val="solid"/>
           </a:ln>
@@ -5966,7 +6172,7 @@
       </p:sp>
       <p:pic>
         <p:nvPicPr>
-          <p:cNvPr id="13" name="Image 2" descr="preencoded.png">    </p:cNvPr>
+          <p:cNvPr id="15" name="Image 2" descr="preencoded.png">    </p:cNvPr>
           <p:cNvPicPr>
             <a:picLocks noChangeAspect="1"/>
           </p:cNvPicPr>
@@ -5980,8 +6186,8 @@
         </p:blipFill>
         <p:spPr>
           <a:xfrm>
-            <a:off x="6323076" y="3246120"/>
-            <a:ext cx="5134356" cy="1970655"/>
+            <a:off x="4709160" y="3289816"/>
+            <a:ext cx="2770632" cy="2909816"/>
           </a:xfrm>
           <a:prstGeom prst="rect">
             <a:avLst/>
@@ -5990,14 +6196,14 @@
       </p:pic>
       <p:sp>
         <p:nvSpPr>
-          <p:cNvPr id="14" name="Text 9"/>
-          <p:cNvSpPr/>
-          <p:nvPr/>
-        </p:nvSpPr>
-        <p:spPr>
-          <a:xfrm>
-            <a:off x="731520" y="5344791"/>
-            <a:ext cx="5134356" cy="365760"/>
+          <p:cNvPr id="16" name="Text 11"/>
+          <p:cNvSpPr/>
+          <p:nvPr/>
+        </p:nvSpPr>
+        <p:spPr>
+          <a:xfrm>
+            <a:off x="8065008" y="2286000"/>
+            <a:ext cx="3392424" cy="365760"/>
           </a:xfrm>
           <a:prstGeom prst="rect">
             <a:avLst/>
@@ -6010,33 +6216,36 @@
           <a:lstStyle/>
           <a:p>
             <a:pPr indent="0" marL="0">
-              <a:buNone/>
-            </a:pPr>
-            <a:r>
-              <a:rPr lang="en-US" sz="1000" i="1" dirty="0">
-                <a:solidFill>
-                  <a:srgbClr val="5B6475"/>
-                </a:solidFill>
-                <a:latin typeface="Arial" pitchFamily="34" charset="0"/>
-                <a:ea typeface="Arial" pitchFamily="34" charset="-122"/>
-                <a:cs typeface="Arial" pitchFamily="34" charset="-120"/>
-              </a:rPr>
-              <a:t>Onglet Suivi, données d'essai.</a:t>
-            </a:r>
-            <a:endParaRPr lang="en-US" sz="1000" dirty="0"/>
-          </a:p>
-        </p:txBody>
-      </p:sp>
-      <p:sp>
-        <p:nvSpPr>
-          <p:cNvPr id="15" name="Text 10"/>
-          <p:cNvSpPr/>
-          <p:nvPr/>
-        </p:nvSpPr>
-        <p:spPr>
-          <a:xfrm>
-            <a:off x="6323076" y="5344791"/>
-            <a:ext cx="5134356" cy="365760"/>
+              <a:lnSpc>
+                <a:spcPct val="100000"/>
+              </a:lnSpc>
+              <a:buNone/>
+            </a:pPr>
+            <a:r>
+              <a:rPr lang="en-US" sz="1350" b="1" dirty="0">
+                <a:solidFill>
+                  <a:srgbClr val="4636B0"/>
+                </a:solidFill>
+                <a:latin typeface="Arial" pitchFamily="34" charset="0"/>
+                <a:ea typeface="Arial" pitchFamily="34" charset="-122"/>
+                <a:cs typeface="Arial" pitchFamily="34" charset="-120"/>
+              </a:rPr>
+              <a:t>Il audite selon votre règle</a:t>
+            </a:r>
+            <a:endParaRPr lang="en-US" sz="1350" dirty="0"/>
+          </a:p>
+        </p:txBody>
+      </p:sp>
+      <p:sp>
+        <p:nvSpPr>
+          <p:cNvPr id="17" name="Text 12"/>
+          <p:cNvSpPr/>
+          <p:nvPr/>
+        </p:nvSpPr>
+        <p:spPr>
+          <a:xfrm>
+            <a:off x="8065008" y="2670048"/>
+            <a:ext cx="3392424" cy="585216"/>
           </a:xfrm>
           <a:prstGeom prst="rect">
             <a:avLst/>
@@ -6049,26 +6258,80 @@
           <a:lstStyle/>
           <a:p>
             <a:pPr indent="0" marL="0">
-              <a:buNone/>
-            </a:pPr>
-            <a:r>
-              <a:rPr lang="en-US" sz="1000" i="1" dirty="0">
-                <a:solidFill>
-                  <a:srgbClr val="5B6475"/>
-                </a:solidFill>
-                <a:latin typeface="Arial" pitchFamily="34" charset="0"/>
-                <a:ea typeface="Arial" pitchFamily="34" charset="-122"/>
-                <a:cs typeface="Arial" pitchFamily="34" charset="-120"/>
-              </a:rPr>
-              <a:t>Onglet Écarts d'audit, données d'essai.</a:t>
-            </a:r>
-            <a:endParaRPr lang="en-US" sz="1000" dirty="0"/>
-          </a:p>
-        </p:txBody>
-      </p:sp>
-      <p:sp>
-        <p:nvSpPr>
-          <p:cNvPr id="16" name="Text 11"/>
+              <a:lnSpc>
+                <a:spcPct val="115000"/>
+              </a:lnSpc>
+              <a:buNone/>
+            </a:pPr>
+            <a:r>
+              <a:rPr lang="en-US" sz="1100" dirty="0">
+                <a:solidFill>
+                  <a:srgbClr val="3D4556"/>
+                </a:solidFill>
+                <a:latin typeface="Arial" pitchFamily="34" charset="0"/>
+                <a:ea typeface="Arial" pitchFamily="34" charset="-122"/>
+                <a:cs typeface="Arial" pitchFamily="34" charset="-120"/>
+              </a:rPr>
+              <a:t>La deuxième passe se lance du même téléphone, pendant que le comptage continue.</a:t>
+            </a:r>
+            <a:endParaRPr lang="en-US" sz="1100" dirty="0"/>
+          </a:p>
+        </p:txBody>
+      </p:sp>
+      <p:sp>
+        <p:nvSpPr>
+          <p:cNvPr id="18" name="Shape 13"/>
+          <p:cNvSpPr/>
+          <p:nvPr/>
+        </p:nvSpPr>
+        <p:spPr>
+          <a:xfrm>
+            <a:off x="8065008" y="3291840"/>
+            <a:ext cx="3392424" cy="2907792"/>
+          </a:xfrm>
+          <a:prstGeom prst="roundRect">
+            <a:avLst>
+              <a:gd name="adj" fmla="val 4403"/>
+            </a:avLst>
+          </a:prstGeom>
+          <a:solidFill>
+            <a:srgbClr val="F4F5F9"/>
+          </a:solidFill>
+          <a:ln w="12700">
+            <a:solidFill>
+              <a:srgbClr val="F4F5F9"/>
+            </a:solidFill>
+            <a:prstDash val="solid"/>
+          </a:ln>
+        </p:spPr>
+      </p:sp>
+      <p:pic>
+        <p:nvPicPr>
+          <p:cNvPr id="19" name="Image 3" descr="preencoded.png">    </p:cNvPr>
+          <p:cNvPicPr>
+            <a:picLocks noChangeAspect="1"/>
+          </p:cNvPicPr>
+          <p:nvPr/>
+        </p:nvPicPr>
+        <p:blipFill>
+          <a:blip r:embed="rId4"/>
+          <a:stretch>
+            <a:fillRect/>
+          </a:stretch>
+        </p:blipFill>
+        <p:spPr>
+          <a:xfrm>
+            <a:off x="8375904" y="3289816"/>
+            <a:ext cx="2770632" cy="2909816"/>
+          </a:xfrm>
+          <a:prstGeom prst="rect">
+            <a:avLst/>
+          </a:prstGeom>
+        </p:spPr>
+      </p:pic>
+      <p:sp>
+        <p:nvSpPr>
+          <p:cNvPr id="20" name="Text 14"/>
           <p:cNvSpPr/>
           <p:nvPr/>
         </p:nvSpPr>
@@ -6107,7 +6370,7 @@
       </p:sp>
       <p:sp>
         <p:nvSpPr>
-          <p:cNvPr id="17" name="Text 12"/>
+          <p:cNvPr id="21" name="Text 15"/>
           <p:cNvSpPr/>
           <p:nvPr/>
         </p:nvSpPr>
@@ -6272,7 +6535,7 @@
                 <a:ea typeface="Arial" pitchFamily="34" charset="-122"/>
                 <a:cs typeface="Arial" pitchFamily="34" charset="-120"/>
               </a:rPr>
-              <a:t>Après le comptage</a:t>
+              <a:t>Pendant le comptage</a:t>
             </a:r>
             <a:endParaRPr lang="en-US" sz="1000" dirty="0"/>
           </a:p>
@@ -6311,8 +6574,8 @@
         </p:nvSpPr>
         <p:spPr>
           <a:xfrm>
-            <a:off x="731520" y="1325880"/>
-            <a:ext cx="4206240" cy="1097280"/>
+            <a:off x="731520" y="1143000"/>
+            <a:ext cx="10725912" cy="822960"/>
           </a:xfrm>
           <a:prstGeom prst="rect">
             <a:avLst/>
@@ -6331,7 +6594,7 @@
               <a:buNone/>
             </a:pPr>
             <a:r>
-              <a:rPr lang="en-US" sz="2600" b="1" dirty="0">
+              <a:rPr lang="en-US" sz="2500" b="1" dirty="0">
                 <a:solidFill>
                   <a:srgbClr val="4636B0"/>
                 </a:solidFill>
@@ -6339,9 +6602,9 @@
                 <a:ea typeface="Arial" pitchFamily="34" charset="-122"/>
                 <a:cs typeface="Arial" pitchFamily="34" charset="-120"/>
               </a:rPr>
-              <a:t>Le rapport arrive déjà croisé.</a:t>
-            </a:r>
-            <a:endParaRPr lang="en-US" sz="2600" dirty="0"/>
+              <a:t>Vous fixez la règle d'audit. Le floor l'applique.</a:t>
+            </a:r>
+            <a:endParaRPr lang="en-US" sz="2500" dirty="0"/>
           </a:p>
         </p:txBody>
       </p:sp>
@@ -6353,8 +6616,8 @@
         </p:nvSpPr>
         <p:spPr>
           <a:xfrm>
-            <a:off x="731520" y="2606040"/>
-            <a:ext cx="4206240" cy="1371600"/>
+            <a:off x="731520" y="1783080"/>
+            <a:ext cx="10725912" cy="777240"/>
           </a:xfrm>
           <a:prstGeom prst="rect">
             <a:avLst/>
@@ -6381,7 +6644,7 @@
                 <a:ea typeface="Arial" pitchFamily="34" charset="-122"/>
                 <a:cs typeface="Arial" pitchFamily="34" charset="-120"/>
               </a:rPr>
-              <a:t>Il part du stock théorique, pas seulement de ce qui a été scanné : un article attendu et jamais trouvé y figure, avec son manque. Le recoupement n'est plus à faire.</a:t>
+              <a:t>La règle d'audit reste la vôtre — 100 % sur l'horlogerie et la joaillerie, 30 % au moins ailleurs. Le désaccord entre les deux comptages ne s'attend plus dans un fichier : ils s'affichent côte à côte, l'écart en pièces et en valeur d'achat, et il se tranche pendant que le compteur est encore devant l'article. L'Inventory Control ouvre la même vue sur n'importe quel inventaire en cours, sans avoir à s'y tenir.</a:t>
             </a:r>
             <a:endParaRPr lang="en-US" sz="1250" dirty="0"/>
           </a:p>
@@ -6395,8 +6658,8 @@
         </p:nvSpPr>
         <p:spPr>
           <a:xfrm>
-            <a:off x="731520" y="3977640"/>
-            <a:ext cx="4206240" cy="1097280"/>
+            <a:off x="731520" y="2935224"/>
+            <a:ext cx="5134356" cy="274320"/>
           </a:xfrm>
           <a:prstGeom prst="rect">
             <a:avLst/>
@@ -6408,22 +6671,19 @@
           <a:bodyPr wrap="square" lIns="0" tIns="0" rIns="0" bIns="0" rtlCol="0" anchor="t"/>
           <a:lstStyle/>
           <a:p>
-            <a:pPr algn="l" indent="0" marL="0">
-              <a:lnSpc>
-                <a:spcPct val="118000"/>
-              </a:lnSpc>
-              <a:buNone/>
-            </a:pPr>
-            <a:r>
-              <a:rPr lang="en-US" sz="1250" dirty="0">
-                <a:solidFill>
-                  <a:srgbClr val="3D4556"/>
-                </a:solidFill>
-                <a:latin typeface="Arial" pitchFamily="34" charset="0"/>
-                <a:ea typeface="Arial" pitchFamily="34" charset="-122"/>
-                <a:cs typeface="Arial" pitchFamily="34" charset="-120"/>
-              </a:rPr>
-              <a:t>Export Excel en un clic. Restent la validation, selon la valeur de l'écart, et l'ajustement du stock.</a:t>
+            <a:pPr indent="0" marL="0">
+              <a:buNone/>
+            </a:pPr>
+            <a:r>
+              <a:rPr lang="en-US" sz="1250" b="1" dirty="0">
+                <a:solidFill>
+                  <a:srgbClr val="0B0F19"/>
+                </a:solidFill>
+                <a:latin typeface="Arial" pitchFamily="34" charset="0"/>
+                <a:ea typeface="Arial" pitchFamily="34" charset="-122"/>
+                <a:cs typeface="Arial" pitchFamily="34" charset="-120"/>
+              </a:rPr>
+              <a:t>L'avancement, zone par zone</a:t>
             </a:r>
             <a:endParaRPr lang="en-US" sz="1250" dirty="0"/>
           </a:p>
@@ -6431,18 +6691,57 @@
       </p:sp>
       <p:sp>
         <p:nvSpPr>
-          <p:cNvPr id="9" name="Shape 6"/>
-          <p:cNvSpPr/>
-          <p:nvPr/>
-        </p:nvSpPr>
-        <p:spPr>
-          <a:xfrm>
-            <a:off x="5340096" y="1316736"/>
-            <a:ext cx="6172200" cy="4260383"/>
+          <p:cNvPr id="9" name="Text 6"/>
+          <p:cNvSpPr/>
+          <p:nvPr/>
+        </p:nvSpPr>
+        <p:spPr>
+          <a:xfrm>
+            <a:off x="6323076" y="2935224"/>
+            <a:ext cx="5134356" cy="274320"/>
+          </a:xfrm>
+          <a:prstGeom prst="rect">
+            <a:avLst/>
+          </a:prstGeom>
+          <a:noFill/>
+          <a:ln/>
+        </p:spPr>
+        <p:txBody>
+          <a:bodyPr wrap="square" lIns="0" tIns="0" rIns="0" bIns="0" rtlCol="0" anchor="t"/>
+          <a:lstStyle/>
+          <a:p>
+            <a:pPr indent="0" marL="0">
+              <a:buNone/>
+            </a:pPr>
+            <a:r>
+              <a:rPr lang="en-US" sz="1250" b="1" dirty="0">
+                <a:solidFill>
+                  <a:srgbClr val="0B0F19"/>
+                </a:solidFill>
+                <a:latin typeface="Arial" pitchFamily="34" charset="0"/>
+                <a:ea typeface="Arial" pitchFamily="34" charset="-122"/>
+                <a:cs typeface="Arial" pitchFamily="34" charset="-120"/>
+              </a:rPr>
+              <a:t>L'écart, tranché au rayon</a:t>
+            </a:r>
+            <a:endParaRPr lang="en-US" sz="1250" dirty="0"/>
+          </a:p>
+        </p:txBody>
+      </p:sp>
+      <p:sp>
+        <p:nvSpPr>
+          <p:cNvPr id="10" name="Shape 7"/>
+          <p:cNvSpPr/>
+          <p:nvPr/>
+        </p:nvSpPr>
+        <p:spPr>
+          <a:xfrm>
+            <a:off x="676656" y="3191256"/>
+            <a:ext cx="5244084" cy="2059239"/>
           </a:xfrm>
           <a:prstGeom prst="roundRect">
             <a:avLst>
-              <a:gd name="adj" fmla="val 1717"/>
+              <a:gd name="adj" fmla="val 3552"/>
             </a:avLst>
           </a:prstGeom>
           <a:solidFill>
@@ -6458,7 +6757,7 @@
       </p:sp>
       <p:pic>
         <p:nvPicPr>
-          <p:cNvPr id="10" name="Image 1" descr="preencoded.png">    </p:cNvPr>
+          <p:cNvPr id="11" name="Image 1" descr="preencoded.png">    </p:cNvPr>
           <p:cNvPicPr>
             <a:picLocks noChangeAspect="1"/>
           </p:cNvPicPr>
@@ -6472,8 +6771,8 @@
         </p:blipFill>
         <p:spPr>
           <a:xfrm>
-            <a:off x="5394960" y="1371600"/>
-            <a:ext cx="6062472" cy="4150655"/>
+            <a:off x="731520" y="3246120"/>
+            <a:ext cx="5134356" cy="1949511"/>
           </a:xfrm>
           <a:prstGeom prst="rect">
             <a:avLst/>
@@ -6482,14 +6781,65 @@
       </p:pic>
       <p:sp>
         <p:nvSpPr>
-          <p:cNvPr id="11" name="Text 7"/>
-          <p:cNvSpPr/>
-          <p:nvPr/>
-        </p:nvSpPr>
-        <p:spPr>
-          <a:xfrm>
-            <a:off x="5394960" y="5659415"/>
-            <a:ext cx="6062472" cy="365760"/>
+          <p:cNvPr id="12" name="Shape 8"/>
+          <p:cNvSpPr/>
+          <p:nvPr/>
+        </p:nvSpPr>
+        <p:spPr>
+          <a:xfrm>
+            <a:off x="6268212" y="3191256"/>
+            <a:ext cx="5244084" cy="2080383"/>
+          </a:xfrm>
+          <a:prstGeom prst="roundRect">
+            <a:avLst>
+              <a:gd name="adj" fmla="val 3516"/>
+            </a:avLst>
+          </a:prstGeom>
+          <a:solidFill>
+            <a:srgbClr val="FFFFFF"/>
+          </a:solidFill>
+          <a:ln w="12700">
+            <a:solidFill>
+              <a:srgbClr val="E3E6EE"/>
+            </a:solidFill>
+            <a:prstDash val="solid"/>
+          </a:ln>
+        </p:spPr>
+      </p:sp>
+      <p:pic>
+        <p:nvPicPr>
+          <p:cNvPr id="13" name="Image 2" descr="preencoded.png">    </p:cNvPr>
+          <p:cNvPicPr>
+            <a:picLocks noChangeAspect="1"/>
+          </p:cNvPicPr>
+          <p:nvPr/>
+        </p:nvPicPr>
+        <p:blipFill>
+          <a:blip r:embed="rId3"/>
+          <a:stretch>
+            <a:fillRect/>
+          </a:stretch>
+        </p:blipFill>
+        <p:spPr>
+          <a:xfrm>
+            <a:off x="6323076" y="3246120"/>
+            <a:ext cx="5134356" cy="1970655"/>
+          </a:xfrm>
+          <a:prstGeom prst="rect">
+            <a:avLst/>
+          </a:prstGeom>
+        </p:spPr>
+      </p:pic>
+      <p:sp>
+        <p:nvSpPr>
+          <p:cNvPr id="14" name="Text 9"/>
+          <p:cNvSpPr/>
+          <p:nvPr/>
+        </p:nvSpPr>
+        <p:spPr>
+          <a:xfrm>
+            <a:off x="731520" y="5344791"/>
+            <a:ext cx="5134356" cy="365760"/>
           </a:xfrm>
           <a:prstGeom prst="rect">
             <a:avLst/>
@@ -6513,7 +6863,7 @@
                 <a:ea typeface="Arial" pitchFamily="34" charset="-122"/>
                 <a:cs typeface="Arial" pitchFamily="34" charset="-120"/>
               </a:rPr>
-              <a:t>Onglet Rapport, données d'essai.</a:t>
+              <a:t>Onglet Suivi, données d'essai.</a:t>
             </a:r>
             <a:endParaRPr lang="en-US" sz="1000" dirty="0"/>
           </a:p>
@@ -6521,7 +6871,46 @@
       </p:sp>
       <p:sp>
         <p:nvSpPr>
-          <p:cNvPr id="12" name="Text 8"/>
+          <p:cNvPr id="15" name="Text 10"/>
+          <p:cNvSpPr/>
+          <p:nvPr/>
+        </p:nvSpPr>
+        <p:spPr>
+          <a:xfrm>
+            <a:off x="6323076" y="5344791"/>
+            <a:ext cx="5134356" cy="365760"/>
+          </a:xfrm>
+          <a:prstGeom prst="rect">
+            <a:avLst/>
+          </a:prstGeom>
+          <a:noFill/>
+          <a:ln/>
+        </p:spPr>
+        <p:txBody>
+          <a:bodyPr wrap="square" lIns="0" tIns="0" rIns="0" bIns="0" rtlCol="0" anchor="t"/>
+          <a:lstStyle/>
+          <a:p>
+            <a:pPr indent="0" marL="0">
+              <a:buNone/>
+            </a:pPr>
+            <a:r>
+              <a:rPr lang="en-US" sz="1000" i="1" dirty="0">
+                <a:solidFill>
+                  <a:srgbClr val="5B6475"/>
+                </a:solidFill>
+                <a:latin typeface="Arial" pitchFamily="34" charset="0"/>
+                <a:ea typeface="Arial" pitchFamily="34" charset="-122"/>
+                <a:cs typeface="Arial" pitchFamily="34" charset="-120"/>
+              </a:rPr>
+              <a:t>Onglet Écarts d'audit, données d'essai.</a:t>
+            </a:r>
+            <a:endParaRPr lang="en-US" sz="1000" dirty="0"/>
+          </a:p>
+        </p:txBody>
+      </p:sp>
+      <p:sp>
+        <p:nvSpPr>
+          <p:cNvPr id="16" name="Text 11"/>
           <p:cNvSpPr/>
           <p:nvPr/>
         </p:nvSpPr>
@@ -6560,7 +6949,7 @@
       </p:sp>
       <p:sp>
         <p:nvSpPr>
-          <p:cNvPr id="13" name="Text 9"/>
+          <p:cNvPr id="17" name="Text 12"/>
           <p:cNvSpPr/>
           <p:nvPr/>
         </p:nvSpPr>
@@ -6725,7 +7114,7 @@
                 <a:ea typeface="Arial" pitchFamily="34" charset="-122"/>
                 <a:cs typeface="Arial" pitchFamily="34" charset="-120"/>
               </a:rPr>
-              <a:t>L'inventaire aléatoire</a:t>
+              <a:t>Après le comptage</a:t>
             </a:r>
             <a:endParaRPr lang="en-US" sz="1000" dirty="0"/>
           </a:p>
@@ -6764,8 +7153,8 @@
         </p:nvSpPr>
         <p:spPr>
           <a:xfrm>
-            <a:off x="731520" y="1143000"/>
-            <a:ext cx="10725912" cy="822960"/>
+            <a:off x="731520" y="1325880"/>
+            <a:ext cx="4206240" cy="1097280"/>
           </a:xfrm>
           <a:prstGeom prst="rect">
             <a:avLst/>
@@ -6784,7 +7173,7 @@
               <a:buNone/>
             </a:pPr>
             <a:r>
-              <a:rPr lang="en-US" sz="2500" b="1" dirty="0">
+              <a:rPr lang="en-US" sz="2600" b="1" dirty="0">
                 <a:solidFill>
                   <a:srgbClr val="4636B0"/>
                 </a:solidFill>
@@ -6792,9 +7181,9 @@
                 <a:ea typeface="Arial" pitchFamily="34" charset="-122"/>
                 <a:cs typeface="Arial" pitchFamily="34" charset="-120"/>
               </a:rPr>
-              <a:t>Votre projet d'inventaire aléatoire, prêt à fonctionner.</a:t>
-            </a:r>
-            <a:endParaRPr lang="en-US" sz="2500" dirty="0"/>
+              <a:t>Le rapport arrive déjà croisé.</a:t>
+            </a:r>
+            <a:endParaRPr lang="en-US" sz="2600" dirty="0"/>
           </a:p>
         </p:txBody>
       </p:sp>
@@ -6806,8 +7195,8 @@
         </p:nvSpPr>
         <p:spPr>
           <a:xfrm>
-            <a:off x="731520" y="1783080"/>
-            <a:ext cx="8348472" cy="548640"/>
+            <a:off x="731520" y="2606040"/>
+            <a:ext cx="4206240" cy="1371600"/>
           </a:xfrm>
           <a:prstGeom prst="rect">
             <a:avLst/>
@@ -6826,34 +7215,76 @@
               <a:buNone/>
             </a:pPr>
             <a:r>
-              <a:rPr lang="en-US" sz="1200" i="1" dirty="0">
-                <a:solidFill>
-                  <a:srgbClr val="5B6475"/>
-                </a:solidFill>
-                <a:latin typeface="Arial" pitchFamily="34" charset="0"/>
-                <a:ea typeface="Arial" pitchFamily="34" charset="-122"/>
-                <a:cs typeface="Arial" pitchFamily="34" charset="-120"/>
-              </a:rPr>
-              <a:t>Vous en avez posé les objectifs : identifier les vols, tester la rigueur des procédures, garantir que chaque responsable maîtrise son stock. Confier le comptage au floor, c'est exactement cela.</a:t>
-            </a:r>
-            <a:endParaRPr lang="en-US" sz="1200" dirty="0"/>
-          </a:p>
-        </p:txBody>
-      </p:sp>
-      <p:sp>
-        <p:nvSpPr>
-          <p:cNvPr id="8" name="Shape 5"/>
-          <p:cNvSpPr/>
-          <p:nvPr/>
-        </p:nvSpPr>
-        <p:spPr>
-          <a:xfrm>
-            <a:off x="9725171" y="2377440"/>
-            <a:ext cx="1732261" cy="3657600"/>
+              <a:rPr lang="en-US" sz="1250" dirty="0">
+                <a:solidFill>
+                  <a:srgbClr val="3D4556"/>
+                </a:solidFill>
+                <a:latin typeface="Arial" pitchFamily="34" charset="0"/>
+                <a:ea typeface="Arial" pitchFamily="34" charset="-122"/>
+                <a:cs typeface="Arial" pitchFamily="34" charset="-120"/>
+              </a:rPr>
+              <a:t>Il part du stock théorique, pas seulement de ce qui a été scanné : un article attendu et jamais trouvé y figure, avec son manque. Le recoupement n'est plus à faire.</a:t>
+            </a:r>
+            <a:endParaRPr lang="en-US" sz="1250" dirty="0"/>
+          </a:p>
+        </p:txBody>
+      </p:sp>
+      <p:sp>
+        <p:nvSpPr>
+          <p:cNvPr id="8" name="Text 5"/>
+          <p:cNvSpPr/>
+          <p:nvPr/>
+        </p:nvSpPr>
+        <p:spPr>
+          <a:xfrm>
+            <a:off x="731520" y="3977640"/>
+            <a:ext cx="4206240" cy="1097280"/>
+          </a:xfrm>
+          <a:prstGeom prst="rect">
+            <a:avLst/>
+          </a:prstGeom>
+          <a:noFill/>
+          <a:ln/>
+        </p:spPr>
+        <p:txBody>
+          <a:bodyPr wrap="square" lIns="0" tIns="0" rIns="0" bIns="0" rtlCol="0" anchor="t"/>
+          <a:lstStyle/>
+          <a:p>
+            <a:pPr algn="l" indent="0" marL="0">
+              <a:lnSpc>
+                <a:spcPct val="118000"/>
+              </a:lnSpc>
+              <a:buNone/>
+            </a:pPr>
+            <a:r>
+              <a:rPr lang="en-US" sz="1250" dirty="0">
+                <a:solidFill>
+                  <a:srgbClr val="3D4556"/>
+                </a:solidFill>
+                <a:latin typeface="Arial" pitchFamily="34" charset="0"/>
+                <a:ea typeface="Arial" pitchFamily="34" charset="-122"/>
+                <a:cs typeface="Arial" pitchFamily="34" charset="-120"/>
+              </a:rPr>
+              <a:t>Export Excel en un clic. Restent la validation, selon la valeur de l'écart, et l'ajustement du stock.</a:t>
+            </a:r>
+            <a:endParaRPr lang="en-US" sz="1250" dirty="0"/>
+          </a:p>
+        </p:txBody>
+      </p:sp>
+      <p:sp>
+        <p:nvSpPr>
+          <p:cNvPr id="9" name="Shape 6"/>
+          <p:cNvSpPr/>
+          <p:nvPr/>
+        </p:nvSpPr>
+        <p:spPr>
+          <a:xfrm>
+            <a:off x="5340096" y="1316736"/>
+            <a:ext cx="6172200" cy="4260383"/>
           </a:xfrm>
           <a:prstGeom prst="roundRect">
             <a:avLst>
-              <a:gd name="adj" fmla="val 15836"/>
+              <a:gd name="adj" fmla="val 1717"/>
             </a:avLst>
           </a:prstGeom>
           <a:solidFill>
@@ -6861,22 +7292,15 @@
           </a:solidFill>
           <a:ln w="12700">
             <a:solidFill>
-              <a:srgbClr val="FFFFFF"/>
+              <a:srgbClr val="E3E6EE"/>
             </a:solidFill>
             <a:prstDash val="solid"/>
           </a:ln>
-          <a:effectLst>
-            <a:outerShdw sx="100000" sy="100000" kx="0" ky="0" algn="bl" rotWithShape="0" blurRad="177800" dist="38100" dir="5400000">
-              <a:srgbClr val="0B0F19">
-                <a:alpha val="18000"/>
-              </a:srgbClr>
-            </a:outerShdw>
-          </a:effectLst>
         </p:spPr>
       </p:sp>
       <p:pic>
         <p:nvPicPr>
-          <p:cNvPr id="9" name="Image 1" descr="preencoded.png">    </p:cNvPr>
+          <p:cNvPr id="10" name="Image 1" descr="preencoded.png">    </p:cNvPr>
           <p:cNvPicPr>
             <a:picLocks noChangeAspect="1"/>
           </p:cNvPicPr>
@@ -6890,8 +7314,8 @@
         </p:blipFill>
         <p:spPr>
           <a:xfrm>
-            <a:off x="9725171" y="2377440"/>
-            <a:ext cx="1732261" cy="3657600"/>
+            <a:off x="5394960" y="1371600"/>
+            <a:ext cx="6062472" cy="4150655"/>
           </a:xfrm>
           <a:prstGeom prst="rect">
             <a:avLst/>
@@ -6900,14 +7324,14 @@
       </p:pic>
       <p:sp>
         <p:nvSpPr>
-          <p:cNvPr id="10" name="Text 6"/>
-          <p:cNvSpPr/>
-          <p:nvPr/>
-        </p:nvSpPr>
-        <p:spPr>
-          <a:xfrm>
-            <a:off x="9267971" y="6163056"/>
-            <a:ext cx="2646661" cy="329184"/>
+          <p:cNvPr id="11" name="Text 7"/>
+          <p:cNvSpPr/>
+          <p:nvPr/>
+        </p:nvSpPr>
+        <p:spPr>
+          <a:xfrm>
+            <a:off x="5394960" y="5659415"/>
+            <a:ext cx="6062472" cy="365760"/>
           </a:xfrm>
           <a:prstGeom prst="rect">
             <a:avLst/>
@@ -6919,7 +7343,7 @@
           <a:bodyPr wrap="square" lIns="0" tIns="0" rIns="0" bIns="0" rtlCol="0" anchor="t"/>
           <a:lstStyle/>
           <a:p>
-            <a:pPr algn="ctr" indent="0" marL="0">
+            <a:pPr indent="0" marL="0">
               <a:buNone/>
             </a:pPr>
             <a:r>
@@ -6931,203 +7355,9 @@
                 <a:ea typeface="Arial" pitchFamily="34" charset="-122"/>
                 <a:cs typeface="Arial" pitchFamily="34" charset="-120"/>
               </a:rPr>
-              <a:t>Créer un inventaire ciblé, dans l'application.</a:t>
+              <a:t>Onglet Rapport, données d'essai.</a:t>
             </a:r>
             <a:endParaRPr lang="en-US" sz="1000" dirty="0"/>
-          </a:p>
-        </p:txBody>
-      </p:sp>
-      <p:sp>
-        <p:nvSpPr>
-          <p:cNvPr id="11" name="Text 7"/>
-          <p:cNvSpPr/>
-          <p:nvPr/>
-        </p:nvSpPr>
-        <p:spPr>
-          <a:xfrm>
-            <a:off x="731520" y="2514600"/>
-            <a:ext cx="8445011" cy="3566160"/>
-          </a:xfrm>
-          <a:prstGeom prst="rect">
-            <a:avLst/>
-          </a:prstGeom>
-          <a:noFill/>
-          <a:ln/>
-        </p:spPr>
-        <p:txBody>
-          <a:bodyPr wrap="square" lIns="0" tIns="0" rIns="0" bIns="0" rtlCol="0" anchor="t"/>
-          <a:lstStyle/>
-          <a:p>
-            <a:pPr indent="0" marL="0">
-              <a:lnSpc>
-                <a:spcPct val="118000"/>
-              </a:lnSpc>
-              <a:spcAft>
-                <a:spcPts val="1400"/>
-              </a:spcAft>
-              <a:buNone/>
-            </a:pPr>
-            <a:r>
-              <a:rPr lang="en-US" sz="1300" b="1" dirty="0">
-                <a:solidFill>
-                  <a:srgbClr val="0B0F19"/>
-                </a:solidFill>
-                <a:latin typeface="Arial" pitchFamily="34" charset="0"/>
-                <a:ea typeface="Arial" pitchFamily="34" charset="-122"/>
-                <a:cs typeface="Arial" pitchFamily="34" charset="-120"/>
-              </a:rPr>
-              <a:t>La sélection. </a:t>
-            </a:r>
-            <a:pPr indent="0" marL="0">
-              <a:lnSpc>
-                <a:spcPct val="118000"/>
-              </a:lnSpc>
-              <a:spcAft>
-                <a:spcPts val="1400"/>
-              </a:spcAft>
-              <a:buNone/>
-            </a:pPr>
-            <a:r>
-              <a:rPr lang="en-US" sz="1300" dirty="0">
-                <a:solidFill>
-                  <a:srgbClr val="3D4556"/>
-                </a:solidFill>
-                <a:latin typeface="Arial" pitchFamily="34" charset="0"/>
-                <a:ea typeface="Arial" pitchFamily="34" charset="-122"/>
-                <a:cs typeface="Arial" pitchFamily="34" charset="-120"/>
-              </a:rPr>
-              <a:t>Elle reste chez vous : variances négatives répétées, articles sensibles, slow movers. Les rapports des inventaires précédents donnent les chiffres d'où cette sélection se tire.</a:t>
-            </a:r>
-            <a:endParaRPr lang="en-US" sz="1300" dirty="0"/>
-          </a:p>
-          <a:p>
-            <a:pPr indent="0" marL="0">
-              <a:lnSpc>
-                <a:spcPct val="118000"/>
-              </a:lnSpc>
-              <a:spcAft>
-                <a:spcPts val="1400"/>
-              </a:spcAft>
-              <a:buNone/>
-            </a:pPr>
-            <a:r>
-              <a:rPr lang="en-US" sz="1300" b="1" dirty="0">
-                <a:solidFill>
-                  <a:srgbClr val="0B0F19"/>
-                </a:solidFill>
-                <a:latin typeface="Arial" pitchFamily="34" charset="0"/>
-                <a:ea typeface="Arial" pitchFamily="34" charset="-122"/>
-                <a:cs typeface="Arial" pitchFamily="34" charset="-120"/>
-              </a:rPr>
-              <a:t>Le déclenchement. </a:t>
-            </a:r>
-            <a:pPr indent="0" marL="0">
-              <a:lnSpc>
-                <a:spcPct val="118000"/>
-              </a:lnSpc>
-              <a:spcAft>
-                <a:spcPts val="1400"/>
-              </a:spcAft>
-              <a:buNone/>
-            </a:pPr>
-            <a:r>
-              <a:rPr lang="en-US" sz="1300" dirty="0">
-                <a:solidFill>
-                  <a:srgbClr val="3D4556"/>
-                </a:solidFill>
-                <a:latin typeface="Arial" pitchFamily="34" charset="0"/>
-                <a:ea typeface="Arial" pitchFamily="34" charset="-122"/>
-                <a:cs typeface="Arial" pitchFamily="34" charset="-120"/>
-              </a:rPr>
-              <a:t>Un inventaire ciblé se crée en quelques minutes — une marque, un rayon, une liste d'articles — le jour même s'il le faut. Les équipes concernées sont invitées depuis l'outil.</a:t>
-            </a:r>
-            <a:endParaRPr lang="en-US" sz="1300" dirty="0"/>
-          </a:p>
-          <a:p>
-            <a:pPr indent="0" marL="0">
-              <a:lnSpc>
-                <a:spcPct val="118000"/>
-              </a:lnSpc>
-              <a:spcAft>
-                <a:spcPts val="1400"/>
-              </a:spcAft>
-              <a:buNone/>
-            </a:pPr>
-            <a:r>
-              <a:rPr lang="en-US" sz="1300" b="1" dirty="0">
-                <a:solidFill>
-                  <a:srgbClr val="0B0F19"/>
-                </a:solidFill>
-                <a:latin typeface="Arial" pitchFamily="34" charset="0"/>
-                <a:ea typeface="Arial" pitchFamily="34" charset="-122"/>
-                <a:cs typeface="Arial" pitchFamily="34" charset="-120"/>
-              </a:rPr>
-              <a:t>Le comptage. </a:t>
-            </a:r>
-            <a:pPr indent="0" marL="0">
-              <a:lnSpc>
-                <a:spcPct val="118000"/>
-              </a:lnSpc>
-              <a:spcAft>
-                <a:spcPts val="1400"/>
-              </a:spcAft>
-              <a:buNone/>
-            </a:pPr>
-            <a:r>
-              <a:rPr lang="en-US" sz="1300" dirty="0">
-                <a:solidFill>
-                  <a:srgbClr val="3D4556"/>
-                </a:solidFill>
-                <a:latin typeface="Arial" pitchFamily="34" charset="0"/>
-                <a:ea typeface="Arial" pitchFamily="34" charset="-122"/>
-                <a:cs typeface="Arial" pitchFamily="34" charset="-120"/>
-              </a:rPr>
-              <a:t>Rien à sortir, rien à monter la veille : c'est ce qui permet à un inventaire ciblé de rester discret, au lieu d'être annoncé par sa préparation.</a:t>
-            </a:r>
-            <a:endParaRPr lang="en-US" sz="1300" dirty="0"/>
-          </a:p>
-          <a:p>
-            <a:pPr indent="0" marL="0">
-              <a:lnSpc>
-                <a:spcPct val="118000"/>
-              </a:lnSpc>
-              <a:spcAft>
-                <a:spcPts val="1400"/>
-              </a:spcAft>
-              <a:buNone/>
-            </a:pPr>
-            <a:r>
-              <a:rPr lang="en-US" sz="1300" b="1" dirty="0">
-                <a:solidFill>
-                  <a:srgbClr val="0B0F19"/>
-                </a:solidFill>
-                <a:latin typeface="Arial" pitchFamily="34" charset="0"/>
-                <a:ea typeface="Arial" pitchFamily="34" charset="-122"/>
-                <a:cs typeface="Arial" pitchFamily="34" charset="-120"/>
-              </a:rPr>
-              <a:t>Le contrôle. </a:t>
-            </a:r>
-            <a:pPr indent="0" marL="0">
-              <a:lnSpc>
-                <a:spcPct val="118000"/>
-              </a:lnSpc>
-              <a:spcAft>
-                <a:spcPts val="1400"/>
-              </a:spcAft>
-              <a:buNone/>
-            </a:pPr>
-            <a:r>
-              <a:rPr lang="en-US" sz="1300" dirty="0">
-                <a:solidFill>
-                  <a:srgbClr val="3D4556"/>
-                </a:solidFill>
-                <a:latin typeface="Arial" pitchFamily="34" charset="0"/>
-                <a:ea typeface="Arial" pitchFamily="34" charset="-122"/>
-                <a:cs typeface="Arial" pitchFamily="34" charset="-120"/>
-              </a:rPr>
-              <a:t>L'écart se lit en direct. S'il dépasse votre seuil, l'Inventory Control reprend la main, et le rapport nourrit l'enquête.</a:t>
-            </a:r>
-            <a:endParaRPr lang="en-US" sz="1300" dirty="0"/>
           </a:p>
         </p:txBody>
       </p:sp>
@@ -7337,7 +7567,7 @@
                 <a:ea typeface="Arial" pitchFamily="34" charset="-122"/>
                 <a:cs typeface="Arial" pitchFamily="34" charset="-120"/>
               </a:rPr>
-              <a:t>Pour être clair</a:t>
+              <a:t>L'inventaire aléatoire</a:t>
             </a:r>
             <a:endParaRPr lang="en-US" sz="1000" dirty="0"/>
           </a:p>
@@ -7404,7 +7634,7 @@
                 <a:ea typeface="Arial" pitchFamily="34" charset="-122"/>
                 <a:cs typeface="Arial" pitchFamily="34" charset="-120"/>
               </a:rPr>
-              <a:t>Pourquoi nous — et ce que nous ne promettons pas.</a:t>
+              <a:t>Votre projet d'inventaire aléatoire, prêt à fonctionner.</a:t>
             </a:r>
             <a:endParaRPr lang="en-US" sz="2500" dirty="0"/>
           </a:p>
@@ -7419,7 +7649,7 @@
         <p:spPr>
           <a:xfrm>
             <a:off x="731520" y="1783080"/>
-            <a:ext cx="5042916" cy="274320"/>
+            <a:ext cx="8348472" cy="548640"/>
           </a:xfrm>
           <a:prstGeom prst="rect">
             <a:avLst/>
@@ -7431,50 +7661,14 @@
           <a:bodyPr wrap="square" lIns="0" tIns="0" rIns="0" bIns="0" rtlCol="0" anchor="t"/>
           <a:lstStyle/>
           <a:p>
-            <a:pPr indent="0" marL="0">
-              <a:buNone/>
-            </a:pPr>
-            <a:r>
-              <a:rPr lang="en-US" sz="1050" b="1" dirty="0">
-                <a:solidFill>
-                  <a:srgbClr val="4636B0"/>
-                </a:solidFill>
-                <a:latin typeface="Arial" pitchFamily="34" charset="0"/>
-                <a:ea typeface="Arial" pitchFamily="34" charset="-122"/>
-                <a:cs typeface="Arial" pitchFamily="34" charset="-120"/>
-              </a:rPr>
-              <a:t>Plutôt que SmartCount</a:t>
-            </a:r>
-            <a:endParaRPr lang="en-US" sz="1050" dirty="0"/>
-          </a:p>
-        </p:txBody>
-      </p:sp>
-      <p:sp>
-        <p:nvSpPr>
-          <p:cNvPr id="8" name="Text 5"/>
-          <p:cNvSpPr/>
-          <p:nvPr/>
-        </p:nvSpPr>
-        <p:spPr>
-          <a:xfrm>
-            <a:off x="6414516" y="1783080"/>
-            <a:ext cx="5042916" cy="274320"/>
-          </a:xfrm>
-          <a:prstGeom prst="rect">
-            <a:avLst/>
-          </a:prstGeom>
-          <a:noFill/>
-          <a:ln/>
-        </p:spPr>
-        <p:txBody>
-          <a:bodyPr wrap="square" lIns="0" tIns="0" rIns="0" bIns="0" rtlCol="0" anchor="t"/>
-          <a:lstStyle/>
-          <a:p>
-            <a:pPr indent="0" marL="0">
-              <a:buNone/>
-            </a:pPr>
-            <a:r>
-              <a:rPr lang="en-US" sz="1050" b="1" dirty="0">
+            <a:pPr algn="l" indent="0" marL="0">
+              <a:lnSpc>
+                <a:spcPct val="118000"/>
+              </a:lnSpc>
+              <a:buNone/>
+            </a:pPr>
+            <a:r>
+              <a:rPr lang="en-US" sz="1200" i="1" dirty="0">
                 <a:solidFill>
                   <a:srgbClr val="5B6475"/>
                 </a:solidFill>
@@ -7482,45 +7676,119 @@
                 <a:ea typeface="Arial" pitchFamily="34" charset="-122"/>
                 <a:cs typeface="Arial" pitchFamily="34" charset="-120"/>
               </a:rPr>
-              <a:t>Ce qu'on ne vous promet pas</a:t>
-            </a:r>
-            <a:endParaRPr lang="en-US" sz="1050" dirty="0"/>
-          </a:p>
-        </p:txBody>
-      </p:sp>
-      <p:sp>
-        <p:nvSpPr>
-          <p:cNvPr id="9" name="Shape 6"/>
-          <p:cNvSpPr/>
-          <p:nvPr/>
-        </p:nvSpPr>
-        <p:spPr>
-          <a:xfrm>
-            <a:off x="731520" y="2103120"/>
-            <a:ext cx="10725912" cy="0"/>
-          </a:xfrm>
-          <a:prstGeom prst="line">
-            <a:avLst/>
-          </a:prstGeom>
-          <a:noFill/>
-          <a:ln w="9525">
+              <a:t>Vous en avez posé les objectifs : identifier les vols, tester la rigueur des procédures, garantir que chaque responsable maîtrise son stock. Confier le comptage au floor, c'est exactement cela.</a:t>
+            </a:r>
+            <a:endParaRPr lang="en-US" sz="1200" dirty="0"/>
+          </a:p>
+        </p:txBody>
+      </p:sp>
+      <p:sp>
+        <p:nvSpPr>
+          <p:cNvPr id="8" name="Shape 5"/>
+          <p:cNvSpPr/>
+          <p:nvPr/>
+        </p:nvSpPr>
+        <p:spPr>
+          <a:xfrm>
+            <a:off x="9725171" y="2377440"/>
+            <a:ext cx="1732261" cy="3657600"/>
+          </a:xfrm>
+          <a:prstGeom prst="roundRect">
+            <a:avLst>
+              <a:gd name="adj" fmla="val 15836"/>
+            </a:avLst>
+          </a:prstGeom>
+          <a:solidFill>
+            <a:srgbClr val="FFFFFF"/>
+          </a:solidFill>
+          <a:ln w="12700">
             <a:solidFill>
-              <a:srgbClr val="E3E6EE"/>
+              <a:srgbClr val="FFFFFF"/>
             </a:solidFill>
             <a:prstDash val="solid"/>
           </a:ln>
-        </p:spPr>
-      </p:sp>
-      <p:sp>
-        <p:nvSpPr>
-          <p:cNvPr id="10" name="Text 7"/>
-          <p:cNvSpPr/>
-          <p:nvPr/>
-        </p:nvSpPr>
-        <p:spPr>
-          <a:xfrm>
-            <a:off x="731520" y="2286000"/>
-            <a:ext cx="5042916" cy="2651760"/>
+          <a:effectLst>
+            <a:outerShdw sx="100000" sy="100000" kx="0" ky="0" algn="bl" rotWithShape="0" blurRad="177800" dist="38100" dir="5400000">
+              <a:srgbClr val="0B0F19">
+                <a:alpha val="18000"/>
+              </a:srgbClr>
+            </a:outerShdw>
+          </a:effectLst>
+        </p:spPr>
+      </p:sp>
+      <p:pic>
+        <p:nvPicPr>
+          <p:cNvPr id="9" name="Image 1" descr="preencoded.png">    </p:cNvPr>
+          <p:cNvPicPr>
+            <a:picLocks noChangeAspect="1"/>
+          </p:cNvPicPr>
+          <p:nvPr/>
+        </p:nvPicPr>
+        <p:blipFill>
+          <a:blip r:embed="rId2"/>
+          <a:stretch>
+            <a:fillRect/>
+          </a:stretch>
+        </p:blipFill>
+        <p:spPr>
+          <a:xfrm>
+            <a:off x="9725171" y="2377440"/>
+            <a:ext cx="1732261" cy="3657600"/>
+          </a:xfrm>
+          <a:prstGeom prst="rect">
+            <a:avLst/>
+          </a:prstGeom>
+        </p:spPr>
+      </p:pic>
+      <p:sp>
+        <p:nvSpPr>
+          <p:cNvPr id="10" name="Text 6"/>
+          <p:cNvSpPr/>
+          <p:nvPr/>
+        </p:nvSpPr>
+        <p:spPr>
+          <a:xfrm>
+            <a:off x="9267971" y="6163056"/>
+            <a:ext cx="2646661" cy="329184"/>
+          </a:xfrm>
+          <a:prstGeom prst="rect">
+            <a:avLst/>
+          </a:prstGeom>
+          <a:noFill/>
+          <a:ln/>
+        </p:spPr>
+        <p:txBody>
+          <a:bodyPr wrap="square" lIns="0" tIns="0" rIns="0" bIns="0" rtlCol="0" anchor="t"/>
+          <a:lstStyle/>
+          <a:p>
+            <a:pPr algn="ctr" indent="0" marL="0">
+              <a:buNone/>
+            </a:pPr>
+            <a:r>
+              <a:rPr lang="en-US" sz="1000" i="1" dirty="0">
+                <a:solidFill>
+                  <a:srgbClr val="5B6475"/>
+                </a:solidFill>
+                <a:latin typeface="Arial" pitchFamily="34" charset="0"/>
+                <a:ea typeface="Arial" pitchFamily="34" charset="-122"/>
+                <a:cs typeface="Arial" pitchFamily="34" charset="-120"/>
+              </a:rPr>
+              <a:t>Créer un inventaire ciblé, dans l'application.</a:t>
+            </a:r>
+            <a:endParaRPr lang="en-US" sz="1000" dirty="0"/>
+          </a:p>
+        </p:txBody>
+      </p:sp>
+      <p:sp>
+        <p:nvSpPr>
+          <p:cNvPr id="11" name="Text 7"/>
+          <p:cNvSpPr/>
+          <p:nvPr/>
+        </p:nvSpPr>
+        <p:spPr>
+          <a:xfrm>
+            <a:off x="731520" y="2514600"/>
+            <a:ext cx="8445011" cy="3566160"/>
           </a:xfrm>
           <a:prstGeom prst="rect">
             <a:avLst/>
@@ -7537,12 +7805,12 @@
                 <a:spcPct val="118000"/>
               </a:lnSpc>
               <a:spcAft>
-                <a:spcPts val="1000"/>
+                <a:spcPts val="1400"/>
               </a:spcAft>
               <a:buNone/>
             </a:pPr>
             <a:r>
-              <a:rPr lang="en-US" sz="1150" b="1" dirty="0">
+              <a:rPr lang="en-US" sz="1300" b="1" dirty="0">
                 <a:solidFill>
                   <a:srgbClr val="0B0F19"/>
                 </a:solidFill>
@@ -7550,19 +7818,19 @@
                 <a:ea typeface="Arial" pitchFamily="34" charset="-122"/>
                 <a:cs typeface="Arial" pitchFamily="34" charset="-120"/>
               </a:rPr>
-              <a:t>Le matériel. </a:t>
+              <a:t>La sélection. </a:t>
             </a:r>
             <a:pPr indent="0" marL="0">
               <a:lnSpc>
                 <a:spcPct val="118000"/>
               </a:lnSpc>
               <a:spcAft>
-                <a:spcPts val="1000"/>
+                <a:spcPts val="1400"/>
               </a:spcAft>
               <a:buNone/>
             </a:pPr>
             <a:r>
-              <a:rPr lang="en-US" sz="1150" dirty="0">
+              <a:rPr lang="en-US" sz="1300" dirty="0">
                 <a:solidFill>
                   <a:srgbClr val="3D4556"/>
                 </a:solidFill>
@@ -7570,9 +7838,9 @@
                 <a:ea typeface="Arial" pitchFamily="34" charset="-122"/>
                 <a:cs typeface="Arial" pitchFamily="34" charset="-120"/>
               </a:rPr>
-              <a:t>SmartCount repose sur une flotte de terminaux dédiés : à charger, configurer, vérifier avant chaque session — le métier qu'on cherche justement à ne plus faire. Quantinvo tourne sur les iPhone que vos équipes ont déjà, et une douchette Bluetooth s'y branche pour les gros volumes.</a:t>
-            </a:r>
-            <a:endParaRPr lang="en-US" sz="1150" dirty="0"/>
+              <a:t>Elle reste chez vous : variances négatives répétées, articles sensibles, slow movers. Les rapports des inventaires précédents donnent les chiffres d'où cette sélection se tire.</a:t>
+            </a:r>
+            <a:endParaRPr lang="en-US" sz="1300" dirty="0"/>
           </a:p>
           <a:p>
             <a:pPr indent="0" marL="0">
@@ -7580,12 +7848,12 @@
                 <a:spcPct val="118000"/>
               </a:lnSpc>
               <a:spcAft>
-                <a:spcPts val="1000"/>
+                <a:spcPts val="1400"/>
               </a:spcAft>
               <a:buNone/>
             </a:pPr>
             <a:r>
-              <a:rPr lang="en-US" sz="1150" b="1" dirty="0">
+              <a:rPr lang="en-US" sz="1300" b="1" dirty="0">
                 <a:solidFill>
                   <a:srgbClr val="0B0F19"/>
                 </a:solidFill>
@@ -7593,19 +7861,19 @@
                 <a:ea typeface="Arial" pitchFamily="34" charset="-122"/>
                 <a:cs typeface="Arial" pitchFamily="34" charset="-120"/>
               </a:rPr>
-              <a:t>La réconciliation. </a:t>
+              <a:t>Le déclenchement. </a:t>
             </a:r>
             <a:pPr indent="0" marL="0">
               <a:lnSpc>
                 <a:spcPct val="118000"/>
               </a:lnSpc>
               <a:spcAft>
-                <a:spcPts val="1000"/>
+                <a:spcPts val="1400"/>
               </a:spcAft>
               <a:buNone/>
             </a:pPr>
             <a:r>
-              <a:rPr lang="en-US" sz="1150" dirty="0">
+              <a:rPr lang="en-US" sz="1300" dirty="0">
                 <a:solidFill>
                   <a:srgbClr val="3D4556"/>
                 </a:solidFill>
@@ -7613,9 +7881,9 @@
                 <a:ea typeface="Arial" pitchFamily="34" charset="-122"/>
                 <a:cs typeface="Arial" pitchFamily="34" charset="-120"/>
               </a:rPr>
-              <a:t>SmartCount rend un rapport de variance, à consolider ensuite avec le stock théorique. Quantinvo rend ce croisement déjà fait : l'attendu, le compté, le non-compté, l'écart en valeur.</a:t>
-            </a:r>
-            <a:endParaRPr lang="en-US" sz="1150" dirty="0"/>
+              <a:t>Un inventaire ciblé se crée en quelques minutes — une marque, un rayon, une liste d'articles — le jour même s'il le faut. Les équipes concernées sont invitées depuis l'outil.</a:t>
+            </a:r>
+            <a:endParaRPr lang="en-US" sz="1300" dirty="0"/>
           </a:p>
           <a:p>
             <a:pPr indent="0" marL="0">
@@ -7623,12 +7891,12 @@
                 <a:spcPct val="118000"/>
               </a:lnSpc>
               <a:spcAft>
-                <a:spcPts val="1000"/>
+                <a:spcPts val="1400"/>
               </a:spcAft>
               <a:buNone/>
             </a:pPr>
             <a:r>
-              <a:rPr lang="en-US" sz="1150" b="1" dirty="0">
+              <a:rPr lang="en-US" sz="1300" b="1" dirty="0">
                 <a:solidFill>
                   <a:srgbClr val="0B0F19"/>
                 </a:solidFill>
@@ -7636,19 +7904,19 @@
                 <a:ea typeface="Arial" pitchFamily="34" charset="-122"/>
                 <a:cs typeface="Arial" pitchFamily="34" charset="-120"/>
               </a:rPr>
-              <a:t>L'éditeur. </a:t>
+              <a:t>Le comptage. </a:t>
             </a:r>
             <a:pPr indent="0" marL="0">
               <a:lnSpc>
                 <a:spcPct val="118000"/>
               </a:lnSpc>
               <a:spcAft>
-                <a:spcPts val="1000"/>
+                <a:spcPts val="1400"/>
               </a:spcAft>
               <a:buNone/>
             </a:pPr>
             <a:r>
-              <a:rPr lang="en-US" sz="1150" dirty="0">
+              <a:rPr lang="en-US" sz="1300" dirty="0">
                 <a:solidFill>
                   <a:srgbClr val="3D4556"/>
                 </a:solidFill>
@@ -7656,44 +7924,22 @@
                 <a:ea typeface="Arial" pitchFamily="34" charset="-122"/>
                 <a:cs typeface="Arial" pitchFamily="34" charset="-120"/>
               </a:rPr>
-              <a:t>SmartCount est un module au catalogue d'un géant du matériel. Quantinvo ne fait qu'une chose — l'inventaire — et la personne qui l'a dessiné répond elle-même à vos questions.</a:t>
-            </a:r>
-            <a:endParaRPr lang="en-US" sz="1150" dirty="0"/>
-          </a:p>
-        </p:txBody>
-      </p:sp>
-      <p:sp>
-        <p:nvSpPr>
-          <p:cNvPr id="11" name="Text 8"/>
-          <p:cNvSpPr/>
-          <p:nvPr/>
-        </p:nvSpPr>
-        <p:spPr>
-          <a:xfrm>
-            <a:off x="6414516" y="2286000"/>
-            <a:ext cx="5042916" cy="2651760"/>
-          </a:xfrm>
-          <a:prstGeom prst="rect">
-            <a:avLst/>
-          </a:prstGeom>
-          <a:noFill/>
-          <a:ln/>
-        </p:spPr>
-        <p:txBody>
-          <a:bodyPr wrap="square" lIns="0" tIns="0" rIns="0" bIns="0" rtlCol="0" anchor="t"/>
-          <a:lstStyle/>
+              <a:t>Rien à sortir, rien à monter la veille : c'est ce qui permet à un inventaire ciblé de rester discret, au lieu d'être annoncé par sa préparation.</a:t>
+            </a:r>
+            <a:endParaRPr lang="en-US" sz="1300" dirty="0"/>
+          </a:p>
           <a:p>
             <a:pPr indent="0" marL="0">
               <a:lnSpc>
                 <a:spcPct val="118000"/>
               </a:lnSpc>
               <a:spcAft>
-                <a:spcPts val="1000"/>
+                <a:spcPts val="1400"/>
               </a:spcAft>
               <a:buNone/>
             </a:pPr>
             <a:r>
-              <a:rPr lang="en-US" sz="1150" b="1" dirty="0">
+              <a:rPr lang="en-US" sz="1300" b="1" dirty="0">
                 <a:solidFill>
                   <a:srgbClr val="0B0F19"/>
                 </a:solidFill>
@@ -7701,19 +7947,19 @@
                 <a:ea typeface="Arial" pitchFamily="34" charset="-122"/>
                 <a:cs typeface="Arial" pitchFamily="34" charset="-120"/>
               </a:rPr>
-              <a:t>L'inventaire fiscal certifié. </a:t>
+              <a:t>Le contrôle. </a:t>
             </a:r>
             <a:pPr indent="0" marL="0">
               <a:lnSpc>
                 <a:spcPct val="118000"/>
               </a:lnSpc>
               <a:spcAft>
-                <a:spcPts val="1000"/>
+                <a:spcPts val="1400"/>
               </a:spcAft>
               <a:buNone/>
             </a:pPr>
             <a:r>
-              <a:rPr lang="en-US" sz="1150" dirty="0">
+              <a:rPr lang="en-US" sz="1300" dirty="0">
                 <a:solidFill>
                   <a:srgbClr val="3D4556"/>
                 </a:solidFill>
@@ -7721,252 +7967,15 @@
                 <a:ea typeface="Arial" pitchFamily="34" charset="-122"/>
                 <a:cs typeface="Arial" pitchFamily="34" charset="-120"/>
               </a:rPr>
-              <a:t>Si votre commissaire aux comptes exige un comptage par un tiers, ce comptage reste. Quantinvo fait tout le reste de l'année, et il le prépare.</a:t>
-            </a:r>
-            <a:endParaRPr lang="en-US" sz="1150" dirty="0"/>
-          </a:p>
-          <a:p>
-            <a:pPr indent="0" marL="0">
-              <a:lnSpc>
-                <a:spcPct val="118000"/>
-              </a:lnSpc>
-              <a:spcAft>
-                <a:spcPts val="1000"/>
-              </a:spcAft>
-              <a:buNone/>
-            </a:pPr>
-            <a:r>
-              <a:rPr lang="en-US" sz="1150" b="1" dirty="0">
-                <a:solidFill>
-                  <a:srgbClr val="0B0F19"/>
-                </a:solidFill>
-                <a:latin typeface="Arial" pitchFamily="34" charset="0"/>
-                <a:ea typeface="Arial" pitchFamily="34" charset="-122"/>
-                <a:cs typeface="Arial" pitchFamily="34" charset="-120"/>
-              </a:rPr>
-              <a:t>Une connexion à votre ERP. </a:t>
-            </a:r>
-            <a:pPr indent="0" marL="0">
-              <a:lnSpc>
-                <a:spcPct val="118000"/>
-              </a:lnSpc>
-              <a:spcAft>
-                <a:spcPts val="1000"/>
-              </a:spcAft>
-              <a:buNone/>
-            </a:pPr>
-            <a:r>
-              <a:rPr lang="en-US" sz="1150" dirty="0">
-                <a:solidFill>
-                  <a:srgbClr val="3D4556"/>
-                </a:solidFill>
-                <a:latin typeface="Arial" pitchFamily="34" charset="0"/>
-                <a:ea typeface="Arial" pitchFamily="34" charset="-122"/>
-                <a:cs typeface="Arial" pitchFamily="34" charset="-120"/>
-              </a:rPr>
-              <a:t>Quantinvo importe vos fichiers et rend un Excel. L'ajustement du stock reste un geste dans votre système — le seul qui doive le rester.</a:t>
-            </a:r>
-            <a:endParaRPr lang="en-US" sz="1150" dirty="0"/>
-          </a:p>
-          <a:p>
-            <a:pPr indent="0" marL="0">
-              <a:lnSpc>
-                <a:spcPct val="118000"/>
-              </a:lnSpc>
-              <a:spcAft>
-                <a:spcPts val="1000"/>
-              </a:spcAft>
-              <a:buNone/>
-            </a:pPr>
-            <a:r>
-              <a:rPr lang="en-US" sz="1150" b="1" dirty="0">
-                <a:solidFill>
-                  <a:srgbClr val="0B0F19"/>
-                </a:solidFill>
-                <a:latin typeface="Arial" pitchFamily="34" charset="0"/>
-                <a:ea typeface="Arial" pitchFamily="34" charset="-122"/>
-                <a:cs typeface="Arial" pitchFamily="34" charset="-120"/>
-              </a:rPr>
-              <a:t>La connexion par votre annuaire. </a:t>
-            </a:r>
-            <a:pPr indent="0" marL="0">
-              <a:lnSpc>
-                <a:spcPct val="118000"/>
-              </a:lnSpc>
-              <a:spcAft>
-                <a:spcPts val="1000"/>
-              </a:spcAft>
-              <a:buNone/>
-            </a:pPr>
-            <a:r>
-              <a:rPr lang="en-US" sz="1150" dirty="0">
-                <a:solidFill>
-                  <a:srgbClr val="3D4556"/>
-                </a:solidFill>
-                <a:latin typeface="Arial" pitchFamily="34" charset="0"/>
-                <a:ea typeface="Arial" pitchFamily="34" charset="-122"/>
-                <a:cs typeface="Arial" pitchFamily="34" charset="-120"/>
-              </a:rPr>
-              <a:t>Les comptes sont nominatifs, créés par invitation. Pas de SAML ni d'Entra ID ; dites-nous si c'est une exigence.</a:t>
-            </a:r>
-            <a:endParaRPr lang="en-US" sz="1150" dirty="0"/>
-          </a:p>
-          <a:p>
-            <a:pPr indent="0" marL="0">
-              <a:lnSpc>
-                <a:spcPct val="118000"/>
-              </a:lnSpc>
-              <a:spcAft>
-                <a:spcPts val="1000"/>
-              </a:spcAft>
-              <a:buNone/>
-            </a:pPr>
-            <a:r>
-              <a:rPr lang="en-US" sz="1150" b="1" dirty="0">
-                <a:solidFill>
-                  <a:srgbClr val="0B0F19"/>
-                </a:solidFill>
-                <a:latin typeface="Arial" pitchFamily="34" charset="0"/>
-                <a:ea typeface="Arial" pitchFamily="34" charset="-122"/>
-                <a:cs typeface="Arial" pitchFamily="34" charset="-120"/>
-              </a:rPr>
-              <a:t>Android sur les boutiques. </a:t>
-            </a:r>
-            <a:pPr indent="0" marL="0">
-              <a:lnSpc>
-                <a:spcPct val="118000"/>
-              </a:lnSpc>
-              <a:spcAft>
-                <a:spcPts val="1000"/>
-              </a:spcAft>
-              <a:buNone/>
-            </a:pPr>
-            <a:r>
-              <a:rPr lang="en-US" sz="1150" dirty="0">
-                <a:solidFill>
-                  <a:srgbClr val="3D4556"/>
-                </a:solidFill>
-                <a:latin typeface="Arial" pitchFamily="34" charset="0"/>
-                <a:ea typeface="Arial" pitchFamily="34" charset="-122"/>
-                <a:cs typeface="Arial" pitchFamily="34" charset="-120"/>
-              </a:rPr>
-              <a:t>L'application tourne sur Android et sur iPhone. Sa mise en ligne sur Google Play est en cours ; d'ici là, elle passe par votre catalogue d'entreprise.</a:t>
-            </a:r>
-            <a:endParaRPr lang="en-US" sz="1150" dirty="0"/>
-          </a:p>
-        </p:txBody>
-      </p:sp>
-      <p:sp>
-        <p:nvSpPr>
-          <p:cNvPr id="12" name="Shape 9"/>
-          <p:cNvSpPr/>
-          <p:nvPr/>
-        </p:nvSpPr>
-        <p:spPr>
-          <a:xfrm>
-            <a:off x="731520" y="5166360"/>
-            <a:ext cx="10725912" cy="1051560"/>
-          </a:xfrm>
-          <a:prstGeom prst="roundRect">
-            <a:avLst>
-              <a:gd name="adj" fmla="val 6957"/>
-            </a:avLst>
-          </a:prstGeom>
-          <a:solidFill>
-            <a:srgbClr val="F4F5F9"/>
-          </a:solidFill>
-          <a:ln w="12700">
-            <a:solidFill>
-              <a:srgbClr val="F4F5F9"/>
-            </a:solidFill>
-            <a:prstDash val="solid"/>
-          </a:ln>
-        </p:spPr>
-      </p:sp>
-      <p:sp>
-        <p:nvSpPr>
-          <p:cNvPr id="13" name="Text 10"/>
-          <p:cNvSpPr/>
-          <p:nvPr/>
-        </p:nvSpPr>
-        <p:spPr>
-          <a:xfrm>
-            <a:off x="1005840" y="5330952"/>
-            <a:ext cx="10177272" cy="228600"/>
-          </a:xfrm>
-          <a:prstGeom prst="rect">
-            <a:avLst/>
-          </a:prstGeom>
-          <a:noFill/>
-          <a:ln/>
-        </p:spPr>
-        <p:txBody>
-          <a:bodyPr wrap="square" lIns="0" tIns="0" rIns="0" bIns="0" rtlCol="0" anchor="t"/>
-          <a:lstStyle/>
-          <a:p>
-            <a:pPr indent="0" marL="0">
-              <a:buNone/>
-            </a:pPr>
-            <a:r>
-              <a:rPr lang="en-US" sz="950" b="1" dirty="0">
-                <a:solidFill>
-                  <a:srgbClr val="5B6475"/>
-                </a:solidFill>
-                <a:latin typeface="Arial" pitchFamily="34" charset="0"/>
-                <a:ea typeface="Arial" pitchFamily="34" charset="-122"/>
-                <a:cs typeface="Arial" pitchFamily="34" charset="-120"/>
-              </a:rPr>
-              <a:t>Pour être honnête</a:t>
-            </a:r>
-            <a:endParaRPr lang="en-US" sz="950" dirty="0"/>
-          </a:p>
-        </p:txBody>
-      </p:sp>
-      <p:sp>
-        <p:nvSpPr>
-          <p:cNvPr id="14" name="Text 11"/>
-          <p:cNvSpPr/>
-          <p:nvPr/>
-        </p:nvSpPr>
-        <p:spPr>
-          <a:xfrm>
-            <a:off x="1005840" y="5586984"/>
-            <a:ext cx="10177272" cy="502920"/>
-          </a:xfrm>
-          <a:prstGeom prst="rect">
-            <a:avLst/>
-          </a:prstGeom>
-          <a:noFill/>
-          <a:ln/>
-        </p:spPr>
-        <p:txBody>
-          <a:bodyPr wrap="square" lIns="0" tIns="0" rIns="0" bIns="0" rtlCol="0" anchor="t"/>
-          <a:lstStyle/>
-          <a:p>
-            <a:pPr indent="0" marL="0">
-              <a:lnSpc>
-                <a:spcPct val="115000"/>
-              </a:lnSpc>
-              <a:buNone/>
-            </a:pPr>
-            <a:r>
-              <a:rPr lang="en-US" sz="1150" i="1" dirty="0">
-                <a:solidFill>
-                  <a:srgbClr val="3D4556"/>
-                </a:solidFill>
-                <a:latin typeface="Arial" pitchFamily="34" charset="0"/>
-                <a:ea typeface="Arial" pitchFamily="34" charset="-122"/>
-                <a:cs typeface="Arial" pitchFamily="34" charset="-120"/>
-              </a:rPr>
-              <a:t>Un terminal durci encaisse mieux les chocs qu'un téléphone, et si votre flotte est déjà amortie, l'argument du matériel pèse moins. Ce qui ne bouge pas : un outil que le floor prend en main sans briefing, et une réconciliation qui n'existe plus.</a:t>
-            </a:r>
-            <a:endParaRPr lang="en-US" sz="1150" dirty="0"/>
-          </a:p>
-        </p:txBody>
-      </p:sp>
-      <p:sp>
-        <p:nvSpPr>
-          <p:cNvPr id="15" name="Text 12"/>
+              <a:t>L'écart se lit en direct. S'il dépasse votre seuil, l'Inventory Control reprend la main, et le rapport nourrit l'enquête.</a:t>
+            </a:r>
+            <a:endParaRPr lang="en-US" sz="1300" dirty="0"/>
+          </a:p>
+        </p:txBody>
+      </p:sp>
+      <p:sp>
+        <p:nvSpPr>
+          <p:cNvPr id="12" name="Text 8"/>
           <p:cNvSpPr/>
           <p:nvPr/>
         </p:nvSpPr>
@@ -8005,7 +8014,7 @@
       </p:sp>
       <p:sp>
         <p:nvSpPr>
-          <p:cNvPr id="16" name="Text 13"/>
+          <p:cNvPr id="13" name="Text 9"/>
           <p:cNvSpPr/>
           <p:nvPr/>
         </p:nvSpPr>

--- a/docs/entreprise/deck/Quantinvo-Samaritaine.pptx
+++ b/docs/entreprise/deck/Quantinvo-Samaritaine.pptx
@@ -1854,43 +1854,9 @@
           <a:chExt cx="0" cy="0"/>
         </a:xfrm>
       </p:grpSpPr>
-      <p:sp>
-        <p:nvSpPr>
-          <p:cNvPr id="2" name="Shape 0"/>
-          <p:cNvSpPr/>
-          <p:nvPr/>
-        </p:nvSpPr>
-        <p:spPr>
-          <a:xfrm>
-            <a:off x="9075573" y="914400"/>
-            <a:ext cx="2381859" cy="5029200"/>
-          </a:xfrm>
-          <a:prstGeom prst="roundRect">
-            <a:avLst>
-              <a:gd name="adj" fmla="val 11517"/>
-            </a:avLst>
-          </a:prstGeom>
-          <a:solidFill>
-            <a:srgbClr val="FFFFFF"/>
-          </a:solidFill>
-          <a:ln w="12700">
-            <a:solidFill>
-              <a:srgbClr val="FFFFFF"/>
-            </a:solidFill>
-            <a:prstDash val="solid"/>
-          </a:ln>
-          <a:effectLst>
-            <a:outerShdw sx="100000" sy="100000" kx="0" ky="0" algn="bl" rotWithShape="0" blurRad="177800" dist="38100" dir="5400000">
-              <a:srgbClr val="0B0F19">
-                <a:alpha val="18000"/>
-              </a:srgbClr>
-            </a:outerShdw>
-          </a:effectLst>
-        </p:spPr>
-      </p:sp>
       <p:pic>
         <p:nvPicPr>
-          <p:cNvPr id="3" name="Image 0" descr="preencoded.png">    </p:cNvPr>
+          <p:cNvPr id="2" name="Image 0" descr="preencoded.png">    </p:cNvPr>
           <p:cNvPicPr>
             <a:picLocks noChangeAspect="1"/>
           </p:cNvPicPr>
@@ -1914,7 +1880,7 @@
       </p:pic>
       <p:pic>
         <p:nvPicPr>
-          <p:cNvPr id="4" name="Image 1" descr="preencoded.png">    </p:cNvPr>
+          <p:cNvPr id="3" name="Image 1" descr="preencoded.png">    </p:cNvPr>
           <p:cNvPicPr>
             <a:picLocks noChangeAspect="1"/>
           </p:cNvPicPr>
@@ -1938,7 +1904,7 @@
       </p:pic>
       <p:sp>
         <p:nvSpPr>
-          <p:cNvPr id="5" name="Text 1"/>
+          <p:cNvPr id="4" name="Text 0"/>
           <p:cNvSpPr/>
           <p:nvPr/>
         </p:nvSpPr>
@@ -1963,7 +1929,7 @@
             <a:r>
               <a:rPr lang="en-US" sz="2400" b="1" dirty="0">
                 <a:solidFill>
-                  <a:srgbClr val="0B0F19"/>
+                  <a:srgbClr val="14181A"/>
                 </a:solidFill>
                 <a:latin typeface="Arial" pitchFamily="34" charset="0"/>
                 <a:ea typeface="Arial" pitchFamily="34" charset="-122"/>
@@ -1977,28 +1943,67 @@
       </p:sp>
       <p:sp>
         <p:nvSpPr>
-          <p:cNvPr id="6" name="Shape 2"/>
+          <p:cNvPr id="5" name="Shape 1"/>
           <p:cNvSpPr/>
           <p:nvPr/>
         </p:nvSpPr>
         <p:spPr>
           <a:xfrm>
             <a:off x="731520" y="3813048"/>
-            <a:ext cx="2377440" cy="25603"/>
+            <a:ext cx="2011680" cy="20117"/>
           </a:xfrm>
           <a:prstGeom prst="rect">
             <a:avLst/>
           </a:prstGeom>
           <a:solidFill>
-            <a:srgbClr val="38C9FF"/>
+            <a:srgbClr val="14181A"/>
           </a:solidFill>
           <a:ln w="12700">
             <a:solidFill>
-              <a:srgbClr val="38C9FF"/>
+              <a:srgbClr val="14181A"/>
             </a:solidFill>
             <a:prstDash val="solid"/>
           </a:ln>
         </p:spPr>
+      </p:sp>
+      <p:sp>
+        <p:nvSpPr>
+          <p:cNvPr id="6" name="Text 2"/>
+          <p:cNvSpPr/>
+          <p:nvPr/>
+        </p:nvSpPr>
+        <p:spPr>
+          <a:xfrm>
+            <a:off x="731520" y="4005072"/>
+            <a:ext cx="4937760" cy="365760"/>
+          </a:xfrm>
+          <a:prstGeom prst="rect">
+            <a:avLst/>
+          </a:prstGeom>
+          <a:noFill/>
+          <a:ln/>
+        </p:spPr>
+        <p:txBody>
+          <a:bodyPr wrap="square" lIns="0" tIns="0" rIns="0" bIns="0" rtlCol="0" anchor="t"/>
+          <a:lstStyle/>
+          <a:p>
+            <a:pPr indent="0" marL="0">
+              <a:buNone/>
+            </a:pPr>
+            <a:r>
+              <a:rPr lang="en-US" sz="1300" dirty="0">
+                <a:solidFill>
+                  <a:srgbClr val="575F5C"/>
+                </a:solidFill>
+                <a:latin typeface="Arial" pitchFamily="34" charset="0"/>
+                <a:ea typeface="Arial" pitchFamily="34" charset="-122"/>
+                <a:cs typeface="Arial" pitchFamily="34" charset="-120"/>
+              </a:rPr>
+              <a:t>La fiabilisation du stock au quotidien</a:t>
+            </a:r>
+            <a:endParaRPr lang="en-US" sz="1300" dirty="0"/>
+          </a:p>
+        </p:txBody>
       </p:sp>
     </p:spTree>
   </p:cSld>
@@ -2083,7 +2088,7 @@
             <a:r>
               <a:rPr lang="en-US" sz="1600" b="1" dirty="0">
                 <a:solidFill>
-                  <a:srgbClr val="0B0F19"/>
+                  <a:srgbClr val="14181A"/>
                 </a:solidFill>
                 <a:latin typeface="Arial" pitchFamily="34" charset="0"/>
                 <a:ea typeface="Arial" pitchFamily="34" charset="-122"/>
@@ -2122,7 +2127,7 @@
             <a:r>
               <a:rPr lang="en-US" sz="1000" dirty="0">
                 <a:solidFill>
-                  <a:srgbClr val="5B6475"/>
+                  <a:srgbClr val="575F5C"/>
                 </a:solidFill>
                 <a:latin typeface="Arial" pitchFamily="34" charset="0"/>
                 <a:ea typeface="Arial" pitchFamily="34" charset="-122"/>
@@ -2143,17 +2148,17 @@
         <p:spPr>
           <a:xfrm>
             <a:off x="731520" y="877824"/>
-            <a:ext cx="10725912" cy="25603"/>
+            <a:ext cx="10725912" cy="10973"/>
           </a:xfrm>
           <a:prstGeom prst="rect">
             <a:avLst/>
           </a:prstGeom>
           <a:solidFill>
-            <a:srgbClr val="38C9FF"/>
+            <a:srgbClr val="E2E5E1"/>
           </a:solidFill>
           <a:ln w="12700">
             <a:solidFill>
-              <a:srgbClr val="38C9FF"/>
+              <a:srgbClr val="E2E5E1"/>
             </a:solidFill>
             <a:prstDash val="solid"/>
           </a:ln>
@@ -2189,7 +2194,7 @@
             <a:r>
               <a:rPr lang="en-US" sz="2600" b="1" dirty="0">
                 <a:solidFill>
-                  <a:srgbClr val="4636B0"/>
+                  <a:srgbClr val="14181A"/>
                 </a:solidFill>
                 <a:latin typeface="Arial" pitchFamily="34" charset="0"/>
                 <a:ea typeface="Arial" pitchFamily="34" charset="-122"/>
@@ -2209,8 +2214,8 @@
         </p:nvSpPr>
         <p:spPr>
           <a:xfrm>
-            <a:off x="731520" y="2011680"/>
-            <a:ext cx="10725912" cy="2377440"/>
+            <a:off x="731520" y="1874520"/>
+            <a:ext cx="10725912" cy="3108960"/>
           </a:xfrm>
           <a:prstGeom prst="rect">
             <a:avLst/>
@@ -2227,14 +2232,14 @@
                 <a:spcPct val="118000"/>
               </a:lnSpc>
               <a:spcAft>
-                <a:spcPts val="1600"/>
+                <a:spcPts val="1300"/>
               </a:spcAft>
               <a:buNone/>
             </a:pPr>
             <a:r>
-              <a:rPr lang="en-US" sz="1300" b="1" dirty="0">
-                <a:solidFill>
-                  <a:srgbClr val="0B0F19"/>
+              <a:rPr lang="en-US" sz="1250" b="1" dirty="0">
+                <a:solidFill>
+                  <a:srgbClr val="14181A"/>
                 </a:solidFill>
                 <a:latin typeface="Arial" pitchFamily="34" charset="0"/>
                 <a:ea typeface="Arial" pitchFamily="34" charset="-122"/>
@@ -2247,22 +2252,22 @@
                 <a:spcPct val="118000"/>
               </a:lnSpc>
               <a:spcAft>
-                <a:spcPts val="1600"/>
+                <a:spcPts val="1300"/>
               </a:spcAft>
               <a:buNone/>
             </a:pPr>
             <a:r>
-              <a:rPr lang="en-US" sz="1300" dirty="0">
-                <a:solidFill>
-                  <a:srgbClr val="3D4556"/>
-                </a:solidFill>
-                <a:latin typeface="Arial" pitchFamily="34" charset="0"/>
-                <a:ea typeface="Arial" pitchFamily="34" charset="-122"/>
-                <a:cs typeface="Arial" pitchFamily="34" charset="-120"/>
-              </a:rPr>
-              <a:t>SmartCount repose sur une flotte de terminaux dédiés : à charger, configurer, vérifier avant chaque session — le travail qu'on cherche justement à ne plus faire. Quantinvo tourne sur les iPhone que vos équipes ont déjà, et une douchette Bluetooth s'y branche pour les gros volumes.</a:t>
-            </a:r>
-            <a:endParaRPr lang="en-US" sz="1300" dirty="0"/>
+              <a:rPr lang="en-US" sz="1250" dirty="0">
+                <a:solidFill>
+                  <a:srgbClr val="3A423F"/>
+                </a:solidFill>
+                <a:latin typeface="Arial" pitchFamily="34" charset="0"/>
+                <a:ea typeface="Arial" pitchFamily="34" charset="-122"/>
+                <a:cs typeface="Arial" pitchFamily="34" charset="-120"/>
+              </a:rPr>
+              <a:t>SmartCount repose sur une flotte de terminaux dédiés : à charger, configurer, vérifier avant chaque session — le travail qu'on cherche justement à ne plus faire. Quantinvo tourne sous iOS et sous Android, sur les téléphones que vos équipes ont déjà.</a:t>
+            </a:r>
+            <a:endParaRPr lang="en-US" sz="1250" dirty="0"/>
           </a:p>
           <a:p>
             <a:pPr indent="0" marL="0">
@@ -2270,42 +2275,42 @@
                 <a:spcPct val="118000"/>
               </a:lnSpc>
               <a:spcAft>
-                <a:spcPts val="1600"/>
+                <a:spcPts val="1300"/>
               </a:spcAft>
               <a:buNone/>
             </a:pPr>
             <a:r>
-              <a:rPr lang="en-US" sz="1300" b="1" dirty="0">
-                <a:solidFill>
-                  <a:srgbClr val="0B0F19"/>
-                </a:solidFill>
-                <a:latin typeface="Arial" pitchFamily="34" charset="0"/>
-                <a:ea typeface="Arial" pitchFamily="34" charset="-122"/>
-                <a:cs typeface="Arial" pitchFamily="34" charset="-120"/>
-              </a:rPr>
-              <a:t>Le fichier. </a:t>
+              <a:rPr lang="en-US" sz="1250" b="1" dirty="0">
+                <a:solidFill>
+                  <a:srgbClr val="14181A"/>
+                </a:solidFill>
+                <a:latin typeface="Arial" pitchFamily="34" charset="0"/>
+                <a:ea typeface="Arial" pitchFamily="34" charset="-122"/>
+                <a:cs typeface="Arial" pitchFamily="34" charset="-120"/>
+              </a:rPr>
+              <a:t>La mise à jour. </a:t>
             </a:r>
             <a:pPr indent="0" marL="0">
               <a:lnSpc>
                 <a:spcPct val="118000"/>
               </a:lnSpc>
               <a:spcAft>
-                <a:spcPts val="1600"/>
+                <a:spcPts val="1300"/>
               </a:spcAft>
               <a:buNone/>
             </a:pPr>
             <a:r>
-              <a:rPr lang="en-US" sz="1300" dirty="0">
-                <a:solidFill>
-                  <a:srgbClr val="3D4556"/>
-                </a:solidFill>
-                <a:latin typeface="Arial" pitchFamily="34" charset="0"/>
-                <a:ea typeface="Arial" pitchFamily="34" charset="-122"/>
-                <a:cs typeface="Arial" pitchFamily="34" charset="-120"/>
-              </a:rPr>
-              <a:t>SmartCount rend un rapport de variance, à recouper ensuite avec le stock théorique. Quantinvo rend ce croisement déjà fait : l'attendu, le compté, le non-compté, l'écart en valeur.</a:t>
-            </a:r>
-            <a:endParaRPr lang="en-US" sz="1300" dirty="0"/>
+              <a:rPr lang="en-US" sz="1250" dirty="0">
+                <a:solidFill>
+                  <a:srgbClr val="3A423F"/>
+                </a:solidFill>
+                <a:latin typeface="Arial" pitchFamily="34" charset="0"/>
+                <a:ea typeface="Arial" pitchFamily="34" charset="-122"/>
+                <a:cs typeface="Arial" pitchFamily="34" charset="-120"/>
+              </a:rPr>
+              <a:t>Celle des outils Zebra, comme celle de la base, demande l'intervention de l'IT Zebra et de la DSI du magasin. Quantinvo se met à jour tout seul, et les données d'inventaire sont chargées avant chaque comptage par les superviseurs eux-mêmes.</a:t>
+            </a:r>
+            <a:endParaRPr lang="en-US" sz="1250" dirty="0"/>
           </a:p>
           <a:p>
             <a:pPr indent="0" marL="0">
@@ -2313,42 +2318,85 @@
                 <a:spcPct val="118000"/>
               </a:lnSpc>
               <a:spcAft>
-                <a:spcPts val="1600"/>
+                <a:spcPts val="1300"/>
               </a:spcAft>
               <a:buNone/>
             </a:pPr>
             <a:r>
-              <a:rPr lang="en-US" sz="1300" b="1" dirty="0">
-                <a:solidFill>
-                  <a:srgbClr val="0B0F19"/>
-                </a:solidFill>
-                <a:latin typeface="Arial" pitchFamily="34" charset="0"/>
-                <a:ea typeface="Arial" pitchFamily="34" charset="-122"/>
-                <a:cs typeface="Arial" pitchFamily="34" charset="-120"/>
-              </a:rPr>
-              <a:t>L'éditeur. </a:t>
+              <a:rPr lang="en-US" sz="1250" b="1" dirty="0">
+                <a:solidFill>
+                  <a:srgbClr val="14181A"/>
+                </a:solidFill>
+                <a:latin typeface="Arial" pitchFamily="34" charset="0"/>
+                <a:ea typeface="Arial" pitchFamily="34" charset="-122"/>
+                <a:cs typeface="Arial" pitchFamily="34" charset="-120"/>
+              </a:rPr>
+              <a:t>Le fichier. </a:t>
             </a:r>
             <a:pPr indent="0" marL="0">
               <a:lnSpc>
                 <a:spcPct val="118000"/>
               </a:lnSpc>
               <a:spcAft>
-                <a:spcPts val="1600"/>
+                <a:spcPts val="1300"/>
               </a:spcAft>
               <a:buNone/>
             </a:pPr>
             <a:r>
-              <a:rPr lang="en-US" sz="1300" dirty="0">
-                <a:solidFill>
-                  <a:srgbClr val="3D4556"/>
-                </a:solidFill>
-                <a:latin typeface="Arial" pitchFamily="34" charset="0"/>
-                <a:ea typeface="Arial" pitchFamily="34" charset="-122"/>
-                <a:cs typeface="Arial" pitchFamily="34" charset="-120"/>
-              </a:rPr>
-              <a:t>SmartCount est un module au catalogue d'un géant du matériel. Quantinvo ne fait qu'une chose — l'inventaire — et la personne qui l'a dessiné répond elle-même à vos questions.</a:t>
-            </a:r>
-            <a:endParaRPr lang="en-US" sz="1300" dirty="0"/>
+              <a:rPr lang="en-US" sz="1250" dirty="0">
+                <a:solidFill>
+                  <a:srgbClr val="3A423F"/>
+                </a:solidFill>
+                <a:latin typeface="Arial" pitchFamily="34" charset="0"/>
+                <a:ea typeface="Arial" pitchFamily="34" charset="-122"/>
+                <a:cs typeface="Arial" pitchFamily="34" charset="-120"/>
+              </a:rPr>
+              <a:t>SmartCount rend un rapport de variance, à recouper ensuite avec le stock théorique. Quantinvo rend ce croisement déjà fait : l'attendu, le compté, le non-compté, l'écart en valeur.</a:t>
+            </a:r>
+            <a:endParaRPr lang="en-US" sz="1250" dirty="0"/>
+          </a:p>
+          <a:p>
+            <a:pPr indent="0" marL="0">
+              <a:lnSpc>
+                <a:spcPct val="118000"/>
+              </a:lnSpc>
+              <a:spcAft>
+                <a:spcPts val="1300"/>
+              </a:spcAft>
+              <a:buNone/>
+            </a:pPr>
+            <a:r>
+              <a:rPr lang="en-US" sz="1250" b="1" dirty="0">
+                <a:solidFill>
+                  <a:srgbClr val="14181A"/>
+                </a:solidFill>
+                <a:latin typeface="Arial" pitchFamily="34" charset="0"/>
+                <a:ea typeface="Arial" pitchFamily="34" charset="-122"/>
+                <a:cs typeface="Arial" pitchFamily="34" charset="-120"/>
+              </a:rPr>
+              <a:t>L'éditeur. </a:t>
+            </a:r>
+            <a:pPr indent="0" marL="0">
+              <a:lnSpc>
+                <a:spcPct val="118000"/>
+              </a:lnSpc>
+              <a:spcAft>
+                <a:spcPts val="1300"/>
+              </a:spcAft>
+              <a:buNone/>
+            </a:pPr>
+            <a:r>
+              <a:rPr lang="en-US" sz="1250" dirty="0">
+                <a:solidFill>
+                  <a:srgbClr val="3A423F"/>
+                </a:solidFill>
+                <a:latin typeface="Arial" pitchFamily="34" charset="0"/>
+                <a:ea typeface="Arial" pitchFamily="34" charset="-122"/>
+                <a:cs typeface="Arial" pitchFamily="34" charset="-120"/>
+              </a:rPr>
+              <a:t>SmartCount est un module au catalogue d'un géant du matériel. Quantinvo ne fait qu'une chose — l'inventaire — et la personne qui l'a imaginé répond elle-même à vos questions.</a:t>
+            </a:r>
+            <a:endParaRPr lang="en-US" sz="1250" dirty="0"/>
           </a:p>
         </p:txBody>
       </p:sp>
@@ -2360,20 +2408,20 @@
         </p:nvSpPr>
         <p:spPr>
           <a:xfrm>
-            <a:off x="731520" y="4480560"/>
-            <a:ext cx="10725912" cy="1051560"/>
+            <a:off x="731520" y="4663440"/>
+            <a:ext cx="10725912" cy="1005840"/>
           </a:xfrm>
           <a:prstGeom prst="roundRect">
             <a:avLst>
-              <a:gd name="adj" fmla="val 6957"/>
+              <a:gd name="adj" fmla="val 3636"/>
             </a:avLst>
           </a:prstGeom>
           <a:solidFill>
-            <a:srgbClr val="F4F5F9"/>
+            <a:srgbClr val="F2F3F1"/>
           </a:solidFill>
           <a:ln w="12700">
             <a:solidFill>
-              <a:srgbClr val="F4F5F9"/>
+              <a:srgbClr val="F2F3F1"/>
             </a:solidFill>
             <a:prstDash val="solid"/>
           </a:ln>
@@ -2387,7 +2435,7 @@
         </p:nvSpPr>
         <p:spPr>
           <a:xfrm>
-            <a:off x="1005840" y="4645152"/>
+            <a:off x="1005840" y="4828032"/>
             <a:ext cx="10177272" cy="228600"/>
           </a:xfrm>
           <a:prstGeom prst="rect">
@@ -2406,7 +2454,7 @@
             <a:r>
               <a:rPr lang="en-US" sz="950" b="1" dirty="0">
                 <a:solidFill>
-                  <a:srgbClr val="5B6475"/>
+                  <a:srgbClr val="575F5C"/>
                 </a:solidFill>
                 <a:latin typeface="Arial" pitchFamily="34" charset="0"/>
                 <a:ea typeface="Arial" pitchFamily="34" charset="-122"/>
@@ -2426,8 +2474,8 @@
         </p:nvSpPr>
         <p:spPr>
           <a:xfrm>
-            <a:off x="1005840" y="4901184"/>
-            <a:ext cx="10177272" cy="502920"/>
+            <a:off x="1005840" y="5084064"/>
+            <a:ext cx="10177272" cy="457200"/>
           </a:xfrm>
           <a:prstGeom prst="rect">
             <a:avLst/>
@@ -2448,7 +2496,7 @@
             <a:r>
               <a:rPr lang="en-US" sz="1150" i="1" dirty="0">
                 <a:solidFill>
-                  <a:srgbClr val="3D4556"/>
+                  <a:srgbClr val="3A423F"/>
                 </a:solidFill>
                 <a:latin typeface="Arial" pitchFamily="34" charset="0"/>
                 <a:ea typeface="Arial" pitchFamily="34" charset="-122"/>
@@ -2487,7 +2535,7 @@
             <a:r>
               <a:rPr lang="en-US" sz="900" dirty="0">
                 <a:solidFill>
-                  <a:srgbClr val="5B6475"/>
+                  <a:srgbClr val="575F5C"/>
                 </a:solidFill>
                 <a:latin typeface="Arial" pitchFamily="34" charset="0"/>
                 <a:ea typeface="Arial" pitchFamily="34" charset="-122"/>
@@ -2526,7 +2574,7 @@
             <a:r>
               <a:rPr lang="en-US" sz="900" dirty="0">
                 <a:solidFill>
-                  <a:srgbClr val="5B6475"/>
+                  <a:srgbClr val="575F5C"/>
                 </a:solidFill>
                 <a:latin typeface="Arial" pitchFamily="34" charset="0"/>
                 <a:ea typeface="Arial" pitchFamily="34" charset="-122"/>
@@ -2621,7 +2669,7 @@
             <a:r>
               <a:rPr lang="en-US" sz="1600" b="1" dirty="0">
                 <a:solidFill>
-                  <a:srgbClr val="0B0F19"/>
+                  <a:srgbClr val="14181A"/>
                 </a:solidFill>
                 <a:latin typeface="Arial" pitchFamily="34" charset="0"/>
                 <a:ea typeface="Arial" pitchFamily="34" charset="-122"/>
@@ -2660,7 +2708,7 @@
             <a:r>
               <a:rPr lang="en-US" sz="1000" dirty="0">
                 <a:solidFill>
-                  <a:srgbClr val="5B6475"/>
+                  <a:srgbClr val="575F5C"/>
                 </a:solidFill>
                 <a:latin typeface="Arial" pitchFamily="34" charset="0"/>
                 <a:ea typeface="Arial" pitchFamily="34" charset="-122"/>
@@ -2681,17 +2729,17 @@
         <p:spPr>
           <a:xfrm>
             <a:off x="731520" y="877824"/>
-            <a:ext cx="10725912" cy="25603"/>
+            <a:ext cx="10725912" cy="10973"/>
           </a:xfrm>
           <a:prstGeom prst="rect">
             <a:avLst/>
           </a:prstGeom>
           <a:solidFill>
-            <a:srgbClr val="38C9FF"/>
+            <a:srgbClr val="E2E5E1"/>
           </a:solidFill>
           <a:ln w="12700">
             <a:solidFill>
-              <a:srgbClr val="38C9FF"/>
+              <a:srgbClr val="E2E5E1"/>
             </a:solidFill>
             <a:prstDash val="solid"/>
           </a:ln>
@@ -2727,7 +2775,7 @@
             <a:r>
               <a:rPr lang="en-US" sz="2600" b="1" dirty="0">
                 <a:solidFill>
-                  <a:srgbClr val="4636B0"/>
+                  <a:srgbClr val="14181A"/>
                 </a:solidFill>
                 <a:latin typeface="Arial" pitchFamily="34" charset="0"/>
                 <a:ea typeface="Arial" pitchFamily="34" charset="-122"/>
@@ -2769,7 +2817,7 @@
             <a:r>
               <a:rPr lang="en-US" sz="1150" dirty="0">
                 <a:solidFill>
-                  <a:srgbClr val="5B6475"/>
+                  <a:srgbClr val="575F5C"/>
                 </a:solidFill>
                 <a:latin typeface="Arial" pitchFamily="34" charset="0"/>
                 <a:ea typeface="Arial" pitchFamily="34" charset="-122"/>
@@ -2794,15 +2842,15 @@
           </a:xfrm>
           <a:prstGeom prst="roundRect">
             <a:avLst>
-              <a:gd name="adj" fmla="val 4000"/>
+              <a:gd name="adj" fmla="val 1333"/>
             </a:avLst>
           </a:prstGeom>
           <a:solidFill>
-            <a:srgbClr val="FFFFFF"/>
+            <a:srgbClr val="F2F3F1"/>
           </a:solidFill>
           <a:ln w="12700">
             <a:solidFill>
-              <a:srgbClr val="E3E6EE"/>
+              <a:srgbClr val="F2F3F1"/>
             </a:solidFill>
             <a:prstDash val="solid"/>
           </a:ln>
@@ -2835,7 +2883,7 @@
             <a:r>
               <a:rPr lang="en-US" sz="1800" b="1" dirty="0">
                 <a:solidFill>
-                  <a:srgbClr val="0B0F19"/>
+                  <a:srgbClr val="14181A"/>
                 </a:solidFill>
                 <a:latin typeface="Arial" pitchFamily="34" charset="0"/>
                 <a:ea typeface="Arial" pitchFamily="34" charset="-122"/>
@@ -2874,13 +2922,13 @@
             <a:r>
               <a:rPr lang="en-US" sz="1100" b="1" dirty="0">
                 <a:solidFill>
-                  <a:srgbClr val="6366F1"/>
-                </a:solidFill>
-                <a:latin typeface="Arial" pitchFamily="34" charset="0"/>
-                <a:ea typeface="Arial" pitchFamily="34" charset="-122"/>
-                <a:cs typeface="Arial" pitchFamily="34" charset="-120"/>
-              </a:rPr>
-              <a:t>2 appareils</a:t>
+                  <a:srgbClr val="1E4D3B"/>
+                </a:solidFill>
+                <a:latin typeface="Arial" pitchFamily="34" charset="0"/>
+                <a:ea typeface="Arial" pitchFamily="34" charset="-122"/>
+                <a:cs typeface="Arial" pitchFamily="34" charset="-120"/>
+              </a:rPr>
+              <a:t>Jusqu’à 2 appareils</a:t>
             </a:r>
             <a:endParaRPr lang="en-US" sz="1100" dirty="0"/>
           </a:p>
@@ -2916,7 +2964,7 @@
             <a:r>
               <a:rPr lang="en-US" sz="1000" dirty="0">
                 <a:solidFill>
-                  <a:srgbClr val="5B6475"/>
+                  <a:srgbClr val="575F5C"/>
                 </a:solidFill>
                 <a:latin typeface="Arial" pitchFamily="34" charset="0"/>
                 <a:ea typeface="Arial" pitchFamily="34" charset="-122"/>
@@ -2955,7 +3003,7 @@
             <a:r>
               <a:rPr lang="en-US" sz="2600" b="1" dirty="0">
                 <a:solidFill>
-                  <a:srgbClr val="4636B0"/>
+                  <a:srgbClr val="14181A"/>
                 </a:solidFill>
                 <a:latin typeface="Arial" pitchFamily="34" charset="0"/>
                 <a:ea typeface="Arial" pitchFamily="34" charset="-122"/>
@@ -2969,7 +3017,7 @@
             <a:r>
               <a:rPr lang="en-US" sz="1050" dirty="0">
                 <a:solidFill>
-                  <a:srgbClr val="5B6475"/>
+                  <a:srgbClr val="575F5C"/>
                 </a:solidFill>
                 <a:latin typeface="Arial" pitchFamily="34" charset="0"/>
                 <a:ea typeface="Arial" pitchFamily="34" charset="-122"/>
@@ -3008,7 +3056,7 @@
             <a:r>
               <a:rPr lang="en-US" sz="950" dirty="0">
                 <a:solidFill>
-                  <a:srgbClr val="1F7A5C"/>
+                  <a:srgbClr val="15704F"/>
                 </a:solidFill>
                 <a:latin typeface="Arial" pitchFamily="34" charset="0"/>
                 <a:ea typeface="Arial" pitchFamily="34" charset="-122"/>
@@ -3033,15 +3081,15 @@
           </a:xfrm>
           <a:prstGeom prst="roundRect">
             <a:avLst>
-              <a:gd name="adj" fmla="val 4000"/>
+              <a:gd name="adj" fmla="val 1333"/>
             </a:avLst>
           </a:prstGeom>
           <a:solidFill>
-            <a:srgbClr val="EEEEFC"/>
+            <a:srgbClr val="E7EDE9"/>
           </a:solidFill>
-          <a:ln w="19050">
+          <a:ln w="15875">
             <a:solidFill>
-              <a:srgbClr val="6366F1"/>
+              <a:srgbClr val="1E4D3B"/>
             </a:solidFill>
             <a:prstDash val="solid"/>
           </a:ln>
@@ -3074,13 +3122,13 @@
             <a:r>
               <a:rPr lang="en-US" sz="800" b="1" spc="60" kern="0" dirty="0">
                 <a:solidFill>
-                  <a:srgbClr val="6366F1"/>
-                </a:solidFill>
-                <a:latin typeface="Arial" pitchFamily="34" charset="0"/>
-                <a:ea typeface="Arial" pitchFamily="34" charset="-122"/>
-                <a:cs typeface="Arial" pitchFamily="34" charset="-120"/>
-              </a:rPr>
-              <a:t>LE PLUS COURANT</a:t>
+                  <a:srgbClr val="1E4D3B"/>
+                </a:solidFill>
+                <a:latin typeface="Arial" pitchFamily="34" charset="0"/>
+                <a:ea typeface="Arial" pitchFamily="34" charset="-122"/>
+                <a:cs typeface="Arial" pitchFamily="34" charset="-120"/>
+              </a:rPr>
+              <a:t>ADAPTÉE AU MAGASIN</a:t>
             </a:r>
             <a:endParaRPr lang="en-US" sz="800" dirty="0"/>
           </a:p>
@@ -3113,7 +3161,7 @@
             <a:r>
               <a:rPr lang="en-US" sz="1800" b="1" dirty="0">
                 <a:solidFill>
-                  <a:srgbClr val="0B0F19"/>
+                  <a:srgbClr val="14181A"/>
                 </a:solidFill>
                 <a:latin typeface="Arial" pitchFamily="34" charset="0"/>
                 <a:ea typeface="Arial" pitchFamily="34" charset="-122"/>
@@ -3152,13 +3200,13 @@
             <a:r>
               <a:rPr lang="en-US" sz="1100" b="1" dirty="0">
                 <a:solidFill>
-                  <a:srgbClr val="6366F1"/>
-                </a:solidFill>
-                <a:latin typeface="Arial" pitchFamily="34" charset="0"/>
-                <a:ea typeface="Arial" pitchFamily="34" charset="-122"/>
-                <a:cs typeface="Arial" pitchFamily="34" charset="-120"/>
-              </a:rPr>
-              <a:t>3 à 20 appareils</a:t>
+                  <a:srgbClr val="1E4D3B"/>
+                </a:solidFill>
+                <a:latin typeface="Arial" pitchFamily="34" charset="0"/>
+                <a:ea typeface="Arial" pitchFamily="34" charset="-122"/>
+                <a:cs typeface="Arial" pitchFamily="34" charset="-120"/>
+              </a:rPr>
+              <a:t>Jusqu’à 20 appareils</a:t>
             </a:r>
             <a:endParaRPr lang="en-US" sz="1100" dirty="0"/>
           </a:p>
@@ -3194,7 +3242,7 @@
             <a:r>
               <a:rPr lang="en-US" sz="1000" dirty="0">
                 <a:solidFill>
-                  <a:srgbClr val="5B6475"/>
+                  <a:srgbClr val="575F5C"/>
                 </a:solidFill>
                 <a:latin typeface="Arial" pitchFamily="34" charset="0"/>
                 <a:ea typeface="Arial" pitchFamily="34" charset="-122"/>
@@ -3233,7 +3281,7 @@
             <a:r>
               <a:rPr lang="en-US" sz="2600" b="1" dirty="0">
                 <a:solidFill>
-                  <a:srgbClr val="4636B0"/>
+                  <a:srgbClr val="14181A"/>
                 </a:solidFill>
                 <a:latin typeface="Arial" pitchFamily="34" charset="0"/>
                 <a:ea typeface="Arial" pitchFamily="34" charset="-122"/>
@@ -3247,7 +3295,7 @@
             <a:r>
               <a:rPr lang="en-US" sz="1050" dirty="0">
                 <a:solidFill>
-                  <a:srgbClr val="5B6475"/>
+                  <a:srgbClr val="575F5C"/>
                 </a:solidFill>
                 <a:latin typeface="Arial" pitchFamily="34" charset="0"/>
                 <a:ea typeface="Arial" pitchFamily="34" charset="-122"/>
@@ -3286,7 +3334,7 @@
             <a:r>
               <a:rPr lang="en-US" sz="950" dirty="0">
                 <a:solidFill>
-                  <a:srgbClr val="1F7A5C"/>
+                  <a:srgbClr val="15704F"/>
                 </a:solidFill>
                 <a:latin typeface="Arial" pitchFamily="34" charset="0"/>
                 <a:ea typeface="Arial" pitchFamily="34" charset="-122"/>
@@ -3311,15 +3359,15 @@
           </a:xfrm>
           <a:prstGeom prst="roundRect">
             <a:avLst>
-              <a:gd name="adj" fmla="val 4000"/>
+              <a:gd name="adj" fmla="val 1333"/>
             </a:avLst>
           </a:prstGeom>
           <a:solidFill>
-            <a:srgbClr val="FFFFFF"/>
+            <a:srgbClr val="F2F3F1"/>
           </a:solidFill>
           <a:ln w="12700">
             <a:solidFill>
-              <a:srgbClr val="E3E6EE"/>
+              <a:srgbClr val="F2F3F1"/>
             </a:solidFill>
             <a:prstDash val="solid"/>
           </a:ln>
@@ -3352,7 +3400,7 @@
             <a:r>
               <a:rPr lang="en-US" sz="1800" b="1" dirty="0">
                 <a:solidFill>
-                  <a:srgbClr val="0B0F19"/>
+                  <a:srgbClr val="14181A"/>
                 </a:solidFill>
                 <a:latin typeface="Arial" pitchFamily="34" charset="0"/>
                 <a:ea typeface="Arial" pitchFamily="34" charset="-122"/>
@@ -3391,13 +3439,13 @@
             <a:r>
               <a:rPr lang="en-US" sz="1100" b="1" dirty="0">
                 <a:solidFill>
-                  <a:srgbClr val="6366F1"/>
-                </a:solidFill>
-                <a:latin typeface="Arial" pitchFamily="34" charset="0"/>
-                <a:ea typeface="Arial" pitchFamily="34" charset="-122"/>
-                <a:cs typeface="Arial" pitchFamily="34" charset="-120"/>
-              </a:rPr>
-              <a:t>21 à 100 appareils</a:t>
+                  <a:srgbClr val="1E4D3B"/>
+                </a:solidFill>
+                <a:latin typeface="Arial" pitchFamily="34" charset="0"/>
+                <a:ea typeface="Arial" pitchFamily="34" charset="-122"/>
+                <a:cs typeface="Arial" pitchFamily="34" charset="-120"/>
+              </a:rPr>
+              <a:t>Jusqu’à 100 appareils</a:t>
             </a:r>
             <a:endParaRPr lang="en-US" sz="1100" dirty="0"/>
           </a:p>
@@ -3433,7 +3481,7 @@
             <a:r>
               <a:rPr lang="en-US" sz="1000" dirty="0">
                 <a:solidFill>
-                  <a:srgbClr val="5B6475"/>
+                  <a:srgbClr val="575F5C"/>
                 </a:solidFill>
                 <a:latin typeface="Arial" pitchFamily="34" charset="0"/>
                 <a:ea typeface="Arial" pitchFamily="34" charset="-122"/>
@@ -3472,7 +3520,7 @@
             <a:r>
               <a:rPr lang="en-US" sz="2600" b="1" dirty="0">
                 <a:solidFill>
-                  <a:srgbClr val="4636B0"/>
+                  <a:srgbClr val="14181A"/>
                 </a:solidFill>
                 <a:latin typeface="Arial" pitchFamily="34" charset="0"/>
                 <a:ea typeface="Arial" pitchFamily="34" charset="-122"/>
@@ -3486,7 +3534,7 @@
             <a:r>
               <a:rPr lang="en-US" sz="1050" dirty="0">
                 <a:solidFill>
-                  <a:srgbClr val="5B6475"/>
+                  <a:srgbClr val="575F5C"/>
                 </a:solidFill>
                 <a:latin typeface="Arial" pitchFamily="34" charset="0"/>
                 <a:ea typeface="Arial" pitchFamily="34" charset="-122"/>
@@ -3525,7 +3573,7 @@
             <a:r>
               <a:rPr lang="en-US" sz="950" dirty="0">
                 <a:solidFill>
-                  <a:srgbClr val="1F7A5C"/>
+                  <a:srgbClr val="15704F"/>
                 </a:solidFill>
                 <a:latin typeface="Arial" pitchFamily="34" charset="0"/>
                 <a:ea typeface="Arial" pitchFamily="34" charset="-122"/>
@@ -3570,13 +3618,13 @@
             <a:r>
               <a:rPr lang="en-US" sz="1200" b="1" dirty="0">
                 <a:solidFill>
-                  <a:srgbClr val="0B0F19"/>
-                </a:solidFill>
-                <a:latin typeface="Arial" pitchFamily="34" charset="0"/>
-                <a:ea typeface="Arial" pitchFamily="34" charset="-122"/>
-                <a:cs typeface="Arial" pitchFamily="34" charset="-120"/>
-              </a:rPr>
-              <a:t>Ce que ça change pour l'inventaire tournant. </a:t>
+                  <a:srgbClr val="14181A"/>
+                </a:solidFill>
+                <a:latin typeface="Arial" pitchFamily="34" charset="0"/>
+                <a:ea typeface="Arial" pitchFamily="34" charset="-122"/>
+                <a:cs typeface="Arial" pitchFamily="34" charset="-120"/>
+              </a:rPr>
+              <a:t>Ce que ça change pour l'inventaire. </a:t>
             </a:r>
             <a:pPr indent="0" marL="0">
               <a:lnSpc>
@@ -3590,7 +3638,7 @@
             <a:r>
               <a:rPr lang="en-US" sz="1200" dirty="0">
                 <a:solidFill>
-                  <a:srgbClr val="3D4556"/>
+                  <a:srgbClr val="3A423F"/>
                 </a:solidFill>
                 <a:latin typeface="Arial" pitchFamily="34" charset="0"/>
                 <a:ea typeface="Arial" pitchFamily="34" charset="-122"/>
@@ -3629,7 +3677,7 @@
             <a:r>
               <a:rPr lang="en-US" sz="900" dirty="0">
                 <a:solidFill>
-                  <a:srgbClr val="5B6475"/>
+                  <a:srgbClr val="575F5C"/>
                 </a:solidFill>
                 <a:latin typeface="Arial" pitchFamily="34" charset="0"/>
                 <a:ea typeface="Arial" pitchFamily="34" charset="-122"/>
@@ -3668,7 +3716,7 @@
             <a:r>
               <a:rPr lang="en-US" sz="900" dirty="0">
                 <a:solidFill>
-                  <a:srgbClr val="5B6475"/>
+                  <a:srgbClr val="575F5C"/>
                 </a:solidFill>
                 <a:latin typeface="Arial" pitchFamily="34" charset="0"/>
                 <a:ea typeface="Arial" pitchFamily="34" charset="-122"/>
@@ -3763,7 +3811,7 @@
             <a:r>
               <a:rPr lang="en-US" sz="2400" b="1" dirty="0">
                 <a:solidFill>
-                  <a:srgbClr val="0B0F19"/>
+                  <a:srgbClr val="14181A"/>
                 </a:solidFill>
                 <a:latin typeface="Arial" pitchFamily="34" charset="0"/>
                 <a:ea typeface="Arial" pitchFamily="34" charset="-122"/>
@@ -3784,17 +3832,17 @@
         <p:spPr>
           <a:xfrm>
             <a:off x="731520" y="1481328"/>
-            <a:ext cx="2377440" cy="25603"/>
+            <a:ext cx="2011680" cy="20117"/>
           </a:xfrm>
           <a:prstGeom prst="rect">
             <a:avLst/>
           </a:prstGeom>
           <a:solidFill>
-            <a:srgbClr val="38C9FF"/>
+            <a:srgbClr val="14181A"/>
           </a:solidFill>
           <a:ln w="12700">
             <a:solidFill>
-              <a:srgbClr val="38C9FF"/>
+              <a:srgbClr val="14181A"/>
             </a:solidFill>
             <a:prstDash val="solid"/>
           </a:ln>
@@ -3830,13 +3878,13 @@
             <a:r>
               <a:rPr lang="en-US" sz="3600" b="1" dirty="0">
                 <a:solidFill>
-                  <a:srgbClr val="4636B0"/>
-                </a:solidFill>
-                <a:latin typeface="Arial" pitchFamily="34" charset="0"/>
-                <a:ea typeface="Arial" pitchFamily="34" charset="-122"/>
-                <a:cs typeface="Arial" pitchFamily="34" charset="-120"/>
-              </a:rPr>
-              <a:t>Essayons sur un rayon.</a:t>
+                  <a:srgbClr val="14181A"/>
+                </a:solidFill>
+                <a:latin typeface="Arial" pitchFamily="34" charset="0"/>
+                <a:ea typeface="Arial" pitchFamily="34" charset="-122"/>
+                <a:cs typeface="Arial" pitchFamily="34" charset="-120"/>
+              </a:rPr>
+              <a:t>Un essai suffit pour être convaincu.</a:t>
             </a:r>
             <a:endParaRPr lang="en-US" sz="3600" dirty="0"/>
           </a:p>
@@ -3872,13 +3920,13 @@
             <a:r>
               <a:rPr lang="en-US" sz="1450" dirty="0">
                 <a:solidFill>
-                  <a:srgbClr val="3D4556"/>
-                </a:solidFill>
-                <a:latin typeface="Arial" pitchFamily="34" charset="0"/>
-                <a:ea typeface="Arial" pitchFamily="34" charset="-122"/>
-                <a:cs typeface="Arial" pitchFamily="34" charset="-120"/>
-              </a:rPr>
-              <a:t>Une démonstration avec un chef d'équipe et deux vendeurs, sur votre propre stock théorique : il l'importe, ils balisent leur rayon, ils comptent, et vous recevez le rapport. Un mardi matin avant l'ouverture suffit.</a:t>
+                  <a:srgbClr val="3A423F"/>
+                </a:solidFill>
+                <a:latin typeface="Arial" pitchFamily="34" charset="0"/>
+                <a:ea typeface="Arial" pitchFamily="34" charset="-122"/>
+                <a:cs typeface="Arial" pitchFamily="34" charset="-120"/>
+              </a:rPr>
+              <a:t>Une démonstration avec un chef d'équipe et deux vendeurs, sur votre propre stock théorique : il l'importe, ils balisent, ils comptent, et vous recevez le rapport. Un mardi matin avant l'ouverture suffit.</a:t>
             </a:r>
             <a:endParaRPr lang="en-US" sz="1450" dirty="0"/>
           </a:p>
@@ -3911,7 +3959,7 @@
             <a:r>
               <a:rPr lang="en-US" sz="1500" b="1" dirty="0">
                 <a:solidFill>
-                  <a:srgbClr val="4636B0"/>
+                  <a:srgbClr val="14181A"/>
                 </a:solidFill>
                 <a:latin typeface="Arial" pitchFamily="34" charset="0"/>
                 <a:ea typeface="Arial" pitchFamily="34" charset="-122"/>
@@ -3950,7 +3998,7 @@
             <a:r>
               <a:rPr lang="en-US" sz="1050" dirty="0">
                 <a:solidFill>
-                  <a:srgbClr val="5B6475"/>
+                  <a:srgbClr val="575F5C"/>
                 </a:solidFill>
                 <a:latin typeface="Arial" pitchFamily="34" charset="0"/>
                 <a:ea typeface="Arial" pitchFamily="34" charset="-122"/>
@@ -4045,7 +4093,7 @@
             <a:r>
               <a:rPr lang="en-US" sz="2400" b="1" dirty="0">
                 <a:solidFill>
-                  <a:srgbClr val="0B0F19"/>
+                  <a:srgbClr val="14181A"/>
                 </a:solidFill>
                 <a:latin typeface="Arial" pitchFamily="34" charset="0"/>
                 <a:ea typeface="Arial" pitchFamily="34" charset="-122"/>
@@ -4066,17 +4114,17 @@
         <p:spPr>
           <a:xfrm>
             <a:off x="731520" y="1481328"/>
-            <a:ext cx="2377440" cy="25603"/>
+            <a:ext cx="2011680" cy="20117"/>
           </a:xfrm>
           <a:prstGeom prst="rect">
             <a:avLst/>
           </a:prstGeom>
           <a:solidFill>
-            <a:srgbClr val="38C9FF"/>
+            <a:srgbClr val="14181A"/>
           </a:solidFill>
           <a:ln w="12700">
             <a:solidFill>
-              <a:srgbClr val="38C9FF"/>
+              <a:srgbClr val="14181A"/>
             </a:solidFill>
             <a:prstDash val="solid"/>
           </a:ln>
@@ -4109,7 +4157,7 @@
             <a:r>
               <a:rPr lang="en-US" sz="1300" dirty="0">
                 <a:solidFill>
-                  <a:srgbClr val="5B6475"/>
+                  <a:srgbClr val="575F5C"/>
                 </a:solidFill>
                 <a:latin typeface="Arial" pitchFamily="34" charset="0"/>
                 <a:ea typeface="Arial" pitchFamily="34" charset="-122"/>
@@ -4151,7 +4199,7 @@
             <a:r>
               <a:rPr lang="en-US" sz="4000" b="1" dirty="0">
                 <a:solidFill>
-                  <a:srgbClr val="4636B0"/>
+                  <a:srgbClr val="14181A"/>
                 </a:solidFill>
                 <a:latin typeface="Arial" pitchFamily="34" charset="0"/>
                 <a:ea typeface="Arial" pitchFamily="34" charset="-122"/>
@@ -4193,7 +4241,7 @@
             <a:r>
               <a:rPr lang="en-US" sz="1500" dirty="0">
                 <a:solidFill>
-                  <a:srgbClr val="3D4556"/>
+                  <a:srgbClr val="3A423F"/>
                 </a:solidFill>
                 <a:latin typeface="Arial" pitchFamily="34" charset="0"/>
                 <a:ea typeface="Arial" pitchFamily="34" charset="-122"/>
@@ -4232,7 +4280,7 @@
             <a:r>
               <a:rPr lang="en-US" sz="1050" dirty="0">
                 <a:solidFill>
-                  <a:srgbClr val="5B6475"/>
+                  <a:srgbClr val="575F5C"/>
                 </a:solidFill>
                 <a:latin typeface="Arial" pitchFamily="34" charset="0"/>
                 <a:ea typeface="Arial" pitchFamily="34" charset="-122"/>
@@ -4327,7 +4375,7 @@
             <a:r>
               <a:rPr lang="en-US" sz="1600" b="1" dirty="0">
                 <a:solidFill>
-                  <a:srgbClr val="0B0F19"/>
+                  <a:srgbClr val="14181A"/>
                 </a:solidFill>
                 <a:latin typeface="Arial" pitchFamily="34" charset="0"/>
                 <a:ea typeface="Arial" pitchFamily="34" charset="-122"/>
@@ -4366,7 +4414,7 @@
             <a:r>
               <a:rPr lang="en-US" sz="1000" dirty="0">
                 <a:solidFill>
-                  <a:srgbClr val="5B6475"/>
+                  <a:srgbClr val="575F5C"/>
                 </a:solidFill>
                 <a:latin typeface="Arial" pitchFamily="34" charset="0"/>
                 <a:ea typeface="Arial" pitchFamily="34" charset="-122"/>
@@ -4387,17 +4435,17 @@
         <p:spPr>
           <a:xfrm>
             <a:off x="731520" y="877824"/>
-            <a:ext cx="10725912" cy="25603"/>
+            <a:ext cx="10725912" cy="10973"/>
           </a:xfrm>
           <a:prstGeom prst="rect">
             <a:avLst/>
           </a:prstGeom>
           <a:solidFill>
-            <a:srgbClr val="38C9FF"/>
+            <a:srgbClr val="E2E5E1"/>
           </a:solidFill>
           <a:ln w="12700">
             <a:solidFill>
-              <a:srgbClr val="38C9FF"/>
+              <a:srgbClr val="E2E5E1"/>
             </a:solidFill>
             <a:prstDash val="solid"/>
           </a:ln>
@@ -4433,7 +4481,7 @@
             <a:r>
               <a:rPr lang="en-US" sz="2600" b="1" dirty="0">
                 <a:solidFill>
-                  <a:srgbClr val="4636B0"/>
+                  <a:srgbClr val="14181A"/>
                 </a:solidFill>
                 <a:latin typeface="Arial" pitchFamily="34" charset="0"/>
                 <a:ea typeface="Arial" pitchFamily="34" charset="-122"/>
@@ -4475,7 +4523,7 @@
             <a:r>
               <a:rPr lang="en-US" sz="1200" i="1" dirty="0">
                 <a:solidFill>
-                  <a:srgbClr val="5B6475"/>
+                  <a:srgbClr val="575F5C"/>
                 </a:solidFill>
                 <a:latin typeface="Arial" pitchFamily="34" charset="0"/>
                 <a:ea typeface="Arial" pitchFamily="34" charset="-122"/>
@@ -4520,7 +4568,7 @@
             <a:r>
               <a:rPr lang="en-US" sz="1300" b="1" dirty="0">
                 <a:solidFill>
-                  <a:srgbClr val="0B0F19"/>
+                  <a:srgbClr val="14181A"/>
                 </a:solidFill>
                 <a:latin typeface="Arial" pitchFamily="34" charset="0"/>
                 <a:ea typeface="Arial" pitchFamily="34" charset="-122"/>
@@ -4540,7 +4588,7 @@
             <a:r>
               <a:rPr lang="en-US" sz="1300" dirty="0">
                 <a:solidFill>
-                  <a:srgbClr val="3D4556"/>
+                  <a:srgbClr val="3A423F"/>
                 </a:solidFill>
                 <a:latin typeface="Arial" pitchFamily="34" charset="0"/>
                 <a:ea typeface="Arial" pitchFamily="34" charset="-122"/>
@@ -4563,7 +4611,7 @@
             <a:r>
               <a:rPr lang="en-US" sz="1300" b="1" dirty="0">
                 <a:solidFill>
-                  <a:srgbClr val="0B0F19"/>
+                  <a:srgbClr val="14181A"/>
                 </a:solidFill>
                 <a:latin typeface="Arial" pitchFamily="34" charset="0"/>
                 <a:ea typeface="Arial" pitchFamily="34" charset="-122"/>
@@ -4583,7 +4631,7 @@
             <a:r>
               <a:rPr lang="en-US" sz="1300" dirty="0">
                 <a:solidFill>
-                  <a:srgbClr val="3D4556"/>
+                  <a:srgbClr val="3A423F"/>
                 </a:solidFill>
                 <a:latin typeface="Arial" pitchFamily="34" charset="0"/>
                 <a:ea typeface="Arial" pitchFamily="34" charset="-122"/>
@@ -4606,7 +4654,7 @@
             <a:r>
               <a:rPr lang="en-US" sz="1300" b="1" dirty="0">
                 <a:solidFill>
-                  <a:srgbClr val="0B0F19"/>
+                  <a:srgbClr val="14181A"/>
                 </a:solidFill>
                 <a:latin typeface="Arial" pitchFamily="34" charset="0"/>
                 <a:ea typeface="Arial" pitchFamily="34" charset="-122"/>
@@ -4626,7 +4674,7 @@
             <a:r>
               <a:rPr lang="en-US" sz="1300" dirty="0">
                 <a:solidFill>
-                  <a:srgbClr val="3D4556"/>
+                  <a:srgbClr val="3A423F"/>
                 </a:solidFill>
                 <a:latin typeface="Arial" pitchFamily="34" charset="0"/>
                 <a:ea typeface="Arial" pitchFamily="34" charset="-122"/>
@@ -4649,7 +4697,7 @@
             <a:r>
               <a:rPr lang="en-US" sz="1300" b="1" dirty="0">
                 <a:solidFill>
-                  <a:srgbClr val="0B0F19"/>
+                  <a:srgbClr val="14181A"/>
                 </a:solidFill>
                 <a:latin typeface="Arial" pitchFamily="34" charset="0"/>
                 <a:ea typeface="Arial" pitchFamily="34" charset="-122"/>
@@ -4669,7 +4717,7 @@
             <a:r>
               <a:rPr lang="en-US" sz="1300" dirty="0">
                 <a:solidFill>
-                  <a:srgbClr val="3D4556"/>
+                  <a:srgbClr val="3A423F"/>
                 </a:solidFill>
                 <a:latin typeface="Arial" pitchFamily="34" charset="0"/>
                 <a:ea typeface="Arial" pitchFamily="34" charset="-122"/>
@@ -4708,7 +4756,7 @@
             <a:r>
               <a:rPr lang="en-US" sz="900" dirty="0">
                 <a:solidFill>
-                  <a:srgbClr val="5B6475"/>
+                  <a:srgbClr val="575F5C"/>
                 </a:solidFill>
                 <a:latin typeface="Arial" pitchFamily="34" charset="0"/>
                 <a:ea typeface="Arial" pitchFamily="34" charset="-122"/>
@@ -4747,7 +4795,7 @@
             <a:r>
               <a:rPr lang="en-US" sz="900" dirty="0">
                 <a:solidFill>
-                  <a:srgbClr val="5B6475"/>
+                  <a:srgbClr val="575F5C"/>
                 </a:solidFill>
                 <a:latin typeface="Arial" pitchFamily="34" charset="0"/>
                 <a:ea typeface="Arial" pitchFamily="34" charset="-122"/>
@@ -4842,7 +4890,7 @@
             <a:r>
               <a:rPr lang="en-US" sz="1600" b="1" dirty="0">
                 <a:solidFill>
-                  <a:srgbClr val="0B0F19"/>
+                  <a:srgbClr val="14181A"/>
                 </a:solidFill>
                 <a:latin typeface="Arial" pitchFamily="34" charset="0"/>
                 <a:ea typeface="Arial" pitchFamily="34" charset="-122"/>
@@ -4881,7 +4929,7 @@
             <a:r>
               <a:rPr lang="en-US" sz="1000" dirty="0">
                 <a:solidFill>
-                  <a:srgbClr val="5B6475"/>
+                  <a:srgbClr val="575F5C"/>
                 </a:solidFill>
                 <a:latin typeface="Arial" pitchFamily="34" charset="0"/>
                 <a:ea typeface="Arial" pitchFamily="34" charset="-122"/>
@@ -4902,17 +4950,17 @@
         <p:spPr>
           <a:xfrm>
             <a:off x="731520" y="877824"/>
-            <a:ext cx="10725912" cy="25603"/>
+            <a:ext cx="10725912" cy="10973"/>
           </a:xfrm>
           <a:prstGeom prst="rect">
             <a:avLst/>
           </a:prstGeom>
           <a:solidFill>
-            <a:srgbClr val="38C9FF"/>
+            <a:srgbClr val="E2E5E1"/>
           </a:solidFill>
           <a:ln w="12700">
             <a:solidFill>
-              <a:srgbClr val="38C9FF"/>
+              <a:srgbClr val="E2E5E1"/>
             </a:solidFill>
             <a:prstDash val="solid"/>
           </a:ln>
@@ -4948,7 +4996,7 @@
             <a:r>
               <a:rPr lang="en-US" sz="2400" b="1" dirty="0">
                 <a:solidFill>
-                  <a:srgbClr val="4636B0"/>
+                  <a:srgbClr val="14181A"/>
                 </a:solidFill>
                 <a:latin typeface="Arial" pitchFamily="34" charset="0"/>
                 <a:ea typeface="Arial" pitchFamily="34" charset="-122"/>
@@ -4993,7 +5041,7 @@
             <a:r>
               <a:rPr lang="en-US" sz="1300" b="1" dirty="0">
                 <a:solidFill>
-                  <a:srgbClr val="0B0F19"/>
+                  <a:srgbClr val="14181A"/>
                 </a:solidFill>
                 <a:latin typeface="Arial" pitchFamily="34" charset="0"/>
                 <a:ea typeface="Arial" pitchFamily="34" charset="-122"/>
@@ -5013,13 +5061,13 @@
             <a:r>
               <a:rPr lang="en-US" sz="1300" dirty="0">
                 <a:solidFill>
-                  <a:srgbClr val="3D4556"/>
-                </a:solidFill>
-                <a:latin typeface="Arial" pitchFamily="34" charset="0"/>
-                <a:ea typeface="Arial" pitchFamily="34" charset="-122"/>
-                <a:cs typeface="Arial" pitchFamily="34" charset="-120"/>
-              </a:rPr>
-              <a:t>Quelqu'un de l'Inventory Control prépare l'inventaire, reste disponible pendant le comptage, puis reprend le fichier pour le recouper avec le théorique.</a:t>
+                  <a:srgbClr val="3A423F"/>
+                </a:solidFill>
+                <a:latin typeface="Arial" pitchFamily="34" charset="0"/>
+                <a:ea typeface="Arial" pitchFamily="34" charset="-122"/>
+                <a:cs typeface="Arial" pitchFamily="34" charset="-120"/>
+              </a:rPr>
+              <a:t>Quelqu'un de l'Inventory Control prépare l'inventaire, participe au comptage, puis reprend le rapport d'inventaire pour le recouper avec le stock théorique.</a:t>
             </a:r>
             <a:endParaRPr lang="en-US" sz="1300" dirty="0"/>
           </a:p>
@@ -5036,7 +5084,7 @@
             <a:r>
               <a:rPr lang="en-US" sz="1300" b="1" dirty="0">
                 <a:solidFill>
-                  <a:srgbClr val="0B0F19"/>
+                  <a:srgbClr val="14181A"/>
                 </a:solidFill>
                 <a:latin typeface="Arial" pitchFamily="34" charset="0"/>
                 <a:ea typeface="Arial" pitchFamily="34" charset="-122"/>
@@ -5056,13 +5104,13 @@
             <a:r>
               <a:rPr lang="en-US" sz="1300" dirty="0">
                 <a:solidFill>
-                  <a:srgbClr val="3D4556"/>
-                </a:solidFill>
-                <a:latin typeface="Arial" pitchFamily="34" charset="0"/>
-                <a:ea typeface="Arial" pitchFamily="34" charset="-122"/>
-                <a:cs typeface="Arial" pitchFamily="34" charset="-120"/>
-              </a:rPr>
-              <a:t>Les terminaux se chargent, se connectent et se vérifient un par un avant chaque session — date, localisation. C'est un travail en soi, et il ne compte aucun article.</a:t>
+                  <a:srgbClr val="3A423F"/>
+                </a:solidFill>
+                <a:latin typeface="Arial" pitchFamily="34" charset="0"/>
+                <a:ea typeface="Arial" pitchFamily="34" charset="-122"/>
+                <a:cs typeface="Arial" pitchFamily="34" charset="-120"/>
+              </a:rPr>
+              <a:t>Les terminaux se chargent, se connectent et se vérifient un par un avant chaque session — date, localisation. C'est un travail en soi. Sans oublier les mises à jour, qui ne sont pas automatiques.</a:t>
             </a:r>
             <a:endParaRPr lang="en-US" sz="1300" dirty="0"/>
           </a:p>
@@ -5079,7 +5127,7 @@
             <a:r>
               <a:rPr lang="en-US" sz="1300" b="1" dirty="0">
                 <a:solidFill>
-                  <a:srgbClr val="0B0F19"/>
+                  <a:srgbClr val="14181A"/>
                 </a:solidFill>
                 <a:latin typeface="Arial" pitchFamily="34" charset="0"/>
                 <a:ea typeface="Arial" pitchFamily="34" charset="-122"/>
@@ -5099,7 +5147,7 @@
             <a:r>
               <a:rPr lang="en-US" sz="1300" dirty="0">
                 <a:solidFill>
-                  <a:srgbClr val="3D4556"/>
+                  <a:srgbClr val="3A423F"/>
                 </a:solidFill>
                 <a:latin typeface="Arial" pitchFamily="34" charset="0"/>
                 <a:ea typeface="Arial" pitchFamily="34" charset="-122"/>
@@ -5122,7 +5170,7 @@
             <a:r>
               <a:rPr lang="en-US" sz="1300" b="1" dirty="0">
                 <a:solidFill>
-                  <a:srgbClr val="0B0F19"/>
+                  <a:srgbClr val="14181A"/>
                 </a:solidFill>
                 <a:latin typeface="Arial" pitchFamily="34" charset="0"/>
                 <a:ea typeface="Arial" pitchFamily="34" charset="-122"/>
@@ -5142,7 +5190,7 @@
             <a:r>
               <a:rPr lang="en-US" sz="1300" dirty="0">
                 <a:solidFill>
-                  <a:srgbClr val="3D4556"/>
+                  <a:srgbClr val="3A423F"/>
                 </a:solidFill>
                 <a:latin typeface="Arial" pitchFamily="34" charset="0"/>
                 <a:ea typeface="Arial" pitchFamily="34" charset="-122"/>
@@ -5167,15 +5215,15 @@
           </a:xfrm>
           <a:prstGeom prst="roundRect">
             <a:avLst>
-              <a:gd name="adj" fmla="val 6957"/>
+              <a:gd name="adj" fmla="val 3478"/>
             </a:avLst>
           </a:prstGeom>
           <a:solidFill>
-            <a:srgbClr val="F4F5F9"/>
+            <a:srgbClr val="F2F3F1"/>
           </a:solidFill>
           <a:ln w="12700">
             <a:solidFill>
-              <a:srgbClr val="F4F5F9"/>
+              <a:srgbClr val="F2F3F1"/>
             </a:solidFill>
             <a:prstDash val="solid"/>
           </a:ln>
@@ -5208,7 +5256,7 @@
             <a:r>
               <a:rPr lang="en-US" sz="950" b="1" dirty="0">
                 <a:solidFill>
-                  <a:srgbClr val="5B6475"/>
+                  <a:srgbClr val="575F5C"/>
                 </a:solidFill>
                 <a:latin typeface="Arial" pitchFamily="34" charset="0"/>
                 <a:ea typeface="Arial" pitchFamily="34" charset="-122"/>
@@ -5250,13 +5298,13 @@
             <a:r>
               <a:rPr lang="en-US" sz="1150" i="1" dirty="0">
                 <a:solidFill>
-                  <a:srgbClr val="3D4556"/>
-                </a:solidFill>
-                <a:latin typeface="Arial" pitchFamily="34" charset="0"/>
-                <a:ea typeface="Arial" pitchFamily="34" charset="-122"/>
-                <a:cs typeface="Arial" pitchFamily="34" charset="-120"/>
-              </a:rPr>
-              <a:t>Ce n'est pas le comptage qui pèse — il est fait par les équipes de vente, et il se fait bien. C'est tout ce qu'il faut monter autour, à chaque fois, et qui interdit de compter souvent.</a:t>
+                  <a:srgbClr val="3A423F"/>
+                </a:solidFill>
+                <a:latin typeface="Arial" pitchFamily="34" charset="0"/>
+                <a:ea typeface="Arial" pitchFamily="34" charset="-122"/>
+                <a:cs typeface="Arial" pitchFamily="34" charset="-120"/>
+              </a:rPr>
+              <a:t>Ce n'est pas le comptage qui pèse — il est fait par les équipes de vente, et il se fait bien. C'est tout ce qu'il faut monter autour, à chaque fois, et qui dissuade de compter souvent.</a:t>
             </a:r>
             <a:endParaRPr lang="en-US" sz="1150" dirty="0"/>
           </a:p>
@@ -5289,7 +5337,7 @@
             <a:r>
               <a:rPr lang="en-US" sz="900" dirty="0">
                 <a:solidFill>
-                  <a:srgbClr val="5B6475"/>
+                  <a:srgbClr val="575F5C"/>
                 </a:solidFill>
                 <a:latin typeface="Arial" pitchFamily="34" charset="0"/>
                 <a:ea typeface="Arial" pitchFamily="34" charset="-122"/>
@@ -5328,7 +5376,7 @@
             <a:r>
               <a:rPr lang="en-US" sz="900" dirty="0">
                 <a:solidFill>
-                  <a:srgbClr val="5B6475"/>
+                  <a:srgbClr val="575F5C"/>
                 </a:solidFill>
                 <a:latin typeface="Arial" pitchFamily="34" charset="0"/>
                 <a:ea typeface="Arial" pitchFamily="34" charset="-122"/>
@@ -5423,7 +5471,7 @@
             <a:r>
               <a:rPr lang="en-US" sz="1600" b="1" dirty="0">
                 <a:solidFill>
-                  <a:srgbClr val="0B0F19"/>
+                  <a:srgbClr val="14181A"/>
                 </a:solidFill>
                 <a:latin typeface="Arial" pitchFamily="34" charset="0"/>
                 <a:ea typeface="Arial" pitchFamily="34" charset="-122"/>
@@ -5462,7 +5510,7 @@
             <a:r>
               <a:rPr lang="en-US" sz="1000" dirty="0">
                 <a:solidFill>
-                  <a:srgbClr val="5B6475"/>
+                  <a:srgbClr val="575F5C"/>
                 </a:solidFill>
                 <a:latin typeface="Arial" pitchFamily="34" charset="0"/>
                 <a:ea typeface="Arial" pitchFamily="34" charset="-122"/>
@@ -5483,17 +5531,17 @@
         <p:spPr>
           <a:xfrm>
             <a:off x="731520" y="877824"/>
-            <a:ext cx="10725912" cy="25603"/>
+            <a:ext cx="10725912" cy="10973"/>
           </a:xfrm>
           <a:prstGeom prst="rect">
             <a:avLst/>
           </a:prstGeom>
           <a:solidFill>
-            <a:srgbClr val="38C9FF"/>
+            <a:srgbClr val="E2E5E1"/>
           </a:solidFill>
           <a:ln w="12700">
             <a:solidFill>
-              <a:srgbClr val="38C9FF"/>
+              <a:srgbClr val="E2E5E1"/>
             </a:solidFill>
             <a:prstDash val="solid"/>
           </a:ln>
@@ -5507,8 +5555,8 @@
         </p:nvSpPr>
         <p:spPr>
           <a:xfrm>
-            <a:off x="731520" y="2514600"/>
-            <a:ext cx="10725912" cy="1737360"/>
+            <a:off x="731520" y="2743200"/>
+            <a:ext cx="10725912" cy="1463040"/>
           </a:xfrm>
           <a:prstGeom prst="rect">
             <a:avLst/>
@@ -5527,85 +5575,23 @@
               <a:buNone/>
             </a:pPr>
             <a:r>
-              <a:rPr lang="en-US" sz="3000" b="1" dirty="0">
-                <a:solidFill>
-                  <a:srgbClr val="4636B0"/>
-                </a:solidFill>
-                <a:latin typeface="Arial" pitchFamily="34" charset="0"/>
-                <a:ea typeface="Arial" pitchFamily="34" charset="-122"/>
-                <a:cs typeface="Arial" pitchFamily="34" charset="-120"/>
-              </a:rPr>
-              <a:t>Quantinvo n’ajoute pas un outil de plus.</a:t>
-            </a:r>
-            <a:endParaRPr lang="en-US" sz="3000" dirty="0"/>
-          </a:p>
-          <a:p>
-            <a:pPr indent="0" marL="0">
-              <a:lnSpc>
-                <a:spcPct val="112000"/>
-              </a:lnSpc>
-              <a:buNone/>
-            </a:pPr>
-            <a:r>
-              <a:rPr lang="en-US" sz="3000" b="1" dirty="0">
-                <a:solidFill>
-                  <a:srgbClr val="4636B0"/>
-                </a:solidFill>
-                <a:latin typeface="Arial" pitchFamily="34" charset="0"/>
-                <a:ea typeface="Arial" pitchFamily="34" charset="-122"/>
-                <a:cs typeface="Arial" pitchFamily="34" charset="-120"/>
-              </a:rPr>
-              <a:t>Il retire ce qu’il faut monter autour d’un comptage.</a:t>
-            </a:r>
-            <a:endParaRPr lang="en-US" sz="3000" dirty="0"/>
+              <a:rPr lang="en-US" sz="3200" b="1" dirty="0">
+                <a:solidFill>
+                  <a:srgbClr val="14181A"/>
+                </a:solidFill>
+                <a:latin typeface="Arial" pitchFamily="34" charset="0"/>
+                <a:ea typeface="Arial" pitchFamily="34" charset="-122"/>
+                <a:cs typeface="Arial" pitchFamily="34" charset="-120"/>
+              </a:rPr>
+              <a:t>Quantinvo, l’outil d’inventaire qui apporte l’autonomie.</a:t>
+            </a:r>
+            <a:endParaRPr lang="en-US" sz="3200" dirty="0"/>
           </a:p>
         </p:txBody>
       </p:sp>
       <p:sp>
         <p:nvSpPr>
           <p:cNvPr id="7" name="Text 4"/>
-          <p:cNvSpPr/>
-          <p:nvPr/>
-        </p:nvSpPr>
-        <p:spPr>
-          <a:xfrm>
-            <a:off x="731520" y="4343400"/>
-            <a:ext cx="10725912" cy="365760"/>
-          </a:xfrm>
-          <a:prstGeom prst="rect">
-            <a:avLst/>
-          </a:prstGeom>
-          <a:noFill/>
-          <a:ln/>
-        </p:spPr>
-        <p:txBody>
-          <a:bodyPr wrap="square" lIns="0" tIns="0" rIns="0" bIns="0" rtlCol="0" anchor="t"/>
-          <a:lstStyle/>
-          <a:p>
-            <a:pPr algn="l" indent="0" marL="0">
-              <a:lnSpc>
-                <a:spcPct val="118000"/>
-              </a:lnSpc>
-              <a:buNone/>
-            </a:pPr>
-            <a:r>
-              <a:rPr lang="en-US" sz="1300" dirty="0">
-                <a:solidFill>
-                  <a:srgbClr val="5B6475"/>
-                </a:solidFill>
-                <a:latin typeface="Arial" pitchFamily="34" charset="0"/>
-                <a:ea typeface="Arial" pitchFamily="34" charset="-122"/>
-                <a:cs typeface="Arial" pitchFamily="34" charset="-120"/>
-              </a:rPr>
-              <a:t>Les pages qui suivent le montrent, dans l'ordre où ces contraintes se présentent aujourd'hui.</a:t>
-            </a:r>
-            <a:endParaRPr lang="en-US" sz="1300" dirty="0"/>
-          </a:p>
-        </p:txBody>
-      </p:sp>
-      <p:sp>
-        <p:nvSpPr>
-          <p:cNvPr id="8" name="Text 5"/>
           <p:cNvSpPr/>
           <p:nvPr/>
         </p:nvSpPr>
@@ -5630,7 +5616,7 @@
             <a:r>
               <a:rPr lang="en-US" sz="900" dirty="0">
                 <a:solidFill>
-                  <a:srgbClr val="5B6475"/>
+                  <a:srgbClr val="575F5C"/>
                 </a:solidFill>
                 <a:latin typeface="Arial" pitchFamily="34" charset="0"/>
                 <a:ea typeface="Arial" pitchFamily="34" charset="-122"/>
@@ -5644,7 +5630,7 @@
       </p:sp>
       <p:sp>
         <p:nvSpPr>
-          <p:cNvPr id="9" name="Text 6"/>
+          <p:cNvPr id="8" name="Text 5"/>
           <p:cNvSpPr/>
           <p:nvPr/>
         </p:nvSpPr>
@@ -5669,7 +5655,7 @@
             <a:r>
               <a:rPr lang="en-US" sz="900" dirty="0">
                 <a:solidFill>
-                  <a:srgbClr val="5B6475"/>
+                  <a:srgbClr val="575F5C"/>
                 </a:solidFill>
                 <a:latin typeface="Arial" pitchFamily="34" charset="0"/>
                 <a:ea typeface="Arial" pitchFamily="34" charset="-122"/>
@@ -5764,7 +5750,7 @@
             <a:r>
               <a:rPr lang="en-US" sz="1600" b="1" dirty="0">
                 <a:solidFill>
-                  <a:srgbClr val="0B0F19"/>
+                  <a:srgbClr val="14181A"/>
                 </a:solidFill>
                 <a:latin typeface="Arial" pitchFamily="34" charset="0"/>
                 <a:ea typeface="Arial" pitchFamily="34" charset="-122"/>
@@ -5803,7 +5789,7 @@
             <a:r>
               <a:rPr lang="en-US" sz="1000" dirty="0">
                 <a:solidFill>
-                  <a:srgbClr val="5B6475"/>
+                  <a:srgbClr val="575F5C"/>
                 </a:solidFill>
                 <a:latin typeface="Arial" pitchFamily="34" charset="0"/>
                 <a:ea typeface="Arial" pitchFamily="34" charset="-122"/>
@@ -5824,17 +5810,17 @@
         <p:spPr>
           <a:xfrm>
             <a:off x="731520" y="877824"/>
-            <a:ext cx="10725912" cy="25603"/>
+            <a:ext cx="10725912" cy="10973"/>
           </a:xfrm>
           <a:prstGeom prst="rect">
             <a:avLst/>
           </a:prstGeom>
           <a:solidFill>
-            <a:srgbClr val="38C9FF"/>
+            <a:srgbClr val="E2E5E1"/>
           </a:solidFill>
           <a:ln w="12700">
             <a:solidFill>
-              <a:srgbClr val="38C9FF"/>
+              <a:srgbClr val="E2E5E1"/>
             </a:solidFill>
             <a:prstDash val="solid"/>
           </a:ln>
@@ -5870,13 +5856,13 @@
             <a:r>
               <a:rPr lang="en-US" sz="2500" b="1" dirty="0">
                 <a:solidFill>
-                  <a:srgbClr val="4636B0"/>
-                </a:solidFill>
-                <a:latin typeface="Arial" pitchFamily="34" charset="0"/>
-                <a:ea typeface="Arial" pitchFamily="34" charset="-122"/>
-                <a:cs typeface="Arial" pitchFamily="34" charset="-120"/>
-              </a:rPr>
-              <a:t>Le chef d’équipe conduit. Ses vendeurs comptent.</a:t>
+                  <a:srgbClr val="14181A"/>
+                </a:solidFill>
+                <a:latin typeface="Arial" pitchFamily="34" charset="0"/>
+                <a:ea typeface="Arial" pitchFamily="34" charset="-122"/>
+                <a:cs typeface="Arial" pitchFamily="34" charset="-120"/>
+              </a:rPr>
+              <a:t>Le chef d’équipe conduit. Ses collaborateurs comptent.</a:t>
             </a:r>
             <a:endParaRPr lang="en-US" sz="2500" dirty="0"/>
           </a:p>
@@ -5912,13 +5898,13 @@
             <a:r>
               <a:rPr lang="en-US" sz="1200" dirty="0">
                 <a:solidFill>
-                  <a:srgbClr val="5B6475"/>
-                </a:solidFill>
-                <a:latin typeface="Arial" pitchFamily="34" charset="0"/>
-                <a:ea typeface="Arial" pitchFamily="34" charset="-122"/>
-                <a:cs typeface="Arial" pitchFamily="34" charset="-120"/>
-              </a:rPr>
-              <a:t>Une application sur les iPhone que vos équipes ont déjà, un tableau de bord pour celui qui pilote, un rapport à la fin. Rien à charger la veille, rien à briefer, aucune flotte à préparer.</a:t>
+                  <a:srgbClr val="575F5C"/>
+                </a:solidFill>
+                <a:latin typeface="Arial" pitchFamily="34" charset="0"/>
+                <a:ea typeface="Arial" pitchFamily="34" charset="-122"/>
+                <a:cs typeface="Arial" pitchFamily="34" charset="-120"/>
+              </a:rPr>
+              <a:t>Une application sur les smartphones que vos équipes ont déjà — iOS comme Android —, un tableau de bord pour celui qui pilote, un rapport à la fin. Rien à charger la veille, rien à briefer, aucune flotte à préparer.</a:t>
             </a:r>
             <a:endParaRPr lang="en-US" sz="1200" dirty="0"/>
           </a:p>
@@ -5954,7 +5940,7 @@
             <a:r>
               <a:rPr lang="en-US" sz="1350" b="1" dirty="0">
                 <a:solidFill>
-                  <a:srgbClr val="4636B0"/>
+                  <a:srgbClr val="14181A"/>
                 </a:solidFill>
                 <a:latin typeface="Arial" pitchFamily="34" charset="0"/>
                 <a:ea typeface="Arial" pitchFamily="34" charset="-122"/>
@@ -5996,7 +5982,7 @@
             <a:r>
               <a:rPr lang="en-US" sz="1100" dirty="0">
                 <a:solidFill>
-                  <a:srgbClr val="3D4556"/>
+                  <a:srgbClr val="3A423F"/>
                 </a:solidFill>
                 <a:latin typeface="Arial" pitchFamily="34" charset="0"/>
                 <a:ea typeface="Arial" pitchFamily="34" charset="-122"/>
@@ -6021,15 +6007,15 @@
           </a:xfrm>
           <a:prstGeom prst="roundRect">
             <a:avLst>
-              <a:gd name="adj" fmla="val 4403"/>
+              <a:gd name="adj" fmla="val 1258"/>
             </a:avLst>
           </a:prstGeom>
           <a:solidFill>
-            <a:srgbClr val="F4F5F9"/>
+            <a:srgbClr val="F2F3F1"/>
           </a:solidFill>
           <a:ln w="12700">
             <a:solidFill>
-              <a:srgbClr val="F4F5F9"/>
+              <a:srgbClr val="F2F3F1"/>
             </a:solidFill>
             <a:prstDash val="solid"/>
           </a:ln>
@@ -6089,13 +6075,13 @@
             <a:r>
               <a:rPr lang="en-US" sz="1350" b="1" dirty="0">
                 <a:solidFill>
-                  <a:srgbClr val="4636B0"/>
-                </a:solidFill>
-                <a:latin typeface="Arial" pitchFamily="34" charset="0"/>
-                <a:ea typeface="Arial" pitchFamily="34" charset="-122"/>
-                <a:cs typeface="Arial" pitchFamily="34" charset="-120"/>
-              </a:rPr>
-              <a:t>Ils comptent au rayon</a:t>
+                  <a:srgbClr val="14181A"/>
+                </a:solidFill>
+                <a:latin typeface="Arial" pitchFamily="34" charset="0"/>
+                <a:ea typeface="Arial" pitchFamily="34" charset="-122"/>
+                <a:cs typeface="Arial" pitchFamily="34" charset="-120"/>
+              </a:rPr>
+              <a:t>Ils comptent au rayon, à la marque, à la référence</a:t>
             </a:r>
             <a:endParaRPr lang="en-US" sz="1350" dirty="0"/>
           </a:p>
@@ -6131,7 +6117,7 @@
             <a:r>
               <a:rPr lang="en-US" sz="1100" dirty="0">
                 <a:solidFill>
-                  <a:srgbClr val="3D4556"/>
+                  <a:srgbClr val="3A423F"/>
                 </a:solidFill>
                 <a:latin typeface="Arial" pitchFamily="34" charset="0"/>
                 <a:ea typeface="Arial" pitchFamily="34" charset="-122"/>
@@ -6156,15 +6142,15 @@
           </a:xfrm>
           <a:prstGeom prst="roundRect">
             <a:avLst>
-              <a:gd name="adj" fmla="val 4403"/>
+              <a:gd name="adj" fmla="val 1258"/>
             </a:avLst>
           </a:prstGeom>
           <a:solidFill>
-            <a:srgbClr val="EEEEFC"/>
+            <a:srgbClr val="E7EDE9"/>
           </a:solidFill>
           <a:ln w="12700">
             <a:solidFill>
-              <a:srgbClr val="EEEEFC"/>
+              <a:srgbClr val="E7EDE9"/>
             </a:solidFill>
             <a:prstDash val="solid"/>
           </a:ln>
@@ -6224,13 +6210,13 @@
             <a:r>
               <a:rPr lang="en-US" sz="1350" b="1" dirty="0">
                 <a:solidFill>
-                  <a:srgbClr val="4636B0"/>
-                </a:solidFill>
-                <a:latin typeface="Arial" pitchFamily="34" charset="0"/>
-                <a:ea typeface="Arial" pitchFamily="34" charset="-122"/>
-                <a:cs typeface="Arial" pitchFamily="34" charset="-120"/>
-              </a:rPr>
-              <a:t>Il audite selon votre règle</a:t>
+                  <a:srgbClr val="14181A"/>
+                </a:solidFill>
+                <a:latin typeface="Arial" pitchFamily="34" charset="0"/>
+                <a:ea typeface="Arial" pitchFamily="34" charset="-122"/>
+                <a:cs typeface="Arial" pitchFamily="34" charset="-120"/>
+              </a:rPr>
+              <a:t>Il audite selon les règles de l’Inventory Control</a:t>
             </a:r>
             <a:endParaRPr lang="en-US" sz="1350" dirty="0"/>
           </a:p>
@@ -6266,13 +6252,13 @@
             <a:r>
               <a:rPr lang="en-US" sz="1100" dirty="0">
                 <a:solidFill>
-                  <a:srgbClr val="3D4556"/>
-                </a:solidFill>
-                <a:latin typeface="Arial" pitchFamily="34" charset="0"/>
-                <a:ea typeface="Arial" pitchFamily="34" charset="-122"/>
-                <a:cs typeface="Arial" pitchFamily="34" charset="-120"/>
-              </a:rPr>
-              <a:t>La deuxième passe se lance du même téléphone, pendant que le comptage continue.</a:t>
+                  <a:srgbClr val="3A423F"/>
+                </a:solidFill>
+                <a:latin typeface="Arial" pitchFamily="34" charset="0"/>
+                <a:ea typeface="Arial" pitchFamily="34" charset="-122"/>
+                <a:cs typeface="Arial" pitchFamily="34" charset="-120"/>
+              </a:rPr>
+              <a:t>L’audit se lance de la même application, pendant que le comptage continue.</a:t>
             </a:r>
             <a:endParaRPr lang="en-US" sz="1100" dirty="0"/>
           </a:p>
@@ -6291,15 +6277,15 @@
           </a:xfrm>
           <a:prstGeom prst="roundRect">
             <a:avLst>
-              <a:gd name="adj" fmla="val 4403"/>
+              <a:gd name="adj" fmla="val 1258"/>
             </a:avLst>
           </a:prstGeom>
           <a:solidFill>
-            <a:srgbClr val="F4F5F9"/>
+            <a:srgbClr val="F2F3F1"/>
           </a:solidFill>
           <a:ln w="12700">
             <a:solidFill>
-              <a:srgbClr val="F4F5F9"/>
+              <a:srgbClr val="F2F3F1"/>
             </a:solidFill>
             <a:prstDash val="solid"/>
           </a:ln>
@@ -6356,7 +6342,7 @@
             <a:r>
               <a:rPr lang="en-US" sz="900" dirty="0">
                 <a:solidFill>
-                  <a:srgbClr val="5B6475"/>
+                  <a:srgbClr val="575F5C"/>
                 </a:solidFill>
                 <a:latin typeface="Arial" pitchFamily="34" charset="0"/>
                 <a:ea typeface="Arial" pitchFamily="34" charset="-122"/>
@@ -6395,7 +6381,7 @@
             <a:r>
               <a:rPr lang="en-US" sz="900" dirty="0">
                 <a:solidFill>
-                  <a:srgbClr val="5B6475"/>
+                  <a:srgbClr val="575F5C"/>
                 </a:solidFill>
                 <a:latin typeface="Arial" pitchFamily="34" charset="0"/>
                 <a:ea typeface="Arial" pitchFamily="34" charset="-122"/>
@@ -6490,7 +6476,7 @@
             <a:r>
               <a:rPr lang="en-US" sz="1600" b="1" dirty="0">
                 <a:solidFill>
-                  <a:srgbClr val="0B0F19"/>
+                  <a:srgbClr val="14181A"/>
                 </a:solidFill>
                 <a:latin typeface="Arial" pitchFamily="34" charset="0"/>
                 <a:ea typeface="Arial" pitchFamily="34" charset="-122"/>
@@ -6529,7 +6515,7 @@
             <a:r>
               <a:rPr lang="en-US" sz="1000" dirty="0">
                 <a:solidFill>
-                  <a:srgbClr val="5B6475"/>
+                  <a:srgbClr val="575F5C"/>
                 </a:solidFill>
                 <a:latin typeface="Arial" pitchFamily="34" charset="0"/>
                 <a:ea typeface="Arial" pitchFamily="34" charset="-122"/>
@@ -6550,17 +6536,17 @@
         <p:spPr>
           <a:xfrm>
             <a:off x="731520" y="877824"/>
-            <a:ext cx="10725912" cy="25603"/>
+            <a:ext cx="10725912" cy="10973"/>
           </a:xfrm>
           <a:prstGeom prst="rect">
             <a:avLst/>
           </a:prstGeom>
           <a:solidFill>
-            <a:srgbClr val="38C9FF"/>
+            <a:srgbClr val="E2E5E1"/>
           </a:solidFill>
           <a:ln w="12700">
             <a:solidFill>
-              <a:srgbClr val="38C9FF"/>
+              <a:srgbClr val="E2E5E1"/>
             </a:solidFill>
             <a:prstDash val="solid"/>
           </a:ln>
@@ -6596,13 +6582,13 @@
             <a:r>
               <a:rPr lang="en-US" sz="2500" b="1" dirty="0">
                 <a:solidFill>
-                  <a:srgbClr val="4636B0"/>
-                </a:solidFill>
-                <a:latin typeface="Arial" pitchFamily="34" charset="0"/>
-                <a:ea typeface="Arial" pitchFamily="34" charset="-122"/>
-                <a:cs typeface="Arial" pitchFamily="34" charset="-120"/>
-              </a:rPr>
-              <a:t>Vous fixez la règle d'audit. Le floor l'applique.</a:t>
+                  <a:srgbClr val="14181A"/>
+                </a:solidFill>
+                <a:latin typeface="Arial" pitchFamily="34" charset="0"/>
+                <a:ea typeface="Arial" pitchFamily="34" charset="-122"/>
+                <a:cs typeface="Arial" pitchFamily="34" charset="-120"/>
+              </a:rPr>
+              <a:t>L’Inventory Control fixe la règle d'audit. Les équipes l'appliquent.</a:t>
             </a:r>
             <a:endParaRPr lang="en-US" sz="2500" dirty="0"/>
           </a:p>
@@ -6638,13 +6624,13 @@
             <a:r>
               <a:rPr lang="en-US" sz="1250" dirty="0">
                 <a:solidFill>
-                  <a:srgbClr val="3D4556"/>
-                </a:solidFill>
-                <a:latin typeface="Arial" pitchFamily="34" charset="0"/>
-                <a:ea typeface="Arial" pitchFamily="34" charset="-122"/>
-                <a:cs typeface="Arial" pitchFamily="34" charset="-120"/>
-              </a:rPr>
-              <a:t>La règle d'audit reste la vôtre — 100 % sur l'horlogerie et la joaillerie, 30 % au moins ailleurs. Le désaccord entre les deux comptages ne s'attend plus dans un fichier : ils s'affichent côte à côte, l'écart en pièces et en valeur d'achat, et il se tranche pendant que le compteur est encore devant l'article. L'Inventory Control ouvre la même vue sur n'importe quel inventaire en cours, sans avoir à s'y tenir.</a:t>
+                  <a:srgbClr val="3A423F"/>
+                </a:solidFill>
+                <a:latin typeface="Arial" pitchFamily="34" charset="0"/>
+                <a:ea typeface="Arial" pitchFamily="34" charset="-122"/>
+                <a:cs typeface="Arial" pitchFamily="34" charset="-120"/>
+              </a:rPr>
+              <a:t>100 % sur l'horlogerie et la joaillerie, 30 % au moins ailleurs. Le désaccord entre les deux comptages ne s'attend plus : ils s'affichent côte à côte, l'écart d'audit en pièces et en valeur d'achat, et il se tranche pendant que le compteur est encore devant l'article. L'Inventory Control ouvre la même vue sur n'importe quel inventaire en cours.</a:t>
             </a:r>
             <a:endParaRPr lang="en-US" sz="1250" dirty="0"/>
           </a:p>
@@ -6677,7 +6663,7 @@
             <a:r>
               <a:rPr lang="en-US" sz="1250" b="1" dirty="0">
                 <a:solidFill>
-                  <a:srgbClr val="0B0F19"/>
+                  <a:srgbClr val="14181A"/>
                 </a:solidFill>
                 <a:latin typeface="Arial" pitchFamily="34" charset="0"/>
                 <a:ea typeface="Arial" pitchFamily="34" charset="-122"/>
@@ -6716,7 +6702,7 @@
             <a:r>
               <a:rPr lang="en-US" sz="1250" b="1" dirty="0">
                 <a:solidFill>
-                  <a:srgbClr val="0B0F19"/>
+                  <a:srgbClr val="14181A"/>
                 </a:solidFill>
                 <a:latin typeface="Arial" pitchFamily="34" charset="0"/>
                 <a:ea typeface="Arial" pitchFamily="34" charset="-122"/>
@@ -6741,7 +6727,7 @@
           </a:xfrm>
           <a:prstGeom prst="roundRect">
             <a:avLst>
-              <a:gd name="adj" fmla="val 3552"/>
+              <a:gd name="adj" fmla="val 1776"/>
             </a:avLst>
           </a:prstGeom>
           <a:solidFill>
@@ -6749,7 +6735,7 @@
           </a:solidFill>
           <a:ln w="12700">
             <a:solidFill>
-              <a:srgbClr val="E3E6EE"/>
+              <a:srgbClr val="E2E5E1"/>
             </a:solidFill>
             <a:prstDash val="solid"/>
           </a:ln>
@@ -6792,7 +6778,7 @@
           </a:xfrm>
           <a:prstGeom prst="roundRect">
             <a:avLst>
-              <a:gd name="adj" fmla="val 3516"/>
+              <a:gd name="adj" fmla="val 1758"/>
             </a:avLst>
           </a:prstGeom>
           <a:solidFill>
@@ -6800,7 +6786,7 @@
           </a:solidFill>
           <a:ln w="12700">
             <a:solidFill>
-              <a:srgbClr val="E3E6EE"/>
+              <a:srgbClr val="E2E5E1"/>
             </a:solidFill>
             <a:prstDash val="solid"/>
           </a:ln>
@@ -6857,7 +6843,7 @@
             <a:r>
               <a:rPr lang="en-US" sz="1000" i="1" dirty="0">
                 <a:solidFill>
-                  <a:srgbClr val="5B6475"/>
+                  <a:srgbClr val="575F5C"/>
                 </a:solidFill>
                 <a:latin typeface="Arial" pitchFamily="34" charset="0"/>
                 <a:ea typeface="Arial" pitchFamily="34" charset="-122"/>
@@ -6896,7 +6882,7 @@
             <a:r>
               <a:rPr lang="en-US" sz="1000" i="1" dirty="0">
                 <a:solidFill>
-                  <a:srgbClr val="5B6475"/>
+                  <a:srgbClr val="575F5C"/>
                 </a:solidFill>
                 <a:latin typeface="Arial" pitchFamily="34" charset="0"/>
                 <a:ea typeface="Arial" pitchFamily="34" charset="-122"/>
@@ -6935,7 +6921,7 @@
             <a:r>
               <a:rPr lang="en-US" sz="900" dirty="0">
                 <a:solidFill>
-                  <a:srgbClr val="5B6475"/>
+                  <a:srgbClr val="575F5C"/>
                 </a:solidFill>
                 <a:latin typeface="Arial" pitchFamily="34" charset="0"/>
                 <a:ea typeface="Arial" pitchFamily="34" charset="-122"/>
@@ -6974,7 +6960,7 @@
             <a:r>
               <a:rPr lang="en-US" sz="900" dirty="0">
                 <a:solidFill>
-                  <a:srgbClr val="5B6475"/>
+                  <a:srgbClr val="575F5C"/>
                 </a:solidFill>
                 <a:latin typeface="Arial" pitchFamily="34" charset="0"/>
                 <a:ea typeface="Arial" pitchFamily="34" charset="-122"/>
@@ -7069,7 +7055,7 @@
             <a:r>
               <a:rPr lang="en-US" sz="1600" b="1" dirty="0">
                 <a:solidFill>
-                  <a:srgbClr val="0B0F19"/>
+                  <a:srgbClr val="14181A"/>
                 </a:solidFill>
                 <a:latin typeface="Arial" pitchFamily="34" charset="0"/>
                 <a:ea typeface="Arial" pitchFamily="34" charset="-122"/>
@@ -7108,7 +7094,7 @@
             <a:r>
               <a:rPr lang="en-US" sz="1000" dirty="0">
                 <a:solidFill>
-                  <a:srgbClr val="5B6475"/>
+                  <a:srgbClr val="575F5C"/>
                 </a:solidFill>
                 <a:latin typeface="Arial" pitchFamily="34" charset="0"/>
                 <a:ea typeface="Arial" pitchFamily="34" charset="-122"/>
@@ -7129,17 +7115,17 @@
         <p:spPr>
           <a:xfrm>
             <a:off x="731520" y="877824"/>
-            <a:ext cx="10725912" cy="25603"/>
+            <a:ext cx="10725912" cy="10973"/>
           </a:xfrm>
           <a:prstGeom prst="rect">
             <a:avLst/>
           </a:prstGeom>
           <a:solidFill>
-            <a:srgbClr val="38C9FF"/>
+            <a:srgbClr val="E2E5E1"/>
           </a:solidFill>
           <a:ln w="12700">
             <a:solidFill>
-              <a:srgbClr val="38C9FF"/>
+              <a:srgbClr val="E2E5E1"/>
             </a:solidFill>
             <a:prstDash val="solid"/>
           </a:ln>
@@ -7175,7 +7161,7 @@
             <a:r>
               <a:rPr lang="en-US" sz="2600" b="1" dirty="0">
                 <a:solidFill>
-                  <a:srgbClr val="4636B0"/>
+                  <a:srgbClr val="14181A"/>
                 </a:solidFill>
                 <a:latin typeface="Arial" pitchFamily="34" charset="0"/>
                 <a:ea typeface="Arial" pitchFamily="34" charset="-122"/>
@@ -7217,13 +7203,13 @@
             <a:r>
               <a:rPr lang="en-US" sz="1250" dirty="0">
                 <a:solidFill>
-                  <a:srgbClr val="3D4556"/>
-                </a:solidFill>
-                <a:latin typeface="Arial" pitchFamily="34" charset="0"/>
-                <a:ea typeface="Arial" pitchFamily="34" charset="-122"/>
-                <a:cs typeface="Arial" pitchFamily="34" charset="-120"/>
-              </a:rPr>
-              <a:t>Il part du stock théorique, pas seulement de ce qui a été scanné : un article attendu et jamais trouvé y figure, avec son manque. Le recoupement n'est plus à faire.</a:t>
+                  <a:srgbClr val="3A423F"/>
+                </a:solidFill>
+                <a:latin typeface="Arial" pitchFamily="34" charset="0"/>
+                <a:ea typeface="Arial" pitchFamily="34" charset="-122"/>
+                <a:cs typeface="Arial" pitchFamily="34" charset="-120"/>
+              </a:rPr>
+              <a:t>Il part du stock théorique, pas seulement de ce qui a été scanné : un article attendu et jamais trouvé y figure, avec son manque. Le recoupement n'est plus à faire : il se télécharge.</a:t>
             </a:r>
             <a:endParaRPr lang="en-US" sz="1250" dirty="0"/>
           </a:p>
@@ -7259,7 +7245,7 @@
             <a:r>
               <a:rPr lang="en-US" sz="1250" dirty="0">
                 <a:solidFill>
-                  <a:srgbClr val="3D4556"/>
+                  <a:srgbClr val="3A423F"/>
                 </a:solidFill>
                 <a:latin typeface="Arial" pitchFamily="34" charset="0"/>
                 <a:ea typeface="Arial" pitchFamily="34" charset="-122"/>
@@ -7284,7 +7270,7 @@
           </a:xfrm>
           <a:prstGeom prst="roundRect">
             <a:avLst>
-              <a:gd name="adj" fmla="val 1717"/>
+              <a:gd name="adj" fmla="val 859"/>
             </a:avLst>
           </a:prstGeom>
           <a:solidFill>
@@ -7292,7 +7278,7 @@
           </a:solidFill>
           <a:ln w="12700">
             <a:solidFill>
-              <a:srgbClr val="E3E6EE"/>
+              <a:srgbClr val="E2E5E1"/>
             </a:solidFill>
             <a:prstDash val="solid"/>
           </a:ln>
@@ -7349,7 +7335,7 @@
             <a:r>
               <a:rPr lang="en-US" sz="1000" i="1" dirty="0">
                 <a:solidFill>
-                  <a:srgbClr val="5B6475"/>
+                  <a:srgbClr val="575F5C"/>
                 </a:solidFill>
                 <a:latin typeface="Arial" pitchFamily="34" charset="0"/>
                 <a:ea typeface="Arial" pitchFamily="34" charset="-122"/>
@@ -7388,7 +7374,7 @@
             <a:r>
               <a:rPr lang="en-US" sz="900" dirty="0">
                 <a:solidFill>
-                  <a:srgbClr val="5B6475"/>
+                  <a:srgbClr val="575F5C"/>
                 </a:solidFill>
                 <a:latin typeface="Arial" pitchFamily="34" charset="0"/>
                 <a:ea typeface="Arial" pitchFamily="34" charset="-122"/>
@@ -7427,7 +7413,7 @@
             <a:r>
               <a:rPr lang="en-US" sz="900" dirty="0">
                 <a:solidFill>
-                  <a:srgbClr val="5B6475"/>
+                  <a:srgbClr val="575F5C"/>
                 </a:solidFill>
                 <a:latin typeface="Arial" pitchFamily="34" charset="0"/>
                 <a:ea typeface="Arial" pitchFamily="34" charset="-122"/>
@@ -7522,7 +7508,7 @@
             <a:r>
               <a:rPr lang="en-US" sz="1600" b="1" dirty="0">
                 <a:solidFill>
-                  <a:srgbClr val="0B0F19"/>
+                  <a:srgbClr val="14181A"/>
                 </a:solidFill>
                 <a:latin typeface="Arial" pitchFamily="34" charset="0"/>
                 <a:ea typeface="Arial" pitchFamily="34" charset="-122"/>
@@ -7561,7 +7547,7 @@
             <a:r>
               <a:rPr lang="en-US" sz="1000" dirty="0">
                 <a:solidFill>
-                  <a:srgbClr val="5B6475"/>
+                  <a:srgbClr val="575F5C"/>
                 </a:solidFill>
                 <a:latin typeface="Arial" pitchFamily="34" charset="0"/>
                 <a:ea typeface="Arial" pitchFamily="34" charset="-122"/>
@@ -7582,17 +7568,17 @@
         <p:spPr>
           <a:xfrm>
             <a:off x="731520" y="877824"/>
-            <a:ext cx="10725912" cy="25603"/>
+            <a:ext cx="10725912" cy="10973"/>
           </a:xfrm>
           <a:prstGeom prst="rect">
             <a:avLst/>
           </a:prstGeom>
           <a:solidFill>
-            <a:srgbClr val="38C9FF"/>
+            <a:srgbClr val="E2E5E1"/>
           </a:solidFill>
           <a:ln w="12700">
             <a:solidFill>
-              <a:srgbClr val="38C9FF"/>
+              <a:srgbClr val="E2E5E1"/>
             </a:solidFill>
             <a:prstDash val="solid"/>
           </a:ln>
@@ -7628,13 +7614,13 @@
             <a:r>
               <a:rPr lang="en-US" sz="2500" b="1" dirty="0">
                 <a:solidFill>
-                  <a:srgbClr val="4636B0"/>
-                </a:solidFill>
-                <a:latin typeface="Arial" pitchFamily="34" charset="0"/>
-                <a:ea typeface="Arial" pitchFamily="34" charset="-122"/>
-                <a:cs typeface="Arial" pitchFamily="34" charset="-120"/>
-              </a:rPr>
-              <a:t>Votre projet d'inventaire aléatoire, prêt à fonctionner.</a:t>
+                  <a:srgbClr val="14181A"/>
+                </a:solidFill>
+                <a:latin typeface="Arial" pitchFamily="34" charset="0"/>
+                <a:ea typeface="Arial" pitchFamily="34" charset="-122"/>
+                <a:cs typeface="Arial" pitchFamily="34" charset="-120"/>
+              </a:rPr>
+              <a:t>L'inventaire aléatoire, prêt à fonctionner.</a:t>
             </a:r>
             <a:endParaRPr lang="en-US" sz="2500" dirty="0"/>
           </a:p>
@@ -7670,55 +7656,21 @@
             <a:r>
               <a:rPr lang="en-US" sz="1200" i="1" dirty="0">
                 <a:solidFill>
-                  <a:srgbClr val="5B6475"/>
-                </a:solidFill>
-                <a:latin typeface="Arial" pitchFamily="34" charset="0"/>
-                <a:ea typeface="Arial" pitchFamily="34" charset="-122"/>
-                <a:cs typeface="Arial" pitchFamily="34" charset="-120"/>
-              </a:rPr>
-              <a:t>Vous en avez posé les objectifs : identifier les vols, tester la rigueur des procédures, garantir que chaque responsable maîtrise son stock. Confier le comptage au floor, c'est exactement cela.</a:t>
+                  <a:srgbClr val="575F5C"/>
+                </a:solidFill>
+                <a:latin typeface="Arial" pitchFamily="34" charset="0"/>
+                <a:ea typeface="Arial" pitchFamily="34" charset="-122"/>
+                <a:cs typeface="Arial" pitchFamily="34" charset="-120"/>
+              </a:rPr>
+              <a:t>L’Inventory Control en a posé les objectifs : identifier les vols, tester la rigueur des procédures, garantir que chaque responsable maîtrise son stock. Confier le comptage au floor, c'est exactement cela.</a:t>
             </a:r>
             <a:endParaRPr lang="en-US" sz="1200" dirty="0"/>
           </a:p>
         </p:txBody>
-      </p:sp>
-      <p:sp>
-        <p:nvSpPr>
-          <p:cNvPr id="8" name="Shape 5"/>
-          <p:cNvSpPr/>
-          <p:nvPr/>
-        </p:nvSpPr>
-        <p:spPr>
-          <a:xfrm>
-            <a:off x="9725171" y="2377440"/>
-            <a:ext cx="1732261" cy="3657600"/>
-          </a:xfrm>
-          <a:prstGeom prst="roundRect">
-            <a:avLst>
-              <a:gd name="adj" fmla="val 15836"/>
-            </a:avLst>
-          </a:prstGeom>
-          <a:solidFill>
-            <a:srgbClr val="FFFFFF"/>
-          </a:solidFill>
-          <a:ln w="12700">
-            <a:solidFill>
-              <a:srgbClr val="FFFFFF"/>
-            </a:solidFill>
-            <a:prstDash val="solid"/>
-          </a:ln>
-          <a:effectLst>
-            <a:outerShdw sx="100000" sy="100000" kx="0" ky="0" algn="bl" rotWithShape="0" blurRad="177800" dist="38100" dir="5400000">
-              <a:srgbClr val="0B0F19">
-                <a:alpha val="18000"/>
-              </a:srgbClr>
-            </a:outerShdw>
-          </a:effectLst>
-        </p:spPr>
       </p:sp>
       <p:pic>
         <p:nvPicPr>
-          <p:cNvPr id="9" name="Image 1" descr="preencoded.png">    </p:cNvPr>
+          <p:cNvPr id="8" name="Image 1" descr="preencoded.png">    </p:cNvPr>
           <p:cNvPicPr>
             <a:picLocks noChangeAspect="1"/>
           </p:cNvPicPr>
@@ -7742,7 +7694,7 @@
       </p:pic>
       <p:sp>
         <p:nvSpPr>
-          <p:cNvPr id="10" name="Text 6"/>
+          <p:cNvPr id="9" name="Text 5"/>
           <p:cNvSpPr/>
           <p:nvPr/>
         </p:nvSpPr>
@@ -7767,7 +7719,7 @@
             <a:r>
               <a:rPr lang="en-US" sz="1000" i="1" dirty="0">
                 <a:solidFill>
-                  <a:srgbClr val="5B6475"/>
+                  <a:srgbClr val="575F5C"/>
                 </a:solidFill>
                 <a:latin typeface="Arial" pitchFamily="34" charset="0"/>
                 <a:ea typeface="Arial" pitchFamily="34" charset="-122"/>
@@ -7781,7 +7733,7 @@
       </p:sp>
       <p:sp>
         <p:nvSpPr>
-          <p:cNvPr id="11" name="Text 7"/>
+          <p:cNvPr id="10" name="Text 6"/>
           <p:cNvSpPr/>
           <p:nvPr/>
         </p:nvSpPr>
@@ -7812,7 +7764,7 @@
             <a:r>
               <a:rPr lang="en-US" sz="1300" b="1" dirty="0">
                 <a:solidFill>
-                  <a:srgbClr val="0B0F19"/>
+                  <a:srgbClr val="14181A"/>
                 </a:solidFill>
                 <a:latin typeface="Arial" pitchFamily="34" charset="0"/>
                 <a:ea typeface="Arial" pitchFamily="34" charset="-122"/>
@@ -7832,13 +7784,13 @@
             <a:r>
               <a:rPr lang="en-US" sz="1300" dirty="0">
                 <a:solidFill>
-                  <a:srgbClr val="3D4556"/>
-                </a:solidFill>
-                <a:latin typeface="Arial" pitchFamily="34" charset="0"/>
-                <a:ea typeface="Arial" pitchFamily="34" charset="-122"/>
-                <a:cs typeface="Arial" pitchFamily="34" charset="-120"/>
-              </a:rPr>
-              <a:t>Elle reste chez vous : variances négatives répétées, articles sensibles, slow movers. Les rapports des inventaires précédents donnent les chiffres d'où cette sélection se tire.</a:t>
+                  <a:srgbClr val="3A423F"/>
+                </a:solidFill>
+                <a:latin typeface="Arial" pitchFamily="34" charset="0"/>
+                <a:ea typeface="Arial" pitchFamily="34" charset="-122"/>
+                <a:cs typeface="Arial" pitchFamily="34" charset="-120"/>
+              </a:rPr>
+              <a:t>Elle reste du côté de l’Inventory Control, ou du superviseur curieux : variances négatives répétées, articles sensibles, slow movers.</a:t>
             </a:r>
             <a:endParaRPr lang="en-US" sz="1300" dirty="0"/>
           </a:p>
@@ -7855,7 +7807,7 @@
             <a:r>
               <a:rPr lang="en-US" sz="1300" b="1" dirty="0">
                 <a:solidFill>
-                  <a:srgbClr val="0B0F19"/>
+                  <a:srgbClr val="14181A"/>
                 </a:solidFill>
                 <a:latin typeface="Arial" pitchFamily="34" charset="0"/>
                 <a:ea typeface="Arial" pitchFamily="34" charset="-122"/>
@@ -7875,13 +7827,13 @@
             <a:r>
               <a:rPr lang="en-US" sz="1300" dirty="0">
                 <a:solidFill>
-                  <a:srgbClr val="3D4556"/>
-                </a:solidFill>
-                <a:latin typeface="Arial" pitchFamily="34" charset="0"/>
-                <a:ea typeface="Arial" pitchFamily="34" charset="-122"/>
-                <a:cs typeface="Arial" pitchFamily="34" charset="-120"/>
-              </a:rPr>
-              <a:t>Un inventaire ciblé se crée en quelques minutes — une marque, un rayon, une liste d'articles — le jour même s'il le faut. Les équipes concernées sont invitées depuis l'outil.</a:t>
+                  <a:srgbClr val="3A423F"/>
+                </a:solidFill>
+                <a:latin typeface="Arial" pitchFamily="34" charset="0"/>
+                <a:ea typeface="Arial" pitchFamily="34" charset="-122"/>
+                <a:cs typeface="Arial" pitchFamily="34" charset="-120"/>
+              </a:rPr>
+              <a:t>Un inventaire ciblé se crée en quelques minutes — une marque, un rayon, une liste d'articles — le jour même s'il le faut. Les équipes concernées sont invitées depuis Quantinvo.</a:t>
             </a:r>
             <a:endParaRPr lang="en-US" sz="1300" dirty="0"/>
           </a:p>
@@ -7898,7 +7850,7 @@
             <a:r>
               <a:rPr lang="en-US" sz="1300" b="1" dirty="0">
                 <a:solidFill>
-                  <a:srgbClr val="0B0F19"/>
+                  <a:srgbClr val="14181A"/>
                 </a:solidFill>
                 <a:latin typeface="Arial" pitchFamily="34" charset="0"/>
                 <a:ea typeface="Arial" pitchFamily="34" charset="-122"/>
@@ -7918,7 +7870,7 @@
             <a:r>
               <a:rPr lang="en-US" sz="1300" dirty="0">
                 <a:solidFill>
-                  <a:srgbClr val="3D4556"/>
+                  <a:srgbClr val="3A423F"/>
                 </a:solidFill>
                 <a:latin typeface="Arial" pitchFamily="34" charset="0"/>
                 <a:ea typeface="Arial" pitchFamily="34" charset="-122"/>
@@ -7941,7 +7893,7 @@
             <a:r>
               <a:rPr lang="en-US" sz="1300" b="1" dirty="0">
                 <a:solidFill>
-                  <a:srgbClr val="0B0F19"/>
+                  <a:srgbClr val="14181A"/>
                 </a:solidFill>
                 <a:latin typeface="Arial" pitchFamily="34" charset="0"/>
                 <a:ea typeface="Arial" pitchFamily="34" charset="-122"/>
@@ -7961,7 +7913,7 @@
             <a:r>
               <a:rPr lang="en-US" sz="1300" dirty="0">
                 <a:solidFill>
-                  <a:srgbClr val="3D4556"/>
+                  <a:srgbClr val="3A423F"/>
                 </a:solidFill>
                 <a:latin typeface="Arial" pitchFamily="34" charset="0"/>
                 <a:ea typeface="Arial" pitchFamily="34" charset="-122"/>
@@ -7975,7 +7927,7 @@
       </p:sp>
       <p:sp>
         <p:nvSpPr>
-          <p:cNvPr id="12" name="Text 8"/>
+          <p:cNvPr id="11" name="Text 7"/>
           <p:cNvSpPr/>
           <p:nvPr/>
         </p:nvSpPr>
@@ -8000,7 +7952,7 @@
             <a:r>
               <a:rPr lang="en-US" sz="900" dirty="0">
                 <a:solidFill>
-                  <a:srgbClr val="5B6475"/>
+                  <a:srgbClr val="575F5C"/>
                 </a:solidFill>
                 <a:latin typeface="Arial" pitchFamily="34" charset="0"/>
                 <a:ea typeface="Arial" pitchFamily="34" charset="-122"/>
@@ -8014,7 +7966,7 @@
       </p:sp>
       <p:sp>
         <p:nvSpPr>
-          <p:cNvPr id="13" name="Text 9"/>
+          <p:cNvPr id="12" name="Text 8"/>
           <p:cNvSpPr/>
           <p:nvPr/>
         </p:nvSpPr>
@@ -8039,7 +7991,7 @@
             <a:r>
               <a:rPr lang="en-US" sz="900" dirty="0">
                 <a:solidFill>
-                  <a:srgbClr val="5B6475"/>
+                  <a:srgbClr val="575F5C"/>
                 </a:solidFill>
                 <a:latin typeface="Arial" pitchFamily="34" charset="0"/>
                 <a:ea typeface="Arial" pitchFamily="34" charset="-122"/>
